--- a/downloads/presentations/modules/anl-330.pptx
+++ b/downloads/presentations/modules/anl-330.pptx
@@ -614,7 +614,8 @@
             <a:r>
               <a:rPr lang="en-US" dirty="0"/>
               <a:t>Technical and Operational Deep Dive
-Equity evaluation should lead to action. Mitigations may include changing thresholds, improving data collection, adding human review, limiting the intended use, creating separate workflows, improving language access, consulting community partners, adding uncertainty warnings, or declining to deploy the model. Equity monitoring should continue after launch because data patterns and workflow use can change.</a:t>
+Equity evaluation should lead to action. Mitigations may include changing thresholds, improving data collection, adding human review, limiting the intended use, creating separate workflows, improving language access, consulting community partners, adding uncertainty warnings, or declining to deploy the model. Equity monitoring should continue after launch because data patterns and workflow use can change.
+Application guidance: Identify what could go wrong, who could be affected, what safeguards are needed, and what evidence should be reviewed before use expands.</a:t>
             </a:r>
             <a:endParaRPr lang="en-US" dirty="0"/>
           </a:p>
@@ -705,7 +706,8 @@
               <a:t>Risks, Failure Modes, and Guardrails
 Risks and failure modes include the following:
 Relying on average performance while ignoring subgroup harms.
-Using datasets that underrepresent communities with limited healthcare access.</a:t>
+Using datasets that underrepresent communities with limited healthcare access.
+Application guidance: Identify what could go wrong, who could be affected, what safeguards are needed, and what evidence should be reviewed before use expands.</a:t>
             </a:r>
             <a:endParaRPr lang="en-US" dirty="0"/>
           </a:p>
@@ -796,7 +798,8 @@
               <a:t>Risks, Failure Modes, and Guardrails
 Treating missing data as neutral when missingness reflects structural inequities.
 Using AI prioritization to allocate scarce resources without equity review.
-Failing to monitor equity impacts after deployment.</a:t>
+Failing to monitor equity impacts after deployment.
+Application guidance: Identify what could go wrong, who could be affected, what safeguards are needed, and what evidence should be reviewed before use expands.</a:t>
             </a:r>
             <a:endParaRPr lang="en-US" dirty="0"/>
           </a:p>
@@ -887,7 +890,8 @@
               <a:t>Risks, Failure Modes, and Guardrails
 Recommended guardrails include the following:
 Require equity evaluation for AI uses that affect prioritization, eligibility, outreach, response, or public communication.
-Assess representativeness and missingness before model use.</a:t>
+Assess representativeness and missingness before model use.
+Application guidance: Identify what could go wrong, who could be affected, what safeguards are needed, and what evidence should be reviewed before use expands.</a:t>
             </a:r>
             <a:endParaRPr lang="en-US" dirty="0"/>
           </a:p>
@@ -978,7 +982,8 @@
               <a:t>Risks, Failure Modes, and Guardrails
 Measure subgroup performance where feasible and document limitations where not feasible.
 Include community, equity, and program reviewers in governance decisions.
-Monitor equity indicators and user overrides after deployment.</a:t>
+Monitor equity indicators and user overrides after deployment.
+Application guidance: Identify what could go wrong, who could be affected, what safeguards are needed, and what evidence should be reviewed before use expands.</a:t>
             </a:r>
             <a:endParaRPr lang="en-US" dirty="0"/>
           </a:p>
@@ -1069,7 +1074,8 @@
               <a:t>Reflection Questions
 Where does this topic appear in your agency, program, or workflow?
 Which staff roles would need to understand or apply this concept before AI use is approved?
-What could go wrong if this topic is not addressed before implementation?</a:t>
+What could go wrong if this topic is not addressed before implementation?
+Application guidance: Identify what could go wrong, who could be affected, what safeguards are needed, and what evidence should be reviewed before use expands.</a:t>
             </a:r>
             <a:endParaRPr lang="en-US" dirty="0"/>
           </a:p>
@@ -1159,7 +1165,8 @@
               <a:rPr lang="en-US" dirty="0"/>
               <a:t>Reflection Questions
 What evidence would governance, leadership, or operations staff need before moving forward?
-Which policy, data, equity, privacy, security, or workflow questions remain unresolved?</a:t>
+Which policy, data, equity, privacy, security, or workflow questions remain unresolved?
+Application guidance: Identify what could go wrong, who could be affected, what safeguards are needed, and what evidence should be reviewed before use expands.</a:t>
             </a:r>
             <a:endParaRPr lang="en-US" dirty="0"/>
           </a:p>
@@ -1248,7 +1255,8 @@
             <a:r>
               <a:rPr lang="en-US" dirty="0"/>
               <a:t>Practical Exercise
-Create an equity evaluation plan for one AI model or AI-supported workflow. Include intended use, affected populations, relevant subgroups, data representativeness concerns, missingness concerns, subgroup performance measures, potential harms, mitigation options, monitoring indicators, and decision criteria.</a:t>
+Create an equity evaluation plan for one AI model or AI-supported workflow. Include intended use, affected populations, relevant subgroups, data representativeness concerns, missingness concerns, subgroup performance measures, potential harms, mitigation options, monitoring indicators, and decision criteria.
+Application guidance: Use the assignment to test whether you can explain the concept, apply it to a realistic public health situation, and identify what would need review before the work moves forward.</a:t>
             </a:r>
             <a:endParaRPr lang="en-US" dirty="0"/>
           </a:p>
@@ -1339,7 +1347,8 @@
               <a:t>Expected Artifact or Evidence
 Equity evaluation plan
 Subgroup and data representativeness review
-Potential harm and mitigation table</a:t>
+Potential harm and mitigation table
+Application guidance: Identify what could go wrong, who could be affected, what safeguards are needed, and what evidence should be reviewed before use expands.</a:t>
             </a:r>
             <a:endParaRPr lang="en-US" dirty="0"/>
           </a:p>
@@ -1429,7 +1438,8 @@
               <a:rPr lang="en-US" dirty="0"/>
               <a:t>Expected Artifact or Evidence
 Equity monitoring indicators
-Governance recommendation</a:t>
+Governance recommendation
+Application guidance: Identify what could go wrong, who could be affected, what safeguards are needed, and what evidence should be reviewed before use expands.</a:t>
             </a:r>
             <a:endParaRPr lang="en-US" dirty="0"/>
           </a:p>
@@ -1614,7 +1624,8 @@
 Subgroup and data representativeness review
 Potential harm and mitigation table
 Equity monitoring indicators
-Governance recommendation</a:t>
+Governance recommendation
+Application guidance: Use the assignment to test whether you can explain the concept, apply it to a realistic public health situation, and identify what would need review before the work moves forward.</a:t>
             </a:r>
             <a:endParaRPr lang="en-US" dirty="0"/>
           </a:p>
@@ -1707,7 +1718,8 @@
 2. What is measurement bias?
 3. Which use most clearly requires equity evaluation?
 4. What should happen if subgroup performance is poor for a population affected by the workflow?
-5. What is strong completion evidence?</a:t>
+5. What is strong completion evidence?
+Application guidance: Use the assignment to test whether you can explain the concept, apply it to a realistic public health situation, and identify what would need review before the work moves forward.</a:t>
             </a:r>
             <a:endParaRPr lang="en-US" dirty="0"/>
           </a:p>
@@ -1800,7 +1812,8 @@
 NIST Generative AI Profile: https://www.nist.gov/publications/artificial-intelligence-risk-management-framework-generative-artificial-intelligence
 CDC Public Health Data Strategy and Data Modernization resources: https://www.cdc.gov/public-health-data-strategy/php/about/index.html
 OWASP guidance for LLM application security
-Agency policies for privacy, cybersecurity, records, procurement, accessibility, and public communications</a:t>
+Agency policies for privacy, cybersecurity, records, procurement, accessibility, and public communications
+Application guidance: Identify what could go wrong, who could be affected, what safeguards are needed, and what evidence should be reviewed before use expands.</a:t>
             </a:r>
             <a:endParaRPr lang="en-US" dirty="0"/>
           </a:p>
@@ -1889,7 +1902,8 @@
             <a:r>
               <a:rPr lang="en-US" dirty="0"/>
               <a:t>References and Resources
-Relevant public health program SOPs, data governance documentation, and implementation plans</a:t>
+Relevant public health program SOPs, data governance documentation, and implementation plans
+Application guidance: Identify what could go wrong, who could be affected, what safeguards are needed, and what evidence should be reviewed before use expands.</a:t>
             </a:r>
             <a:endParaRPr lang="en-US" dirty="0"/>
           </a:p>
@@ -2168,7 +2182,8 @@
 Identify relevant subgroups and contextual factors for equity evaluation in public health.
 Assess data representativeness, missingness, and measurement bias before model use.
 Define subgroup performance measures and review thresholds for AI-supported workflows.
-Produce an equity evaluation plan for a model or AI-supported workflow.</a:t>
+Produce an equity evaluation plan for a model or AI-supported workflow.
+Application guidance: Use the assignment to test whether you can explain the concept, apply it to a realistic public health situation, and identify what would need review before the work moves forward.</a:t>
             </a:r>
             <a:endParaRPr lang="en-US" dirty="0"/>
           </a:p>
@@ -2259,7 +2274,8 @@
               <a:t>Module Overview
 Equity evaluation examines whether an AI model performs differently across populations, places, languages, programs, or service contexts in ways that could create or worsen public health inequities. Public health agencies have a responsibility to evaluate not only average model performance but also who benefits, who may be missed, and who may be harmed. This is especially important when AI is used to prioritize cases, allocate services, detect risk, summarize records, or guide outreach.
 This module teaches learners how to evaluate AI models and AI-supported outputs through an equity lens. It emphasizes subgroup performance, missingness, representativeness, access, language, disability, rurality, socioeconomic context, and public health impact. The goal is to help agencies identify equity risks before deployment and monitor them after launch.
-Equity evaluation is not a separate ethical add-on. It is a technical and operational requirement for responsible public health AI. A model that performs well overall may still fail for groups that are underrepresented, incorrectly coded, less connected to healthcare systems, or affected by structural barriers.</a:t>
+Equity evaluation is not a separate ethical add-on. It is a technical and operational requirement for responsible public health AI. A model that performs well overall may still fail for groups that are underrepresented, incorrectly coded, less connected to healthcare systems, or affected by structural barriers.
+Application guidance: Identify what could go wrong, who could be affected, what safeguards are needed, and what evidence should be reviewed before use expands.</a:t>
             </a:r>
             <a:endParaRPr lang="en-US" dirty="0"/>
           </a:p>
@@ -2348,7 +2364,8 @@
             <a:r>
               <a:rPr lang="en-US" dirty="0"/>
               <a:t>Jurisdiction and Agency Policy Note
-This module provides national-level training guidance for public health agencies and partners. It is not legal advice and does not replace review by agency legal counsel, privacy officers, procurement officials, civil rights staff, records officers, or other authorized decision-makers. Requirements may vary by state, locality, territory, Tribe, agency, funding source, data-sharing agreement, emergency authority, and organizational policy. Learners should use this module to identify the issues that require review and should confirm applicable requirements before approving, procuring, deploying, or publicly communicating about AI-supported work.</a:t>
+This module provides national-level training guidance for public health agencies and partners. It is not legal advice and does not replace review by agency legal counsel, privacy officers, procurement officials, civil rights staff, records officers, or other authorized decision-makers. Requirements may vary by state, locality, territory, Tribe, agency, funding source, data-sharing agreement, emergency authority, and organizational policy. Learners should use this module to identify the issues that require review and should confirm applicable requirements before approving, procuring, deploying, or publicly communicating about AI-supported work.
+Application guidance: Translate this concept into clear decision rights, review steps, documentation expectations, and escalation paths before an AI-supported workflow is approved.</a:t>
             </a:r>
             <a:endParaRPr lang="en-US" dirty="0"/>
           </a:p>
@@ -2437,7 +2454,8 @@
             <a:r>
               <a:rPr lang="en-US" dirty="0"/>
               <a:t>Public Health Example
-A model predicts which clients are most likely to miss follow-up care after a public health referral. Overall performance appears acceptable, but subgroup review shows lower sensitivity for rural clients and people with missing phone numbers. The model may under-prioritize people who face transportation, broadband, housing, or communication barriers. Equity evaluation would require additional analysis, workflow changes, and monitoring before the tool is used for outreach prioritization.</a:t>
+A model predicts which clients are most likely to miss follow-up care after a public health referral. Overall performance appears acceptable, but subgroup review shows lower sensitivity for rural clients and people with missing phone numbers. The model may under-prioritize people who face transportation, broadband, housing, or communication barriers. Equity evaluation would require additional analysis, workflow changes, and monitoring before the tool is used for outreach prioritization.
+Application guidance: Identify what could go wrong, who could be affected, what safeguards are needed, and what evidence should be reviewed before use expands.</a:t>
             </a:r>
             <a:endParaRPr lang="en-US" dirty="0"/>
           </a:p>
@@ -2528,7 +2546,8 @@
               <a:t>Technical and Operational Deep Dive
 Equity evaluation begins with the intended use. A model used for internal workload planning has different equity implications than a model used to prioritize field response or determine which communities receive outreach. Evaluators should identify who is affected by the model output, what action follows, and what harms may occur from false positives, false negatives, or delayed review.
 Data assessment is the next step. Public health datasets often reflect uneven healthcare access, reporting patterns, documentation practices, language access, and program reach. Missing race, ethnicity, language, disability, address, housing, or contact information may not be random. It may reflect structural barriers or data collection practices that affect some communities more than others.
-Subgroup performance should be measured when data allow. This may include sensitivity, specificity, false positive rates, false negative rates, calibration, timeliness, or user override rates by race, ethnicity, age, sex, gender, geography, language, disability, rurality, payer, facility type, or other relevant factors. Subgroups should be chosen based on public health relevance, not simply data convenience.</a:t>
+Subgroup performance should be measured when data allow. This may include sensitivity, specificity, false positive rates, false negative rates, calibration, timeliness, or user override rates by race, ethnicity, age, sex, gender, geography, language, disability, rurality, payer, facility type, or other relevant factors. Subgroups should be chosen based on public health relevance, not simply data convenience.
+Application guidance: Identify what could go wrong, who could be affected, what safeguards are needed, and what evidence should be reviewed before use expands.</a:t>
             </a:r>
             <a:endParaRPr lang="en-US" dirty="0"/>
           </a:p>
@@ -3299,8 +3318,8 @@
         </p:nvSpPr>
         <p:spPr>
           <a:xfrm>
-            <a:off x="9966960" y="6537960"/>
-            <a:ext cx="1645920" cy="201168"/>
+            <a:off x="9646920" y="6537960"/>
+            <a:ext cx="1965960" cy="201168"/>
           </a:xfrm>
           <a:prstGeom prst="rect">
             <a:avLst/>
@@ -3324,7 +3343,7 @@
                 <a:ea typeface="Aptos" pitchFamily="34" charset="-122"/>
                 <a:cs typeface="Aptos" pitchFamily="34" charset="-120"/>
               </a:rPr>
-              <a:t>Â© Paula Soper</a:t>
+              <a:t>Copyright Paula Soper</a:t>
             </a:r>
             <a:endParaRPr lang="en-US" sz="800" dirty="0"/>
           </a:p>
@@ -3419,7 +3438,7 @@
         <p:spPr>
           <a:xfrm>
             <a:off x="868680" y="1508760"/>
-            <a:ext cx="6537960" cy="4160520"/>
+            <a:ext cx="6309360" cy="4160520"/>
           </a:xfrm>
           <a:prstGeom prst="rect">
             <a:avLst/>
@@ -3484,12 +3503,12 @@
         </p:nvSpPr>
         <p:spPr>
           <a:xfrm>
-            <a:off x="7909560" y="1417320"/>
-            <a:ext cx="3154680" cy="1828800"/>
+            <a:off x="7635240" y="1325880"/>
+            <a:ext cx="3474720" cy="1325880"/>
           </a:xfrm>
           <a:prstGeom prst="roundRect">
             <a:avLst>
-              <a:gd name="adj" fmla="val 6000"/>
+              <a:gd name="adj" fmla="val 8276"/>
             </a:avLst>
           </a:prstGeom>
           <a:solidFill>
@@ -3511,8 +3530,8 @@
         </p:nvSpPr>
         <p:spPr>
           <a:xfrm>
-            <a:off x="8074152" y="1563624"/>
-            <a:ext cx="2825496" cy="256032"/>
+            <a:off x="7799832" y="1472184"/>
+            <a:ext cx="3145536" cy="256032"/>
           </a:xfrm>
           <a:prstGeom prst="rect">
             <a:avLst/>
@@ -3536,7 +3555,7 @@
                 <a:ea typeface="Aptos" pitchFamily="34" charset="-122"/>
                 <a:cs typeface="Aptos" pitchFamily="34" charset="-120"/>
               </a:rPr>
-              <a:t>Key idea</a:t>
+              <a:t>Risk check</a:t>
             </a:r>
             <a:endParaRPr lang="en-US" sz="1300" dirty="0"/>
           </a:p>
@@ -3550,8 +3569,8 @@
         </p:nvSpPr>
         <p:spPr>
           <a:xfrm>
-            <a:off x="8074152" y="1920240"/>
-            <a:ext cx="2825496" cy="1188720"/>
+            <a:off x="7799832" y="1828800"/>
+            <a:ext cx="3145536" cy="685800"/>
           </a:xfrm>
           <a:prstGeom prst="rect">
             <a:avLst/>
@@ -3591,12 +3610,165 @@
         </p:nvSpPr>
         <p:spPr>
           <a:xfrm>
-            <a:off x="7909560" y="3520440"/>
-            <a:ext cx="3154680" cy="1737360"/>
+            <a:off x="7635240" y="2788920"/>
+            <a:ext cx="3474720" cy="1536192"/>
           </a:xfrm>
           <a:prstGeom prst="roundRect">
             <a:avLst>
-              <a:gd name="adj" fmla="val 6316"/>
+              <a:gd name="adj" fmla="val 7143"/>
+            </a:avLst>
+          </a:prstGeom>
+          <a:solidFill>
+            <a:srgbClr val="FFFFFF">
+              <a:alpha val="88000"/>
+            </a:srgbClr>
+          </a:solidFill>
+          <a:ln w="12700">
+            <a:solidFill>
+              <a:srgbClr val="D6E8F2"/>
+            </a:solidFill>
+            <a:prstDash val="solid"/>
+          </a:ln>
+        </p:spPr>
+      </p:sp>
+      <p:sp>
+        <p:nvSpPr>
+          <p:cNvPr id="14" name="Shape 12"/>
+          <p:cNvSpPr/>
+          <p:nvPr/>
+        </p:nvSpPr>
+        <p:spPr>
+          <a:xfrm>
+            <a:off x="8046720" y="3108960"/>
+            <a:ext cx="2651760" cy="896112"/>
+          </a:xfrm>
+          <a:prstGeom prst="arc">
+            <a:avLst/>
+          </a:prstGeom>
+          <a:noFill/>
+          <a:ln w="25400">
+            <a:solidFill>
+              <a:srgbClr val="0068B7"/>
+            </a:solidFill>
+            <a:prstDash val="solid"/>
+          </a:ln>
+        </p:spPr>
+      </p:sp>
+      <p:sp>
+        <p:nvSpPr>
+          <p:cNvPr id="15" name="Text 13"/>
+          <p:cNvSpPr/>
+          <p:nvPr/>
+        </p:nvSpPr>
+        <p:spPr>
+          <a:xfrm>
+            <a:off x="7909560" y="3099816"/>
+            <a:ext cx="2926080" cy="256032"/>
+          </a:xfrm>
+          <a:prstGeom prst="rect">
+            <a:avLst/>
+          </a:prstGeom>
+          <a:noFill/>
+          <a:ln/>
+        </p:spPr>
+        <p:txBody>
+          <a:bodyPr wrap="square" lIns="0" tIns="0" rIns="0" bIns="0" rtlCol="0" anchor="ctr"/>
+          <a:lstStyle/>
+          <a:p>
+            <a:pPr algn="ctr" indent="0" marL="0">
+              <a:buNone/>
+            </a:pPr>
+            <a:r>
+              <a:rPr lang="en-US" sz="1500" b="1" dirty="0">
+                <a:solidFill>
+                  <a:srgbClr val="003A63"/>
+                </a:solidFill>
+                <a:latin typeface="Aptos" pitchFamily="34" charset="0"/>
+                <a:ea typeface="Aptos" pitchFamily="34" charset="-122"/>
+                <a:cs typeface="Aptos" pitchFamily="34" charset="-120"/>
+              </a:rPr>
+              <a:t>Risk</a:t>
+            </a:r>
+            <a:endParaRPr lang="en-US" sz="1500" dirty="0"/>
+          </a:p>
+        </p:txBody>
+      </p:sp>
+      <p:sp>
+        <p:nvSpPr>
+          <p:cNvPr id="16" name="Shape 14"/>
+          <p:cNvSpPr/>
+          <p:nvPr/>
+        </p:nvSpPr>
+        <p:spPr>
+          <a:xfrm>
+            <a:off x="8366760" y="3639312"/>
+            <a:ext cx="2011680" cy="0"/>
+          </a:xfrm>
+          <a:prstGeom prst="line">
+            <a:avLst/>
+          </a:prstGeom>
+          <a:noFill/>
+          <a:ln w="63500">
+            <a:solidFill>
+              <a:srgbClr val="2F8A28"/>
+            </a:solidFill>
+            <a:prstDash val="solid"/>
+          </a:ln>
+        </p:spPr>
+      </p:sp>
+      <p:sp>
+        <p:nvSpPr>
+          <p:cNvPr id="17" name="Text 15"/>
+          <p:cNvSpPr/>
+          <p:nvPr/>
+        </p:nvSpPr>
+        <p:spPr>
+          <a:xfrm>
+            <a:off x="7909560" y="3849624"/>
+            <a:ext cx="2926080" cy="164592"/>
+          </a:xfrm>
+          <a:prstGeom prst="rect">
+            <a:avLst/>
+          </a:prstGeom>
+          <a:noFill/>
+          <a:ln/>
+        </p:spPr>
+        <p:txBody>
+          <a:bodyPr wrap="square" lIns="0" tIns="0" rIns="0" bIns="0" rtlCol="0" anchor="ctr"/>
+          <a:lstStyle/>
+          <a:p>
+            <a:pPr algn="ctr" indent="0" marL="0">
+              <a:buNone/>
+            </a:pPr>
+            <a:r>
+              <a:rPr lang="en-US" sz="900" dirty="0">
+                <a:solidFill>
+                  <a:srgbClr val="003A63"/>
+                </a:solidFill>
+                <a:latin typeface="Aptos" pitchFamily="34" charset="0"/>
+                <a:ea typeface="Aptos" pitchFamily="34" charset="-122"/>
+                <a:cs typeface="Aptos" pitchFamily="34" charset="-120"/>
+              </a:rPr>
+              <a:t>Human review</a:t>
+            </a:r>
+            <a:endParaRPr lang="en-US" sz="900" dirty="0"/>
+          </a:p>
+        </p:txBody>
+      </p:sp>
+      <p:sp>
+        <p:nvSpPr>
+          <p:cNvPr id="18" name="Shape 16"/>
+          <p:cNvSpPr/>
+          <p:nvPr/>
+        </p:nvSpPr>
+        <p:spPr>
+          <a:xfrm>
+            <a:off x="7635240" y="4498848"/>
+            <a:ext cx="3474720" cy="1143000"/>
+          </a:xfrm>
+          <a:prstGeom prst="roundRect">
+            <a:avLst>
+              <a:gd name="adj" fmla="val 9600"/>
             </a:avLst>
           </a:prstGeom>
           <a:solidFill>
@@ -3612,14 +3784,14 @@
       </p:sp>
       <p:sp>
         <p:nvSpPr>
-          <p:cNvPr id="14" name="Text 12"/>
-          <p:cNvSpPr/>
-          <p:nvPr/>
-        </p:nvSpPr>
-        <p:spPr>
-          <a:xfrm>
-            <a:off x="8074152" y="3666744"/>
-            <a:ext cx="2825496" cy="256032"/>
+          <p:cNvPr id="19" name="Text 17"/>
+          <p:cNvSpPr/>
+          <p:nvPr/>
+        </p:nvSpPr>
+        <p:spPr>
+          <a:xfrm>
+            <a:off x="7799832" y="4645152"/>
+            <a:ext cx="3145536" cy="256032"/>
           </a:xfrm>
           <a:prstGeom prst="rect">
             <a:avLst/>
@@ -3643,7 +3815,7 @@
                 <a:ea typeface="Aptos" pitchFamily="34" charset="-122"/>
                 <a:cs typeface="Aptos" pitchFamily="34" charset="-120"/>
               </a:rPr>
-              <a:t>Use this for</a:t>
+              <a:t>Safeguard to plan</a:t>
             </a:r>
             <a:endParaRPr lang="en-US" sz="1300" dirty="0"/>
           </a:p>
@@ -3651,14 +3823,14 @@
       </p:sp>
       <p:sp>
         <p:nvSpPr>
-          <p:cNvPr id="15" name="Text 13"/>
-          <p:cNvSpPr/>
-          <p:nvPr/>
-        </p:nvSpPr>
-        <p:spPr>
-          <a:xfrm>
-            <a:off x="8074152" y="4023360"/>
-            <a:ext cx="2825496" cy="1097280"/>
+          <p:cNvPr id="20" name="Text 18"/>
+          <p:cNvSpPr/>
+          <p:nvPr/>
+        </p:nvSpPr>
+        <p:spPr>
+          <a:xfrm>
+            <a:off x="7799832" y="5001768"/>
+            <a:ext cx="3145536" cy="502920"/>
           </a:xfrm>
           <a:prstGeom prst="rect">
             <a:avLst/>
@@ -3684,7 +3856,7 @@
                 <a:ea typeface="Aptos" pitchFamily="34" charset="-122"/>
                 <a:cs typeface="Aptos" pitchFamily="34" charset="-120"/>
               </a:rPr>
-              <a:t>Connect the concept to public health decisions, safeguards, documentation, or implementation work.</a:t>
+              <a:t>Identify what could go wrong, who could be affected, what safeguards are needed, and what evidence should be reviewed before use expands.</a:t>
             </a:r>
             <a:endParaRPr lang="en-US" sz="1550" dirty="0"/>
           </a:p>
@@ -3858,8 +4030,8 @@
         </p:nvSpPr>
         <p:spPr>
           <a:xfrm>
-            <a:off x="9966960" y="6537960"/>
-            <a:ext cx="1645920" cy="201168"/>
+            <a:off x="9646920" y="6537960"/>
+            <a:ext cx="1965960" cy="201168"/>
           </a:xfrm>
           <a:prstGeom prst="rect">
             <a:avLst/>
@@ -3883,7 +4055,7 @@
                 <a:ea typeface="Aptos" pitchFamily="34" charset="-122"/>
                 <a:cs typeface="Aptos" pitchFamily="34" charset="-120"/>
               </a:rPr>
-              <a:t>Â© Paula Soper</a:t>
+              <a:t>Copyright Paula Soper</a:t>
             </a:r>
             <a:endParaRPr lang="en-US" sz="800" dirty="0"/>
           </a:p>
@@ -3930,77 +4102,13 @@
       </p:sp>
       <p:sp>
         <p:nvSpPr>
-          <p:cNvPr id="8" name="Shape 6"/>
+          <p:cNvPr id="8" name="Text 6"/>
           <p:cNvSpPr/>
           <p:nvPr/>
         </p:nvSpPr>
         <p:spPr>
           <a:xfrm>
             <a:off x="640080" y="658368"/>
-            <a:ext cx="420624" cy="420624"/>
-          </a:xfrm>
-          <a:prstGeom prst="ellipse">
-            <a:avLst/>
-          </a:prstGeom>
-          <a:solidFill>
-            <a:srgbClr val="0068B7"/>
-          </a:solidFill>
-          <a:ln w="12700">
-            <a:solidFill>
-              <a:srgbClr val="0068B7"/>
-            </a:solidFill>
-            <a:prstDash val="solid"/>
-          </a:ln>
-        </p:spPr>
-      </p:sp>
-      <p:sp>
-        <p:nvSpPr>
-          <p:cNvPr id="9" name="Text 7"/>
-          <p:cNvSpPr/>
-          <p:nvPr/>
-        </p:nvSpPr>
-        <p:spPr>
-          <a:xfrm>
-            <a:off x="640080" y="731520"/>
-            <a:ext cx="420624" cy="164592"/>
-          </a:xfrm>
-          <a:prstGeom prst="rect">
-            <a:avLst/>
-          </a:prstGeom>
-          <a:noFill/>
-          <a:ln/>
-        </p:spPr>
-        <p:txBody>
-          <a:bodyPr wrap="square" lIns="0" tIns="0" rIns="0" bIns="0" rtlCol="0" anchor="ctr"/>
-          <a:lstStyle/>
-          <a:p>
-            <a:pPr algn="ctr" indent="0" marL="0">
-              <a:buNone/>
-            </a:pPr>
-            <a:r>
-              <a:rPr lang="en-US" sz="1100" b="1" dirty="0">
-                <a:solidFill>
-                  <a:srgbClr val="FFFFFF"/>
-                </a:solidFill>
-                <a:latin typeface="Aptos" pitchFamily="34" charset="0"/>
-                <a:ea typeface="Aptos" pitchFamily="34" charset="-122"/>
-                <a:cs typeface="Aptos" pitchFamily="34" charset="-120"/>
-              </a:rPr>
-              <a:t>6</a:t>
-            </a:r>
-            <a:endParaRPr lang="en-US" sz="1100" dirty="0"/>
-          </a:p>
-        </p:txBody>
-      </p:sp>
-      <p:sp>
-        <p:nvSpPr>
-          <p:cNvPr id="10" name="Text 8"/>
-          <p:cNvSpPr/>
-          <p:nvPr/>
-        </p:nvSpPr>
-        <p:spPr>
-          <a:xfrm>
-            <a:off x="640080" y="621792"/>
             <a:ext cx="10881360" cy="713232"/>
           </a:xfrm>
           <a:prstGeom prst="rect">
@@ -4035,14 +4143,14 @@
       </p:sp>
       <p:sp>
         <p:nvSpPr>
-          <p:cNvPr id="11" name="Text 9"/>
+          <p:cNvPr id="9" name="Text 7"/>
           <p:cNvSpPr/>
           <p:nvPr/>
         </p:nvSpPr>
         <p:spPr>
           <a:xfrm>
             <a:off x="868680" y="1508760"/>
-            <a:ext cx="6537960" cy="4160520"/>
+            <a:ext cx="6309360" cy="4160520"/>
           </a:xfrm>
           <a:prstGeom prst="rect">
             <a:avLst/>
@@ -4101,18 +4209,18 @@
       </p:sp>
       <p:sp>
         <p:nvSpPr>
-          <p:cNvPr id="12" name="Shape 10"/>
-          <p:cNvSpPr/>
-          <p:nvPr/>
-        </p:nvSpPr>
-        <p:spPr>
-          <a:xfrm>
-            <a:off x="7909560" y="1417320"/>
-            <a:ext cx="3154680" cy="1828800"/>
+          <p:cNvPr id="10" name="Shape 8"/>
+          <p:cNvSpPr/>
+          <p:nvPr/>
+        </p:nvSpPr>
+        <p:spPr>
+          <a:xfrm>
+            <a:off x="7635240" y="1325880"/>
+            <a:ext cx="3474720" cy="1325880"/>
           </a:xfrm>
           <a:prstGeom prst="roundRect">
             <a:avLst>
-              <a:gd name="adj" fmla="val 6000"/>
+              <a:gd name="adj" fmla="val 8276"/>
             </a:avLst>
           </a:prstGeom>
           <a:solidFill>
@@ -4128,14 +4236,14 @@
       </p:sp>
       <p:sp>
         <p:nvSpPr>
-          <p:cNvPr id="13" name="Text 11"/>
-          <p:cNvSpPr/>
-          <p:nvPr/>
-        </p:nvSpPr>
-        <p:spPr>
-          <a:xfrm>
-            <a:off x="8074152" y="1563624"/>
-            <a:ext cx="2825496" cy="256032"/>
+          <p:cNvPr id="11" name="Text 9"/>
+          <p:cNvSpPr/>
+          <p:nvPr/>
+        </p:nvSpPr>
+        <p:spPr>
+          <a:xfrm>
+            <a:off x="7799832" y="1472184"/>
+            <a:ext cx="3145536" cy="256032"/>
           </a:xfrm>
           <a:prstGeom prst="rect">
             <a:avLst/>
@@ -4159,7 +4267,7 @@
                 <a:ea typeface="Aptos" pitchFamily="34" charset="-122"/>
                 <a:cs typeface="Aptos" pitchFamily="34" charset="-120"/>
               </a:rPr>
-              <a:t>Key idea</a:t>
+              <a:t>Risk check</a:t>
             </a:r>
             <a:endParaRPr lang="en-US" sz="1300" dirty="0"/>
           </a:p>
@@ -4167,14 +4275,14 @@
       </p:sp>
       <p:sp>
         <p:nvSpPr>
-          <p:cNvPr id="14" name="Text 12"/>
-          <p:cNvSpPr/>
-          <p:nvPr/>
-        </p:nvSpPr>
-        <p:spPr>
-          <a:xfrm>
-            <a:off x="8074152" y="1920240"/>
-            <a:ext cx="2825496" cy="1188720"/>
+          <p:cNvPr id="12" name="Text 10"/>
+          <p:cNvSpPr/>
+          <p:nvPr/>
+        </p:nvSpPr>
+        <p:spPr>
+          <a:xfrm>
+            <a:off x="7799832" y="1828800"/>
+            <a:ext cx="3145536" cy="685800"/>
           </a:xfrm>
           <a:prstGeom prst="rect">
             <a:avLst/>
@@ -4208,18 +4316,171 @@
       </p:sp>
       <p:sp>
         <p:nvSpPr>
-          <p:cNvPr id="15" name="Shape 13"/>
-          <p:cNvSpPr/>
-          <p:nvPr/>
-        </p:nvSpPr>
-        <p:spPr>
-          <a:xfrm>
-            <a:off x="7909560" y="3520440"/>
-            <a:ext cx="3154680" cy="1737360"/>
+          <p:cNvPr id="13" name="Shape 11"/>
+          <p:cNvSpPr/>
+          <p:nvPr/>
+        </p:nvSpPr>
+        <p:spPr>
+          <a:xfrm>
+            <a:off x="7635240" y="2788920"/>
+            <a:ext cx="3474720" cy="1536192"/>
           </a:xfrm>
           <a:prstGeom prst="roundRect">
             <a:avLst>
-              <a:gd name="adj" fmla="val 6316"/>
+              <a:gd name="adj" fmla="val 7143"/>
+            </a:avLst>
+          </a:prstGeom>
+          <a:solidFill>
+            <a:srgbClr val="FFFFFF">
+              <a:alpha val="88000"/>
+            </a:srgbClr>
+          </a:solidFill>
+          <a:ln w="12700">
+            <a:solidFill>
+              <a:srgbClr val="D6E8F2"/>
+            </a:solidFill>
+            <a:prstDash val="solid"/>
+          </a:ln>
+        </p:spPr>
+      </p:sp>
+      <p:sp>
+        <p:nvSpPr>
+          <p:cNvPr id="14" name="Shape 12"/>
+          <p:cNvSpPr/>
+          <p:nvPr/>
+        </p:nvSpPr>
+        <p:spPr>
+          <a:xfrm>
+            <a:off x="8046720" y="3108960"/>
+            <a:ext cx="2651760" cy="896112"/>
+          </a:xfrm>
+          <a:prstGeom prst="arc">
+            <a:avLst/>
+          </a:prstGeom>
+          <a:noFill/>
+          <a:ln w="25400">
+            <a:solidFill>
+              <a:srgbClr val="0068B7"/>
+            </a:solidFill>
+            <a:prstDash val="solid"/>
+          </a:ln>
+        </p:spPr>
+      </p:sp>
+      <p:sp>
+        <p:nvSpPr>
+          <p:cNvPr id="15" name="Text 13"/>
+          <p:cNvSpPr/>
+          <p:nvPr/>
+        </p:nvSpPr>
+        <p:spPr>
+          <a:xfrm>
+            <a:off x="7909560" y="3099816"/>
+            <a:ext cx="2926080" cy="256032"/>
+          </a:xfrm>
+          <a:prstGeom prst="rect">
+            <a:avLst/>
+          </a:prstGeom>
+          <a:noFill/>
+          <a:ln/>
+        </p:spPr>
+        <p:txBody>
+          <a:bodyPr wrap="square" lIns="0" tIns="0" rIns="0" bIns="0" rtlCol="0" anchor="ctr"/>
+          <a:lstStyle/>
+          <a:p>
+            <a:pPr algn="ctr" indent="0" marL="0">
+              <a:buNone/>
+            </a:pPr>
+            <a:r>
+              <a:rPr lang="en-US" sz="1500" b="1" dirty="0">
+                <a:solidFill>
+                  <a:srgbClr val="003A63"/>
+                </a:solidFill>
+                <a:latin typeface="Aptos" pitchFamily="34" charset="0"/>
+                <a:ea typeface="Aptos" pitchFamily="34" charset="-122"/>
+                <a:cs typeface="Aptos" pitchFamily="34" charset="-120"/>
+              </a:rPr>
+              <a:t>Risk</a:t>
+            </a:r>
+            <a:endParaRPr lang="en-US" sz="1500" dirty="0"/>
+          </a:p>
+        </p:txBody>
+      </p:sp>
+      <p:sp>
+        <p:nvSpPr>
+          <p:cNvPr id="16" name="Shape 14"/>
+          <p:cNvSpPr/>
+          <p:nvPr/>
+        </p:nvSpPr>
+        <p:spPr>
+          <a:xfrm>
+            <a:off x="8366760" y="3639312"/>
+            <a:ext cx="2011680" cy="0"/>
+          </a:xfrm>
+          <a:prstGeom prst="line">
+            <a:avLst/>
+          </a:prstGeom>
+          <a:noFill/>
+          <a:ln w="63500">
+            <a:solidFill>
+              <a:srgbClr val="2F8A28"/>
+            </a:solidFill>
+            <a:prstDash val="solid"/>
+          </a:ln>
+        </p:spPr>
+      </p:sp>
+      <p:sp>
+        <p:nvSpPr>
+          <p:cNvPr id="17" name="Text 15"/>
+          <p:cNvSpPr/>
+          <p:nvPr/>
+        </p:nvSpPr>
+        <p:spPr>
+          <a:xfrm>
+            <a:off x="7909560" y="3849624"/>
+            <a:ext cx="2926080" cy="164592"/>
+          </a:xfrm>
+          <a:prstGeom prst="rect">
+            <a:avLst/>
+          </a:prstGeom>
+          <a:noFill/>
+          <a:ln/>
+        </p:spPr>
+        <p:txBody>
+          <a:bodyPr wrap="square" lIns="0" tIns="0" rIns="0" bIns="0" rtlCol="0" anchor="ctr"/>
+          <a:lstStyle/>
+          <a:p>
+            <a:pPr algn="ctr" indent="0" marL="0">
+              <a:buNone/>
+            </a:pPr>
+            <a:r>
+              <a:rPr lang="en-US" sz="900" dirty="0">
+                <a:solidFill>
+                  <a:srgbClr val="003A63"/>
+                </a:solidFill>
+                <a:latin typeface="Aptos" pitchFamily="34" charset="0"/>
+                <a:ea typeface="Aptos" pitchFamily="34" charset="-122"/>
+                <a:cs typeface="Aptos" pitchFamily="34" charset="-120"/>
+              </a:rPr>
+              <a:t>Human review</a:t>
+            </a:r>
+            <a:endParaRPr lang="en-US" sz="900" dirty="0"/>
+          </a:p>
+        </p:txBody>
+      </p:sp>
+      <p:sp>
+        <p:nvSpPr>
+          <p:cNvPr id="18" name="Shape 16"/>
+          <p:cNvSpPr/>
+          <p:nvPr/>
+        </p:nvSpPr>
+        <p:spPr>
+          <a:xfrm>
+            <a:off x="7635240" y="4498848"/>
+            <a:ext cx="3474720" cy="1143000"/>
+          </a:xfrm>
+          <a:prstGeom prst="roundRect">
+            <a:avLst>
+              <a:gd name="adj" fmla="val 9600"/>
             </a:avLst>
           </a:prstGeom>
           <a:solidFill>
@@ -4235,14 +4496,14 @@
       </p:sp>
       <p:sp>
         <p:nvSpPr>
-          <p:cNvPr id="16" name="Text 14"/>
-          <p:cNvSpPr/>
-          <p:nvPr/>
-        </p:nvSpPr>
-        <p:spPr>
-          <a:xfrm>
-            <a:off x="8074152" y="3666744"/>
-            <a:ext cx="2825496" cy="256032"/>
+          <p:cNvPr id="19" name="Text 17"/>
+          <p:cNvSpPr/>
+          <p:nvPr/>
+        </p:nvSpPr>
+        <p:spPr>
+          <a:xfrm>
+            <a:off x="7799832" y="4645152"/>
+            <a:ext cx="3145536" cy="256032"/>
           </a:xfrm>
           <a:prstGeom prst="rect">
             <a:avLst/>
@@ -4266,7 +4527,7 @@
                 <a:ea typeface="Aptos" pitchFamily="34" charset="-122"/>
                 <a:cs typeface="Aptos" pitchFamily="34" charset="-120"/>
               </a:rPr>
-              <a:t>Use this for</a:t>
+              <a:t>Safeguard to plan</a:t>
             </a:r>
             <a:endParaRPr lang="en-US" sz="1300" dirty="0"/>
           </a:p>
@@ -4274,14 +4535,14 @@
       </p:sp>
       <p:sp>
         <p:nvSpPr>
-          <p:cNvPr id="17" name="Text 15"/>
-          <p:cNvSpPr/>
-          <p:nvPr/>
-        </p:nvSpPr>
-        <p:spPr>
-          <a:xfrm>
-            <a:off x="8074152" y="4023360"/>
-            <a:ext cx="2825496" cy="1097280"/>
+          <p:cNvPr id="20" name="Text 18"/>
+          <p:cNvSpPr/>
+          <p:nvPr/>
+        </p:nvSpPr>
+        <p:spPr>
+          <a:xfrm>
+            <a:off x="7799832" y="5001768"/>
+            <a:ext cx="3145536" cy="502920"/>
           </a:xfrm>
           <a:prstGeom prst="rect">
             <a:avLst/>
@@ -4307,7 +4568,7 @@
                 <a:ea typeface="Aptos" pitchFamily="34" charset="-122"/>
                 <a:cs typeface="Aptos" pitchFamily="34" charset="-120"/>
               </a:rPr>
-              <a:t>Connect the concept to public health decisions, safeguards, documentation, or implementation work.</a:t>
+              <a:t>Identify what could go wrong, who could be affected, what safeguards are needed, and what evidence should be reviewed before use expands.</a:t>
             </a:r>
             <a:endParaRPr lang="en-US" sz="1550" dirty="0"/>
           </a:p>
@@ -4481,8 +4742,8 @@
         </p:nvSpPr>
         <p:spPr>
           <a:xfrm>
-            <a:off x="9966960" y="6537960"/>
-            <a:ext cx="1645920" cy="201168"/>
+            <a:off x="9646920" y="6537960"/>
+            <a:ext cx="1965960" cy="201168"/>
           </a:xfrm>
           <a:prstGeom prst="rect">
             <a:avLst/>
@@ -4506,7 +4767,7 @@
                 <a:ea typeface="Aptos" pitchFamily="34" charset="-122"/>
                 <a:cs typeface="Aptos" pitchFamily="34" charset="-120"/>
               </a:rPr>
-              <a:t>Â© Paula Soper</a:t>
+              <a:t>Copyright Paula Soper</a:t>
             </a:r>
             <a:endParaRPr lang="en-US" sz="800" dirty="0"/>
           </a:p>
@@ -4601,7 +4862,7 @@
         <p:spPr>
           <a:xfrm>
             <a:off x="868680" y="1508760"/>
-            <a:ext cx="6537960" cy="4160520"/>
+            <a:ext cx="6309360" cy="4160520"/>
           </a:xfrm>
           <a:prstGeom prst="rect">
             <a:avLst/>
@@ -4666,12 +4927,12 @@
         </p:nvSpPr>
         <p:spPr>
           <a:xfrm>
-            <a:off x="7909560" y="1417320"/>
-            <a:ext cx="3154680" cy="1828800"/>
+            <a:off x="7635240" y="1325880"/>
+            <a:ext cx="3474720" cy="1325880"/>
           </a:xfrm>
           <a:prstGeom prst="roundRect">
             <a:avLst>
-              <a:gd name="adj" fmla="val 6000"/>
+              <a:gd name="adj" fmla="val 8276"/>
             </a:avLst>
           </a:prstGeom>
           <a:solidFill>
@@ -4693,8 +4954,8 @@
         </p:nvSpPr>
         <p:spPr>
           <a:xfrm>
-            <a:off x="8074152" y="1563624"/>
-            <a:ext cx="2825496" cy="256032"/>
+            <a:off x="7799832" y="1472184"/>
+            <a:ext cx="3145536" cy="256032"/>
           </a:xfrm>
           <a:prstGeom prst="rect">
             <a:avLst/>
@@ -4718,7 +4979,7 @@
                 <a:ea typeface="Aptos" pitchFamily="34" charset="-122"/>
                 <a:cs typeface="Aptos" pitchFamily="34" charset="-120"/>
               </a:rPr>
-              <a:t>Key idea</a:t>
+              <a:t>Risk check</a:t>
             </a:r>
             <a:endParaRPr lang="en-US" sz="1300" dirty="0"/>
           </a:p>
@@ -4732,8 +4993,8 @@
         </p:nvSpPr>
         <p:spPr>
           <a:xfrm>
-            <a:off x="8074152" y="1920240"/>
-            <a:ext cx="2825496" cy="1188720"/>
+            <a:off x="7799832" y="1828800"/>
+            <a:ext cx="3145536" cy="685800"/>
           </a:xfrm>
           <a:prstGeom prst="rect">
             <a:avLst/>
@@ -4773,12 +5034,165 @@
         </p:nvSpPr>
         <p:spPr>
           <a:xfrm>
-            <a:off x="7909560" y="3520440"/>
-            <a:ext cx="3154680" cy="1737360"/>
+            <a:off x="7635240" y="2788920"/>
+            <a:ext cx="3474720" cy="1536192"/>
           </a:xfrm>
           <a:prstGeom prst="roundRect">
             <a:avLst>
-              <a:gd name="adj" fmla="val 6316"/>
+              <a:gd name="adj" fmla="val 7143"/>
+            </a:avLst>
+          </a:prstGeom>
+          <a:solidFill>
+            <a:srgbClr val="FFFFFF">
+              <a:alpha val="88000"/>
+            </a:srgbClr>
+          </a:solidFill>
+          <a:ln w="12700">
+            <a:solidFill>
+              <a:srgbClr val="D6E8F2"/>
+            </a:solidFill>
+            <a:prstDash val="solid"/>
+          </a:ln>
+        </p:spPr>
+      </p:sp>
+      <p:sp>
+        <p:nvSpPr>
+          <p:cNvPr id="14" name="Shape 12"/>
+          <p:cNvSpPr/>
+          <p:nvPr/>
+        </p:nvSpPr>
+        <p:spPr>
+          <a:xfrm>
+            <a:off x="8046720" y="3108960"/>
+            <a:ext cx="2651760" cy="896112"/>
+          </a:xfrm>
+          <a:prstGeom prst="arc">
+            <a:avLst/>
+          </a:prstGeom>
+          <a:noFill/>
+          <a:ln w="25400">
+            <a:solidFill>
+              <a:srgbClr val="0068B7"/>
+            </a:solidFill>
+            <a:prstDash val="solid"/>
+          </a:ln>
+        </p:spPr>
+      </p:sp>
+      <p:sp>
+        <p:nvSpPr>
+          <p:cNvPr id="15" name="Text 13"/>
+          <p:cNvSpPr/>
+          <p:nvPr/>
+        </p:nvSpPr>
+        <p:spPr>
+          <a:xfrm>
+            <a:off x="7909560" y="3099816"/>
+            <a:ext cx="2926080" cy="256032"/>
+          </a:xfrm>
+          <a:prstGeom prst="rect">
+            <a:avLst/>
+          </a:prstGeom>
+          <a:noFill/>
+          <a:ln/>
+        </p:spPr>
+        <p:txBody>
+          <a:bodyPr wrap="square" lIns="0" tIns="0" rIns="0" bIns="0" rtlCol="0" anchor="ctr"/>
+          <a:lstStyle/>
+          <a:p>
+            <a:pPr algn="ctr" indent="0" marL="0">
+              <a:buNone/>
+            </a:pPr>
+            <a:r>
+              <a:rPr lang="en-US" sz="1500" b="1" dirty="0">
+                <a:solidFill>
+                  <a:srgbClr val="003A63"/>
+                </a:solidFill>
+                <a:latin typeface="Aptos" pitchFamily="34" charset="0"/>
+                <a:ea typeface="Aptos" pitchFamily="34" charset="-122"/>
+                <a:cs typeface="Aptos" pitchFamily="34" charset="-120"/>
+              </a:rPr>
+              <a:t>Risk</a:t>
+            </a:r>
+            <a:endParaRPr lang="en-US" sz="1500" dirty="0"/>
+          </a:p>
+        </p:txBody>
+      </p:sp>
+      <p:sp>
+        <p:nvSpPr>
+          <p:cNvPr id="16" name="Shape 14"/>
+          <p:cNvSpPr/>
+          <p:nvPr/>
+        </p:nvSpPr>
+        <p:spPr>
+          <a:xfrm>
+            <a:off x="8366760" y="3639312"/>
+            <a:ext cx="2011680" cy="0"/>
+          </a:xfrm>
+          <a:prstGeom prst="line">
+            <a:avLst/>
+          </a:prstGeom>
+          <a:noFill/>
+          <a:ln w="63500">
+            <a:solidFill>
+              <a:srgbClr val="2F8A28"/>
+            </a:solidFill>
+            <a:prstDash val="solid"/>
+          </a:ln>
+        </p:spPr>
+      </p:sp>
+      <p:sp>
+        <p:nvSpPr>
+          <p:cNvPr id="17" name="Text 15"/>
+          <p:cNvSpPr/>
+          <p:nvPr/>
+        </p:nvSpPr>
+        <p:spPr>
+          <a:xfrm>
+            <a:off x="7909560" y="3849624"/>
+            <a:ext cx="2926080" cy="164592"/>
+          </a:xfrm>
+          <a:prstGeom prst="rect">
+            <a:avLst/>
+          </a:prstGeom>
+          <a:noFill/>
+          <a:ln/>
+        </p:spPr>
+        <p:txBody>
+          <a:bodyPr wrap="square" lIns="0" tIns="0" rIns="0" bIns="0" rtlCol="0" anchor="ctr"/>
+          <a:lstStyle/>
+          <a:p>
+            <a:pPr algn="ctr" indent="0" marL="0">
+              <a:buNone/>
+            </a:pPr>
+            <a:r>
+              <a:rPr lang="en-US" sz="900" dirty="0">
+                <a:solidFill>
+                  <a:srgbClr val="003A63"/>
+                </a:solidFill>
+                <a:latin typeface="Aptos" pitchFamily="34" charset="0"/>
+                <a:ea typeface="Aptos" pitchFamily="34" charset="-122"/>
+                <a:cs typeface="Aptos" pitchFamily="34" charset="-120"/>
+              </a:rPr>
+              <a:t>Human review</a:t>
+            </a:r>
+            <a:endParaRPr lang="en-US" sz="900" dirty="0"/>
+          </a:p>
+        </p:txBody>
+      </p:sp>
+      <p:sp>
+        <p:nvSpPr>
+          <p:cNvPr id="18" name="Shape 16"/>
+          <p:cNvSpPr/>
+          <p:nvPr/>
+        </p:nvSpPr>
+        <p:spPr>
+          <a:xfrm>
+            <a:off x="7635240" y="4498848"/>
+            <a:ext cx="3474720" cy="1143000"/>
+          </a:xfrm>
+          <a:prstGeom prst="roundRect">
+            <a:avLst>
+              <a:gd name="adj" fmla="val 9600"/>
             </a:avLst>
           </a:prstGeom>
           <a:solidFill>
@@ -4794,14 +5208,14 @@
       </p:sp>
       <p:sp>
         <p:nvSpPr>
-          <p:cNvPr id="14" name="Text 12"/>
-          <p:cNvSpPr/>
-          <p:nvPr/>
-        </p:nvSpPr>
-        <p:spPr>
-          <a:xfrm>
-            <a:off x="8074152" y="3666744"/>
-            <a:ext cx="2825496" cy="256032"/>
+          <p:cNvPr id="19" name="Text 17"/>
+          <p:cNvSpPr/>
+          <p:nvPr/>
+        </p:nvSpPr>
+        <p:spPr>
+          <a:xfrm>
+            <a:off x="7799832" y="4645152"/>
+            <a:ext cx="3145536" cy="256032"/>
           </a:xfrm>
           <a:prstGeom prst="rect">
             <a:avLst/>
@@ -4825,7 +5239,7 @@
                 <a:ea typeface="Aptos" pitchFamily="34" charset="-122"/>
                 <a:cs typeface="Aptos" pitchFamily="34" charset="-120"/>
               </a:rPr>
-              <a:t>Use this for</a:t>
+              <a:t>Safeguard to plan</a:t>
             </a:r>
             <a:endParaRPr lang="en-US" sz="1300" dirty="0"/>
           </a:p>
@@ -4833,14 +5247,14 @@
       </p:sp>
       <p:sp>
         <p:nvSpPr>
-          <p:cNvPr id="15" name="Text 13"/>
-          <p:cNvSpPr/>
-          <p:nvPr/>
-        </p:nvSpPr>
-        <p:spPr>
-          <a:xfrm>
-            <a:off x="8074152" y="4023360"/>
-            <a:ext cx="2825496" cy="1097280"/>
+          <p:cNvPr id="20" name="Text 18"/>
+          <p:cNvSpPr/>
+          <p:nvPr/>
+        </p:nvSpPr>
+        <p:spPr>
+          <a:xfrm>
+            <a:off x="7799832" y="5001768"/>
+            <a:ext cx="3145536" cy="502920"/>
           </a:xfrm>
           <a:prstGeom prst="rect">
             <a:avLst/>
@@ -4866,7 +5280,7 @@
                 <a:ea typeface="Aptos" pitchFamily="34" charset="-122"/>
                 <a:cs typeface="Aptos" pitchFamily="34" charset="-120"/>
               </a:rPr>
-              <a:t>Connect the concept to public health decisions, safeguards, documentation, or implementation work.</a:t>
+              <a:t>Identify what could go wrong, who could be affected, what safeguards are needed, and what evidence should be reviewed before use expands.</a:t>
             </a:r>
             <a:endParaRPr lang="en-US" sz="1550" dirty="0"/>
           </a:p>
@@ -5040,8 +5454,8 @@
         </p:nvSpPr>
         <p:spPr>
           <a:xfrm>
-            <a:off x="9966960" y="6537960"/>
-            <a:ext cx="1645920" cy="201168"/>
+            <a:off x="9646920" y="6537960"/>
+            <a:ext cx="1965960" cy="201168"/>
           </a:xfrm>
           <a:prstGeom prst="rect">
             <a:avLst/>
@@ -5065,7 +5479,7 @@
                 <a:ea typeface="Aptos" pitchFamily="34" charset="-122"/>
                 <a:cs typeface="Aptos" pitchFamily="34" charset="-120"/>
               </a:rPr>
-              <a:t>Â© Paula Soper</a:t>
+              <a:t>Copyright Paula Soper</a:t>
             </a:r>
             <a:endParaRPr lang="en-US" sz="800" dirty="0"/>
           </a:p>
@@ -5160,7 +5574,7 @@
         <p:spPr>
           <a:xfrm>
             <a:off x="868680" y="1508760"/>
-            <a:ext cx="6537960" cy="4160520"/>
+            <a:ext cx="6309360" cy="4160520"/>
           </a:xfrm>
           <a:prstGeom prst="rect">
             <a:avLst/>
@@ -5225,12 +5639,12 @@
         </p:nvSpPr>
         <p:spPr>
           <a:xfrm>
-            <a:off x="7909560" y="1417320"/>
-            <a:ext cx="3154680" cy="1828800"/>
+            <a:off x="7635240" y="1325880"/>
+            <a:ext cx="3474720" cy="1325880"/>
           </a:xfrm>
           <a:prstGeom prst="roundRect">
             <a:avLst>
-              <a:gd name="adj" fmla="val 6000"/>
+              <a:gd name="adj" fmla="val 8276"/>
             </a:avLst>
           </a:prstGeom>
           <a:solidFill>
@@ -5252,8 +5666,8 @@
         </p:nvSpPr>
         <p:spPr>
           <a:xfrm>
-            <a:off x="8074152" y="1563624"/>
-            <a:ext cx="2825496" cy="256032"/>
+            <a:off x="7799832" y="1472184"/>
+            <a:ext cx="3145536" cy="256032"/>
           </a:xfrm>
           <a:prstGeom prst="rect">
             <a:avLst/>
@@ -5277,7 +5691,7 @@
                 <a:ea typeface="Aptos" pitchFamily="34" charset="-122"/>
                 <a:cs typeface="Aptos" pitchFamily="34" charset="-120"/>
               </a:rPr>
-              <a:t>Key idea</a:t>
+              <a:t>Risk check</a:t>
             </a:r>
             <a:endParaRPr lang="en-US" sz="1300" dirty="0"/>
           </a:p>
@@ -5291,8 +5705,8 @@
         </p:nvSpPr>
         <p:spPr>
           <a:xfrm>
-            <a:off x="8074152" y="1920240"/>
-            <a:ext cx="2825496" cy="1188720"/>
+            <a:off x="7799832" y="1828800"/>
+            <a:ext cx="3145536" cy="685800"/>
           </a:xfrm>
           <a:prstGeom prst="rect">
             <a:avLst/>
@@ -5332,12 +5746,165 @@
         </p:nvSpPr>
         <p:spPr>
           <a:xfrm>
-            <a:off x="7909560" y="3520440"/>
-            <a:ext cx="3154680" cy="1737360"/>
+            <a:off x="7635240" y="2788920"/>
+            <a:ext cx="3474720" cy="1536192"/>
           </a:xfrm>
           <a:prstGeom prst="roundRect">
             <a:avLst>
-              <a:gd name="adj" fmla="val 6316"/>
+              <a:gd name="adj" fmla="val 7143"/>
+            </a:avLst>
+          </a:prstGeom>
+          <a:solidFill>
+            <a:srgbClr val="FFFFFF">
+              <a:alpha val="88000"/>
+            </a:srgbClr>
+          </a:solidFill>
+          <a:ln w="12700">
+            <a:solidFill>
+              <a:srgbClr val="D6E8F2"/>
+            </a:solidFill>
+            <a:prstDash val="solid"/>
+          </a:ln>
+        </p:spPr>
+      </p:sp>
+      <p:sp>
+        <p:nvSpPr>
+          <p:cNvPr id="14" name="Shape 12"/>
+          <p:cNvSpPr/>
+          <p:nvPr/>
+        </p:nvSpPr>
+        <p:spPr>
+          <a:xfrm>
+            <a:off x="8046720" y="3108960"/>
+            <a:ext cx="2651760" cy="896112"/>
+          </a:xfrm>
+          <a:prstGeom prst="arc">
+            <a:avLst/>
+          </a:prstGeom>
+          <a:noFill/>
+          <a:ln w="25400">
+            <a:solidFill>
+              <a:srgbClr val="0068B7"/>
+            </a:solidFill>
+            <a:prstDash val="solid"/>
+          </a:ln>
+        </p:spPr>
+      </p:sp>
+      <p:sp>
+        <p:nvSpPr>
+          <p:cNvPr id="15" name="Text 13"/>
+          <p:cNvSpPr/>
+          <p:nvPr/>
+        </p:nvSpPr>
+        <p:spPr>
+          <a:xfrm>
+            <a:off x="7909560" y="3099816"/>
+            <a:ext cx="2926080" cy="256032"/>
+          </a:xfrm>
+          <a:prstGeom prst="rect">
+            <a:avLst/>
+          </a:prstGeom>
+          <a:noFill/>
+          <a:ln/>
+        </p:spPr>
+        <p:txBody>
+          <a:bodyPr wrap="square" lIns="0" tIns="0" rIns="0" bIns="0" rtlCol="0" anchor="ctr"/>
+          <a:lstStyle/>
+          <a:p>
+            <a:pPr algn="ctr" indent="0" marL="0">
+              <a:buNone/>
+            </a:pPr>
+            <a:r>
+              <a:rPr lang="en-US" sz="1500" b="1" dirty="0">
+                <a:solidFill>
+                  <a:srgbClr val="003A63"/>
+                </a:solidFill>
+                <a:latin typeface="Aptos" pitchFamily="34" charset="0"/>
+                <a:ea typeface="Aptos" pitchFamily="34" charset="-122"/>
+                <a:cs typeface="Aptos" pitchFamily="34" charset="-120"/>
+              </a:rPr>
+              <a:t>Risk</a:t>
+            </a:r>
+            <a:endParaRPr lang="en-US" sz="1500" dirty="0"/>
+          </a:p>
+        </p:txBody>
+      </p:sp>
+      <p:sp>
+        <p:nvSpPr>
+          <p:cNvPr id="16" name="Shape 14"/>
+          <p:cNvSpPr/>
+          <p:nvPr/>
+        </p:nvSpPr>
+        <p:spPr>
+          <a:xfrm>
+            <a:off x="8366760" y="3639312"/>
+            <a:ext cx="2011680" cy="0"/>
+          </a:xfrm>
+          <a:prstGeom prst="line">
+            <a:avLst/>
+          </a:prstGeom>
+          <a:noFill/>
+          <a:ln w="63500">
+            <a:solidFill>
+              <a:srgbClr val="2F8A28"/>
+            </a:solidFill>
+            <a:prstDash val="solid"/>
+          </a:ln>
+        </p:spPr>
+      </p:sp>
+      <p:sp>
+        <p:nvSpPr>
+          <p:cNvPr id="17" name="Text 15"/>
+          <p:cNvSpPr/>
+          <p:nvPr/>
+        </p:nvSpPr>
+        <p:spPr>
+          <a:xfrm>
+            <a:off x="7909560" y="3849624"/>
+            <a:ext cx="2926080" cy="164592"/>
+          </a:xfrm>
+          <a:prstGeom prst="rect">
+            <a:avLst/>
+          </a:prstGeom>
+          <a:noFill/>
+          <a:ln/>
+        </p:spPr>
+        <p:txBody>
+          <a:bodyPr wrap="square" lIns="0" tIns="0" rIns="0" bIns="0" rtlCol="0" anchor="ctr"/>
+          <a:lstStyle/>
+          <a:p>
+            <a:pPr algn="ctr" indent="0" marL="0">
+              <a:buNone/>
+            </a:pPr>
+            <a:r>
+              <a:rPr lang="en-US" sz="900" dirty="0">
+                <a:solidFill>
+                  <a:srgbClr val="003A63"/>
+                </a:solidFill>
+                <a:latin typeface="Aptos" pitchFamily="34" charset="0"/>
+                <a:ea typeface="Aptos" pitchFamily="34" charset="-122"/>
+                <a:cs typeface="Aptos" pitchFamily="34" charset="-120"/>
+              </a:rPr>
+              <a:t>Human review</a:t>
+            </a:r>
+            <a:endParaRPr lang="en-US" sz="900" dirty="0"/>
+          </a:p>
+        </p:txBody>
+      </p:sp>
+      <p:sp>
+        <p:nvSpPr>
+          <p:cNvPr id="18" name="Shape 16"/>
+          <p:cNvSpPr/>
+          <p:nvPr/>
+        </p:nvSpPr>
+        <p:spPr>
+          <a:xfrm>
+            <a:off x="7635240" y="4498848"/>
+            <a:ext cx="3474720" cy="1143000"/>
+          </a:xfrm>
+          <a:prstGeom prst="roundRect">
+            <a:avLst>
+              <a:gd name="adj" fmla="val 9600"/>
             </a:avLst>
           </a:prstGeom>
           <a:solidFill>
@@ -5353,14 +5920,14 @@
       </p:sp>
       <p:sp>
         <p:nvSpPr>
-          <p:cNvPr id="14" name="Text 12"/>
-          <p:cNvSpPr/>
-          <p:nvPr/>
-        </p:nvSpPr>
-        <p:spPr>
-          <a:xfrm>
-            <a:off x="8074152" y="3666744"/>
-            <a:ext cx="2825496" cy="256032"/>
+          <p:cNvPr id="19" name="Text 17"/>
+          <p:cNvSpPr/>
+          <p:nvPr/>
+        </p:nvSpPr>
+        <p:spPr>
+          <a:xfrm>
+            <a:off x="7799832" y="4645152"/>
+            <a:ext cx="3145536" cy="256032"/>
           </a:xfrm>
           <a:prstGeom prst="rect">
             <a:avLst/>
@@ -5384,7 +5951,7 @@
                 <a:ea typeface="Aptos" pitchFamily="34" charset="-122"/>
                 <a:cs typeface="Aptos" pitchFamily="34" charset="-120"/>
               </a:rPr>
-              <a:t>Use this for</a:t>
+              <a:t>Safeguard to plan</a:t>
             </a:r>
             <a:endParaRPr lang="en-US" sz="1300" dirty="0"/>
           </a:p>
@@ -5392,14 +5959,14 @@
       </p:sp>
       <p:sp>
         <p:nvSpPr>
-          <p:cNvPr id="15" name="Text 13"/>
-          <p:cNvSpPr/>
-          <p:nvPr/>
-        </p:nvSpPr>
-        <p:spPr>
-          <a:xfrm>
-            <a:off x="8074152" y="4023360"/>
-            <a:ext cx="2825496" cy="1097280"/>
+          <p:cNvPr id="20" name="Text 18"/>
+          <p:cNvSpPr/>
+          <p:nvPr/>
+        </p:nvSpPr>
+        <p:spPr>
+          <a:xfrm>
+            <a:off x="7799832" y="5001768"/>
+            <a:ext cx="3145536" cy="502920"/>
           </a:xfrm>
           <a:prstGeom prst="rect">
             <a:avLst/>
@@ -5425,7 +5992,7 @@
                 <a:ea typeface="Aptos" pitchFamily="34" charset="-122"/>
                 <a:cs typeface="Aptos" pitchFamily="34" charset="-120"/>
               </a:rPr>
-              <a:t>Connect the concept to public health decisions, safeguards, documentation, or implementation work.</a:t>
+              <a:t>Identify what could go wrong, who could be affected, what safeguards are needed, and what evidence should be reviewed before use expands.</a:t>
             </a:r>
             <a:endParaRPr lang="en-US" sz="1550" dirty="0"/>
           </a:p>
@@ -5599,8 +6166,8 @@
         </p:nvSpPr>
         <p:spPr>
           <a:xfrm>
-            <a:off x="9966960" y="6537960"/>
-            <a:ext cx="1645920" cy="201168"/>
+            <a:off x="9646920" y="6537960"/>
+            <a:ext cx="1965960" cy="201168"/>
           </a:xfrm>
           <a:prstGeom prst="rect">
             <a:avLst/>
@@ -5624,7 +6191,7 @@
                 <a:ea typeface="Aptos" pitchFamily="34" charset="-122"/>
                 <a:cs typeface="Aptos" pitchFamily="34" charset="-120"/>
               </a:rPr>
-              <a:t>Â© Paula Soper</a:t>
+              <a:t>Copyright Paula Soper</a:t>
             </a:r>
             <a:endParaRPr lang="en-US" sz="800" dirty="0"/>
           </a:p>
@@ -5719,7 +6286,7 @@
         <p:spPr>
           <a:xfrm>
             <a:off x="868680" y="1508760"/>
-            <a:ext cx="6537960" cy="4160520"/>
+            <a:ext cx="6309360" cy="4160520"/>
           </a:xfrm>
           <a:prstGeom prst="rect">
             <a:avLst/>
@@ -5784,12 +6351,12 @@
         </p:nvSpPr>
         <p:spPr>
           <a:xfrm>
-            <a:off x="7909560" y="1417320"/>
-            <a:ext cx="3154680" cy="1828800"/>
+            <a:off x="7635240" y="1325880"/>
+            <a:ext cx="3474720" cy="1325880"/>
           </a:xfrm>
           <a:prstGeom prst="roundRect">
             <a:avLst>
-              <a:gd name="adj" fmla="val 6000"/>
+              <a:gd name="adj" fmla="val 8276"/>
             </a:avLst>
           </a:prstGeom>
           <a:solidFill>
@@ -5811,8 +6378,8 @@
         </p:nvSpPr>
         <p:spPr>
           <a:xfrm>
-            <a:off x="8074152" y="1563624"/>
-            <a:ext cx="2825496" cy="256032"/>
+            <a:off x="7799832" y="1472184"/>
+            <a:ext cx="3145536" cy="256032"/>
           </a:xfrm>
           <a:prstGeom prst="rect">
             <a:avLst/>
@@ -5836,7 +6403,7 @@
                 <a:ea typeface="Aptos" pitchFamily="34" charset="-122"/>
                 <a:cs typeface="Aptos" pitchFamily="34" charset="-120"/>
               </a:rPr>
-              <a:t>Key idea</a:t>
+              <a:t>Risk check</a:t>
             </a:r>
             <a:endParaRPr lang="en-US" sz="1300" dirty="0"/>
           </a:p>
@@ -5850,8 +6417,8 @@
         </p:nvSpPr>
         <p:spPr>
           <a:xfrm>
-            <a:off x="8074152" y="1920240"/>
-            <a:ext cx="2825496" cy="1188720"/>
+            <a:off x="7799832" y="1828800"/>
+            <a:ext cx="3145536" cy="685800"/>
           </a:xfrm>
           <a:prstGeom prst="rect">
             <a:avLst/>
@@ -5891,12 +6458,165 @@
         </p:nvSpPr>
         <p:spPr>
           <a:xfrm>
-            <a:off x="7909560" y="3520440"/>
-            <a:ext cx="3154680" cy="1737360"/>
+            <a:off x="7635240" y="2788920"/>
+            <a:ext cx="3474720" cy="1536192"/>
           </a:xfrm>
           <a:prstGeom prst="roundRect">
             <a:avLst>
-              <a:gd name="adj" fmla="val 6316"/>
+              <a:gd name="adj" fmla="val 7143"/>
+            </a:avLst>
+          </a:prstGeom>
+          <a:solidFill>
+            <a:srgbClr val="FFFFFF">
+              <a:alpha val="88000"/>
+            </a:srgbClr>
+          </a:solidFill>
+          <a:ln w="12700">
+            <a:solidFill>
+              <a:srgbClr val="D6E8F2"/>
+            </a:solidFill>
+            <a:prstDash val="solid"/>
+          </a:ln>
+        </p:spPr>
+      </p:sp>
+      <p:sp>
+        <p:nvSpPr>
+          <p:cNvPr id="14" name="Shape 12"/>
+          <p:cNvSpPr/>
+          <p:nvPr/>
+        </p:nvSpPr>
+        <p:spPr>
+          <a:xfrm>
+            <a:off x="8046720" y="3108960"/>
+            <a:ext cx="2651760" cy="896112"/>
+          </a:xfrm>
+          <a:prstGeom prst="arc">
+            <a:avLst/>
+          </a:prstGeom>
+          <a:noFill/>
+          <a:ln w="25400">
+            <a:solidFill>
+              <a:srgbClr val="0068B7"/>
+            </a:solidFill>
+            <a:prstDash val="solid"/>
+          </a:ln>
+        </p:spPr>
+      </p:sp>
+      <p:sp>
+        <p:nvSpPr>
+          <p:cNvPr id="15" name="Text 13"/>
+          <p:cNvSpPr/>
+          <p:nvPr/>
+        </p:nvSpPr>
+        <p:spPr>
+          <a:xfrm>
+            <a:off x="7909560" y="3099816"/>
+            <a:ext cx="2926080" cy="256032"/>
+          </a:xfrm>
+          <a:prstGeom prst="rect">
+            <a:avLst/>
+          </a:prstGeom>
+          <a:noFill/>
+          <a:ln/>
+        </p:spPr>
+        <p:txBody>
+          <a:bodyPr wrap="square" lIns="0" tIns="0" rIns="0" bIns="0" rtlCol="0" anchor="ctr"/>
+          <a:lstStyle/>
+          <a:p>
+            <a:pPr algn="ctr" indent="0" marL="0">
+              <a:buNone/>
+            </a:pPr>
+            <a:r>
+              <a:rPr lang="en-US" sz="1500" b="1" dirty="0">
+                <a:solidFill>
+                  <a:srgbClr val="003A63"/>
+                </a:solidFill>
+                <a:latin typeface="Aptos" pitchFamily="34" charset="0"/>
+                <a:ea typeface="Aptos" pitchFamily="34" charset="-122"/>
+                <a:cs typeface="Aptos" pitchFamily="34" charset="-120"/>
+              </a:rPr>
+              <a:t>Risk</a:t>
+            </a:r>
+            <a:endParaRPr lang="en-US" sz="1500" dirty="0"/>
+          </a:p>
+        </p:txBody>
+      </p:sp>
+      <p:sp>
+        <p:nvSpPr>
+          <p:cNvPr id="16" name="Shape 14"/>
+          <p:cNvSpPr/>
+          <p:nvPr/>
+        </p:nvSpPr>
+        <p:spPr>
+          <a:xfrm>
+            <a:off x="8366760" y="3639312"/>
+            <a:ext cx="2011680" cy="0"/>
+          </a:xfrm>
+          <a:prstGeom prst="line">
+            <a:avLst/>
+          </a:prstGeom>
+          <a:noFill/>
+          <a:ln w="63500">
+            <a:solidFill>
+              <a:srgbClr val="2F8A28"/>
+            </a:solidFill>
+            <a:prstDash val="solid"/>
+          </a:ln>
+        </p:spPr>
+      </p:sp>
+      <p:sp>
+        <p:nvSpPr>
+          <p:cNvPr id="17" name="Text 15"/>
+          <p:cNvSpPr/>
+          <p:nvPr/>
+        </p:nvSpPr>
+        <p:spPr>
+          <a:xfrm>
+            <a:off x="7909560" y="3849624"/>
+            <a:ext cx="2926080" cy="164592"/>
+          </a:xfrm>
+          <a:prstGeom prst="rect">
+            <a:avLst/>
+          </a:prstGeom>
+          <a:noFill/>
+          <a:ln/>
+        </p:spPr>
+        <p:txBody>
+          <a:bodyPr wrap="square" lIns="0" tIns="0" rIns="0" bIns="0" rtlCol="0" anchor="ctr"/>
+          <a:lstStyle/>
+          <a:p>
+            <a:pPr algn="ctr" indent="0" marL="0">
+              <a:buNone/>
+            </a:pPr>
+            <a:r>
+              <a:rPr lang="en-US" sz="900" dirty="0">
+                <a:solidFill>
+                  <a:srgbClr val="003A63"/>
+                </a:solidFill>
+                <a:latin typeface="Aptos" pitchFamily="34" charset="0"/>
+                <a:ea typeface="Aptos" pitchFamily="34" charset="-122"/>
+                <a:cs typeface="Aptos" pitchFamily="34" charset="-120"/>
+              </a:rPr>
+              <a:t>Human review</a:t>
+            </a:r>
+            <a:endParaRPr lang="en-US" sz="900" dirty="0"/>
+          </a:p>
+        </p:txBody>
+      </p:sp>
+      <p:sp>
+        <p:nvSpPr>
+          <p:cNvPr id="18" name="Shape 16"/>
+          <p:cNvSpPr/>
+          <p:nvPr/>
+        </p:nvSpPr>
+        <p:spPr>
+          <a:xfrm>
+            <a:off x="7635240" y="4498848"/>
+            <a:ext cx="3474720" cy="1143000"/>
+          </a:xfrm>
+          <a:prstGeom prst="roundRect">
+            <a:avLst>
+              <a:gd name="adj" fmla="val 9600"/>
             </a:avLst>
           </a:prstGeom>
           <a:solidFill>
@@ -5912,14 +6632,14 @@
       </p:sp>
       <p:sp>
         <p:nvSpPr>
-          <p:cNvPr id="14" name="Text 12"/>
-          <p:cNvSpPr/>
-          <p:nvPr/>
-        </p:nvSpPr>
-        <p:spPr>
-          <a:xfrm>
-            <a:off x="8074152" y="3666744"/>
-            <a:ext cx="2825496" cy="256032"/>
+          <p:cNvPr id="19" name="Text 17"/>
+          <p:cNvSpPr/>
+          <p:nvPr/>
+        </p:nvSpPr>
+        <p:spPr>
+          <a:xfrm>
+            <a:off x="7799832" y="4645152"/>
+            <a:ext cx="3145536" cy="256032"/>
           </a:xfrm>
           <a:prstGeom prst="rect">
             <a:avLst/>
@@ -5943,7 +6663,7 @@
                 <a:ea typeface="Aptos" pitchFamily="34" charset="-122"/>
                 <a:cs typeface="Aptos" pitchFamily="34" charset="-120"/>
               </a:rPr>
-              <a:t>Use this for</a:t>
+              <a:t>Safeguard to plan</a:t>
             </a:r>
             <a:endParaRPr lang="en-US" sz="1300" dirty="0"/>
           </a:p>
@@ -5951,14 +6671,14 @@
       </p:sp>
       <p:sp>
         <p:nvSpPr>
-          <p:cNvPr id="15" name="Text 13"/>
-          <p:cNvSpPr/>
-          <p:nvPr/>
-        </p:nvSpPr>
-        <p:spPr>
-          <a:xfrm>
-            <a:off x="8074152" y="4023360"/>
-            <a:ext cx="2825496" cy="1097280"/>
+          <p:cNvPr id="20" name="Text 18"/>
+          <p:cNvSpPr/>
+          <p:nvPr/>
+        </p:nvSpPr>
+        <p:spPr>
+          <a:xfrm>
+            <a:off x="7799832" y="5001768"/>
+            <a:ext cx="3145536" cy="502920"/>
           </a:xfrm>
           <a:prstGeom prst="rect">
             <a:avLst/>
@@ -5984,7 +6704,7 @@
                 <a:ea typeface="Aptos" pitchFamily="34" charset="-122"/>
                 <a:cs typeface="Aptos" pitchFamily="34" charset="-120"/>
               </a:rPr>
-              <a:t>Connect the concept to public health decisions, safeguards, documentation, or implementation work.</a:t>
+              <a:t>Identify what could go wrong, who could be affected, what safeguards are needed, and what evidence should be reviewed before use expands.</a:t>
             </a:r>
             <a:endParaRPr lang="en-US" sz="1550" dirty="0"/>
           </a:p>
@@ -6158,8 +6878,8 @@
         </p:nvSpPr>
         <p:spPr>
           <a:xfrm>
-            <a:off x="9966960" y="6537960"/>
-            <a:ext cx="1645920" cy="201168"/>
+            <a:off x="9646920" y="6537960"/>
+            <a:ext cx="1965960" cy="201168"/>
           </a:xfrm>
           <a:prstGeom prst="rect">
             <a:avLst/>
@@ -6183,7 +6903,7 @@
                 <a:ea typeface="Aptos" pitchFamily="34" charset="-122"/>
                 <a:cs typeface="Aptos" pitchFamily="34" charset="-120"/>
               </a:rPr>
-              <a:t>Â© Paula Soper</a:t>
+              <a:t>Copyright Paula Soper</a:t>
             </a:r>
             <a:endParaRPr lang="en-US" sz="800" dirty="0"/>
           </a:p>
@@ -6230,77 +6950,13 @@
       </p:sp>
       <p:sp>
         <p:nvSpPr>
-          <p:cNvPr id="8" name="Shape 6"/>
+          <p:cNvPr id="8" name="Text 6"/>
           <p:cNvSpPr/>
           <p:nvPr/>
         </p:nvSpPr>
         <p:spPr>
           <a:xfrm>
             <a:off x="640080" y="658368"/>
-            <a:ext cx="420624" cy="420624"/>
-          </a:xfrm>
-          <a:prstGeom prst="ellipse">
-            <a:avLst/>
-          </a:prstGeom>
-          <a:solidFill>
-            <a:srgbClr val="0068B7"/>
-          </a:solidFill>
-          <a:ln w="12700">
-            <a:solidFill>
-              <a:srgbClr val="0068B7"/>
-            </a:solidFill>
-            <a:prstDash val="solid"/>
-          </a:ln>
-        </p:spPr>
-      </p:sp>
-      <p:sp>
-        <p:nvSpPr>
-          <p:cNvPr id="9" name="Text 7"/>
-          <p:cNvSpPr/>
-          <p:nvPr/>
-        </p:nvSpPr>
-        <p:spPr>
-          <a:xfrm>
-            <a:off x="640080" y="731520"/>
-            <a:ext cx="420624" cy="164592"/>
-          </a:xfrm>
-          <a:prstGeom prst="rect">
-            <a:avLst/>
-          </a:prstGeom>
-          <a:noFill/>
-          <a:ln/>
-        </p:spPr>
-        <p:txBody>
-          <a:bodyPr wrap="square" lIns="0" tIns="0" rIns="0" bIns="0" rtlCol="0" anchor="ctr"/>
-          <a:lstStyle/>
-          <a:p>
-            <a:pPr algn="ctr" indent="0" marL="0">
-              <a:buNone/>
-            </a:pPr>
-            <a:r>
-              <a:rPr lang="en-US" sz="1100" b="1" dirty="0">
-                <a:solidFill>
-                  <a:srgbClr val="FFFFFF"/>
-                </a:solidFill>
-                <a:latin typeface="Aptos" pitchFamily="34" charset="0"/>
-                <a:ea typeface="Aptos" pitchFamily="34" charset="-122"/>
-                <a:cs typeface="Aptos" pitchFamily="34" charset="-120"/>
-              </a:rPr>
-              <a:t>7</a:t>
-            </a:r>
-            <a:endParaRPr lang="en-US" sz="1100" dirty="0"/>
-          </a:p>
-        </p:txBody>
-      </p:sp>
-      <p:sp>
-        <p:nvSpPr>
-          <p:cNvPr id="10" name="Text 8"/>
-          <p:cNvSpPr/>
-          <p:nvPr/>
-        </p:nvSpPr>
-        <p:spPr>
-          <a:xfrm>
-            <a:off x="640080" y="621792"/>
             <a:ext cx="10881360" cy="713232"/>
           </a:xfrm>
           <a:prstGeom prst="rect">
@@ -6335,14 +6991,14 @@
       </p:sp>
       <p:sp>
         <p:nvSpPr>
-          <p:cNvPr id="11" name="Text 9"/>
+          <p:cNvPr id="9" name="Text 7"/>
           <p:cNvSpPr/>
           <p:nvPr/>
         </p:nvSpPr>
         <p:spPr>
           <a:xfrm>
             <a:off x="868680" y="1508760"/>
-            <a:ext cx="6537960" cy="4160520"/>
+            <a:ext cx="6309360" cy="4160520"/>
           </a:xfrm>
           <a:prstGeom prst="rect">
             <a:avLst/>
@@ -6401,18 +7057,18 @@
       </p:sp>
       <p:sp>
         <p:nvSpPr>
-          <p:cNvPr id="12" name="Shape 10"/>
-          <p:cNvSpPr/>
-          <p:nvPr/>
-        </p:nvSpPr>
-        <p:spPr>
-          <a:xfrm>
-            <a:off x="7909560" y="1417320"/>
-            <a:ext cx="3154680" cy="1828800"/>
+          <p:cNvPr id="10" name="Shape 8"/>
+          <p:cNvSpPr/>
+          <p:nvPr/>
+        </p:nvSpPr>
+        <p:spPr>
+          <a:xfrm>
+            <a:off x="7635240" y="1325880"/>
+            <a:ext cx="3474720" cy="1325880"/>
           </a:xfrm>
           <a:prstGeom prst="roundRect">
             <a:avLst>
-              <a:gd name="adj" fmla="val 6000"/>
+              <a:gd name="adj" fmla="val 8276"/>
             </a:avLst>
           </a:prstGeom>
           <a:solidFill>
@@ -6428,14 +7084,14 @@
       </p:sp>
       <p:sp>
         <p:nvSpPr>
-          <p:cNvPr id="13" name="Text 11"/>
-          <p:cNvSpPr/>
-          <p:nvPr/>
-        </p:nvSpPr>
-        <p:spPr>
-          <a:xfrm>
-            <a:off x="8074152" y="1563624"/>
-            <a:ext cx="2825496" cy="256032"/>
+          <p:cNvPr id="11" name="Text 9"/>
+          <p:cNvSpPr/>
+          <p:nvPr/>
+        </p:nvSpPr>
+        <p:spPr>
+          <a:xfrm>
+            <a:off x="7799832" y="1472184"/>
+            <a:ext cx="3145536" cy="256032"/>
           </a:xfrm>
           <a:prstGeom prst="rect">
             <a:avLst/>
@@ -6459,7 +7115,7 @@
                 <a:ea typeface="Aptos" pitchFamily="34" charset="-122"/>
                 <a:cs typeface="Aptos" pitchFamily="34" charset="-120"/>
               </a:rPr>
-              <a:t>Key idea</a:t>
+              <a:t>Risk check</a:t>
             </a:r>
             <a:endParaRPr lang="en-US" sz="1300" dirty="0"/>
           </a:p>
@@ -6467,14 +7123,14 @@
       </p:sp>
       <p:sp>
         <p:nvSpPr>
-          <p:cNvPr id="14" name="Text 12"/>
-          <p:cNvSpPr/>
-          <p:nvPr/>
-        </p:nvSpPr>
-        <p:spPr>
-          <a:xfrm>
-            <a:off x="8074152" y="1920240"/>
-            <a:ext cx="2825496" cy="1188720"/>
+          <p:cNvPr id="12" name="Text 10"/>
+          <p:cNvSpPr/>
+          <p:nvPr/>
+        </p:nvSpPr>
+        <p:spPr>
+          <a:xfrm>
+            <a:off x="7799832" y="1828800"/>
+            <a:ext cx="3145536" cy="685800"/>
           </a:xfrm>
           <a:prstGeom prst="rect">
             <a:avLst/>
@@ -6508,18 +7164,171 @@
       </p:sp>
       <p:sp>
         <p:nvSpPr>
-          <p:cNvPr id="15" name="Shape 13"/>
-          <p:cNvSpPr/>
-          <p:nvPr/>
-        </p:nvSpPr>
-        <p:spPr>
-          <a:xfrm>
-            <a:off x="7909560" y="3520440"/>
-            <a:ext cx="3154680" cy="1737360"/>
+          <p:cNvPr id="13" name="Shape 11"/>
+          <p:cNvSpPr/>
+          <p:nvPr/>
+        </p:nvSpPr>
+        <p:spPr>
+          <a:xfrm>
+            <a:off x="7635240" y="2788920"/>
+            <a:ext cx="3474720" cy="1536192"/>
           </a:xfrm>
           <a:prstGeom prst="roundRect">
             <a:avLst>
-              <a:gd name="adj" fmla="val 6316"/>
+              <a:gd name="adj" fmla="val 7143"/>
+            </a:avLst>
+          </a:prstGeom>
+          <a:solidFill>
+            <a:srgbClr val="FFFFFF">
+              <a:alpha val="88000"/>
+            </a:srgbClr>
+          </a:solidFill>
+          <a:ln w="12700">
+            <a:solidFill>
+              <a:srgbClr val="D6E8F2"/>
+            </a:solidFill>
+            <a:prstDash val="solid"/>
+          </a:ln>
+        </p:spPr>
+      </p:sp>
+      <p:sp>
+        <p:nvSpPr>
+          <p:cNvPr id="14" name="Shape 12"/>
+          <p:cNvSpPr/>
+          <p:nvPr/>
+        </p:nvSpPr>
+        <p:spPr>
+          <a:xfrm>
+            <a:off x="8046720" y="3108960"/>
+            <a:ext cx="2651760" cy="896112"/>
+          </a:xfrm>
+          <a:prstGeom prst="arc">
+            <a:avLst/>
+          </a:prstGeom>
+          <a:noFill/>
+          <a:ln w="25400">
+            <a:solidFill>
+              <a:srgbClr val="0068B7"/>
+            </a:solidFill>
+            <a:prstDash val="solid"/>
+          </a:ln>
+        </p:spPr>
+      </p:sp>
+      <p:sp>
+        <p:nvSpPr>
+          <p:cNvPr id="15" name="Text 13"/>
+          <p:cNvSpPr/>
+          <p:nvPr/>
+        </p:nvSpPr>
+        <p:spPr>
+          <a:xfrm>
+            <a:off x="7909560" y="3099816"/>
+            <a:ext cx="2926080" cy="256032"/>
+          </a:xfrm>
+          <a:prstGeom prst="rect">
+            <a:avLst/>
+          </a:prstGeom>
+          <a:noFill/>
+          <a:ln/>
+        </p:spPr>
+        <p:txBody>
+          <a:bodyPr wrap="square" lIns="0" tIns="0" rIns="0" bIns="0" rtlCol="0" anchor="ctr"/>
+          <a:lstStyle/>
+          <a:p>
+            <a:pPr algn="ctr" indent="0" marL="0">
+              <a:buNone/>
+            </a:pPr>
+            <a:r>
+              <a:rPr lang="en-US" sz="1500" b="1" dirty="0">
+                <a:solidFill>
+                  <a:srgbClr val="003A63"/>
+                </a:solidFill>
+                <a:latin typeface="Aptos" pitchFamily="34" charset="0"/>
+                <a:ea typeface="Aptos" pitchFamily="34" charset="-122"/>
+                <a:cs typeface="Aptos" pitchFamily="34" charset="-120"/>
+              </a:rPr>
+              <a:t>Risk</a:t>
+            </a:r>
+            <a:endParaRPr lang="en-US" sz="1500" dirty="0"/>
+          </a:p>
+        </p:txBody>
+      </p:sp>
+      <p:sp>
+        <p:nvSpPr>
+          <p:cNvPr id="16" name="Shape 14"/>
+          <p:cNvSpPr/>
+          <p:nvPr/>
+        </p:nvSpPr>
+        <p:spPr>
+          <a:xfrm>
+            <a:off x="8366760" y="3639312"/>
+            <a:ext cx="2011680" cy="0"/>
+          </a:xfrm>
+          <a:prstGeom prst="line">
+            <a:avLst/>
+          </a:prstGeom>
+          <a:noFill/>
+          <a:ln w="63500">
+            <a:solidFill>
+              <a:srgbClr val="2F8A28"/>
+            </a:solidFill>
+            <a:prstDash val="solid"/>
+          </a:ln>
+        </p:spPr>
+      </p:sp>
+      <p:sp>
+        <p:nvSpPr>
+          <p:cNvPr id="17" name="Text 15"/>
+          <p:cNvSpPr/>
+          <p:nvPr/>
+        </p:nvSpPr>
+        <p:spPr>
+          <a:xfrm>
+            <a:off x="7909560" y="3849624"/>
+            <a:ext cx="2926080" cy="164592"/>
+          </a:xfrm>
+          <a:prstGeom prst="rect">
+            <a:avLst/>
+          </a:prstGeom>
+          <a:noFill/>
+          <a:ln/>
+        </p:spPr>
+        <p:txBody>
+          <a:bodyPr wrap="square" lIns="0" tIns="0" rIns="0" bIns="0" rtlCol="0" anchor="ctr"/>
+          <a:lstStyle/>
+          <a:p>
+            <a:pPr algn="ctr" indent="0" marL="0">
+              <a:buNone/>
+            </a:pPr>
+            <a:r>
+              <a:rPr lang="en-US" sz="900" dirty="0">
+                <a:solidFill>
+                  <a:srgbClr val="003A63"/>
+                </a:solidFill>
+                <a:latin typeface="Aptos" pitchFamily="34" charset="0"/>
+                <a:ea typeface="Aptos" pitchFamily="34" charset="-122"/>
+                <a:cs typeface="Aptos" pitchFamily="34" charset="-120"/>
+              </a:rPr>
+              <a:t>Human review</a:t>
+            </a:r>
+            <a:endParaRPr lang="en-US" sz="900" dirty="0"/>
+          </a:p>
+        </p:txBody>
+      </p:sp>
+      <p:sp>
+        <p:nvSpPr>
+          <p:cNvPr id="18" name="Shape 16"/>
+          <p:cNvSpPr/>
+          <p:nvPr/>
+        </p:nvSpPr>
+        <p:spPr>
+          <a:xfrm>
+            <a:off x="7635240" y="4498848"/>
+            <a:ext cx="3474720" cy="1143000"/>
+          </a:xfrm>
+          <a:prstGeom prst="roundRect">
+            <a:avLst>
+              <a:gd name="adj" fmla="val 9600"/>
             </a:avLst>
           </a:prstGeom>
           <a:solidFill>
@@ -6535,14 +7344,14 @@
       </p:sp>
       <p:sp>
         <p:nvSpPr>
-          <p:cNvPr id="16" name="Text 14"/>
-          <p:cNvSpPr/>
-          <p:nvPr/>
-        </p:nvSpPr>
-        <p:spPr>
-          <a:xfrm>
-            <a:off x="8074152" y="3666744"/>
-            <a:ext cx="2825496" cy="256032"/>
+          <p:cNvPr id="19" name="Text 17"/>
+          <p:cNvSpPr/>
+          <p:nvPr/>
+        </p:nvSpPr>
+        <p:spPr>
+          <a:xfrm>
+            <a:off x="7799832" y="4645152"/>
+            <a:ext cx="3145536" cy="256032"/>
           </a:xfrm>
           <a:prstGeom prst="rect">
             <a:avLst/>
@@ -6566,7 +7375,7 @@
                 <a:ea typeface="Aptos" pitchFamily="34" charset="-122"/>
                 <a:cs typeface="Aptos" pitchFamily="34" charset="-120"/>
               </a:rPr>
-              <a:t>Use this for</a:t>
+              <a:t>Safeguard to plan</a:t>
             </a:r>
             <a:endParaRPr lang="en-US" sz="1300" dirty="0"/>
           </a:p>
@@ -6574,14 +7383,14 @@
       </p:sp>
       <p:sp>
         <p:nvSpPr>
-          <p:cNvPr id="17" name="Text 15"/>
-          <p:cNvSpPr/>
-          <p:nvPr/>
-        </p:nvSpPr>
-        <p:spPr>
-          <a:xfrm>
-            <a:off x="8074152" y="4023360"/>
-            <a:ext cx="2825496" cy="1097280"/>
+          <p:cNvPr id="20" name="Text 18"/>
+          <p:cNvSpPr/>
+          <p:nvPr/>
+        </p:nvSpPr>
+        <p:spPr>
+          <a:xfrm>
+            <a:off x="7799832" y="5001768"/>
+            <a:ext cx="3145536" cy="502920"/>
           </a:xfrm>
           <a:prstGeom prst="rect">
             <a:avLst/>
@@ -6607,7 +7416,7 @@
                 <a:ea typeface="Aptos" pitchFamily="34" charset="-122"/>
                 <a:cs typeface="Aptos" pitchFamily="34" charset="-120"/>
               </a:rPr>
-              <a:t>Connect the concept to public health decisions, safeguards, documentation, or implementation work.</a:t>
+              <a:t>Identify what could go wrong, who could be affected, what safeguards are needed, and what evidence should be reviewed before use expands.</a:t>
             </a:r>
             <a:endParaRPr lang="en-US" sz="1550" dirty="0"/>
           </a:p>
@@ -6781,8 +7590,8 @@
         </p:nvSpPr>
         <p:spPr>
           <a:xfrm>
-            <a:off x="9966960" y="6537960"/>
-            <a:ext cx="1645920" cy="201168"/>
+            <a:off x="9646920" y="6537960"/>
+            <a:ext cx="1965960" cy="201168"/>
           </a:xfrm>
           <a:prstGeom prst="rect">
             <a:avLst/>
@@ -6806,7 +7615,7 @@
                 <a:ea typeface="Aptos" pitchFamily="34" charset="-122"/>
                 <a:cs typeface="Aptos" pitchFamily="34" charset="-120"/>
               </a:rPr>
-              <a:t>Â© Paula Soper</a:t>
+              <a:t>Copyright Paula Soper</a:t>
             </a:r>
             <a:endParaRPr lang="en-US" sz="800" dirty="0"/>
           </a:p>
@@ -6901,7 +7710,7 @@
         <p:spPr>
           <a:xfrm>
             <a:off x="868680" y="1508760"/>
-            <a:ext cx="6537960" cy="4160520"/>
+            <a:ext cx="6309360" cy="4160520"/>
           </a:xfrm>
           <a:prstGeom prst="rect">
             <a:avLst/>
@@ -6952,12 +7761,12 @@
         </p:nvSpPr>
         <p:spPr>
           <a:xfrm>
-            <a:off x="7909560" y="1417320"/>
-            <a:ext cx="3154680" cy="1828800"/>
+            <a:off x="7635240" y="1325880"/>
+            <a:ext cx="3474720" cy="1325880"/>
           </a:xfrm>
           <a:prstGeom prst="roundRect">
             <a:avLst>
-              <a:gd name="adj" fmla="val 6000"/>
+              <a:gd name="adj" fmla="val 8276"/>
             </a:avLst>
           </a:prstGeom>
           <a:solidFill>
@@ -6979,8 +7788,8 @@
         </p:nvSpPr>
         <p:spPr>
           <a:xfrm>
-            <a:off x="8074152" y="1563624"/>
-            <a:ext cx="2825496" cy="256032"/>
+            <a:off x="7799832" y="1472184"/>
+            <a:ext cx="3145536" cy="256032"/>
           </a:xfrm>
           <a:prstGeom prst="rect">
             <a:avLst/>
@@ -7004,7 +7813,7 @@
                 <a:ea typeface="Aptos" pitchFamily="34" charset="-122"/>
                 <a:cs typeface="Aptos" pitchFamily="34" charset="-120"/>
               </a:rPr>
-              <a:t>Key idea</a:t>
+              <a:t>Risk check</a:t>
             </a:r>
             <a:endParaRPr lang="en-US" sz="1300" dirty="0"/>
           </a:p>
@@ -7018,8 +7827,8 @@
         </p:nvSpPr>
         <p:spPr>
           <a:xfrm>
-            <a:off x="8074152" y="1920240"/>
-            <a:ext cx="2825496" cy="1188720"/>
+            <a:off x="7799832" y="1828800"/>
+            <a:ext cx="3145536" cy="685800"/>
           </a:xfrm>
           <a:prstGeom prst="rect">
             <a:avLst/>
@@ -7059,12 +7868,165 @@
         </p:nvSpPr>
         <p:spPr>
           <a:xfrm>
-            <a:off x="7909560" y="3520440"/>
-            <a:ext cx="3154680" cy="1737360"/>
+            <a:off x="7635240" y="2788920"/>
+            <a:ext cx="3474720" cy="1536192"/>
           </a:xfrm>
           <a:prstGeom prst="roundRect">
             <a:avLst>
-              <a:gd name="adj" fmla="val 6316"/>
+              <a:gd name="adj" fmla="val 7143"/>
+            </a:avLst>
+          </a:prstGeom>
+          <a:solidFill>
+            <a:srgbClr val="FFFFFF">
+              <a:alpha val="88000"/>
+            </a:srgbClr>
+          </a:solidFill>
+          <a:ln w="12700">
+            <a:solidFill>
+              <a:srgbClr val="D6E8F2"/>
+            </a:solidFill>
+            <a:prstDash val="solid"/>
+          </a:ln>
+        </p:spPr>
+      </p:sp>
+      <p:sp>
+        <p:nvSpPr>
+          <p:cNvPr id="14" name="Shape 12"/>
+          <p:cNvSpPr/>
+          <p:nvPr/>
+        </p:nvSpPr>
+        <p:spPr>
+          <a:xfrm>
+            <a:off x="8046720" y="3108960"/>
+            <a:ext cx="2651760" cy="896112"/>
+          </a:xfrm>
+          <a:prstGeom prst="arc">
+            <a:avLst/>
+          </a:prstGeom>
+          <a:noFill/>
+          <a:ln w="25400">
+            <a:solidFill>
+              <a:srgbClr val="0068B7"/>
+            </a:solidFill>
+            <a:prstDash val="solid"/>
+          </a:ln>
+        </p:spPr>
+      </p:sp>
+      <p:sp>
+        <p:nvSpPr>
+          <p:cNvPr id="15" name="Text 13"/>
+          <p:cNvSpPr/>
+          <p:nvPr/>
+        </p:nvSpPr>
+        <p:spPr>
+          <a:xfrm>
+            <a:off x="7909560" y="3099816"/>
+            <a:ext cx="2926080" cy="256032"/>
+          </a:xfrm>
+          <a:prstGeom prst="rect">
+            <a:avLst/>
+          </a:prstGeom>
+          <a:noFill/>
+          <a:ln/>
+        </p:spPr>
+        <p:txBody>
+          <a:bodyPr wrap="square" lIns="0" tIns="0" rIns="0" bIns="0" rtlCol="0" anchor="ctr"/>
+          <a:lstStyle/>
+          <a:p>
+            <a:pPr algn="ctr" indent="0" marL="0">
+              <a:buNone/>
+            </a:pPr>
+            <a:r>
+              <a:rPr lang="en-US" sz="1500" b="1" dirty="0">
+                <a:solidFill>
+                  <a:srgbClr val="003A63"/>
+                </a:solidFill>
+                <a:latin typeface="Aptos" pitchFamily="34" charset="0"/>
+                <a:ea typeface="Aptos" pitchFamily="34" charset="-122"/>
+                <a:cs typeface="Aptos" pitchFamily="34" charset="-120"/>
+              </a:rPr>
+              <a:t>Risk</a:t>
+            </a:r>
+            <a:endParaRPr lang="en-US" sz="1500" dirty="0"/>
+          </a:p>
+        </p:txBody>
+      </p:sp>
+      <p:sp>
+        <p:nvSpPr>
+          <p:cNvPr id="16" name="Shape 14"/>
+          <p:cNvSpPr/>
+          <p:nvPr/>
+        </p:nvSpPr>
+        <p:spPr>
+          <a:xfrm>
+            <a:off x="8366760" y="3639312"/>
+            <a:ext cx="2011680" cy="0"/>
+          </a:xfrm>
+          <a:prstGeom prst="line">
+            <a:avLst/>
+          </a:prstGeom>
+          <a:noFill/>
+          <a:ln w="63500">
+            <a:solidFill>
+              <a:srgbClr val="2F8A28"/>
+            </a:solidFill>
+            <a:prstDash val="solid"/>
+          </a:ln>
+        </p:spPr>
+      </p:sp>
+      <p:sp>
+        <p:nvSpPr>
+          <p:cNvPr id="17" name="Text 15"/>
+          <p:cNvSpPr/>
+          <p:nvPr/>
+        </p:nvSpPr>
+        <p:spPr>
+          <a:xfrm>
+            <a:off x="7909560" y="3849624"/>
+            <a:ext cx="2926080" cy="164592"/>
+          </a:xfrm>
+          <a:prstGeom prst="rect">
+            <a:avLst/>
+          </a:prstGeom>
+          <a:noFill/>
+          <a:ln/>
+        </p:spPr>
+        <p:txBody>
+          <a:bodyPr wrap="square" lIns="0" tIns="0" rIns="0" bIns="0" rtlCol="0" anchor="ctr"/>
+          <a:lstStyle/>
+          <a:p>
+            <a:pPr algn="ctr" indent="0" marL="0">
+              <a:buNone/>
+            </a:pPr>
+            <a:r>
+              <a:rPr lang="en-US" sz="900" dirty="0">
+                <a:solidFill>
+                  <a:srgbClr val="003A63"/>
+                </a:solidFill>
+                <a:latin typeface="Aptos" pitchFamily="34" charset="0"/>
+                <a:ea typeface="Aptos" pitchFamily="34" charset="-122"/>
+                <a:cs typeface="Aptos" pitchFamily="34" charset="-120"/>
+              </a:rPr>
+              <a:t>Human review</a:t>
+            </a:r>
+            <a:endParaRPr lang="en-US" sz="900" dirty="0"/>
+          </a:p>
+        </p:txBody>
+      </p:sp>
+      <p:sp>
+        <p:nvSpPr>
+          <p:cNvPr id="18" name="Shape 16"/>
+          <p:cNvSpPr/>
+          <p:nvPr/>
+        </p:nvSpPr>
+        <p:spPr>
+          <a:xfrm>
+            <a:off x="7635240" y="4498848"/>
+            <a:ext cx="3474720" cy="1143000"/>
+          </a:xfrm>
+          <a:prstGeom prst="roundRect">
+            <a:avLst>
+              <a:gd name="adj" fmla="val 9600"/>
             </a:avLst>
           </a:prstGeom>
           <a:solidFill>
@@ -7080,14 +8042,14 @@
       </p:sp>
       <p:sp>
         <p:nvSpPr>
-          <p:cNvPr id="14" name="Text 12"/>
-          <p:cNvSpPr/>
-          <p:nvPr/>
-        </p:nvSpPr>
-        <p:spPr>
-          <a:xfrm>
-            <a:off x="8074152" y="3666744"/>
-            <a:ext cx="2825496" cy="256032"/>
+          <p:cNvPr id="19" name="Text 17"/>
+          <p:cNvSpPr/>
+          <p:nvPr/>
+        </p:nvSpPr>
+        <p:spPr>
+          <a:xfrm>
+            <a:off x="7799832" y="4645152"/>
+            <a:ext cx="3145536" cy="256032"/>
           </a:xfrm>
           <a:prstGeom prst="rect">
             <a:avLst/>
@@ -7111,7 +8073,7 @@
                 <a:ea typeface="Aptos" pitchFamily="34" charset="-122"/>
                 <a:cs typeface="Aptos" pitchFamily="34" charset="-120"/>
               </a:rPr>
-              <a:t>Use this for</a:t>
+              <a:t>Safeguard to plan</a:t>
             </a:r>
             <a:endParaRPr lang="en-US" sz="1300" dirty="0"/>
           </a:p>
@@ -7119,14 +8081,14 @@
       </p:sp>
       <p:sp>
         <p:nvSpPr>
-          <p:cNvPr id="15" name="Text 13"/>
-          <p:cNvSpPr/>
-          <p:nvPr/>
-        </p:nvSpPr>
-        <p:spPr>
-          <a:xfrm>
-            <a:off x="8074152" y="4023360"/>
-            <a:ext cx="2825496" cy="1097280"/>
+          <p:cNvPr id="20" name="Text 18"/>
+          <p:cNvSpPr/>
+          <p:nvPr/>
+        </p:nvSpPr>
+        <p:spPr>
+          <a:xfrm>
+            <a:off x="7799832" y="5001768"/>
+            <a:ext cx="3145536" cy="502920"/>
           </a:xfrm>
           <a:prstGeom prst="rect">
             <a:avLst/>
@@ -7152,7 +8114,7 @@
                 <a:ea typeface="Aptos" pitchFamily="34" charset="-122"/>
                 <a:cs typeface="Aptos" pitchFamily="34" charset="-120"/>
               </a:rPr>
-              <a:t>Connect the concept to public health decisions, safeguards, documentation, or implementation work.</a:t>
+              <a:t>Identify what could go wrong, who could be affected, what safeguards are needed, and what evidence should be reviewed before use expands.</a:t>
             </a:r>
             <a:endParaRPr lang="en-US" sz="1550" dirty="0"/>
           </a:p>
@@ -7326,8 +8288,8 @@
         </p:nvSpPr>
         <p:spPr>
           <a:xfrm>
-            <a:off x="9966960" y="6537960"/>
-            <a:ext cx="1645920" cy="201168"/>
+            <a:off x="9646920" y="6537960"/>
+            <a:ext cx="1965960" cy="201168"/>
           </a:xfrm>
           <a:prstGeom prst="rect">
             <a:avLst/>
@@ -7351,7 +8313,7 @@
                 <a:ea typeface="Aptos" pitchFamily="34" charset="-122"/>
                 <a:cs typeface="Aptos" pitchFamily="34" charset="-120"/>
               </a:rPr>
-              <a:t>Â© Paula Soper</a:t>
+              <a:t>Copyright Paula Soper</a:t>
             </a:r>
             <a:endParaRPr lang="en-US" sz="800" dirty="0"/>
           </a:p>
@@ -7398,77 +8360,13 @@
       </p:sp>
       <p:sp>
         <p:nvSpPr>
-          <p:cNvPr id="8" name="Shape 6"/>
+          <p:cNvPr id="8" name="Text 6"/>
           <p:cNvSpPr/>
           <p:nvPr/>
         </p:nvSpPr>
         <p:spPr>
           <a:xfrm>
             <a:off x="640080" y="658368"/>
-            <a:ext cx="420624" cy="420624"/>
-          </a:xfrm>
-          <a:prstGeom prst="ellipse">
-            <a:avLst/>
-          </a:prstGeom>
-          <a:solidFill>
-            <a:srgbClr val="0068B7"/>
-          </a:solidFill>
-          <a:ln w="12700">
-            <a:solidFill>
-              <a:srgbClr val="0068B7"/>
-            </a:solidFill>
-            <a:prstDash val="solid"/>
-          </a:ln>
-        </p:spPr>
-      </p:sp>
-      <p:sp>
-        <p:nvSpPr>
-          <p:cNvPr id="9" name="Text 7"/>
-          <p:cNvSpPr/>
-          <p:nvPr/>
-        </p:nvSpPr>
-        <p:spPr>
-          <a:xfrm>
-            <a:off x="640080" y="731520"/>
-            <a:ext cx="420624" cy="164592"/>
-          </a:xfrm>
-          <a:prstGeom prst="rect">
-            <a:avLst/>
-          </a:prstGeom>
-          <a:noFill/>
-          <a:ln/>
-        </p:spPr>
-        <p:txBody>
-          <a:bodyPr wrap="square" lIns="0" tIns="0" rIns="0" bIns="0" rtlCol="0" anchor="ctr"/>
-          <a:lstStyle/>
-          <a:p>
-            <a:pPr algn="ctr" indent="0" marL="0">
-              <a:buNone/>
-            </a:pPr>
-            <a:r>
-              <a:rPr lang="en-US" sz="1100" b="1" dirty="0">
-                <a:solidFill>
-                  <a:srgbClr val="FFFFFF"/>
-                </a:solidFill>
-                <a:latin typeface="Aptos" pitchFamily="34" charset="0"/>
-                <a:ea typeface="Aptos" pitchFamily="34" charset="-122"/>
-                <a:cs typeface="Aptos" pitchFamily="34" charset="-120"/>
-              </a:rPr>
-              <a:t>8</a:t>
-            </a:r>
-            <a:endParaRPr lang="en-US" sz="1100" dirty="0"/>
-          </a:p>
-        </p:txBody>
-      </p:sp>
-      <p:sp>
-        <p:nvSpPr>
-          <p:cNvPr id="10" name="Text 8"/>
-          <p:cNvSpPr/>
-          <p:nvPr/>
-        </p:nvSpPr>
-        <p:spPr>
-          <a:xfrm>
-            <a:off x="640080" y="621792"/>
             <a:ext cx="10881360" cy="713232"/>
           </a:xfrm>
           <a:prstGeom prst="rect">
@@ -7503,14 +8401,14 @@
       </p:sp>
       <p:sp>
         <p:nvSpPr>
-          <p:cNvPr id="11" name="Text 9"/>
+          <p:cNvPr id="9" name="Text 7"/>
           <p:cNvSpPr/>
           <p:nvPr/>
         </p:nvSpPr>
         <p:spPr>
           <a:xfrm>
             <a:off x="868680" y="1508760"/>
-            <a:ext cx="6537960" cy="4160520"/>
+            <a:ext cx="6309360" cy="4160520"/>
           </a:xfrm>
           <a:prstGeom prst="rect">
             <a:avLst/>
@@ -7555,18 +8453,18 @@
       </p:sp>
       <p:sp>
         <p:nvSpPr>
-          <p:cNvPr id="12" name="Shape 10"/>
-          <p:cNvSpPr/>
-          <p:nvPr/>
-        </p:nvSpPr>
-        <p:spPr>
-          <a:xfrm>
-            <a:off x="7909560" y="1417320"/>
-            <a:ext cx="3154680" cy="1828800"/>
+          <p:cNvPr id="10" name="Shape 8"/>
+          <p:cNvSpPr/>
+          <p:nvPr/>
+        </p:nvSpPr>
+        <p:spPr>
+          <a:xfrm>
+            <a:off x="7635240" y="1325880"/>
+            <a:ext cx="3474720" cy="1325880"/>
           </a:xfrm>
           <a:prstGeom prst="roundRect">
             <a:avLst>
-              <a:gd name="adj" fmla="val 6000"/>
+              <a:gd name="adj" fmla="val 8276"/>
             </a:avLst>
           </a:prstGeom>
           <a:solidFill>
@@ -7582,14 +8480,14 @@
       </p:sp>
       <p:sp>
         <p:nvSpPr>
-          <p:cNvPr id="13" name="Text 11"/>
-          <p:cNvSpPr/>
-          <p:nvPr/>
-        </p:nvSpPr>
-        <p:spPr>
-          <a:xfrm>
-            <a:off x="8074152" y="1563624"/>
-            <a:ext cx="2825496" cy="256032"/>
+          <p:cNvPr id="11" name="Text 9"/>
+          <p:cNvSpPr/>
+          <p:nvPr/>
+        </p:nvSpPr>
+        <p:spPr>
+          <a:xfrm>
+            <a:off x="7799832" y="1472184"/>
+            <a:ext cx="3145536" cy="256032"/>
           </a:xfrm>
           <a:prstGeom prst="rect">
             <a:avLst/>
@@ -7613,7 +8511,7 @@
                 <a:ea typeface="Aptos" pitchFamily="34" charset="-122"/>
                 <a:cs typeface="Aptos" pitchFamily="34" charset="-120"/>
               </a:rPr>
-              <a:t>Key idea</a:t>
+              <a:t>Risk check</a:t>
             </a:r>
             <a:endParaRPr lang="en-US" sz="1300" dirty="0"/>
           </a:p>
@@ -7621,14 +8519,14 @@
       </p:sp>
       <p:sp>
         <p:nvSpPr>
-          <p:cNvPr id="14" name="Text 12"/>
-          <p:cNvSpPr/>
-          <p:nvPr/>
-        </p:nvSpPr>
-        <p:spPr>
-          <a:xfrm>
-            <a:off x="8074152" y="1920240"/>
-            <a:ext cx="2825496" cy="1188720"/>
+          <p:cNvPr id="12" name="Text 10"/>
+          <p:cNvSpPr/>
+          <p:nvPr/>
+        </p:nvSpPr>
+        <p:spPr>
+          <a:xfrm>
+            <a:off x="7799832" y="1828800"/>
+            <a:ext cx="3145536" cy="685800"/>
           </a:xfrm>
           <a:prstGeom prst="rect">
             <a:avLst/>
@@ -7662,18 +8560,171 @@
       </p:sp>
       <p:sp>
         <p:nvSpPr>
-          <p:cNvPr id="15" name="Shape 13"/>
-          <p:cNvSpPr/>
-          <p:nvPr/>
-        </p:nvSpPr>
-        <p:spPr>
-          <a:xfrm>
-            <a:off x="7909560" y="3520440"/>
-            <a:ext cx="3154680" cy="1737360"/>
+          <p:cNvPr id="13" name="Shape 11"/>
+          <p:cNvSpPr/>
+          <p:nvPr/>
+        </p:nvSpPr>
+        <p:spPr>
+          <a:xfrm>
+            <a:off x="7635240" y="2788920"/>
+            <a:ext cx="3474720" cy="1536192"/>
           </a:xfrm>
           <a:prstGeom prst="roundRect">
             <a:avLst>
-              <a:gd name="adj" fmla="val 6316"/>
+              <a:gd name="adj" fmla="val 7143"/>
+            </a:avLst>
+          </a:prstGeom>
+          <a:solidFill>
+            <a:srgbClr val="FFFFFF">
+              <a:alpha val="88000"/>
+            </a:srgbClr>
+          </a:solidFill>
+          <a:ln w="12700">
+            <a:solidFill>
+              <a:srgbClr val="D6E8F2"/>
+            </a:solidFill>
+            <a:prstDash val="solid"/>
+          </a:ln>
+        </p:spPr>
+      </p:sp>
+      <p:sp>
+        <p:nvSpPr>
+          <p:cNvPr id="14" name="Shape 12"/>
+          <p:cNvSpPr/>
+          <p:nvPr/>
+        </p:nvSpPr>
+        <p:spPr>
+          <a:xfrm>
+            <a:off x="8046720" y="3108960"/>
+            <a:ext cx="2651760" cy="896112"/>
+          </a:xfrm>
+          <a:prstGeom prst="arc">
+            <a:avLst/>
+          </a:prstGeom>
+          <a:noFill/>
+          <a:ln w="25400">
+            <a:solidFill>
+              <a:srgbClr val="0068B7"/>
+            </a:solidFill>
+            <a:prstDash val="solid"/>
+          </a:ln>
+        </p:spPr>
+      </p:sp>
+      <p:sp>
+        <p:nvSpPr>
+          <p:cNvPr id="15" name="Text 13"/>
+          <p:cNvSpPr/>
+          <p:nvPr/>
+        </p:nvSpPr>
+        <p:spPr>
+          <a:xfrm>
+            <a:off x="7909560" y="3099816"/>
+            <a:ext cx="2926080" cy="256032"/>
+          </a:xfrm>
+          <a:prstGeom prst="rect">
+            <a:avLst/>
+          </a:prstGeom>
+          <a:noFill/>
+          <a:ln/>
+        </p:spPr>
+        <p:txBody>
+          <a:bodyPr wrap="square" lIns="0" tIns="0" rIns="0" bIns="0" rtlCol="0" anchor="ctr"/>
+          <a:lstStyle/>
+          <a:p>
+            <a:pPr algn="ctr" indent="0" marL="0">
+              <a:buNone/>
+            </a:pPr>
+            <a:r>
+              <a:rPr lang="en-US" sz="1500" b="1" dirty="0">
+                <a:solidFill>
+                  <a:srgbClr val="003A63"/>
+                </a:solidFill>
+                <a:latin typeface="Aptos" pitchFamily="34" charset="0"/>
+                <a:ea typeface="Aptos" pitchFamily="34" charset="-122"/>
+                <a:cs typeface="Aptos" pitchFamily="34" charset="-120"/>
+              </a:rPr>
+              <a:t>Risk</a:t>
+            </a:r>
+            <a:endParaRPr lang="en-US" sz="1500" dirty="0"/>
+          </a:p>
+        </p:txBody>
+      </p:sp>
+      <p:sp>
+        <p:nvSpPr>
+          <p:cNvPr id="16" name="Shape 14"/>
+          <p:cNvSpPr/>
+          <p:nvPr/>
+        </p:nvSpPr>
+        <p:spPr>
+          <a:xfrm>
+            <a:off x="8366760" y="3639312"/>
+            <a:ext cx="2011680" cy="0"/>
+          </a:xfrm>
+          <a:prstGeom prst="line">
+            <a:avLst/>
+          </a:prstGeom>
+          <a:noFill/>
+          <a:ln w="63500">
+            <a:solidFill>
+              <a:srgbClr val="2F8A28"/>
+            </a:solidFill>
+            <a:prstDash val="solid"/>
+          </a:ln>
+        </p:spPr>
+      </p:sp>
+      <p:sp>
+        <p:nvSpPr>
+          <p:cNvPr id="17" name="Text 15"/>
+          <p:cNvSpPr/>
+          <p:nvPr/>
+        </p:nvSpPr>
+        <p:spPr>
+          <a:xfrm>
+            <a:off x="7909560" y="3849624"/>
+            <a:ext cx="2926080" cy="164592"/>
+          </a:xfrm>
+          <a:prstGeom prst="rect">
+            <a:avLst/>
+          </a:prstGeom>
+          <a:noFill/>
+          <a:ln/>
+        </p:spPr>
+        <p:txBody>
+          <a:bodyPr wrap="square" lIns="0" tIns="0" rIns="0" bIns="0" rtlCol="0" anchor="ctr"/>
+          <a:lstStyle/>
+          <a:p>
+            <a:pPr algn="ctr" indent="0" marL="0">
+              <a:buNone/>
+            </a:pPr>
+            <a:r>
+              <a:rPr lang="en-US" sz="900" dirty="0">
+                <a:solidFill>
+                  <a:srgbClr val="003A63"/>
+                </a:solidFill>
+                <a:latin typeface="Aptos" pitchFamily="34" charset="0"/>
+                <a:ea typeface="Aptos" pitchFamily="34" charset="-122"/>
+                <a:cs typeface="Aptos" pitchFamily="34" charset="-120"/>
+              </a:rPr>
+              <a:t>Human review</a:t>
+            </a:r>
+            <a:endParaRPr lang="en-US" sz="900" dirty="0"/>
+          </a:p>
+        </p:txBody>
+      </p:sp>
+      <p:sp>
+        <p:nvSpPr>
+          <p:cNvPr id="18" name="Shape 16"/>
+          <p:cNvSpPr/>
+          <p:nvPr/>
+        </p:nvSpPr>
+        <p:spPr>
+          <a:xfrm>
+            <a:off x="7635240" y="4498848"/>
+            <a:ext cx="3474720" cy="1143000"/>
+          </a:xfrm>
+          <a:prstGeom prst="roundRect">
+            <a:avLst>
+              <a:gd name="adj" fmla="val 9600"/>
             </a:avLst>
           </a:prstGeom>
           <a:solidFill>
@@ -7689,14 +8740,14 @@
       </p:sp>
       <p:sp>
         <p:nvSpPr>
-          <p:cNvPr id="16" name="Text 14"/>
-          <p:cNvSpPr/>
-          <p:nvPr/>
-        </p:nvSpPr>
-        <p:spPr>
-          <a:xfrm>
-            <a:off x="8074152" y="3666744"/>
-            <a:ext cx="2825496" cy="256032"/>
+          <p:cNvPr id="19" name="Text 17"/>
+          <p:cNvSpPr/>
+          <p:nvPr/>
+        </p:nvSpPr>
+        <p:spPr>
+          <a:xfrm>
+            <a:off x="7799832" y="4645152"/>
+            <a:ext cx="3145536" cy="256032"/>
           </a:xfrm>
           <a:prstGeom prst="rect">
             <a:avLst/>
@@ -7720,7 +8771,7 @@
                 <a:ea typeface="Aptos" pitchFamily="34" charset="-122"/>
                 <a:cs typeface="Aptos" pitchFamily="34" charset="-120"/>
               </a:rPr>
-              <a:t>Use this for</a:t>
+              <a:t>Safeguard to plan</a:t>
             </a:r>
             <a:endParaRPr lang="en-US" sz="1300" dirty="0"/>
           </a:p>
@@ -7728,14 +8779,14 @@
       </p:sp>
       <p:sp>
         <p:nvSpPr>
-          <p:cNvPr id="17" name="Text 15"/>
-          <p:cNvSpPr/>
-          <p:nvPr/>
-        </p:nvSpPr>
-        <p:spPr>
-          <a:xfrm>
-            <a:off x="8074152" y="4023360"/>
-            <a:ext cx="2825496" cy="1097280"/>
+          <p:cNvPr id="20" name="Text 18"/>
+          <p:cNvSpPr/>
+          <p:nvPr/>
+        </p:nvSpPr>
+        <p:spPr>
+          <a:xfrm>
+            <a:off x="7799832" y="5001768"/>
+            <a:ext cx="3145536" cy="502920"/>
           </a:xfrm>
           <a:prstGeom prst="rect">
             <a:avLst/>
@@ -7761,7 +8812,7 @@
                 <a:ea typeface="Aptos" pitchFamily="34" charset="-122"/>
                 <a:cs typeface="Aptos" pitchFamily="34" charset="-120"/>
               </a:rPr>
-              <a:t>Connect the concept to public health decisions, safeguards, documentation, or implementation work.</a:t>
+              <a:t>Use the assignment to test whether you can explain the concept, apply it to a realistic public health situation, and identify what would need review before the work moves forward.</a:t>
             </a:r>
             <a:endParaRPr lang="en-US" sz="1550" dirty="0"/>
           </a:p>
@@ -7935,8 +8986,8 @@
         </p:nvSpPr>
         <p:spPr>
           <a:xfrm>
-            <a:off x="9966960" y="6537960"/>
-            <a:ext cx="1645920" cy="201168"/>
+            <a:off x="9646920" y="6537960"/>
+            <a:ext cx="1965960" cy="201168"/>
           </a:xfrm>
           <a:prstGeom prst="rect">
             <a:avLst/>
@@ -7960,7 +9011,7 @@
                 <a:ea typeface="Aptos" pitchFamily="34" charset="-122"/>
                 <a:cs typeface="Aptos" pitchFamily="34" charset="-120"/>
               </a:rPr>
-              <a:t>Â© Paula Soper</a:t>
+              <a:t>Copyright Paula Soper</a:t>
             </a:r>
             <a:endParaRPr lang="en-US" sz="800" dirty="0"/>
           </a:p>
@@ -8007,77 +9058,13 @@
       </p:sp>
       <p:sp>
         <p:nvSpPr>
-          <p:cNvPr id="8" name="Shape 6"/>
+          <p:cNvPr id="8" name="Text 6"/>
           <p:cNvSpPr/>
           <p:nvPr/>
         </p:nvSpPr>
         <p:spPr>
           <a:xfrm>
             <a:off x="640080" y="658368"/>
-            <a:ext cx="420624" cy="420624"/>
-          </a:xfrm>
-          <a:prstGeom prst="ellipse">
-            <a:avLst/>
-          </a:prstGeom>
-          <a:solidFill>
-            <a:srgbClr val="0068B7"/>
-          </a:solidFill>
-          <a:ln w="12700">
-            <a:solidFill>
-              <a:srgbClr val="0068B7"/>
-            </a:solidFill>
-            <a:prstDash val="solid"/>
-          </a:ln>
-        </p:spPr>
-      </p:sp>
-      <p:sp>
-        <p:nvSpPr>
-          <p:cNvPr id="9" name="Text 7"/>
-          <p:cNvSpPr/>
-          <p:nvPr/>
-        </p:nvSpPr>
-        <p:spPr>
-          <a:xfrm>
-            <a:off x="640080" y="731520"/>
-            <a:ext cx="420624" cy="164592"/>
-          </a:xfrm>
-          <a:prstGeom prst="rect">
-            <a:avLst/>
-          </a:prstGeom>
-          <a:noFill/>
-          <a:ln/>
-        </p:spPr>
-        <p:txBody>
-          <a:bodyPr wrap="square" lIns="0" tIns="0" rIns="0" bIns="0" rtlCol="0" anchor="ctr"/>
-          <a:lstStyle/>
-          <a:p>
-            <a:pPr algn="ctr" indent="0" marL="0">
-              <a:buNone/>
-            </a:pPr>
-            <a:r>
-              <a:rPr lang="en-US" sz="1100" b="1" dirty="0">
-                <a:solidFill>
-                  <a:srgbClr val="FFFFFF"/>
-                </a:solidFill>
-                <a:latin typeface="Aptos" pitchFamily="34" charset="0"/>
-                <a:ea typeface="Aptos" pitchFamily="34" charset="-122"/>
-                <a:cs typeface="Aptos" pitchFamily="34" charset="-120"/>
-              </a:rPr>
-              <a:t>9</a:t>
-            </a:r>
-            <a:endParaRPr lang="en-US" sz="1100" dirty="0"/>
-          </a:p>
-        </p:txBody>
-      </p:sp>
-      <p:sp>
-        <p:nvSpPr>
-          <p:cNvPr id="10" name="Text 8"/>
-          <p:cNvSpPr/>
-          <p:nvPr/>
-        </p:nvSpPr>
-        <p:spPr>
-          <a:xfrm>
-            <a:off x="640080" y="621792"/>
             <a:ext cx="10881360" cy="713232"/>
           </a:xfrm>
           <a:prstGeom prst="rect">
@@ -8112,14 +9099,14 @@
       </p:sp>
       <p:sp>
         <p:nvSpPr>
-          <p:cNvPr id="11" name="Text 9"/>
+          <p:cNvPr id="9" name="Text 7"/>
           <p:cNvSpPr/>
           <p:nvPr/>
         </p:nvSpPr>
         <p:spPr>
           <a:xfrm>
             <a:off x="868680" y="1508760"/>
-            <a:ext cx="6537960" cy="4160520"/>
+            <a:ext cx="6309360" cy="4160520"/>
           </a:xfrm>
           <a:prstGeom prst="rect">
             <a:avLst/>
@@ -8178,18 +9165,18 @@
       </p:sp>
       <p:sp>
         <p:nvSpPr>
-          <p:cNvPr id="12" name="Shape 10"/>
-          <p:cNvSpPr/>
-          <p:nvPr/>
-        </p:nvSpPr>
-        <p:spPr>
-          <a:xfrm>
-            <a:off x="7909560" y="1417320"/>
-            <a:ext cx="3154680" cy="1828800"/>
+          <p:cNvPr id="10" name="Shape 8"/>
+          <p:cNvSpPr/>
+          <p:nvPr/>
+        </p:nvSpPr>
+        <p:spPr>
+          <a:xfrm>
+            <a:off x="7635240" y="1325880"/>
+            <a:ext cx="3474720" cy="1325880"/>
           </a:xfrm>
           <a:prstGeom prst="roundRect">
             <a:avLst>
-              <a:gd name="adj" fmla="val 6000"/>
+              <a:gd name="adj" fmla="val 8276"/>
             </a:avLst>
           </a:prstGeom>
           <a:solidFill>
@@ -8205,14 +9192,14 @@
       </p:sp>
       <p:sp>
         <p:nvSpPr>
-          <p:cNvPr id="13" name="Text 11"/>
-          <p:cNvSpPr/>
-          <p:nvPr/>
-        </p:nvSpPr>
-        <p:spPr>
-          <a:xfrm>
-            <a:off x="8074152" y="1563624"/>
-            <a:ext cx="2825496" cy="256032"/>
+          <p:cNvPr id="11" name="Text 9"/>
+          <p:cNvSpPr/>
+          <p:nvPr/>
+        </p:nvSpPr>
+        <p:spPr>
+          <a:xfrm>
+            <a:off x="7799832" y="1472184"/>
+            <a:ext cx="3145536" cy="256032"/>
           </a:xfrm>
           <a:prstGeom prst="rect">
             <a:avLst/>
@@ -8236,7 +9223,7 @@
                 <a:ea typeface="Aptos" pitchFamily="34" charset="-122"/>
                 <a:cs typeface="Aptos" pitchFamily="34" charset="-120"/>
               </a:rPr>
-              <a:t>Key idea</a:t>
+              <a:t>Risk check</a:t>
             </a:r>
             <a:endParaRPr lang="en-US" sz="1300" dirty="0"/>
           </a:p>
@@ -8244,14 +9231,14 @@
       </p:sp>
       <p:sp>
         <p:nvSpPr>
-          <p:cNvPr id="14" name="Text 12"/>
-          <p:cNvSpPr/>
-          <p:nvPr/>
-        </p:nvSpPr>
-        <p:spPr>
-          <a:xfrm>
-            <a:off x="8074152" y="1920240"/>
-            <a:ext cx="2825496" cy="1188720"/>
+          <p:cNvPr id="12" name="Text 10"/>
+          <p:cNvSpPr/>
+          <p:nvPr/>
+        </p:nvSpPr>
+        <p:spPr>
+          <a:xfrm>
+            <a:off x="7799832" y="1828800"/>
+            <a:ext cx="3145536" cy="685800"/>
           </a:xfrm>
           <a:prstGeom prst="rect">
             <a:avLst/>
@@ -8285,18 +9272,171 @@
       </p:sp>
       <p:sp>
         <p:nvSpPr>
-          <p:cNvPr id="15" name="Shape 13"/>
-          <p:cNvSpPr/>
-          <p:nvPr/>
-        </p:nvSpPr>
-        <p:spPr>
-          <a:xfrm>
-            <a:off x="7909560" y="3520440"/>
-            <a:ext cx="3154680" cy="1737360"/>
+          <p:cNvPr id="13" name="Shape 11"/>
+          <p:cNvSpPr/>
+          <p:nvPr/>
+        </p:nvSpPr>
+        <p:spPr>
+          <a:xfrm>
+            <a:off x="7635240" y="2788920"/>
+            <a:ext cx="3474720" cy="1536192"/>
           </a:xfrm>
           <a:prstGeom prst="roundRect">
             <a:avLst>
-              <a:gd name="adj" fmla="val 6316"/>
+              <a:gd name="adj" fmla="val 7143"/>
+            </a:avLst>
+          </a:prstGeom>
+          <a:solidFill>
+            <a:srgbClr val="FFFFFF">
+              <a:alpha val="88000"/>
+            </a:srgbClr>
+          </a:solidFill>
+          <a:ln w="12700">
+            <a:solidFill>
+              <a:srgbClr val="D6E8F2"/>
+            </a:solidFill>
+            <a:prstDash val="solid"/>
+          </a:ln>
+        </p:spPr>
+      </p:sp>
+      <p:sp>
+        <p:nvSpPr>
+          <p:cNvPr id="14" name="Shape 12"/>
+          <p:cNvSpPr/>
+          <p:nvPr/>
+        </p:nvSpPr>
+        <p:spPr>
+          <a:xfrm>
+            <a:off x="8046720" y="3108960"/>
+            <a:ext cx="2651760" cy="896112"/>
+          </a:xfrm>
+          <a:prstGeom prst="arc">
+            <a:avLst/>
+          </a:prstGeom>
+          <a:noFill/>
+          <a:ln w="25400">
+            <a:solidFill>
+              <a:srgbClr val="0068B7"/>
+            </a:solidFill>
+            <a:prstDash val="solid"/>
+          </a:ln>
+        </p:spPr>
+      </p:sp>
+      <p:sp>
+        <p:nvSpPr>
+          <p:cNvPr id="15" name="Text 13"/>
+          <p:cNvSpPr/>
+          <p:nvPr/>
+        </p:nvSpPr>
+        <p:spPr>
+          <a:xfrm>
+            <a:off x="7909560" y="3099816"/>
+            <a:ext cx="2926080" cy="256032"/>
+          </a:xfrm>
+          <a:prstGeom prst="rect">
+            <a:avLst/>
+          </a:prstGeom>
+          <a:noFill/>
+          <a:ln/>
+        </p:spPr>
+        <p:txBody>
+          <a:bodyPr wrap="square" lIns="0" tIns="0" rIns="0" bIns="0" rtlCol="0" anchor="ctr"/>
+          <a:lstStyle/>
+          <a:p>
+            <a:pPr algn="ctr" indent="0" marL="0">
+              <a:buNone/>
+            </a:pPr>
+            <a:r>
+              <a:rPr lang="en-US" sz="1500" b="1" dirty="0">
+                <a:solidFill>
+                  <a:srgbClr val="003A63"/>
+                </a:solidFill>
+                <a:latin typeface="Aptos" pitchFamily="34" charset="0"/>
+                <a:ea typeface="Aptos" pitchFamily="34" charset="-122"/>
+                <a:cs typeface="Aptos" pitchFamily="34" charset="-120"/>
+              </a:rPr>
+              <a:t>Risk</a:t>
+            </a:r>
+            <a:endParaRPr lang="en-US" sz="1500" dirty="0"/>
+          </a:p>
+        </p:txBody>
+      </p:sp>
+      <p:sp>
+        <p:nvSpPr>
+          <p:cNvPr id="16" name="Shape 14"/>
+          <p:cNvSpPr/>
+          <p:nvPr/>
+        </p:nvSpPr>
+        <p:spPr>
+          <a:xfrm>
+            <a:off x="8366760" y="3639312"/>
+            <a:ext cx="2011680" cy="0"/>
+          </a:xfrm>
+          <a:prstGeom prst="line">
+            <a:avLst/>
+          </a:prstGeom>
+          <a:noFill/>
+          <a:ln w="63500">
+            <a:solidFill>
+              <a:srgbClr val="2F8A28"/>
+            </a:solidFill>
+            <a:prstDash val="solid"/>
+          </a:ln>
+        </p:spPr>
+      </p:sp>
+      <p:sp>
+        <p:nvSpPr>
+          <p:cNvPr id="17" name="Text 15"/>
+          <p:cNvSpPr/>
+          <p:nvPr/>
+        </p:nvSpPr>
+        <p:spPr>
+          <a:xfrm>
+            <a:off x="7909560" y="3849624"/>
+            <a:ext cx="2926080" cy="164592"/>
+          </a:xfrm>
+          <a:prstGeom prst="rect">
+            <a:avLst/>
+          </a:prstGeom>
+          <a:noFill/>
+          <a:ln/>
+        </p:spPr>
+        <p:txBody>
+          <a:bodyPr wrap="square" lIns="0" tIns="0" rIns="0" bIns="0" rtlCol="0" anchor="ctr"/>
+          <a:lstStyle/>
+          <a:p>
+            <a:pPr algn="ctr" indent="0" marL="0">
+              <a:buNone/>
+            </a:pPr>
+            <a:r>
+              <a:rPr lang="en-US" sz="900" dirty="0">
+                <a:solidFill>
+                  <a:srgbClr val="003A63"/>
+                </a:solidFill>
+                <a:latin typeface="Aptos" pitchFamily="34" charset="0"/>
+                <a:ea typeface="Aptos" pitchFamily="34" charset="-122"/>
+                <a:cs typeface="Aptos" pitchFamily="34" charset="-120"/>
+              </a:rPr>
+              <a:t>Human review</a:t>
+            </a:r>
+            <a:endParaRPr lang="en-US" sz="900" dirty="0"/>
+          </a:p>
+        </p:txBody>
+      </p:sp>
+      <p:sp>
+        <p:nvSpPr>
+          <p:cNvPr id="18" name="Shape 16"/>
+          <p:cNvSpPr/>
+          <p:nvPr/>
+        </p:nvSpPr>
+        <p:spPr>
+          <a:xfrm>
+            <a:off x="7635240" y="4498848"/>
+            <a:ext cx="3474720" cy="1143000"/>
+          </a:xfrm>
+          <a:prstGeom prst="roundRect">
+            <a:avLst>
+              <a:gd name="adj" fmla="val 9600"/>
             </a:avLst>
           </a:prstGeom>
           <a:solidFill>
@@ -8312,14 +9452,14 @@
       </p:sp>
       <p:sp>
         <p:nvSpPr>
-          <p:cNvPr id="16" name="Text 14"/>
-          <p:cNvSpPr/>
-          <p:nvPr/>
-        </p:nvSpPr>
-        <p:spPr>
-          <a:xfrm>
-            <a:off x="8074152" y="3666744"/>
-            <a:ext cx="2825496" cy="256032"/>
+          <p:cNvPr id="19" name="Text 17"/>
+          <p:cNvSpPr/>
+          <p:nvPr/>
+        </p:nvSpPr>
+        <p:spPr>
+          <a:xfrm>
+            <a:off x="7799832" y="4645152"/>
+            <a:ext cx="3145536" cy="256032"/>
           </a:xfrm>
           <a:prstGeom prst="rect">
             <a:avLst/>
@@ -8343,7 +9483,7 @@
                 <a:ea typeface="Aptos" pitchFamily="34" charset="-122"/>
                 <a:cs typeface="Aptos" pitchFamily="34" charset="-120"/>
               </a:rPr>
-              <a:t>Use this for</a:t>
+              <a:t>Safeguard to plan</a:t>
             </a:r>
             <a:endParaRPr lang="en-US" sz="1300" dirty="0"/>
           </a:p>
@@ -8351,14 +9491,14 @@
       </p:sp>
       <p:sp>
         <p:nvSpPr>
-          <p:cNvPr id="17" name="Text 15"/>
-          <p:cNvSpPr/>
-          <p:nvPr/>
-        </p:nvSpPr>
-        <p:spPr>
-          <a:xfrm>
-            <a:off x="8074152" y="4023360"/>
-            <a:ext cx="2825496" cy="1097280"/>
+          <p:cNvPr id="20" name="Text 18"/>
+          <p:cNvSpPr/>
+          <p:nvPr/>
+        </p:nvSpPr>
+        <p:spPr>
+          <a:xfrm>
+            <a:off x="7799832" y="5001768"/>
+            <a:ext cx="3145536" cy="502920"/>
           </a:xfrm>
           <a:prstGeom prst="rect">
             <a:avLst/>
@@ -8384,7 +9524,7 @@
                 <a:ea typeface="Aptos" pitchFamily="34" charset="-122"/>
                 <a:cs typeface="Aptos" pitchFamily="34" charset="-120"/>
               </a:rPr>
-              <a:t>Connect the concept to public health decisions, safeguards, documentation, or implementation work.</a:t>
+              <a:t>Identify what could go wrong, who could be affected, what safeguards are needed, and what evidence should be reviewed before use expands.</a:t>
             </a:r>
             <a:endParaRPr lang="en-US" sz="1550" dirty="0"/>
           </a:p>
@@ -8558,8 +9698,8 @@
         </p:nvSpPr>
         <p:spPr>
           <a:xfrm>
-            <a:off x="9966960" y="6537960"/>
-            <a:ext cx="1645920" cy="201168"/>
+            <a:off x="9646920" y="6537960"/>
+            <a:ext cx="1965960" cy="201168"/>
           </a:xfrm>
           <a:prstGeom prst="rect">
             <a:avLst/>
@@ -8583,7 +9723,7 @@
                 <a:ea typeface="Aptos" pitchFamily="34" charset="-122"/>
                 <a:cs typeface="Aptos" pitchFamily="34" charset="-120"/>
               </a:rPr>
-              <a:t>Â© Paula Soper</a:t>
+              <a:t>Copyright Paula Soper</a:t>
             </a:r>
             <a:endParaRPr lang="en-US" sz="800" dirty="0"/>
           </a:p>
@@ -8678,7 +9818,7 @@
         <p:spPr>
           <a:xfrm>
             <a:off x="868680" y="1508760"/>
-            <a:ext cx="6537960" cy="4160520"/>
+            <a:ext cx="6309360" cy="4160520"/>
           </a:xfrm>
           <a:prstGeom prst="rect">
             <a:avLst/>
@@ -8729,12 +9869,12 @@
         </p:nvSpPr>
         <p:spPr>
           <a:xfrm>
-            <a:off x="7909560" y="1417320"/>
-            <a:ext cx="3154680" cy="1828800"/>
+            <a:off x="7635240" y="1325880"/>
+            <a:ext cx="3474720" cy="1325880"/>
           </a:xfrm>
           <a:prstGeom prst="roundRect">
             <a:avLst>
-              <a:gd name="adj" fmla="val 6000"/>
+              <a:gd name="adj" fmla="val 8276"/>
             </a:avLst>
           </a:prstGeom>
           <a:solidFill>
@@ -8756,8 +9896,8 @@
         </p:nvSpPr>
         <p:spPr>
           <a:xfrm>
-            <a:off x="8074152" y="1563624"/>
-            <a:ext cx="2825496" cy="256032"/>
+            <a:off x="7799832" y="1472184"/>
+            <a:ext cx="3145536" cy="256032"/>
           </a:xfrm>
           <a:prstGeom prst="rect">
             <a:avLst/>
@@ -8781,7 +9921,7 @@
                 <a:ea typeface="Aptos" pitchFamily="34" charset="-122"/>
                 <a:cs typeface="Aptos" pitchFamily="34" charset="-120"/>
               </a:rPr>
-              <a:t>Key idea</a:t>
+              <a:t>Risk check</a:t>
             </a:r>
             <a:endParaRPr lang="en-US" sz="1300" dirty="0"/>
           </a:p>
@@ -8795,8 +9935,8 @@
         </p:nvSpPr>
         <p:spPr>
           <a:xfrm>
-            <a:off x="8074152" y="1920240"/>
-            <a:ext cx="2825496" cy="1188720"/>
+            <a:off x="7799832" y="1828800"/>
+            <a:ext cx="3145536" cy="685800"/>
           </a:xfrm>
           <a:prstGeom prst="rect">
             <a:avLst/>
@@ -8836,12 +9976,165 @@
         </p:nvSpPr>
         <p:spPr>
           <a:xfrm>
-            <a:off x="7909560" y="3520440"/>
-            <a:ext cx="3154680" cy="1737360"/>
+            <a:off x="7635240" y="2788920"/>
+            <a:ext cx="3474720" cy="1536192"/>
           </a:xfrm>
           <a:prstGeom prst="roundRect">
             <a:avLst>
-              <a:gd name="adj" fmla="val 6316"/>
+              <a:gd name="adj" fmla="val 7143"/>
+            </a:avLst>
+          </a:prstGeom>
+          <a:solidFill>
+            <a:srgbClr val="FFFFFF">
+              <a:alpha val="88000"/>
+            </a:srgbClr>
+          </a:solidFill>
+          <a:ln w="12700">
+            <a:solidFill>
+              <a:srgbClr val="D6E8F2"/>
+            </a:solidFill>
+            <a:prstDash val="solid"/>
+          </a:ln>
+        </p:spPr>
+      </p:sp>
+      <p:sp>
+        <p:nvSpPr>
+          <p:cNvPr id="14" name="Shape 12"/>
+          <p:cNvSpPr/>
+          <p:nvPr/>
+        </p:nvSpPr>
+        <p:spPr>
+          <a:xfrm>
+            <a:off x="8046720" y="3108960"/>
+            <a:ext cx="2651760" cy="896112"/>
+          </a:xfrm>
+          <a:prstGeom prst="arc">
+            <a:avLst/>
+          </a:prstGeom>
+          <a:noFill/>
+          <a:ln w="25400">
+            <a:solidFill>
+              <a:srgbClr val="0068B7"/>
+            </a:solidFill>
+            <a:prstDash val="solid"/>
+          </a:ln>
+        </p:spPr>
+      </p:sp>
+      <p:sp>
+        <p:nvSpPr>
+          <p:cNvPr id="15" name="Text 13"/>
+          <p:cNvSpPr/>
+          <p:nvPr/>
+        </p:nvSpPr>
+        <p:spPr>
+          <a:xfrm>
+            <a:off x="7909560" y="3099816"/>
+            <a:ext cx="2926080" cy="256032"/>
+          </a:xfrm>
+          <a:prstGeom prst="rect">
+            <a:avLst/>
+          </a:prstGeom>
+          <a:noFill/>
+          <a:ln/>
+        </p:spPr>
+        <p:txBody>
+          <a:bodyPr wrap="square" lIns="0" tIns="0" rIns="0" bIns="0" rtlCol="0" anchor="ctr"/>
+          <a:lstStyle/>
+          <a:p>
+            <a:pPr algn="ctr" indent="0" marL="0">
+              <a:buNone/>
+            </a:pPr>
+            <a:r>
+              <a:rPr lang="en-US" sz="1500" b="1" dirty="0">
+                <a:solidFill>
+                  <a:srgbClr val="003A63"/>
+                </a:solidFill>
+                <a:latin typeface="Aptos" pitchFamily="34" charset="0"/>
+                <a:ea typeface="Aptos" pitchFamily="34" charset="-122"/>
+                <a:cs typeface="Aptos" pitchFamily="34" charset="-120"/>
+              </a:rPr>
+              <a:t>Risk</a:t>
+            </a:r>
+            <a:endParaRPr lang="en-US" sz="1500" dirty="0"/>
+          </a:p>
+        </p:txBody>
+      </p:sp>
+      <p:sp>
+        <p:nvSpPr>
+          <p:cNvPr id="16" name="Shape 14"/>
+          <p:cNvSpPr/>
+          <p:nvPr/>
+        </p:nvSpPr>
+        <p:spPr>
+          <a:xfrm>
+            <a:off x="8366760" y="3639312"/>
+            <a:ext cx="2011680" cy="0"/>
+          </a:xfrm>
+          <a:prstGeom prst="line">
+            <a:avLst/>
+          </a:prstGeom>
+          <a:noFill/>
+          <a:ln w="63500">
+            <a:solidFill>
+              <a:srgbClr val="2F8A28"/>
+            </a:solidFill>
+            <a:prstDash val="solid"/>
+          </a:ln>
+        </p:spPr>
+      </p:sp>
+      <p:sp>
+        <p:nvSpPr>
+          <p:cNvPr id="17" name="Text 15"/>
+          <p:cNvSpPr/>
+          <p:nvPr/>
+        </p:nvSpPr>
+        <p:spPr>
+          <a:xfrm>
+            <a:off x="7909560" y="3849624"/>
+            <a:ext cx="2926080" cy="164592"/>
+          </a:xfrm>
+          <a:prstGeom prst="rect">
+            <a:avLst/>
+          </a:prstGeom>
+          <a:noFill/>
+          <a:ln/>
+        </p:spPr>
+        <p:txBody>
+          <a:bodyPr wrap="square" lIns="0" tIns="0" rIns="0" bIns="0" rtlCol="0" anchor="ctr"/>
+          <a:lstStyle/>
+          <a:p>
+            <a:pPr algn="ctr" indent="0" marL="0">
+              <a:buNone/>
+            </a:pPr>
+            <a:r>
+              <a:rPr lang="en-US" sz="900" dirty="0">
+                <a:solidFill>
+                  <a:srgbClr val="003A63"/>
+                </a:solidFill>
+                <a:latin typeface="Aptos" pitchFamily="34" charset="0"/>
+                <a:ea typeface="Aptos" pitchFamily="34" charset="-122"/>
+                <a:cs typeface="Aptos" pitchFamily="34" charset="-120"/>
+              </a:rPr>
+              <a:t>Human review</a:t>
+            </a:r>
+            <a:endParaRPr lang="en-US" sz="900" dirty="0"/>
+          </a:p>
+        </p:txBody>
+      </p:sp>
+      <p:sp>
+        <p:nvSpPr>
+          <p:cNvPr id="18" name="Shape 16"/>
+          <p:cNvSpPr/>
+          <p:nvPr/>
+        </p:nvSpPr>
+        <p:spPr>
+          <a:xfrm>
+            <a:off x="7635240" y="4498848"/>
+            <a:ext cx="3474720" cy="1143000"/>
+          </a:xfrm>
+          <a:prstGeom prst="roundRect">
+            <a:avLst>
+              <a:gd name="adj" fmla="val 9600"/>
             </a:avLst>
           </a:prstGeom>
           <a:solidFill>
@@ -8857,14 +10150,14 @@
       </p:sp>
       <p:sp>
         <p:nvSpPr>
-          <p:cNvPr id="14" name="Text 12"/>
-          <p:cNvSpPr/>
-          <p:nvPr/>
-        </p:nvSpPr>
-        <p:spPr>
-          <a:xfrm>
-            <a:off x="8074152" y="3666744"/>
-            <a:ext cx="2825496" cy="256032"/>
+          <p:cNvPr id="19" name="Text 17"/>
+          <p:cNvSpPr/>
+          <p:nvPr/>
+        </p:nvSpPr>
+        <p:spPr>
+          <a:xfrm>
+            <a:off x="7799832" y="4645152"/>
+            <a:ext cx="3145536" cy="256032"/>
           </a:xfrm>
           <a:prstGeom prst="rect">
             <a:avLst/>
@@ -8888,7 +10181,7 @@
                 <a:ea typeface="Aptos" pitchFamily="34" charset="-122"/>
                 <a:cs typeface="Aptos" pitchFamily="34" charset="-120"/>
               </a:rPr>
-              <a:t>Use this for</a:t>
+              <a:t>Safeguard to plan</a:t>
             </a:r>
             <a:endParaRPr lang="en-US" sz="1300" dirty="0"/>
           </a:p>
@@ -8896,14 +10189,14 @@
       </p:sp>
       <p:sp>
         <p:nvSpPr>
-          <p:cNvPr id="15" name="Text 13"/>
-          <p:cNvSpPr/>
-          <p:nvPr/>
-        </p:nvSpPr>
-        <p:spPr>
-          <a:xfrm>
-            <a:off x="8074152" y="4023360"/>
-            <a:ext cx="2825496" cy="1097280"/>
+          <p:cNvPr id="20" name="Text 18"/>
+          <p:cNvSpPr/>
+          <p:nvPr/>
+        </p:nvSpPr>
+        <p:spPr>
+          <a:xfrm>
+            <a:off x="7799832" y="5001768"/>
+            <a:ext cx="3145536" cy="502920"/>
           </a:xfrm>
           <a:prstGeom prst="rect">
             <a:avLst/>
@@ -8929,7 +10222,7 @@
                 <a:ea typeface="Aptos" pitchFamily="34" charset="-122"/>
                 <a:cs typeface="Aptos" pitchFamily="34" charset="-120"/>
               </a:rPr>
-              <a:t>Connect the concept to public health decisions, safeguards, documentation, or implementation work.</a:t>
+              <a:t>Identify what could go wrong, who could be affected, what safeguards are needed, and what evidence should be reviewed before use expands.</a:t>
             </a:r>
             <a:endParaRPr lang="en-US" sz="1550" dirty="0"/>
           </a:p>
@@ -9103,8 +10396,8 @@
         </p:nvSpPr>
         <p:spPr>
           <a:xfrm>
-            <a:off x="9966960" y="6537960"/>
-            <a:ext cx="1645920" cy="201168"/>
+            <a:off x="9646920" y="6537960"/>
+            <a:ext cx="1965960" cy="201168"/>
           </a:xfrm>
           <a:prstGeom prst="rect">
             <a:avLst/>
@@ -9128,7 +10421,7 @@
                 <a:ea typeface="Aptos" pitchFamily="34" charset="-122"/>
                 <a:cs typeface="Aptos" pitchFamily="34" charset="-120"/>
               </a:rPr>
-              <a:t>Â© Paula Soper</a:t>
+              <a:t>Copyright Paula Soper</a:t>
             </a:r>
             <a:endParaRPr lang="en-US" sz="800" dirty="0"/>
           </a:p>
@@ -9491,46 +10784,7 @@
       </p:sp>
       <p:sp>
         <p:nvSpPr>
-          <p:cNvPr id="15" name="Text 13"/>
-          <p:cNvSpPr/>
-          <p:nvPr/>
-        </p:nvSpPr>
-        <p:spPr>
-          <a:xfrm>
-            <a:off x="8695944" y="3941064"/>
-            <a:ext cx="201168" cy="256032"/>
-          </a:xfrm>
-          <a:prstGeom prst="rect">
-            <a:avLst/>
-          </a:prstGeom>
-          <a:noFill/>
-          <a:ln/>
-        </p:spPr>
-        <p:txBody>
-          <a:bodyPr wrap="square" lIns="0" tIns="0" rIns="0" bIns="0" rtlCol="0" anchor="ctr"/>
-          <a:lstStyle/>
-          <a:p>
-            <a:pPr algn="ctr" indent="0" marL="0">
-              <a:buNone/>
-            </a:pPr>
-            <a:r>
-              <a:rPr lang="en-US" sz="1800" b="1" dirty="0">
-                <a:solidFill>
-                  <a:srgbClr val="0068B7"/>
-                </a:solidFill>
-                <a:latin typeface="Aptos" pitchFamily="34" charset="0"/>
-                <a:ea typeface="Aptos" pitchFamily="34" charset="-122"/>
-                <a:cs typeface="Aptos" pitchFamily="34" charset="-120"/>
-              </a:rPr>
-              <a:t>â†’</a:t>
-            </a:r>
-            <a:endParaRPr lang="en-US" sz="1800" dirty="0"/>
-          </a:p>
-        </p:txBody>
-      </p:sp>
-      <p:sp>
-        <p:nvSpPr>
-          <p:cNvPr id="16" name="Shape 14"/>
+          <p:cNvPr id="15" name="Shape 13"/>
           <p:cNvSpPr/>
           <p:nvPr/>
         </p:nvSpPr>
@@ -9557,7 +10811,7 @@
       </p:sp>
       <p:sp>
         <p:nvSpPr>
-          <p:cNvPr id="17" name="Text 15"/>
+          <p:cNvPr id="16" name="Text 14"/>
           <p:cNvSpPr/>
           <p:nvPr/>
         </p:nvSpPr>
@@ -9598,46 +10852,7 @@
       </p:sp>
       <p:sp>
         <p:nvSpPr>
-          <p:cNvPr id="18" name="Text 16"/>
-          <p:cNvSpPr/>
-          <p:nvPr/>
-        </p:nvSpPr>
-        <p:spPr>
-          <a:xfrm>
-            <a:off x="9985248" y="3941064"/>
-            <a:ext cx="201168" cy="256032"/>
-          </a:xfrm>
-          <a:prstGeom prst="rect">
-            <a:avLst/>
-          </a:prstGeom>
-          <a:noFill/>
-          <a:ln/>
-        </p:spPr>
-        <p:txBody>
-          <a:bodyPr wrap="square" lIns="0" tIns="0" rIns="0" bIns="0" rtlCol="0" anchor="ctr"/>
-          <a:lstStyle/>
-          <a:p>
-            <a:pPr algn="ctr" indent="0" marL="0">
-              <a:buNone/>
-            </a:pPr>
-            <a:r>
-              <a:rPr lang="en-US" sz="1800" b="1" dirty="0">
-                <a:solidFill>
-                  <a:srgbClr val="0068B7"/>
-                </a:solidFill>
-                <a:latin typeface="Aptos" pitchFamily="34" charset="0"/>
-                <a:ea typeface="Aptos" pitchFamily="34" charset="-122"/>
-                <a:cs typeface="Aptos" pitchFamily="34" charset="-120"/>
-              </a:rPr>
-              <a:t>â†’</a:t>
-            </a:r>
-            <a:endParaRPr lang="en-US" sz="1800" dirty="0"/>
-          </a:p>
-        </p:txBody>
-      </p:sp>
-      <p:sp>
-        <p:nvSpPr>
-          <p:cNvPr id="19" name="Shape 17"/>
+          <p:cNvPr id="17" name="Shape 15"/>
           <p:cNvSpPr/>
           <p:nvPr/>
         </p:nvSpPr>
@@ -9664,7 +10879,7 @@
       </p:sp>
       <p:sp>
         <p:nvSpPr>
-          <p:cNvPr id="20" name="Text 18"/>
+          <p:cNvPr id="18" name="Text 16"/>
           <p:cNvSpPr/>
           <p:nvPr/>
         </p:nvSpPr>
@@ -9871,8 +11086,8 @@
         </p:nvSpPr>
         <p:spPr>
           <a:xfrm>
-            <a:off x="9966960" y="6537960"/>
-            <a:ext cx="1645920" cy="201168"/>
+            <a:off x="9646920" y="6537960"/>
+            <a:ext cx="1965960" cy="201168"/>
           </a:xfrm>
           <a:prstGeom prst="rect">
             <a:avLst/>
@@ -9896,7 +11111,7 @@
                 <a:ea typeface="Aptos" pitchFamily="34" charset="-122"/>
                 <a:cs typeface="Aptos" pitchFamily="34" charset="-120"/>
               </a:rPr>
-              <a:t>Â© Paula Soper</a:t>
+              <a:t>Copyright Paula Soper</a:t>
             </a:r>
             <a:endParaRPr lang="en-US" sz="800" dirty="0"/>
           </a:p>
@@ -9943,77 +11158,13 @@
       </p:sp>
       <p:sp>
         <p:nvSpPr>
-          <p:cNvPr id="8" name="Shape 6"/>
+          <p:cNvPr id="8" name="Text 6"/>
           <p:cNvSpPr/>
           <p:nvPr/>
         </p:nvSpPr>
         <p:spPr>
           <a:xfrm>
             <a:off x="640080" y="658368"/>
-            <a:ext cx="420624" cy="420624"/>
-          </a:xfrm>
-          <a:prstGeom prst="ellipse">
-            <a:avLst/>
-          </a:prstGeom>
-          <a:solidFill>
-            <a:srgbClr val="0068B7"/>
-          </a:solidFill>
-          <a:ln w="12700">
-            <a:solidFill>
-              <a:srgbClr val="0068B7"/>
-            </a:solidFill>
-            <a:prstDash val="solid"/>
-          </a:ln>
-        </p:spPr>
-      </p:sp>
-      <p:sp>
-        <p:nvSpPr>
-          <p:cNvPr id="9" name="Text 7"/>
-          <p:cNvSpPr/>
-          <p:nvPr/>
-        </p:nvSpPr>
-        <p:spPr>
-          <a:xfrm>
-            <a:off x="640080" y="731520"/>
-            <a:ext cx="420624" cy="164592"/>
-          </a:xfrm>
-          <a:prstGeom prst="rect">
-            <a:avLst/>
-          </a:prstGeom>
-          <a:noFill/>
-          <a:ln/>
-        </p:spPr>
-        <p:txBody>
-          <a:bodyPr wrap="square" lIns="0" tIns="0" rIns="0" bIns="0" rtlCol="0" anchor="ctr"/>
-          <a:lstStyle/>
-          <a:p>
-            <a:pPr algn="ctr" indent="0" marL="0">
-              <a:buNone/>
-            </a:pPr>
-            <a:r>
-              <a:rPr lang="en-US" sz="1100" b="1" dirty="0">
-                <a:solidFill>
-                  <a:srgbClr val="FFFFFF"/>
-                </a:solidFill>
-                <a:latin typeface="Aptos" pitchFamily="34" charset="0"/>
-                <a:ea typeface="Aptos" pitchFamily="34" charset="-122"/>
-                <a:cs typeface="Aptos" pitchFamily="34" charset="-120"/>
-              </a:rPr>
-              <a:t>10</a:t>
-            </a:r>
-            <a:endParaRPr lang="en-US" sz="1100" dirty="0"/>
-          </a:p>
-        </p:txBody>
-      </p:sp>
-      <p:sp>
-        <p:nvSpPr>
-          <p:cNvPr id="10" name="Text 8"/>
-          <p:cNvSpPr/>
-          <p:nvPr/>
-        </p:nvSpPr>
-        <p:spPr>
-          <a:xfrm>
-            <a:off x="640080" y="621792"/>
             <a:ext cx="10881360" cy="713232"/>
           </a:xfrm>
           <a:prstGeom prst="rect">
@@ -10048,14 +11199,14 @@
       </p:sp>
       <p:sp>
         <p:nvSpPr>
-          <p:cNvPr id="11" name="Text 9"/>
+          <p:cNvPr id="9" name="Text 7"/>
           <p:cNvSpPr/>
           <p:nvPr/>
         </p:nvSpPr>
         <p:spPr>
           <a:xfrm>
             <a:off x="868680" y="1508760"/>
-            <a:ext cx="6537960" cy="4160520"/>
+            <a:ext cx="6309360" cy="4160520"/>
           </a:xfrm>
           <a:prstGeom prst="rect">
             <a:avLst/>
@@ -10114,18 +11265,18 @@
       </p:sp>
       <p:sp>
         <p:nvSpPr>
-          <p:cNvPr id="12" name="Shape 10"/>
-          <p:cNvSpPr/>
-          <p:nvPr/>
-        </p:nvSpPr>
-        <p:spPr>
-          <a:xfrm>
-            <a:off x="7909560" y="1417320"/>
-            <a:ext cx="3154680" cy="1828800"/>
+          <p:cNvPr id="10" name="Shape 8"/>
+          <p:cNvSpPr/>
+          <p:nvPr/>
+        </p:nvSpPr>
+        <p:spPr>
+          <a:xfrm>
+            <a:off x="7635240" y="1325880"/>
+            <a:ext cx="3474720" cy="1325880"/>
           </a:xfrm>
           <a:prstGeom prst="roundRect">
             <a:avLst>
-              <a:gd name="adj" fmla="val 6000"/>
+              <a:gd name="adj" fmla="val 8276"/>
             </a:avLst>
           </a:prstGeom>
           <a:solidFill>
@@ -10141,14 +11292,14 @@
       </p:sp>
       <p:sp>
         <p:nvSpPr>
-          <p:cNvPr id="13" name="Text 11"/>
-          <p:cNvSpPr/>
-          <p:nvPr/>
-        </p:nvSpPr>
-        <p:spPr>
-          <a:xfrm>
-            <a:off x="8074152" y="1563624"/>
-            <a:ext cx="2825496" cy="256032"/>
+          <p:cNvPr id="11" name="Text 9"/>
+          <p:cNvSpPr/>
+          <p:nvPr/>
+        </p:nvSpPr>
+        <p:spPr>
+          <a:xfrm>
+            <a:off x="7799832" y="1472184"/>
+            <a:ext cx="3145536" cy="256032"/>
           </a:xfrm>
           <a:prstGeom prst="rect">
             <a:avLst/>
@@ -10172,7 +11323,7 @@
                 <a:ea typeface="Aptos" pitchFamily="34" charset="-122"/>
                 <a:cs typeface="Aptos" pitchFamily="34" charset="-120"/>
               </a:rPr>
-              <a:t>Key idea</a:t>
+              <a:t>Risk check</a:t>
             </a:r>
             <a:endParaRPr lang="en-US" sz="1300" dirty="0"/>
           </a:p>
@@ -10180,14 +11331,14 @@
       </p:sp>
       <p:sp>
         <p:nvSpPr>
-          <p:cNvPr id="14" name="Text 12"/>
-          <p:cNvSpPr/>
-          <p:nvPr/>
-        </p:nvSpPr>
-        <p:spPr>
-          <a:xfrm>
-            <a:off x="8074152" y="1920240"/>
-            <a:ext cx="2825496" cy="1188720"/>
+          <p:cNvPr id="12" name="Text 10"/>
+          <p:cNvSpPr/>
+          <p:nvPr/>
+        </p:nvSpPr>
+        <p:spPr>
+          <a:xfrm>
+            <a:off x="7799832" y="1828800"/>
+            <a:ext cx="3145536" cy="685800"/>
           </a:xfrm>
           <a:prstGeom prst="rect">
             <a:avLst/>
@@ -10221,18 +11372,171 @@
       </p:sp>
       <p:sp>
         <p:nvSpPr>
-          <p:cNvPr id="15" name="Shape 13"/>
-          <p:cNvSpPr/>
-          <p:nvPr/>
-        </p:nvSpPr>
-        <p:spPr>
-          <a:xfrm>
-            <a:off x="7909560" y="3520440"/>
-            <a:ext cx="3154680" cy="1737360"/>
+          <p:cNvPr id="13" name="Shape 11"/>
+          <p:cNvSpPr/>
+          <p:nvPr/>
+        </p:nvSpPr>
+        <p:spPr>
+          <a:xfrm>
+            <a:off x="7635240" y="2788920"/>
+            <a:ext cx="3474720" cy="1536192"/>
           </a:xfrm>
           <a:prstGeom prst="roundRect">
             <a:avLst>
-              <a:gd name="adj" fmla="val 6316"/>
+              <a:gd name="adj" fmla="val 7143"/>
+            </a:avLst>
+          </a:prstGeom>
+          <a:solidFill>
+            <a:srgbClr val="FFFFFF">
+              <a:alpha val="88000"/>
+            </a:srgbClr>
+          </a:solidFill>
+          <a:ln w="12700">
+            <a:solidFill>
+              <a:srgbClr val="D6E8F2"/>
+            </a:solidFill>
+            <a:prstDash val="solid"/>
+          </a:ln>
+        </p:spPr>
+      </p:sp>
+      <p:sp>
+        <p:nvSpPr>
+          <p:cNvPr id="14" name="Shape 12"/>
+          <p:cNvSpPr/>
+          <p:nvPr/>
+        </p:nvSpPr>
+        <p:spPr>
+          <a:xfrm>
+            <a:off x="8046720" y="3108960"/>
+            <a:ext cx="2651760" cy="896112"/>
+          </a:xfrm>
+          <a:prstGeom prst="arc">
+            <a:avLst/>
+          </a:prstGeom>
+          <a:noFill/>
+          <a:ln w="25400">
+            <a:solidFill>
+              <a:srgbClr val="0068B7"/>
+            </a:solidFill>
+            <a:prstDash val="solid"/>
+          </a:ln>
+        </p:spPr>
+      </p:sp>
+      <p:sp>
+        <p:nvSpPr>
+          <p:cNvPr id="15" name="Text 13"/>
+          <p:cNvSpPr/>
+          <p:nvPr/>
+        </p:nvSpPr>
+        <p:spPr>
+          <a:xfrm>
+            <a:off x="7909560" y="3099816"/>
+            <a:ext cx="2926080" cy="256032"/>
+          </a:xfrm>
+          <a:prstGeom prst="rect">
+            <a:avLst/>
+          </a:prstGeom>
+          <a:noFill/>
+          <a:ln/>
+        </p:spPr>
+        <p:txBody>
+          <a:bodyPr wrap="square" lIns="0" tIns="0" rIns="0" bIns="0" rtlCol="0" anchor="ctr"/>
+          <a:lstStyle/>
+          <a:p>
+            <a:pPr algn="ctr" indent="0" marL="0">
+              <a:buNone/>
+            </a:pPr>
+            <a:r>
+              <a:rPr lang="en-US" sz="1500" b="1" dirty="0">
+                <a:solidFill>
+                  <a:srgbClr val="003A63"/>
+                </a:solidFill>
+                <a:latin typeface="Aptos" pitchFamily="34" charset="0"/>
+                <a:ea typeface="Aptos" pitchFamily="34" charset="-122"/>
+                <a:cs typeface="Aptos" pitchFamily="34" charset="-120"/>
+              </a:rPr>
+              <a:t>Risk</a:t>
+            </a:r>
+            <a:endParaRPr lang="en-US" sz="1500" dirty="0"/>
+          </a:p>
+        </p:txBody>
+      </p:sp>
+      <p:sp>
+        <p:nvSpPr>
+          <p:cNvPr id="16" name="Shape 14"/>
+          <p:cNvSpPr/>
+          <p:nvPr/>
+        </p:nvSpPr>
+        <p:spPr>
+          <a:xfrm>
+            <a:off x="8366760" y="3639312"/>
+            <a:ext cx="2011680" cy="0"/>
+          </a:xfrm>
+          <a:prstGeom prst="line">
+            <a:avLst/>
+          </a:prstGeom>
+          <a:noFill/>
+          <a:ln w="63500">
+            <a:solidFill>
+              <a:srgbClr val="2F8A28"/>
+            </a:solidFill>
+            <a:prstDash val="solid"/>
+          </a:ln>
+        </p:spPr>
+      </p:sp>
+      <p:sp>
+        <p:nvSpPr>
+          <p:cNvPr id="17" name="Text 15"/>
+          <p:cNvSpPr/>
+          <p:nvPr/>
+        </p:nvSpPr>
+        <p:spPr>
+          <a:xfrm>
+            <a:off x="7909560" y="3849624"/>
+            <a:ext cx="2926080" cy="164592"/>
+          </a:xfrm>
+          <a:prstGeom prst="rect">
+            <a:avLst/>
+          </a:prstGeom>
+          <a:noFill/>
+          <a:ln/>
+        </p:spPr>
+        <p:txBody>
+          <a:bodyPr wrap="square" lIns="0" tIns="0" rIns="0" bIns="0" rtlCol="0" anchor="ctr"/>
+          <a:lstStyle/>
+          <a:p>
+            <a:pPr algn="ctr" indent="0" marL="0">
+              <a:buNone/>
+            </a:pPr>
+            <a:r>
+              <a:rPr lang="en-US" sz="900" dirty="0">
+                <a:solidFill>
+                  <a:srgbClr val="003A63"/>
+                </a:solidFill>
+                <a:latin typeface="Aptos" pitchFamily="34" charset="0"/>
+                <a:ea typeface="Aptos" pitchFamily="34" charset="-122"/>
+                <a:cs typeface="Aptos" pitchFamily="34" charset="-120"/>
+              </a:rPr>
+              <a:t>Human review</a:t>
+            </a:r>
+            <a:endParaRPr lang="en-US" sz="900" dirty="0"/>
+          </a:p>
+        </p:txBody>
+      </p:sp>
+      <p:sp>
+        <p:nvSpPr>
+          <p:cNvPr id="18" name="Shape 16"/>
+          <p:cNvSpPr/>
+          <p:nvPr/>
+        </p:nvSpPr>
+        <p:spPr>
+          <a:xfrm>
+            <a:off x="7635240" y="4498848"/>
+            <a:ext cx="3474720" cy="1143000"/>
+          </a:xfrm>
+          <a:prstGeom prst="roundRect">
+            <a:avLst>
+              <a:gd name="adj" fmla="val 9600"/>
             </a:avLst>
           </a:prstGeom>
           <a:solidFill>
@@ -10248,14 +11552,14 @@
       </p:sp>
       <p:sp>
         <p:nvSpPr>
-          <p:cNvPr id="16" name="Text 14"/>
-          <p:cNvSpPr/>
-          <p:nvPr/>
-        </p:nvSpPr>
-        <p:spPr>
-          <a:xfrm>
-            <a:off x="8074152" y="3666744"/>
-            <a:ext cx="2825496" cy="256032"/>
+          <p:cNvPr id="19" name="Text 17"/>
+          <p:cNvSpPr/>
+          <p:nvPr/>
+        </p:nvSpPr>
+        <p:spPr>
+          <a:xfrm>
+            <a:off x="7799832" y="4645152"/>
+            <a:ext cx="3145536" cy="256032"/>
           </a:xfrm>
           <a:prstGeom prst="rect">
             <a:avLst/>
@@ -10279,7 +11583,7 @@
                 <a:ea typeface="Aptos" pitchFamily="34" charset="-122"/>
                 <a:cs typeface="Aptos" pitchFamily="34" charset="-120"/>
               </a:rPr>
-              <a:t>Use this for</a:t>
+              <a:t>Safeguard to plan</a:t>
             </a:r>
             <a:endParaRPr lang="en-US" sz="1300" dirty="0"/>
           </a:p>
@@ -10287,14 +11591,14 @@
       </p:sp>
       <p:sp>
         <p:nvSpPr>
-          <p:cNvPr id="17" name="Text 15"/>
-          <p:cNvSpPr/>
-          <p:nvPr/>
-        </p:nvSpPr>
-        <p:spPr>
-          <a:xfrm>
-            <a:off x="8074152" y="4023360"/>
-            <a:ext cx="2825496" cy="1097280"/>
+          <p:cNvPr id="20" name="Text 18"/>
+          <p:cNvSpPr/>
+          <p:nvPr/>
+        </p:nvSpPr>
+        <p:spPr>
+          <a:xfrm>
+            <a:off x="7799832" y="5001768"/>
+            <a:ext cx="3145536" cy="502920"/>
           </a:xfrm>
           <a:prstGeom prst="rect">
             <a:avLst/>
@@ -10320,7 +11624,7 @@
                 <a:ea typeface="Aptos" pitchFamily="34" charset="-122"/>
                 <a:cs typeface="Aptos" pitchFamily="34" charset="-120"/>
               </a:rPr>
-              <a:t>Connect the concept to public health decisions, safeguards, documentation, or implementation work.</a:t>
+              <a:t>Use the assignment to test whether you can explain the concept, apply it to a realistic public health situation, and identify what would need review before the work moves forward.</a:t>
             </a:r>
             <a:endParaRPr lang="en-US" sz="1550" dirty="0"/>
           </a:p>
@@ -10494,8 +11798,8 @@
         </p:nvSpPr>
         <p:spPr>
           <a:xfrm>
-            <a:off x="9966960" y="6537960"/>
-            <a:ext cx="1645920" cy="201168"/>
+            <a:off x="9646920" y="6537960"/>
+            <a:ext cx="1965960" cy="201168"/>
           </a:xfrm>
           <a:prstGeom prst="rect">
             <a:avLst/>
@@ -10519,7 +11823,7 @@
                 <a:ea typeface="Aptos" pitchFamily="34" charset="-122"/>
                 <a:cs typeface="Aptos" pitchFamily="34" charset="-120"/>
               </a:rPr>
-              <a:t>Â© Paula Soper</a:t>
+              <a:t>Copyright Paula Soper</a:t>
             </a:r>
             <a:endParaRPr lang="en-US" sz="800" dirty="0"/>
           </a:p>
@@ -10566,77 +11870,13 @@
       </p:sp>
       <p:sp>
         <p:nvSpPr>
-          <p:cNvPr id="8" name="Shape 6"/>
+          <p:cNvPr id="8" name="Text 6"/>
           <p:cNvSpPr/>
           <p:nvPr/>
         </p:nvSpPr>
         <p:spPr>
           <a:xfrm>
             <a:off x="640080" y="658368"/>
-            <a:ext cx="420624" cy="420624"/>
-          </a:xfrm>
-          <a:prstGeom prst="ellipse">
-            <a:avLst/>
-          </a:prstGeom>
-          <a:solidFill>
-            <a:srgbClr val="0068B7"/>
-          </a:solidFill>
-          <a:ln w="12700">
-            <a:solidFill>
-              <a:srgbClr val="0068B7"/>
-            </a:solidFill>
-            <a:prstDash val="solid"/>
-          </a:ln>
-        </p:spPr>
-      </p:sp>
-      <p:sp>
-        <p:nvSpPr>
-          <p:cNvPr id="9" name="Text 7"/>
-          <p:cNvSpPr/>
-          <p:nvPr/>
-        </p:nvSpPr>
-        <p:spPr>
-          <a:xfrm>
-            <a:off x="640080" y="731520"/>
-            <a:ext cx="420624" cy="164592"/>
-          </a:xfrm>
-          <a:prstGeom prst="rect">
-            <a:avLst/>
-          </a:prstGeom>
-          <a:noFill/>
-          <a:ln/>
-        </p:spPr>
-        <p:txBody>
-          <a:bodyPr wrap="square" lIns="0" tIns="0" rIns="0" bIns="0" rtlCol="0" anchor="ctr"/>
-          <a:lstStyle/>
-          <a:p>
-            <a:pPr algn="ctr" indent="0" marL="0">
-              <a:buNone/>
-            </a:pPr>
-            <a:r>
-              <a:rPr lang="en-US" sz="1100" b="1" dirty="0">
-                <a:solidFill>
-                  <a:srgbClr val="FFFFFF"/>
-                </a:solidFill>
-                <a:latin typeface="Aptos" pitchFamily="34" charset="0"/>
-                <a:ea typeface="Aptos" pitchFamily="34" charset="-122"/>
-                <a:cs typeface="Aptos" pitchFamily="34" charset="-120"/>
-              </a:rPr>
-              <a:t>11</a:t>
-            </a:r>
-            <a:endParaRPr lang="en-US" sz="1100" dirty="0"/>
-          </a:p>
-        </p:txBody>
-      </p:sp>
-      <p:sp>
-        <p:nvSpPr>
-          <p:cNvPr id="10" name="Text 8"/>
-          <p:cNvSpPr/>
-          <p:nvPr/>
-        </p:nvSpPr>
-        <p:spPr>
-          <a:xfrm>
-            <a:off x="640080" y="621792"/>
             <a:ext cx="10881360" cy="713232"/>
           </a:xfrm>
           <a:prstGeom prst="rect">
@@ -10671,14 +11911,14 @@
       </p:sp>
       <p:sp>
         <p:nvSpPr>
-          <p:cNvPr id="11" name="Text 9"/>
+          <p:cNvPr id="9" name="Text 7"/>
           <p:cNvSpPr/>
           <p:nvPr/>
         </p:nvSpPr>
         <p:spPr>
           <a:xfrm>
             <a:off x="868680" y="1508760"/>
-            <a:ext cx="6537960" cy="4160520"/>
+            <a:ext cx="6309360" cy="4160520"/>
           </a:xfrm>
           <a:prstGeom prst="rect">
             <a:avLst/>
@@ -10737,18 +11977,18 @@
       </p:sp>
       <p:sp>
         <p:nvSpPr>
-          <p:cNvPr id="12" name="Shape 10"/>
-          <p:cNvSpPr/>
-          <p:nvPr/>
-        </p:nvSpPr>
-        <p:spPr>
-          <a:xfrm>
-            <a:off x="7909560" y="1417320"/>
-            <a:ext cx="3154680" cy="1828800"/>
+          <p:cNvPr id="10" name="Shape 8"/>
+          <p:cNvSpPr/>
+          <p:nvPr/>
+        </p:nvSpPr>
+        <p:spPr>
+          <a:xfrm>
+            <a:off x="7635240" y="1325880"/>
+            <a:ext cx="3474720" cy="1325880"/>
           </a:xfrm>
           <a:prstGeom prst="roundRect">
             <a:avLst>
-              <a:gd name="adj" fmla="val 6000"/>
+              <a:gd name="adj" fmla="val 8276"/>
             </a:avLst>
           </a:prstGeom>
           <a:solidFill>
@@ -10764,14 +12004,14 @@
       </p:sp>
       <p:sp>
         <p:nvSpPr>
-          <p:cNvPr id="13" name="Text 11"/>
-          <p:cNvSpPr/>
-          <p:nvPr/>
-        </p:nvSpPr>
-        <p:spPr>
-          <a:xfrm>
-            <a:off x="8074152" y="1563624"/>
-            <a:ext cx="2825496" cy="256032"/>
+          <p:cNvPr id="11" name="Text 9"/>
+          <p:cNvSpPr/>
+          <p:nvPr/>
+        </p:nvSpPr>
+        <p:spPr>
+          <a:xfrm>
+            <a:off x="7799832" y="1472184"/>
+            <a:ext cx="3145536" cy="256032"/>
           </a:xfrm>
           <a:prstGeom prst="rect">
             <a:avLst/>
@@ -10795,7 +12035,7 @@
                 <a:ea typeface="Aptos" pitchFamily="34" charset="-122"/>
                 <a:cs typeface="Aptos" pitchFamily="34" charset="-120"/>
               </a:rPr>
-              <a:t>Key idea</a:t>
+              <a:t>Risk check</a:t>
             </a:r>
             <a:endParaRPr lang="en-US" sz="1300" dirty="0"/>
           </a:p>
@@ -10803,14 +12043,14 @@
       </p:sp>
       <p:sp>
         <p:nvSpPr>
-          <p:cNvPr id="14" name="Text 12"/>
-          <p:cNvSpPr/>
-          <p:nvPr/>
-        </p:nvSpPr>
-        <p:spPr>
-          <a:xfrm>
-            <a:off x="8074152" y="1920240"/>
-            <a:ext cx="2825496" cy="1188720"/>
+          <p:cNvPr id="12" name="Text 10"/>
+          <p:cNvSpPr/>
+          <p:nvPr/>
+        </p:nvSpPr>
+        <p:spPr>
+          <a:xfrm>
+            <a:off x="7799832" y="1828800"/>
+            <a:ext cx="3145536" cy="685800"/>
           </a:xfrm>
           <a:prstGeom prst="rect">
             <a:avLst/>
@@ -10844,18 +12084,171 @@
       </p:sp>
       <p:sp>
         <p:nvSpPr>
-          <p:cNvPr id="15" name="Shape 13"/>
-          <p:cNvSpPr/>
-          <p:nvPr/>
-        </p:nvSpPr>
-        <p:spPr>
-          <a:xfrm>
-            <a:off x="7909560" y="3520440"/>
-            <a:ext cx="3154680" cy="1737360"/>
+          <p:cNvPr id="13" name="Shape 11"/>
+          <p:cNvSpPr/>
+          <p:nvPr/>
+        </p:nvSpPr>
+        <p:spPr>
+          <a:xfrm>
+            <a:off x="7635240" y="2788920"/>
+            <a:ext cx="3474720" cy="1536192"/>
           </a:xfrm>
           <a:prstGeom prst="roundRect">
             <a:avLst>
-              <a:gd name="adj" fmla="val 6316"/>
+              <a:gd name="adj" fmla="val 7143"/>
+            </a:avLst>
+          </a:prstGeom>
+          <a:solidFill>
+            <a:srgbClr val="FFFFFF">
+              <a:alpha val="88000"/>
+            </a:srgbClr>
+          </a:solidFill>
+          <a:ln w="12700">
+            <a:solidFill>
+              <a:srgbClr val="D6E8F2"/>
+            </a:solidFill>
+            <a:prstDash val="solid"/>
+          </a:ln>
+        </p:spPr>
+      </p:sp>
+      <p:sp>
+        <p:nvSpPr>
+          <p:cNvPr id="14" name="Shape 12"/>
+          <p:cNvSpPr/>
+          <p:nvPr/>
+        </p:nvSpPr>
+        <p:spPr>
+          <a:xfrm>
+            <a:off x="8046720" y="3108960"/>
+            <a:ext cx="2651760" cy="896112"/>
+          </a:xfrm>
+          <a:prstGeom prst="arc">
+            <a:avLst/>
+          </a:prstGeom>
+          <a:noFill/>
+          <a:ln w="25400">
+            <a:solidFill>
+              <a:srgbClr val="0068B7"/>
+            </a:solidFill>
+            <a:prstDash val="solid"/>
+          </a:ln>
+        </p:spPr>
+      </p:sp>
+      <p:sp>
+        <p:nvSpPr>
+          <p:cNvPr id="15" name="Text 13"/>
+          <p:cNvSpPr/>
+          <p:nvPr/>
+        </p:nvSpPr>
+        <p:spPr>
+          <a:xfrm>
+            <a:off x="7909560" y="3099816"/>
+            <a:ext cx="2926080" cy="256032"/>
+          </a:xfrm>
+          <a:prstGeom prst="rect">
+            <a:avLst/>
+          </a:prstGeom>
+          <a:noFill/>
+          <a:ln/>
+        </p:spPr>
+        <p:txBody>
+          <a:bodyPr wrap="square" lIns="0" tIns="0" rIns="0" bIns="0" rtlCol="0" anchor="ctr"/>
+          <a:lstStyle/>
+          <a:p>
+            <a:pPr algn="ctr" indent="0" marL="0">
+              <a:buNone/>
+            </a:pPr>
+            <a:r>
+              <a:rPr lang="en-US" sz="1500" b="1" dirty="0">
+                <a:solidFill>
+                  <a:srgbClr val="003A63"/>
+                </a:solidFill>
+                <a:latin typeface="Aptos" pitchFamily="34" charset="0"/>
+                <a:ea typeface="Aptos" pitchFamily="34" charset="-122"/>
+                <a:cs typeface="Aptos" pitchFamily="34" charset="-120"/>
+              </a:rPr>
+              <a:t>Risk</a:t>
+            </a:r>
+            <a:endParaRPr lang="en-US" sz="1500" dirty="0"/>
+          </a:p>
+        </p:txBody>
+      </p:sp>
+      <p:sp>
+        <p:nvSpPr>
+          <p:cNvPr id="16" name="Shape 14"/>
+          <p:cNvSpPr/>
+          <p:nvPr/>
+        </p:nvSpPr>
+        <p:spPr>
+          <a:xfrm>
+            <a:off x="8366760" y="3639312"/>
+            <a:ext cx="2011680" cy="0"/>
+          </a:xfrm>
+          <a:prstGeom prst="line">
+            <a:avLst/>
+          </a:prstGeom>
+          <a:noFill/>
+          <a:ln w="63500">
+            <a:solidFill>
+              <a:srgbClr val="2F8A28"/>
+            </a:solidFill>
+            <a:prstDash val="solid"/>
+          </a:ln>
+        </p:spPr>
+      </p:sp>
+      <p:sp>
+        <p:nvSpPr>
+          <p:cNvPr id="17" name="Text 15"/>
+          <p:cNvSpPr/>
+          <p:nvPr/>
+        </p:nvSpPr>
+        <p:spPr>
+          <a:xfrm>
+            <a:off x="7909560" y="3849624"/>
+            <a:ext cx="2926080" cy="164592"/>
+          </a:xfrm>
+          <a:prstGeom prst="rect">
+            <a:avLst/>
+          </a:prstGeom>
+          <a:noFill/>
+          <a:ln/>
+        </p:spPr>
+        <p:txBody>
+          <a:bodyPr wrap="square" lIns="0" tIns="0" rIns="0" bIns="0" rtlCol="0" anchor="ctr"/>
+          <a:lstStyle/>
+          <a:p>
+            <a:pPr algn="ctr" indent="0" marL="0">
+              <a:buNone/>
+            </a:pPr>
+            <a:r>
+              <a:rPr lang="en-US" sz="900" dirty="0">
+                <a:solidFill>
+                  <a:srgbClr val="003A63"/>
+                </a:solidFill>
+                <a:latin typeface="Aptos" pitchFamily="34" charset="0"/>
+                <a:ea typeface="Aptos" pitchFamily="34" charset="-122"/>
+                <a:cs typeface="Aptos" pitchFamily="34" charset="-120"/>
+              </a:rPr>
+              <a:t>Human review</a:t>
+            </a:r>
+            <a:endParaRPr lang="en-US" sz="900" dirty="0"/>
+          </a:p>
+        </p:txBody>
+      </p:sp>
+      <p:sp>
+        <p:nvSpPr>
+          <p:cNvPr id="18" name="Shape 16"/>
+          <p:cNvSpPr/>
+          <p:nvPr/>
+        </p:nvSpPr>
+        <p:spPr>
+          <a:xfrm>
+            <a:off x="7635240" y="4498848"/>
+            <a:ext cx="3474720" cy="1143000"/>
+          </a:xfrm>
+          <a:prstGeom prst="roundRect">
+            <a:avLst>
+              <a:gd name="adj" fmla="val 9600"/>
             </a:avLst>
           </a:prstGeom>
           <a:solidFill>
@@ -10871,14 +12264,14 @@
       </p:sp>
       <p:sp>
         <p:nvSpPr>
-          <p:cNvPr id="16" name="Text 14"/>
-          <p:cNvSpPr/>
-          <p:nvPr/>
-        </p:nvSpPr>
-        <p:spPr>
-          <a:xfrm>
-            <a:off x="8074152" y="3666744"/>
-            <a:ext cx="2825496" cy="256032"/>
+          <p:cNvPr id="19" name="Text 17"/>
+          <p:cNvSpPr/>
+          <p:nvPr/>
+        </p:nvSpPr>
+        <p:spPr>
+          <a:xfrm>
+            <a:off x="7799832" y="4645152"/>
+            <a:ext cx="3145536" cy="256032"/>
           </a:xfrm>
           <a:prstGeom prst="rect">
             <a:avLst/>
@@ -10902,7 +12295,7 @@
                 <a:ea typeface="Aptos" pitchFamily="34" charset="-122"/>
                 <a:cs typeface="Aptos" pitchFamily="34" charset="-120"/>
               </a:rPr>
-              <a:t>Use this for</a:t>
+              <a:t>Safeguard to plan</a:t>
             </a:r>
             <a:endParaRPr lang="en-US" sz="1300" dirty="0"/>
           </a:p>
@@ -10910,14 +12303,14 @@
       </p:sp>
       <p:sp>
         <p:nvSpPr>
-          <p:cNvPr id="17" name="Text 15"/>
-          <p:cNvSpPr/>
-          <p:nvPr/>
-        </p:nvSpPr>
-        <p:spPr>
-          <a:xfrm>
-            <a:off x="8074152" y="4023360"/>
-            <a:ext cx="2825496" cy="1097280"/>
+          <p:cNvPr id="20" name="Text 18"/>
+          <p:cNvSpPr/>
+          <p:nvPr/>
+        </p:nvSpPr>
+        <p:spPr>
+          <a:xfrm>
+            <a:off x="7799832" y="5001768"/>
+            <a:ext cx="3145536" cy="502920"/>
           </a:xfrm>
           <a:prstGeom prst="rect">
             <a:avLst/>
@@ -10943,7 +12336,7 @@
                 <a:ea typeface="Aptos" pitchFamily="34" charset="-122"/>
                 <a:cs typeface="Aptos" pitchFamily="34" charset="-120"/>
               </a:rPr>
-              <a:t>Connect the concept to public health decisions, safeguards, documentation, or implementation work.</a:t>
+              <a:t>Use the assignment to test whether you can explain the concept, apply it to a realistic public health situation, and identify what would need review before the work moves forward.</a:t>
             </a:r>
             <a:endParaRPr lang="en-US" sz="1550" dirty="0"/>
           </a:p>
@@ -11117,8 +12510,8 @@
         </p:nvSpPr>
         <p:spPr>
           <a:xfrm>
-            <a:off x="9966960" y="6537960"/>
-            <a:ext cx="1645920" cy="201168"/>
+            <a:off x="9646920" y="6537960"/>
+            <a:ext cx="1965960" cy="201168"/>
           </a:xfrm>
           <a:prstGeom prst="rect">
             <a:avLst/>
@@ -11142,7 +12535,7 @@
                 <a:ea typeface="Aptos" pitchFamily="34" charset="-122"/>
                 <a:cs typeface="Aptos" pitchFamily="34" charset="-120"/>
               </a:rPr>
-              <a:t>Â© Paula Soper</a:t>
+              <a:t>Copyright Paula Soper</a:t>
             </a:r>
             <a:endParaRPr lang="en-US" sz="800" dirty="0"/>
           </a:p>
@@ -11189,77 +12582,13 @@
       </p:sp>
       <p:sp>
         <p:nvSpPr>
-          <p:cNvPr id="8" name="Shape 6"/>
+          <p:cNvPr id="8" name="Text 6"/>
           <p:cNvSpPr/>
           <p:nvPr/>
         </p:nvSpPr>
         <p:spPr>
           <a:xfrm>
             <a:off x="640080" y="658368"/>
-            <a:ext cx="420624" cy="420624"/>
-          </a:xfrm>
-          <a:prstGeom prst="ellipse">
-            <a:avLst/>
-          </a:prstGeom>
-          <a:solidFill>
-            <a:srgbClr val="0068B7"/>
-          </a:solidFill>
-          <a:ln w="12700">
-            <a:solidFill>
-              <a:srgbClr val="0068B7"/>
-            </a:solidFill>
-            <a:prstDash val="solid"/>
-          </a:ln>
-        </p:spPr>
-      </p:sp>
-      <p:sp>
-        <p:nvSpPr>
-          <p:cNvPr id="9" name="Text 7"/>
-          <p:cNvSpPr/>
-          <p:nvPr/>
-        </p:nvSpPr>
-        <p:spPr>
-          <a:xfrm>
-            <a:off x="640080" y="731520"/>
-            <a:ext cx="420624" cy="164592"/>
-          </a:xfrm>
-          <a:prstGeom prst="rect">
-            <a:avLst/>
-          </a:prstGeom>
-          <a:noFill/>
-          <a:ln/>
-        </p:spPr>
-        <p:txBody>
-          <a:bodyPr wrap="square" lIns="0" tIns="0" rIns="0" bIns="0" rtlCol="0" anchor="ctr"/>
-          <a:lstStyle/>
-          <a:p>
-            <a:pPr algn="ctr" indent="0" marL="0">
-              <a:buNone/>
-            </a:pPr>
-            <a:r>
-              <a:rPr lang="en-US" sz="1100" b="1" dirty="0">
-                <a:solidFill>
-                  <a:srgbClr val="FFFFFF"/>
-                </a:solidFill>
-                <a:latin typeface="Aptos" pitchFamily="34" charset="0"/>
-                <a:ea typeface="Aptos" pitchFamily="34" charset="-122"/>
-                <a:cs typeface="Aptos" pitchFamily="34" charset="-120"/>
-              </a:rPr>
-              <a:t>12</a:t>
-            </a:r>
-            <a:endParaRPr lang="en-US" sz="1100" dirty="0"/>
-          </a:p>
-        </p:txBody>
-      </p:sp>
-      <p:sp>
-        <p:nvSpPr>
-          <p:cNvPr id="10" name="Text 8"/>
-          <p:cNvSpPr/>
-          <p:nvPr/>
-        </p:nvSpPr>
-        <p:spPr>
-          <a:xfrm>
-            <a:off x="640080" y="621792"/>
             <a:ext cx="10881360" cy="713232"/>
           </a:xfrm>
           <a:prstGeom prst="rect">
@@ -11294,14 +12623,14 @@
       </p:sp>
       <p:sp>
         <p:nvSpPr>
-          <p:cNvPr id="11" name="Text 9"/>
+          <p:cNvPr id="9" name="Text 7"/>
           <p:cNvSpPr/>
           <p:nvPr/>
         </p:nvSpPr>
         <p:spPr>
           <a:xfrm>
             <a:off x="868680" y="1508760"/>
-            <a:ext cx="6537960" cy="4160520"/>
+            <a:ext cx="6309360" cy="4160520"/>
           </a:xfrm>
           <a:prstGeom prst="rect">
             <a:avLst/>
@@ -11360,18 +12689,18 @@
       </p:sp>
       <p:sp>
         <p:nvSpPr>
-          <p:cNvPr id="12" name="Shape 10"/>
-          <p:cNvSpPr/>
-          <p:nvPr/>
-        </p:nvSpPr>
-        <p:spPr>
-          <a:xfrm>
-            <a:off x="7909560" y="1417320"/>
-            <a:ext cx="3154680" cy="1828800"/>
+          <p:cNvPr id="10" name="Shape 8"/>
+          <p:cNvSpPr/>
+          <p:nvPr/>
+        </p:nvSpPr>
+        <p:spPr>
+          <a:xfrm>
+            <a:off x="7635240" y="1325880"/>
+            <a:ext cx="3474720" cy="1325880"/>
           </a:xfrm>
           <a:prstGeom prst="roundRect">
             <a:avLst>
-              <a:gd name="adj" fmla="val 6000"/>
+              <a:gd name="adj" fmla="val 8276"/>
             </a:avLst>
           </a:prstGeom>
           <a:solidFill>
@@ -11387,14 +12716,14 @@
       </p:sp>
       <p:sp>
         <p:nvSpPr>
-          <p:cNvPr id="13" name="Text 11"/>
-          <p:cNvSpPr/>
-          <p:nvPr/>
-        </p:nvSpPr>
-        <p:spPr>
-          <a:xfrm>
-            <a:off x="8074152" y="1563624"/>
-            <a:ext cx="2825496" cy="256032"/>
+          <p:cNvPr id="11" name="Text 9"/>
+          <p:cNvSpPr/>
+          <p:nvPr/>
+        </p:nvSpPr>
+        <p:spPr>
+          <a:xfrm>
+            <a:off x="7799832" y="1472184"/>
+            <a:ext cx="3145536" cy="256032"/>
           </a:xfrm>
           <a:prstGeom prst="rect">
             <a:avLst/>
@@ -11418,7 +12747,7 @@
                 <a:ea typeface="Aptos" pitchFamily="34" charset="-122"/>
                 <a:cs typeface="Aptos" pitchFamily="34" charset="-120"/>
               </a:rPr>
-              <a:t>Key idea</a:t>
+              <a:t>Risk check</a:t>
             </a:r>
             <a:endParaRPr lang="en-US" sz="1300" dirty="0"/>
           </a:p>
@@ -11426,14 +12755,14 @@
       </p:sp>
       <p:sp>
         <p:nvSpPr>
-          <p:cNvPr id="14" name="Text 12"/>
-          <p:cNvSpPr/>
-          <p:nvPr/>
-        </p:nvSpPr>
-        <p:spPr>
-          <a:xfrm>
-            <a:off x="8074152" y="1920240"/>
-            <a:ext cx="2825496" cy="1188720"/>
+          <p:cNvPr id="12" name="Text 10"/>
+          <p:cNvSpPr/>
+          <p:nvPr/>
+        </p:nvSpPr>
+        <p:spPr>
+          <a:xfrm>
+            <a:off x="7799832" y="1828800"/>
+            <a:ext cx="3145536" cy="685800"/>
           </a:xfrm>
           <a:prstGeom prst="rect">
             <a:avLst/>
@@ -11467,18 +12796,171 @@
       </p:sp>
       <p:sp>
         <p:nvSpPr>
-          <p:cNvPr id="15" name="Shape 13"/>
-          <p:cNvSpPr/>
-          <p:nvPr/>
-        </p:nvSpPr>
-        <p:spPr>
-          <a:xfrm>
-            <a:off x="7909560" y="3520440"/>
-            <a:ext cx="3154680" cy="1737360"/>
+          <p:cNvPr id="13" name="Shape 11"/>
+          <p:cNvSpPr/>
+          <p:nvPr/>
+        </p:nvSpPr>
+        <p:spPr>
+          <a:xfrm>
+            <a:off x="7635240" y="2788920"/>
+            <a:ext cx="3474720" cy="1536192"/>
           </a:xfrm>
           <a:prstGeom prst="roundRect">
             <a:avLst>
-              <a:gd name="adj" fmla="val 6316"/>
+              <a:gd name="adj" fmla="val 7143"/>
+            </a:avLst>
+          </a:prstGeom>
+          <a:solidFill>
+            <a:srgbClr val="FFFFFF">
+              <a:alpha val="88000"/>
+            </a:srgbClr>
+          </a:solidFill>
+          <a:ln w="12700">
+            <a:solidFill>
+              <a:srgbClr val="D6E8F2"/>
+            </a:solidFill>
+            <a:prstDash val="solid"/>
+          </a:ln>
+        </p:spPr>
+      </p:sp>
+      <p:sp>
+        <p:nvSpPr>
+          <p:cNvPr id="14" name="Shape 12"/>
+          <p:cNvSpPr/>
+          <p:nvPr/>
+        </p:nvSpPr>
+        <p:spPr>
+          <a:xfrm>
+            <a:off x="8046720" y="3108960"/>
+            <a:ext cx="2651760" cy="896112"/>
+          </a:xfrm>
+          <a:prstGeom prst="arc">
+            <a:avLst/>
+          </a:prstGeom>
+          <a:noFill/>
+          <a:ln w="25400">
+            <a:solidFill>
+              <a:srgbClr val="0068B7"/>
+            </a:solidFill>
+            <a:prstDash val="solid"/>
+          </a:ln>
+        </p:spPr>
+      </p:sp>
+      <p:sp>
+        <p:nvSpPr>
+          <p:cNvPr id="15" name="Text 13"/>
+          <p:cNvSpPr/>
+          <p:nvPr/>
+        </p:nvSpPr>
+        <p:spPr>
+          <a:xfrm>
+            <a:off x="7909560" y="3099816"/>
+            <a:ext cx="2926080" cy="256032"/>
+          </a:xfrm>
+          <a:prstGeom prst="rect">
+            <a:avLst/>
+          </a:prstGeom>
+          <a:noFill/>
+          <a:ln/>
+        </p:spPr>
+        <p:txBody>
+          <a:bodyPr wrap="square" lIns="0" tIns="0" rIns="0" bIns="0" rtlCol="0" anchor="ctr"/>
+          <a:lstStyle/>
+          <a:p>
+            <a:pPr algn="ctr" indent="0" marL="0">
+              <a:buNone/>
+            </a:pPr>
+            <a:r>
+              <a:rPr lang="en-US" sz="1500" b="1" dirty="0">
+                <a:solidFill>
+                  <a:srgbClr val="003A63"/>
+                </a:solidFill>
+                <a:latin typeface="Aptos" pitchFamily="34" charset="0"/>
+                <a:ea typeface="Aptos" pitchFamily="34" charset="-122"/>
+                <a:cs typeface="Aptos" pitchFamily="34" charset="-120"/>
+              </a:rPr>
+              <a:t>Risk</a:t>
+            </a:r>
+            <a:endParaRPr lang="en-US" sz="1500" dirty="0"/>
+          </a:p>
+        </p:txBody>
+      </p:sp>
+      <p:sp>
+        <p:nvSpPr>
+          <p:cNvPr id="16" name="Shape 14"/>
+          <p:cNvSpPr/>
+          <p:nvPr/>
+        </p:nvSpPr>
+        <p:spPr>
+          <a:xfrm>
+            <a:off x="8366760" y="3639312"/>
+            <a:ext cx="2011680" cy="0"/>
+          </a:xfrm>
+          <a:prstGeom prst="line">
+            <a:avLst/>
+          </a:prstGeom>
+          <a:noFill/>
+          <a:ln w="63500">
+            <a:solidFill>
+              <a:srgbClr val="2F8A28"/>
+            </a:solidFill>
+            <a:prstDash val="solid"/>
+          </a:ln>
+        </p:spPr>
+      </p:sp>
+      <p:sp>
+        <p:nvSpPr>
+          <p:cNvPr id="17" name="Text 15"/>
+          <p:cNvSpPr/>
+          <p:nvPr/>
+        </p:nvSpPr>
+        <p:spPr>
+          <a:xfrm>
+            <a:off x="7909560" y="3849624"/>
+            <a:ext cx="2926080" cy="164592"/>
+          </a:xfrm>
+          <a:prstGeom prst="rect">
+            <a:avLst/>
+          </a:prstGeom>
+          <a:noFill/>
+          <a:ln/>
+        </p:spPr>
+        <p:txBody>
+          <a:bodyPr wrap="square" lIns="0" tIns="0" rIns="0" bIns="0" rtlCol="0" anchor="ctr"/>
+          <a:lstStyle/>
+          <a:p>
+            <a:pPr algn="ctr" indent="0" marL="0">
+              <a:buNone/>
+            </a:pPr>
+            <a:r>
+              <a:rPr lang="en-US" sz="900" dirty="0">
+                <a:solidFill>
+                  <a:srgbClr val="003A63"/>
+                </a:solidFill>
+                <a:latin typeface="Aptos" pitchFamily="34" charset="0"/>
+                <a:ea typeface="Aptos" pitchFamily="34" charset="-122"/>
+                <a:cs typeface="Aptos" pitchFamily="34" charset="-120"/>
+              </a:rPr>
+              <a:t>Human review</a:t>
+            </a:r>
+            <a:endParaRPr lang="en-US" sz="900" dirty="0"/>
+          </a:p>
+        </p:txBody>
+      </p:sp>
+      <p:sp>
+        <p:nvSpPr>
+          <p:cNvPr id="18" name="Shape 16"/>
+          <p:cNvSpPr/>
+          <p:nvPr/>
+        </p:nvSpPr>
+        <p:spPr>
+          <a:xfrm>
+            <a:off x="7635240" y="4498848"/>
+            <a:ext cx="3474720" cy="1143000"/>
+          </a:xfrm>
+          <a:prstGeom prst="roundRect">
+            <a:avLst>
+              <a:gd name="adj" fmla="val 9600"/>
             </a:avLst>
           </a:prstGeom>
           <a:solidFill>
@@ -11494,14 +12976,14 @@
       </p:sp>
       <p:sp>
         <p:nvSpPr>
-          <p:cNvPr id="16" name="Text 14"/>
-          <p:cNvSpPr/>
-          <p:nvPr/>
-        </p:nvSpPr>
-        <p:spPr>
-          <a:xfrm>
-            <a:off x="8074152" y="3666744"/>
-            <a:ext cx="2825496" cy="256032"/>
+          <p:cNvPr id="19" name="Text 17"/>
+          <p:cNvSpPr/>
+          <p:nvPr/>
+        </p:nvSpPr>
+        <p:spPr>
+          <a:xfrm>
+            <a:off x="7799832" y="4645152"/>
+            <a:ext cx="3145536" cy="256032"/>
           </a:xfrm>
           <a:prstGeom prst="rect">
             <a:avLst/>
@@ -11525,7 +13007,7 @@
                 <a:ea typeface="Aptos" pitchFamily="34" charset="-122"/>
                 <a:cs typeface="Aptos" pitchFamily="34" charset="-120"/>
               </a:rPr>
-              <a:t>Use this for</a:t>
+              <a:t>Safeguard to plan</a:t>
             </a:r>
             <a:endParaRPr lang="en-US" sz="1300" dirty="0"/>
           </a:p>
@@ -11533,14 +13015,14 @@
       </p:sp>
       <p:sp>
         <p:nvSpPr>
-          <p:cNvPr id="17" name="Text 15"/>
-          <p:cNvSpPr/>
-          <p:nvPr/>
-        </p:nvSpPr>
-        <p:spPr>
-          <a:xfrm>
-            <a:off x="8074152" y="4023360"/>
-            <a:ext cx="2825496" cy="1097280"/>
+          <p:cNvPr id="20" name="Text 18"/>
+          <p:cNvSpPr/>
+          <p:nvPr/>
+        </p:nvSpPr>
+        <p:spPr>
+          <a:xfrm>
+            <a:off x="7799832" y="5001768"/>
+            <a:ext cx="3145536" cy="502920"/>
           </a:xfrm>
           <a:prstGeom prst="rect">
             <a:avLst/>
@@ -11566,7 +13048,7 @@
                 <a:ea typeface="Aptos" pitchFamily="34" charset="-122"/>
                 <a:cs typeface="Aptos" pitchFamily="34" charset="-120"/>
               </a:rPr>
-              <a:t>Connect the concept to public health decisions, safeguards, documentation, or implementation work.</a:t>
+              <a:t>Identify what could go wrong, who could be affected, what safeguards are needed, and what evidence should be reviewed before use expands.</a:t>
             </a:r>
             <a:endParaRPr lang="en-US" sz="1550" dirty="0"/>
           </a:p>
@@ -11740,8 +13222,8 @@
         </p:nvSpPr>
         <p:spPr>
           <a:xfrm>
-            <a:off x="9966960" y="6537960"/>
-            <a:ext cx="1645920" cy="201168"/>
+            <a:off x="9646920" y="6537960"/>
+            <a:ext cx="1965960" cy="201168"/>
           </a:xfrm>
           <a:prstGeom prst="rect">
             <a:avLst/>
@@ -11765,7 +13247,7 @@
                 <a:ea typeface="Aptos" pitchFamily="34" charset="-122"/>
                 <a:cs typeface="Aptos" pitchFamily="34" charset="-120"/>
               </a:rPr>
-              <a:t>Â© Paula Soper</a:t>
+              <a:t>Copyright Paula Soper</a:t>
             </a:r>
             <a:endParaRPr lang="en-US" sz="800" dirty="0"/>
           </a:p>
@@ -11860,7 +13342,7 @@
         <p:spPr>
           <a:xfrm>
             <a:off x="868680" y="1508760"/>
-            <a:ext cx="6537960" cy="4160520"/>
+            <a:ext cx="6309360" cy="4160520"/>
           </a:xfrm>
           <a:prstGeom prst="rect">
             <a:avLst/>
@@ -11897,12 +13379,12 @@
         </p:nvSpPr>
         <p:spPr>
           <a:xfrm>
-            <a:off x="7909560" y="1417320"/>
-            <a:ext cx="3154680" cy="1828800"/>
+            <a:off x="7635240" y="1325880"/>
+            <a:ext cx="3474720" cy="1325880"/>
           </a:xfrm>
           <a:prstGeom prst="roundRect">
             <a:avLst>
-              <a:gd name="adj" fmla="val 6000"/>
+              <a:gd name="adj" fmla="val 8276"/>
             </a:avLst>
           </a:prstGeom>
           <a:solidFill>
@@ -11924,8 +13406,8 @@
         </p:nvSpPr>
         <p:spPr>
           <a:xfrm>
-            <a:off x="8074152" y="1563624"/>
-            <a:ext cx="2825496" cy="256032"/>
+            <a:off x="7799832" y="1472184"/>
+            <a:ext cx="3145536" cy="256032"/>
           </a:xfrm>
           <a:prstGeom prst="rect">
             <a:avLst/>
@@ -11949,7 +13431,7 @@
                 <a:ea typeface="Aptos" pitchFamily="34" charset="-122"/>
                 <a:cs typeface="Aptos" pitchFamily="34" charset="-120"/>
               </a:rPr>
-              <a:t>Key idea</a:t>
+              <a:t>Risk check</a:t>
             </a:r>
             <a:endParaRPr lang="en-US" sz="1300" dirty="0"/>
           </a:p>
@@ -11963,8 +13445,8 @@
         </p:nvSpPr>
         <p:spPr>
           <a:xfrm>
-            <a:off x="8074152" y="1920240"/>
-            <a:ext cx="2825496" cy="1188720"/>
+            <a:off x="7799832" y="1828800"/>
+            <a:ext cx="3145536" cy="685800"/>
           </a:xfrm>
           <a:prstGeom prst="rect">
             <a:avLst/>
@@ -12004,12 +13486,165 @@
         </p:nvSpPr>
         <p:spPr>
           <a:xfrm>
-            <a:off x="7909560" y="3520440"/>
-            <a:ext cx="3154680" cy="1737360"/>
+            <a:off x="7635240" y="2788920"/>
+            <a:ext cx="3474720" cy="1536192"/>
           </a:xfrm>
           <a:prstGeom prst="roundRect">
             <a:avLst>
-              <a:gd name="adj" fmla="val 6316"/>
+              <a:gd name="adj" fmla="val 7143"/>
+            </a:avLst>
+          </a:prstGeom>
+          <a:solidFill>
+            <a:srgbClr val="FFFFFF">
+              <a:alpha val="88000"/>
+            </a:srgbClr>
+          </a:solidFill>
+          <a:ln w="12700">
+            <a:solidFill>
+              <a:srgbClr val="D6E8F2"/>
+            </a:solidFill>
+            <a:prstDash val="solid"/>
+          </a:ln>
+        </p:spPr>
+      </p:sp>
+      <p:sp>
+        <p:nvSpPr>
+          <p:cNvPr id="14" name="Shape 12"/>
+          <p:cNvSpPr/>
+          <p:nvPr/>
+        </p:nvSpPr>
+        <p:spPr>
+          <a:xfrm>
+            <a:off x="8046720" y="3108960"/>
+            <a:ext cx="2651760" cy="896112"/>
+          </a:xfrm>
+          <a:prstGeom prst="arc">
+            <a:avLst/>
+          </a:prstGeom>
+          <a:noFill/>
+          <a:ln w="25400">
+            <a:solidFill>
+              <a:srgbClr val="0068B7"/>
+            </a:solidFill>
+            <a:prstDash val="solid"/>
+          </a:ln>
+        </p:spPr>
+      </p:sp>
+      <p:sp>
+        <p:nvSpPr>
+          <p:cNvPr id="15" name="Text 13"/>
+          <p:cNvSpPr/>
+          <p:nvPr/>
+        </p:nvSpPr>
+        <p:spPr>
+          <a:xfrm>
+            <a:off x="7909560" y="3099816"/>
+            <a:ext cx="2926080" cy="256032"/>
+          </a:xfrm>
+          <a:prstGeom prst="rect">
+            <a:avLst/>
+          </a:prstGeom>
+          <a:noFill/>
+          <a:ln/>
+        </p:spPr>
+        <p:txBody>
+          <a:bodyPr wrap="square" lIns="0" tIns="0" rIns="0" bIns="0" rtlCol="0" anchor="ctr"/>
+          <a:lstStyle/>
+          <a:p>
+            <a:pPr algn="ctr" indent="0" marL="0">
+              <a:buNone/>
+            </a:pPr>
+            <a:r>
+              <a:rPr lang="en-US" sz="1500" b="1" dirty="0">
+                <a:solidFill>
+                  <a:srgbClr val="003A63"/>
+                </a:solidFill>
+                <a:latin typeface="Aptos" pitchFamily="34" charset="0"/>
+                <a:ea typeface="Aptos" pitchFamily="34" charset="-122"/>
+                <a:cs typeface="Aptos" pitchFamily="34" charset="-120"/>
+              </a:rPr>
+              <a:t>Risk</a:t>
+            </a:r>
+            <a:endParaRPr lang="en-US" sz="1500" dirty="0"/>
+          </a:p>
+        </p:txBody>
+      </p:sp>
+      <p:sp>
+        <p:nvSpPr>
+          <p:cNvPr id="16" name="Shape 14"/>
+          <p:cNvSpPr/>
+          <p:nvPr/>
+        </p:nvSpPr>
+        <p:spPr>
+          <a:xfrm>
+            <a:off x="8366760" y="3639312"/>
+            <a:ext cx="2011680" cy="0"/>
+          </a:xfrm>
+          <a:prstGeom prst="line">
+            <a:avLst/>
+          </a:prstGeom>
+          <a:noFill/>
+          <a:ln w="63500">
+            <a:solidFill>
+              <a:srgbClr val="2F8A28"/>
+            </a:solidFill>
+            <a:prstDash val="solid"/>
+          </a:ln>
+        </p:spPr>
+      </p:sp>
+      <p:sp>
+        <p:nvSpPr>
+          <p:cNvPr id="17" name="Text 15"/>
+          <p:cNvSpPr/>
+          <p:nvPr/>
+        </p:nvSpPr>
+        <p:spPr>
+          <a:xfrm>
+            <a:off x="7909560" y="3849624"/>
+            <a:ext cx="2926080" cy="164592"/>
+          </a:xfrm>
+          <a:prstGeom prst="rect">
+            <a:avLst/>
+          </a:prstGeom>
+          <a:noFill/>
+          <a:ln/>
+        </p:spPr>
+        <p:txBody>
+          <a:bodyPr wrap="square" lIns="0" tIns="0" rIns="0" bIns="0" rtlCol="0" anchor="ctr"/>
+          <a:lstStyle/>
+          <a:p>
+            <a:pPr algn="ctr" indent="0" marL="0">
+              <a:buNone/>
+            </a:pPr>
+            <a:r>
+              <a:rPr lang="en-US" sz="900" dirty="0">
+                <a:solidFill>
+                  <a:srgbClr val="003A63"/>
+                </a:solidFill>
+                <a:latin typeface="Aptos" pitchFamily="34" charset="0"/>
+                <a:ea typeface="Aptos" pitchFamily="34" charset="-122"/>
+                <a:cs typeface="Aptos" pitchFamily="34" charset="-120"/>
+              </a:rPr>
+              <a:t>Human review</a:t>
+            </a:r>
+            <a:endParaRPr lang="en-US" sz="900" dirty="0"/>
+          </a:p>
+        </p:txBody>
+      </p:sp>
+      <p:sp>
+        <p:nvSpPr>
+          <p:cNvPr id="18" name="Shape 16"/>
+          <p:cNvSpPr/>
+          <p:nvPr/>
+        </p:nvSpPr>
+        <p:spPr>
+          <a:xfrm>
+            <a:off x="7635240" y="4498848"/>
+            <a:ext cx="3474720" cy="1143000"/>
+          </a:xfrm>
+          <a:prstGeom prst="roundRect">
+            <a:avLst>
+              <a:gd name="adj" fmla="val 9600"/>
             </a:avLst>
           </a:prstGeom>
           <a:solidFill>
@@ -12025,14 +13660,14 @@
       </p:sp>
       <p:sp>
         <p:nvSpPr>
-          <p:cNvPr id="14" name="Text 12"/>
-          <p:cNvSpPr/>
-          <p:nvPr/>
-        </p:nvSpPr>
-        <p:spPr>
-          <a:xfrm>
-            <a:off x="8074152" y="3666744"/>
-            <a:ext cx="2825496" cy="256032"/>
+          <p:cNvPr id="19" name="Text 17"/>
+          <p:cNvSpPr/>
+          <p:nvPr/>
+        </p:nvSpPr>
+        <p:spPr>
+          <a:xfrm>
+            <a:off x="7799832" y="4645152"/>
+            <a:ext cx="3145536" cy="256032"/>
           </a:xfrm>
           <a:prstGeom prst="rect">
             <a:avLst/>
@@ -12056,7 +13691,7 @@
                 <a:ea typeface="Aptos" pitchFamily="34" charset="-122"/>
                 <a:cs typeface="Aptos" pitchFamily="34" charset="-120"/>
               </a:rPr>
-              <a:t>Use this for</a:t>
+              <a:t>Safeguard to plan</a:t>
             </a:r>
             <a:endParaRPr lang="en-US" sz="1300" dirty="0"/>
           </a:p>
@@ -12064,14 +13699,14 @@
       </p:sp>
       <p:sp>
         <p:nvSpPr>
-          <p:cNvPr id="15" name="Text 13"/>
-          <p:cNvSpPr/>
-          <p:nvPr/>
-        </p:nvSpPr>
-        <p:spPr>
-          <a:xfrm>
-            <a:off x="8074152" y="4023360"/>
-            <a:ext cx="2825496" cy="1097280"/>
+          <p:cNvPr id="20" name="Text 18"/>
+          <p:cNvSpPr/>
+          <p:nvPr/>
+        </p:nvSpPr>
+        <p:spPr>
+          <a:xfrm>
+            <a:off x="7799832" y="5001768"/>
+            <a:ext cx="3145536" cy="502920"/>
           </a:xfrm>
           <a:prstGeom prst="rect">
             <a:avLst/>
@@ -12097,7 +13732,7 @@
                 <a:ea typeface="Aptos" pitchFamily="34" charset="-122"/>
                 <a:cs typeface="Aptos" pitchFamily="34" charset="-120"/>
               </a:rPr>
-              <a:t>Connect the concept to public health decisions, safeguards, documentation, or implementation work.</a:t>
+              <a:t>Identify what could go wrong, who could be affected, what safeguards are needed, and what evidence should be reviewed before use expands.</a:t>
             </a:r>
             <a:endParaRPr lang="en-US" sz="1550" dirty="0"/>
           </a:p>
@@ -12271,8 +13906,8 @@
         </p:nvSpPr>
         <p:spPr>
           <a:xfrm>
-            <a:off x="9966960" y="6537960"/>
-            <a:ext cx="1645920" cy="201168"/>
+            <a:off x="9646920" y="6537960"/>
+            <a:ext cx="1965960" cy="201168"/>
           </a:xfrm>
           <a:prstGeom prst="rect">
             <a:avLst/>
@@ -12296,7 +13931,7 @@
                 <a:ea typeface="Aptos" pitchFamily="34" charset="-122"/>
                 <a:cs typeface="Aptos" pitchFamily="34" charset="-120"/>
               </a:rPr>
-              <a:t>Â© Paula Soper</a:t>
+              <a:t>Copyright Paula Soper</a:t>
             </a:r>
             <a:endParaRPr lang="en-US" sz="800" dirty="0"/>
           </a:p>
@@ -12639,46 +14274,7 @@
       </p:sp>
       <p:sp>
         <p:nvSpPr>
-          <p:cNvPr id="15" name="Text 13"/>
-          <p:cNvSpPr/>
-          <p:nvPr/>
-        </p:nvSpPr>
-        <p:spPr>
-          <a:xfrm>
-            <a:off x="8817864" y="4187952"/>
-            <a:ext cx="201168" cy="256032"/>
-          </a:xfrm>
-          <a:prstGeom prst="rect">
-            <a:avLst/>
-          </a:prstGeom>
-          <a:noFill/>
-          <a:ln/>
-        </p:spPr>
-        <p:txBody>
-          <a:bodyPr wrap="square" lIns="0" tIns="0" rIns="0" bIns="0" rtlCol="0" anchor="ctr"/>
-          <a:lstStyle/>
-          <a:p>
-            <a:pPr algn="ctr" indent="0" marL="0">
-              <a:buNone/>
-            </a:pPr>
-            <a:r>
-              <a:rPr lang="en-US" sz="1800" b="1" dirty="0">
-                <a:solidFill>
-                  <a:srgbClr val="0068B7"/>
-                </a:solidFill>
-                <a:latin typeface="Aptos" pitchFamily="34" charset="0"/>
-                <a:ea typeface="Aptos" pitchFamily="34" charset="-122"/>
-                <a:cs typeface="Aptos" pitchFamily="34" charset="-120"/>
-              </a:rPr>
-              <a:t>â†’</a:t>
-            </a:r>
-            <a:endParaRPr lang="en-US" sz="1800" dirty="0"/>
-          </a:p>
-        </p:txBody>
-      </p:sp>
-      <p:sp>
-        <p:nvSpPr>
-          <p:cNvPr id="16" name="Shape 14"/>
+          <p:cNvPr id="15" name="Shape 13"/>
           <p:cNvSpPr/>
           <p:nvPr/>
         </p:nvSpPr>
@@ -12705,7 +14301,7 @@
       </p:sp>
       <p:sp>
         <p:nvSpPr>
-          <p:cNvPr id="17" name="Text 15"/>
+          <p:cNvPr id="16" name="Text 14"/>
           <p:cNvSpPr/>
           <p:nvPr/>
         </p:nvSpPr>
@@ -12746,46 +14342,7 @@
       </p:sp>
       <p:sp>
         <p:nvSpPr>
-          <p:cNvPr id="18" name="Text 16"/>
-          <p:cNvSpPr/>
-          <p:nvPr/>
-        </p:nvSpPr>
-        <p:spPr>
-          <a:xfrm>
-            <a:off x="10046208" y="4187952"/>
-            <a:ext cx="201168" cy="256032"/>
-          </a:xfrm>
-          <a:prstGeom prst="rect">
-            <a:avLst/>
-          </a:prstGeom>
-          <a:noFill/>
-          <a:ln/>
-        </p:spPr>
-        <p:txBody>
-          <a:bodyPr wrap="square" lIns="0" tIns="0" rIns="0" bIns="0" rtlCol="0" anchor="ctr"/>
-          <a:lstStyle/>
-          <a:p>
-            <a:pPr algn="ctr" indent="0" marL="0">
-              <a:buNone/>
-            </a:pPr>
-            <a:r>
-              <a:rPr lang="en-US" sz="1800" b="1" dirty="0">
-                <a:solidFill>
-                  <a:srgbClr val="0068B7"/>
-                </a:solidFill>
-                <a:latin typeface="Aptos" pitchFamily="34" charset="0"/>
-                <a:ea typeface="Aptos" pitchFamily="34" charset="-122"/>
-                <a:cs typeface="Aptos" pitchFamily="34" charset="-120"/>
-              </a:rPr>
-              <a:t>â†’</a:t>
-            </a:r>
-            <a:endParaRPr lang="en-US" sz="1800" dirty="0"/>
-          </a:p>
-        </p:txBody>
-      </p:sp>
-      <p:sp>
-        <p:nvSpPr>
-          <p:cNvPr id="19" name="Shape 17"/>
+          <p:cNvPr id="17" name="Shape 15"/>
           <p:cNvSpPr/>
           <p:nvPr/>
         </p:nvSpPr>
@@ -12812,7 +14369,7 @@
       </p:sp>
       <p:sp>
         <p:nvSpPr>
-          <p:cNvPr id="20" name="Text 18"/>
+          <p:cNvPr id="18" name="Text 16"/>
           <p:cNvSpPr/>
           <p:nvPr/>
         </p:nvSpPr>
@@ -13019,8 +14576,8 @@
         </p:nvSpPr>
         <p:spPr>
           <a:xfrm>
-            <a:off x="9966960" y="6537960"/>
-            <a:ext cx="1645920" cy="201168"/>
+            <a:off x="9646920" y="6537960"/>
+            <a:ext cx="1965960" cy="201168"/>
           </a:xfrm>
           <a:prstGeom prst="rect">
             <a:avLst/>
@@ -13044,7 +14601,7 @@
                 <a:ea typeface="Aptos" pitchFamily="34" charset="-122"/>
                 <a:cs typeface="Aptos" pitchFamily="34" charset="-120"/>
               </a:rPr>
-              <a:t>Â© Paula Soper</a:t>
+              <a:t>Copyright Paula Soper</a:t>
             </a:r>
             <a:endParaRPr lang="en-US" sz="800" dirty="0"/>
           </a:p>
@@ -13387,46 +14944,7 @@
       </p:sp>
       <p:sp>
         <p:nvSpPr>
-          <p:cNvPr id="15" name="Text 13"/>
-          <p:cNvSpPr/>
-          <p:nvPr/>
-        </p:nvSpPr>
-        <p:spPr>
-          <a:xfrm>
-            <a:off x="8817864" y="4187952"/>
-            <a:ext cx="201168" cy="256032"/>
-          </a:xfrm>
-          <a:prstGeom prst="rect">
-            <a:avLst/>
-          </a:prstGeom>
-          <a:noFill/>
-          <a:ln/>
-        </p:spPr>
-        <p:txBody>
-          <a:bodyPr wrap="square" lIns="0" tIns="0" rIns="0" bIns="0" rtlCol="0" anchor="ctr"/>
-          <a:lstStyle/>
-          <a:p>
-            <a:pPr algn="ctr" indent="0" marL="0">
-              <a:buNone/>
-            </a:pPr>
-            <a:r>
-              <a:rPr lang="en-US" sz="1800" b="1" dirty="0">
-                <a:solidFill>
-                  <a:srgbClr val="0068B7"/>
-                </a:solidFill>
-                <a:latin typeface="Aptos" pitchFamily="34" charset="0"/>
-                <a:ea typeface="Aptos" pitchFamily="34" charset="-122"/>
-                <a:cs typeface="Aptos" pitchFamily="34" charset="-120"/>
-              </a:rPr>
-              <a:t>â†’</a:t>
-            </a:r>
-            <a:endParaRPr lang="en-US" sz="1800" dirty="0"/>
-          </a:p>
-        </p:txBody>
-      </p:sp>
-      <p:sp>
-        <p:nvSpPr>
-          <p:cNvPr id="16" name="Shape 14"/>
+          <p:cNvPr id="15" name="Shape 13"/>
           <p:cNvSpPr/>
           <p:nvPr/>
         </p:nvSpPr>
@@ -13453,7 +14971,7 @@
       </p:sp>
       <p:sp>
         <p:nvSpPr>
-          <p:cNvPr id="17" name="Text 15"/>
+          <p:cNvPr id="16" name="Text 14"/>
           <p:cNvSpPr/>
           <p:nvPr/>
         </p:nvSpPr>
@@ -13494,46 +15012,7 @@
       </p:sp>
       <p:sp>
         <p:nvSpPr>
-          <p:cNvPr id="18" name="Text 16"/>
-          <p:cNvSpPr/>
-          <p:nvPr/>
-        </p:nvSpPr>
-        <p:spPr>
-          <a:xfrm>
-            <a:off x="10046208" y="4187952"/>
-            <a:ext cx="201168" cy="256032"/>
-          </a:xfrm>
-          <a:prstGeom prst="rect">
-            <a:avLst/>
-          </a:prstGeom>
-          <a:noFill/>
-          <a:ln/>
-        </p:spPr>
-        <p:txBody>
-          <a:bodyPr wrap="square" lIns="0" tIns="0" rIns="0" bIns="0" rtlCol="0" anchor="ctr"/>
-          <a:lstStyle/>
-          <a:p>
-            <a:pPr algn="ctr" indent="0" marL="0">
-              <a:buNone/>
-            </a:pPr>
-            <a:r>
-              <a:rPr lang="en-US" sz="1800" b="1" dirty="0">
-                <a:solidFill>
-                  <a:srgbClr val="0068B7"/>
-                </a:solidFill>
-                <a:latin typeface="Aptos" pitchFamily="34" charset="0"/>
-                <a:ea typeface="Aptos" pitchFamily="34" charset="-122"/>
-                <a:cs typeface="Aptos" pitchFamily="34" charset="-120"/>
-              </a:rPr>
-              <a:t>â†’</a:t>
-            </a:r>
-            <a:endParaRPr lang="en-US" sz="1800" dirty="0"/>
-          </a:p>
-        </p:txBody>
-      </p:sp>
-      <p:sp>
-        <p:nvSpPr>
-          <p:cNvPr id="19" name="Shape 17"/>
+          <p:cNvPr id="17" name="Shape 15"/>
           <p:cNvSpPr/>
           <p:nvPr/>
         </p:nvSpPr>
@@ -13560,7 +15039,7 @@
       </p:sp>
       <p:sp>
         <p:nvSpPr>
-          <p:cNvPr id="20" name="Text 18"/>
+          <p:cNvPr id="18" name="Text 16"/>
           <p:cNvSpPr/>
           <p:nvPr/>
         </p:nvSpPr>
@@ -13767,8 +15246,8 @@
         </p:nvSpPr>
         <p:spPr>
           <a:xfrm>
-            <a:off x="9966960" y="6537960"/>
-            <a:ext cx="1645920" cy="201168"/>
+            <a:off x="9646920" y="6537960"/>
+            <a:ext cx="1965960" cy="201168"/>
           </a:xfrm>
           <a:prstGeom prst="rect">
             <a:avLst/>
@@ -13792,7 +15271,7 @@
                 <a:ea typeface="Aptos" pitchFamily="34" charset="-122"/>
                 <a:cs typeface="Aptos" pitchFamily="34" charset="-120"/>
               </a:rPr>
-              <a:t>Â© Paula Soper</a:t>
+              <a:t>Copyright Paula Soper</a:t>
             </a:r>
             <a:endParaRPr lang="en-US" sz="800" dirty="0"/>
           </a:p>
@@ -13839,77 +15318,13 @@
       </p:sp>
       <p:sp>
         <p:nvSpPr>
-          <p:cNvPr id="8" name="Shape 6"/>
+          <p:cNvPr id="8" name="Text 6"/>
           <p:cNvSpPr/>
           <p:nvPr/>
         </p:nvSpPr>
         <p:spPr>
           <a:xfrm>
             <a:off x="640080" y="658368"/>
-            <a:ext cx="420624" cy="420624"/>
-          </a:xfrm>
-          <a:prstGeom prst="ellipse">
-            <a:avLst/>
-          </a:prstGeom>
-          <a:solidFill>
-            <a:srgbClr val="0068B7"/>
-          </a:solidFill>
-          <a:ln w="12700">
-            <a:solidFill>
-              <a:srgbClr val="0068B7"/>
-            </a:solidFill>
-            <a:prstDash val="solid"/>
-          </a:ln>
-        </p:spPr>
-      </p:sp>
-      <p:sp>
-        <p:nvSpPr>
-          <p:cNvPr id="9" name="Text 7"/>
-          <p:cNvSpPr/>
-          <p:nvPr/>
-        </p:nvSpPr>
-        <p:spPr>
-          <a:xfrm>
-            <a:off x="640080" y="731520"/>
-            <a:ext cx="420624" cy="164592"/>
-          </a:xfrm>
-          <a:prstGeom prst="rect">
-            <a:avLst/>
-          </a:prstGeom>
-          <a:noFill/>
-          <a:ln/>
-        </p:spPr>
-        <p:txBody>
-          <a:bodyPr wrap="square" lIns="0" tIns="0" rIns="0" bIns="0" rtlCol="0" anchor="ctr"/>
-          <a:lstStyle/>
-          <a:p>
-            <a:pPr algn="ctr" indent="0" marL="0">
-              <a:buNone/>
-            </a:pPr>
-            <a:r>
-              <a:rPr lang="en-US" sz="1100" b="1" dirty="0">
-                <a:solidFill>
-                  <a:srgbClr val="FFFFFF"/>
-                </a:solidFill>
-                <a:latin typeface="Aptos" pitchFamily="34" charset="0"/>
-                <a:ea typeface="Aptos" pitchFamily="34" charset="-122"/>
-                <a:cs typeface="Aptos" pitchFamily="34" charset="-120"/>
-              </a:rPr>
-              <a:t>1</a:t>
-            </a:r>
-            <a:endParaRPr lang="en-US" sz="1100" dirty="0"/>
-          </a:p>
-        </p:txBody>
-      </p:sp>
-      <p:sp>
-        <p:nvSpPr>
-          <p:cNvPr id="10" name="Text 8"/>
-          <p:cNvSpPr/>
-          <p:nvPr/>
-        </p:nvSpPr>
-        <p:spPr>
-          <a:xfrm>
-            <a:off x="640080" y="621792"/>
             <a:ext cx="10881360" cy="713232"/>
           </a:xfrm>
           <a:prstGeom prst="rect">
@@ -13944,14 +15359,14 @@
       </p:sp>
       <p:sp>
         <p:nvSpPr>
-          <p:cNvPr id="11" name="Text 9"/>
+          <p:cNvPr id="9" name="Text 7"/>
           <p:cNvSpPr/>
           <p:nvPr/>
         </p:nvSpPr>
         <p:spPr>
           <a:xfrm>
             <a:off x="868680" y="1508760"/>
-            <a:ext cx="6537960" cy="4160520"/>
+            <a:ext cx="6309360" cy="4160520"/>
           </a:xfrm>
           <a:prstGeom prst="rect">
             <a:avLst/>
@@ -14010,18 +15425,18 @@
       </p:sp>
       <p:sp>
         <p:nvSpPr>
-          <p:cNvPr id="12" name="Shape 10"/>
-          <p:cNvSpPr/>
-          <p:nvPr/>
-        </p:nvSpPr>
-        <p:spPr>
-          <a:xfrm>
-            <a:off x="7909560" y="1417320"/>
-            <a:ext cx="3154680" cy="1828800"/>
+          <p:cNvPr id="10" name="Shape 8"/>
+          <p:cNvSpPr/>
+          <p:nvPr/>
+        </p:nvSpPr>
+        <p:spPr>
+          <a:xfrm>
+            <a:off x="7635240" y="1325880"/>
+            <a:ext cx="3474720" cy="1325880"/>
           </a:xfrm>
           <a:prstGeom prst="roundRect">
             <a:avLst>
-              <a:gd name="adj" fmla="val 6000"/>
+              <a:gd name="adj" fmla="val 8276"/>
             </a:avLst>
           </a:prstGeom>
           <a:solidFill>
@@ -14037,14 +15452,14 @@
       </p:sp>
       <p:sp>
         <p:nvSpPr>
-          <p:cNvPr id="13" name="Text 11"/>
-          <p:cNvSpPr/>
-          <p:nvPr/>
-        </p:nvSpPr>
-        <p:spPr>
-          <a:xfrm>
-            <a:off x="8074152" y="1563624"/>
-            <a:ext cx="2825496" cy="256032"/>
+          <p:cNvPr id="11" name="Text 9"/>
+          <p:cNvSpPr/>
+          <p:nvPr/>
+        </p:nvSpPr>
+        <p:spPr>
+          <a:xfrm>
+            <a:off x="7799832" y="1472184"/>
+            <a:ext cx="3145536" cy="256032"/>
           </a:xfrm>
           <a:prstGeom prst="rect">
             <a:avLst/>
@@ -14068,7 +15483,7 @@
                 <a:ea typeface="Aptos" pitchFamily="34" charset="-122"/>
                 <a:cs typeface="Aptos" pitchFamily="34" charset="-120"/>
               </a:rPr>
-              <a:t>Key idea</a:t>
+              <a:t>Risk check</a:t>
             </a:r>
             <a:endParaRPr lang="en-US" sz="1300" dirty="0"/>
           </a:p>
@@ -14076,14 +15491,14 @@
       </p:sp>
       <p:sp>
         <p:nvSpPr>
-          <p:cNvPr id="14" name="Text 12"/>
-          <p:cNvSpPr/>
-          <p:nvPr/>
-        </p:nvSpPr>
-        <p:spPr>
-          <a:xfrm>
-            <a:off x="8074152" y="1920240"/>
-            <a:ext cx="2825496" cy="1188720"/>
+          <p:cNvPr id="12" name="Text 10"/>
+          <p:cNvSpPr/>
+          <p:nvPr/>
+        </p:nvSpPr>
+        <p:spPr>
+          <a:xfrm>
+            <a:off x="7799832" y="1828800"/>
+            <a:ext cx="3145536" cy="685800"/>
           </a:xfrm>
           <a:prstGeom prst="rect">
             <a:avLst/>
@@ -14117,18 +15532,171 @@
       </p:sp>
       <p:sp>
         <p:nvSpPr>
-          <p:cNvPr id="15" name="Shape 13"/>
-          <p:cNvSpPr/>
-          <p:nvPr/>
-        </p:nvSpPr>
-        <p:spPr>
-          <a:xfrm>
-            <a:off x="7909560" y="3520440"/>
-            <a:ext cx="3154680" cy="1737360"/>
+          <p:cNvPr id="13" name="Shape 11"/>
+          <p:cNvSpPr/>
+          <p:nvPr/>
+        </p:nvSpPr>
+        <p:spPr>
+          <a:xfrm>
+            <a:off x="7635240" y="2788920"/>
+            <a:ext cx="3474720" cy="1536192"/>
           </a:xfrm>
           <a:prstGeom prst="roundRect">
             <a:avLst>
-              <a:gd name="adj" fmla="val 6316"/>
+              <a:gd name="adj" fmla="val 7143"/>
+            </a:avLst>
+          </a:prstGeom>
+          <a:solidFill>
+            <a:srgbClr val="FFFFFF">
+              <a:alpha val="88000"/>
+            </a:srgbClr>
+          </a:solidFill>
+          <a:ln w="12700">
+            <a:solidFill>
+              <a:srgbClr val="D6E8F2"/>
+            </a:solidFill>
+            <a:prstDash val="solid"/>
+          </a:ln>
+        </p:spPr>
+      </p:sp>
+      <p:sp>
+        <p:nvSpPr>
+          <p:cNvPr id="14" name="Shape 12"/>
+          <p:cNvSpPr/>
+          <p:nvPr/>
+        </p:nvSpPr>
+        <p:spPr>
+          <a:xfrm>
+            <a:off x="8046720" y="3108960"/>
+            <a:ext cx="2651760" cy="896112"/>
+          </a:xfrm>
+          <a:prstGeom prst="arc">
+            <a:avLst/>
+          </a:prstGeom>
+          <a:noFill/>
+          <a:ln w="25400">
+            <a:solidFill>
+              <a:srgbClr val="0068B7"/>
+            </a:solidFill>
+            <a:prstDash val="solid"/>
+          </a:ln>
+        </p:spPr>
+      </p:sp>
+      <p:sp>
+        <p:nvSpPr>
+          <p:cNvPr id="15" name="Text 13"/>
+          <p:cNvSpPr/>
+          <p:nvPr/>
+        </p:nvSpPr>
+        <p:spPr>
+          <a:xfrm>
+            <a:off x="7909560" y="3099816"/>
+            <a:ext cx="2926080" cy="256032"/>
+          </a:xfrm>
+          <a:prstGeom prst="rect">
+            <a:avLst/>
+          </a:prstGeom>
+          <a:noFill/>
+          <a:ln/>
+        </p:spPr>
+        <p:txBody>
+          <a:bodyPr wrap="square" lIns="0" tIns="0" rIns="0" bIns="0" rtlCol="0" anchor="ctr"/>
+          <a:lstStyle/>
+          <a:p>
+            <a:pPr algn="ctr" indent="0" marL="0">
+              <a:buNone/>
+            </a:pPr>
+            <a:r>
+              <a:rPr lang="en-US" sz="1500" b="1" dirty="0">
+                <a:solidFill>
+                  <a:srgbClr val="003A63"/>
+                </a:solidFill>
+                <a:latin typeface="Aptos" pitchFamily="34" charset="0"/>
+                <a:ea typeface="Aptos" pitchFamily="34" charset="-122"/>
+                <a:cs typeface="Aptos" pitchFamily="34" charset="-120"/>
+              </a:rPr>
+              <a:t>Risk</a:t>
+            </a:r>
+            <a:endParaRPr lang="en-US" sz="1500" dirty="0"/>
+          </a:p>
+        </p:txBody>
+      </p:sp>
+      <p:sp>
+        <p:nvSpPr>
+          <p:cNvPr id="16" name="Shape 14"/>
+          <p:cNvSpPr/>
+          <p:nvPr/>
+        </p:nvSpPr>
+        <p:spPr>
+          <a:xfrm>
+            <a:off x="8366760" y="3639312"/>
+            <a:ext cx="2011680" cy="0"/>
+          </a:xfrm>
+          <a:prstGeom prst="line">
+            <a:avLst/>
+          </a:prstGeom>
+          <a:noFill/>
+          <a:ln w="63500">
+            <a:solidFill>
+              <a:srgbClr val="2F8A28"/>
+            </a:solidFill>
+            <a:prstDash val="solid"/>
+          </a:ln>
+        </p:spPr>
+      </p:sp>
+      <p:sp>
+        <p:nvSpPr>
+          <p:cNvPr id="17" name="Text 15"/>
+          <p:cNvSpPr/>
+          <p:nvPr/>
+        </p:nvSpPr>
+        <p:spPr>
+          <a:xfrm>
+            <a:off x="7909560" y="3849624"/>
+            <a:ext cx="2926080" cy="164592"/>
+          </a:xfrm>
+          <a:prstGeom prst="rect">
+            <a:avLst/>
+          </a:prstGeom>
+          <a:noFill/>
+          <a:ln/>
+        </p:spPr>
+        <p:txBody>
+          <a:bodyPr wrap="square" lIns="0" tIns="0" rIns="0" bIns="0" rtlCol="0" anchor="ctr"/>
+          <a:lstStyle/>
+          <a:p>
+            <a:pPr algn="ctr" indent="0" marL="0">
+              <a:buNone/>
+            </a:pPr>
+            <a:r>
+              <a:rPr lang="en-US" sz="900" dirty="0">
+                <a:solidFill>
+                  <a:srgbClr val="003A63"/>
+                </a:solidFill>
+                <a:latin typeface="Aptos" pitchFamily="34" charset="0"/>
+                <a:ea typeface="Aptos" pitchFamily="34" charset="-122"/>
+                <a:cs typeface="Aptos" pitchFamily="34" charset="-120"/>
+              </a:rPr>
+              <a:t>Human review</a:t>
+            </a:r>
+            <a:endParaRPr lang="en-US" sz="900" dirty="0"/>
+          </a:p>
+        </p:txBody>
+      </p:sp>
+      <p:sp>
+        <p:nvSpPr>
+          <p:cNvPr id="18" name="Shape 16"/>
+          <p:cNvSpPr/>
+          <p:nvPr/>
+        </p:nvSpPr>
+        <p:spPr>
+          <a:xfrm>
+            <a:off x="7635240" y="4498848"/>
+            <a:ext cx="3474720" cy="1143000"/>
+          </a:xfrm>
+          <a:prstGeom prst="roundRect">
+            <a:avLst>
+              <a:gd name="adj" fmla="val 9600"/>
             </a:avLst>
           </a:prstGeom>
           <a:solidFill>
@@ -14144,14 +15712,14 @@
       </p:sp>
       <p:sp>
         <p:nvSpPr>
-          <p:cNvPr id="16" name="Text 14"/>
-          <p:cNvSpPr/>
-          <p:nvPr/>
-        </p:nvSpPr>
-        <p:spPr>
-          <a:xfrm>
-            <a:off x="8074152" y="3666744"/>
-            <a:ext cx="2825496" cy="256032"/>
+          <p:cNvPr id="19" name="Text 17"/>
+          <p:cNvSpPr/>
+          <p:nvPr/>
+        </p:nvSpPr>
+        <p:spPr>
+          <a:xfrm>
+            <a:off x="7799832" y="4645152"/>
+            <a:ext cx="3145536" cy="256032"/>
           </a:xfrm>
           <a:prstGeom prst="rect">
             <a:avLst/>
@@ -14175,7 +15743,7 @@
                 <a:ea typeface="Aptos" pitchFamily="34" charset="-122"/>
                 <a:cs typeface="Aptos" pitchFamily="34" charset="-120"/>
               </a:rPr>
-              <a:t>Use this for</a:t>
+              <a:t>Safeguard to plan</a:t>
             </a:r>
             <a:endParaRPr lang="en-US" sz="1300" dirty="0"/>
           </a:p>
@@ -14183,14 +15751,14 @@
       </p:sp>
       <p:sp>
         <p:nvSpPr>
-          <p:cNvPr id="17" name="Text 15"/>
-          <p:cNvSpPr/>
-          <p:nvPr/>
-        </p:nvSpPr>
-        <p:spPr>
-          <a:xfrm>
-            <a:off x="8074152" y="4023360"/>
-            <a:ext cx="2825496" cy="1097280"/>
+          <p:cNvPr id="20" name="Text 18"/>
+          <p:cNvSpPr/>
+          <p:nvPr/>
+        </p:nvSpPr>
+        <p:spPr>
+          <a:xfrm>
+            <a:off x="7799832" y="5001768"/>
+            <a:ext cx="3145536" cy="502920"/>
           </a:xfrm>
           <a:prstGeom prst="rect">
             <a:avLst/>
@@ -14216,7 +15784,7 @@
                 <a:ea typeface="Aptos" pitchFamily="34" charset="-122"/>
                 <a:cs typeface="Aptos" pitchFamily="34" charset="-120"/>
               </a:rPr>
-              <a:t>Connect the concept to public health decisions, safeguards, documentation, or implementation work.</a:t>
+              <a:t>Use the assignment to test whether you can explain the concept, apply it to a realistic public health situation, and identify what would need review before the work moves forward.</a:t>
             </a:r>
             <a:endParaRPr lang="en-US" sz="1550" dirty="0"/>
           </a:p>
@@ -14390,8 +15958,8 @@
         </p:nvSpPr>
         <p:spPr>
           <a:xfrm>
-            <a:off x="9966960" y="6537960"/>
-            <a:ext cx="1645920" cy="201168"/>
+            <a:off x="9646920" y="6537960"/>
+            <a:ext cx="1965960" cy="201168"/>
           </a:xfrm>
           <a:prstGeom prst="rect">
             <a:avLst/>
@@ -14415,7 +15983,7 @@
                 <a:ea typeface="Aptos" pitchFamily="34" charset="-122"/>
                 <a:cs typeface="Aptos" pitchFamily="34" charset="-120"/>
               </a:rPr>
-              <a:t>Â© Paula Soper</a:t>
+              <a:t>Copyright Paula Soper</a:t>
             </a:r>
             <a:endParaRPr lang="en-US" sz="800" dirty="0"/>
           </a:p>
@@ -14462,77 +16030,13 @@
       </p:sp>
       <p:sp>
         <p:nvSpPr>
-          <p:cNvPr id="8" name="Shape 6"/>
+          <p:cNvPr id="8" name="Text 6"/>
           <p:cNvSpPr/>
           <p:nvPr/>
         </p:nvSpPr>
         <p:spPr>
           <a:xfrm>
             <a:off x="640080" y="658368"/>
-            <a:ext cx="420624" cy="420624"/>
-          </a:xfrm>
-          <a:prstGeom prst="ellipse">
-            <a:avLst/>
-          </a:prstGeom>
-          <a:solidFill>
-            <a:srgbClr val="0068B7"/>
-          </a:solidFill>
-          <a:ln w="12700">
-            <a:solidFill>
-              <a:srgbClr val="0068B7"/>
-            </a:solidFill>
-            <a:prstDash val="solid"/>
-          </a:ln>
-        </p:spPr>
-      </p:sp>
-      <p:sp>
-        <p:nvSpPr>
-          <p:cNvPr id="9" name="Text 7"/>
-          <p:cNvSpPr/>
-          <p:nvPr/>
-        </p:nvSpPr>
-        <p:spPr>
-          <a:xfrm>
-            <a:off x="640080" y="731520"/>
-            <a:ext cx="420624" cy="164592"/>
-          </a:xfrm>
-          <a:prstGeom prst="rect">
-            <a:avLst/>
-          </a:prstGeom>
-          <a:noFill/>
-          <a:ln/>
-        </p:spPr>
-        <p:txBody>
-          <a:bodyPr wrap="square" lIns="0" tIns="0" rIns="0" bIns="0" rtlCol="0" anchor="ctr"/>
-          <a:lstStyle/>
-          <a:p>
-            <a:pPr algn="ctr" indent="0" marL="0">
-              <a:buNone/>
-            </a:pPr>
-            <a:r>
-              <a:rPr lang="en-US" sz="1100" b="1" dirty="0">
-                <a:solidFill>
-                  <a:srgbClr val="FFFFFF"/>
-                </a:solidFill>
-                <a:latin typeface="Aptos" pitchFamily="34" charset="0"/>
-                <a:ea typeface="Aptos" pitchFamily="34" charset="-122"/>
-                <a:cs typeface="Aptos" pitchFamily="34" charset="-120"/>
-              </a:rPr>
-              <a:t>2</a:t>
-            </a:r>
-            <a:endParaRPr lang="en-US" sz="1100" dirty="0"/>
-          </a:p>
-        </p:txBody>
-      </p:sp>
-      <p:sp>
-        <p:nvSpPr>
-          <p:cNvPr id="10" name="Text 8"/>
-          <p:cNvSpPr/>
-          <p:nvPr/>
-        </p:nvSpPr>
-        <p:spPr>
-          <a:xfrm>
-            <a:off x="640080" y="621792"/>
             <a:ext cx="10881360" cy="713232"/>
           </a:xfrm>
           <a:prstGeom prst="rect">
@@ -14567,14 +16071,14 @@
       </p:sp>
       <p:sp>
         <p:nvSpPr>
-          <p:cNvPr id="11" name="Text 9"/>
+          <p:cNvPr id="9" name="Text 7"/>
           <p:cNvSpPr/>
           <p:nvPr/>
         </p:nvSpPr>
         <p:spPr>
           <a:xfrm>
             <a:off x="868680" y="1508760"/>
-            <a:ext cx="6537960" cy="4160520"/>
+            <a:ext cx="6309360" cy="4160520"/>
           </a:xfrm>
           <a:prstGeom prst="rect">
             <a:avLst/>
@@ -14633,18 +16137,18 @@
       </p:sp>
       <p:sp>
         <p:nvSpPr>
-          <p:cNvPr id="12" name="Shape 10"/>
-          <p:cNvSpPr/>
-          <p:nvPr/>
-        </p:nvSpPr>
-        <p:spPr>
-          <a:xfrm>
-            <a:off x="7909560" y="1417320"/>
-            <a:ext cx="3154680" cy="1828800"/>
+          <p:cNvPr id="10" name="Shape 8"/>
+          <p:cNvSpPr/>
+          <p:nvPr/>
+        </p:nvSpPr>
+        <p:spPr>
+          <a:xfrm>
+            <a:off x="7635240" y="1325880"/>
+            <a:ext cx="3474720" cy="1325880"/>
           </a:xfrm>
           <a:prstGeom prst="roundRect">
             <a:avLst>
-              <a:gd name="adj" fmla="val 6000"/>
+              <a:gd name="adj" fmla="val 8276"/>
             </a:avLst>
           </a:prstGeom>
           <a:solidFill>
@@ -14660,14 +16164,14 @@
       </p:sp>
       <p:sp>
         <p:nvSpPr>
-          <p:cNvPr id="13" name="Text 11"/>
-          <p:cNvSpPr/>
-          <p:nvPr/>
-        </p:nvSpPr>
-        <p:spPr>
-          <a:xfrm>
-            <a:off x="8074152" y="1563624"/>
-            <a:ext cx="2825496" cy="256032"/>
+          <p:cNvPr id="11" name="Text 9"/>
+          <p:cNvSpPr/>
+          <p:nvPr/>
+        </p:nvSpPr>
+        <p:spPr>
+          <a:xfrm>
+            <a:off x="7799832" y="1472184"/>
+            <a:ext cx="3145536" cy="256032"/>
           </a:xfrm>
           <a:prstGeom prst="rect">
             <a:avLst/>
@@ -14691,7 +16195,7 @@
                 <a:ea typeface="Aptos" pitchFamily="34" charset="-122"/>
                 <a:cs typeface="Aptos" pitchFamily="34" charset="-120"/>
               </a:rPr>
-              <a:t>Key idea</a:t>
+              <a:t>Risk check</a:t>
             </a:r>
             <a:endParaRPr lang="en-US" sz="1300" dirty="0"/>
           </a:p>
@@ -14699,14 +16203,14 @@
       </p:sp>
       <p:sp>
         <p:nvSpPr>
-          <p:cNvPr id="14" name="Text 12"/>
-          <p:cNvSpPr/>
-          <p:nvPr/>
-        </p:nvSpPr>
-        <p:spPr>
-          <a:xfrm>
-            <a:off x="8074152" y="1920240"/>
-            <a:ext cx="2825496" cy="1188720"/>
+          <p:cNvPr id="12" name="Text 10"/>
+          <p:cNvSpPr/>
+          <p:nvPr/>
+        </p:nvSpPr>
+        <p:spPr>
+          <a:xfrm>
+            <a:off x="7799832" y="1828800"/>
+            <a:ext cx="3145536" cy="685800"/>
           </a:xfrm>
           <a:prstGeom prst="rect">
             <a:avLst/>
@@ -14740,18 +16244,171 @@
       </p:sp>
       <p:sp>
         <p:nvSpPr>
-          <p:cNvPr id="15" name="Shape 13"/>
-          <p:cNvSpPr/>
-          <p:nvPr/>
-        </p:nvSpPr>
-        <p:spPr>
-          <a:xfrm>
-            <a:off x="7909560" y="3520440"/>
-            <a:ext cx="3154680" cy="1737360"/>
+          <p:cNvPr id="13" name="Shape 11"/>
+          <p:cNvSpPr/>
+          <p:nvPr/>
+        </p:nvSpPr>
+        <p:spPr>
+          <a:xfrm>
+            <a:off x="7635240" y="2788920"/>
+            <a:ext cx="3474720" cy="1536192"/>
           </a:xfrm>
           <a:prstGeom prst="roundRect">
             <a:avLst>
-              <a:gd name="adj" fmla="val 6316"/>
+              <a:gd name="adj" fmla="val 7143"/>
+            </a:avLst>
+          </a:prstGeom>
+          <a:solidFill>
+            <a:srgbClr val="FFFFFF">
+              <a:alpha val="88000"/>
+            </a:srgbClr>
+          </a:solidFill>
+          <a:ln w="12700">
+            <a:solidFill>
+              <a:srgbClr val="D6E8F2"/>
+            </a:solidFill>
+            <a:prstDash val="solid"/>
+          </a:ln>
+        </p:spPr>
+      </p:sp>
+      <p:sp>
+        <p:nvSpPr>
+          <p:cNvPr id="14" name="Shape 12"/>
+          <p:cNvSpPr/>
+          <p:nvPr/>
+        </p:nvSpPr>
+        <p:spPr>
+          <a:xfrm>
+            <a:off x="8046720" y="3108960"/>
+            <a:ext cx="2651760" cy="896112"/>
+          </a:xfrm>
+          <a:prstGeom prst="arc">
+            <a:avLst/>
+          </a:prstGeom>
+          <a:noFill/>
+          <a:ln w="25400">
+            <a:solidFill>
+              <a:srgbClr val="0068B7"/>
+            </a:solidFill>
+            <a:prstDash val="solid"/>
+          </a:ln>
+        </p:spPr>
+      </p:sp>
+      <p:sp>
+        <p:nvSpPr>
+          <p:cNvPr id="15" name="Text 13"/>
+          <p:cNvSpPr/>
+          <p:nvPr/>
+        </p:nvSpPr>
+        <p:spPr>
+          <a:xfrm>
+            <a:off x="7909560" y="3099816"/>
+            <a:ext cx="2926080" cy="256032"/>
+          </a:xfrm>
+          <a:prstGeom prst="rect">
+            <a:avLst/>
+          </a:prstGeom>
+          <a:noFill/>
+          <a:ln/>
+        </p:spPr>
+        <p:txBody>
+          <a:bodyPr wrap="square" lIns="0" tIns="0" rIns="0" bIns="0" rtlCol="0" anchor="ctr"/>
+          <a:lstStyle/>
+          <a:p>
+            <a:pPr algn="ctr" indent="0" marL="0">
+              <a:buNone/>
+            </a:pPr>
+            <a:r>
+              <a:rPr lang="en-US" sz="1500" b="1" dirty="0">
+                <a:solidFill>
+                  <a:srgbClr val="003A63"/>
+                </a:solidFill>
+                <a:latin typeface="Aptos" pitchFamily="34" charset="0"/>
+                <a:ea typeface="Aptos" pitchFamily="34" charset="-122"/>
+                <a:cs typeface="Aptos" pitchFamily="34" charset="-120"/>
+              </a:rPr>
+              <a:t>Risk</a:t>
+            </a:r>
+            <a:endParaRPr lang="en-US" sz="1500" dirty="0"/>
+          </a:p>
+        </p:txBody>
+      </p:sp>
+      <p:sp>
+        <p:nvSpPr>
+          <p:cNvPr id="16" name="Shape 14"/>
+          <p:cNvSpPr/>
+          <p:nvPr/>
+        </p:nvSpPr>
+        <p:spPr>
+          <a:xfrm>
+            <a:off x="8366760" y="3639312"/>
+            <a:ext cx="2011680" cy="0"/>
+          </a:xfrm>
+          <a:prstGeom prst="line">
+            <a:avLst/>
+          </a:prstGeom>
+          <a:noFill/>
+          <a:ln w="63500">
+            <a:solidFill>
+              <a:srgbClr val="2F8A28"/>
+            </a:solidFill>
+            <a:prstDash val="solid"/>
+          </a:ln>
+        </p:spPr>
+      </p:sp>
+      <p:sp>
+        <p:nvSpPr>
+          <p:cNvPr id="17" name="Text 15"/>
+          <p:cNvSpPr/>
+          <p:nvPr/>
+        </p:nvSpPr>
+        <p:spPr>
+          <a:xfrm>
+            <a:off x="7909560" y="3849624"/>
+            <a:ext cx="2926080" cy="164592"/>
+          </a:xfrm>
+          <a:prstGeom prst="rect">
+            <a:avLst/>
+          </a:prstGeom>
+          <a:noFill/>
+          <a:ln/>
+        </p:spPr>
+        <p:txBody>
+          <a:bodyPr wrap="square" lIns="0" tIns="0" rIns="0" bIns="0" rtlCol="0" anchor="ctr"/>
+          <a:lstStyle/>
+          <a:p>
+            <a:pPr algn="ctr" indent="0" marL="0">
+              <a:buNone/>
+            </a:pPr>
+            <a:r>
+              <a:rPr lang="en-US" sz="900" dirty="0">
+                <a:solidFill>
+                  <a:srgbClr val="003A63"/>
+                </a:solidFill>
+                <a:latin typeface="Aptos" pitchFamily="34" charset="0"/>
+                <a:ea typeface="Aptos" pitchFamily="34" charset="-122"/>
+                <a:cs typeface="Aptos" pitchFamily="34" charset="-120"/>
+              </a:rPr>
+              <a:t>Human review</a:t>
+            </a:r>
+            <a:endParaRPr lang="en-US" sz="900" dirty="0"/>
+          </a:p>
+        </p:txBody>
+      </p:sp>
+      <p:sp>
+        <p:nvSpPr>
+          <p:cNvPr id="18" name="Shape 16"/>
+          <p:cNvSpPr/>
+          <p:nvPr/>
+        </p:nvSpPr>
+        <p:spPr>
+          <a:xfrm>
+            <a:off x="7635240" y="4498848"/>
+            <a:ext cx="3474720" cy="1143000"/>
+          </a:xfrm>
+          <a:prstGeom prst="roundRect">
+            <a:avLst>
+              <a:gd name="adj" fmla="val 9600"/>
             </a:avLst>
           </a:prstGeom>
           <a:solidFill>
@@ -14767,14 +16424,14 @@
       </p:sp>
       <p:sp>
         <p:nvSpPr>
-          <p:cNvPr id="16" name="Text 14"/>
-          <p:cNvSpPr/>
-          <p:nvPr/>
-        </p:nvSpPr>
-        <p:spPr>
-          <a:xfrm>
-            <a:off x="8074152" y="3666744"/>
-            <a:ext cx="2825496" cy="256032"/>
+          <p:cNvPr id="19" name="Text 17"/>
+          <p:cNvSpPr/>
+          <p:nvPr/>
+        </p:nvSpPr>
+        <p:spPr>
+          <a:xfrm>
+            <a:off x="7799832" y="4645152"/>
+            <a:ext cx="3145536" cy="256032"/>
           </a:xfrm>
           <a:prstGeom prst="rect">
             <a:avLst/>
@@ -14798,7 +16455,7 @@
                 <a:ea typeface="Aptos" pitchFamily="34" charset="-122"/>
                 <a:cs typeface="Aptos" pitchFamily="34" charset="-120"/>
               </a:rPr>
-              <a:t>Use this for</a:t>
+              <a:t>Safeguard to plan</a:t>
             </a:r>
             <a:endParaRPr lang="en-US" sz="1300" dirty="0"/>
           </a:p>
@@ -14806,14 +16463,14 @@
       </p:sp>
       <p:sp>
         <p:nvSpPr>
-          <p:cNvPr id="17" name="Text 15"/>
-          <p:cNvSpPr/>
-          <p:nvPr/>
-        </p:nvSpPr>
-        <p:spPr>
-          <a:xfrm>
-            <a:off x="8074152" y="4023360"/>
-            <a:ext cx="2825496" cy="1097280"/>
+          <p:cNvPr id="20" name="Text 18"/>
+          <p:cNvSpPr/>
+          <p:nvPr/>
+        </p:nvSpPr>
+        <p:spPr>
+          <a:xfrm>
+            <a:off x="7799832" y="5001768"/>
+            <a:ext cx="3145536" cy="502920"/>
           </a:xfrm>
           <a:prstGeom prst="rect">
             <a:avLst/>
@@ -14839,7 +16496,7 @@
                 <a:ea typeface="Aptos" pitchFamily="34" charset="-122"/>
                 <a:cs typeface="Aptos" pitchFamily="34" charset="-120"/>
               </a:rPr>
-              <a:t>Connect the concept to public health decisions, safeguards, documentation, or implementation work.</a:t>
+              <a:t>Identify what could go wrong, who could be affected, what safeguards are needed, and what evidence should be reviewed before use expands.</a:t>
             </a:r>
             <a:endParaRPr lang="en-US" sz="1550" dirty="0"/>
           </a:p>
@@ -15013,8 +16670,8 @@
         </p:nvSpPr>
         <p:spPr>
           <a:xfrm>
-            <a:off x="9966960" y="6537960"/>
-            <a:ext cx="1645920" cy="201168"/>
+            <a:off x="9646920" y="6537960"/>
+            <a:ext cx="1965960" cy="201168"/>
           </a:xfrm>
           <a:prstGeom prst="rect">
             <a:avLst/>
@@ -15038,7 +16695,7 @@
                 <a:ea typeface="Aptos" pitchFamily="34" charset="-122"/>
                 <a:cs typeface="Aptos" pitchFamily="34" charset="-120"/>
               </a:rPr>
-              <a:t>Â© Paula Soper</a:t>
+              <a:t>Copyright Paula Soper</a:t>
             </a:r>
             <a:endParaRPr lang="en-US" sz="800" dirty="0"/>
           </a:p>
@@ -15085,14 +16742,257 @@
       </p:sp>
       <p:sp>
         <p:nvSpPr>
-          <p:cNvPr id="8" name="Shape 6"/>
+          <p:cNvPr id="8" name="Text 6"/>
           <p:cNvSpPr/>
           <p:nvPr/>
         </p:nvSpPr>
         <p:spPr>
           <a:xfrm>
             <a:off x="640080" y="658368"/>
-            <a:ext cx="420624" cy="420624"/>
+            <a:ext cx="10881360" cy="713232"/>
+          </a:xfrm>
+          <a:prstGeom prst="rect">
+            <a:avLst/>
+          </a:prstGeom>
+          <a:noFill/>
+          <a:ln/>
+        </p:spPr>
+        <p:txBody>
+          <a:bodyPr wrap="square" lIns="0" tIns="0" rIns="0" bIns="0" rtlCol="0" anchor="ctr">
+            <a:normAutofit/>
+          </a:bodyPr>
+          <a:lstStyle/>
+          <a:p>
+            <a:pPr indent="0" marL="0">
+              <a:buNone/>
+            </a:pPr>
+            <a:r>
+              <a:rPr lang="en-US" sz="3400" b="1" dirty="0">
+                <a:solidFill>
+                  <a:srgbClr val="003A63"/>
+                </a:solidFill>
+                <a:latin typeface="Aptos Display" pitchFamily="34" charset="0"/>
+                <a:ea typeface="Aptos Display" pitchFamily="34" charset="-122"/>
+                <a:cs typeface="Aptos Display" pitchFamily="34" charset="-120"/>
+              </a:rPr>
+              <a:t>Jurisdiction and Agency Policy Note</a:t>
+            </a:r>
+            <a:endParaRPr lang="en-US" sz="3400" dirty="0"/>
+          </a:p>
+        </p:txBody>
+      </p:sp>
+      <p:sp>
+        <p:nvSpPr>
+          <p:cNvPr id="9" name="Text 7"/>
+          <p:cNvSpPr/>
+          <p:nvPr/>
+        </p:nvSpPr>
+        <p:spPr>
+          <a:xfrm>
+            <a:off x="868680" y="1508760"/>
+            <a:ext cx="6309360" cy="4160520"/>
+          </a:xfrm>
+          <a:prstGeom prst="rect">
+            <a:avLst/>
+          </a:prstGeom>
+          <a:noFill/>
+          <a:ln/>
+        </p:spPr>
+        <p:txBody>
+          <a:bodyPr wrap="square" lIns="635" tIns="635" rIns="635" bIns="635" rtlCol="0" anchor="t">
+            <a:normAutofit/>
+          </a:bodyPr>
+          <a:lstStyle/>
+          <a:p>
+            <a:r>
+              <a:rPr lang="en-US" sz="2100" dirty="0">
+                <a:solidFill>
+                  <a:srgbClr val="17364A"/>
+                </a:solidFill>
+                <a:latin typeface="Aptos" pitchFamily="34" charset="0"/>
+                <a:ea typeface="Aptos" pitchFamily="34" charset="-122"/>
+                <a:cs typeface="Aptos" pitchFamily="34" charset="-120"/>
+              </a:rPr>
+              <a:t>This module provides national-level training guidance for public health agencies and partners.</a:t>
+            </a:r>
+            <a:endParaRPr lang="en-US" sz="2100" dirty="0"/>
+          </a:p>
+          <a:p>
+            <a:r>
+              <a:rPr lang="en-US" sz="2100" dirty="0">
+                <a:solidFill>
+                  <a:srgbClr val="17364A"/>
+                </a:solidFill>
+                <a:latin typeface="Aptos" pitchFamily="34" charset="0"/>
+                <a:ea typeface="Aptos" pitchFamily="34" charset="-122"/>
+                <a:cs typeface="Aptos" pitchFamily="34" charset="-120"/>
+              </a:rPr>
+              <a:t>It is not legal advice and does not replace review by agency legal counsel, privacy officers,.</a:t>
+            </a:r>
+            <a:endParaRPr lang="en-US" sz="2100" dirty="0"/>
+          </a:p>
+          <a:p>
+            <a:r>
+              <a:rPr lang="en-US" sz="2100" dirty="0">
+                <a:solidFill>
+                  <a:srgbClr val="17364A"/>
+                </a:solidFill>
+                <a:latin typeface="Aptos" pitchFamily="34" charset="0"/>
+                <a:ea typeface="Aptos" pitchFamily="34" charset="-122"/>
+                <a:cs typeface="Aptos" pitchFamily="34" charset="-120"/>
+              </a:rPr>
+              <a:t>Requirements may vary by state, locality, territory, Tribe, agency, funding source, data-sharing.</a:t>
+            </a:r>
+            <a:endParaRPr lang="en-US" sz="2100" dirty="0"/>
+          </a:p>
+        </p:txBody>
+      </p:sp>
+      <p:sp>
+        <p:nvSpPr>
+          <p:cNvPr id="10" name="Shape 8"/>
+          <p:cNvSpPr/>
+          <p:nvPr/>
+        </p:nvSpPr>
+        <p:spPr>
+          <a:xfrm>
+            <a:off x="7635240" y="1325880"/>
+            <a:ext cx="3474720" cy="1325880"/>
+          </a:xfrm>
+          <a:prstGeom prst="roundRect">
+            <a:avLst>
+              <a:gd name="adj" fmla="val 8276"/>
+            </a:avLst>
+          </a:prstGeom>
+          <a:solidFill>
+            <a:srgbClr val="EEF8ED"/>
+          </a:solidFill>
+          <a:ln w="12700">
+            <a:solidFill>
+              <a:srgbClr val="B9D7E6"/>
+            </a:solidFill>
+            <a:prstDash val="solid"/>
+          </a:ln>
+        </p:spPr>
+      </p:sp>
+      <p:sp>
+        <p:nvSpPr>
+          <p:cNvPr id="11" name="Text 9"/>
+          <p:cNvSpPr/>
+          <p:nvPr/>
+        </p:nvSpPr>
+        <p:spPr>
+          <a:xfrm>
+            <a:off x="7799832" y="1472184"/>
+            <a:ext cx="3145536" cy="256032"/>
+          </a:xfrm>
+          <a:prstGeom prst="rect">
+            <a:avLst/>
+          </a:prstGeom>
+          <a:noFill/>
+          <a:ln/>
+        </p:spPr>
+        <p:txBody>
+          <a:bodyPr wrap="square" lIns="0" tIns="0" rIns="0" bIns="0" rtlCol="0" anchor="ctr"/>
+          <a:lstStyle/>
+          <a:p>
+            <a:pPr indent="0" marL="0">
+              <a:buNone/>
+            </a:pPr>
+            <a:r>
+              <a:rPr lang="en-US" sz="1300" b="1" dirty="0">
+                <a:solidFill>
+                  <a:srgbClr val="0068B7"/>
+                </a:solidFill>
+                <a:latin typeface="Aptos" pitchFamily="34" charset="0"/>
+                <a:ea typeface="Aptos" pitchFamily="34" charset="-122"/>
+                <a:cs typeface="Aptos" pitchFamily="34" charset="-120"/>
+              </a:rPr>
+              <a:t>Governance lens</a:t>
+            </a:r>
+            <a:endParaRPr lang="en-US" sz="1300" dirty="0"/>
+          </a:p>
+        </p:txBody>
+      </p:sp>
+      <p:sp>
+        <p:nvSpPr>
+          <p:cNvPr id="12" name="Text 10"/>
+          <p:cNvSpPr/>
+          <p:nvPr/>
+        </p:nvSpPr>
+        <p:spPr>
+          <a:xfrm>
+            <a:off x="7799832" y="1828800"/>
+            <a:ext cx="3145536" cy="685800"/>
+          </a:xfrm>
+          <a:prstGeom prst="rect">
+            <a:avLst/>
+          </a:prstGeom>
+          <a:noFill/>
+          <a:ln/>
+        </p:spPr>
+        <p:txBody>
+          <a:bodyPr wrap="square" lIns="0" tIns="0" rIns="0" bIns="0" rtlCol="0" anchor="t">
+            <a:normAutofit/>
+          </a:bodyPr>
+          <a:lstStyle/>
+          <a:p>
+            <a:pPr indent="0" marL="0">
+              <a:buNone/>
+            </a:pPr>
+            <a:r>
+              <a:rPr lang="en-US" sz="1550" dirty="0">
+                <a:solidFill>
+                  <a:srgbClr val="17364A"/>
+                </a:solidFill>
+                <a:latin typeface="Aptos" pitchFamily="34" charset="0"/>
+                <a:ea typeface="Aptos" pitchFamily="34" charset="-122"/>
+                <a:cs typeface="Aptos" pitchFamily="34" charset="-120"/>
+              </a:rPr>
+              <a:t>This module provides national-level training guidance for public health agencies and partners.</a:t>
+            </a:r>
+            <a:endParaRPr lang="en-US" sz="1550" dirty="0"/>
+          </a:p>
+        </p:txBody>
+      </p:sp>
+      <p:sp>
+        <p:nvSpPr>
+          <p:cNvPr id="13" name="Shape 11"/>
+          <p:cNvSpPr/>
+          <p:nvPr/>
+        </p:nvSpPr>
+        <p:spPr>
+          <a:xfrm>
+            <a:off x="7635240" y="2788920"/>
+            <a:ext cx="3474720" cy="1536192"/>
+          </a:xfrm>
+          <a:prstGeom prst="roundRect">
+            <a:avLst>
+              <a:gd name="adj" fmla="val 7143"/>
+            </a:avLst>
+          </a:prstGeom>
+          <a:solidFill>
+            <a:srgbClr val="FFFFFF">
+              <a:alpha val="88000"/>
+            </a:srgbClr>
+          </a:solidFill>
+          <a:ln w="12700">
+            <a:solidFill>
+              <a:srgbClr val="D6E8F2"/>
+            </a:solidFill>
+            <a:prstDash val="solid"/>
+          </a:ln>
+        </p:spPr>
+      </p:sp>
+      <p:sp>
+        <p:nvSpPr>
+          <p:cNvPr id="14" name="Shape 12"/>
+          <p:cNvSpPr/>
+          <p:nvPr/>
+        </p:nvSpPr>
+        <p:spPr>
+          <a:xfrm>
+            <a:off x="7891272" y="3108960"/>
+            <a:ext cx="566928" cy="566928"/>
           </a:xfrm>
           <a:prstGeom prst="ellipse">
             <a:avLst/>
@@ -15110,172 +17010,24 @@
       </p:sp>
       <p:sp>
         <p:nvSpPr>
-          <p:cNvPr id="9" name="Text 7"/>
-          <p:cNvSpPr/>
-          <p:nvPr/>
-        </p:nvSpPr>
-        <p:spPr>
-          <a:xfrm>
-            <a:off x="640080" y="731520"/>
-            <a:ext cx="420624" cy="164592"/>
-          </a:xfrm>
-          <a:prstGeom prst="rect">
-            <a:avLst/>
-          </a:prstGeom>
-          <a:noFill/>
-          <a:ln/>
-        </p:spPr>
-        <p:txBody>
-          <a:bodyPr wrap="square" lIns="0" tIns="0" rIns="0" bIns="0" rtlCol="0" anchor="ctr"/>
-          <a:lstStyle/>
-          <a:p>
-            <a:pPr algn="ctr" indent="0" marL="0">
-              <a:buNone/>
-            </a:pPr>
-            <a:r>
-              <a:rPr lang="en-US" sz="1100" b="1" dirty="0">
-                <a:solidFill>
-                  <a:srgbClr val="FFFFFF"/>
-                </a:solidFill>
-                <a:latin typeface="Aptos" pitchFamily="34" charset="0"/>
-                <a:ea typeface="Aptos" pitchFamily="34" charset="-122"/>
-                <a:cs typeface="Aptos" pitchFamily="34" charset="-120"/>
-              </a:rPr>
-              <a:t>3</a:t>
-            </a:r>
-            <a:endParaRPr lang="en-US" sz="1100" dirty="0"/>
-          </a:p>
-        </p:txBody>
-      </p:sp>
-      <p:sp>
-        <p:nvSpPr>
-          <p:cNvPr id="10" name="Text 8"/>
-          <p:cNvSpPr/>
-          <p:nvPr/>
-        </p:nvSpPr>
-        <p:spPr>
-          <a:xfrm>
-            <a:off x="640080" y="621792"/>
-            <a:ext cx="10881360" cy="713232"/>
-          </a:xfrm>
-          <a:prstGeom prst="rect">
-            <a:avLst/>
-          </a:prstGeom>
-          <a:noFill/>
-          <a:ln/>
-        </p:spPr>
-        <p:txBody>
-          <a:bodyPr wrap="square" lIns="0" tIns="0" rIns="0" bIns="0" rtlCol="0" anchor="ctr">
-            <a:normAutofit/>
-          </a:bodyPr>
-          <a:lstStyle/>
-          <a:p>
-            <a:pPr indent="0" marL="0">
-              <a:buNone/>
-            </a:pPr>
-            <a:r>
-              <a:rPr lang="en-US" sz="3400" b="1" dirty="0">
-                <a:solidFill>
-                  <a:srgbClr val="003A63"/>
-                </a:solidFill>
-                <a:latin typeface="Aptos Display" pitchFamily="34" charset="0"/>
-                <a:ea typeface="Aptos Display" pitchFamily="34" charset="-122"/>
-                <a:cs typeface="Aptos Display" pitchFamily="34" charset="-120"/>
-              </a:rPr>
-              <a:t>Jurisdiction and Agency Policy Note</a:t>
-            </a:r>
-            <a:endParaRPr lang="en-US" sz="3400" dirty="0"/>
-          </a:p>
-        </p:txBody>
-      </p:sp>
-      <p:sp>
-        <p:nvSpPr>
-          <p:cNvPr id="11" name="Text 9"/>
-          <p:cNvSpPr/>
-          <p:nvPr/>
-        </p:nvSpPr>
-        <p:spPr>
-          <a:xfrm>
-            <a:off x="868680" y="1508760"/>
-            <a:ext cx="6537960" cy="4160520"/>
-          </a:xfrm>
-          <a:prstGeom prst="rect">
-            <a:avLst/>
-          </a:prstGeom>
-          <a:noFill/>
-          <a:ln/>
-        </p:spPr>
-        <p:txBody>
-          <a:bodyPr wrap="square" lIns="635" tIns="635" rIns="635" bIns="635" rtlCol="0" anchor="t">
-            <a:normAutofit/>
-          </a:bodyPr>
-          <a:lstStyle/>
-          <a:p>
-            <a:r>
-              <a:rPr lang="en-US" sz="2100" dirty="0">
-                <a:solidFill>
-                  <a:srgbClr val="17364A"/>
-                </a:solidFill>
-                <a:latin typeface="Aptos" pitchFamily="34" charset="0"/>
-                <a:ea typeface="Aptos" pitchFamily="34" charset="-122"/>
-                <a:cs typeface="Aptos" pitchFamily="34" charset="-120"/>
-              </a:rPr>
-              <a:t>This module provides national-level training guidance for public health agencies and partners.</a:t>
-            </a:r>
-            <a:endParaRPr lang="en-US" sz="2100" dirty="0"/>
-          </a:p>
-          <a:p>
-            <a:r>
-              <a:rPr lang="en-US" sz="2100" dirty="0">
-                <a:solidFill>
-                  <a:srgbClr val="17364A"/>
-                </a:solidFill>
-                <a:latin typeface="Aptos" pitchFamily="34" charset="0"/>
-                <a:ea typeface="Aptos" pitchFamily="34" charset="-122"/>
-                <a:cs typeface="Aptos" pitchFamily="34" charset="-120"/>
-              </a:rPr>
-              <a:t>It is not legal advice and does not replace review by agency legal counsel, privacy officers,.</a:t>
-            </a:r>
-            <a:endParaRPr lang="en-US" sz="2100" dirty="0"/>
-          </a:p>
-          <a:p>
-            <a:r>
-              <a:rPr lang="en-US" sz="2100" dirty="0">
-                <a:solidFill>
-                  <a:srgbClr val="17364A"/>
-                </a:solidFill>
-                <a:latin typeface="Aptos" pitchFamily="34" charset="0"/>
-                <a:ea typeface="Aptos" pitchFamily="34" charset="-122"/>
-                <a:cs typeface="Aptos" pitchFamily="34" charset="-120"/>
-              </a:rPr>
-              <a:t>Requirements may vary by state, locality, territory, Tribe, agency, funding source, data-sharing.</a:t>
-            </a:r>
-            <a:endParaRPr lang="en-US" sz="2100" dirty="0"/>
-          </a:p>
-        </p:txBody>
-      </p:sp>
-      <p:sp>
-        <p:nvSpPr>
-          <p:cNvPr id="12" name="Shape 10"/>
-          <p:cNvSpPr/>
-          <p:nvPr/>
-        </p:nvSpPr>
-        <p:spPr>
-          <a:xfrm>
-            <a:off x="7909560" y="1417320"/>
-            <a:ext cx="3154680" cy="1828800"/>
-          </a:xfrm>
-          <a:prstGeom prst="roundRect">
-            <a:avLst>
-              <a:gd name="adj" fmla="val 6000"/>
-            </a:avLst>
+          <p:cNvPr id="15" name="Shape 13"/>
+          <p:cNvSpPr/>
+          <p:nvPr/>
+        </p:nvSpPr>
+        <p:spPr>
+          <a:xfrm>
+            <a:off x="10287000" y="3108960"/>
+            <a:ext cx="566928" cy="566928"/>
+          </a:xfrm>
+          <a:prstGeom prst="ellipse">
+            <a:avLst/>
           </a:prstGeom>
           <a:solidFill>
-            <a:srgbClr val="EEF8ED"/>
+            <a:srgbClr val="2F8A28"/>
           </a:solidFill>
           <a:ln w="12700">
             <a:solidFill>
-              <a:srgbClr val="B9D7E6"/>
+              <a:srgbClr val="2F8A28"/>
             </a:solidFill>
             <a:prstDash val="solid"/>
           </a:ln>
@@ -15283,14 +17035,108 @@
       </p:sp>
       <p:sp>
         <p:nvSpPr>
-          <p:cNvPr id="13" name="Text 11"/>
-          <p:cNvSpPr/>
-          <p:nvPr/>
-        </p:nvSpPr>
-        <p:spPr>
-          <a:xfrm>
-            <a:off x="8074152" y="1563624"/>
-            <a:ext cx="2825496" cy="256032"/>
+          <p:cNvPr id="16" name="Shape 14"/>
+          <p:cNvSpPr/>
+          <p:nvPr/>
+        </p:nvSpPr>
+        <p:spPr>
+          <a:xfrm>
+            <a:off x="9089136" y="3456432"/>
+            <a:ext cx="566928" cy="566928"/>
+          </a:xfrm>
+          <a:prstGeom prst="ellipse">
+            <a:avLst/>
+          </a:prstGeom>
+          <a:solidFill>
+            <a:srgbClr val="6A4CA3"/>
+          </a:solidFill>
+          <a:ln w="12700">
+            <a:solidFill>
+              <a:srgbClr val="6A4CA3"/>
+            </a:solidFill>
+            <a:prstDash val="solid"/>
+          </a:ln>
+        </p:spPr>
+      </p:sp>
+      <p:sp>
+        <p:nvSpPr>
+          <p:cNvPr id="17" name="Shape 15"/>
+          <p:cNvSpPr/>
+          <p:nvPr/>
+        </p:nvSpPr>
+        <p:spPr>
+          <a:xfrm>
+            <a:off x="8385048" y="3419856"/>
+            <a:ext cx="1975104" cy="0"/>
+          </a:xfrm>
+          <a:prstGeom prst="line">
+            <a:avLst/>
+          </a:prstGeom>
+          <a:noFill/>
+          <a:ln w="25400">
+            <a:solidFill>
+              <a:srgbClr val="8ABBD8"/>
+            </a:solidFill>
+            <a:prstDash val="solid"/>
+          </a:ln>
+        </p:spPr>
+      </p:sp>
+      <p:sp>
+        <p:nvSpPr>
+          <p:cNvPr id="18" name="Shape 16"/>
+          <p:cNvSpPr/>
+          <p:nvPr/>
+        </p:nvSpPr>
+        <p:spPr>
+          <a:xfrm>
+            <a:off x="8202168" y="3630168"/>
+            <a:ext cx="1170432" cy="118872"/>
+          </a:xfrm>
+          <a:prstGeom prst="line">
+            <a:avLst/>
+          </a:prstGeom>
+          <a:noFill/>
+          <a:ln w="25400">
+            <a:solidFill>
+              <a:srgbClr val="8ABBD8"/>
+            </a:solidFill>
+            <a:prstDash val="solid"/>
+          </a:ln>
+        </p:spPr>
+      </p:sp>
+      <p:sp>
+        <p:nvSpPr>
+          <p:cNvPr id="19" name="Shape 17"/>
+          <p:cNvSpPr/>
+          <p:nvPr/>
+        </p:nvSpPr>
+        <p:spPr>
+          <a:xfrm>
+            <a:off x="10543032" y="3630168"/>
+            <a:ext cx="-1170432" cy="118872"/>
+          </a:xfrm>
+          <a:prstGeom prst="line">
+            <a:avLst/>
+          </a:prstGeom>
+          <a:noFill/>
+          <a:ln w="25400">
+            <a:solidFill>
+              <a:srgbClr val="8ABBD8"/>
+            </a:solidFill>
+            <a:prstDash val="solid"/>
+          </a:ln>
+        </p:spPr>
+      </p:sp>
+      <p:sp>
+        <p:nvSpPr>
+          <p:cNvPr id="20" name="Text 18"/>
+          <p:cNvSpPr/>
+          <p:nvPr/>
+        </p:nvSpPr>
+        <p:spPr>
+          <a:xfrm>
+            <a:off x="7863840" y="4069080"/>
+            <a:ext cx="3017520" cy="164592"/>
           </a:xfrm>
           <a:prstGeom prst="rect">
             <a:avLst/>
@@ -15302,79 +17148,38 @@
           <a:bodyPr wrap="square" lIns="0" tIns="0" rIns="0" bIns="0" rtlCol="0" anchor="ctr"/>
           <a:lstStyle/>
           <a:p>
-            <a:pPr indent="0" marL="0">
-              <a:buNone/>
-            </a:pPr>
-            <a:r>
-              <a:rPr lang="en-US" sz="1300" b="1" dirty="0">
-                <a:solidFill>
-                  <a:srgbClr val="0068B7"/>
-                </a:solidFill>
-                <a:latin typeface="Aptos" pitchFamily="34" charset="0"/>
-                <a:ea typeface="Aptos" pitchFamily="34" charset="-122"/>
-                <a:cs typeface="Aptos" pitchFamily="34" charset="-120"/>
-              </a:rPr>
-              <a:t>Key idea</a:t>
-            </a:r>
-            <a:endParaRPr lang="en-US" sz="1300" dirty="0"/>
-          </a:p>
-        </p:txBody>
-      </p:sp>
-      <p:sp>
-        <p:nvSpPr>
-          <p:cNvPr id="14" name="Text 12"/>
-          <p:cNvSpPr/>
-          <p:nvPr/>
-        </p:nvSpPr>
-        <p:spPr>
-          <a:xfrm>
-            <a:off x="8074152" y="1920240"/>
-            <a:ext cx="2825496" cy="1188720"/>
-          </a:xfrm>
-          <a:prstGeom prst="rect">
-            <a:avLst/>
-          </a:prstGeom>
-          <a:noFill/>
-          <a:ln/>
-        </p:spPr>
-        <p:txBody>
-          <a:bodyPr wrap="square" lIns="0" tIns="0" rIns="0" bIns="0" rtlCol="0" anchor="t">
-            <a:normAutofit/>
-          </a:bodyPr>
-          <a:lstStyle/>
-          <a:p>
-            <a:pPr indent="0" marL="0">
-              <a:buNone/>
-            </a:pPr>
-            <a:r>
-              <a:rPr lang="en-US" sz="1550" dirty="0">
-                <a:solidFill>
-                  <a:srgbClr val="17364A"/>
-                </a:solidFill>
-                <a:latin typeface="Aptos" pitchFamily="34" charset="0"/>
-                <a:ea typeface="Aptos" pitchFamily="34" charset="-122"/>
-                <a:cs typeface="Aptos" pitchFamily="34" charset="-120"/>
-              </a:rPr>
-              <a:t>This module provides national-level training guidance for public health agencies and partners.</a:t>
-            </a:r>
-            <a:endParaRPr lang="en-US" sz="1550" dirty="0"/>
-          </a:p>
-        </p:txBody>
-      </p:sp>
-      <p:sp>
-        <p:nvSpPr>
-          <p:cNvPr id="15" name="Shape 13"/>
-          <p:cNvSpPr/>
-          <p:nvPr/>
-        </p:nvSpPr>
-        <p:spPr>
-          <a:xfrm>
-            <a:off x="7909560" y="3520440"/>
-            <a:ext cx="3154680" cy="1737360"/>
+            <a:pPr algn="ctr" indent="0" marL="0">
+              <a:buNone/>
+            </a:pPr>
+            <a:r>
+              <a:rPr lang="en-US" sz="900" b="1" dirty="0">
+                <a:solidFill>
+                  <a:srgbClr val="003A63"/>
+                </a:solidFill>
+                <a:latin typeface="Aptos" pitchFamily="34" charset="0"/>
+                <a:ea typeface="Aptos" pitchFamily="34" charset="-122"/>
+                <a:cs typeface="Aptos" pitchFamily="34" charset="-120"/>
+              </a:rPr>
+              <a:t>Decision rights</a:t>
+            </a:r>
+            <a:endParaRPr lang="en-US" sz="900" dirty="0"/>
+          </a:p>
+        </p:txBody>
+      </p:sp>
+      <p:sp>
+        <p:nvSpPr>
+          <p:cNvPr id="21" name="Shape 19"/>
+          <p:cNvSpPr/>
+          <p:nvPr/>
+        </p:nvSpPr>
+        <p:spPr>
+          <a:xfrm>
+            <a:off x="7635240" y="4498848"/>
+            <a:ext cx="3474720" cy="1143000"/>
           </a:xfrm>
           <a:prstGeom prst="roundRect">
             <a:avLst>
-              <a:gd name="adj" fmla="val 6316"/>
+              <a:gd name="adj" fmla="val 9600"/>
             </a:avLst>
           </a:prstGeom>
           <a:solidFill>
@@ -15390,14 +17195,14 @@
       </p:sp>
       <p:sp>
         <p:nvSpPr>
-          <p:cNvPr id="16" name="Text 14"/>
-          <p:cNvSpPr/>
-          <p:nvPr/>
-        </p:nvSpPr>
-        <p:spPr>
-          <a:xfrm>
-            <a:off x="8074152" y="3666744"/>
-            <a:ext cx="2825496" cy="256032"/>
+          <p:cNvPr id="22" name="Text 20"/>
+          <p:cNvSpPr/>
+          <p:nvPr/>
+        </p:nvSpPr>
+        <p:spPr>
+          <a:xfrm>
+            <a:off x="7799832" y="4645152"/>
+            <a:ext cx="3145536" cy="256032"/>
           </a:xfrm>
           <a:prstGeom prst="rect">
             <a:avLst/>
@@ -15421,7 +17226,7 @@
                 <a:ea typeface="Aptos" pitchFamily="34" charset="-122"/>
                 <a:cs typeface="Aptos" pitchFamily="34" charset="-120"/>
               </a:rPr>
-              <a:t>Use this for</a:t>
+              <a:t>What to document</a:t>
             </a:r>
             <a:endParaRPr lang="en-US" sz="1300" dirty="0"/>
           </a:p>
@@ -15429,14 +17234,14 @@
       </p:sp>
       <p:sp>
         <p:nvSpPr>
-          <p:cNvPr id="17" name="Text 15"/>
-          <p:cNvSpPr/>
-          <p:nvPr/>
-        </p:nvSpPr>
-        <p:spPr>
-          <a:xfrm>
-            <a:off x="8074152" y="4023360"/>
-            <a:ext cx="2825496" cy="1097280"/>
+          <p:cNvPr id="23" name="Text 21"/>
+          <p:cNvSpPr/>
+          <p:nvPr/>
+        </p:nvSpPr>
+        <p:spPr>
+          <a:xfrm>
+            <a:off x="7799832" y="5001768"/>
+            <a:ext cx="3145536" cy="502920"/>
           </a:xfrm>
           <a:prstGeom prst="rect">
             <a:avLst/>
@@ -15462,7 +17267,7 @@
                 <a:ea typeface="Aptos" pitchFamily="34" charset="-122"/>
                 <a:cs typeface="Aptos" pitchFamily="34" charset="-120"/>
               </a:rPr>
-              <a:t>Connect the concept to public health decisions, safeguards, documentation, or implementation work.</a:t>
+              <a:t>Translate this concept into clear decision rights, review steps, documentation expectations, and escalation paths before an AI-supported workflow is approved.</a:t>
             </a:r>
             <a:endParaRPr lang="en-US" sz="1550" dirty="0"/>
           </a:p>
@@ -15636,8 +17441,8 @@
         </p:nvSpPr>
         <p:spPr>
           <a:xfrm>
-            <a:off x="9966960" y="6537960"/>
-            <a:ext cx="1645920" cy="201168"/>
+            <a:off x="9646920" y="6537960"/>
+            <a:ext cx="1965960" cy="201168"/>
           </a:xfrm>
           <a:prstGeom prst="rect">
             <a:avLst/>
@@ -15661,7 +17466,7 @@
                 <a:ea typeface="Aptos" pitchFamily="34" charset="-122"/>
                 <a:cs typeface="Aptos" pitchFamily="34" charset="-120"/>
               </a:rPr>
-              <a:t>Â© Paula Soper</a:t>
+              <a:t>Copyright Paula Soper</a:t>
             </a:r>
             <a:endParaRPr lang="en-US" sz="800" dirty="0"/>
           </a:p>
@@ -15708,77 +17513,13 @@
       </p:sp>
       <p:sp>
         <p:nvSpPr>
-          <p:cNvPr id="8" name="Shape 6"/>
+          <p:cNvPr id="8" name="Text 6"/>
           <p:cNvSpPr/>
           <p:nvPr/>
         </p:nvSpPr>
         <p:spPr>
           <a:xfrm>
             <a:off x="640080" y="658368"/>
-            <a:ext cx="420624" cy="420624"/>
-          </a:xfrm>
-          <a:prstGeom prst="ellipse">
-            <a:avLst/>
-          </a:prstGeom>
-          <a:solidFill>
-            <a:srgbClr val="0068B7"/>
-          </a:solidFill>
-          <a:ln w="12700">
-            <a:solidFill>
-              <a:srgbClr val="0068B7"/>
-            </a:solidFill>
-            <a:prstDash val="solid"/>
-          </a:ln>
-        </p:spPr>
-      </p:sp>
-      <p:sp>
-        <p:nvSpPr>
-          <p:cNvPr id="9" name="Text 7"/>
-          <p:cNvSpPr/>
-          <p:nvPr/>
-        </p:nvSpPr>
-        <p:spPr>
-          <a:xfrm>
-            <a:off x="640080" y="731520"/>
-            <a:ext cx="420624" cy="164592"/>
-          </a:xfrm>
-          <a:prstGeom prst="rect">
-            <a:avLst/>
-          </a:prstGeom>
-          <a:noFill/>
-          <a:ln/>
-        </p:spPr>
-        <p:txBody>
-          <a:bodyPr wrap="square" lIns="0" tIns="0" rIns="0" bIns="0" rtlCol="0" anchor="ctr"/>
-          <a:lstStyle/>
-          <a:p>
-            <a:pPr algn="ctr" indent="0" marL="0">
-              <a:buNone/>
-            </a:pPr>
-            <a:r>
-              <a:rPr lang="en-US" sz="1100" b="1" dirty="0">
-                <a:solidFill>
-                  <a:srgbClr val="FFFFFF"/>
-                </a:solidFill>
-                <a:latin typeface="Aptos" pitchFamily="34" charset="0"/>
-                <a:ea typeface="Aptos" pitchFamily="34" charset="-122"/>
-                <a:cs typeface="Aptos" pitchFamily="34" charset="-120"/>
-              </a:rPr>
-              <a:t>4</a:t>
-            </a:r>
-            <a:endParaRPr lang="en-US" sz="1100" dirty="0"/>
-          </a:p>
-        </p:txBody>
-      </p:sp>
-      <p:sp>
-        <p:nvSpPr>
-          <p:cNvPr id="10" name="Text 8"/>
-          <p:cNvSpPr/>
-          <p:nvPr/>
-        </p:nvSpPr>
-        <p:spPr>
-          <a:xfrm>
-            <a:off x="640080" y="621792"/>
             <a:ext cx="10881360" cy="713232"/>
           </a:xfrm>
           <a:prstGeom prst="rect">
@@ -15813,14 +17554,14 @@
       </p:sp>
       <p:sp>
         <p:nvSpPr>
-          <p:cNvPr id="11" name="Text 9"/>
+          <p:cNvPr id="9" name="Text 7"/>
           <p:cNvSpPr/>
           <p:nvPr/>
         </p:nvSpPr>
         <p:spPr>
           <a:xfrm>
             <a:off x="868680" y="1508760"/>
-            <a:ext cx="6537960" cy="4160520"/>
+            <a:ext cx="6309360" cy="4160520"/>
           </a:xfrm>
           <a:prstGeom prst="rect">
             <a:avLst/>
@@ -15879,18 +17620,18 @@
       </p:sp>
       <p:sp>
         <p:nvSpPr>
-          <p:cNvPr id="12" name="Shape 10"/>
-          <p:cNvSpPr/>
-          <p:nvPr/>
-        </p:nvSpPr>
-        <p:spPr>
-          <a:xfrm>
-            <a:off x="7909560" y="1417320"/>
-            <a:ext cx="3154680" cy="1828800"/>
+          <p:cNvPr id="10" name="Shape 8"/>
+          <p:cNvSpPr/>
+          <p:nvPr/>
+        </p:nvSpPr>
+        <p:spPr>
+          <a:xfrm>
+            <a:off x="7635240" y="1325880"/>
+            <a:ext cx="3474720" cy="1325880"/>
           </a:xfrm>
           <a:prstGeom prst="roundRect">
             <a:avLst>
-              <a:gd name="adj" fmla="val 6000"/>
+              <a:gd name="adj" fmla="val 8276"/>
             </a:avLst>
           </a:prstGeom>
           <a:solidFill>
@@ -15906,14 +17647,14 @@
       </p:sp>
       <p:sp>
         <p:nvSpPr>
-          <p:cNvPr id="13" name="Text 11"/>
-          <p:cNvSpPr/>
-          <p:nvPr/>
-        </p:nvSpPr>
-        <p:spPr>
-          <a:xfrm>
-            <a:off x="8074152" y="1563624"/>
-            <a:ext cx="2825496" cy="256032"/>
+          <p:cNvPr id="11" name="Text 9"/>
+          <p:cNvSpPr/>
+          <p:nvPr/>
+        </p:nvSpPr>
+        <p:spPr>
+          <a:xfrm>
+            <a:off x="7799832" y="1472184"/>
+            <a:ext cx="3145536" cy="256032"/>
           </a:xfrm>
           <a:prstGeom prst="rect">
             <a:avLst/>
@@ -15937,7 +17678,7 @@
                 <a:ea typeface="Aptos" pitchFamily="34" charset="-122"/>
                 <a:cs typeface="Aptos" pitchFamily="34" charset="-120"/>
               </a:rPr>
-              <a:t>Key idea</a:t>
+              <a:t>Risk check</a:t>
             </a:r>
             <a:endParaRPr lang="en-US" sz="1300" dirty="0"/>
           </a:p>
@@ -15945,14 +17686,14 @@
       </p:sp>
       <p:sp>
         <p:nvSpPr>
-          <p:cNvPr id="14" name="Text 12"/>
-          <p:cNvSpPr/>
-          <p:nvPr/>
-        </p:nvSpPr>
-        <p:spPr>
-          <a:xfrm>
-            <a:off x="8074152" y="1920240"/>
-            <a:ext cx="2825496" cy="1188720"/>
+          <p:cNvPr id="12" name="Text 10"/>
+          <p:cNvSpPr/>
+          <p:nvPr/>
+        </p:nvSpPr>
+        <p:spPr>
+          <a:xfrm>
+            <a:off x="7799832" y="1828800"/>
+            <a:ext cx="3145536" cy="685800"/>
           </a:xfrm>
           <a:prstGeom prst="rect">
             <a:avLst/>
@@ -15986,18 +17727,171 @@
       </p:sp>
       <p:sp>
         <p:nvSpPr>
-          <p:cNvPr id="15" name="Shape 13"/>
-          <p:cNvSpPr/>
-          <p:nvPr/>
-        </p:nvSpPr>
-        <p:spPr>
-          <a:xfrm>
-            <a:off x="7909560" y="3520440"/>
-            <a:ext cx="3154680" cy="1737360"/>
+          <p:cNvPr id="13" name="Shape 11"/>
+          <p:cNvSpPr/>
+          <p:nvPr/>
+        </p:nvSpPr>
+        <p:spPr>
+          <a:xfrm>
+            <a:off x="7635240" y="2788920"/>
+            <a:ext cx="3474720" cy="1536192"/>
           </a:xfrm>
           <a:prstGeom prst="roundRect">
             <a:avLst>
-              <a:gd name="adj" fmla="val 6316"/>
+              <a:gd name="adj" fmla="val 7143"/>
+            </a:avLst>
+          </a:prstGeom>
+          <a:solidFill>
+            <a:srgbClr val="FFFFFF">
+              <a:alpha val="88000"/>
+            </a:srgbClr>
+          </a:solidFill>
+          <a:ln w="12700">
+            <a:solidFill>
+              <a:srgbClr val="D6E8F2"/>
+            </a:solidFill>
+            <a:prstDash val="solid"/>
+          </a:ln>
+        </p:spPr>
+      </p:sp>
+      <p:sp>
+        <p:nvSpPr>
+          <p:cNvPr id="14" name="Shape 12"/>
+          <p:cNvSpPr/>
+          <p:nvPr/>
+        </p:nvSpPr>
+        <p:spPr>
+          <a:xfrm>
+            <a:off x="8046720" y="3108960"/>
+            <a:ext cx="2651760" cy="896112"/>
+          </a:xfrm>
+          <a:prstGeom prst="arc">
+            <a:avLst/>
+          </a:prstGeom>
+          <a:noFill/>
+          <a:ln w="25400">
+            <a:solidFill>
+              <a:srgbClr val="0068B7"/>
+            </a:solidFill>
+            <a:prstDash val="solid"/>
+          </a:ln>
+        </p:spPr>
+      </p:sp>
+      <p:sp>
+        <p:nvSpPr>
+          <p:cNvPr id="15" name="Text 13"/>
+          <p:cNvSpPr/>
+          <p:nvPr/>
+        </p:nvSpPr>
+        <p:spPr>
+          <a:xfrm>
+            <a:off x="7909560" y="3099816"/>
+            <a:ext cx="2926080" cy="256032"/>
+          </a:xfrm>
+          <a:prstGeom prst="rect">
+            <a:avLst/>
+          </a:prstGeom>
+          <a:noFill/>
+          <a:ln/>
+        </p:spPr>
+        <p:txBody>
+          <a:bodyPr wrap="square" lIns="0" tIns="0" rIns="0" bIns="0" rtlCol="0" anchor="ctr"/>
+          <a:lstStyle/>
+          <a:p>
+            <a:pPr algn="ctr" indent="0" marL="0">
+              <a:buNone/>
+            </a:pPr>
+            <a:r>
+              <a:rPr lang="en-US" sz="1500" b="1" dirty="0">
+                <a:solidFill>
+                  <a:srgbClr val="003A63"/>
+                </a:solidFill>
+                <a:latin typeface="Aptos" pitchFamily="34" charset="0"/>
+                <a:ea typeface="Aptos" pitchFamily="34" charset="-122"/>
+                <a:cs typeface="Aptos" pitchFamily="34" charset="-120"/>
+              </a:rPr>
+              <a:t>Risk</a:t>
+            </a:r>
+            <a:endParaRPr lang="en-US" sz="1500" dirty="0"/>
+          </a:p>
+        </p:txBody>
+      </p:sp>
+      <p:sp>
+        <p:nvSpPr>
+          <p:cNvPr id="16" name="Shape 14"/>
+          <p:cNvSpPr/>
+          <p:nvPr/>
+        </p:nvSpPr>
+        <p:spPr>
+          <a:xfrm>
+            <a:off x="8366760" y="3639312"/>
+            <a:ext cx="2011680" cy="0"/>
+          </a:xfrm>
+          <a:prstGeom prst="line">
+            <a:avLst/>
+          </a:prstGeom>
+          <a:noFill/>
+          <a:ln w="63500">
+            <a:solidFill>
+              <a:srgbClr val="2F8A28"/>
+            </a:solidFill>
+            <a:prstDash val="solid"/>
+          </a:ln>
+        </p:spPr>
+      </p:sp>
+      <p:sp>
+        <p:nvSpPr>
+          <p:cNvPr id="17" name="Text 15"/>
+          <p:cNvSpPr/>
+          <p:nvPr/>
+        </p:nvSpPr>
+        <p:spPr>
+          <a:xfrm>
+            <a:off x="7909560" y="3849624"/>
+            <a:ext cx="2926080" cy="164592"/>
+          </a:xfrm>
+          <a:prstGeom prst="rect">
+            <a:avLst/>
+          </a:prstGeom>
+          <a:noFill/>
+          <a:ln/>
+        </p:spPr>
+        <p:txBody>
+          <a:bodyPr wrap="square" lIns="0" tIns="0" rIns="0" bIns="0" rtlCol="0" anchor="ctr"/>
+          <a:lstStyle/>
+          <a:p>
+            <a:pPr algn="ctr" indent="0" marL="0">
+              <a:buNone/>
+            </a:pPr>
+            <a:r>
+              <a:rPr lang="en-US" sz="900" dirty="0">
+                <a:solidFill>
+                  <a:srgbClr val="003A63"/>
+                </a:solidFill>
+                <a:latin typeface="Aptos" pitchFamily="34" charset="0"/>
+                <a:ea typeface="Aptos" pitchFamily="34" charset="-122"/>
+                <a:cs typeface="Aptos" pitchFamily="34" charset="-120"/>
+              </a:rPr>
+              <a:t>Human review</a:t>
+            </a:r>
+            <a:endParaRPr lang="en-US" sz="900" dirty="0"/>
+          </a:p>
+        </p:txBody>
+      </p:sp>
+      <p:sp>
+        <p:nvSpPr>
+          <p:cNvPr id="18" name="Shape 16"/>
+          <p:cNvSpPr/>
+          <p:nvPr/>
+        </p:nvSpPr>
+        <p:spPr>
+          <a:xfrm>
+            <a:off x="7635240" y="4498848"/>
+            <a:ext cx="3474720" cy="1143000"/>
+          </a:xfrm>
+          <a:prstGeom prst="roundRect">
+            <a:avLst>
+              <a:gd name="adj" fmla="val 9600"/>
             </a:avLst>
           </a:prstGeom>
           <a:solidFill>
@@ -16013,14 +17907,14 @@
       </p:sp>
       <p:sp>
         <p:nvSpPr>
-          <p:cNvPr id="16" name="Text 14"/>
-          <p:cNvSpPr/>
-          <p:nvPr/>
-        </p:nvSpPr>
-        <p:spPr>
-          <a:xfrm>
-            <a:off x="8074152" y="3666744"/>
-            <a:ext cx="2825496" cy="256032"/>
+          <p:cNvPr id="19" name="Text 17"/>
+          <p:cNvSpPr/>
+          <p:nvPr/>
+        </p:nvSpPr>
+        <p:spPr>
+          <a:xfrm>
+            <a:off x="7799832" y="4645152"/>
+            <a:ext cx="3145536" cy="256032"/>
           </a:xfrm>
           <a:prstGeom prst="rect">
             <a:avLst/>
@@ -16044,7 +17938,7 @@
                 <a:ea typeface="Aptos" pitchFamily="34" charset="-122"/>
                 <a:cs typeface="Aptos" pitchFamily="34" charset="-120"/>
               </a:rPr>
-              <a:t>Use this for</a:t>
+              <a:t>Safeguard to plan</a:t>
             </a:r>
             <a:endParaRPr lang="en-US" sz="1300" dirty="0"/>
           </a:p>
@@ -16052,14 +17946,14 @@
       </p:sp>
       <p:sp>
         <p:nvSpPr>
-          <p:cNvPr id="17" name="Text 15"/>
-          <p:cNvSpPr/>
-          <p:nvPr/>
-        </p:nvSpPr>
-        <p:spPr>
-          <a:xfrm>
-            <a:off x="8074152" y="4023360"/>
-            <a:ext cx="2825496" cy="1097280"/>
+          <p:cNvPr id="20" name="Text 18"/>
+          <p:cNvSpPr/>
+          <p:nvPr/>
+        </p:nvSpPr>
+        <p:spPr>
+          <a:xfrm>
+            <a:off x="7799832" y="5001768"/>
+            <a:ext cx="3145536" cy="502920"/>
           </a:xfrm>
           <a:prstGeom prst="rect">
             <a:avLst/>
@@ -16085,7 +17979,7 @@
                 <a:ea typeface="Aptos" pitchFamily="34" charset="-122"/>
                 <a:cs typeface="Aptos" pitchFamily="34" charset="-120"/>
               </a:rPr>
-              <a:t>Connect the concept to public health decisions, safeguards, documentation, or implementation work.</a:t>
+              <a:t>Identify what could go wrong, who could be affected, what safeguards are needed, and what evidence should be reviewed before use expands.</a:t>
             </a:r>
             <a:endParaRPr lang="en-US" sz="1550" dirty="0"/>
           </a:p>
@@ -16259,8 +18153,8 @@
         </p:nvSpPr>
         <p:spPr>
           <a:xfrm>
-            <a:off x="9966960" y="6537960"/>
-            <a:ext cx="1645920" cy="201168"/>
+            <a:off x="9646920" y="6537960"/>
+            <a:ext cx="1965960" cy="201168"/>
           </a:xfrm>
           <a:prstGeom prst="rect">
             <a:avLst/>
@@ -16284,7 +18178,7 @@
                 <a:ea typeface="Aptos" pitchFamily="34" charset="-122"/>
                 <a:cs typeface="Aptos" pitchFamily="34" charset="-120"/>
               </a:rPr>
-              <a:t>Â© Paula Soper</a:t>
+              <a:t>Copyright Paula Soper</a:t>
             </a:r>
             <a:endParaRPr lang="en-US" sz="800" dirty="0"/>
           </a:p>
@@ -16331,77 +18225,13 @@
       </p:sp>
       <p:sp>
         <p:nvSpPr>
-          <p:cNvPr id="8" name="Shape 6"/>
+          <p:cNvPr id="8" name="Text 6"/>
           <p:cNvSpPr/>
           <p:nvPr/>
         </p:nvSpPr>
         <p:spPr>
           <a:xfrm>
             <a:off x="640080" y="658368"/>
-            <a:ext cx="420624" cy="420624"/>
-          </a:xfrm>
-          <a:prstGeom prst="ellipse">
-            <a:avLst/>
-          </a:prstGeom>
-          <a:solidFill>
-            <a:srgbClr val="0068B7"/>
-          </a:solidFill>
-          <a:ln w="12700">
-            <a:solidFill>
-              <a:srgbClr val="0068B7"/>
-            </a:solidFill>
-            <a:prstDash val="solid"/>
-          </a:ln>
-        </p:spPr>
-      </p:sp>
-      <p:sp>
-        <p:nvSpPr>
-          <p:cNvPr id="9" name="Text 7"/>
-          <p:cNvSpPr/>
-          <p:nvPr/>
-        </p:nvSpPr>
-        <p:spPr>
-          <a:xfrm>
-            <a:off x="640080" y="731520"/>
-            <a:ext cx="420624" cy="164592"/>
-          </a:xfrm>
-          <a:prstGeom prst="rect">
-            <a:avLst/>
-          </a:prstGeom>
-          <a:noFill/>
-          <a:ln/>
-        </p:spPr>
-        <p:txBody>
-          <a:bodyPr wrap="square" lIns="0" tIns="0" rIns="0" bIns="0" rtlCol="0" anchor="ctr"/>
-          <a:lstStyle/>
-          <a:p>
-            <a:pPr algn="ctr" indent="0" marL="0">
-              <a:buNone/>
-            </a:pPr>
-            <a:r>
-              <a:rPr lang="en-US" sz="1100" b="1" dirty="0">
-                <a:solidFill>
-                  <a:srgbClr val="FFFFFF"/>
-                </a:solidFill>
-                <a:latin typeface="Aptos" pitchFamily="34" charset="0"/>
-                <a:ea typeface="Aptos" pitchFamily="34" charset="-122"/>
-                <a:cs typeface="Aptos" pitchFamily="34" charset="-120"/>
-              </a:rPr>
-              <a:t>5</a:t>
-            </a:r>
-            <a:endParaRPr lang="en-US" sz="1100" dirty="0"/>
-          </a:p>
-        </p:txBody>
-      </p:sp>
-      <p:sp>
-        <p:nvSpPr>
-          <p:cNvPr id="10" name="Text 8"/>
-          <p:cNvSpPr/>
-          <p:nvPr/>
-        </p:nvSpPr>
-        <p:spPr>
-          <a:xfrm>
-            <a:off x="640080" y="621792"/>
             <a:ext cx="10881360" cy="713232"/>
           </a:xfrm>
           <a:prstGeom prst="rect">
@@ -16436,14 +18266,14 @@
       </p:sp>
       <p:sp>
         <p:nvSpPr>
-          <p:cNvPr id="11" name="Text 9"/>
+          <p:cNvPr id="9" name="Text 7"/>
           <p:cNvSpPr/>
           <p:nvPr/>
         </p:nvSpPr>
         <p:spPr>
           <a:xfrm>
             <a:off x="868680" y="1508760"/>
-            <a:ext cx="6537960" cy="4160520"/>
+            <a:ext cx="6309360" cy="4160520"/>
           </a:xfrm>
           <a:prstGeom prst="rect">
             <a:avLst/>
@@ -16502,18 +18332,18 @@
       </p:sp>
       <p:sp>
         <p:nvSpPr>
-          <p:cNvPr id="12" name="Shape 10"/>
-          <p:cNvSpPr/>
-          <p:nvPr/>
-        </p:nvSpPr>
-        <p:spPr>
-          <a:xfrm>
-            <a:off x="7909560" y="1417320"/>
-            <a:ext cx="3154680" cy="1828800"/>
+          <p:cNvPr id="10" name="Shape 8"/>
+          <p:cNvSpPr/>
+          <p:nvPr/>
+        </p:nvSpPr>
+        <p:spPr>
+          <a:xfrm>
+            <a:off x="7635240" y="1325880"/>
+            <a:ext cx="3474720" cy="1325880"/>
           </a:xfrm>
           <a:prstGeom prst="roundRect">
             <a:avLst>
-              <a:gd name="adj" fmla="val 6000"/>
+              <a:gd name="adj" fmla="val 8276"/>
             </a:avLst>
           </a:prstGeom>
           <a:solidFill>
@@ -16529,14 +18359,14 @@
       </p:sp>
       <p:sp>
         <p:nvSpPr>
-          <p:cNvPr id="13" name="Text 11"/>
-          <p:cNvSpPr/>
-          <p:nvPr/>
-        </p:nvSpPr>
-        <p:spPr>
-          <a:xfrm>
-            <a:off x="8074152" y="1563624"/>
-            <a:ext cx="2825496" cy="256032"/>
+          <p:cNvPr id="11" name="Text 9"/>
+          <p:cNvSpPr/>
+          <p:nvPr/>
+        </p:nvSpPr>
+        <p:spPr>
+          <a:xfrm>
+            <a:off x="7799832" y="1472184"/>
+            <a:ext cx="3145536" cy="256032"/>
           </a:xfrm>
           <a:prstGeom prst="rect">
             <a:avLst/>
@@ -16560,7 +18390,7 @@
                 <a:ea typeface="Aptos" pitchFamily="34" charset="-122"/>
                 <a:cs typeface="Aptos" pitchFamily="34" charset="-120"/>
               </a:rPr>
-              <a:t>Key idea</a:t>
+              <a:t>Risk check</a:t>
             </a:r>
             <a:endParaRPr lang="en-US" sz="1300" dirty="0"/>
           </a:p>
@@ -16568,14 +18398,14 @@
       </p:sp>
       <p:sp>
         <p:nvSpPr>
-          <p:cNvPr id="14" name="Text 12"/>
-          <p:cNvSpPr/>
-          <p:nvPr/>
-        </p:nvSpPr>
-        <p:spPr>
-          <a:xfrm>
-            <a:off x="8074152" y="1920240"/>
-            <a:ext cx="2825496" cy="1188720"/>
+          <p:cNvPr id="12" name="Text 10"/>
+          <p:cNvSpPr/>
+          <p:nvPr/>
+        </p:nvSpPr>
+        <p:spPr>
+          <a:xfrm>
+            <a:off x="7799832" y="1828800"/>
+            <a:ext cx="3145536" cy="685800"/>
           </a:xfrm>
           <a:prstGeom prst="rect">
             <a:avLst/>
@@ -16609,18 +18439,171 @@
       </p:sp>
       <p:sp>
         <p:nvSpPr>
-          <p:cNvPr id="15" name="Shape 13"/>
-          <p:cNvSpPr/>
-          <p:nvPr/>
-        </p:nvSpPr>
-        <p:spPr>
-          <a:xfrm>
-            <a:off x="7909560" y="3520440"/>
-            <a:ext cx="3154680" cy="1737360"/>
+          <p:cNvPr id="13" name="Shape 11"/>
+          <p:cNvSpPr/>
+          <p:nvPr/>
+        </p:nvSpPr>
+        <p:spPr>
+          <a:xfrm>
+            <a:off x="7635240" y="2788920"/>
+            <a:ext cx="3474720" cy="1536192"/>
           </a:xfrm>
           <a:prstGeom prst="roundRect">
             <a:avLst>
-              <a:gd name="adj" fmla="val 6316"/>
+              <a:gd name="adj" fmla="val 7143"/>
+            </a:avLst>
+          </a:prstGeom>
+          <a:solidFill>
+            <a:srgbClr val="FFFFFF">
+              <a:alpha val="88000"/>
+            </a:srgbClr>
+          </a:solidFill>
+          <a:ln w="12700">
+            <a:solidFill>
+              <a:srgbClr val="D6E8F2"/>
+            </a:solidFill>
+            <a:prstDash val="solid"/>
+          </a:ln>
+        </p:spPr>
+      </p:sp>
+      <p:sp>
+        <p:nvSpPr>
+          <p:cNvPr id="14" name="Shape 12"/>
+          <p:cNvSpPr/>
+          <p:nvPr/>
+        </p:nvSpPr>
+        <p:spPr>
+          <a:xfrm>
+            <a:off x="8046720" y="3108960"/>
+            <a:ext cx="2651760" cy="896112"/>
+          </a:xfrm>
+          <a:prstGeom prst="arc">
+            <a:avLst/>
+          </a:prstGeom>
+          <a:noFill/>
+          <a:ln w="25400">
+            <a:solidFill>
+              <a:srgbClr val="0068B7"/>
+            </a:solidFill>
+            <a:prstDash val="solid"/>
+          </a:ln>
+        </p:spPr>
+      </p:sp>
+      <p:sp>
+        <p:nvSpPr>
+          <p:cNvPr id="15" name="Text 13"/>
+          <p:cNvSpPr/>
+          <p:nvPr/>
+        </p:nvSpPr>
+        <p:spPr>
+          <a:xfrm>
+            <a:off x="7909560" y="3099816"/>
+            <a:ext cx="2926080" cy="256032"/>
+          </a:xfrm>
+          <a:prstGeom prst="rect">
+            <a:avLst/>
+          </a:prstGeom>
+          <a:noFill/>
+          <a:ln/>
+        </p:spPr>
+        <p:txBody>
+          <a:bodyPr wrap="square" lIns="0" tIns="0" rIns="0" bIns="0" rtlCol="0" anchor="ctr"/>
+          <a:lstStyle/>
+          <a:p>
+            <a:pPr algn="ctr" indent="0" marL="0">
+              <a:buNone/>
+            </a:pPr>
+            <a:r>
+              <a:rPr lang="en-US" sz="1500" b="1" dirty="0">
+                <a:solidFill>
+                  <a:srgbClr val="003A63"/>
+                </a:solidFill>
+                <a:latin typeface="Aptos" pitchFamily="34" charset="0"/>
+                <a:ea typeface="Aptos" pitchFamily="34" charset="-122"/>
+                <a:cs typeface="Aptos" pitchFamily="34" charset="-120"/>
+              </a:rPr>
+              <a:t>Risk</a:t>
+            </a:r>
+            <a:endParaRPr lang="en-US" sz="1500" dirty="0"/>
+          </a:p>
+        </p:txBody>
+      </p:sp>
+      <p:sp>
+        <p:nvSpPr>
+          <p:cNvPr id="16" name="Shape 14"/>
+          <p:cNvSpPr/>
+          <p:nvPr/>
+        </p:nvSpPr>
+        <p:spPr>
+          <a:xfrm>
+            <a:off x="8366760" y="3639312"/>
+            <a:ext cx="2011680" cy="0"/>
+          </a:xfrm>
+          <a:prstGeom prst="line">
+            <a:avLst/>
+          </a:prstGeom>
+          <a:noFill/>
+          <a:ln w="63500">
+            <a:solidFill>
+              <a:srgbClr val="2F8A28"/>
+            </a:solidFill>
+            <a:prstDash val="solid"/>
+          </a:ln>
+        </p:spPr>
+      </p:sp>
+      <p:sp>
+        <p:nvSpPr>
+          <p:cNvPr id="17" name="Text 15"/>
+          <p:cNvSpPr/>
+          <p:nvPr/>
+        </p:nvSpPr>
+        <p:spPr>
+          <a:xfrm>
+            <a:off x="7909560" y="3849624"/>
+            <a:ext cx="2926080" cy="164592"/>
+          </a:xfrm>
+          <a:prstGeom prst="rect">
+            <a:avLst/>
+          </a:prstGeom>
+          <a:noFill/>
+          <a:ln/>
+        </p:spPr>
+        <p:txBody>
+          <a:bodyPr wrap="square" lIns="0" tIns="0" rIns="0" bIns="0" rtlCol="0" anchor="ctr"/>
+          <a:lstStyle/>
+          <a:p>
+            <a:pPr algn="ctr" indent="0" marL="0">
+              <a:buNone/>
+            </a:pPr>
+            <a:r>
+              <a:rPr lang="en-US" sz="900" dirty="0">
+                <a:solidFill>
+                  <a:srgbClr val="003A63"/>
+                </a:solidFill>
+                <a:latin typeface="Aptos" pitchFamily="34" charset="0"/>
+                <a:ea typeface="Aptos" pitchFamily="34" charset="-122"/>
+                <a:cs typeface="Aptos" pitchFamily="34" charset="-120"/>
+              </a:rPr>
+              <a:t>Human review</a:t>
+            </a:r>
+            <a:endParaRPr lang="en-US" sz="900" dirty="0"/>
+          </a:p>
+        </p:txBody>
+      </p:sp>
+      <p:sp>
+        <p:nvSpPr>
+          <p:cNvPr id="18" name="Shape 16"/>
+          <p:cNvSpPr/>
+          <p:nvPr/>
+        </p:nvSpPr>
+        <p:spPr>
+          <a:xfrm>
+            <a:off x="7635240" y="4498848"/>
+            <a:ext cx="3474720" cy="1143000"/>
+          </a:xfrm>
+          <a:prstGeom prst="roundRect">
+            <a:avLst>
+              <a:gd name="adj" fmla="val 9600"/>
             </a:avLst>
           </a:prstGeom>
           <a:solidFill>
@@ -16636,14 +18619,14 @@
       </p:sp>
       <p:sp>
         <p:nvSpPr>
-          <p:cNvPr id="16" name="Text 14"/>
-          <p:cNvSpPr/>
-          <p:nvPr/>
-        </p:nvSpPr>
-        <p:spPr>
-          <a:xfrm>
-            <a:off x="8074152" y="3666744"/>
-            <a:ext cx="2825496" cy="256032"/>
+          <p:cNvPr id="19" name="Text 17"/>
+          <p:cNvSpPr/>
+          <p:nvPr/>
+        </p:nvSpPr>
+        <p:spPr>
+          <a:xfrm>
+            <a:off x="7799832" y="4645152"/>
+            <a:ext cx="3145536" cy="256032"/>
           </a:xfrm>
           <a:prstGeom prst="rect">
             <a:avLst/>
@@ -16667,7 +18650,7 @@
                 <a:ea typeface="Aptos" pitchFamily="34" charset="-122"/>
                 <a:cs typeface="Aptos" pitchFamily="34" charset="-120"/>
               </a:rPr>
-              <a:t>Use this for</a:t>
+              <a:t>Safeguard to plan</a:t>
             </a:r>
             <a:endParaRPr lang="en-US" sz="1300" dirty="0"/>
           </a:p>
@@ -16675,14 +18658,14 @@
       </p:sp>
       <p:sp>
         <p:nvSpPr>
-          <p:cNvPr id="17" name="Text 15"/>
-          <p:cNvSpPr/>
-          <p:nvPr/>
-        </p:nvSpPr>
-        <p:spPr>
-          <a:xfrm>
-            <a:off x="8074152" y="4023360"/>
-            <a:ext cx="2825496" cy="1097280"/>
+          <p:cNvPr id="20" name="Text 18"/>
+          <p:cNvSpPr/>
+          <p:nvPr/>
+        </p:nvSpPr>
+        <p:spPr>
+          <a:xfrm>
+            <a:off x="7799832" y="5001768"/>
+            <a:ext cx="3145536" cy="502920"/>
           </a:xfrm>
           <a:prstGeom prst="rect">
             <a:avLst/>
@@ -16708,7 +18691,7 @@
                 <a:ea typeface="Aptos" pitchFamily="34" charset="-122"/>
                 <a:cs typeface="Aptos" pitchFamily="34" charset="-120"/>
               </a:rPr>
-              <a:t>Connect the concept to public health decisions, safeguards, documentation, or implementation work.</a:t>
+              <a:t>Identify what could go wrong, who could be affected, what safeguards are needed, and what evidence should be reviewed before use expands.</a:t>
             </a:r>
             <a:endParaRPr lang="en-US" sz="1550" dirty="0"/>
           </a:p>

--- a/downloads/presentations/modules/anl-330.pptx
+++ b/downloads/presentations/modules/anl-330.pptx
@@ -3619,13 +3619,11 @@
             </a:avLst>
           </a:prstGeom>
           <a:solidFill>
-            <a:srgbClr val="FFFFFF">
-              <a:alpha val="88000"/>
-            </a:srgbClr>
+            <a:srgbClr val="FFFFFF"/>
           </a:solidFill>
           <a:ln w="12700">
             <a:solidFill>
-              <a:srgbClr val="D6E8F2"/>
+              <a:srgbClr val="B9D7E6"/>
             </a:solidFill>
             <a:prstDash val="solid"/>
           </a:ln>
@@ -3633,26 +3631,42 @@
       </p:sp>
       <p:sp>
         <p:nvSpPr>
-          <p:cNvPr id="14" name="Shape 12"/>
-          <p:cNvSpPr/>
-          <p:nvPr/>
-        </p:nvSpPr>
-        <p:spPr>
-          <a:xfrm>
-            <a:off x="8046720" y="3108960"/>
-            <a:ext cx="2651760" cy="896112"/>
-          </a:xfrm>
-          <a:prstGeom prst="arc">
-            <a:avLst/>
-          </a:prstGeom>
-          <a:noFill/>
-          <a:ln w="25400">
-            <a:solidFill>
-              <a:srgbClr val="0068B7"/>
-            </a:solidFill>
-            <a:prstDash val="solid"/>
-          </a:ln>
-        </p:spPr>
+          <p:cNvPr id="14" name="Text 12"/>
+          <p:cNvSpPr/>
+          <p:nvPr/>
+        </p:nvSpPr>
+        <p:spPr>
+          <a:xfrm>
+            <a:off x="7799832" y="2935224"/>
+            <a:ext cx="3145536" cy="256032"/>
+          </a:xfrm>
+          <a:prstGeom prst="rect">
+            <a:avLst/>
+          </a:prstGeom>
+          <a:noFill/>
+          <a:ln/>
+        </p:spPr>
+        <p:txBody>
+          <a:bodyPr wrap="square" lIns="0" tIns="0" rIns="0" bIns="0" rtlCol="0" anchor="ctr"/>
+          <a:lstStyle/>
+          <a:p>
+            <a:pPr indent="0" marL="0">
+              <a:buNone/>
+            </a:pPr>
+            <a:r>
+              <a:rPr lang="en-US" sz="1300" b="1" dirty="0">
+                <a:solidFill>
+                  <a:srgbClr val="0068B7"/>
+                </a:solidFill>
+                <a:latin typeface="Aptos" pitchFamily="34" charset="0"/>
+                <a:ea typeface="Aptos" pitchFamily="34" charset="-122"/>
+                <a:cs typeface="Aptos" pitchFamily="34" charset="-120"/>
+              </a:rPr>
+              <a:t>Concept checkpoints</a:t>
+            </a:r>
+            <a:endParaRPr lang="en-US" sz="1300" dirty="0"/>
+          </a:p>
+        </p:txBody>
       </p:sp>
       <p:sp>
         <p:nvSpPr>
@@ -3662,102 +3676,67 @@
         </p:nvSpPr>
         <p:spPr>
           <a:xfrm>
-            <a:off x="7909560" y="3099816"/>
-            <a:ext cx="2926080" cy="256032"/>
-          </a:xfrm>
-          <a:prstGeom prst="rect">
-            <a:avLst/>
-          </a:prstGeom>
-          <a:noFill/>
-          <a:ln/>
-        </p:spPr>
-        <p:txBody>
-          <a:bodyPr wrap="square" lIns="0" tIns="0" rIns="0" bIns="0" rtlCol="0" anchor="ctr"/>
-          <a:lstStyle/>
-          <a:p>
-            <a:pPr algn="ctr" indent="0" marL="0">
-              <a:buNone/>
-            </a:pPr>
-            <a:r>
-              <a:rPr lang="en-US" sz="1500" b="1" dirty="0">
-                <a:solidFill>
-                  <a:srgbClr val="003A63"/>
-                </a:solidFill>
-                <a:latin typeface="Aptos" pitchFamily="34" charset="0"/>
-                <a:ea typeface="Aptos" pitchFamily="34" charset="-122"/>
-                <a:cs typeface="Aptos" pitchFamily="34" charset="-120"/>
-              </a:rPr>
-              <a:t>Risk</a:t>
-            </a:r>
-            <a:endParaRPr lang="en-US" sz="1500" dirty="0"/>
+            <a:off x="7818120" y="3300984"/>
+            <a:ext cx="3090672" cy="877824"/>
+          </a:xfrm>
+          <a:prstGeom prst="rect">
+            <a:avLst/>
+          </a:prstGeom>
+          <a:noFill/>
+          <a:ln/>
+        </p:spPr>
+        <p:txBody>
+          <a:bodyPr wrap="square" lIns="254" tIns="254" rIns="254" bIns="254" rtlCol="0" anchor="t">
+            <a:normAutofit/>
+          </a:bodyPr>
+          <a:lstStyle/>
+          <a:p>
+            <a:r>
+              <a:rPr lang="en-US" sz="1380" dirty="0">
+                <a:solidFill>
+                  <a:srgbClr val="17364A"/>
+                </a:solidFill>
+                <a:latin typeface="Aptos" pitchFamily="34" charset="0"/>
+                <a:ea typeface="Aptos" pitchFamily="34" charset="-122"/>
+                <a:cs typeface="Aptos" pitchFamily="34" charset="-120"/>
+              </a:rPr>
+              <a:t>Equity evaluation should lead to action.</a:t>
+            </a:r>
+            <a:endParaRPr lang="en-US" sz="1380" dirty="0"/>
+          </a:p>
+          <a:p>
+            <a:r>
+              <a:rPr lang="en-US" sz="1380" dirty="0">
+                <a:solidFill>
+                  <a:srgbClr val="17364A"/>
+                </a:solidFill>
+                <a:latin typeface="Aptos" pitchFamily="34" charset="0"/>
+                <a:ea typeface="Aptos" pitchFamily="34" charset="-122"/>
+                <a:cs typeface="Aptos" pitchFamily="34" charset="-120"/>
+              </a:rPr>
+              <a:t>Mitigations may include changing thresholds, improving data collection, adding human.</a:t>
+            </a:r>
+            <a:endParaRPr lang="en-US" sz="1380" dirty="0"/>
+          </a:p>
+          <a:p>
+            <a:r>
+              <a:rPr lang="en-US" sz="1380" dirty="0">
+                <a:solidFill>
+                  <a:srgbClr val="17364A"/>
+                </a:solidFill>
+                <a:latin typeface="Aptos" pitchFamily="34" charset="0"/>
+                <a:ea typeface="Aptos" pitchFamily="34" charset="-122"/>
+                <a:cs typeface="Aptos" pitchFamily="34" charset="-120"/>
+              </a:rPr>
+              <a:t>Equity monitoring should continue after launch because data patterns and workflow use can.</a:t>
+            </a:r>
+            <a:endParaRPr lang="en-US" sz="1380" dirty="0"/>
           </a:p>
         </p:txBody>
       </p:sp>
       <p:sp>
         <p:nvSpPr>
           <p:cNvPr id="16" name="Shape 14"/>
-          <p:cNvSpPr/>
-          <p:nvPr/>
-        </p:nvSpPr>
-        <p:spPr>
-          <a:xfrm>
-            <a:off x="8366760" y="3639312"/>
-            <a:ext cx="2011680" cy="0"/>
-          </a:xfrm>
-          <a:prstGeom prst="line">
-            <a:avLst/>
-          </a:prstGeom>
-          <a:noFill/>
-          <a:ln w="63500">
-            <a:solidFill>
-              <a:srgbClr val="2F8A28"/>
-            </a:solidFill>
-            <a:prstDash val="solid"/>
-          </a:ln>
-        </p:spPr>
-      </p:sp>
-      <p:sp>
-        <p:nvSpPr>
-          <p:cNvPr id="17" name="Text 15"/>
-          <p:cNvSpPr/>
-          <p:nvPr/>
-        </p:nvSpPr>
-        <p:spPr>
-          <a:xfrm>
-            <a:off x="7909560" y="3849624"/>
-            <a:ext cx="2926080" cy="164592"/>
-          </a:xfrm>
-          <a:prstGeom prst="rect">
-            <a:avLst/>
-          </a:prstGeom>
-          <a:noFill/>
-          <a:ln/>
-        </p:spPr>
-        <p:txBody>
-          <a:bodyPr wrap="square" lIns="0" tIns="0" rIns="0" bIns="0" rtlCol="0" anchor="ctr"/>
-          <a:lstStyle/>
-          <a:p>
-            <a:pPr algn="ctr" indent="0" marL="0">
-              <a:buNone/>
-            </a:pPr>
-            <a:r>
-              <a:rPr lang="en-US" sz="900" dirty="0">
-                <a:solidFill>
-                  <a:srgbClr val="003A63"/>
-                </a:solidFill>
-                <a:latin typeface="Aptos" pitchFamily="34" charset="0"/>
-                <a:ea typeface="Aptos" pitchFamily="34" charset="-122"/>
-                <a:cs typeface="Aptos" pitchFamily="34" charset="-120"/>
-              </a:rPr>
-              <a:t>Human review</a:t>
-            </a:r>
-            <a:endParaRPr lang="en-US" sz="900" dirty="0"/>
-          </a:p>
-        </p:txBody>
-      </p:sp>
-      <p:sp>
-        <p:nvSpPr>
-          <p:cNvPr id="18" name="Shape 16"/>
           <p:cNvSpPr/>
           <p:nvPr/>
         </p:nvSpPr>
@@ -3784,7 +3763,7 @@
       </p:sp>
       <p:sp>
         <p:nvSpPr>
-          <p:cNvPr id="19" name="Text 17"/>
+          <p:cNvPr id="17" name="Text 15"/>
           <p:cNvSpPr/>
           <p:nvPr/>
         </p:nvSpPr>
@@ -3823,7 +3802,7 @@
       </p:sp>
       <p:sp>
         <p:nvSpPr>
-          <p:cNvPr id="20" name="Text 18"/>
+          <p:cNvPr id="18" name="Text 16"/>
           <p:cNvSpPr/>
           <p:nvPr/>
         </p:nvSpPr>
@@ -4331,13 +4310,11 @@
             </a:avLst>
           </a:prstGeom>
           <a:solidFill>
-            <a:srgbClr val="FFFFFF">
-              <a:alpha val="88000"/>
-            </a:srgbClr>
+            <a:srgbClr val="FFFFFF"/>
           </a:solidFill>
           <a:ln w="12700">
             <a:solidFill>
-              <a:srgbClr val="D6E8F2"/>
+              <a:srgbClr val="B9D7E6"/>
             </a:solidFill>
             <a:prstDash val="solid"/>
           </a:ln>
@@ -4345,26 +4322,42 @@
       </p:sp>
       <p:sp>
         <p:nvSpPr>
-          <p:cNvPr id="14" name="Shape 12"/>
-          <p:cNvSpPr/>
-          <p:nvPr/>
-        </p:nvSpPr>
-        <p:spPr>
-          <a:xfrm>
-            <a:off x="8046720" y="3108960"/>
-            <a:ext cx="2651760" cy="896112"/>
-          </a:xfrm>
-          <a:prstGeom prst="arc">
-            <a:avLst/>
-          </a:prstGeom>
-          <a:noFill/>
-          <a:ln w="25400">
-            <a:solidFill>
-              <a:srgbClr val="0068B7"/>
-            </a:solidFill>
-            <a:prstDash val="solid"/>
-          </a:ln>
-        </p:spPr>
+          <p:cNvPr id="14" name="Text 12"/>
+          <p:cNvSpPr/>
+          <p:nvPr/>
+        </p:nvSpPr>
+        <p:spPr>
+          <a:xfrm>
+            <a:off x="7799832" y="2935224"/>
+            <a:ext cx="3145536" cy="256032"/>
+          </a:xfrm>
+          <a:prstGeom prst="rect">
+            <a:avLst/>
+          </a:prstGeom>
+          <a:noFill/>
+          <a:ln/>
+        </p:spPr>
+        <p:txBody>
+          <a:bodyPr wrap="square" lIns="0" tIns="0" rIns="0" bIns="0" rtlCol="0" anchor="ctr"/>
+          <a:lstStyle/>
+          <a:p>
+            <a:pPr indent="0" marL="0">
+              <a:buNone/>
+            </a:pPr>
+            <a:r>
+              <a:rPr lang="en-US" sz="1300" b="1" dirty="0">
+                <a:solidFill>
+                  <a:srgbClr val="0068B7"/>
+                </a:solidFill>
+                <a:latin typeface="Aptos" pitchFamily="34" charset="0"/>
+                <a:ea typeface="Aptos" pitchFamily="34" charset="-122"/>
+                <a:cs typeface="Aptos" pitchFamily="34" charset="-120"/>
+              </a:rPr>
+              <a:t>Concept checkpoints</a:t>
+            </a:r>
+            <a:endParaRPr lang="en-US" sz="1300" dirty="0"/>
+          </a:p>
+        </p:txBody>
       </p:sp>
       <p:sp>
         <p:nvSpPr>
@@ -4374,102 +4367,67 @@
         </p:nvSpPr>
         <p:spPr>
           <a:xfrm>
-            <a:off x="7909560" y="3099816"/>
-            <a:ext cx="2926080" cy="256032"/>
-          </a:xfrm>
-          <a:prstGeom prst="rect">
-            <a:avLst/>
-          </a:prstGeom>
-          <a:noFill/>
-          <a:ln/>
-        </p:spPr>
-        <p:txBody>
-          <a:bodyPr wrap="square" lIns="0" tIns="0" rIns="0" bIns="0" rtlCol="0" anchor="ctr"/>
-          <a:lstStyle/>
-          <a:p>
-            <a:pPr algn="ctr" indent="0" marL="0">
-              <a:buNone/>
-            </a:pPr>
-            <a:r>
-              <a:rPr lang="en-US" sz="1500" b="1" dirty="0">
-                <a:solidFill>
-                  <a:srgbClr val="003A63"/>
-                </a:solidFill>
-                <a:latin typeface="Aptos" pitchFamily="34" charset="0"/>
-                <a:ea typeface="Aptos" pitchFamily="34" charset="-122"/>
-                <a:cs typeface="Aptos" pitchFamily="34" charset="-120"/>
-              </a:rPr>
-              <a:t>Risk</a:t>
-            </a:r>
-            <a:endParaRPr lang="en-US" sz="1500" dirty="0"/>
+            <a:off x="7818120" y="3300984"/>
+            <a:ext cx="3090672" cy="877824"/>
+          </a:xfrm>
+          <a:prstGeom prst="rect">
+            <a:avLst/>
+          </a:prstGeom>
+          <a:noFill/>
+          <a:ln/>
+        </p:spPr>
+        <p:txBody>
+          <a:bodyPr wrap="square" lIns="254" tIns="254" rIns="254" bIns="254" rtlCol="0" anchor="t">
+            <a:normAutofit/>
+          </a:bodyPr>
+          <a:lstStyle/>
+          <a:p>
+            <a:r>
+              <a:rPr lang="en-US" sz="1380" dirty="0">
+                <a:solidFill>
+                  <a:srgbClr val="17364A"/>
+                </a:solidFill>
+                <a:latin typeface="Aptos" pitchFamily="34" charset="0"/>
+                <a:ea typeface="Aptos" pitchFamily="34" charset="-122"/>
+                <a:cs typeface="Aptos" pitchFamily="34" charset="-120"/>
+              </a:rPr>
+              <a:t>Risks and failure modes include the following:</a:t>
+            </a:r>
+            <a:endParaRPr lang="en-US" sz="1380" dirty="0"/>
+          </a:p>
+          <a:p>
+            <a:r>
+              <a:rPr lang="en-US" sz="1380" dirty="0">
+                <a:solidFill>
+                  <a:srgbClr val="17364A"/>
+                </a:solidFill>
+                <a:latin typeface="Aptos" pitchFamily="34" charset="0"/>
+                <a:ea typeface="Aptos" pitchFamily="34" charset="-122"/>
+                <a:cs typeface="Aptos" pitchFamily="34" charset="-120"/>
+              </a:rPr>
+              <a:t>Relying on average performance while ignoring subgroup harms.</a:t>
+            </a:r>
+            <a:endParaRPr lang="en-US" sz="1380" dirty="0"/>
+          </a:p>
+          <a:p>
+            <a:r>
+              <a:rPr lang="en-US" sz="1380" dirty="0">
+                <a:solidFill>
+                  <a:srgbClr val="17364A"/>
+                </a:solidFill>
+                <a:latin typeface="Aptos" pitchFamily="34" charset="0"/>
+                <a:ea typeface="Aptos" pitchFamily="34" charset="-122"/>
+                <a:cs typeface="Aptos" pitchFamily="34" charset="-120"/>
+              </a:rPr>
+              <a:t>Using datasets that underrepresent communities with limited healthcare access.</a:t>
+            </a:r>
+            <a:endParaRPr lang="en-US" sz="1380" dirty="0"/>
           </a:p>
         </p:txBody>
       </p:sp>
       <p:sp>
         <p:nvSpPr>
           <p:cNvPr id="16" name="Shape 14"/>
-          <p:cNvSpPr/>
-          <p:nvPr/>
-        </p:nvSpPr>
-        <p:spPr>
-          <a:xfrm>
-            <a:off x="8366760" y="3639312"/>
-            <a:ext cx="2011680" cy="0"/>
-          </a:xfrm>
-          <a:prstGeom prst="line">
-            <a:avLst/>
-          </a:prstGeom>
-          <a:noFill/>
-          <a:ln w="63500">
-            <a:solidFill>
-              <a:srgbClr val="2F8A28"/>
-            </a:solidFill>
-            <a:prstDash val="solid"/>
-          </a:ln>
-        </p:spPr>
-      </p:sp>
-      <p:sp>
-        <p:nvSpPr>
-          <p:cNvPr id="17" name="Text 15"/>
-          <p:cNvSpPr/>
-          <p:nvPr/>
-        </p:nvSpPr>
-        <p:spPr>
-          <a:xfrm>
-            <a:off x="7909560" y="3849624"/>
-            <a:ext cx="2926080" cy="164592"/>
-          </a:xfrm>
-          <a:prstGeom prst="rect">
-            <a:avLst/>
-          </a:prstGeom>
-          <a:noFill/>
-          <a:ln/>
-        </p:spPr>
-        <p:txBody>
-          <a:bodyPr wrap="square" lIns="0" tIns="0" rIns="0" bIns="0" rtlCol="0" anchor="ctr"/>
-          <a:lstStyle/>
-          <a:p>
-            <a:pPr algn="ctr" indent="0" marL="0">
-              <a:buNone/>
-            </a:pPr>
-            <a:r>
-              <a:rPr lang="en-US" sz="900" dirty="0">
-                <a:solidFill>
-                  <a:srgbClr val="003A63"/>
-                </a:solidFill>
-                <a:latin typeface="Aptos" pitchFamily="34" charset="0"/>
-                <a:ea typeface="Aptos" pitchFamily="34" charset="-122"/>
-                <a:cs typeface="Aptos" pitchFamily="34" charset="-120"/>
-              </a:rPr>
-              <a:t>Human review</a:t>
-            </a:r>
-            <a:endParaRPr lang="en-US" sz="900" dirty="0"/>
-          </a:p>
-        </p:txBody>
-      </p:sp>
-      <p:sp>
-        <p:nvSpPr>
-          <p:cNvPr id="18" name="Shape 16"/>
           <p:cNvSpPr/>
           <p:nvPr/>
         </p:nvSpPr>
@@ -4496,7 +4454,7 @@
       </p:sp>
       <p:sp>
         <p:nvSpPr>
-          <p:cNvPr id="19" name="Text 17"/>
+          <p:cNvPr id="17" name="Text 15"/>
           <p:cNvSpPr/>
           <p:nvPr/>
         </p:nvSpPr>
@@ -4535,7 +4493,7 @@
       </p:sp>
       <p:sp>
         <p:nvSpPr>
-          <p:cNvPr id="20" name="Text 18"/>
+          <p:cNvPr id="18" name="Text 16"/>
           <p:cNvSpPr/>
           <p:nvPr/>
         </p:nvSpPr>
@@ -5043,13 +5001,11 @@
             </a:avLst>
           </a:prstGeom>
           <a:solidFill>
-            <a:srgbClr val="FFFFFF">
-              <a:alpha val="88000"/>
-            </a:srgbClr>
+            <a:srgbClr val="FFFFFF"/>
           </a:solidFill>
           <a:ln w="12700">
             <a:solidFill>
-              <a:srgbClr val="D6E8F2"/>
+              <a:srgbClr val="B9D7E6"/>
             </a:solidFill>
             <a:prstDash val="solid"/>
           </a:ln>
@@ -5057,26 +5013,42 @@
       </p:sp>
       <p:sp>
         <p:nvSpPr>
-          <p:cNvPr id="14" name="Shape 12"/>
-          <p:cNvSpPr/>
-          <p:nvPr/>
-        </p:nvSpPr>
-        <p:spPr>
-          <a:xfrm>
-            <a:off x="8046720" y="3108960"/>
-            <a:ext cx="2651760" cy="896112"/>
-          </a:xfrm>
-          <a:prstGeom prst="arc">
-            <a:avLst/>
-          </a:prstGeom>
-          <a:noFill/>
-          <a:ln w="25400">
-            <a:solidFill>
-              <a:srgbClr val="0068B7"/>
-            </a:solidFill>
-            <a:prstDash val="solid"/>
-          </a:ln>
-        </p:spPr>
+          <p:cNvPr id="14" name="Text 12"/>
+          <p:cNvSpPr/>
+          <p:nvPr/>
+        </p:nvSpPr>
+        <p:spPr>
+          <a:xfrm>
+            <a:off x="7799832" y="2935224"/>
+            <a:ext cx="3145536" cy="256032"/>
+          </a:xfrm>
+          <a:prstGeom prst="rect">
+            <a:avLst/>
+          </a:prstGeom>
+          <a:noFill/>
+          <a:ln/>
+        </p:spPr>
+        <p:txBody>
+          <a:bodyPr wrap="square" lIns="0" tIns="0" rIns="0" bIns="0" rtlCol="0" anchor="ctr"/>
+          <a:lstStyle/>
+          <a:p>
+            <a:pPr indent="0" marL="0">
+              <a:buNone/>
+            </a:pPr>
+            <a:r>
+              <a:rPr lang="en-US" sz="1300" b="1" dirty="0">
+                <a:solidFill>
+                  <a:srgbClr val="0068B7"/>
+                </a:solidFill>
+                <a:latin typeface="Aptos" pitchFamily="34" charset="0"/>
+                <a:ea typeface="Aptos" pitchFamily="34" charset="-122"/>
+                <a:cs typeface="Aptos" pitchFamily="34" charset="-120"/>
+              </a:rPr>
+              <a:t>Concept checkpoints</a:t>
+            </a:r>
+            <a:endParaRPr lang="en-US" sz="1300" dirty="0"/>
+          </a:p>
+        </p:txBody>
       </p:sp>
       <p:sp>
         <p:nvSpPr>
@@ -5086,102 +5058,67 @@
         </p:nvSpPr>
         <p:spPr>
           <a:xfrm>
-            <a:off x="7909560" y="3099816"/>
-            <a:ext cx="2926080" cy="256032"/>
-          </a:xfrm>
-          <a:prstGeom prst="rect">
-            <a:avLst/>
-          </a:prstGeom>
-          <a:noFill/>
-          <a:ln/>
-        </p:spPr>
-        <p:txBody>
-          <a:bodyPr wrap="square" lIns="0" tIns="0" rIns="0" bIns="0" rtlCol="0" anchor="ctr"/>
-          <a:lstStyle/>
-          <a:p>
-            <a:pPr algn="ctr" indent="0" marL="0">
-              <a:buNone/>
-            </a:pPr>
-            <a:r>
-              <a:rPr lang="en-US" sz="1500" b="1" dirty="0">
-                <a:solidFill>
-                  <a:srgbClr val="003A63"/>
-                </a:solidFill>
-                <a:latin typeface="Aptos" pitchFamily="34" charset="0"/>
-                <a:ea typeface="Aptos" pitchFamily="34" charset="-122"/>
-                <a:cs typeface="Aptos" pitchFamily="34" charset="-120"/>
-              </a:rPr>
-              <a:t>Risk</a:t>
-            </a:r>
-            <a:endParaRPr lang="en-US" sz="1500" dirty="0"/>
+            <a:off x="7818120" y="3300984"/>
+            <a:ext cx="3090672" cy="877824"/>
+          </a:xfrm>
+          <a:prstGeom prst="rect">
+            <a:avLst/>
+          </a:prstGeom>
+          <a:noFill/>
+          <a:ln/>
+        </p:spPr>
+        <p:txBody>
+          <a:bodyPr wrap="square" lIns="254" tIns="254" rIns="254" bIns="254" rtlCol="0" anchor="t">
+            <a:normAutofit/>
+          </a:bodyPr>
+          <a:lstStyle/>
+          <a:p>
+            <a:r>
+              <a:rPr lang="en-US" sz="1380" dirty="0">
+                <a:solidFill>
+                  <a:srgbClr val="17364A"/>
+                </a:solidFill>
+                <a:latin typeface="Aptos" pitchFamily="34" charset="0"/>
+                <a:ea typeface="Aptos" pitchFamily="34" charset="-122"/>
+                <a:cs typeface="Aptos" pitchFamily="34" charset="-120"/>
+              </a:rPr>
+              <a:t>Treating missing data as neutral when missingness reflects structural inequities.</a:t>
+            </a:r>
+            <a:endParaRPr lang="en-US" sz="1380" dirty="0"/>
+          </a:p>
+          <a:p>
+            <a:r>
+              <a:rPr lang="en-US" sz="1380" dirty="0">
+                <a:solidFill>
+                  <a:srgbClr val="17364A"/>
+                </a:solidFill>
+                <a:latin typeface="Aptos" pitchFamily="34" charset="0"/>
+                <a:ea typeface="Aptos" pitchFamily="34" charset="-122"/>
+                <a:cs typeface="Aptos" pitchFamily="34" charset="-120"/>
+              </a:rPr>
+              <a:t>Using AI prioritization to allocate scarce resources without equity review.</a:t>
+            </a:r>
+            <a:endParaRPr lang="en-US" sz="1380" dirty="0"/>
+          </a:p>
+          <a:p>
+            <a:r>
+              <a:rPr lang="en-US" sz="1380" dirty="0">
+                <a:solidFill>
+                  <a:srgbClr val="17364A"/>
+                </a:solidFill>
+                <a:latin typeface="Aptos" pitchFamily="34" charset="0"/>
+                <a:ea typeface="Aptos" pitchFamily="34" charset="-122"/>
+                <a:cs typeface="Aptos" pitchFamily="34" charset="-120"/>
+              </a:rPr>
+              <a:t>Failing to monitor equity impacts after deployment.</a:t>
+            </a:r>
+            <a:endParaRPr lang="en-US" sz="1380" dirty="0"/>
           </a:p>
         </p:txBody>
       </p:sp>
       <p:sp>
         <p:nvSpPr>
           <p:cNvPr id="16" name="Shape 14"/>
-          <p:cNvSpPr/>
-          <p:nvPr/>
-        </p:nvSpPr>
-        <p:spPr>
-          <a:xfrm>
-            <a:off x="8366760" y="3639312"/>
-            <a:ext cx="2011680" cy="0"/>
-          </a:xfrm>
-          <a:prstGeom prst="line">
-            <a:avLst/>
-          </a:prstGeom>
-          <a:noFill/>
-          <a:ln w="63500">
-            <a:solidFill>
-              <a:srgbClr val="2F8A28"/>
-            </a:solidFill>
-            <a:prstDash val="solid"/>
-          </a:ln>
-        </p:spPr>
-      </p:sp>
-      <p:sp>
-        <p:nvSpPr>
-          <p:cNvPr id="17" name="Text 15"/>
-          <p:cNvSpPr/>
-          <p:nvPr/>
-        </p:nvSpPr>
-        <p:spPr>
-          <a:xfrm>
-            <a:off x="7909560" y="3849624"/>
-            <a:ext cx="2926080" cy="164592"/>
-          </a:xfrm>
-          <a:prstGeom prst="rect">
-            <a:avLst/>
-          </a:prstGeom>
-          <a:noFill/>
-          <a:ln/>
-        </p:spPr>
-        <p:txBody>
-          <a:bodyPr wrap="square" lIns="0" tIns="0" rIns="0" bIns="0" rtlCol="0" anchor="ctr"/>
-          <a:lstStyle/>
-          <a:p>
-            <a:pPr algn="ctr" indent="0" marL="0">
-              <a:buNone/>
-            </a:pPr>
-            <a:r>
-              <a:rPr lang="en-US" sz="900" dirty="0">
-                <a:solidFill>
-                  <a:srgbClr val="003A63"/>
-                </a:solidFill>
-                <a:latin typeface="Aptos" pitchFamily="34" charset="0"/>
-                <a:ea typeface="Aptos" pitchFamily="34" charset="-122"/>
-                <a:cs typeface="Aptos" pitchFamily="34" charset="-120"/>
-              </a:rPr>
-              <a:t>Human review</a:t>
-            </a:r>
-            <a:endParaRPr lang="en-US" sz="900" dirty="0"/>
-          </a:p>
-        </p:txBody>
-      </p:sp>
-      <p:sp>
-        <p:nvSpPr>
-          <p:cNvPr id="18" name="Shape 16"/>
           <p:cNvSpPr/>
           <p:nvPr/>
         </p:nvSpPr>
@@ -5208,7 +5145,7 @@
       </p:sp>
       <p:sp>
         <p:nvSpPr>
-          <p:cNvPr id="19" name="Text 17"/>
+          <p:cNvPr id="17" name="Text 15"/>
           <p:cNvSpPr/>
           <p:nvPr/>
         </p:nvSpPr>
@@ -5247,7 +5184,7 @@
       </p:sp>
       <p:sp>
         <p:nvSpPr>
-          <p:cNvPr id="20" name="Text 18"/>
+          <p:cNvPr id="18" name="Text 16"/>
           <p:cNvSpPr/>
           <p:nvPr/>
         </p:nvSpPr>
@@ -5755,13 +5692,11 @@
             </a:avLst>
           </a:prstGeom>
           <a:solidFill>
-            <a:srgbClr val="FFFFFF">
-              <a:alpha val="88000"/>
-            </a:srgbClr>
+            <a:srgbClr val="FFFFFF"/>
           </a:solidFill>
           <a:ln w="12700">
             <a:solidFill>
-              <a:srgbClr val="D6E8F2"/>
+              <a:srgbClr val="B9D7E6"/>
             </a:solidFill>
             <a:prstDash val="solid"/>
           </a:ln>
@@ -5769,26 +5704,42 @@
       </p:sp>
       <p:sp>
         <p:nvSpPr>
-          <p:cNvPr id="14" name="Shape 12"/>
-          <p:cNvSpPr/>
-          <p:nvPr/>
-        </p:nvSpPr>
-        <p:spPr>
-          <a:xfrm>
-            <a:off x="8046720" y="3108960"/>
-            <a:ext cx="2651760" cy="896112"/>
-          </a:xfrm>
-          <a:prstGeom prst="arc">
-            <a:avLst/>
-          </a:prstGeom>
-          <a:noFill/>
-          <a:ln w="25400">
-            <a:solidFill>
-              <a:srgbClr val="0068B7"/>
-            </a:solidFill>
-            <a:prstDash val="solid"/>
-          </a:ln>
-        </p:spPr>
+          <p:cNvPr id="14" name="Text 12"/>
+          <p:cNvSpPr/>
+          <p:nvPr/>
+        </p:nvSpPr>
+        <p:spPr>
+          <a:xfrm>
+            <a:off x="7799832" y="2935224"/>
+            <a:ext cx="3145536" cy="256032"/>
+          </a:xfrm>
+          <a:prstGeom prst="rect">
+            <a:avLst/>
+          </a:prstGeom>
+          <a:noFill/>
+          <a:ln/>
+        </p:spPr>
+        <p:txBody>
+          <a:bodyPr wrap="square" lIns="0" tIns="0" rIns="0" bIns="0" rtlCol="0" anchor="ctr"/>
+          <a:lstStyle/>
+          <a:p>
+            <a:pPr indent="0" marL="0">
+              <a:buNone/>
+            </a:pPr>
+            <a:r>
+              <a:rPr lang="en-US" sz="1300" b="1" dirty="0">
+                <a:solidFill>
+                  <a:srgbClr val="0068B7"/>
+                </a:solidFill>
+                <a:latin typeface="Aptos" pitchFamily="34" charset="0"/>
+                <a:ea typeface="Aptos" pitchFamily="34" charset="-122"/>
+                <a:cs typeface="Aptos" pitchFamily="34" charset="-120"/>
+              </a:rPr>
+              <a:t>Concept checkpoints</a:t>
+            </a:r>
+            <a:endParaRPr lang="en-US" sz="1300" dirty="0"/>
+          </a:p>
+        </p:txBody>
       </p:sp>
       <p:sp>
         <p:nvSpPr>
@@ -5798,102 +5749,67 @@
         </p:nvSpPr>
         <p:spPr>
           <a:xfrm>
-            <a:off x="7909560" y="3099816"/>
-            <a:ext cx="2926080" cy="256032"/>
-          </a:xfrm>
-          <a:prstGeom prst="rect">
-            <a:avLst/>
-          </a:prstGeom>
-          <a:noFill/>
-          <a:ln/>
-        </p:spPr>
-        <p:txBody>
-          <a:bodyPr wrap="square" lIns="0" tIns="0" rIns="0" bIns="0" rtlCol="0" anchor="ctr"/>
-          <a:lstStyle/>
-          <a:p>
-            <a:pPr algn="ctr" indent="0" marL="0">
-              <a:buNone/>
-            </a:pPr>
-            <a:r>
-              <a:rPr lang="en-US" sz="1500" b="1" dirty="0">
-                <a:solidFill>
-                  <a:srgbClr val="003A63"/>
-                </a:solidFill>
-                <a:latin typeface="Aptos" pitchFamily="34" charset="0"/>
-                <a:ea typeface="Aptos" pitchFamily="34" charset="-122"/>
-                <a:cs typeface="Aptos" pitchFamily="34" charset="-120"/>
-              </a:rPr>
-              <a:t>Risk</a:t>
-            </a:r>
-            <a:endParaRPr lang="en-US" sz="1500" dirty="0"/>
+            <a:off x="7818120" y="3300984"/>
+            <a:ext cx="3090672" cy="877824"/>
+          </a:xfrm>
+          <a:prstGeom prst="rect">
+            <a:avLst/>
+          </a:prstGeom>
+          <a:noFill/>
+          <a:ln/>
+        </p:spPr>
+        <p:txBody>
+          <a:bodyPr wrap="square" lIns="254" tIns="254" rIns="254" bIns="254" rtlCol="0" anchor="t">
+            <a:normAutofit/>
+          </a:bodyPr>
+          <a:lstStyle/>
+          <a:p>
+            <a:r>
+              <a:rPr lang="en-US" sz="1380" dirty="0">
+                <a:solidFill>
+                  <a:srgbClr val="17364A"/>
+                </a:solidFill>
+                <a:latin typeface="Aptos" pitchFamily="34" charset="0"/>
+                <a:ea typeface="Aptos" pitchFamily="34" charset="-122"/>
+                <a:cs typeface="Aptos" pitchFamily="34" charset="-120"/>
+              </a:rPr>
+              <a:t>Recommended guardrails include the following:</a:t>
+            </a:r>
+            <a:endParaRPr lang="en-US" sz="1380" dirty="0"/>
+          </a:p>
+          <a:p>
+            <a:r>
+              <a:rPr lang="en-US" sz="1380" dirty="0">
+                <a:solidFill>
+                  <a:srgbClr val="17364A"/>
+                </a:solidFill>
+                <a:latin typeface="Aptos" pitchFamily="34" charset="0"/>
+                <a:ea typeface="Aptos" pitchFamily="34" charset="-122"/>
+                <a:cs typeface="Aptos" pitchFamily="34" charset="-120"/>
+              </a:rPr>
+              <a:t>Require equity evaluation for AI uses that affect prioritization, eligibility, outreach,.</a:t>
+            </a:r>
+            <a:endParaRPr lang="en-US" sz="1380" dirty="0"/>
+          </a:p>
+          <a:p>
+            <a:r>
+              <a:rPr lang="en-US" sz="1380" dirty="0">
+                <a:solidFill>
+                  <a:srgbClr val="17364A"/>
+                </a:solidFill>
+                <a:latin typeface="Aptos" pitchFamily="34" charset="0"/>
+                <a:ea typeface="Aptos" pitchFamily="34" charset="-122"/>
+                <a:cs typeface="Aptos" pitchFamily="34" charset="-120"/>
+              </a:rPr>
+              <a:t>Assess representativeness and missingness before model use.</a:t>
+            </a:r>
+            <a:endParaRPr lang="en-US" sz="1380" dirty="0"/>
           </a:p>
         </p:txBody>
       </p:sp>
       <p:sp>
         <p:nvSpPr>
           <p:cNvPr id="16" name="Shape 14"/>
-          <p:cNvSpPr/>
-          <p:nvPr/>
-        </p:nvSpPr>
-        <p:spPr>
-          <a:xfrm>
-            <a:off x="8366760" y="3639312"/>
-            <a:ext cx="2011680" cy="0"/>
-          </a:xfrm>
-          <a:prstGeom prst="line">
-            <a:avLst/>
-          </a:prstGeom>
-          <a:noFill/>
-          <a:ln w="63500">
-            <a:solidFill>
-              <a:srgbClr val="2F8A28"/>
-            </a:solidFill>
-            <a:prstDash val="solid"/>
-          </a:ln>
-        </p:spPr>
-      </p:sp>
-      <p:sp>
-        <p:nvSpPr>
-          <p:cNvPr id="17" name="Text 15"/>
-          <p:cNvSpPr/>
-          <p:nvPr/>
-        </p:nvSpPr>
-        <p:spPr>
-          <a:xfrm>
-            <a:off x="7909560" y="3849624"/>
-            <a:ext cx="2926080" cy="164592"/>
-          </a:xfrm>
-          <a:prstGeom prst="rect">
-            <a:avLst/>
-          </a:prstGeom>
-          <a:noFill/>
-          <a:ln/>
-        </p:spPr>
-        <p:txBody>
-          <a:bodyPr wrap="square" lIns="0" tIns="0" rIns="0" bIns="0" rtlCol="0" anchor="ctr"/>
-          <a:lstStyle/>
-          <a:p>
-            <a:pPr algn="ctr" indent="0" marL="0">
-              <a:buNone/>
-            </a:pPr>
-            <a:r>
-              <a:rPr lang="en-US" sz="900" dirty="0">
-                <a:solidFill>
-                  <a:srgbClr val="003A63"/>
-                </a:solidFill>
-                <a:latin typeface="Aptos" pitchFamily="34" charset="0"/>
-                <a:ea typeface="Aptos" pitchFamily="34" charset="-122"/>
-                <a:cs typeface="Aptos" pitchFamily="34" charset="-120"/>
-              </a:rPr>
-              <a:t>Human review</a:t>
-            </a:r>
-            <a:endParaRPr lang="en-US" sz="900" dirty="0"/>
-          </a:p>
-        </p:txBody>
-      </p:sp>
-      <p:sp>
-        <p:nvSpPr>
-          <p:cNvPr id="18" name="Shape 16"/>
           <p:cNvSpPr/>
           <p:nvPr/>
         </p:nvSpPr>
@@ -5920,7 +5836,7 @@
       </p:sp>
       <p:sp>
         <p:nvSpPr>
-          <p:cNvPr id="19" name="Text 17"/>
+          <p:cNvPr id="17" name="Text 15"/>
           <p:cNvSpPr/>
           <p:nvPr/>
         </p:nvSpPr>
@@ -5959,7 +5875,7 @@
       </p:sp>
       <p:sp>
         <p:nvSpPr>
-          <p:cNvPr id="20" name="Text 18"/>
+          <p:cNvPr id="18" name="Text 16"/>
           <p:cNvSpPr/>
           <p:nvPr/>
         </p:nvSpPr>
@@ -6467,13 +6383,11 @@
             </a:avLst>
           </a:prstGeom>
           <a:solidFill>
-            <a:srgbClr val="FFFFFF">
-              <a:alpha val="88000"/>
-            </a:srgbClr>
+            <a:srgbClr val="FFFFFF"/>
           </a:solidFill>
           <a:ln w="12700">
             <a:solidFill>
-              <a:srgbClr val="D6E8F2"/>
+              <a:srgbClr val="B9D7E6"/>
             </a:solidFill>
             <a:prstDash val="solid"/>
           </a:ln>
@@ -6481,26 +6395,42 @@
       </p:sp>
       <p:sp>
         <p:nvSpPr>
-          <p:cNvPr id="14" name="Shape 12"/>
-          <p:cNvSpPr/>
-          <p:nvPr/>
-        </p:nvSpPr>
-        <p:spPr>
-          <a:xfrm>
-            <a:off x="8046720" y="3108960"/>
-            <a:ext cx="2651760" cy="896112"/>
-          </a:xfrm>
-          <a:prstGeom prst="arc">
-            <a:avLst/>
-          </a:prstGeom>
-          <a:noFill/>
-          <a:ln w="25400">
-            <a:solidFill>
-              <a:srgbClr val="0068B7"/>
-            </a:solidFill>
-            <a:prstDash val="solid"/>
-          </a:ln>
-        </p:spPr>
+          <p:cNvPr id="14" name="Text 12"/>
+          <p:cNvSpPr/>
+          <p:nvPr/>
+        </p:nvSpPr>
+        <p:spPr>
+          <a:xfrm>
+            <a:off x="7799832" y="2935224"/>
+            <a:ext cx="3145536" cy="256032"/>
+          </a:xfrm>
+          <a:prstGeom prst="rect">
+            <a:avLst/>
+          </a:prstGeom>
+          <a:noFill/>
+          <a:ln/>
+        </p:spPr>
+        <p:txBody>
+          <a:bodyPr wrap="square" lIns="0" tIns="0" rIns="0" bIns="0" rtlCol="0" anchor="ctr"/>
+          <a:lstStyle/>
+          <a:p>
+            <a:pPr indent="0" marL="0">
+              <a:buNone/>
+            </a:pPr>
+            <a:r>
+              <a:rPr lang="en-US" sz="1300" b="1" dirty="0">
+                <a:solidFill>
+                  <a:srgbClr val="0068B7"/>
+                </a:solidFill>
+                <a:latin typeface="Aptos" pitchFamily="34" charset="0"/>
+                <a:ea typeface="Aptos" pitchFamily="34" charset="-122"/>
+                <a:cs typeface="Aptos" pitchFamily="34" charset="-120"/>
+              </a:rPr>
+              <a:t>Concept checkpoints</a:t>
+            </a:r>
+            <a:endParaRPr lang="en-US" sz="1300" dirty="0"/>
+          </a:p>
+        </p:txBody>
       </p:sp>
       <p:sp>
         <p:nvSpPr>
@@ -6510,102 +6440,67 @@
         </p:nvSpPr>
         <p:spPr>
           <a:xfrm>
-            <a:off x="7909560" y="3099816"/>
-            <a:ext cx="2926080" cy="256032"/>
-          </a:xfrm>
-          <a:prstGeom prst="rect">
-            <a:avLst/>
-          </a:prstGeom>
-          <a:noFill/>
-          <a:ln/>
-        </p:spPr>
-        <p:txBody>
-          <a:bodyPr wrap="square" lIns="0" tIns="0" rIns="0" bIns="0" rtlCol="0" anchor="ctr"/>
-          <a:lstStyle/>
-          <a:p>
-            <a:pPr algn="ctr" indent="0" marL="0">
-              <a:buNone/>
-            </a:pPr>
-            <a:r>
-              <a:rPr lang="en-US" sz="1500" b="1" dirty="0">
-                <a:solidFill>
-                  <a:srgbClr val="003A63"/>
-                </a:solidFill>
-                <a:latin typeface="Aptos" pitchFamily="34" charset="0"/>
-                <a:ea typeface="Aptos" pitchFamily="34" charset="-122"/>
-                <a:cs typeface="Aptos" pitchFamily="34" charset="-120"/>
-              </a:rPr>
-              <a:t>Risk</a:t>
-            </a:r>
-            <a:endParaRPr lang="en-US" sz="1500" dirty="0"/>
+            <a:off x="7818120" y="3300984"/>
+            <a:ext cx="3090672" cy="877824"/>
+          </a:xfrm>
+          <a:prstGeom prst="rect">
+            <a:avLst/>
+          </a:prstGeom>
+          <a:noFill/>
+          <a:ln/>
+        </p:spPr>
+        <p:txBody>
+          <a:bodyPr wrap="square" lIns="254" tIns="254" rIns="254" bIns="254" rtlCol="0" anchor="t">
+            <a:normAutofit/>
+          </a:bodyPr>
+          <a:lstStyle/>
+          <a:p>
+            <a:r>
+              <a:rPr lang="en-US" sz="1380" dirty="0">
+                <a:solidFill>
+                  <a:srgbClr val="17364A"/>
+                </a:solidFill>
+                <a:latin typeface="Aptos" pitchFamily="34" charset="0"/>
+                <a:ea typeface="Aptos" pitchFamily="34" charset="-122"/>
+                <a:cs typeface="Aptos" pitchFamily="34" charset="-120"/>
+              </a:rPr>
+              <a:t>Measure subgroup performance where feasible and document limitations where not feasible.</a:t>
+            </a:r>
+            <a:endParaRPr lang="en-US" sz="1380" dirty="0"/>
+          </a:p>
+          <a:p>
+            <a:r>
+              <a:rPr lang="en-US" sz="1380" dirty="0">
+                <a:solidFill>
+                  <a:srgbClr val="17364A"/>
+                </a:solidFill>
+                <a:latin typeface="Aptos" pitchFamily="34" charset="0"/>
+                <a:ea typeface="Aptos" pitchFamily="34" charset="-122"/>
+                <a:cs typeface="Aptos" pitchFamily="34" charset="-120"/>
+              </a:rPr>
+              <a:t>Include community, equity, and program reviewers in governance decisions.</a:t>
+            </a:r>
+            <a:endParaRPr lang="en-US" sz="1380" dirty="0"/>
+          </a:p>
+          <a:p>
+            <a:r>
+              <a:rPr lang="en-US" sz="1380" dirty="0">
+                <a:solidFill>
+                  <a:srgbClr val="17364A"/>
+                </a:solidFill>
+                <a:latin typeface="Aptos" pitchFamily="34" charset="0"/>
+                <a:ea typeface="Aptos" pitchFamily="34" charset="-122"/>
+                <a:cs typeface="Aptos" pitchFamily="34" charset="-120"/>
+              </a:rPr>
+              <a:t>Monitor equity indicators and user overrides after deployment.</a:t>
+            </a:r>
+            <a:endParaRPr lang="en-US" sz="1380" dirty="0"/>
           </a:p>
         </p:txBody>
       </p:sp>
       <p:sp>
         <p:nvSpPr>
           <p:cNvPr id="16" name="Shape 14"/>
-          <p:cNvSpPr/>
-          <p:nvPr/>
-        </p:nvSpPr>
-        <p:spPr>
-          <a:xfrm>
-            <a:off x="8366760" y="3639312"/>
-            <a:ext cx="2011680" cy="0"/>
-          </a:xfrm>
-          <a:prstGeom prst="line">
-            <a:avLst/>
-          </a:prstGeom>
-          <a:noFill/>
-          <a:ln w="63500">
-            <a:solidFill>
-              <a:srgbClr val="2F8A28"/>
-            </a:solidFill>
-            <a:prstDash val="solid"/>
-          </a:ln>
-        </p:spPr>
-      </p:sp>
-      <p:sp>
-        <p:nvSpPr>
-          <p:cNvPr id="17" name="Text 15"/>
-          <p:cNvSpPr/>
-          <p:nvPr/>
-        </p:nvSpPr>
-        <p:spPr>
-          <a:xfrm>
-            <a:off x="7909560" y="3849624"/>
-            <a:ext cx="2926080" cy="164592"/>
-          </a:xfrm>
-          <a:prstGeom prst="rect">
-            <a:avLst/>
-          </a:prstGeom>
-          <a:noFill/>
-          <a:ln/>
-        </p:spPr>
-        <p:txBody>
-          <a:bodyPr wrap="square" lIns="0" tIns="0" rIns="0" bIns="0" rtlCol="0" anchor="ctr"/>
-          <a:lstStyle/>
-          <a:p>
-            <a:pPr algn="ctr" indent="0" marL="0">
-              <a:buNone/>
-            </a:pPr>
-            <a:r>
-              <a:rPr lang="en-US" sz="900" dirty="0">
-                <a:solidFill>
-                  <a:srgbClr val="003A63"/>
-                </a:solidFill>
-                <a:latin typeface="Aptos" pitchFamily="34" charset="0"/>
-                <a:ea typeface="Aptos" pitchFamily="34" charset="-122"/>
-                <a:cs typeface="Aptos" pitchFamily="34" charset="-120"/>
-              </a:rPr>
-              <a:t>Human review</a:t>
-            </a:r>
-            <a:endParaRPr lang="en-US" sz="900" dirty="0"/>
-          </a:p>
-        </p:txBody>
-      </p:sp>
-      <p:sp>
-        <p:nvSpPr>
-          <p:cNvPr id="18" name="Shape 16"/>
           <p:cNvSpPr/>
           <p:nvPr/>
         </p:nvSpPr>
@@ -6632,7 +6527,7 @@
       </p:sp>
       <p:sp>
         <p:nvSpPr>
-          <p:cNvPr id="19" name="Text 17"/>
+          <p:cNvPr id="17" name="Text 15"/>
           <p:cNvSpPr/>
           <p:nvPr/>
         </p:nvSpPr>
@@ -6671,7 +6566,7 @@
       </p:sp>
       <p:sp>
         <p:nvSpPr>
-          <p:cNvPr id="20" name="Text 18"/>
+          <p:cNvPr id="18" name="Text 16"/>
           <p:cNvSpPr/>
           <p:nvPr/>
         </p:nvSpPr>
@@ -7179,13 +7074,11 @@
             </a:avLst>
           </a:prstGeom>
           <a:solidFill>
-            <a:srgbClr val="FFFFFF">
-              <a:alpha val="88000"/>
-            </a:srgbClr>
+            <a:srgbClr val="FFFFFF"/>
           </a:solidFill>
           <a:ln w="12700">
             <a:solidFill>
-              <a:srgbClr val="D6E8F2"/>
+              <a:srgbClr val="B9D7E6"/>
             </a:solidFill>
             <a:prstDash val="solid"/>
           </a:ln>
@@ -7193,26 +7086,42 @@
       </p:sp>
       <p:sp>
         <p:nvSpPr>
-          <p:cNvPr id="14" name="Shape 12"/>
-          <p:cNvSpPr/>
-          <p:nvPr/>
-        </p:nvSpPr>
-        <p:spPr>
-          <a:xfrm>
-            <a:off x="8046720" y="3108960"/>
-            <a:ext cx="2651760" cy="896112"/>
-          </a:xfrm>
-          <a:prstGeom prst="arc">
-            <a:avLst/>
-          </a:prstGeom>
-          <a:noFill/>
-          <a:ln w="25400">
-            <a:solidFill>
-              <a:srgbClr val="0068B7"/>
-            </a:solidFill>
-            <a:prstDash val="solid"/>
-          </a:ln>
-        </p:spPr>
+          <p:cNvPr id="14" name="Text 12"/>
+          <p:cNvSpPr/>
+          <p:nvPr/>
+        </p:nvSpPr>
+        <p:spPr>
+          <a:xfrm>
+            <a:off x="7799832" y="2935224"/>
+            <a:ext cx="3145536" cy="256032"/>
+          </a:xfrm>
+          <a:prstGeom prst="rect">
+            <a:avLst/>
+          </a:prstGeom>
+          <a:noFill/>
+          <a:ln/>
+        </p:spPr>
+        <p:txBody>
+          <a:bodyPr wrap="square" lIns="0" tIns="0" rIns="0" bIns="0" rtlCol="0" anchor="ctr"/>
+          <a:lstStyle/>
+          <a:p>
+            <a:pPr indent="0" marL="0">
+              <a:buNone/>
+            </a:pPr>
+            <a:r>
+              <a:rPr lang="en-US" sz="1300" b="1" dirty="0">
+                <a:solidFill>
+                  <a:srgbClr val="0068B7"/>
+                </a:solidFill>
+                <a:latin typeface="Aptos" pitchFamily="34" charset="0"/>
+                <a:ea typeface="Aptos" pitchFamily="34" charset="-122"/>
+                <a:cs typeface="Aptos" pitchFamily="34" charset="-120"/>
+              </a:rPr>
+              <a:t>Concept checkpoints</a:t>
+            </a:r>
+            <a:endParaRPr lang="en-US" sz="1300" dirty="0"/>
+          </a:p>
+        </p:txBody>
       </p:sp>
       <p:sp>
         <p:nvSpPr>
@@ -7222,102 +7131,67 @@
         </p:nvSpPr>
         <p:spPr>
           <a:xfrm>
-            <a:off x="7909560" y="3099816"/>
-            <a:ext cx="2926080" cy="256032"/>
-          </a:xfrm>
-          <a:prstGeom prst="rect">
-            <a:avLst/>
-          </a:prstGeom>
-          <a:noFill/>
-          <a:ln/>
-        </p:spPr>
-        <p:txBody>
-          <a:bodyPr wrap="square" lIns="0" tIns="0" rIns="0" bIns="0" rtlCol="0" anchor="ctr"/>
-          <a:lstStyle/>
-          <a:p>
-            <a:pPr algn="ctr" indent="0" marL="0">
-              <a:buNone/>
-            </a:pPr>
-            <a:r>
-              <a:rPr lang="en-US" sz="1500" b="1" dirty="0">
-                <a:solidFill>
-                  <a:srgbClr val="003A63"/>
-                </a:solidFill>
-                <a:latin typeface="Aptos" pitchFamily="34" charset="0"/>
-                <a:ea typeface="Aptos" pitchFamily="34" charset="-122"/>
-                <a:cs typeface="Aptos" pitchFamily="34" charset="-120"/>
-              </a:rPr>
-              <a:t>Risk</a:t>
-            </a:r>
-            <a:endParaRPr lang="en-US" sz="1500" dirty="0"/>
+            <a:off x="7818120" y="3300984"/>
+            <a:ext cx="3090672" cy="877824"/>
+          </a:xfrm>
+          <a:prstGeom prst="rect">
+            <a:avLst/>
+          </a:prstGeom>
+          <a:noFill/>
+          <a:ln/>
+        </p:spPr>
+        <p:txBody>
+          <a:bodyPr wrap="square" lIns="254" tIns="254" rIns="254" bIns="254" rtlCol="0" anchor="t">
+            <a:normAutofit/>
+          </a:bodyPr>
+          <a:lstStyle/>
+          <a:p>
+            <a:r>
+              <a:rPr lang="en-US" sz="1380" dirty="0">
+                <a:solidFill>
+                  <a:srgbClr val="17364A"/>
+                </a:solidFill>
+                <a:latin typeface="Aptos" pitchFamily="34" charset="0"/>
+                <a:ea typeface="Aptos" pitchFamily="34" charset="-122"/>
+                <a:cs typeface="Aptos" pitchFamily="34" charset="-120"/>
+              </a:rPr>
+              <a:t>Where does this topic appear in your agency, program, or workflow?</a:t>
+            </a:r>
+            <a:endParaRPr lang="en-US" sz="1380" dirty="0"/>
+          </a:p>
+          <a:p>
+            <a:r>
+              <a:rPr lang="en-US" sz="1380" dirty="0">
+                <a:solidFill>
+                  <a:srgbClr val="17364A"/>
+                </a:solidFill>
+                <a:latin typeface="Aptos" pitchFamily="34" charset="0"/>
+                <a:ea typeface="Aptos" pitchFamily="34" charset="-122"/>
+                <a:cs typeface="Aptos" pitchFamily="34" charset="-120"/>
+              </a:rPr>
+              <a:t>Which staff roles would need to understand or apply this concept before AI use is approved?</a:t>
+            </a:r>
+            <a:endParaRPr lang="en-US" sz="1380" dirty="0"/>
+          </a:p>
+          <a:p>
+            <a:r>
+              <a:rPr lang="en-US" sz="1380" dirty="0">
+                <a:solidFill>
+                  <a:srgbClr val="17364A"/>
+                </a:solidFill>
+                <a:latin typeface="Aptos" pitchFamily="34" charset="0"/>
+                <a:ea typeface="Aptos" pitchFamily="34" charset="-122"/>
+                <a:cs typeface="Aptos" pitchFamily="34" charset="-120"/>
+              </a:rPr>
+              <a:t>What could go wrong if this topic is not addressed before implementation?</a:t>
+            </a:r>
+            <a:endParaRPr lang="en-US" sz="1380" dirty="0"/>
           </a:p>
         </p:txBody>
       </p:sp>
       <p:sp>
         <p:nvSpPr>
           <p:cNvPr id="16" name="Shape 14"/>
-          <p:cNvSpPr/>
-          <p:nvPr/>
-        </p:nvSpPr>
-        <p:spPr>
-          <a:xfrm>
-            <a:off x="8366760" y="3639312"/>
-            <a:ext cx="2011680" cy="0"/>
-          </a:xfrm>
-          <a:prstGeom prst="line">
-            <a:avLst/>
-          </a:prstGeom>
-          <a:noFill/>
-          <a:ln w="63500">
-            <a:solidFill>
-              <a:srgbClr val="2F8A28"/>
-            </a:solidFill>
-            <a:prstDash val="solid"/>
-          </a:ln>
-        </p:spPr>
-      </p:sp>
-      <p:sp>
-        <p:nvSpPr>
-          <p:cNvPr id="17" name="Text 15"/>
-          <p:cNvSpPr/>
-          <p:nvPr/>
-        </p:nvSpPr>
-        <p:spPr>
-          <a:xfrm>
-            <a:off x="7909560" y="3849624"/>
-            <a:ext cx="2926080" cy="164592"/>
-          </a:xfrm>
-          <a:prstGeom prst="rect">
-            <a:avLst/>
-          </a:prstGeom>
-          <a:noFill/>
-          <a:ln/>
-        </p:spPr>
-        <p:txBody>
-          <a:bodyPr wrap="square" lIns="0" tIns="0" rIns="0" bIns="0" rtlCol="0" anchor="ctr"/>
-          <a:lstStyle/>
-          <a:p>
-            <a:pPr algn="ctr" indent="0" marL="0">
-              <a:buNone/>
-            </a:pPr>
-            <a:r>
-              <a:rPr lang="en-US" sz="900" dirty="0">
-                <a:solidFill>
-                  <a:srgbClr val="003A63"/>
-                </a:solidFill>
-                <a:latin typeface="Aptos" pitchFamily="34" charset="0"/>
-                <a:ea typeface="Aptos" pitchFamily="34" charset="-122"/>
-                <a:cs typeface="Aptos" pitchFamily="34" charset="-120"/>
-              </a:rPr>
-              <a:t>Human review</a:t>
-            </a:r>
-            <a:endParaRPr lang="en-US" sz="900" dirty="0"/>
-          </a:p>
-        </p:txBody>
-      </p:sp>
-      <p:sp>
-        <p:nvSpPr>
-          <p:cNvPr id="18" name="Shape 16"/>
           <p:cNvSpPr/>
           <p:nvPr/>
         </p:nvSpPr>
@@ -7344,7 +7218,7 @@
       </p:sp>
       <p:sp>
         <p:nvSpPr>
-          <p:cNvPr id="19" name="Text 17"/>
+          <p:cNvPr id="17" name="Text 15"/>
           <p:cNvSpPr/>
           <p:nvPr/>
         </p:nvSpPr>
@@ -7383,7 +7257,7 @@
       </p:sp>
       <p:sp>
         <p:nvSpPr>
-          <p:cNvPr id="20" name="Text 18"/>
+          <p:cNvPr id="18" name="Text 16"/>
           <p:cNvSpPr/>
           <p:nvPr/>
         </p:nvSpPr>
@@ -7877,13 +7751,11 @@
             </a:avLst>
           </a:prstGeom>
           <a:solidFill>
-            <a:srgbClr val="FFFFFF">
-              <a:alpha val="88000"/>
-            </a:srgbClr>
+            <a:srgbClr val="FFFFFF"/>
           </a:solidFill>
           <a:ln w="12700">
             <a:solidFill>
-              <a:srgbClr val="D6E8F2"/>
+              <a:srgbClr val="B9D7E6"/>
             </a:solidFill>
             <a:prstDash val="solid"/>
           </a:ln>
@@ -7891,26 +7763,42 @@
       </p:sp>
       <p:sp>
         <p:nvSpPr>
-          <p:cNvPr id="14" name="Shape 12"/>
-          <p:cNvSpPr/>
-          <p:nvPr/>
-        </p:nvSpPr>
-        <p:spPr>
-          <a:xfrm>
-            <a:off x="8046720" y="3108960"/>
-            <a:ext cx="2651760" cy="896112"/>
-          </a:xfrm>
-          <a:prstGeom prst="arc">
-            <a:avLst/>
-          </a:prstGeom>
-          <a:noFill/>
-          <a:ln w="25400">
-            <a:solidFill>
-              <a:srgbClr val="0068B7"/>
-            </a:solidFill>
-            <a:prstDash val="solid"/>
-          </a:ln>
-        </p:spPr>
+          <p:cNvPr id="14" name="Text 12"/>
+          <p:cNvSpPr/>
+          <p:nvPr/>
+        </p:nvSpPr>
+        <p:spPr>
+          <a:xfrm>
+            <a:off x="7799832" y="2935224"/>
+            <a:ext cx="3145536" cy="256032"/>
+          </a:xfrm>
+          <a:prstGeom prst="rect">
+            <a:avLst/>
+          </a:prstGeom>
+          <a:noFill/>
+          <a:ln/>
+        </p:spPr>
+        <p:txBody>
+          <a:bodyPr wrap="square" lIns="0" tIns="0" rIns="0" bIns="0" rtlCol="0" anchor="ctr"/>
+          <a:lstStyle/>
+          <a:p>
+            <a:pPr indent="0" marL="0">
+              <a:buNone/>
+            </a:pPr>
+            <a:r>
+              <a:rPr lang="en-US" sz="1300" b="1" dirty="0">
+                <a:solidFill>
+                  <a:srgbClr val="0068B7"/>
+                </a:solidFill>
+                <a:latin typeface="Aptos" pitchFamily="34" charset="0"/>
+                <a:ea typeface="Aptos" pitchFamily="34" charset="-122"/>
+                <a:cs typeface="Aptos" pitchFamily="34" charset="-120"/>
+              </a:rPr>
+              <a:t>Concept checkpoints</a:t>
+            </a:r>
+            <a:endParaRPr lang="en-US" sz="1300" dirty="0"/>
+          </a:p>
+        </p:txBody>
       </p:sp>
       <p:sp>
         <p:nvSpPr>
@@ -7920,102 +7808,53 @@
         </p:nvSpPr>
         <p:spPr>
           <a:xfrm>
-            <a:off x="7909560" y="3099816"/>
-            <a:ext cx="2926080" cy="256032"/>
-          </a:xfrm>
-          <a:prstGeom prst="rect">
-            <a:avLst/>
-          </a:prstGeom>
-          <a:noFill/>
-          <a:ln/>
-        </p:spPr>
-        <p:txBody>
-          <a:bodyPr wrap="square" lIns="0" tIns="0" rIns="0" bIns="0" rtlCol="0" anchor="ctr"/>
-          <a:lstStyle/>
-          <a:p>
-            <a:pPr algn="ctr" indent="0" marL="0">
-              <a:buNone/>
-            </a:pPr>
-            <a:r>
-              <a:rPr lang="en-US" sz="1500" b="1" dirty="0">
-                <a:solidFill>
-                  <a:srgbClr val="003A63"/>
-                </a:solidFill>
-                <a:latin typeface="Aptos" pitchFamily="34" charset="0"/>
-                <a:ea typeface="Aptos" pitchFamily="34" charset="-122"/>
-                <a:cs typeface="Aptos" pitchFamily="34" charset="-120"/>
-              </a:rPr>
-              <a:t>Risk</a:t>
-            </a:r>
-            <a:endParaRPr lang="en-US" sz="1500" dirty="0"/>
+            <a:off x="7818120" y="3300984"/>
+            <a:ext cx="3090672" cy="877824"/>
+          </a:xfrm>
+          <a:prstGeom prst="rect">
+            <a:avLst/>
+          </a:prstGeom>
+          <a:noFill/>
+          <a:ln/>
+        </p:spPr>
+        <p:txBody>
+          <a:bodyPr wrap="square" lIns="254" tIns="254" rIns="254" bIns="254" rtlCol="0" anchor="t">
+            <a:normAutofit/>
+          </a:bodyPr>
+          <a:lstStyle/>
+          <a:p>
+            <a:r>
+              <a:rPr lang="en-US" sz="1380" dirty="0">
+                <a:solidFill>
+                  <a:srgbClr val="17364A"/>
+                </a:solidFill>
+                <a:latin typeface="Aptos" pitchFamily="34" charset="0"/>
+                <a:ea typeface="Aptos" pitchFamily="34" charset="-122"/>
+                <a:cs typeface="Aptos" pitchFamily="34" charset="-120"/>
+              </a:rPr>
+              <a:t>What evidence would governance, leadership, or operations staff need before moving forward?</a:t>
+            </a:r>
+            <a:endParaRPr lang="en-US" sz="1380" dirty="0"/>
+          </a:p>
+          <a:p>
+            <a:r>
+              <a:rPr lang="en-US" sz="1380" dirty="0">
+                <a:solidFill>
+                  <a:srgbClr val="17364A"/>
+                </a:solidFill>
+                <a:latin typeface="Aptos" pitchFamily="34" charset="0"/>
+                <a:ea typeface="Aptos" pitchFamily="34" charset="-122"/>
+                <a:cs typeface="Aptos" pitchFamily="34" charset="-120"/>
+              </a:rPr>
+              <a:t>Which policy, data, equity, privacy, security, or workflow questions remain unresolved?</a:t>
+            </a:r>
+            <a:endParaRPr lang="en-US" sz="1380" dirty="0"/>
           </a:p>
         </p:txBody>
       </p:sp>
       <p:sp>
         <p:nvSpPr>
           <p:cNvPr id="16" name="Shape 14"/>
-          <p:cNvSpPr/>
-          <p:nvPr/>
-        </p:nvSpPr>
-        <p:spPr>
-          <a:xfrm>
-            <a:off x="8366760" y="3639312"/>
-            <a:ext cx="2011680" cy="0"/>
-          </a:xfrm>
-          <a:prstGeom prst="line">
-            <a:avLst/>
-          </a:prstGeom>
-          <a:noFill/>
-          <a:ln w="63500">
-            <a:solidFill>
-              <a:srgbClr val="2F8A28"/>
-            </a:solidFill>
-            <a:prstDash val="solid"/>
-          </a:ln>
-        </p:spPr>
-      </p:sp>
-      <p:sp>
-        <p:nvSpPr>
-          <p:cNvPr id="17" name="Text 15"/>
-          <p:cNvSpPr/>
-          <p:nvPr/>
-        </p:nvSpPr>
-        <p:spPr>
-          <a:xfrm>
-            <a:off x="7909560" y="3849624"/>
-            <a:ext cx="2926080" cy="164592"/>
-          </a:xfrm>
-          <a:prstGeom prst="rect">
-            <a:avLst/>
-          </a:prstGeom>
-          <a:noFill/>
-          <a:ln/>
-        </p:spPr>
-        <p:txBody>
-          <a:bodyPr wrap="square" lIns="0" tIns="0" rIns="0" bIns="0" rtlCol="0" anchor="ctr"/>
-          <a:lstStyle/>
-          <a:p>
-            <a:pPr algn="ctr" indent="0" marL="0">
-              <a:buNone/>
-            </a:pPr>
-            <a:r>
-              <a:rPr lang="en-US" sz="900" dirty="0">
-                <a:solidFill>
-                  <a:srgbClr val="003A63"/>
-                </a:solidFill>
-                <a:latin typeface="Aptos" pitchFamily="34" charset="0"/>
-                <a:ea typeface="Aptos" pitchFamily="34" charset="-122"/>
-                <a:cs typeface="Aptos" pitchFamily="34" charset="-120"/>
-              </a:rPr>
-              <a:t>Human review</a:t>
-            </a:r>
-            <a:endParaRPr lang="en-US" sz="900" dirty="0"/>
-          </a:p>
-        </p:txBody>
-      </p:sp>
-      <p:sp>
-        <p:nvSpPr>
-          <p:cNvPr id="18" name="Shape 16"/>
           <p:cNvSpPr/>
           <p:nvPr/>
         </p:nvSpPr>
@@ -8042,7 +7881,7 @@
       </p:sp>
       <p:sp>
         <p:nvSpPr>
-          <p:cNvPr id="19" name="Text 17"/>
+          <p:cNvPr id="17" name="Text 15"/>
           <p:cNvSpPr/>
           <p:nvPr/>
         </p:nvSpPr>
@@ -8081,7 +7920,7 @@
       </p:sp>
       <p:sp>
         <p:nvSpPr>
-          <p:cNvPr id="20" name="Text 18"/>
+          <p:cNvPr id="18" name="Text 16"/>
           <p:cNvSpPr/>
           <p:nvPr/>
         </p:nvSpPr>
@@ -8575,13 +8414,11 @@
             </a:avLst>
           </a:prstGeom>
           <a:solidFill>
-            <a:srgbClr val="FFFFFF">
-              <a:alpha val="88000"/>
-            </a:srgbClr>
+            <a:srgbClr val="FFFFFF"/>
           </a:solidFill>
           <a:ln w="12700">
             <a:solidFill>
-              <a:srgbClr val="D6E8F2"/>
+              <a:srgbClr val="B9D7E6"/>
             </a:solidFill>
             <a:prstDash val="solid"/>
           </a:ln>
@@ -8589,26 +8426,42 @@
       </p:sp>
       <p:sp>
         <p:nvSpPr>
-          <p:cNvPr id="14" name="Shape 12"/>
-          <p:cNvSpPr/>
-          <p:nvPr/>
-        </p:nvSpPr>
-        <p:spPr>
-          <a:xfrm>
-            <a:off x="8046720" y="3108960"/>
-            <a:ext cx="2651760" cy="896112"/>
-          </a:xfrm>
-          <a:prstGeom prst="arc">
-            <a:avLst/>
-          </a:prstGeom>
-          <a:noFill/>
-          <a:ln w="25400">
-            <a:solidFill>
-              <a:srgbClr val="0068B7"/>
-            </a:solidFill>
-            <a:prstDash val="solid"/>
-          </a:ln>
-        </p:spPr>
+          <p:cNvPr id="14" name="Text 12"/>
+          <p:cNvSpPr/>
+          <p:nvPr/>
+        </p:nvSpPr>
+        <p:spPr>
+          <a:xfrm>
+            <a:off x="7799832" y="2935224"/>
+            <a:ext cx="3145536" cy="256032"/>
+          </a:xfrm>
+          <a:prstGeom prst="rect">
+            <a:avLst/>
+          </a:prstGeom>
+          <a:noFill/>
+          <a:ln/>
+        </p:spPr>
+        <p:txBody>
+          <a:bodyPr wrap="square" lIns="0" tIns="0" rIns="0" bIns="0" rtlCol="0" anchor="ctr"/>
+          <a:lstStyle/>
+          <a:p>
+            <a:pPr indent="0" marL="0">
+              <a:buNone/>
+            </a:pPr>
+            <a:r>
+              <a:rPr lang="en-US" sz="1300" b="1" dirty="0">
+                <a:solidFill>
+                  <a:srgbClr val="0068B7"/>
+                </a:solidFill>
+                <a:latin typeface="Aptos" pitchFamily="34" charset="0"/>
+                <a:ea typeface="Aptos" pitchFamily="34" charset="-122"/>
+                <a:cs typeface="Aptos" pitchFamily="34" charset="-120"/>
+              </a:rPr>
+              <a:t>Concept checkpoints</a:t>
+            </a:r>
+            <a:endParaRPr lang="en-US" sz="1300" dirty="0"/>
+          </a:p>
+        </p:txBody>
       </p:sp>
       <p:sp>
         <p:nvSpPr>
@@ -8618,102 +8471,53 @@
         </p:nvSpPr>
         <p:spPr>
           <a:xfrm>
-            <a:off x="7909560" y="3099816"/>
-            <a:ext cx="2926080" cy="256032"/>
-          </a:xfrm>
-          <a:prstGeom prst="rect">
-            <a:avLst/>
-          </a:prstGeom>
-          <a:noFill/>
-          <a:ln/>
-        </p:spPr>
-        <p:txBody>
-          <a:bodyPr wrap="square" lIns="0" tIns="0" rIns="0" bIns="0" rtlCol="0" anchor="ctr"/>
-          <a:lstStyle/>
-          <a:p>
-            <a:pPr algn="ctr" indent="0" marL="0">
-              <a:buNone/>
-            </a:pPr>
-            <a:r>
-              <a:rPr lang="en-US" sz="1500" b="1" dirty="0">
-                <a:solidFill>
-                  <a:srgbClr val="003A63"/>
-                </a:solidFill>
-                <a:latin typeface="Aptos" pitchFamily="34" charset="0"/>
-                <a:ea typeface="Aptos" pitchFamily="34" charset="-122"/>
-                <a:cs typeface="Aptos" pitchFamily="34" charset="-120"/>
-              </a:rPr>
-              <a:t>Risk</a:t>
-            </a:r>
-            <a:endParaRPr lang="en-US" sz="1500" dirty="0"/>
+            <a:off x="7818120" y="3300984"/>
+            <a:ext cx="3090672" cy="877824"/>
+          </a:xfrm>
+          <a:prstGeom prst="rect">
+            <a:avLst/>
+          </a:prstGeom>
+          <a:noFill/>
+          <a:ln/>
+        </p:spPr>
+        <p:txBody>
+          <a:bodyPr wrap="square" lIns="254" tIns="254" rIns="254" bIns="254" rtlCol="0" anchor="t">
+            <a:normAutofit/>
+          </a:bodyPr>
+          <a:lstStyle/>
+          <a:p>
+            <a:r>
+              <a:rPr lang="en-US" sz="1380" dirty="0">
+                <a:solidFill>
+                  <a:srgbClr val="17364A"/>
+                </a:solidFill>
+                <a:latin typeface="Aptos" pitchFamily="34" charset="0"/>
+                <a:ea typeface="Aptos" pitchFamily="34" charset="-122"/>
+                <a:cs typeface="Aptos" pitchFamily="34" charset="-120"/>
+              </a:rPr>
+              <a:t>Create an equity evaluation plan for one AI model or AI-supported workflow.</a:t>
+            </a:r>
+            <a:endParaRPr lang="en-US" sz="1380" dirty="0"/>
+          </a:p>
+          <a:p>
+            <a:r>
+              <a:rPr lang="en-US" sz="1380" dirty="0">
+                <a:solidFill>
+                  <a:srgbClr val="17364A"/>
+                </a:solidFill>
+                <a:latin typeface="Aptos" pitchFamily="34" charset="0"/>
+                <a:ea typeface="Aptos" pitchFamily="34" charset="-122"/>
+                <a:cs typeface="Aptos" pitchFamily="34" charset="-120"/>
+              </a:rPr>
+              <a:t>Include intended use, affected populations, relevant subgroups, data representativeness.</a:t>
+            </a:r>
+            <a:endParaRPr lang="en-US" sz="1380" dirty="0"/>
           </a:p>
         </p:txBody>
       </p:sp>
       <p:sp>
         <p:nvSpPr>
           <p:cNvPr id="16" name="Shape 14"/>
-          <p:cNvSpPr/>
-          <p:nvPr/>
-        </p:nvSpPr>
-        <p:spPr>
-          <a:xfrm>
-            <a:off x="8366760" y="3639312"/>
-            <a:ext cx="2011680" cy="0"/>
-          </a:xfrm>
-          <a:prstGeom prst="line">
-            <a:avLst/>
-          </a:prstGeom>
-          <a:noFill/>
-          <a:ln w="63500">
-            <a:solidFill>
-              <a:srgbClr val="2F8A28"/>
-            </a:solidFill>
-            <a:prstDash val="solid"/>
-          </a:ln>
-        </p:spPr>
-      </p:sp>
-      <p:sp>
-        <p:nvSpPr>
-          <p:cNvPr id="17" name="Text 15"/>
-          <p:cNvSpPr/>
-          <p:nvPr/>
-        </p:nvSpPr>
-        <p:spPr>
-          <a:xfrm>
-            <a:off x="7909560" y="3849624"/>
-            <a:ext cx="2926080" cy="164592"/>
-          </a:xfrm>
-          <a:prstGeom prst="rect">
-            <a:avLst/>
-          </a:prstGeom>
-          <a:noFill/>
-          <a:ln/>
-        </p:spPr>
-        <p:txBody>
-          <a:bodyPr wrap="square" lIns="0" tIns="0" rIns="0" bIns="0" rtlCol="0" anchor="ctr"/>
-          <a:lstStyle/>
-          <a:p>
-            <a:pPr algn="ctr" indent="0" marL="0">
-              <a:buNone/>
-            </a:pPr>
-            <a:r>
-              <a:rPr lang="en-US" sz="900" dirty="0">
-                <a:solidFill>
-                  <a:srgbClr val="003A63"/>
-                </a:solidFill>
-                <a:latin typeface="Aptos" pitchFamily="34" charset="0"/>
-                <a:ea typeface="Aptos" pitchFamily="34" charset="-122"/>
-                <a:cs typeface="Aptos" pitchFamily="34" charset="-120"/>
-              </a:rPr>
-              <a:t>Human review</a:t>
-            </a:r>
-            <a:endParaRPr lang="en-US" sz="900" dirty="0"/>
-          </a:p>
-        </p:txBody>
-      </p:sp>
-      <p:sp>
-        <p:nvSpPr>
-          <p:cNvPr id="18" name="Shape 16"/>
           <p:cNvSpPr/>
           <p:nvPr/>
         </p:nvSpPr>
@@ -8740,7 +8544,7 @@
       </p:sp>
       <p:sp>
         <p:nvSpPr>
-          <p:cNvPr id="19" name="Text 17"/>
+          <p:cNvPr id="17" name="Text 15"/>
           <p:cNvSpPr/>
           <p:nvPr/>
         </p:nvSpPr>
@@ -8779,7 +8583,7 @@
       </p:sp>
       <p:sp>
         <p:nvSpPr>
-          <p:cNvPr id="20" name="Text 18"/>
+          <p:cNvPr id="18" name="Text 16"/>
           <p:cNvSpPr/>
           <p:nvPr/>
         </p:nvSpPr>
@@ -9287,13 +9091,11 @@
             </a:avLst>
           </a:prstGeom>
           <a:solidFill>
-            <a:srgbClr val="FFFFFF">
-              <a:alpha val="88000"/>
-            </a:srgbClr>
+            <a:srgbClr val="FFFFFF"/>
           </a:solidFill>
           <a:ln w="12700">
             <a:solidFill>
-              <a:srgbClr val="D6E8F2"/>
+              <a:srgbClr val="B9D7E6"/>
             </a:solidFill>
             <a:prstDash val="solid"/>
           </a:ln>
@@ -9301,26 +9103,42 @@
       </p:sp>
       <p:sp>
         <p:nvSpPr>
-          <p:cNvPr id="14" name="Shape 12"/>
-          <p:cNvSpPr/>
-          <p:nvPr/>
-        </p:nvSpPr>
-        <p:spPr>
-          <a:xfrm>
-            <a:off x="8046720" y="3108960"/>
-            <a:ext cx="2651760" cy="896112"/>
-          </a:xfrm>
-          <a:prstGeom prst="arc">
-            <a:avLst/>
-          </a:prstGeom>
-          <a:noFill/>
-          <a:ln w="25400">
-            <a:solidFill>
-              <a:srgbClr val="0068B7"/>
-            </a:solidFill>
-            <a:prstDash val="solid"/>
-          </a:ln>
-        </p:spPr>
+          <p:cNvPr id="14" name="Text 12"/>
+          <p:cNvSpPr/>
+          <p:nvPr/>
+        </p:nvSpPr>
+        <p:spPr>
+          <a:xfrm>
+            <a:off x="7799832" y="2935224"/>
+            <a:ext cx="3145536" cy="256032"/>
+          </a:xfrm>
+          <a:prstGeom prst="rect">
+            <a:avLst/>
+          </a:prstGeom>
+          <a:noFill/>
+          <a:ln/>
+        </p:spPr>
+        <p:txBody>
+          <a:bodyPr wrap="square" lIns="0" tIns="0" rIns="0" bIns="0" rtlCol="0" anchor="ctr"/>
+          <a:lstStyle/>
+          <a:p>
+            <a:pPr indent="0" marL="0">
+              <a:buNone/>
+            </a:pPr>
+            <a:r>
+              <a:rPr lang="en-US" sz="1300" b="1" dirty="0">
+                <a:solidFill>
+                  <a:srgbClr val="0068B7"/>
+                </a:solidFill>
+                <a:latin typeface="Aptos" pitchFamily="34" charset="0"/>
+                <a:ea typeface="Aptos" pitchFamily="34" charset="-122"/>
+                <a:cs typeface="Aptos" pitchFamily="34" charset="-120"/>
+              </a:rPr>
+              <a:t>Concept checkpoints</a:t>
+            </a:r>
+            <a:endParaRPr lang="en-US" sz="1300" dirty="0"/>
+          </a:p>
+        </p:txBody>
       </p:sp>
       <p:sp>
         <p:nvSpPr>
@@ -9330,102 +9148,67 @@
         </p:nvSpPr>
         <p:spPr>
           <a:xfrm>
-            <a:off x="7909560" y="3099816"/>
-            <a:ext cx="2926080" cy="256032"/>
-          </a:xfrm>
-          <a:prstGeom prst="rect">
-            <a:avLst/>
-          </a:prstGeom>
-          <a:noFill/>
-          <a:ln/>
-        </p:spPr>
-        <p:txBody>
-          <a:bodyPr wrap="square" lIns="0" tIns="0" rIns="0" bIns="0" rtlCol="0" anchor="ctr"/>
-          <a:lstStyle/>
-          <a:p>
-            <a:pPr algn="ctr" indent="0" marL="0">
-              <a:buNone/>
-            </a:pPr>
-            <a:r>
-              <a:rPr lang="en-US" sz="1500" b="1" dirty="0">
-                <a:solidFill>
-                  <a:srgbClr val="003A63"/>
-                </a:solidFill>
-                <a:latin typeface="Aptos" pitchFamily="34" charset="0"/>
-                <a:ea typeface="Aptos" pitchFamily="34" charset="-122"/>
-                <a:cs typeface="Aptos" pitchFamily="34" charset="-120"/>
-              </a:rPr>
-              <a:t>Risk</a:t>
-            </a:r>
-            <a:endParaRPr lang="en-US" sz="1500" dirty="0"/>
+            <a:off x="7818120" y="3300984"/>
+            <a:ext cx="3090672" cy="877824"/>
+          </a:xfrm>
+          <a:prstGeom prst="rect">
+            <a:avLst/>
+          </a:prstGeom>
+          <a:noFill/>
+          <a:ln/>
+        </p:spPr>
+        <p:txBody>
+          <a:bodyPr wrap="square" lIns="254" tIns="254" rIns="254" bIns="254" rtlCol="0" anchor="t">
+            <a:normAutofit/>
+          </a:bodyPr>
+          <a:lstStyle/>
+          <a:p>
+            <a:r>
+              <a:rPr lang="en-US" sz="1380" dirty="0">
+                <a:solidFill>
+                  <a:srgbClr val="17364A"/>
+                </a:solidFill>
+                <a:latin typeface="Aptos" pitchFamily="34" charset="0"/>
+                <a:ea typeface="Aptos" pitchFamily="34" charset="-122"/>
+                <a:cs typeface="Aptos" pitchFamily="34" charset="-120"/>
+              </a:rPr>
+              <a:t>Equity evaluation plan</a:t>
+            </a:r>
+            <a:endParaRPr lang="en-US" sz="1380" dirty="0"/>
+          </a:p>
+          <a:p>
+            <a:r>
+              <a:rPr lang="en-US" sz="1380" dirty="0">
+                <a:solidFill>
+                  <a:srgbClr val="17364A"/>
+                </a:solidFill>
+                <a:latin typeface="Aptos" pitchFamily="34" charset="0"/>
+                <a:ea typeface="Aptos" pitchFamily="34" charset="-122"/>
+                <a:cs typeface="Aptos" pitchFamily="34" charset="-120"/>
+              </a:rPr>
+              <a:t>Subgroup and data representativeness review</a:t>
+            </a:r>
+            <a:endParaRPr lang="en-US" sz="1380" dirty="0"/>
+          </a:p>
+          <a:p>
+            <a:r>
+              <a:rPr lang="en-US" sz="1380" dirty="0">
+                <a:solidFill>
+                  <a:srgbClr val="17364A"/>
+                </a:solidFill>
+                <a:latin typeface="Aptos" pitchFamily="34" charset="0"/>
+                <a:ea typeface="Aptos" pitchFamily="34" charset="-122"/>
+                <a:cs typeface="Aptos" pitchFamily="34" charset="-120"/>
+              </a:rPr>
+              <a:t>Potential harm and mitigation table</a:t>
+            </a:r>
+            <a:endParaRPr lang="en-US" sz="1380" dirty="0"/>
           </a:p>
         </p:txBody>
       </p:sp>
       <p:sp>
         <p:nvSpPr>
           <p:cNvPr id="16" name="Shape 14"/>
-          <p:cNvSpPr/>
-          <p:nvPr/>
-        </p:nvSpPr>
-        <p:spPr>
-          <a:xfrm>
-            <a:off x="8366760" y="3639312"/>
-            <a:ext cx="2011680" cy="0"/>
-          </a:xfrm>
-          <a:prstGeom prst="line">
-            <a:avLst/>
-          </a:prstGeom>
-          <a:noFill/>
-          <a:ln w="63500">
-            <a:solidFill>
-              <a:srgbClr val="2F8A28"/>
-            </a:solidFill>
-            <a:prstDash val="solid"/>
-          </a:ln>
-        </p:spPr>
-      </p:sp>
-      <p:sp>
-        <p:nvSpPr>
-          <p:cNvPr id="17" name="Text 15"/>
-          <p:cNvSpPr/>
-          <p:nvPr/>
-        </p:nvSpPr>
-        <p:spPr>
-          <a:xfrm>
-            <a:off x="7909560" y="3849624"/>
-            <a:ext cx="2926080" cy="164592"/>
-          </a:xfrm>
-          <a:prstGeom prst="rect">
-            <a:avLst/>
-          </a:prstGeom>
-          <a:noFill/>
-          <a:ln/>
-        </p:spPr>
-        <p:txBody>
-          <a:bodyPr wrap="square" lIns="0" tIns="0" rIns="0" bIns="0" rtlCol="0" anchor="ctr"/>
-          <a:lstStyle/>
-          <a:p>
-            <a:pPr algn="ctr" indent="0" marL="0">
-              <a:buNone/>
-            </a:pPr>
-            <a:r>
-              <a:rPr lang="en-US" sz="900" dirty="0">
-                <a:solidFill>
-                  <a:srgbClr val="003A63"/>
-                </a:solidFill>
-                <a:latin typeface="Aptos" pitchFamily="34" charset="0"/>
-                <a:ea typeface="Aptos" pitchFamily="34" charset="-122"/>
-                <a:cs typeface="Aptos" pitchFamily="34" charset="-120"/>
-              </a:rPr>
-              <a:t>Human review</a:t>
-            </a:r>
-            <a:endParaRPr lang="en-US" sz="900" dirty="0"/>
-          </a:p>
-        </p:txBody>
-      </p:sp>
-      <p:sp>
-        <p:nvSpPr>
-          <p:cNvPr id="18" name="Shape 16"/>
           <p:cNvSpPr/>
           <p:nvPr/>
         </p:nvSpPr>
@@ -9452,7 +9235,7 @@
       </p:sp>
       <p:sp>
         <p:nvSpPr>
-          <p:cNvPr id="19" name="Text 17"/>
+          <p:cNvPr id="17" name="Text 15"/>
           <p:cNvSpPr/>
           <p:nvPr/>
         </p:nvSpPr>
@@ -9491,7 +9274,7 @@
       </p:sp>
       <p:sp>
         <p:nvSpPr>
-          <p:cNvPr id="20" name="Text 18"/>
+          <p:cNvPr id="18" name="Text 16"/>
           <p:cNvSpPr/>
           <p:nvPr/>
         </p:nvSpPr>
@@ -9985,13 +9768,11 @@
             </a:avLst>
           </a:prstGeom>
           <a:solidFill>
-            <a:srgbClr val="FFFFFF">
-              <a:alpha val="88000"/>
-            </a:srgbClr>
+            <a:srgbClr val="FFFFFF"/>
           </a:solidFill>
           <a:ln w="12700">
             <a:solidFill>
-              <a:srgbClr val="D6E8F2"/>
+              <a:srgbClr val="B9D7E6"/>
             </a:solidFill>
             <a:prstDash val="solid"/>
           </a:ln>
@@ -9999,26 +9780,42 @@
       </p:sp>
       <p:sp>
         <p:nvSpPr>
-          <p:cNvPr id="14" name="Shape 12"/>
-          <p:cNvSpPr/>
-          <p:nvPr/>
-        </p:nvSpPr>
-        <p:spPr>
-          <a:xfrm>
-            <a:off x="8046720" y="3108960"/>
-            <a:ext cx="2651760" cy="896112"/>
-          </a:xfrm>
-          <a:prstGeom prst="arc">
-            <a:avLst/>
-          </a:prstGeom>
-          <a:noFill/>
-          <a:ln w="25400">
-            <a:solidFill>
-              <a:srgbClr val="0068B7"/>
-            </a:solidFill>
-            <a:prstDash val="solid"/>
-          </a:ln>
-        </p:spPr>
+          <p:cNvPr id="14" name="Text 12"/>
+          <p:cNvSpPr/>
+          <p:nvPr/>
+        </p:nvSpPr>
+        <p:spPr>
+          <a:xfrm>
+            <a:off x="7799832" y="2935224"/>
+            <a:ext cx="3145536" cy="256032"/>
+          </a:xfrm>
+          <a:prstGeom prst="rect">
+            <a:avLst/>
+          </a:prstGeom>
+          <a:noFill/>
+          <a:ln/>
+        </p:spPr>
+        <p:txBody>
+          <a:bodyPr wrap="square" lIns="0" tIns="0" rIns="0" bIns="0" rtlCol="0" anchor="ctr"/>
+          <a:lstStyle/>
+          <a:p>
+            <a:pPr indent="0" marL="0">
+              <a:buNone/>
+            </a:pPr>
+            <a:r>
+              <a:rPr lang="en-US" sz="1300" b="1" dirty="0">
+                <a:solidFill>
+                  <a:srgbClr val="0068B7"/>
+                </a:solidFill>
+                <a:latin typeface="Aptos" pitchFamily="34" charset="0"/>
+                <a:ea typeface="Aptos" pitchFamily="34" charset="-122"/>
+                <a:cs typeface="Aptos" pitchFamily="34" charset="-120"/>
+              </a:rPr>
+              <a:t>Concept checkpoints</a:t>
+            </a:r>
+            <a:endParaRPr lang="en-US" sz="1300" dirty="0"/>
+          </a:p>
+        </p:txBody>
       </p:sp>
       <p:sp>
         <p:nvSpPr>
@@ -10028,102 +9825,53 @@
         </p:nvSpPr>
         <p:spPr>
           <a:xfrm>
-            <a:off x="7909560" y="3099816"/>
-            <a:ext cx="2926080" cy="256032"/>
-          </a:xfrm>
-          <a:prstGeom prst="rect">
-            <a:avLst/>
-          </a:prstGeom>
-          <a:noFill/>
-          <a:ln/>
-        </p:spPr>
-        <p:txBody>
-          <a:bodyPr wrap="square" lIns="0" tIns="0" rIns="0" bIns="0" rtlCol="0" anchor="ctr"/>
-          <a:lstStyle/>
-          <a:p>
-            <a:pPr algn="ctr" indent="0" marL="0">
-              <a:buNone/>
-            </a:pPr>
-            <a:r>
-              <a:rPr lang="en-US" sz="1500" b="1" dirty="0">
-                <a:solidFill>
-                  <a:srgbClr val="003A63"/>
-                </a:solidFill>
-                <a:latin typeface="Aptos" pitchFamily="34" charset="0"/>
-                <a:ea typeface="Aptos" pitchFamily="34" charset="-122"/>
-                <a:cs typeface="Aptos" pitchFamily="34" charset="-120"/>
-              </a:rPr>
-              <a:t>Risk</a:t>
-            </a:r>
-            <a:endParaRPr lang="en-US" sz="1500" dirty="0"/>
+            <a:off x="7818120" y="3300984"/>
+            <a:ext cx="3090672" cy="877824"/>
+          </a:xfrm>
+          <a:prstGeom prst="rect">
+            <a:avLst/>
+          </a:prstGeom>
+          <a:noFill/>
+          <a:ln/>
+        </p:spPr>
+        <p:txBody>
+          <a:bodyPr wrap="square" lIns="254" tIns="254" rIns="254" bIns="254" rtlCol="0" anchor="t">
+            <a:normAutofit/>
+          </a:bodyPr>
+          <a:lstStyle/>
+          <a:p>
+            <a:r>
+              <a:rPr lang="en-US" sz="1380" dirty="0">
+                <a:solidFill>
+                  <a:srgbClr val="17364A"/>
+                </a:solidFill>
+                <a:latin typeface="Aptos" pitchFamily="34" charset="0"/>
+                <a:ea typeface="Aptos" pitchFamily="34" charset="-122"/>
+                <a:cs typeface="Aptos" pitchFamily="34" charset="-120"/>
+              </a:rPr>
+              <a:t>Equity monitoring indicators</a:t>
+            </a:r>
+            <a:endParaRPr lang="en-US" sz="1380" dirty="0"/>
+          </a:p>
+          <a:p>
+            <a:r>
+              <a:rPr lang="en-US" sz="1380" dirty="0">
+                <a:solidFill>
+                  <a:srgbClr val="17364A"/>
+                </a:solidFill>
+                <a:latin typeface="Aptos" pitchFamily="34" charset="0"/>
+                <a:ea typeface="Aptos" pitchFamily="34" charset="-122"/>
+                <a:cs typeface="Aptos" pitchFamily="34" charset="-120"/>
+              </a:rPr>
+              <a:t>Governance recommendation</a:t>
+            </a:r>
+            <a:endParaRPr lang="en-US" sz="1380" dirty="0"/>
           </a:p>
         </p:txBody>
       </p:sp>
       <p:sp>
         <p:nvSpPr>
           <p:cNvPr id="16" name="Shape 14"/>
-          <p:cNvSpPr/>
-          <p:nvPr/>
-        </p:nvSpPr>
-        <p:spPr>
-          <a:xfrm>
-            <a:off x="8366760" y="3639312"/>
-            <a:ext cx="2011680" cy="0"/>
-          </a:xfrm>
-          <a:prstGeom prst="line">
-            <a:avLst/>
-          </a:prstGeom>
-          <a:noFill/>
-          <a:ln w="63500">
-            <a:solidFill>
-              <a:srgbClr val="2F8A28"/>
-            </a:solidFill>
-            <a:prstDash val="solid"/>
-          </a:ln>
-        </p:spPr>
-      </p:sp>
-      <p:sp>
-        <p:nvSpPr>
-          <p:cNvPr id="17" name="Text 15"/>
-          <p:cNvSpPr/>
-          <p:nvPr/>
-        </p:nvSpPr>
-        <p:spPr>
-          <a:xfrm>
-            <a:off x="7909560" y="3849624"/>
-            <a:ext cx="2926080" cy="164592"/>
-          </a:xfrm>
-          <a:prstGeom prst="rect">
-            <a:avLst/>
-          </a:prstGeom>
-          <a:noFill/>
-          <a:ln/>
-        </p:spPr>
-        <p:txBody>
-          <a:bodyPr wrap="square" lIns="0" tIns="0" rIns="0" bIns="0" rtlCol="0" anchor="ctr"/>
-          <a:lstStyle/>
-          <a:p>
-            <a:pPr algn="ctr" indent="0" marL="0">
-              <a:buNone/>
-            </a:pPr>
-            <a:r>
-              <a:rPr lang="en-US" sz="900" dirty="0">
-                <a:solidFill>
-                  <a:srgbClr val="003A63"/>
-                </a:solidFill>
-                <a:latin typeface="Aptos" pitchFamily="34" charset="0"/>
-                <a:ea typeface="Aptos" pitchFamily="34" charset="-122"/>
-                <a:cs typeface="Aptos" pitchFamily="34" charset="-120"/>
-              </a:rPr>
-              <a:t>Human review</a:t>
-            </a:r>
-            <a:endParaRPr lang="en-US" sz="900" dirty="0"/>
-          </a:p>
-        </p:txBody>
-      </p:sp>
-      <p:sp>
-        <p:nvSpPr>
-          <p:cNvPr id="18" name="Shape 16"/>
           <p:cNvSpPr/>
           <p:nvPr/>
         </p:nvSpPr>
@@ -10150,7 +9898,7 @@
       </p:sp>
       <p:sp>
         <p:nvSpPr>
-          <p:cNvPr id="19" name="Text 17"/>
+          <p:cNvPr id="17" name="Text 15"/>
           <p:cNvSpPr/>
           <p:nvPr/>
         </p:nvSpPr>
@@ -10189,7 +9937,7 @@
       </p:sp>
       <p:sp>
         <p:nvSpPr>
-          <p:cNvPr id="20" name="Text 18"/>
+          <p:cNvPr id="18" name="Text 16"/>
           <p:cNvSpPr/>
           <p:nvPr/>
         </p:nvSpPr>
@@ -10722,20 +10470,20 @@
         </p:nvSpPr>
         <p:spPr>
           <a:xfrm>
-            <a:off x="7635240" y="3730752"/>
-            <a:ext cx="1033272" cy="749808"/>
+            <a:off x="7909560" y="3675888"/>
+            <a:ext cx="3154680" cy="1691640"/>
           </a:xfrm>
           <a:prstGeom prst="roundRect">
             <a:avLst>
-              <a:gd name="adj" fmla="val 14634"/>
+              <a:gd name="adj" fmla="val 6486"/>
             </a:avLst>
           </a:prstGeom>
           <a:solidFill>
-            <a:srgbClr val="0068B7"/>
+            <a:srgbClr val="FFFFFF"/>
           </a:solidFill>
           <a:ln w="12700">
             <a:solidFill>
-              <a:srgbClr val="0068B7"/>
+              <a:srgbClr val="B9D7E6"/>
             </a:solidFill>
             <a:prstDash val="solid"/>
           </a:ln>
@@ -10749,172 +10497,100 @@
         </p:nvSpPr>
         <p:spPr>
           <a:xfrm>
-            <a:off x="7708392" y="3922776"/>
-            <a:ext cx="886968" cy="310896"/>
-          </a:xfrm>
-          <a:prstGeom prst="rect">
-            <a:avLst/>
-          </a:prstGeom>
-          <a:noFill/>
-          <a:ln/>
-        </p:spPr>
-        <p:txBody>
-          <a:bodyPr wrap="square" lIns="0" tIns="0" rIns="0" bIns="0" rtlCol="0" anchor="ctr">
+            <a:off x="8074152" y="3822192"/>
+            <a:ext cx="2825496" cy="256032"/>
+          </a:xfrm>
+          <a:prstGeom prst="rect">
+            <a:avLst/>
+          </a:prstGeom>
+          <a:noFill/>
+          <a:ln/>
+        </p:spPr>
+        <p:txBody>
+          <a:bodyPr wrap="square" lIns="0" tIns="0" rIns="0" bIns="0" rtlCol="0" anchor="ctr"/>
+          <a:lstStyle/>
+          <a:p>
+            <a:pPr indent="0" marL="0">
+              <a:buNone/>
+            </a:pPr>
+            <a:r>
+              <a:rPr lang="en-US" sz="1300" b="1" dirty="0">
+                <a:solidFill>
+                  <a:srgbClr val="0068B7"/>
+                </a:solidFill>
+                <a:latin typeface="Aptos" pitchFamily="34" charset="0"/>
+                <a:ea typeface="Aptos" pitchFamily="34" charset="-122"/>
+                <a:cs typeface="Aptos" pitchFamily="34" charset="-120"/>
+              </a:rPr>
+              <a:t>Learning sequence</a:t>
+            </a:r>
+            <a:endParaRPr lang="en-US" sz="1300" dirty="0"/>
+          </a:p>
+        </p:txBody>
+      </p:sp>
+      <p:sp>
+        <p:nvSpPr>
+          <p:cNvPr id="15" name="Text 13"/>
+          <p:cNvSpPr/>
+          <p:nvPr/>
+        </p:nvSpPr>
+        <p:spPr>
+          <a:xfrm>
+            <a:off x="8092440" y="4187952"/>
+            <a:ext cx="2770632" cy="1033272"/>
+          </a:xfrm>
+          <a:prstGeom prst="rect">
+            <a:avLst/>
+          </a:prstGeom>
+          <a:noFill/>
+          <a:ln/>
+        </p:spPr>
+        <p:txBody>
+          <a:bodyPr wrap="square" lIns="254" tIns="254" rIns="254" bIns="254" rtlCol="0" anchor="t">
             <a:normAutofit/>
           </a:bodyPr>
           <a:lstStyle/>
           <a:p>
-            <a:pPr algn="ctr" indent="0" marL="0">
-              <a:buNone/>
-            </a:pPr>
-            <a:r>
-              <a:rPr lang="en-US" sz="1500" b="1" dirty="0">
-                <a:solidFill>
-                  <a:srgbClr val="FFFFFF"/>
-                </a:solidFill>
-                <a:latin typeface="Aptos" pitchFamily="34" charset="0"/>
-                <a:ea typeface="Aptos" pitchFamily="34" charset="-122"/>
-                <a:cs typeface="Aptos" pitchFamily="34" charset="-120"/>
-              </a:rPr>
-              <a:t>Learn</a:t>
-            </a:r>
-            <a:endParaRPr lang="en-US" sz="1500" dirty="0"/>
-          </a:p>
-        </p:txBody>
-      </p:sp>
-      <p:sp>
-        <p:nvSpPr>
-          <p:cNvPr id="15" name="Shape 13"/>
-          <p:cNvSpPr/>
-          <p:nvPr/>
-        </p:nvSpPr>
-        <p:spPr>
-          <a:xfrm>
-            <a:off x="8924544" y="3730752"/>
-            <a:ext cx="1033272" cy="749808"/>
-          </a:xfrm>
-          <a:prstGeom prst="roundRect">
-            <a:avLst>
-              <a:gd name="adj" fmla="val 14634"/>
-            </a:avLst>
-          </a:prstGeom>
-          <a:solidFill>
-            <a:srgbClr val="2F8A28"/>
-          </a:solidFill>
-          <a:ln w="12700">
-            <a:solidFill>
-              <a:srgbClr val="2F8A28"/>
-            </a:solidFill>
-            <a:prstDash val="solid"/>
-          </a:ln>
-        </p:spPr>
-      </p:sp>
-      <p:sp>
-        <p:nvSpPr>
-          <p:cNvPr id="16" name="Text 14"/>
-          <p:cNvSpPr/>
-          <p:nvPr/>
-        </p:nvSpPr>
-        <p:spPr>
-          <a:xfrm>
-            <a:off x="8997696" y="3922776"/>
-            <a:ext cx="886968" cy="310896"/>
-          </a:xfrm>
-          <a:prstGeom prst="rect">
-            <a:avLst/>
-          </a:prstGeom>
-          <a:noFill/>
-          <a:ln/>
-        </p:spPr>
-        <p:txBody>
-          <a:bodyPr wrap="square" lIns="0" tIns="0" rIns="0" bIns="0" rtlCol="0" anchor="ctr">
-            <a:normAutofit/>
-          </a:bodyPr>
-          <a:lstStyle/>
-          <a:p>
-            <a:pPr algn="ctr" indent="0" marL="0">
-              <a:buNone/>
-            </a:pPr>
-            <a:r>
-              <a:rPr lang="en-US" sz="1500" b="1" dirty="0">
-                <a:solidFill>
-                  <a:srgbClr val="FFFFFF"/>
-                </a:solidFill>
-                <a:latin typeface="Aptos" pitchFamily="34" charset="0"/>
-                <a:ea typeface="Aptos" pitchFamily="34" charset="-122"/>
-                <a:cs typeface="Aptos" pitchFamily="34" charset="-120"/>
-              </a:rPr>
-              <a:t>Apply</a:t>
-            </a:r>
-            <a:endParaRPr lang="en-US" sz="1500" dirty="0"/>
-          </a:p>
-        </p:txBody>
-      </p:sp>
-      <p:sp>
-        <p:nvSpPr>
-          <p:cNvPr id="17" name="Shape 15"/>
-          <p:cNvSpPr/>
-          <p:nvPr/>
-        </p:nvSpPr>
-        <p:spPr>
-          <a:xfrm>
-            <a:off x="10213848" y="3730752"/>
-            <a:ext cx="1033272" cy="749808"/>
-          </a:xfrm>
-          <a:prstGeom prst="roundRect">
-            <a:avLst>
-              <a:gd name="adj" fmla="val 14634"/>
-            </a:avLst>
-          </a:prstGeom>
-          <a:solidFill>
-            <a:srgbClr val="6A4CA3"/>
-          </a:solidFill>
-          <a:ln w="12700">
-            <a:solidFill>
-              <a:srgbClr val="6A4CA3"/>
-            </a:solidFill>
-            <a:prstDash val="solid"/>
-          </a:ln>
-        </p:spPr>
-      </p:sp>
-      <p:sp>
-        <p:nvSpPr>
-          <p:cNvPr id="18" name="Text 16"/>
-          <p:cNvSpPr/>
-          <p:nvPr/>
-        </p:nvSpPr>
-        <p:spPr>
-          <a:xfrm>
-            <a:off x="10287000" y="3922776"/>
-            <a:ext cx="886968" cy="310896"/>
-          </a:xfrm>
-          <a:prstGeom prst="rect">
-            <a:avLst/>
-          </a:prstGeom>
-          <a:noFill/>
-          <a:ln/>
-        </p:spPr>
-        <p:txBody>
-          <a:bodyPr wrap="square" lIns="0" tIns="0" rIns="0" bIns="0" rtlCol="0" anchor="ctr">
-            <a:normAutofit/>
-          </a:bodyPr>
-          <a:lstStyle/>
-          <a:p>
-            <a:pPr algn="ctr" indent="0" marL="0">
-              <a:buNone/>
-            </a:pPr>
-            <a:r>
-              <a:rPr lang="en-US" sz="1500" b="1" dirty="0">
-                <a:solidFill>
-                  <a:srgbClr val="FFFFFF"/>
-                </a:solidFill>
-                <a:latin typeface="Aptos" pitchFamily="34" charset="0"/>
-                <a:ea typeface="Aptos" pitchFamily="34" charset="-122"/>
-                <a:cs typeface="Aptos" pitchFamily="34" charset="-120"/>
-              </a:rPr>
-              <a:t>Document</a:t>
-            </a:r>
-            <a:endParaRPr lang="en-US" sz="1500" dirty="0"/>
+            <a:r>
+              <a:rPr lang="en-US" sz="1380" dirty="0">
+                <a:solidFill>
+                  <a:srgbClr val="17364A"/>
+                </a:solidFill>
+                <a:latin typeface="Aptos" pitchFamily="34" charset="0"/>
+                <a:ea typeface="Aptos" pitchFamily="34" charset="-122"/>
+                <a:cs typeface="Aptos" pitchFamily="34" charset="-120"/>
+              </a:rPr>
+              <a:t>Read the module for shared vocabulary and context.</a:t>
+            </a:r>
+            <a:endParaRPr lang="en-US" sz="1380" dirty="0"/>
+          </a:p>
+          <a:p>
+            <a:r>
+              <a:rPr lang="en-US" sz="1380" dirty="0">
+                <a:solidFill>
+                  <a:srgbClr val="17364A"/>
+                </a:solidFill>
+                <a:latin typeface="Aptos" pitchFamily="34" charset="0"/>
+                <a:ea typeface="Aptos" pitchFamily="34" charset="-122"/>
+                <a:cs typeface="Aptos" pitchFamily="34" charset="-120"/>
+              </a:rPr>
+              <a:t>Complete the practical exercise to apply the concept.</a:t>
+            </a:r>
+            <a:endParaRPr lang="en-US" sz="1380" dirty="0"/>
+          </a:p>
+          <a:p>
+            <a:r>
+              <a:rPr lang="en-US" sz="1380" dirty="0">
+                <a:solidFill>
+                  <a:srgbClr val="17364A"/>
+                </a:solidFill>
+                <a:latin typeface="Aptos" pitchFamily="34" charset="0"/>
+                <a:ea typeface="Aptos" pitchFamily="34" charset="-122"/>
+                <a:cs typeface="Aptos" pitchFamily="34" charset="-120"/>
+              </a:rPr>
+              <a:t>Use the notes and references for deeper review.</a:t>
+            </a:r>
+            <a:endParaRPr lang="en-US" sz="1380" dirty="0"/>
           </a:p>
         </p:txBody>
       </p:sp>
@@ -11387,13 +11063,11 @@
             </a:avLst>
           </a:prstGeom>
           <a:solidFill>
-            <a:srgbClr val="FFFFFF">
-              <a:alpha val="88000"/>
-            </a:srgbClr>
+            <a:srgbClr val="FFFFFF"/>
           </a:solidFill>
           <a:ln w="12700">
             <a:solidFill>
-              <a:srgbClr val="D6E8F2"/>
+              <a:srgbClr val="B9D7E6"/>
             </a:solidFill>
             <a:prstDash val="solid"/>
           </a:ln>
@@ -11401,26 +11075,42 @@
       </p:sp>
       <p:sp>
         <p:nvSpPr>
-          <p:cNvPr id="14" name="Shape 12"/>
-          <p:cNvSpPr/>
-          <p:nvPr/>
-        </p:nvSpPr>
-        <p:spPr>
-          <a:xfrm>
-            <a:off x="8046720" y="3108960"/>
-            <a:ext cx="2651760" cy="896112"/>
-          </a:xfrm>
-          <a:prstGeom prst="arc">
-            <a:avLst/>
-          </a:prstGeom>
-          <a:noFill/>
-          <a:ln w="25400">
-            <a:solidFill>
-              <a:srgbClr val="0068B7"/>
-            </a:solidFill>
-            <a:prstDash val="solid"/>
-          </a:ln>
-        </p:spPr>
+          <p:cNvPr id="14" name="Text 12"/>
+          <p:cNvSpPr/>
+          <p:nvPr/>
+        </p:nvSpPr>
+        <p:spPr>
+          <a:xfrm>
+            <a:off x="7799832" y="2935224"/>
+            <a:ext cx="3145536" cy="256032"/>
+          </a:xfrm>
+          <a:prstGeom prst="rect">
+            <a:avLst/>
+          </a:prstGeom>
+          <a:noFill/>
+          <a:ln/>
+        </p:spPr>
+        <p:txBody>
+          <a:bodyPr wrap="square" lIns="0" tIns="0" rIns="0" bIns="0" rtlCol="0" anchor="ctr"/>
+          <a:lstStyle/>
+          <a:p>
+            <a:pPr indent="0" marL="0">
+              <a:buNone/>
+            </a:pPr>
+            <a:r>
+              <a:rPr lang="en-US" sz="1300" b="1" dirty="0">
+                <a:solidFill>
+                  <a:srgbClr val="0068B7"/>
+                </a:solidFill>
+                <a:latin typeface="Aptos" pitchFamily="34" charset="0"/>
+                <a:ea typeface="Aptos" pitchFamily="34" charset="-122"/>
+                <a:cs typeface="Aptos" pitchFamily="34" charset="-120"/>
+              </a:rPr>
+              <a:t>Concept checkpoints</a:t>
+            </a:r>
+            <a:endParaRPr lang="en-US" sz="1300" dirty="0"/>
+          </a:p>
+        </p:txBody>
       </p:sp>
       <p:sp>
         <p:nvSpPr>
@@ -11430,102 +11120,53 @@
         </p:nvSpPr>
         <p:spPr>
           <a:xfrm>
-            <a:off x="7909560" y="3099816"/>
-            <a:ext cx="2926080" cy="256032"/>
-          </a:xfrm>
-          <a:prstGeom prst="rect">
-            <a:avLst/>
-          </a:prstGeom>
-          <a:noFill/>
-          <a:ln/>
-        </p:spPr>
-        <p:txBody>
-          <a:bodyPr wrap="square" lIns="0" tIns="0" rIns="0" bIns="0" rtlCol="0" anchor="ctr"/>
-          <a:lstStyle/>
-          <a:p>
-            <a:pPr algn="ctr" indent="0" marL="0">
-              <a:buNone/>
-            </a:pPr>
-            <a:r>
-              <a:rPr lang="en-US" sz="1500" b="1" dirty="0">
-                <a:solidFill>
-                  <a:srgbClr val="003A63"/>
-                </a:solidFill>
-                <a:latin typeface="Aptos" pitchFamily="34" charset="0"/>
-                <a:ea typeface="Aptos" pitchFamily="34" charset="-122"/>
-                <a:cs typeface="Aptos" pitchFamily="34" charset="-120"/>
-              </a:rPr>
-              <a:t>Risk</a:t>
-            </a:r>
-            <a:endParaRPr lang="en-US" sz="1500" dirty="0"/>
+            <a:off x="7818120" y="3300984"/>
+            <a:ext cx="3090672" cy="877824"/>
+          </a:xfrm>
+          <a:prstGeom prst="rect">
+            <a:avLst/>
+          </a:prstGeom>
+          <a:noFill/>
+          <a:ln/>
+        </p:spPr>
+        <p:txBody>
+          <a:bodyPr wrap="square" lIns="254" tIns="254" rIns="254" bIns="254" rtlCol="0" anchor="t">
+            <a:normAutofit/>
+          </a:bodyPr>
+          <a:lstStyle/>
+          <a:p>
+            <a:r>
+              <a:rPr lang="en-US" sz="1380" dirty="0">
+                <a:solidFill>
+                  <a:srgbClr val="17364A"/>
+                </a:solidFill>
+                <a:latin typeface="Aptos" pitchFamily="34" charset="0"/>
+                <a:ea typeface="Aptos" pitchFamily="34" charset="-122"/>
+                <a:cs typeface="Aptos" pitchFamily="34" charset="-120"/>
+              </a:rPr>
+              <a:t>Equity monitoring indicators</a:t>
+            </a:r>
+            <a:endParaRPr lang="en-US" sz="1380" dirty="0"/>
+          </a:p>
+          <a:p>
+            <a:r>
+              <a:rPr lang="en-US" sz="1380" dirty="0">
+                <a:solidFill>
+                  <a:srgbClr val="17364A"/>
+                </a:solidFill>
+                <a:latin typeface="Aptos" pitchFamily="34" charset="0"/>
+                <a:ea typeface="Aptos" pitchFamily="34" charset="-122"/>
+                <a:cs typeface="Aptos" pitchFamily="34" charset="-120"/>
+              </a:rPr>
+              <a:t>Governance recommendation</a:t>
+            </a:r>
+            <a:endParaRPr lang="en-US" sz="1380" dirty="0"/>
           </a:p>
         </p:txBody>
       </p:sp>
       <p:sp>
         <p:nvSpPr>
           <p:cNvPr id="16" name="Shape 14"/>
-          <p:cNvSpPr/>
-          <p:nvPr/>
-        </p:nvSpPr>
-        <p:spPr>
-          <a:xfrm>
-            <a:off x="8366760" y="3639312"/>
-            <a:ext cx="2011680" cy="0"/>
-          </a:xfrm>
-          <a:prstGeom prst="line">
-            <a:avLst/>
-          </a:prstGeom>
-          <a:noFill/>
-          <a:ln w="63500">
-            <a:solidFill>
-              <a:srgbClr val="2F8A28"/>
-            </a:solidFill>
-            <a:prstDash val="solid"/>
-          </a:ln>
-        </p:spPr>
-      </p:sp>
-      <p:sp>
-        <p:nvSpPr>
-          <p:cNvPr id="17" name="Text 15"/>
-          <p:cNvSpPr/>
-          <p:nvPr/>
-        </p:nvSpPr>
-        <p:spPr>
-          <a:xfrm>
-            <a:off x="7909560" y="3849624"/>
-            <a:ext cx="2926080" cy="164592"/>
-          </a:xfrm>
-          <a:prstGeom prst="rect">
-            <a:avLst/>
-          </a:prstGeom>
-          <a:noFill/>
-          <a:ln/>
-        </p:spPr>
-        <p:txBody>
-          <a:bodyPr wrap="square" lIns="0" tIns="0" rIns="0" bIns="0" rtlCol="0" anchor="ctr"/>
-          <a:lstStyle/>
-          <a:p>
-            <a:pPr algn="ctr" indent="0" marL="0">
-              <a:buNone/>
-            </a:pPr>
-            <a:r>
-              <a:rPr lang="en-US" sz="900" dirty="0">
-                <a:solidFill>
-                  <a:srgbClr val="003A63"/>
-                </a:solidFill>
-                <a:latin typeface="Aptos" pitchFamily="34" charset="0"/>
-                <a:ea typeface="Aptos" pitchFamily="34" charset="-122"/>
-                <a:cs typeface="Aptos" pitchFamily="34" charset="-120"/>
-              </a:rPr>
-              <a:t>Human review</a:t>
-            </a:r>
-            <a:endParaRPr lang="en-US" sz="900" dirty="0"/>
-          </a:p>
-        </p:txBody>
-      </p:sp>
-      <p:sp>
-        <p:nvSpPr>
-          <p:cNvPr id="18" name="Shape 16"/>
           <p:cNvSpPr/>
           <p:nvPr/>
         </p:nvSpPr>
@@ -11552,7 +11193,7 @@
       </p:sp>
       <p:sp>
         <p:nvSpPr>
-          <p:cNvPr id="19" name="Text 17"/>
+          <p:cNvPr id="17" name="Text 15"/>
           <p:cNvSpPr/>
           <p:nvPr/>
         </p:nvSpPr>
@@ -11591,7 +11232,7 @@
       </p:sp>
       <p:sp>
         <p:nvSpPr>
-          <p:cNvPr id="20" name="Text 18"/>
+          <p:cNvPr id="18" name="Text 16"/>
           <p:cNvSpPr/>
           <p:nvPr/>
         </p:nvSpPr>
@@ -12099,13 +11740,11 @@
             </a:avLst>
           </a:prstGeom>
           <a:solidFill>
-            <a:srgbClr val="FFFFFF">
-              <a:alpha val="88000"/>
-            </a:srgbClr>
+            <a:srgbClr val="FFFFFF"/>
           </a:solidFill>
           <a:ln w="12700">
             <a:solidFill>
-              <a:srgbClr val="D6E8F2"/>
+              <a:srgbClr val="B9D7E6"/>
             </a:solidFill>
             <a:prstDash val="solid"/>
           </a:ln>
@@ -12113,26 +11752,42 @@
       </p:sp>
       <p:sp>
         <p:nvSpPr>
-          <p:cNvPr id="14" name="Shape 12"/>
-          <p:cNvSpPr/>
-          <p:nvPr/>
-        </p:nvSpPr>
-        <p:spPr>
-          <a:xfrm>
-            <a:off x="8046720" y="3108960"/>
-            <a:ext cx="2651760" cy="896112"/>
-          </a:xfrm>
-          <a:prstGeom prst="arc">
-            <a:avLst/>
-          </a:prstGeom>
-          <a:noFill/>
-          <a:ln w="25400">
-            <a:solidFill>
-              <a:srgbClr val="0068B7"/>
-            </a:solidFill>
-            <a:prstDash val="solid"/>
-          </a:ln>
-        </p:spPr>
+          <p:cNvPr id="14" name="Text 12"/>
+          <p:cNvSpPr/>
+          <p:nvPr/>
+        </p:nvSpPr>
+        <p:spPr>
+          <a:xfrm>
+            <a:off x="7799832" y="2935224"/>
+            <a:ext cx="3145536" cy="256032"/>
+          </a:xfrm>
+          <a:prstGeom prst="rect">
+            <a:avLst/>
+          </a:prstGeom>
+          <a:noFill/>
+          <a:ln/>
+        </p:spPr>
+        <p:txBody>
+          <a:bodyPr wrap="square" lIns="0" tIns="0" rIns="0" bIns="0" rtlCol="0" anchor="ctr"/>
+          <a:lstStyle/>
+          <a:p>
+            <a:pPr indent="0" marL="0">
+              <a:buNone/>
+            </a:pPr>
+            <a:r>
+              <a:rPr lang="en-US" sz="1300" b="1" dirty="0">
+                <a:solidFill>
+                  <a:srgbClr val="0068B7"/>
+                </a:solidFill>
+                <a:latin typeface="Aptos" pitchFamily="34" charset="0"/>
+                <a:ea typeface="Aptos" pitchFamily="34" charset="-122"/>
+                <a:cs typeface="Aptos" pitchFamily="34" charset="-120"/>
+              </a:rPr>
+              <a:t>Concept checkpoints</a:t>
+            </a:r>
+            <a:endParaRPr lang="en-US" sz="1300" dirty="0"/>
+          </a:p>
+        </p:txBody>
       </p:sp>
       <p:sp>
         <p:nvSpPr>
@@ -12142,102 +11797,67 @@
         </p:nvSpPr>
         <p:spPr>
           <a:xfrm>
-            <a:off x="7909560" y="3099816"/>
-            <a:ext cx="2926080" cy="256032"/>
-          </a:xfrm>
-          <a:prstGeom prst="rect">
-            <a:avLst/>
-          </a:prstGeom>
-          <a:noFill/>
-          <a:ln/>
-        </p:spPr>
-        <p:txBody>
-          <a:bodyPr wrap="square" lIns="0" tIns="0" rIns="0" bIns="0" rtlCol="0" anchor="ctr"/>
-          <a:lstStyle/>
-          <a:p>
-            <a:pPr algn="ctr" indent="0" marL="0">
-              <a:buNone/>
-            </a:pPr>
-            <a:r>
-              <a:rPr lang="en-US" sz="1500" b="1" dirty="0">
-                <a:solidFill>
-                  <a:srgbClr val="003A63"/>
-                </a:solidFill>
-                <a:latin typeface="Aptos" pitchFamily="34" charset="0"/>
-                <a:ea typeface="Aptos" pitchFamily="34" charset="-122"/>
-                <a:cs typeface="Aptos" pitchFamily="34" charset="-120"/>
-              </a:rPr>
-              <a:t>Risk</a:t>
-            </a:r>
-            <a:endParaRPr lang="en-US" sz="1500" dirty="0"/>
+            <a:off x="7818120" y="3300984"/>
+            <a:ext cx="3090672" cy="877824"/>
+          </a:xfrm>
+          <a:prstGeom prst="rect">
+            <a:avLst/>
+          </a:prstGeom>
+          <a:noFill/>
+          <a:ln/>
+        </p:spPr>
+        <p:txBody>
+          <a:bodyPr wrap="square" lIns="254" tIns="254" rIns="254" bIns="254" rtlCol="0" anchor="t">
+            <a:normAutofit/>
+          </a:bodyPr>
+          <a:lstStyle/>
+          <a:p>
+            <a:r>
+              <a:rPr lang="en-US" sz="1380" dirty="0">
+                <a:solidFill>
+                  <a:srgbClr val="17364A"/>
+                </a:solidFill>
+                <a:latin typeface="Aptos" pitchFamily="34" charset="0"/>
+                <a:ea typeface="Aptos" pitchFamily="34" charset="-122"/>
+                <a:cs typeface="Aptos" pitchFamily="34" charset="-120"/>
+              </a:rPr>
+              <a:t>1.</a:t>
+            </a:r>
+            <a:endParaRPr lang="en-US" sz="1380" dirty="0"/>
+          </a:p>
+          <a:p>
+            <a:r>
+              <a:rPr lang="en-US" sz="1380" dirty="0">
+                <a:solidFill>
+                  <a:srgbClr val="17364A"/>
+                </a:solidFill>
+                <a:latin typeface="Aptos" pitchFamily="34" charset="0"/>
+                <a:ea typeface="Aptos" pitchFamily="34" charset="-122"/>
+                <a:cs typeface="Aptos" pitchFamily="34" charset="-120"/>
+              </a:rPr>
+              <a:t>Why is overall model performance insufficient for public health equity review?</a:t>
+            </a:r>
+            <a:endParaRPr lang="en-US" sz="1380" dirty="0"/>
+          </a:p>
+          <a:p>
+            <a:r>
+              <a:rPr lang="en-US" sz="1380" dirty="0">
+                <a:solidFill>
+                  <a:srgbClr val="17364A"/>
+                </a:solidFill>
+                <a:latin typeface="Aptos" pitchFamily="34" charset="0"/>
+                <a:ea typeface="Aptos" pitchFamily="34" charset="-122"/>
+                <a:cs typeface="Aptos" pitchFamily="34" charset="-120"/>
+              </a:rPr>
+              <a:t>2.</a:t>
+            </a:r>
+            <a:endParaRPr lang="en-US" sz="1380" dirty="0"/>
           </a:p>
         </p:txBody>
       </p:sp>
       <p:sp>
         <p:nvSpPr>
           <p:cNvPr id="16" name="Shape 14"/>
-          <p:cNvSpPr/>
-          <p:nvPr/>
-        </p:nvSpPr>
-        <p:spPr>
-          <a:xfrm>
-            <a:off x="8366760" y="3639312"/>
-            <a:ext cx="2011680" cy="0"/>
-          </a:xfrm>
-          <a:prstGeom prst="line">
-            <a:avLst/>
-          </a:prstGeom>
-          <a:noFill/>
-          <a:ln w="63500">
-            <a:solidFill>
-              <a:srgbClr val="2F8A28"/>
-            </a:solidFill>
-            <a:prstDash val="solid"/>
-          </a:ln>
-        </p:spPr>
-      </p:sp>
-      <p:sp>
-        <p:nvSpPr>
-          <p:cNvPr id="17" name="Text 15"/>
-          <p:cNvSpPr/>
-          <p:nvPr/>
-        </p:nvSpPr>
-        <p:spPr>
-          <a:xfrm>
-            <a:off x="7909560" y="3849624"/>
-            <a:ext cx="2926080" cy="164592"/>
-          </a:xfrm>
-          <a:prstGeom prst="rect">
-            <a:avLst/>
-          </a:prstGeom>
-          <a:noFill/>
-          <a:ln/>
-        </p:spPr>
-        <p:txBody>
-          <a:bodyPr wrap="square" lIns="0" tIns="0" rIns="0" bIns="0" rtlCol="0" anchor="ctr"/>
-          <a:lstStyle/>
-          <a:p>
-            <a:pPr algn="ctr" indent="0" marL="0">
-              <a:buNone/>
-            </a:pPr>
-            <a:r>
-              <a:rPr lang="en-US" sz="900" dirty="0">
-                <a:solidFill>
-                  <a:srgbClr val="003A63"/>
-                </a:solidFill>
-                <a:latin typeface="Aptos" pitchFamily="34" charset="0"/>
-                <a:ea typeface="Aptos" pitchFamily="34" charset="-122"/>
-                <a:cs typeface="Aptos" pitchFamily="34" charset="-120"/>
-              </a:rPr>
-              <a:t>Human review</a:t>
-            </a:r>
-            <a:endParaRPr lang="en-US" sz="900" dirty="0"/>
-          </a:p>
-        </p:txBody>
-      </p:sp>
-      <p:sp>
-        <p:nvSpPr>
-          <p:cNvPr id="18" name="Shape 16"/>
           <p:cNvSpPr/>
           <p:nvPr/>
         </p:nvSpPr>
@@ -12264,7 +11884,7 @@
       </p:sp>
       <p:sp>
         <p:nvSpPr>
-          <p:cNvPr id="19" name="Text 17"/>
+          <p:cNvPr id="17" name="Text 15"/>
           <p:cNvSpPr/>
           <p:nvPr/>
         </p:nvSpPr>
@@ -12303,7 +11923,7 @@
       </p:sp>
       <p:sp>
         <p:nvSpPr>
-          <p:cNvPr id="20" name="Text 18"/>
+          <p:cNvPr id="18" name="Text 16"/>
           <p:cNvSpPr/>
           <p:nvPr/>
         </p:nvSpPr>
@@ -12811,13 +12431,11 @@
             </a:avLst>
           </a:prstGeom>
           <a:solidFill>
-            <a:srgbClr val="FFFFFF">
-              <a:alpha val="88000"/>
-            </a:srgbClr>
+            <a:srgbClr val="FFFFFF"/>
           </a:solidFill>
           <a:ln w="12700">
             <a:solidFill>
-              <a:srgbClr val="D6E8F2"/>
+              <a:srgbClr val="B9D7E6"/>
             </a:solidFill>
             <a:prstDash val="solid"/>
           </a:ln>
@@ -12825,26 +12443,42 @@
       </p:sp>
       <p:sp>
         <p:nvSpPr>
-          <p:cNvPr id="14" name="Shape 12"/>
-          <p:cNvSpPr/>
-          <p:nvPr/>
-        </p:nvSpPr>
-        <p:spPr>
-          <a:xfrm>
-            <a:off x="8046720" y="3108960"/>
-            <a:ext cx="2651760" cy="896112"/>
-          </a:xfrm>
-          <a:prstGeom prst="arc">
-            <a:avLst/>
-          </a:prstGeom>
-          <a:noFill/>
-          <a:ln w="25400">
-            <a:solidFill>
-              <a:srgbClr val="0068B7"/>
-            </a:solidFill>
-            <a:prstDash val="solid"/>
-          </a:ln>
-        </p:spPr>
+          <p:cNvPr id="14" name="Text 12"/>
+          <p:cNvSpPr/>
+          <p:nvPr/>
+        </p:nvSpPr>
+        <p:spPr>
+          <a:xfrm>
+            <a:off x="7799832" y="2935224"/>
+            <a:ext cx="3145536" cy="256032"/>
+          </a:xfrm>
+          <a:prstGeom prst="rect">
+            <a:avLst/>
+          </a:prstGeom>
+          <a:noFill/>
+          <a:ln/>
+        </p:spPr>
+        <p:txBody>
+          <a:bodyPr wrap="square" lIns="0" tIns="0" rIns="0" bIns="0" rtlCol="0" anchor="ctr"/>
+          <a:lstStyle/>
+          <a:p>
+            <a:pPr indent="0" marL="0">
+              <a:buNone/>
+            </a:pPr>
+            <a:r>
+              <a:rPr lang="en-US" sz="1300" b="1" dirty="0">
+                <a:solidFill>
+                  <a:srgbClr val="0068B7"/>
+                </a:solidFill>
+                <a:latin typeface="Aptos" pitchFamily="34" charset="0"/>
+                <a:ea typeface="Aptos" pitchFamily="34" charset="-122"/>
+                <a:cs typeface="Aptos" pitchFamily="34" charset="-120"/>
+              </a:rPr>
+              <a:t>Concept checkpoints</a:t>
+            </a:r>
+            <a:endParaRPr lang="en-US" sz="1300" dirty="0"/>
+          </a:p>
+        </p:txBody>
       </p:sp>
       <p:sp>
         <p:nvSpPr>
@@ -12854,102 +12488,67 @@
         </p:nvSpPr>
         <p:spPr>
           <a:xfrm>
-            <a:off x="7909560" y="3099816"/>
-            <a:ext cx="2926080" cy="256032"/>
-          </a:xfrm>
-          <a:prstGeom prst="rect">
-            <a:avLst/>
-          </a:prstGeom>
-          <a:noFill/>
-          <a:ln/>
-        </p:spPr>
-        <p:txBody>
-          <a:bodyPr wrap="square" lIns="0" tIns="0" rIns="0" bIns="0" rtlCol="0" anchor="ctr"/>
-          <a:lstStyle/>
-          <a:p>
-            <a:pPr algn="ctr" indent="0" marL="0">
-              <a:buNone/>
-            </a:pPr>
-            <a:r>
-              <a:rPr lang="en-US" sz="1500" b="1" dirty="0">
-                <a:solidFill>
-                  <a:srgbClr val="003A63"/>
-                </a:solidFill>
-                <a:latin typeface="Aptos" pitchFamily="34" charset="0"/>
-                <a:ea typeface="Aptos" pitchFamily="34" charset="-122"/>
-                <a:cs typeface="Aptos" pitchFamily="34" charset="-120"/>
-              </a:rPr>
-              <a:t>Risk</a:t>
-            </a:r>
-            <a:endParaRPr lang="en-US" sz="1500" dirty="0"/>
+            <a:off x="7818120" y="3300984"/>
+            <a:ext cx="3090672" cy="877824"/>
+          </a:xfrm>
+          <a:prstGeom prst="rect">
+            <a:avLst/>
+          </a:prstGeom>
+          <a:noFill/>
+          <a:ln/>
+        </p:spPr>
+        <p:txBody>
+          <a:bodyPr wrap="square" lIns="254" tIns="254" rIns="254" bIns="254" rtlCol="0" anchor="t">
+            <a:normAutofit/>
+          </a:bodyPr>
+          <a:lstStyle/>
+          <a:p>
+            <a:r>
+              <a:rPr lang="en-US" sz="1380" dirty="0">
+                <a:solidFill>
+                  <a:srgbClr val="17364A"/>
+                </a:solidFill>
+                <a:latin typeface="Aptos" pitchFamily="34" charset="0"/>
+                <a:ea typeface="Aptos" pitchFamily="34" charset="-122"/>
+                <a:cs typeface="Aptos" pitchFamily="34" charset="-120"/>
+              </a:rPr>
+              <a:t>NIST Artificial Intelligence Risk Management Framework:.</a:t>
+            </a:r>
+            <a:endParaRPr lang="en-US" sz="1380" dirty="0"/>
+          </a:p>
+          <a:p>
+            <a:r>
+              <a:rPr lang="en-US" sz="1380" dirty="0">
+                <a:solidFill>
+                  <a:srgbClr val="17364A"/>
+                </a:solidFill>
+                <a:latin typeface="Aptos" pitchFamily="34" charset="0"/>
+                <a:ea typeface="Aptos" pitchFamily="34" charset="-122"/>
+                <a:cs typeface="Aptos" pitchFamily="34" charset="-120"/>
+              </a:rPr>
+              <a:t>OWASP guidance for LLM application security</a:t>
+            </a:r>
+            <a:endParaRPr lang="en-US" sz="1380" dirty="0"/>
+          </a:p>
+          <a:p>
+            <a:r>
+              <a:rPr lang="en-US" sz="1380" dirty="0">
+                <a:solidFill>
+                  <a:srgbClr val="17364A"/>
+                </a:solidFill>
+                <a:latin typeface="Aptos" pitchFamily="34" charset="0"/>
+                <a:ea typeface="Aptos" pitchFamily="34" charset="-122"/>
+                <a:cs typeface="Aptos" pitchFamily="34" charset="-120"/>
+              </a:rPr>
+              <a:t>Agency policies for privacy, cybersecurity, records, procurement, accessibility, and.</a:t>
+            </a:r>
+            <a:endParaRPr lang="en-US" sz="1380" dirty="0"/>
           </a:p>
         </p:txBody>
       </p:sp>
       <p:sp>
         <p:nvSpPr>
           <p:cNvPr id="16" name="Shape 14"/>
-          <p:cNvSpPr/>
-          <p:nvPr/>
-        </p:nvSpPr>
-        <p:spPr>
-          <a:xfrm>
-            <a:off x="8366760" y="3639312"/>
-            <a:ext cx="2011680" cy="0"/>
-          </a:xfrm>
-          <a:prstGeom prst="line">
-            <a:avLst/>
-          </a:prstGeom>
-          <a:noFill/>
-          <a:ln w="63500">
-            <a:solidFill>
-              <a:srgbClr val="2F8A28"/>
-            </a:solidFill>
-            <a:prstDash val="solid"/>
-          </a:ln>
-        </p:spPr>
-      </p:sp>
-      <p:sp>
-        <p:nvSpPr>
-          <p:cNvPr id="17" name="Text 15"/>
-          <p:cNvSpPr/>
-          <p:nvPr/>
-        </p:nvSpPr>
-        <p:spPr>
-          <a:xfrm>
-            <a:off x="7909560" y="3849624"/>
-            <a:ext cx="2926080" cy="164592"/>
-          </a:xfrm>
-          <a:prstGeom prst="rect">
-            <a:avLst/>
-          </a:prstGeom>
-          <a:noFill/>
-          <a:ln/>
-        </p:spPr>
-        <p:txBody>
-          <a:bodyPr wrap="square" lIns="0" tIns="0" rIns="0" bIns="0" rtlCol="0" anchor="ctr"/>
-          <a:lstStyle/>
-          <a:p>
-            <a:pPr algn="ctr" indent="0" marL="0">
-              <a:buNone/>
-            </a:pPr>
-            <a:r>
-              <a:rPr lang="en-US" sz="900" dirty="0">
-                <a:solidFill>
-                  <a:srgbClr val="003A63"/>
-                </a:solidFill>
-                <a:latin typeface="Aptos" pitchFamily="34" charset="0"/>
-                <a:ea typeface="Aptos" pitchFamily="34" charset="-122"/>
-                <a:cs typeface="Aptos" pitchFamily="34" charset="-120"/>
-              </a:rPr>
-              <a:t>Human review</a:t>
-            </a:r>
-            <a:endParaRPr lang="en-US" sz="900" dirty="0"/>
-          </a:p>
-        </p:txBody>
-      </p:sp>
-      <p:sp>
-        <p:nvSpPr>
-          <p:cNvPr id="18" name="Shape 16"/>
           <p:cNvSpPr/>
           <p:nvPr/>
         </p:nvSpPr>
@@ -12976,7 +12575,7 @@
       </p:sp>
       <p:sp>
         <p:nvSpPr>
-          <p:cNvPr id="19" name="Text 17"/>
+          <p:cNvPr id="17" name="Text 15"/>
           <p:cNvSpPr/>
           <p:nvPr/>
         </p:nvSpPr>
@@ -13015,7 +12614,7 @@
       </p:sp>
       <p:sp>
         <p:nvSpPr>
-          <p:cNvPr id="20" name="Text 18"/>
+          <p:cNvPr id="18" name="Text 16"/>
           <p:cNvSpPr/>
           <p:nvPr/>
         </p:nvSpPr>
@@ -13495,13 +13094,11 @@
             </a:avLst>
           </a:prstGeom>
           <a:solidFill>
-            <a:srgbClr val="FFFFFF">
-              <a:alpha val="88000"/>
-            </a:srgbClr>
+            <a:srgbClr val="FFFFFF"/>
           </a:solidFill>
           <a:ln w="12700">
             <a:solidFill>
-              <a:srgbClr val="D6E8F2"/>
+              <a:srgbClr val="B9D7E6"/>
             </a:solidFill>
             <a:prstDash val="solid"/>
           </a:ln>
@@ -13509,26 +13106,42 @@
       </p:sp>
       <p:sp>
         <p:nvSpPr>
-          <p:cNvPr id="14" name="Shape 12"/>
-          <p:cNvSpPr/>
-          <p:nvPr/>
-        </p:nvSpPr>
-        <p:spPr>
-          <a:xfrm>
-            <a:off x="8046720" y="3108960"/>
-            <a:ext cx="2651760" cy="896112"/>
-          </a:xfrm>
-          <a:prstGeom prst="arc">
-            <a:avLst/>
-          </a:prstGeom>
-          <a:noFill/>
-          <a:ln w="25400">
-            <a:solidFill>
-              <a:srgbClr val="0068B7"/>
-            </a:solidFill>
-            <a:prstDash val="solid"/>
-          </a:ln>
-        </p:spPr>
+          <p:cNvPr id="14" name="Text 12"/>
+          <p:cNvSpPr/>
+          <p:nvPr/>
+        </p:nvSpPr>
+        <p:spPr>
+          <a:xfrm>
+            <a:off x="7799832" y="2935224"/>
+            <a:ext cx="3145536" cy="256032"/>
+          </a:xfrm>
+          <a:prstGeom prst="rect">
+            <a:avLst/>
+          </a:prstGeom>
+          <a:noFill/>
+          <a:ln/>
+        </p:spPr>
+        <p:txBody>
+          <a:bodyPr wrap="square" lIns="0" tIns="0" rIns="0" bIns="0" rtlCol="0" anchor="ctr"/>
+          <a:lstStyle/>
+          <a:p>
+            <a:pPr indent="0" marL="0">
+              <a:buNone/>
+            </a:pPr>
+            <a:r>
+              <a:rPr lang="en-US" sz="1300" b="1" dirty="0">
+                <a:solidFill>
+                  <a:srgbClr val="0068B7"/>
+                </a:solidFill>
+                <a:latin typeface="Aptos" pitchFamily="34" charset="0"/>
+                <a:ea typeface="Aptos" pitchFamily="34" charset="-122"/>
+                <a:cs typeface="Aptos" pitchFamily="34" charset="-120"/>
+              </a:rPr>
+              <a:t>Concept checkpoints</a:t>
+            </a:r>
+            <a:endParaRPr lang="en-US" sz="1300" dirty="0"/>
+          </a:p>
+        </p:txBody>
       </p:sp>
       <p:sp>
         <p:nvSpPr>
@@ -13538,102 +13151,39 @@
         </p:nvSpPr>
         <p:spPr>
           <a:xfrm>
-            <a:off x="7909560" y="3099816"/>
-            <a:ext cx="2926080" cy="256032"/>
-          </a:xfrm>
-          <a:prstGeom prst="rect">
-            <a:avLst/>
-          </a:prstGeom>
-          <a:noFill/>
-          <a:ln/>
-        </p:spPr>
-        <p:txBody>
-          <a:bodyPr wrap="square" lIns="0" tIns="0" rIns="0" bIns="0" rtlCol="0" anchor="ctr"/>
-          <a:lstStyle/>
-          <a:p>
-            <a:pPr algn="ctr" indent="0" marL="0">
-              <a:buNone/>
-            </a:pPr>
-            <a:r>
-              <a:rPr lang="en-US" sz="1500" b="1" dirty="0">
-                <a:solidFill>
-                  <a:srgbClr val="003A63"/>
-                </a:solidFill>
-                <a:latin typeface="Aptos" pitchFamily="34" charset="0"/>
-                <a:ea typeface="Aptos" pitchFamily="34" charset="-122"/>
-                <a:cs typeface="Aptos" pitchFamily="34" charset="-120"/>
-              </a:rPr>
-              <a:t>Risk</a:t>
-            </a:r>
-            <a:endParaRPr lang="en-US" sz="1500" dirty="0"/>
+            <a:off x="7818120" y="3300984"/>
+            <a:ext cx="3090672" cy="877824"/>
+          </a:xfrm>
+          <a:prstGeom prst="rect">
+            <a:avLst/>
+          </a:prstGeom>
+          <a:noFill/>
+          <a:ln/>
+        </p:spPr>
+        <p:txBody>
+          <a:bodyPr wrap="square" lIns="254" tIns="254" rIns="254" bIns="254" rtlCol="0" anchor="t">
+            <a:normAutofit/>
+          </a:bodyPr>
+          <a:lstStyle/>
+          <a:p>
+            <a:r>
+              <a:rPr lang="en-US" sz="1380" dirty="0">
+                <a:solidFill>
+                  <a:srgbClr val="17364A"/>
+                </a:solidFill>
+                <a:latin typeface="Aptos" pitchFamily="34" charset="0"/>
+                <a:ea typeface="Aptos" pitchFamily="34" charset="-122"/>
+                <a:cs typeface="Aptos" pitchFamily="34" charset="-120"/>
+              </a:rPr>
+              <a:t>Relevant public health program SOPs, data governance documentation, and implementation plans</a:t>
+            </a:r>
+            <a:endParaRPr lang="en-US" sz="1380" dirty="0"/>
           </a:p>
         </p:txBody>
       </p:sp>
       <p:sp>
         <p:nvSpPr>
           <p:cNvPr id="16" name="Shape 14"/>
-          <p:cNvSpPr/>
-          <p:nvPr/>
-        </p:nvSpPr>
-        <p:spPr>
-          <a:xfrm>
-            <a:off x="8366760" y="3639312"/>
-            <a:ext cx="2011680" cy="0"/>
-          </a:xfrm>
-          <a:prstGeom prst="line">
-            <a:avLst/>
-          </a:prstGeom>
-          <a:noFill/>
-          <a:ln w="63500">
-            <a:solidFill>
-              <a:srgbClr val="2F8A28"/>
-            </a:solidFill>
-            <a:prstDash val="solid"/>
-          </a:ln>
-        </p:spPr>
-      </p:sp>
-      <p:sp>
-        <p:nvSpPr>
-          <p:cNvPr id="17" name="Text 15"/>
-          <p:cNvSpPr/>
-          <p:nvPr/>
-        </p:nvSpPr>
-        <p:spPr>
-          <a:xfrm>
-            <a:off x="7909560" y="3849624"/>
-            <a:ext cx="2926080" cy="164592"/>
-          </a:xfrm>
-          <a:prstGeom prst="rect">
-            <a:avLst/>
-          </a:prstGeom>
-          <a:noFill/>
-          <a:ln/>
-        </p:spPr>
-        <p:txBody>
-          <a:bodyPr wrap="square" lIns="0" tIns="0" rIns="0" bIns="0" rtlCol="0" anchor="ctr"/>
-          <a:lstStyle/>
-          <a:p>
-            <a:pPr algn="ctr" indent="0" marL="0">
-              <a:buNone/>
-            </a:pPr>
-            <a:r>
-              <a:rPr lang="en-US" sz="900" dirty="0">
-                <a:solidFill>
-                  <a:srgbClr val="003A63"/>
-                </a:solidFill>
-                <a:latin typeface="Aptos" pitchFamily="34" charset="0"/>
-                <a:ea typeface="Aptos" pitchFamily="34" charset="-122"/>
-                <a:cs typeface="Aptos" pitchFamily="34" charset="-120"/>
-              </a:rPr>
-              <a:t>Human review</a:t>
-            </a:r>
-            <a:endParaRPr lang="en-US" sz="900" dirty="0"/>
-          </a:p>
-        </p:txBody>
-      </p:sp>
-      <p:sp>
-        <p:nvSpPr>
-          <p:cNvPr id="18" name="Shape 16"/>
           <p:cNvSpPr/>
           <p:nvPr/>
         </p:nvSpPr>
@@ -13660,7 +13210,7 @@
       </p:sp>
       <p:sp>
         <p:nvSpPr>
-          <p:cNvPr id="19" name="Text 17"/>
+          <p:cNvPr id="17" name="Text 15"/>
           <p:cNvSpPr/>
           <p:nvPr/>
         </p:nvSpPr>
@@ -13699,7 +13249,7 @@
       </p:sp>
       <p:sp>
         <p:nvSpPr>
-          <p:cNvPr id="20" name="Text 18"/>
+          <p:cNvPr id="18" name="Text 16"/>
           <p:cNvSpPr/>
           <p:nvPr/>
         </p:nvSpPr>
@@ -14212,20 +13762,20 @@
         </p:nvSpPr>
         <p:spPr>
           <a:xfrm>
-            <a:off x="7818120" y="3977640"/>
-            <a:ext cx="972312" cy="749808"/>
+            <a:off x="8046720" y="3794760"/>
+            <a:ext cx="3063240" cy="1600200"/>
           </a:xfrm>
           <a:prstGeom prst="roundRect">
             <a:avLst>
-              <a:gd name="adj" fmla="val 14634"/>
+              <a:gd name="adj" fmla="val 6857"/>
             </a:avLst>
           </a:prstGeom>
           <a:solidFill>
-            <a:srgbClr val="0068B7"/>
+            <a:srgbClr val="FFFFFF"/>
           </a:solidFill>
           <a:ln w="12700">
             <a:solidFill>
-              <a:srgbClr val="0068B7"/>
+              <a:srgbClr val="B9D7E6"/>
             </a:solidFill>
             <a:prstDash val="solid"/>
           </a:ln>
@@ -14239,172 +13789,100 @@
         </p:nvSpPr>
         <p:spPr>
           <a:xfrm>
-            <a:off x="7891272" y="4169664"/>
-            <a:ext cx="826008" cy="310896"/>
-          </a:xfrm>
-          <a:prstGeom prst="rect">
-            <a:avLst/>
-          </a:prstGeom>
-          <a:noFill/>
-          <a:ln/>
-        </p:spPr>
-        <p:txBody>
-          <a:bodyPr wrap="square" lIns="0" tIns="0" rIns="0" bIns="0" rtlCol="0" anchor="ctr">
+            <a:off x="8211312" y="3941064"/>
+            <a:ext cx="2734056" cy="256032"/>
+          </a:xfrm>
+          <a:prstGeom prst="rect">
+            <a:avLst/>
+          </a:prstGeom>
+          <a:noFill/>
+          <a:ln/>
+        </p:spPr>
+        <p:txBody>
+          <a:bodyPr wrap="square" lIns="0" tIns="0" rIns="0" bIns="0" rtlCol="0" anchor="ctr"/>
+          <a:lstStyle/>
+          <a:p>
+            <a:pPr indent="0" marL="0">
+              <a:buNone/>
+            </a:pPr>
+            <a:r>
+              <a:rPr lang="en-US" sz="1300" b="1" dirty="0">
+                <a:solidFill>
+                  <a:srgbClr val="0068B7"/>
+                </a:solidFill>
+                <a:latin typeface="Aptos" pitchFamily="34" charset="0"/>
+                <a:ea typeface="Aptos" pitchFamily="34" charset="-122"/>
+                <a:cs typeface="Aptos" pitchFamily="34" charset="-120"/>
+              </a:rPr>
+              <a:t>Use the play links to</a:t>
+            </a:r>
+            <a:endParaRPr lang="en-US" sz="1300" dirty="0"/>
+          </a:p>
+        </p:txBody>
+      </p:sp>
+      <p:sp>
+        <p:nvSpPr>
+          <p:cNvPr id="15" name="Text 13"/>
+          <p:cNvSpPr/>
+          <p:nvPr/>
+        </p:nvSpPr>
+        <p:spPr>
+          <a:xfrm>
+            <a:off x="8229600" y="4306824"/>
+            <a:ext cx="2679192" cy="941832"/>
+          </a:xfrm>
+          <a:prstGeom prst="rect">
+            <a:avLst/>
+          </a:prstGeom>
+          <a:noFill/>
+          <a:ln/>
+        </p:spPr>
+        <p:txBody>
+          <a:bodyPr wrap="square" lIns="254" tIns="254" rIns="254" bIns="254" rtlCol="0" anchor="t">
             <a:normAutofit/>
           </a:bodyPr>
           <a:lstStyle/>
           <a:p>
-            <a:pPr algn="ctr" indent="0" marL="0">
-              <a:buNone/>
-            </a:pPr>
-            <a:r>
-              <a:rPr lang="en-US" sz="1500" b="1" dirty="0">
-                <a:solidFill>
-                  <a:srgbClr val="FFFFFF"/>
-                </a:solidFill>
-                <a:latin typeface="Aptos" pitchFamily="34" charset="0"/>
-                <a:ea typeface="Aptos" pitchFamily="34" charset="-122"/>
-                <a:cs typeface="Aptos" pitchFamily="34" charset="-120"/>
-              </a:rPr>
-              <a:t>Lesson</a:t>
-            </a:r>
-            <a:endParaRPr lang="en-US" sz="1500" dirty="0"/>
-          </a:p>
-        </p:txBody>
-      </p:sp>
-      <p:sp>
-        <p:nvSpPr>
-          <p:cNvPr id="15" name="Shape 13"/>
-          <p:cNvSpPr/>
-          <p:nvPr/>
-        </p:nvSpPr>
-        <p:spPr>
-          <a:xfrm>
-            <a:off x="9046464" y="3977640"/>
-            <a:ext cx="972312" cy="749808"/>
-          </a:xfrm>
-          <a:prstGeom prst="roundRect">
-            <a:avLst>
-              <a:gd name="adj" fmla="val 14634"/>
-            </a:avLst>
-          </a:prstGeom>
-          <a:solidFill>
-            <a:srgbClr val="2F8A28"/>
-          </a:solidFill>
-          <a:ln w="12700">
-            <a:solidFill>
-              <a:srgbClr val="2F8A28"/>
-            </a:solidFill>
-            <a:prstDash val="solid"/>
-          </a:ln>
-        </p:spPr>
-      </p:sp>
-      <p:sp>
-        <p:nvSpPr>
-          <p:cNvPr id="16" name="Text 14"/>
-          <p:cNvSpPr/>
-          <p:nvPr/>
-        </p:nvSpPr>
-        <p:spPr>
-          <a:xfrm>
-            <a:off x="9119616" y="4169664"/>
-            <a:ext cx="826008" cy="310896"/>
-          </a:xfrm>
-          <a:prstGeom prst="rect">
-            <a:avLst/>
-          </a:prstGeom>
-          <a:noFill/>
-          <a:ln/>
-        </p:spPr>
-        <p:txBody>
-          <a:bodyPr wrap="square" lIns="0" tIns="0" rIns="0" bIns="0" rtlCol="0" anchor="ctr">
-            <a:normAutofit/>
-          </a:bodyPr>
-          <a:lstStyle/>
-          <a:p>
-            <a:pPr algn="ctr" indent="0" marL="0">
-              <a:buNone/>
-            </a:pPr>
-            <a:r>
-              <a:rPr lang="en-US" sz="1500" b="1" dirty="0">
-                <a:solidFill>
-                  <a:srgbClr val="FFFFFF"/>
-                </a:solidFill>
-                <a:latin typeface="Aptos" pitchFamily="34" charset="0"/>
-                <a:ea typeface="Aptos" pitchFamily="34" charset="-122"/>
-                <a:cs typeface="Aptos" pitchFamily="34" charset="-120"/>
-              </a:rPr>
-              <a:t>Plays</a:t>
-            </a:r>
-            <a:endParaRPr lang="en-US" sz="1500" dirty="0"/>
-          </a:p>
-        </p:txBody>
-      </p:sp>
-      <p:sp>
-        <p:nvSpPr>
-          <p:cNvPr id="17" name="Shape 15"/>
-          <p:cNvSpPr/>
-          <p:nvPr/>
-        </p:nvSpPr>
-        <p:spPr>
-          <a:xfrm>
-            <a:off x="10274808" y="3977640"/>
-            <a:ext cx="972312" cy="749808"/>
-          </a:xfrm>
-          <a:prstGeom prst="roundRect">
-            <a:avLst>
-              <a:gd name="adj" fmla="val 14634"/>
-            </a:avLst>
-          </a:prstGeom>
-          <a:solidFill>
-            <a:srgbClr val="6A4CA3"/>
-          </a:solidFill>
-          <a:ln w="12700">
-            <a:solidFill>
-              <a:srgbClr val="6A4CA3"/>
-            </a:solidFill>
-            <a:prstDash val="solid"/>
-          </a:ln>
-        </p:spPr>
-      </p:sp>
-      <p:sp>
-        <p:nvSpPr>
-          <p:cNvPr id="18" name="Text 16"/>
-          <p:cNvSpPr/>
-          <p:nvPr/>
-        </p:nvSpPr>
-        <p:spPr>
-          <a:xfrm>
-            <a:off x="10347960" y="4169664"/>
-            <a:ext cx="826008" cy="310896"/>
-          </a:xfrm>
-          <a:prstGeom prst="rect">
-            <a:avLst/>
-          </a:prstGeom>
-          <a:noFill/>
-          <a:ln/>
-        </p:spPr>
-        <p:txBody>
-          <a:bodyPr wrap="square" lIns="0" tIns="0" rIns="0" bIns="0" rtlCol="0" anchor="ctr">
-            <a:normAutofit/>
-          </a:bodyPr>
-          <a:lstStyle/>
-          <a:p>
-            <a:pPr algn="ctr" indent="0" marL="0">
-              <a:buNone/>
-            </a:pPr>
-            <a:r>
-              <a:rPr lang="en-US" sz="1500" b="1" dirty="0">
-                <a:solidFill>
-                  <a:srgbClr val="FFFFFF"/>
-                </a:solidFill>
-                <a:latin typeface="Aptos" pitchFamily="34" charset="0"/>
-                <a:ea typeface="Aptos" pitchFamily="34" charset="-122"/>
-                <a:cs typeface="Aptos" pitchFamily="34" charset="-120"/>
-              </a:rPr>
-              <a:t>Action</a:t>
-            </a:r>
-            <a:endParaRPr lang="en-US" sz="1500" dirty="0"/>
+            <a:r>
+              <a:rPr lang="en-US" sz="1380" dirty="0">
+                <a:solidFill>
+                  <a:srgbClr val="17364A"/>
+                </a:solidFill>
+                <a:latin typeface="Aptos" pitchFamily="34" charset="0"/>
+                <a:ea typeface="Aptos" pitchFamily="34" charset="-122"/>
+                <a:cs typeface="Aptos" pitchFamily="34" charset="-120"/>
+              </a:rPr>
+              <a:t>Locate the decision point in the playbook sequence.</a:t>
+            </a:r>
+            <a:endParaRPr lang="en-US" sz="1380" dirty="0"/>
+          </a:p>
+          <a:p>
+            <a:r>
+              <a:rPr lang="en-US" sz="1380" dirty="0">
+                <a:solidFill>
+                  <a:srgbClr val="17364A"/>
+                </a:solidFill>
+                <a:latin typeface="Aptos" pitchFamily="34" charset="0"/>
+                <a:ea typeface="Aptos" pitchFamily="34" charset="-122"/>
+                <a:cs typeface="Aptos" pitchFamily="34" charset="-120"/>
+              </a:rPr>
+              <a:t>Identify who should participate in the work.</a:t>
+            </a:r>
+            <a:endParaRPr lang="en-US" sz="1380" dirty="0"/>
+          </a:p>
+          <a:p>
+            <a:r>
+              <a:rPr lang="en-US" sz="1380" dirty="0">
+                <a:solidFill>
+                  <a:srgbClr val="17364A"/>
+                </a:solidFill>
+                <a:latin typeface="Aptos" pitchFamily="34" charset="0"/>
+                <a:ea typeface="Aptos" pitchFamily="34" charset="-122"/>
+                <a:cs typeface="Aptos" pitchFamily="34" charset="-120"/>
+              </a:rPr>
+              <a:t>Document the review, approval, or implementation step.</a:t>
+            </a:r>
+            <a:endParaRPr lang="en-US" sz="1380" dirty="0"/>
           </a:p>
         </p:txBody>
       </p:sp>
@@ -14882,20 +14360,20 @@
         </p:nvSpPr>
         <p:spPr>
           <a:xfrm>
-            <a:off x="7818120" y="3977640"/>
-            <a:ext cx="972312" cy="749808"/>
+            <a:off x="8046720" y="3794760"/>
+            <a:ext cx="3063240" cy="1600200"/>
           </a:xfrm>
           <a:prstGeom prst="roundRect">
             <a:avLst>
-              <a:gd name="adj" fmla="val 14634"/>
+              <a:gd name="adj" fmla="val 6857"/>
             </a:avLst>
           </a:prstGeom>
           <a:solidFill>
-            <a:srgbClr val="0068B7"/>
+            <a:srgbClr val="FFFFFF"/>
           </a:solidFill>
           <a:ln w="12700">
             <a:solidFill>
-              <a:srgbClr val="0068B7"/>
+              <a:srgbClr val="B9D7E6"/>
             </a:solidFill>
             <a:prstDash val="solid"/>
           </a:ln>
@@ -14909,172 +14387,100 @@
         </p:nvSpPr>
         <p:spPr>
           <a:xfrm>
-            <a:off x="7891272" y="4169664"/>
-            <a:ext cx="826008" cy="310896"/>
-          </a:xfrm>
-          <a:prstGeom prst="rect">
-            <a:avLst/>
-          </a:prstGeom>
-          <a:noFill/>
-          <a:ln/>
-        </p:spPr>
-        <p:txBody>
-          <a:bodyPr wrap="square" lIns="0" tIns="0" rIns="0" bIns="0" rtlCol="0" anchor="ctr">
+            <a:off x="8211312" y="3941064"/>
+            <a:ext cx="2734056" cy="256032"/>
+          </a:xfrm>
+          <a:prstGeom prst="rect">
+            <a:avLst/>
+          </a:prstGeom>
+          <a:noFill/>
+          <a:ln/>
+        </p:spPr>
+        <p:txBody>
+          <a:bodyPr wrap="square" lIns="0" tIns="0" rIns="0" bIns="0" rtlCol="0" anchor="ctr"/>
+          <a:lstStyle/>
+          <a:p>
+            <a:pPr indent="0" marL="0">
+              <a:buNone/>
+            </a:pPr>
+            <a:r>
+              <a:rPr lang="en-US" sz="1300" b="1" dirty="0">
+                <a:solidFill>
+                  <a:srgbClr val="0068B7"/>
+                </a:solidFill>
+                <a:latin typeface="Aptos" pitchFamily="34" charset="0"/>
+                <a:ea typeface="Aptos" pitchFamily="34" charset="-122"/>
+                <a:cs typeface="Aptos" pitchFamily="34" charset="-120"/>
+              </a:rPr>
+              <a:t>Tool selection cues</a:t>
+            </a:r>
+            <a:endParaRPr lang="en-US" sz="1300" dirty="0"/>
+          </a:p>
+        </p:txBody>
+      </p:sp>
+      <p:sp>
+        <p:nvSpPr>
+          <p:cNvPr id="15" name="Text 13"/>
+          <p:cNvSpPr/>
+          <p:nvPr/>
+        </p:nvSpPr>
+        <p:spPr>
+          <a:xfrm>
+            <a:off x="8229600" y="4306824"/>
+            <a:ext cx="2679192" cy="941832"/>
+          </a:xfrm>
+          <a:prstGeom prst="rect">
+            <a:avLst/>
+          </a:prstGeom>
+          <a:noFill/>
+          <a:ln/>
+        </p:spPr>
+        <p:txBody>
+          <a:bodyPr wrap="square" lIns="254" tIns="254" rIns="254" bIns="254" rtlCol="0" anchor="t">
             <a:normAutofit/>
           </a:bodyPr>
           <a:lstStyle/>
           <a:p>
-            <a:pPr algn="ctr" indent="0" marL="0">
-              <a:buNone/>
-            </a:pPr>
-            <a:r>
-              <a:rPr lang="en-US" sz="1500" b="1" dirty="0">
-                <a:solidFill>
-                  <a:srgbClr val="FFFFFF"/>
-                </a:solidFill>
-                <a:latin typeface="Aptos" pitchFamily="34" charset="0"/>
-                <a:ea typeface="Aptos" pitchFamily="34" charset="-122"/>
-                <a:cs typeface="Aptos" pitchFamily="34" charset="-120"/>
-              </a:rPr>
-              <a:t>Concept</a:t>
-            </a:r>
-            <a:endParaRPr lang="en-US" sz="1500" dirty="0"/>
-          </a:p>
-        </p:txBody>
-      </p:sp>
-      <p:sp>
-        <p:nvSpPr>
-          <p:cNvPr id="15" name="Shape 13"/>
-          <p:cNvSpPr/>
-          <p:nvPr/>
-        </p:nvSpPr>
-        <p:spPr>
-          <a:xfrm>
-            <a:off x="9046464" y="3977640"/>
-            <a:ext cx="972312" cy="749808"/>
-          </a:xfrm>
-          <a:prstGeom prst="roundRect">
-            <a:avLst>
-              <a:gd name="adj" fmla="val 14634"/>
-            </a:avLst>
-          </a:prstGeom>
-          <a:solidFill>
-            <a:srgbClr val="2F8A28"/>
-          </a:solidFill>
-          <a:ln w="12700">
-            <a:solidFill>
-              <a:srgbClr val="2F8A28"/>
-            </a:solidFill>
-            <a:prstDash val="solid"/>
-          </a:ln>
-        </p:spPr>
-      </p:sp>
-      <p:sp>
-        <p:nvSpPr>
-          <p:cNvPr id="16" name="Text 14"/>
-          <p:cNvSpPr/>
-          <p:nvPr/>
-        </p:nvSpPr>
-        <p:spPr>
-          <a:xfrm>
-            <a:off x="9119616" y="4169664"/>
-            <a:ext cx="826008" cy="310896"/>
-          </a:xfrm>
-          <a:prstGeom prst="rect">
-            <a:avLst/>
-          </a:prstGeom>
-          <a:noFill/>
-          <a:ln/>
-        </p:spPr>
-        <p:txBody>
-          <a:bodyPr wrap="square" lIns="0" tIns="0" rIns="0" bIns="0" rtlCol="0" anchor="ctr">
-            <a:normAutofit/>
-          </a:bodyPr>
-          <a:lstStyle/>
-          <a:p>
-            <a:pPr algn="ctr" indent="0" marL="0">
-              <a:buNone/>
-            </a:pPr>
-            <a:r>
-              <a:rPr lang="en-US" sz="1500" b="1" dirty="0">
-                <a:solidFill>
-                  <a:srgbClr val="FFFFFF"/>
-                </a:solidFill>
-                <a:latin typeface="Aptos" pitchFamily="34" charset="0"/>
-                <a:ea typeface="Aptos" pitchFamily="34" charset="-122"/>
-                <a:cs typeface="Aptos" pitchFamily="34" charset="-120"/>
-              </a:rPr>
-              <a:t>Tool</a:t>
-            </a:r>
-            <a:endParaRPr lang="en-US" sz="1500" dirty="0"/>
-          </a:p>
-        </p:txBody>
-      </p:sp>
-      <p:sp>
-        <p:nvSpPr>
-          <p:cNvPr id="17" name="Shape 15"/>
-          <p:cNvSpPr/>
-          <p:nvPr/>
-        </p:nvSpPr>
-        <p:spPr>
-          <a:xfrm>
-            <a:off x="10274808" y="3977640"/>
-            <a:ext cx="972312" cy="749808"/>
-          </a:xfrm>
-          <a:prstGeom prst="roundRect">
-            <a:avLst>
-              <a:gd name="adj" fmla="val 14634"/>
-            </a:avLst>
-          </a:prstGeom>
-          <a:solidFill>
-            <a:srgbClr val="D69A2D"/>
-          </a:solidFill>
-          <a:ln w="12700">
-            <a:solidFill>
-              <a:srgbClr val="D69A2D"/>
-            </a:solidFill>
-            <a:prstDash val="solid"/>
-          </a:ln>
-        </p:spPr>
-      </p:sp>
-      <p:sp>
-        <p:nvSpPr>
-          <p:cNvPr id="18" name="Text 16"/>
-          <p:cNvSpPr/>
-          <p:nvPr/>
-        </p:nvSpPr>
-        <p:spPr>
-          <a:xfrm>
-            <a:off x="10347960" y="4169664"/>
-            <a:ext cx="826008" cy="310896"/>
-          </a:xfrm>
-          <a:prstGeom prst="rect">
-            <a:avLst/>
-          </a:prstGeom>
-          <a:noFill/>
-          <a:ln/>
-        </p:spPr>
-        <p:txBody>
-          <a:bodyPr wrap="square" lIns="0" tIns="0" rIns="0" bIns="0" rtlCol="0" anchor="ctr">
-            <a:normAutofit/>
-          </a:bodyPr>
-          <a:lstStyle/>
-          <a:p>
-            <a:pPr algn="ctr" indent="0" marL="0">
-              <a:buNone/>
-            </a:pPr>
-            <a:r>
-              <a:rPr lang="en-US" sz="1500" b="1" dirty="0">
-                <a:solidFill>
-                  <a:srgbClr val="FFFFFF"/>
-                </a:solidFill>
-                <a:latin typeface="Aptos" pitchFamily="34" charset="0"/>
-                <a:ea typeface="Aptos" pitchFamily="34" charset="-122"/>
-                <a:cs typeface="Aptos" pitchFamily="34" charset="-120"/>
-              </a:rPr>
-              <a:t>Artifact</a:t>
-            </a:r>
-            <a:endParaRPr lang="en-US" sz="1500" dirty="0"/>
+            <a:r>
+              <a:rPr lang="en-US" sz="1380" dirty="0">
+                <a:solidFill>
+                  <a:srgbClr val="17364A"/>
+                </a:solidFill>
+                <a:latin typeface="Aptos" pitchFamily="34" charset="0"/>
+                <a:ea typeface="Aptos" pitchFamily="34" charset="-122"/>
+                <a:cs typeface="Aptos" pitchFamily="34" charset="-120"/>
+              </a:rPr>
+              <a:t>Use a tool when no comparable local process exists.</a:t>
+            </a:r>
+            <a:endParaRPr lang="en-US" sz="1380" dirty="0"/>
+          </a:p>
+          <a:p>
+            <a:r>
+              <a:rPr lang="en-US" sz="1380" dirty="0">
+                <a:solidFill>
+                  <a:srgbClr val="17364A"/>
+                </a:solidFill>
+                <a:latin typeface="Aptos" pitchFamily="34" charset="0"/>
+                <a:ea typeface="Aptos" pitchFamily="34" charset="-122"/>
+                <a:cs typeface="Aptos" pitchFamily="34" charset="-120"/>
+              </a:rPr>
+              <a:t>Adapt existing department templates when they already fit the purpose.</a:t>
+            </a:r>
+            <a:endParaRPr lang="en-US" sz="1380" dirty="0"/>
+          </a:p>
+          <a:p>
+            <a:r>
+              <a:rPr lang="en-US" sz="1380" dirty="0">
+                <a:solidFill>
+                  <a:srgbClr val="17364A"/>
+                </a:solidFill>
+                <a:latin typeface="Aptos" pitchFamily="34" charset="0"/>
+                <a:ea typeface="Aptos" pitchFamily="34" charset="-122"/>
+                <a:cs typeface="Aptos" pitchFamily="34" charset="-120"/>
+              </a:rPr>
+              <a:t>Save the completed artifact as evidence of the decision.</a:t>
+            </a:r>
+            <a:endParaRPr lang="en-US" sz="1380" dirty="0"/>
           </a:p>
         </p:txBody>
       </p:sp>
@@ -15547,13 +14953,11 @@
             </a:avLst>
           </a:prstGeom>
           <a:solidFill>
-            <a:srgbClr val="FFFFFF">
-              <a:alpha val="88000"/>
-            </a:srgbClr>
+            <a:srgbClr val="FFFFFF"/>
           </a:solidFill>
           <a:ln w="12700">
             <a:solidFill>
-              <a:srgbClr val="D6E8F2"/>
+              <a:srgbClr val="B9D7E6"/>
             </a:solidFill>
             <a:prstDash val="solid"/>
           </a:ln>
@@ -15561,26 +14965,42 @@
       </p:sp>
       <p:sp>
         <p:nvSpPr>
-          <p:cNvPr id="14" name="Shape 12"/>
-          <p:cNvSpPr/>
-          <p:nvPr/>
-        </p:nvSpPr>
-        <p:spPr>
-          <a:xfrm>
-            <a:off x="8046720" y="3108960"/>
-            <a:ext cx="2651760" cy="896112"/>
-          </a:xfrm>
-          <a:prstGeom prst="arc">
-            <a:avLst/>
-          </a:prstGeom>
-          <a:noFill/>
-          <a:ln w="25400">
-            <a:solidFill>
-              <a:srgbClr val="0068B7"/>
-            </a:solidFill>
-            <a:prstDash val="solid"/>
-          </a:ln>
-        </p:spPr>
+          <p:cNvPr id="14" name="Text 12"/>
+          <p:cNvSpPr/>
+          <p:nvPr/>
+        </p:nvSpPr>
+        <p:spPr>
+          <a:xfrm>
+            <a:off x="7799832" y="2935224"/>
+            <a:ext cx="3145536" cy="256032"/>
+          </a:xfrm>
+          <a:prstGeom prst="rect">
+            <a:avLst/>
+          </a:prstGeom>
+          <a:noFill/>
+          <a:ln/>
+        </p:spPr>
+        <p:txBody>
+          <a:bodyPr wrap="square" lIns="0" tIns="0" rIns="0" bIns="0" rtlCol="0" anchor="ctr"/>
+          <a:lstStyle/>
+          <a:p>
+            <a:pPr indent="0" marL="0">
+              <a:buNone/>
+            </a:pPr>
+            <a:r>
+              <a:rPr lang="en-US" sz="1300" b="1" dirty="0">
+                <a:solidFill>
+                  <a:srgbClr val="0068B7"/>
+                </a:solidFill>
+                <a:latin typeface="Aptos" pitchFamily="34" charset="0"/>
+                <a:ea typeface="Aptos" pitchFamily="34" charset="-122"/>
+                <a:cs typeface="Aptos" pitchFamily="34" charset="-120"/>
+              </a:rPr>
+              <a:t>Concept checkpoints</a:t>
+            </a:r>
+            <a:endParaRPr lang="en-US" sz="1300" dirty="0"/>
+          </a:p>
+        </p:txBody>
       </p:sp>
       <p:sp>
         <p:nvSpPr>
@@ -15590,102 +15010,53 @@
         </p:nvSpPr>
         <p:spPr>
           <a:xfrm>
-            <a:off x="7909560" y="3099816"/>
-            <a:ext cx="2926080" cy="256032"/>
-          </a:xfrm>
-          <a:prstGeom prst="rect">
-            <a:avLst/>
-          </a:prstGeom>
-          <a:noFill/>
-          <a:ln/>
-        </p:spPr>
-        <p:txBody>
-          <a:bodyPr wrap="square" lIns="0" tIns="0" rIns="0" bIns="0" rtlCol="0" anchor="ctr"/>
-          <a:lstStyle/>
-          <a:p>
-            <a:pPr algn="ctr" indent="0" marL="0">
-              <a:buNone/>
-            </a:pPr>
-            <a:r>
-              <a:rPr lang="en-US" sz="1500" b="1" dirty="0">
-                <a:solidFill>
-                  <a:srgbClr val="003A63"/>
-                </a:solidFill>
-                <a:latin typeface="Aptos" pitchFamily="34" charset="0"/>
-                <a:ea typeface="Aptos" pitchFamily="34" charset="-122"/>
-                <a:cs typeface="Aptos" pitchFamily="34" charset="-120"/>
-              </a:rPr>
-              <a:t>Risk</a:t>
-            </a:r>
-            <a:endParaRPr lang="en-US" sz="1500" dirty="0"/>
+            <a:off x="7818120" y="3300984"/>
+            <a:ext cx="3090672" cy="877824"/>
+          </a:xfrm>
+          <a:prstGeom prst="rect">
+            <a:avLst/>
+          </a:prstGeom>
+          <a:noFill/>
+          <a:ln/>
+        </p:spPr>
+        <p:txBody>
+          <a:bodyPr wrap="square" lIns="254" tIns="254" rIns="254" bIns="254" rtlCol="0" anchor="t">
+            <a:normAutofit/>
+          </a:bodyPr>
+          <a:lstStyle/>
+          <a:p>
+            <a:r>
+              <a:rPr lang="en-US" sz="1380" dirty="0">
+                <a:solidFill>
+                  <a:srgbClr val="17364A"/>
+                </a:solidFill>
+                <a:latin typeface="Aptos" pitchFamily="34" charset="0"/>
+                <a:ea typeface="Aptos" pitchFamily="34" charset="-122"/>
+                <a:cs typeface="Aptos" pitchFamily="34" charset="-120"/>
+              </a:rPr>
+              <a:t>Define subgroup performance measures and review thresholds for AI-supported workflows.</a:t>
+            </a:r>
+            <a:endParaRPr lang="en-US" sz="1380" dirty="0"/>
+          </a:p>
+          <a:p>
+            <a:r>
+              <a:rPr lang="en-US" sz="1380" dirty="0">
+                <a:solidFill>
+                  <a:srgbClr val="17364A"/>
+                </a:solidFill>
+                <a:latin typeface="Aptos" pitchFamily="34" charset="0"/>
+                <a:ea typeface="Aptos" pitchFamily="34" charset="-122"/>
+                <a:cs typeface="Aptos" pitchFamily="34" charset="-120"/>
+              </a:rPr>
+              <a:t>Produce an equity evaluation plan for a model or AI-supported workflow.</a:t>
+            </a:r>
+            <a:endParaRPr lang="en-US" sz="1380" dirty="0"/>
           </a:p>
         </p:txBody>
       </p:sp>
       <p:sp>
         <p:nvSpPr>
           <p:cNvPr id="16" name="Shape 14"/>
-          <p:cNvSpPr/>
-          <p:nvPr/>
-        </p:nvSpPr>
-        <p:spPr>
-          <a:xfrm>
-            <a:off x="8366760" y="3639312"/>
-            <a:ext cx="2011680" cy="0"/>
-          </a:xfrm>
-          <a:prstGeom prst="line">
-            <a:avLst/>
-          </a:prstGeom>
-          <a:noFill/>
-          <a:ln w="63500">
-            <a:solidFill>
-              <a:srgbClr val="2F8A28"/>
-            </a:solidFill>
-            <a:prstDash val="solid"/>
-          </a:ln>
-        </p:spPr>
-      </p:sp>
-      <p:sp>
-        <p:nvSpPr>
-          <p:cNvPr id="17" name="Text 15"/>
-          <p:cNvSpPr/>
-          <p:nvPr/>
-        </p:nvSpPr>
-        <p:spPr>
-          <a:xfrm>
-            <a:off x="7909560" y="3849624"/>
-            <a:ext cx="2926080" cy="164592"/>
-          </a:xfrm>
-          <a:prstGeom prst="rect">
-            <a:avLst/>
-          </a:prstGeom>
-          <a:noFill/>
-          <a:ln/>
-        </p:spPr>
-        <p:txBody>
-          <a:bodyPr wrap="square" lIns="0" tIns="0" rIns="0" bIns="0" rtlCol="0" anchor="ctr"/>
-          <a:lstStyle/>
-          <a:p>
-            <a:pPr algn="ctr" indent="0" marL="0">
-              <a:buNone/>
-            </a:pPr>
-            <a:r>
-              <a:rPr lang="en-US" sz="900" dirty="0">
-                <a:solidFill>
-                  <a:srgbClr val="003A63"/>
-                </a:solidFill>
-                <a:latin typeface="Aptos" pitchFamily="34" charset="0"/>
-                <a:ea typeface="Aptos" pitchFamily="34" charset="-122"/>
-                <a:cs typeface="Aptos" pitchFamily="34" charset="-120"/>
-              </a:rPr>
-              <a:t>Human review</a:t>
-            </a:r>
-            <a:endParaRPr lang="en-US" sz="900" dirty="0"/>
-          </a:p>
-        </p:txBody>
-      </p:sp>
-      <p:sp>
-        <p:nvSpPr>
-          <p:cNvPr id="18" name="Shape 16"/>
           <p:cNvSpPr/>
           <p:nvPr/>
         </p:nvSpPr>
@@ -15712,7 +15083,7 @@
       </p:sp>
       <p:sp>
         <p:nvSpPr>
-          <p:cNvPr id="19" name="Text 17"/>
+          <p:cNvPr id="17" name="Text 15"/>
           <p:cNvSpPr/>
           <p:nvPr/>
         </p:nvSpPr>
@@ -15751,7 +15122,7 @@
       </p:sp>
       <p:sp>
         <p:nvSpPr>
-          <p:cNvPr id="20" name="Text 18"/>
+          <p:cNvPr id="18" name="Text 16"/>
           <p:cNvSpPr/>
           <p:nvPr/>
         </p:nvSpPr>
@@ -16259,13 +15630,11 @@
             </a:avLst>
           </a:prstGeom>
           <a:solidFill>
-            <a:srgbClr val="FFFFFF">
-              <a:alpha val="88000"/>
-            </a:srgbClr>
+            <a:srgbClr val="FFFFFF"/>
           </a:solidFill>
           <a:ln w="12700">
             <a:solidFill>
-              <a:srgbClr val="D6E8F2"/>
+              <a:srgbClr val="B9D7E6"/>
             </a:solidFill>
             <a:prstDash val="solid"/>
           </a:ln>
@@ -16273,26 +15642,42 @@
       </p:sp>
       <p:sp>
         <p:nvSpPr>
-          <p:cNvPr id="14" name="Shape 12"/>
-          <p:cNvSpPr/>
-          <p:nvPr/>
-        </p:nvSpPr>
-        <p:spPr>
-          <a:xfrm>
-            <a:off x="8046720" y="3108960"/>
-            <a:ext cx="2651760" cy="896112"/>
-          </a:xfrm>
-          <a:prstGeom prst="arc">
-            <a:avLst/>
-          </a:prstGeom>
-          <a:noFill/>
-          <a:ln w="25400">
-            <a:solidFill>
-              <a:srgbClr val="0068B7"/>
-            </a:solidFill>
-            <a:prstDash val="solid"/>
-          </a:ln>
-        </p:spPr>
+          <p:cNvPr id="14" name="Text 12"/>
+          <p:cNvSpPr/>
+          <p:nvPr/>
+        </p:nvSpPr>
+        <p:spPr>
+          <a:xfrm>
+            <a:off x="7799832" y="2935224"/>
+            <a:ext cx="3145536" cy="256032"/>
+          </a:xfrm>
+          <a:prstGeom prst="rect">
+            <a:avLst/>
+          </a:prstGeom>
+          <a:noFill/>
+          <a:ln/>
+        </p:spPr>
+        <p:txBody>
+          <a:bodyPr wrap="square" lIns="0" tIns="0" rIns="0" bIns="0" rtlCol="0" anchor="ctr"/>
+          <a:lstStyle/>
+          <a:p>
+            <a:pPr indent="0" marL="0">
+              <a:buNone/>
+            </a:pPr>
+            <a:r>
+              <a:rPr lang="en-US" sz="1300" b="1" dirty="0">
+                <a:solidFill>
+                  <a:srgbClr val="0068B7"/>
+                </a:solidFill>
+                <a:latin typeface="Aptos" pitchFamily="34" charset="0"/>
+                <a:ea typeface="Aptos" pitchFamily="34" charset="-122"/>
+                <a:cs typeface="Aptos" pitchFamily="34" charset="-120"/>
+              </a:rPr>
+              <a:t>Concept checkpoints</a:t>
+            </a:r>
+            <a:endParaRPr lang="en-US" sz="1300" dirty="0"/>
+          </a:p>
+        </p:txBody>
       </p:sp>
       <p:sp>
         <p:nvSpPr>
@@ -16302,102 +15687,67 @@
         </p:nvSpPr>
         <p:spPr>
           <a:xfrm>
-            <a:off x="7909560" y="3099816"/>
-            <a:ext cx="2926080" cy="256032"/>
-          </a:xfrm>
-          <a:prstGeom prst="rect">
-            <a:avLst/>
-          </a:prstGeom>
-          <a:noFill/>
-          <a:ln/>
-        </p:spPr>
-        <p:txBody>
-          <a:bodyPr wrap="square" lIns="0" tIns="0" rIns="0" bIns="0" rtlCol="0" anchor="ctr"/>
-          <a:lstStyle/>
-          <a:p>
-            <a:pPr algn="ctr" indent="0" marL="0">
-              <a:buNone/>
-            </a:pPr>
-            <a:r>
-              <a:rPr lang="en-US" sz="1500" b="1" dirty="0">
-                <a:solidFill>
-                  <a:srgbClr val="003A63"/>
-                </a:solidFill>
-                <a:latin typeface="Aptos" pitchFamily="34" charset="0"/>
-                <a:ea typeface="Aptos" pitchFamily="34" charset="-122"/>
-                <a:cs typeface="Aptos" pitchFamily="34" charset="-120"/>
-              </a:rPr>
-              <a:t>Risk</a:t>
-            </a:r>
-            <a:endParaRPr lang="en-US" sz="1500" dirty="0"/>
+            <a:off x="7818120" y="3300984"/>
+            <a:ext cx="3090672" cy="877824"/>
+          </a:xfrm>
+          <a:prstGeom prst="rect">
+            <a:avLst/>
+          </a:prstGeom>
+          <a:noFill/>
+          <a:ln/>
+        </p:spPr>
+        <p:txBody>
+          <a:bodyPr wrap="square" lIns="254" tIns="254" rIns="254" bIns="254" rtlCol="0" anchor="t">
+            <a:normAutofit/>
+          </a:bodyPr>
+          <a:lstStyle/>
+          <a:p>
+            <a:r>
+              <a:rPr lang="en-US" sz="1380" dirty="0">
+                <a:solidFill>
+                  <a:srgbClr val="17364A"/>
+                </a:solidFill>
+                <a:latin typeface="Aptos" pitchFamily="34" charset="0"/>
+                <a:ea typeface="Aptos" pitchFamily="34" charset="-122"/>
+                <a:cs typeface="Aptos" pitchFamily="34" charset="-120"/>
+              </a:rPr>
+              <a:t>Equity evaluation examines whether an AI model performs differently across populations,.</a:t>
+            </a:r>
+            <a:endParaRPr lang="en-US" sz="1380" dirty="0"/>
+          </a:p>
+          <a:p>
+            <a:r>
+              <a:rPr lang="en-US" sz="1380" dirty="0">
+                <a:solidFill>
+                  <a:srgbClr val="17364A"/>
+                </a:solidFill>
+                <a:latin typeface="Aptos" pitchFamily="34" charset="0"/>
+                <a:ea typeface="Aptos" pitchFamily="34" charset="-122"/>
+                <a:cs typeface="Aptos" pitchFamily="34" charset="-120"/>
+              </a:rPr>
+              <a:t>Public health agencies have a responsibility to evaluate not only average model.</a:t>
+            </a:r>
+            <a:endParaRPr lang="en-US" sz="1380" dirty="0"/>
+          </a:p>
+          <a:p>
+            <a:r>
+              <a:rPr lang="en-US" sz="1380" dirty="0">
+                <a:solidFill>
+                  <a:srgbClr val="17364A"/>
+                </a:solidFill>
+                <a:latin typeface="Aptos" pitchFamily="34" charset="0"/>
+                <a:ea typeface="Aptos" pitchFamily="34" charset="-122"/>
+                <a:cs typeface="Aptos" pitchFamily="34" charset="-120"/>
+              </a:rPr>
+              <a:t>This is especially important when AI is used to prioritize cases, allocate services,.</a:t>
+            </a:r>
+            <a:endParaRPr lang="en-US" sz="1380" dirty="0"/>
           </a:p>
         </p:txBody>
       </p:sp>
       <p:sp>
         <p:nvSpPr>
           <p:cNvPr id="16" name="Shape 14"/>
-          <p:cNvSpPr/>
-          <p:nvPr/>
-        </p:nvSpPr>
-        <p:spPr>
-          <a:xfrm>
-            <a:off x="8366760" y="3639312"/>
-            <a:ext cx="2011680" cy="0"/>
-          </a:xfrm>
-          <a:prstGeom prst="line">
-            <a:avLst/>
-          </a:prstGeom>
-          <a:noFill/>
-          <a:ln w="63500">
-            <a:solidFill>
-              <a:srgbClr val="2F8A28"/>
-            </a:solidFill>
-            <a:prstDash val="solid"/>
-          </a:ln>
-        </p:spPr>
-      </p:sp>
-      <p:sp>
-        <p:nvSpPr>
-          <p:cNvPr id="17" name="Text 15"/>
-          <p:cNvSpPr/>
-          <p:nvPr/>
-        </p:nvSpPr>
-        <p:spPr>
-          <a:xfrm>
-            <a:off x="7909560" y="3849624"/>
-            <a:ext cx="2926080" cy="164592"/>
-          </a:xfrm>
-          <a:prstGeom prst="rect">
-            <a:avLst/>
-          </a:prstGeom>
-          <a:noFill/>
-          <a:ln/>
-        </p:spPr>
-        <p:txBody>
-          <a:bodyPr wrap="square" lIns="0" tIns="0" rIns="0" bIns="0" rtlCol="0" anchor="ctr"/>
-          <a:lstStyle/>
-          <a:p>
-            <a:pPr algn="ctr" indent="0" marL="0">
-              <a:buNone/>
-            </a:pPr>
-            <a:r>
-              <a:rPr lang="en-US" sz="900" dirty="0">
-                <a:solidFill>
-                  <a:srgbClr val="003A63"/>
-                </a:solidFill>
-                <a:latin typeface="Aptos" pitchFamily="34" charset="0"/>
-                <a:ea typeface="Aptos" pitchFamily="34" charset="-122"/>
-                <a:cs typeface="Aptos" pitchFamily="34" charset="-120"/>
-              </a:rPr>
-              <a:t>Human review</a:t>
-            </a:r>
-            <a:endParaRPr lang="en-US" sz="900" dirty="0"/>
-          </a:p>
-        </p:txBody>
-      </p:sp>
-      <p:sp>
-        <p:nvSpPr>
-          <p:cNvPr id="18" name="Shape 16"/>
           <p:cNvSpPr/>
           <p:nvPr/>
         </p:nvSpPr>
@@ -16424,7 +15774,7 @@
       </p:sp>
       <p:sp>
         <p:nvSpPr>
-          <p:cNvPr id="19" name="Text 17"/>
+          <p:cNvPr id="17" name="Text 15"/>
           <p:cNvSpPr/>
           <p:nvPr/>
         </p:nvSpPr>
@@ -16463,7 +15813,7 @@
       </p:sp>
       <p:sp>
         <p:nvSpPr>
-          <p:cNvPr id="20" name="Text 18"/>
+          <p:cNvPr id="18" name="Text 16"/>
           <p:cNvSpPr/>
           <p:nvPr/>
         </p:nvSpPr>
@@ -16971,13 +16321,11 @@
             </a:avLst>
           </a:prstGeom>
           <a:solidFill>
-            <a:srgbClr val="FFFFFF">
-              <a:alpha val="88000"/>
-            </a:srgbClr>
+            <a:srgbClr val="FFFFFF"/>
           </a:solidFill>
           <a:ln w="12700">
             <a:solidFill>
-              <a:srgbClr val="D6E8F2"/>
+              <a:srgbClr val="B9D7E6"/>
             </a:solidFill>
             <a:prstDash val="solid"/>
           </a:ln>
@@ -16985,190 +16333,112 @@
       </p:sp>
       <p:sp>
         <p:nvSpPr>
-          <p:cNvPr id="14" name="Shape 12"/>
-          <p:cNvSpPr/>
-          <p:nvPr/>
-        </p:nvSpPr>
-        <p:spPr>
-          <a:xfrm>
-            <a:off x="7891272" y="3108960"/>
-            <a:ext cx="566928" cy="566928"/>
-          </a:xfrm>
-          <a:prstGeom prst="ellipse">
-            <a:avLst/>
-          </a:prstGeom>
-          <a:solidFill>
-            <a:srgbClr val="0068B7"/>
-          </a:solidFill>
-          <a:ln w="12700">
-            <a:solidFill>
-              <a:srgbClr val="0068B7"/>
-            </a:solidFill>
-            <a:prstDash val="solid"/>
-          </a:ln>
-        </p:spPr>
-      </p:sp>
-      <p:sp>
-        <p:nvSpPr>
-          <p:cNvPr id="15" name="Shape 13"/>
-          <p:cNvSpPr/>
-          <p:nvPr/>
-        </p:nvSpPr>
-        <p:spPr>
-          <a:xfrm>
-            <a:off x="10287000" y="3108960"/>
-            <a:ext cx="566928" cy="566928"/>
-          </a:xfrm>
-          <a:prstGeom prst="ellipse">
-            <a:avLst/>
-          </a:prstGeom>
-          <a:solidFill>
-            <a:srgbClr val="2F8A28"/>
-          </a:solidFill>
-          <a:ln w="12700">
-            <a:solidFill>
-              <a:srgbClr val="2F8A28"/>
-            </a:solidFill>
-            <a:prstDash val="solid"/>
-          </a:ln>
-        </p:spPr>
+          <p:cNvPr id="14" name="Text 12"/>
+          <p:cNvSpPr/>
+          <p:nvPr/>
+        </p:nvSpPr>
+        <p:spPr>
+          <a:xfrm>
+            <a:off x="7799832" y="2935224"/>
+            <a:ext cx="3145536" cy="256032"/>
+          </a:xfrm>
+          <a:prstGeom prst="rect">
+            <a:avLst/>
+          </a:prstGeom>
+          <a:noFill/>
+          <a:ln/>
+        </p:spPr>
+        <p:txBody>
+          <a:bodyPr wrap="square" lIns="0" tIns="0" rIns="0" bIns="0" rtlCol="0" anchor="ctr"/>
+          <a:lstStyle/>
+          <a:p>
+            <a:pPr indent="0" marL="0">
+              <a:buNone/>
+            </a:pPr>
+            <a:r>
+              <a:rPr lang="en-US" sz="1300" b="1" dirty="0">
+                <a:solidFill>
+                  <a:srgbClr val="0068B7"/>
+                </a:solidFill>
+                <a:latin typeface="Aptos" pitchFamily="34" charset="0"/>
+                <a:ea typeface="Aptos" pitchFamily="34" charset="-122"/>
+                <a:cs typeface="Aptos" pitchFamily="34" charset="-120"/>
+              </a:rPr>
+              <a:t>Concept checkpoints</a:t>
+            </a:r>
+            <a:endParaRPr lang="en-US" sz="1300" dirty="0"/>
+          </a:p>
+        </p:txBody>
+      </p:sp>
+      <p:sp>
+        <p:nvSpPr>
+          <p:cNvPr id="15" name="Text 13"/>
+          <p:cNvSpPr/>
+          <p:nvPr/>
+        </p:nvSpPr>
+        <p:spPr>
+          <a:xfrm>
+            <a:off x="7818120" y="3300984"/>
+            <a:ext cx="3090672" cy="877824"/>
+          </a:xfrm>
+          <a:prstGeom prst="rect">
+            <a:avLst/>
+          </a:prstGeom>
+          <a:noFill/>
+          <a:ln/>
+        </p:spPr>
+        <p:txBody>
+          <a:bodyPr wrap="square" lIns="254" tIns="254" rIns="254" bIns="254" rtlCol="0" anchor="t">
+            <a:normAutofit/>
+          </a:bodyPr>
+          <a:lstStyle/>
+          <a:p>
+            <a:r>
+              <a:rPr lang="en-US" sz="1380" dirty="0">
+                <a:solidFill>
+                  <a:srgbClr val="17364A"/>
+                </a:solidFill>
+                <a:latin typeface="Aptos" pitchFamily="34" charset="0"/>
+                <a:ea typeface="Aptos" pitchFamily="34" charset="-122"/>
+                <a:cs typeface="Aptos" pitchFamily="34" charset="-120"/>
+              </a:rPr>
+              <a:t>It is not legal advice and does not replace review by agency legal counsel, privacy.</a:t>
+            </a:r>
+            <a:endParaRPr lang="en-US" sz="1380" dirty="0"/>
+          </a:p>
+          <a:p>
+            <a:r>
+              <a:rPr lang="en-US" sz="1380" dirty="0">
+                <a:solidFill>
+                  <a:srgbClr val="17364A"/>
+                </a:solidFill>
+                <a:latin typeface="Aptos" pitchFamily="34" charset="0"/>
+                <a:ea typeface="Aptos" pitchFamily="34" charset="-122"/>
+                <a:cs typeface="Aptos" pitchFamily="34" charset="-120"/>
+              </a:rPr>
+              <a:t>Requirements may vary by state, locality, territory, Tribe, agency, funding source,.</a:t>
+            </a:r>
+            <a:endParaRPr lang="en-US" sz="1380" dirty="0"/>
+          </a:p>
+          <a:p>
+            <a:r>
+              <a:rPr lang="en-US" sz="1380" dirty="0">
+                <a:solidFill>
+                  <a:srgbClr val="17364A"/>
+                </a:solidFill>
+                <a:latin typeface="Aptos" pitchFamily="34" charset="0"/>
+                <a:ea typeface="Aptos" pitchFamily="34" charset="-122"/>
+                <a:cs typeface="Aptos" pitchFamily="34" charset="-120"/>
+              </a:rPr>
+              <a:t>Learners should use this module to identify the issues that require review and should.</a:t>
+            </a:r>
+            <a:endParaRPr lang="en-US" sz="1380" dirty="0"/>
+          </a:p>
+        </p:txBody>
       </p:sp>
       <p:sp>
         <p:nvSpPr>
           <p:cNvPr id="16" name="Shape 14"/>
-          <p:cNvSpPr/>
-          <p:nvPr/>
-        </p:nvSpPr>
-        <p:spPr>
-          <a:xfrm>
-            <a:off x="9089136" y="3456432"/>
-            <a:ext cx="566928" cy="566928"/>
-          </a:xfrm>
-          <a:prstGeom prst="ellipse">
-            <a:avLst/>
-          </a:prstGeom>
-          <a:solidFill>
-            <a:srgbClr val="6A4CA3"/>
-          </a:solidFill>
-          <a:ln w="12700">
-            <a:solidFill>
-              <a:srgbClr val="6A4CA3"/>
-            </a:solidFill>
-            <a:prstDash val="solid"/>
-          </a:ln>
-        </p:spPr>
-      </p:sp>
-      <p:sp>
-        <p:nvSpPr>
-          <p:cNvPr id="17" name="Shape 15"/>
-          <p:cNvSpPr/>
-          <p:nvPr/>
-        </p:nvSpPr>
-        <p:spPr>
-          <a:xfrm>
-            <a:off x="8385048" y="3419856"/>
-            <a:ext cx="1975104" cy="0"/>
-          </a:xfrm>
-          <a:prstGeom prst="line">
-            <a:avLst/>
-          </a:prstGeom>
-          <a:noFill/>
-          <a:ln w="25400">
-            <a:solidFill>
-              <a:srgbClr val="8ABBD8"/>
-            </a:solidFill>
-            <a:prstDash val="solid"/>
-          </a:ln>
-        </p:spPr>
-      </p:sp>
-      <p:sp>
-        <p:nvSpPr>
-          <p:cNvPr id="18" name="Shape 16"/>
-          <p:cNvSpPr/>
-          <p:nvPr/>
-        </p:nvSpPr>
-        <p:spPr>
-          <a:xfrm>
-            <a:off x="8202168" y="3630168"/>
-            <a:ext cx="1170432" cy="118872"/>
-          </a:xfrm>
-          <a:prstGeom prst="line">
-            <a:avLst/>
-          </a:prstGeom>
-          <a:noFill/>
-          <a:ln w="25400">
-            <a:solidFill>
-              <a:srgbClr val="8ABBD8"/>
-            </a:solidFill>
-            <a:prstDash val="solid"/>
-          </a:ln>
-        </p:spPr>
-      </p:sp>
-      <p:sp>
-        <p:nvSpPr>
-          <p:cNvPr id="19" name="Shape 17"/>
-          <p:cNvSpPr/>
-          <p:nvPr/>
-        </p:nvSpPr>
-        <p:spPr>
-          <a:xfrm>
-            <a:off x="10543032" y="3630168"/>
-            <a:ext cx="-1170432" cy="118872"/>
-          </a:xfrm>
-          <a:prstGeom prst="line">
-            <a:avLst/>
-          </a:prstGeom>
-          <a:noFill/>
-          <a:ln w="25400">
-            <a:solidFill>
-              <a:srgbClr val="8ABBD8"/>
-            </a:solidFill>
-            <a:prstDash val="solid"/>
-          </a:ln>
-        </p:spPr>
-      </p:sp>
-      <p:sp>
-        <p:nvSpPr>
-          <p:cNvPr id="20" name="Text 18"/>
-          <p:cNvSpPr/>
-          <p:nvPr/>
-        </p:nvSpPr>
-        <p:spPr>
-          <a:xfrm>
-            <a:off x="7863840" y="4069080"/>
-            <a:ext cx="3017520" cy="164592"/>
-          </a:xfrm>
-          <a:prstGeom prst="rect">
-            <a:avLst/>
-          </a:prstGeom>
-          <a:noFill/>
-          <a:ln/>
-        </p:spPr>
-        <p:txBody>
-          <a:bodyPr wrap="square" lIns="0" tIns="0" rIns="0" bIns="0" rtlCol="0" anchor="ctr"/>
-          <a:lstStyle/>
-          <a:p>
-            <a:pPr algn="ctr" indent="0" marL="0">
-              <a:buNone/>
-            </a:pPr>
-            <a:r>
-              <a:rPr lang="en-US" sz="900" b="1" dirty="0">
-                <a:solidFill>
-                  <a:srgbClr val="003A63"/>
-                </a:solidFill>
-                <a:latin typeface="Aptos" pitchFamily="34" charset="0"/>
-                <a:ea typeface="Aptos" pitchFamily="34" charset="-122"/>
-                <a:cs typeface="Aptos" pitchFamily="34" charset="-120"/>
-              </a:rPr>
-              <a:t>Decision rights</a:t>
-            </a:r>
-            <a:endParaRPr lang="en-US" sz="900" dirty="0"/>
-          </a:p>
-        </p:txBody>
-      </p:sp>
-      <p:sp>
-        <p:nvSpPr>
-          <p:cNvPr id="21" name="Shape 19"/>
           <p:cNvSpPr/>
           <p:nvPr/>
         </p:nvSpPr>
@@ -17195,7 +16465,7 @@
       </p:sp>
       <p:sp>
         <p:nvSpPr>
-          <p:cNvPr id="22" name="Text 20"/>
+          <p:cNvPr id="17" name="Text 15"/>
           <p:cNvSpPr/>
           <p:nvPr/>
         </p:nvSpPr>
@@ -17234,7 +16504,7 @@
       </p:sp>
       <p:sp>
         <p:nvSpPr>
-          <p:cNvPr id="23" name="Text 21"/>
+          <p:cNvPr id="18" name="Text 16"/>
           <p:cNvSpPr/>
           <p:nvPr/>
         </p:nvSpPr>
@@ -17742,13 +17012,11 @@
             </a:avLst>
           </a:prstGeom>
           <a:solidFill>
-            <a:srgbClr val="FFFFFF">
-              <a:alpha val="88000"/>
-            </a:srgbClr>
+            <a:srgbClr val="FFFFFF"/>
           </a:solidFill>
           <a:ln w="12700">
             <a:solidFill>
-              <a:srgbClr val="D6E8F2"/>
+              <a:srgbClr val="B9D7E6"/>
             </a:solidFill>
             <a:prstDash val="solid"/>
           </a:ln>
@@ -17756,26 +17024,42 @@
       </p:sp>
       <p:sp>
         <p:nvSpPr>
-          <p:cNvPr id="14" name="Shape 12"/>
-          <p:cNvSpPr/>
-          <p:nvPr/>
-        </p:nvSpPr>
-        <p:spPr>
-          <a:xfrm>
-            <a:off x="8046720" y="3108960"/>
-            <a:ext cx="2651760" cy="896112"/>
-          </a:xfrm>
-          <a:prstGeom prst="arc">
-            <a:avLst/>
-          </a:prstGeom>
-          <a:noFill/>
-          <a:ln w="25400">
-            <a:solidFill>
-              <a:srgbClr val="0068B7"/>
-            </a:solidFill>
-            <a:prstDash val="solid"/>
-          </a:ln>
-        </p:spPr>
+          <p:cNvPr id="14" name="Text 12"/>
+          <p:cNvSpPr/>
+          <p:nvPr/>
+        </p:nvSpPr>
+        <p:spPr>
+          <a:xfrm>
+            <a:off x="7799832" y="2935224"/>
+            <a:ext cx="3145536" cy="256032"/>
+          </a:xfrm>
+          <a:prstGeom prst="rect">
+            <a:avLst/>
+          </a:prstGeom>
+          <a:noFill/>
+          <a:ln/>
+        </p:spPr>
+        <p:txBody>
+          <a:bodyPr wrap="square" lIns="0" tIns="0" rIns="0" bIns="0" rtlCol="0" anchor="ctr"/>
+          <a:lstStyle/>
+          <a:p>
+            <a:pPr indent="0" marL="0">
+              <a:buNone/>
+            </a:pPr>
+            <a:r>
+              <a:rPr lang="en-US" sz="1300" b="1" dirty="0">
+                <a:solidFill>
+                  <a:srgbClr val="0068B7"/>
+                </a:solidFill>
+                <a:latin typeface="Aptos" pitchFamily="34" charset="0"/>
+                <a:ea typeface="Aptos" pitchFamily="34" charset="-122"/>
+                <a:cs typeface="Aptos" pitchFamily="34" charset="-120"/>
+              </a:rPr>
+              <a:t>Concept checkpoints</a:t>
+            </a:r>
+            <a:endParaRPr lang="en-US" sz="1300" dirty="0"/>
+          </a:p>
+        </p:txBody>
       </p:sp>
       <p:sp>
         <p:nvSpPr>
@@ -17785,102 +17069,67 @@
         </p:nvSpPr>
         <p:spPr>
           <a:xfrm>
-            <a:off x="7909560" y="3099816"/>
-            <a:ext cx="2926080" cy="256032"/>
-          </a:xfrm>
-          <a:prstGeom prst="rect">
-            <a:avLst/>
-          </a:prstGeom>
-          <a:noFill/>
-          <a:ln/>
-        </p:spPr>
-        <p:txBody>
-          <a:bodyPr wrap="square" lIns="0" tIns="0" rIns="0" bIns="0" rtlCol="0" anchor="ctr"/>
-          <a:lstStyle/>
-          <a:p>
-            <a:pPr algn="ctr" indent="0" marL="0">
-              <a:buNone/>
-            </a:pPr>
-            <a:r>
-              <a:rPr lang="en-US" sz="1500" b="1" dirty="0">
-                <a:solidFill>
-                  <a:srgbClr val="003A63"/>
-                </a:solidFill>
-                <a:latin typeface="Aptos" pitchFamily="34" charset="0"/>
-                <a:ea typeface="Aptos" pitchFamily="34" charset="-122"/>
-                <a:cs typeface="Aptos" pitchFamily="34" charset="-120"/>
-              </a:rPr>
-              <a:t>Risk</a:t>
-            </a:r>
-            <a:endParaRPr lang="en-US" sz="1500" dirty="0"/>
+            <a:off x="7818120" y="3300984"/>
+            <a:ext cx="3090672" cy="877824"/>
+          </a:xfrm>
+          <a:prstGeom prst="rect">
+            <a:avLst/>
+          </a:prstGeom>
+          <a:noFill/>
+          <a:ln/>
+        </p:spPr>
+        <p:txBody>
+          <a:bodyPr wrap="square" lIns="254" tIns="254" rIns="254" bIns="254" rtlCol="0" anchor="t">
+            <a:normAutofit/>
+          </a:bodyPr>
+          <a:lstStyle/>
+          <a:p>
+            <a:r>
+              <a:rPr lang="en-US" sz="1380" dirty="0">
+                <a:solidFill>
+                  <a:srgbClr val="17364A"/>
+                </a:solidFill>
+                <a:latin typeface="Aptos" pitchFamily="34" charset="0"/>
+                <a:ea typeface="Aptos" pitchFamily="34" charset="-122"/>
+                <a:cs typeface="Aptos" pitchFamily="34" charset="-120"/>
+              </a:rPr>
+              <a:t>Overall performance appears acceptable, but subgroup review shows lower sensitivity for.</a:t>
+            </a:r>
+            <a:endParaRPr lang="en-US" sz="1380" dirty="0"/>
+          </a:p>
+          <a:p>
+            <a:r>
+              <a:rPr lang="en-US" sz="1380" dirty="0">
+                <a:solidFill>
+                  <a:srgbClr val="17364A"/>
+                </a:solidFill>
+                <a:latin typeface="Aptos" pitchFamily="34" charset="0"/>
+                <a:ea typeface="Aptos" pitchFamily="34" charset="-122"/>
+                <a:cs typeface="Aptos" pitchFamily="34" charset="-120"/>
+              </a:rPr>
+              <a:t>The model may under-prioritize people who face transportation, broadband, housing, or.</a:t>
+            </a:r>
+            <a:endParaRPr lang="en-US" sz="1380" dirty="0"/>
+          </a:p>
+          <a:p>
+            <a:r>
+              <a:rPr lang="en-US" sz="1380" dirty="0">
+                <a:solidFill>
+                  <a:srgbClr val="17364A"/>
+                </a:solidFill>
+                <a:latin typeface="Aptos" pitchFamily="34" charset="0"/>
+                <a:ea typeface="Aptos" pitchFamily="34" charset="-122"/>
+                <a:cs typeface="Aptos" pitchFamily="34" charset="-120"/>
+              </a:rPr>
+              <a:t>Equity evaluation would require additional analysis, workflow changes, and monitoring.</a:t>
+            </a:r>
+            <a:endParaRPr lang="en-US" sz="1380" dirty="0"/>
           </a:p>
         </p:txBody>
       </p:sp>
       <p:sp>
         <p:nvSpPr>
           <p:cNvPr id="16" name="Shape 14"/>
-          <p:cNvSpPr/>
-          <p:nvPr/>
-        </p:nvSpPr>
-        <p:spPr>
-          <a:xfrm>
-            <a:off x="8366760" y="3639312"/>
-            <a:ext cx="2011680" cy="0"/>
-          </a:xfrm>
-          <a:prstGeom prst="line">
-            <a:avLst/>
-          </a:prstGeom>
-          <a:noFill/>
-          <a:ln w="63500">
-            <a:solidFill>
-              <a:srgbClr val="2F8A28"/>
-            </a:solidFill>
-            <a:prstDash val="solid"/>
-          </a:ln>
-        </p:spPr>
-      </p:sp>
-      <p:sp>
-        <p:nvSpPr>
-          <p:cNvPr id="17" name="Text 15"/>
-          <p:cNvSpPr/>
-          <p:nvPr/>
-        </p:nvSpPr>
-        <p:spPr>
-          <a:xfrm>
-            <a:off x="7909560" y="3849624"/>
-            <a:ext cx="2926080" cy="164592"/>
-          </a:xfrm>
-          <a:prstGeom prst="rect">
-            <a:avLst/>
-          </a:prstGeom>
-          <a:noFill/>
-          <a:ln/>
-        </p:spPr>
-        <p:txBody>
-          <a:bodyPr wrap="square" lIns="0" tIns="0" rIns="0" bIns="0" rtlCol="0" anchor="ctr"/>
-          <a:lstStyle/>
-          <a:p>
-            <a:pPr algn="ctr" indent="0" marL="0">
-              <a:buNone/>
-            </a:pPr>
-            <a:r>
-              <a:rPr lang="en-US" sz="900" dirty="0">
-                <a:solidFill>
-                  <a:srgbClr val="003A63"/>
-                </a:solidFill>
-                <a:latin typeface="Aptos" pitchFamily="34" charset="0"/>
-                <a:ea typeface="Aptos" pitchFamily="34" charset="-122"/>
-                <a:cs typeface="Aptos" pitchFamily="34" charset="-120"/>
-              </a:rPr>
-              <a:t>Human review</a:t>
-            </a:r>
-            <a:endParaRPr lang="en-US" sz="900" dirty="0"/>
-          </a:p>
-        </p:txBody>
-      </p:sp>
-      <p:sp>
-        <p:nvSpPr>
-          <p:cNvPr id="18" name="Shape 16"/>
           <p:cNvSpPr/>
           <p:nvPr/>
         </p:nvSpPr>
@@ -17907,7 +17156,7 @@
       </p:sp>
       <p:sp>
         <p:nvSpPr>
-          <p:cNvPr id="19" name="Text 17"/>
+          <p:cNvPr id="17" name="Text 15"/>
           <p:cNvSpPr/>
           <p:nvPr/>
         </p:nvSpPr>
@@ -17946,7 +17195,7 @@
       </p:sp>
       <p:sp>
         <p:nvSpPr>
-          <p:cNvPr id="20" name="Text 18"/>
+          <p:cNvPr id="18" name="Text 16"/>
           <p:cNvSpPr/>
           <p:nvPr/>
         </p:nvSpPr>
@@ -18454,13 +17703,11 @@
             </a:avLst>
           </a:prstGeom>
           <a:solidFill>
-            <a:srgbClr val="FFFFFF">
-              <a:alpha val="88000"/>
-            </a:srgbClr>
+            <a:srgbClr val="FFFFFF"/>
           </a:solidFill>
           <a:ln w="12700">
             <a:solidFill>
-              <a:srgbClr val="D6E8F2"/>
+              <a:srgbClr val="B9D7E6"/>
             </a:solidFill>
             <a:prstDash val="solid"/>
           </a:ln>
@@ -18468,26 +17715,42 @@
       </p:sp>
       <p:sp>
         <p:nvSpPr>
-          <p:cNvPr id="14" name="Shape 12"/>
-          <p:cNvSpPr/>
-          <p:nvPr/>
-        </p:nvSpPr>
-        <p:spPr>
-          <a:xfrm>
-            <a:off x="8046720" y="3108960"/>
-            <a:ext cx="2651760" cy="896112"/>
-          </a:xfrm>
-          <a:prstGeom prst="arc">
-            <a:avLst/>
-          </a:prstGeom>
-          <a:noFill/>
-          <a:ln w="25400">
-            <a:solidFill>
-              <a:srgbClr val="0068B7"/>
-            </a:solidFill>
-            <a:prstDash val="solid"/>
-          </a:ln>
-        </p:spPr>
+          <p:cNvPr id="14" name="Text 12"/>
+          <p:cNvSpPr/>
+          <p:nvPr/>
+        </p:nvSpPr>
+        <p:spPr>
+          <a:xfrm>
+            <a:off x="7799832" y="2935224"/>
+            <a:ext cx="3145536" cy="256032"/>
+          </a:xfrm>
+          <a:prstGeom prst="rect">
+            <a:avLst/>
+          </a:prstGeom>
+          <a:noFill/>
+          <a:ln/>
+        </p:spPr>
+        <p:txBody>
+          <a:bodyPr wrap="square" lIns="0" tIns="0" rIns="0" bIns="0" rtlCol="0" anchor="ctr"/>
+          <a:lstStyle/>
+          <a:p>
+            <a:pPr indent="0" marL="0">
+              <a:buNone/>
+            </a:pPr>
+            <a:r>
+              <a:rPr lang="en-US" sz="1300" b="1" dirty="0">
+                <a:solidFill>
+                  <a:srgbClr val="0068B7"/>
+                </a:solidFill>
+                <a:latin typeface="Aptos" pitchFamily="34" charset="0"/>
+                <a:ea typeface="Aptos" pitchFamily="34" charset="-122"/>
+                <a:cs typeface="Aptos" pitchFamily="34" charset="-120"/>
+              </a:rPr>
+              <a:t>Concept checkpoints</a:t>
+            </a:r>
+            <a:endParaRPr lang="en-US" sz="1300" dirty="0"/>
+          </a:p>
+        </p:txBody>
       </p:sp>
       <p:sp>
         <p:nvSpPr>
@@ -18497,102 +17760,67 @@
         </p:nvSpPr>
         <p:spPr>
           <a:xfrm>
-            <a:off x="7909560" y="3099816"/>
-            <a:ext cx="2926080" cy="256032"/>
-          </a:xfrm>
-          <a:prstGeom prst="rect">
-            <a:avLst/>
-          </a:prstGeom>
-          <a:noFill/>
-          <a:ln/>
-        </p:spPr>
-        <p:txBody>
-          <a:bodyPr wrap="square" lIns="0" tIns="0" rIns="0" bIns="0" rtlCol="0" anchor="ctr"/>
-          <a:lstStyle/>
-          <a:p>
-            <a:pPr algn="ctr" indent="0" marL="0">
-              <a:buNone/>
-            </a:pPr>
-            <a:r>
-              <a:rPr lang="en-US" sz="1500" b="1" dirty="0">
-                <a:solidFill>
-                  <a:srgbClr val="003A63"/>
-                </a:solidFill>
-                <a:latin typeface="Aptos" pitchFamily="34" charset="0"/>
-                <a:ea typeface="Aptos" pitchFamily="34" charset="-122"/>
-                <a:cs typeface="Aptos" pitchFamily="34" charset="-120"/>
-              </a:rPr>
-              <a:t>Risk</a:t>
-            </a:r>
-            <a:endParaRPr lang="en-US" sz="1500" dirty="0"/>
+            <a:off x="7818120" y="3300984"/>
+            <a:ext cx="3090672" cy="877824"/>
+          </a:xfrm>
+          <a:prstGeom prst="rect">
+            <a:avLst/>
+          </a:prstGeom>
+          <a:noFill/>
+          <a:ln/>
+        </p:spPr>
+        <p:txBody>
+          <a:bodyPr wrap="square" lIns="254" tIns="254" rIns="254" bIns="254" rtlCol="0" anchor="t">
+            <a:normAutofit/>
+          </a:bodyPr>
+          <a:lstStyle/>
+          <a:p>
+            <a:r>
+              <a:rPr lang="en-US" sz="1380" dirty="0">
+                <a:solidFill>
+                  <a:srgbClr val="17364A"/>
+                </a:solidFill>
+                <a:latin typeface="Aptos" pitchFamily="34" charset="0"/>
+                <a:ea typeface="Aptos" pitchFamily="34" charset="-122"/>
+                <a:cs typeface="Aptos" pitchFamily="34" charset="-120"/>
+              </a:rPr>
+              <a:t>A model used for internal workload planning has different equity implications than a model.</a:t>
+            </a:r>
+            <a:endParaRPr lang="en-US" sz="1380" dirty="0"/>
+          </a:p>
+          <a:p>
+            <a:r>
+              <a:rPr lang="en-US" sz="1380" dirty="0">
+                <a:solidFill>
+                  <a:srgbClr val="17364A"/>
+                </a:solidFill>
+                <a:latin typeface="Aptos" pitchFamily="34" charset="0"/>
+                <a:ea typeface="Aptos" pitchFamily="34" charset="-122"/>
+                <a:cs typeface="Aptos" pitchFamily="34" charset="-120"/>
+              </a:rPr>
+              <a:t>Evaluators should identify who is affected by the model output, what action follows, and.</a:t>
+            </a:r>
+            <a:endParaRPr lang="en-US" sz="1380" dirty="0"/>
+          </a:p>
+          <a:p>
+            <a:r>
+              <a:rPr lang="en-US" sz="1380" dirty="0">
+                <a:solidFill>
+                  <a:srgbClr val="17364A"/>
+                </a:solidFill>
+                <a:latin typeface="Aptos" pitchFamily="34" charset="0"/>
+                <a:ea typeface="Aptos" pitchFamily="34" charset="-122"/>
+                <a:cs typeface="Aptos" pitchFamily="34" charset="-120"/>
+              </a:rPr>
+              <a:t>Data assessment is the next step.</a:t>
+            </a:r>
+            <a:endParaRPr lang="en-US" sz="1380" dirty="0"/>
           </a:p>
         </p:txBody>
       </p:sp>
       <p:sp>
         <p:nvSpPr>
           <p:cNvPr id="16" name="Shape 14"/>
-          <p:cNvSpPr/>
-          <p:nvPr/>
-        </p:nvSpPr>
-        <p:spPr>
-          <a:xfrm>
-            <a:off x="8366760" y="3639312"/>
-            <a:ext cx="2011680" cy="0"/>
-          </a:xfrm>
-          <a:prstGeom prst="line">
-            <a:avLst/>
-          </a:prstGeom>
-          <a:noFill/>
-          <a:ln w="63500">
-            <a:solidFill>
-              <a:srgbClr val="2F8A28"/>
-            </a:solidFill>
-            <a:prstDash val="solid"/>
-          </a:ln>
-        </p:spPr>
-      </p:sp>
-      <p:sp>
-        <p:nvSpPr>
-          <p:cNvPr id="17" name="Text 15"/>
-          <p:cNvSpPr/>
-          <p:nvPr/>
-        </p:nvSpPr>
-        <p:spPr>
-          <a:xfrm>
-            <a:off x="7909560" y="3849624"/>
-            <a:ext cx="2926080" cy="164592"/>
-          </a:xfrm>
-          <a:prstGeom prst="rect">
-            <a:avLst/>
-          </a:prstGeom>
-          <a:noFill/>
-          <a:ln/>
-        </p:spPr>
-        <p:txBody>
-          <a:bodyPr wrap="square" lIns="0" tIns="0" rIns="0" bIns="0" rtlCol="0" anchor="ctr"/>
-          <a:lstStyle/>
-          <a:p>
-            <a:pPr algn="ctr" indent="0" marL="0">
-              <a:buNone/>
-            </a:pPr>
-            <a:r>
-              <a:rPr lang="en-US" sz="900" dirty="0">
-                <a:solidFill>
-                  <a:srgbClr val="003A63"/>
-                </a:solidFill>
-                <a:latin typeface="Aptos" pitchFamily="34" charset="0"/>
-                <a:ea typeface="Aptos" pitchFamily="34" charset="-122"/>
-                <a:cs typeface="Aptos" pitchFamily="34" charset="-120"/>
-              </a:rPr>
-              <a:t>Human review</a:t>
-            </a:r>
-            <a:endParaRPr lang="en-US" sz="900" dirty="0"/>
-          </a:p>
-        </p:txBody>
-      </p:sp>
-      <p:sp>
-        <p:nvSpPr>
-          <p:cNvPr id="18" name="Shape 16"/>
           <p:cNvSpPr/>
           <p:nvPr/>
         </p:nvSpPr>
@@ -18619,7 +17847,7 @@
       </p:sp>
       <p:sp>
         <p:nvSpPr>
-          <p:cNvPr id="19" name="Text 17"/>
+          <p:cNvPr id="17" name="Text 15"/>
           <p:cNvSpPr/>
           <p:nvPr/>
         </p:nvSpPr>
@@ -18658,7 +17886,7 @@
       </p:sp>
       <p:sp>
         <p:nvSpPr>
-          <p:cNvPr id="20" name="Text 18"/>
+          <p:cNvPr id="18" name="Text 16"/>
           <p:cNvSpPr/>
           <p:nvPr/>
         </p:nvSpPr>

--- a/downloads/presentations/modules/anl-330.pptx
+++ b/downloads/presentations/modules/anl-330.pptx
@@ -3447,49 +3447,58 @@
           <a:ln/>
         </p:spPr>
         <p:txBody>
-          <a:bodyPr wrap="square" lIns="635" tIns="635" rIns="635" bIns="635" rtlCol="0" anchor="t">
+          <a:bodyPr wrap="square" lIns="1016" tIns="1016" rIns="1016" bIns="1016" rtlCol="0" anchor="t">
             <a:normAutofit/>
           </a:bodyPr>
           <a:lstStyle/>
           <a:p>
+            <a:pPr indent="0" marL="0">
+              <a:buNone/>
+            </a:pPr>
             <a:r>
               <a:rPr lang="en-US" sz="2100" dirty="0">
                 <a:solidFill>
-                  <a:srgbClr val="17364A"/>
-                </a:solidFill>
-                <a:latin typeface="Aptos" pitchFamily="34" charset="0"/>
-                <a:ea typeface="Aptos" pitchFamily="34" charset="-122"/>
-                <a:cs typeface="Aptos" pitchFamily="34" charset="-120"/>
-              </a:rPr>
-              <a:t>Equity evaluation should lead to action.</a:t>
+                  <a:srgbClr val="003A63"/>
+                </a:solidFill>
+                <a:latin typeface="Aptos" pitchFamily="34" charset="0"/>
+                <a:ea typeface="Aptos" pitchFamily="34" charset="-122"/>
+                <a:cs typeface="Aptos" pitchFamily="34" charset="-120"/>
+              </a:rPr>
+              <a:t>• Equity evaluation should lead to action.</a:t>
             </a:r>
             <a:endParaRPr lang="en-US" sz="2100" dirty="0"/>
           </a:p>
           <a:p>
+            <a:pPr indent="0" marL="0">
+              <a:buNone/>
+            </a:pPr>
             <a:r>
               <a:rPr lang="en-US" sz="2100" dirty="0">
                 <a:solidFill>
-                  <a:srgbClr val="17364A"/>
-                </a:solidFill>
-                <a:latin typeface="Aptos" pitchFamily="34" charset="0"/>
-                <a:ea typeface="Aptos" pitchFamily="34" charset="-122"/>
-                <a:cs typeface="Aptos" pitchFamily="34" charset="-120"/>
-              </a:rPr>
-              <a:t>Mitigations may include changing thresholds, improving data collection, adding human review, limiting.</a:t>
+                  <a:srgbClr val="003A63"/>
+                </a:solidFill>
+                <a:latin typeface="Aptos" pitchFamily="34" charset="0"/>
+                <a:ea typeface="Aptos" pitchFamily="34" charset="-122"/>
+                <a:cs typeface="Aptos" pitchFamily="34" charset="-120"/>
+              </a:rPr>
+              <a:t>• Mitigations may include changing thresholds, improving data collection, adding human review,.</a:t>
             </a:r>
             <a:endParaRPr lang="en-US" sz="2100" dirty="0"/>
           </a:p>
           <a:p>
+            <a:pPr indent="0" marL="0">
+              <a:buNone/>
+            </a:pPr>
             <a:r>
               <a:rPr lang="en-US" sz="2100" dirty="0">
                 <a:solidFill>
-                  <a:srgbClr val="17364A"/>
-                </a:solidFill>
-                <a:latin typeface="Aptos" pitchFamily="34" charset="0"/>
-                <a:ea typeface="Aptos" pitchFamily="34" charset="-122"/>
-                <a:cs typeface="Aptos" pitchFamily="34" charset="-120"/>
-              </a:rPr>
-              <a:t>Equity monitoring should continue after launch because data patterns and workflow use can change.</a:t>
+                  <a:srgbClr val="003A63"/>
+                </a:solidFill>
+                <a:latin typeface="Aptos" pitchFamily="34" charset="0"/>
+                <a:ea typeface="Aptos" pitchFamily="34" charset="-122"/>
+                <a:cs typeface="Aptos" pitchFamily="34" charset="-120"/>
+              </a:rPr>
+              <a:t>• Equity monitoring should continue after launch because data patterns and workflow use can.</a:t>
             </a:r>
             <a:endParaRPr lang="en-US" sz="2100" dirty="0"/>
           </a:p>
@@ -3569,17 +3578,17 @@
         </p:nvSpPr>
         <p:spPr>
           <a:xfrm>
-            <a:off x="7799832" y="1828800"/>
-            <a:ext cx="3145536" cy="685800"/>
-          </a:xfrm>
-          <a:prstGeom prst="rect">
-            <a:avLst/>
-          </a:prstGeom>
-          <a:noFill/>
-          <a:ln/>
-        </p:spPr>
-        <p:txBody>
-          <a:bodyPr wrap="square" lIns="0" tIns="0" rIns="0" bIns="0" rtlCol="0" anchor="t">
+            <a:off x="7799832" y="1801368"/>
+            <a:ext cx="3145536" cy="758952"/>
+          </a:xfrm>
+          <a:prstGeom prst="rect">
+            <a:avLst/>
+          </a:prstGeom>
+          <a:noFill/>
+          <a:ln/>
+        </p:spPr>
+        <p:txBody>
+          <a:bodyPr wrap="square" lIns="254" tIns="254" rIns="254" bIns="254" rtlCol="0" anchor="t">
             <a:normAutofit/>
           </a:bodyPr>
           <a:lstStyle/>
@@ -3588,7 +3597,7 @@
               <a:buNone/>
             </a:pPr>
             <a:r>
-              <a:rPr lang="en-US" sz="1550" dirty="0">
+              <a:rPr lang="en-US" sz="1320" dirty="0">
                 <a:solidFill>
                   <a:srgbClr val="17364A"/>
                 </a:solidFill>
@@ -3598,7 +3607,7 @@
               </a:rPr>
               <a:t>Equity evaluation should lead to action.</a:t>
             </a:r>
-            <a:endParaRPr lang="en-US" sz="1550" dirty="0"/>
+            <a:endParaRPr lang="en-US" sz="1320" dirty="0"/>
           </a:p>
         </p:txBody>
       </p:sp>
@@ -3686,13 +3695,16 @@
           <a:ln/>
         </p:spPr>
         <p:txBody>
-          <a:bodyPr wrap="square" lIns="254" tIns="254" rIns="254" bIns="254" rtlCol="0" anchor="t">
+          <a:bodyPr wrap="square" lIns="508" tIns="508" rIns="508" bIns="508" rtlCol="0" anchor="t">
             <a:normAutofit/>
           </a:bodyPr>
           <a:lstStyle/>
           <a:p>
-            <a:r>
-              <a:rPr lang="en-US" sz="1380" dirty="0">
+            <a:pPr indent="0" marL="0">
+              <a:buNone/>
+            </a:pPr>
+            <a:r>
+              <a:rPr lang="en-US" sz="1220" dirty="0">
                 <a:solidFill>
                   <a:srgbClr val="17364A"/>
                 </a:solidFill>
@@ -3702,11 +3714,14 @@
               </a:rPr>
               <a:t>Equity evaluation should lead to action.</a:t>
             </a:r>
-            <a:endParaRPr lang="en-US" sz="1380" dirty="0"/>
-          </a:p>
-          <a:p>
-            <a:r>
-              <a:rPr lang="en-US" sz="1380" dirty="0">
+            <a:endParaRPr lang="en-US" sz="1220" dirty="0"/>
+          </a:p>
+          <a:p>
+            <a:pPr indent="0" marL="0">
+              <a:buNone/>
+            </a:pPr>
+            <a:r>
+              <a:rPr lang="en-US" sz="1220" dirty="0">
                 <a:solidFill>
                   <a:srgbClr val="17364A"/>
                 </a:solidFill>
@@ -3714,13 +3729,16 @@
                 <a:ea typeface="Aptos" pitchFamily="34" charset="-122"/>
                 <a:cs typeface="Aptos" pitchFamily="34" charset="-120"/>
               </a:rPr>
-              <a:t>Mitigations may include changing thresholds, improving data collection, adding human.</a:t>
-            </a:r>
-            <a:endParaRPr lang="en-US" sz="1380" dirty="0"/>
-          </a:p>
-          <a:p>
-            <a:r>
-              <a:rPr lang="en-US" sz="1380" dirty="0">
+              <a:t>Mitigations may include changing thresholds, improving data.</a:t>
+            </a:r>
+            <a:endParaRPr lang="en-US" sz="1220" dirty="0"/>
+          </a:p>
+          <a:p>
+            <a:pPr indent="0" marL="0">
+              <a:buNone/>
+            </a:pPr>
+            <a:r>
+              <a:rPr lang="en-US" sz="1220" dirty="0">
                 <a:solidFill>
                   <a:srgbClr val="17364A"/>
                 </a:solidFill>
@@ -3728,9 +3746,9 @@
                 <a:ea typeface="Aptos" pitchFamily="34" charset="-122"/>
                 <a:cs typeface="Aptos" pitchFamily="34" charset="-120"/>
               </a:rPr>
-              <a:t>Equity monitoring should continue after launch because data patterns and workflow use can.</a:t>
-            </a:r>
-            <a:endParaRPr lang="en-US" sz="1380" dirty="0"/>
+              <a:t>Equity monitoring should continue after launch because data.</a:t>
+            </a:r>
+            <a:endParaRPr lang="en-US" sz="1220" dirty="0"/>
           </a:p>
         </p:txBody>
       </p:sp>
@@ -3808,17 +3826,17 @@
         </p:nvSpPr>
         <p:spPr>
           <a:xfrm>
-            <a:off x="7799832" y="5001768"/>
-            <a:ext cx="3145536" cy="502920"/>
-          </a:xfrm>
-          <a:prstGeom prst="rect">
-            <a:avLst/>
-          </a:prstGeom>
-          <a:noFill/>
-          <a:ln/>
-        </p:spPr>
-        <p:txBody>
-          <a:bodyPr wrap="square" lIns="0" tIns="0" rIns="0" bIns="0" rtlCol="0" anchor="t">
+            <a:off x="7799832" y="4974336"/>
+            <a:ext cx="3145536" cy="576072"/>
+          </a:xfrm>
+          <a:prstGeom prst="rect">
+            <a:avLst/>
+          </a:prstGeom>
+          <a:noFill/>
+          <a:ln/>
+        </p:spPr>
+        <p:txBody>
+          <a:bodyPr wrap="square" lIns="254" tIns="254" rIns="254" bIns="254" rtlCol="0" anchor="t">
             <a:normAutofit/>
           </a:bodyPr>
           <a:lstStyle/>
@@ -3827,7 +3845,7 @@
               <a:buNone/>
             </a:pPr>
             <a:r>
-              <a:rPr lang="en-US" sz="1550" dirty="0">
+              <a:rPr lang="en-US" sz="1320" dirty="0">
                 <a:solidFill>
                   <a:srgbClr val="17364A"/>
                 </a:solidFill>
@@ -3835,9 +3853,9 @@
                 <a:ea typeface="Aptos" pitchFamily="34" charset="-122"/>
                 <a:cs typeface="Aptos" pitchFamily="34" charset="-120"/>
               </a:rPr>
-              <a:t>Identify what could go wrong, who could be affected, what safeguards are needed, and what evidence should be reviewed before use expands.</a:t>
-            </a:r>
-            <a:endParaRPr lang="en-US" sz="1550" dirty="0"/>
+              <a:t>Identify what could go wrong, who could be affected, what safeguards are needed, and what evidence should be reviewed.</a:t>
+            </a:r>
+            <a:endParaRPr lang="en-US" sz="1320" dirty="0"/>
           </a:p>
         </p:txBody>
       </p:sp>
@@ -4138,49 +4156,58 @@
           <a:ln/>
         </p:spPr>
         <p:txBody>
-          <a:bodyPr wrap="square" lIns="635" tIns="635" rIns="635" bIns="635" rtlCol="0" anchor="t">
+          <a:bodyPr wrap="square" lIns="1016" tIns="1016" rIns="1016" bIns="1016" rtlCol="0" anchor="t">
             <a:normAutofit/>
           </a:bodyPr>
           <a:lstStyle/>
           <a:p>
+            <a:pPr indent="0" marL="0">
+              <a:buNone/>
+            </a:pPr>
             <a:r>
               <a:rPr lang="en-US" sz="2100" dirty="0">
                 <a:solidFill>
-                  <a:srgbClr val="17364A"/>
-                </a:solidFill>
-                <a:latin typeface="Aptos" pitchFamily="34" charset="0"/>
-                <a:ea typeface="Aptos" pitchFamily="34" charset="-122"/>
-                <a:cs typeface="Aptos" pitchFamily="34" charset="-120"/>
-              </a:rPr>
-              <a:t>Risks and failure modes include the following:</a:t>
+                  <a:srgbClr val="003A63"/>
+                </a:solidFill>
+                <a:latin typeface="Aptos" pitchFamily="34" charset="0"/>
+                <a:ea typeface="Aptos" pitchFamily="34" charset="-122"/>
+                <a:cs typeface="Aptos" pitchFamily="34" charset="-120"/>
+              </a:rPr>
+              <a:t>• Risks and failure modes include the following:</a:t>
             </a:r>
             <a:endParaRPr lang="en-US" sz="2100" dirty="0"/>
           </a:p>
           <a:p>
+            <a:pPr indent="0" marL="0">
+              <a:buNone/>
+            </a:pPr>
             <a:r>
               <a:rPr lang="en-US" sz="2100" dirty="0">
                 <a:solidFill>
-                  <a:srgbClr val="17364A"/>
-                </a:solidFill>
-                <a:latin typeface="Aptos" pitchFamily="34" charset="0"/>
-                <a:ea typeface="Aptos" pitchFamily="34" charset="-122"/>
-                <a:cs typeface="Aptos" pitchFamily="34" charset="-120"/>
-              </a:rPr>
-              <a:t>Relying on average performance while ignoring subgroup harms.</a:t>
+                  <a:srgbClr val="003A63"/>
+                </a:solidFill>
+                <a:latin typeface="Aptos" pitchFamily="34" charset="0"/>
+                <a:ea typeface="Aptos" pitchFamily="34" charset="-122"/>
+                <a:cs typeface="Aptos" pitchFamily="34" charset="-120"/>
+              </a:rPr>
+              <a:t>• Relying on average performance while ignoring subgroup harms.</a:t>
             </a:r>
             <a:endParaRPr lang="en-US" sz="2100" dirty="0"/>
           </a:p>
           <a:p>
+            <a:pPr indent="0" marL="0">
+              <a:buNone/>
+            </a:pPr>
             <a:r>
               <a:rPr lang="en-US" sz="2100" dirty="0">
                 <a:solidFill>
-                  <a:srgbClr val="17364A"/>
-                </a:solidFill>
-                <a:latin typeface="Aptos" pitchFamily="34" charset="0"/>
-                <a:ea typeface="Aptos" pitchFamily="34" charset="-122"/>
-                <a:cs typeface="Aptos" pitchFamily="34" charset="-120"/>
-              </a:rPr>
-              <a:t>Using datasets that underrepresent communities with limited healthcare access.</a:t>
+                  <a:srgbClr val="003A63"/>
+                </a:solidFill>
+                <a:latin typeface="Aptos" pitchFamily="34" charset="0"/>
+                <a:ea typeface="Aptos" pitchFamily="34" charset="-122"/>
+                <a:cs typeface="Aptos" pitchFamily="34" charset="-120"/>
+              </a:rPr>
+              <a:t>• Using datasets that underrepresent communities with limited healthcare access.</a:t>
             </a:r>
             <a:endParaRPr lang="en-US" sz="2100" dirty="0"/>
           </a:p>
@@ -4260,17 +4287,17 @@
         </p:nvSpPr>
         <p:spPr>
           <a:xfrm>
-            <a:off x="7799832" y="1828800"/>
-            <a:ext cx="3145536" cy="685800"/>
-          </a:xfrm>
-          <a:prstGeom prst="rect">
-            <a:avLst/>
-          </a:prstGeom>
-          <a:noFill/>
-          <a:ln/>
-        </p:spPr>
-        <p:txBody>
-          <a:bodyPr wrap="square" lIns="0" tIns="0" rIns="0" bIns="0" rtlCol="0" anchor="t">
+            <a:off x="7799832" y="1801368"/>
+            <a:ext cx="3145536" cy="758952"/>
+          </a:xfrm>
+          <a:prstGeom prst="rect">
+            <a:avLst/>
+          </a:prstGeom>
+          <a:noFill/>
+          <a:ln/>
+        </p:spPr>
+        <p:txBody>
+          <a:bodyPr wrap="square" lIns="254" tIns="254" rIns="254" bIns="254" rtlCol="0" anchor="t">
             <a:normAutofit/>
           </a:bodyPr>
           <a:lstStyle/>
@@ -4279,7 +4306,7 @@
               <a:buNone/>
             </a:pPr>
             <a:r>
-              <a:rPr lang="en-US" sz="1550" dirty="0">
+              <a:rPr lang="en-US" sz="1320" dirty="0">
                 <a:solidFill>
                   <a:srgbClr val="17364A"/>
                 </a:solidFill>
@@ -4289,7 +4316,7 @@
               </a:rPr>
               <a:t>Risks and failure modes include the following:</a:t>
             </a:r>
-            <a:endParaRPr lang="en-US" sz="1550" dirty="0"/>
+            <a:endParaRPr lang="en-US" sz="1320" dirty="0"/>
           </a:p>
         </p:txBody>
       </p:sp>
@@ -4377,13 +4404,16 @@
           <a:ln/>
         </p:spPr>
         <p:txBody>
-          <a:bodyPr wrap="square" lIns="254" tIns="254" rIns="254" bIns="254" rtlCol="0" anchor="t">
+          <a:bodyPr wrap="square" lIns="508" tIns="508" rIns="508" bIns="508" rtlCol="0" anchor="t">
             <a:normAutofit/>
           </a:bodyPr>
           <a:lstStyle/>
           <a:p>
-            <a:r>
-              <a:rPr lang="en-US" sz="1380" dirty="0">
+            <a:pPr indent="0" marL="0">
+              <a:buNone/>
+            </a:pPr>
+            <a:r>
+              <a:rPr lang="en-US" sz="1220" dirty="0">
                 <a:solidFill>
                   <a:srgbClr val="17364A"/>
                 </a:solidFill>
@@ -4393,11 +4423,14 @@
               </a:rPr>
               <a:t>Risks and failure modes include the following:</a:t>
             </a:r>
-            <a:endParaRPr lang="en-US" sz="1380" dirty="0"/>
-          </a:p>
-          <a:p>
-            <a:r>
-              <a:rPr lang="en-US" sz="1380" dirty="0">
+            <a:endParaRPr lang="en-US" sz="1220" dirty="0"/>
+          </a:p>
+          <a:p>
+            <a:pPr indent="0" marL="0">
+              <a:buNone/>
+            </a:pPr>
+            <a:r>
+              <a:rPr lang="en-US" sz="1220" dirty="0">
                 <a:solidFill>
                   <a:srgbClr val="17364A"/>
                 </a:solidFill>
@@ -4407,11 +4440,14 @@
               </a:rPr>
               <a:t>Relying on average performance while ignoring subgroup harms.</a:t>
             </a:r>
-            <a:endParaRPr lang="en-US" sz="1380" dirty="0"/>
-          </a:p>
-          <a:p>
-            <a:r>
-              <a:rPr lang="en-US" sz="1380" dirty="0">
+            <a:endParaRPr lang="en-US" sz="1220" dirty="0"/>
+          </a:p>
+          <a:p>
+            <a:pPr indent="0" marL="0">
+              <a:buNone/>
+            </a:pPr>
+            <a:r>
+              <a:rPr lang="en-US" sz="1220" dirty="0">
                 <a:solidFill>
                   <a:srgbClr val="17364A"/>
                 </a:solidFill>
@@ -4419,9 +4455,9 @@
                 <a:ea typeface="Aptos" pitchFamily="34" charset="-122"/>
                 <a:cs typeface="Aptos" pitchFamily="34" charset="-120"/>
               </a:rPr>
-              <a:t>Using datasets that underrepresent communities with limited healthcare access.</a:t>
-            </a:r>
-            <a:endParaRPr lang="en-US" sz="1380" dirty="0"/>
+              <a:t>Using datasets that underrepresent communities with limited.</a:t>
+            </a:r>
+            <a:endParaRPr lang="en-US" sz="1220" dirty="0"/>
           </a:p>
         </p:txBody>
       </p:sp>
@@ -4499,17 +4535,17 @@
         </p:nvSpPr>
         <p:spPr>
           <a:xfrm>
-            <a:off x="7799832" y="5001768"/>
-            <a:ext cx="3145536" cy="502920"/>
-          </a:xfrm>
-          <a:prstGeom prst="rect">
-            <a:avLst/>
-          </a:prstGeom>
-          <a:noFill/>
-          <a:ln/>
-        </p:spPr>
-        <p:txBody>
-          <a:bodyPr wrap="square" lIns="0" tIns="0" rIns="0" bIns="0" rtlCol="0" anchor="t">
+            <a:off x="7799832" y="4974336"/>
+            <a:ext cx="3145536" cy="576072"/>
+          </a:xfrm>
+          <a:prstGeom prst="rect">
+            <a:avLst/>
+          </a:prstGeom>
+          <a:noFill/>
+          <a:ln/>
+        </p:spPr>
+        <p:txBody>
+          <a:bodyPr wrap="square" lIns="254" tIns="254" rIns="254" bIns="254" rtlCol="0" anchor="t">
             <a:normAutofit/>
           </a:bodyPr>
           <a:lstStyle/>
@@ -4518,7 +4554,7 @@
               <a:buNone/>
             </a:pPr>
             <a:r>
-              <a:rPr lang="en-US" sz="1550" dirty="0">
+              <a:rPr lang="en-US" sz="1320" dirty="0">
                 <a:solidFill>
                   <a:srgbClr val="17364A"/>
                 </a:solidFill>
@@ -4526,9 +4562,9 @@
                 <a:ea typeface="Aptos" pitchFamily="34" charset="-122"/>
                 <a:cs typeface="Aptos" pitchFamily="34" charset="-120"/>
               </a:rPr>
-              <a:t>Identify what could go wrong, who could be affected, what safeguards are needed, and what evidence should be reviewed before use expands.</a:t>
-            </a:r>
-            <a:endParaRPr lang="en-US" sz="1550" dirty="0"/>
+              <a:t>Identify what could go wrong, who could be affected, what safeguards are needed, and what evidence should be reviewed.</a:t>
+            </a:r>
+            <a:endParaRPr lang="en-US" sz="1320" dirty="0"/>
           </a:p>
         </p:txBody>
       </p:sp>
@@ -4829,49 +4865,58 @@
           <a:ln/>
         </p:spPr>
         <p:txBody>
-          <a:bodyPr wrap="square" lIns="635" tIns="635" rIns="635" bIns="635" rtlCol="0" anchor="t">
+          <a:bodyPr wrap="square" lIns="1016" tIns="1016" rIns="1016" bIns="1016" rtlCol="0" anchor="t">
             <a:normAutofit/>
           </a:bodyPr>
           <a:lstStyle/>
           <a:p>
+            <a:pPr indent="0" marL="0">
+              <a:buNone/>
+            </a:pPr>
             <a:r>
               <a:rPr lang="en-US" sz="2100" dirty="0">
                 <a:solidFill>
-                  <a:srgbClr val="17364A"/>
-                </a:solidFill>
-                <a:latin typeface="Aptos" pitchFamily="34" charset="0"/>
-                <a:ea typeface="Aptos" pitchFamily="34" charset="-122"/>
-                <a:cs typeface="Aptos" pitchFamily="34" charset="-120"/>
-              </a:rPr>
-              <a:t>Treating missing data as neutral when missingness reflects structural inequities.</a:t>
+                  <a:srgbClr val="003A63"/>
+                </a:solidFill>
+                <a:latin typeface="Aptos" pitchFamily="34" charset="0"/>
+                <a:ea typeface="Aptos" pitchFamily="34" charset="-122"/>
+                <a:cs typeface="Aptos" pitchFamily="34" charset="-120"/>
+              </a:rPr>
+              <a:t>• Treating missing data as neutral when missingness reflects structural inequities.</a:t>
             </a:r>
             <a:endParaRPr lang="en-US" sz="2100" dirty="0"/>
           </a:p>
           <a:p>
+            <a:pPr indent="0" marL="0">
+              <a:buNone/>
+            </a:pPr>
             <a:r>
               <a:rPr lang="en-US" sz="2100" dirty="0">
                 <a:solidFill>
-                  <a:srgbClr val="17364A"/>
-                </a:solidFill>
-                <a:latin typeface="Aptos" pitchFamily="34" charset="0"/>
-                <a:ea typeface="Aptos" pitchFamily="34" charset="-122"/>
-                <a:cs typeface="Aptos" pitchFamily="34" charset="-120"/>
-              </a:rPr>
-              <a:t>Using AI prioritization to allocate scarce resources without equity review.</a:t>
+                  <a:srgbClr val="003A63"/>
+                </a:solidFill>
+                <a:latin typeface="Aptos" pitchFamily="34" charset="0"/>
+                <a:ea typeface="Aptos" pitchFamily="34" charset="-122"/>
+                <a:cs typeface="Aptos" pitchFamily="34" charset="-120"/>
+              </a:rPr>
+              <a:t>• Using AI prioritization to allocate scarce resources without equity review.</a:t>
             </a:r>
             <a:endParaRPr lang="en-US" sz="2100" dirty="0"/>
           </a:p>
           <a:p>
+            <a:pPr indent="0" marL="0">
+              <a:buNone/>
+            </a:pPr>
             <a:r>
               <a:rPr lang="en-US" sz="2100" dirty="0">
                 <a:solidFill>
-                  <a:srgbClr val="17364A"/>
-                </a:solidFill>
-                <a:latin typeface="Aptos" pitchFamily="34" charset="0"/>
-                <a:ea typeface="Aptos" pitchFamily="34" charset="-122"/>
-                <a:cs typeface="Aptos" pitchFamily="34" charset="-120"/>
-              </a:rPr>
-              <a:t>Failing to monitor equity impacts after deployment.</a:t>
+                  <a:srgbClr val="003A63"/>
+                </a:solidFill>
+                <a:latin typeface="Aptos" pitchFamily="34" charset="0"/>
+                <a:ea typeface="Aptos" pitchFamily="34" charset="-122"/>
+                <a:cs typeface="Aptos" pitchFamily="34" charset="-120"/>
+              </a:rPr>
+              <a:t>• Failing to monitor equity impacts after deployment.</a:t>
             </a:r>
             <a:endParaRPr lang="en-US" sz="2100" dirty="0"/>
           </a:p>
@@ -4951,17 +4996,17 @@
         </p:nvSpPr>
         <p:spPr>
           <a:xfrm>
-            <a:off x="7799832" y="1828800"/>
-            <a:ext cx="3145536" cy="685800"/>
-          </a:xfrm>
-          <a:prstGeom prst="rect">
-            <a:avLst/>
-          </a:prstGeom>
-          <a:noFill/>
-          <a:ln/>
-        </p:spPr>
-        <p:txBody>
-          <a:bodyPr wrap="square" lIns="0" tIns="0" rIns="0" bIns="0" rtlCol="0" anchor="t">
+            <a:off x="7799832" y="1801368"/>
+            <a:ext cx="3145536" cy="758952"/>
+          </a:xfrm>
+          <a:prstGeom prst="rect">
+            <a:avLst/>
+          </a:prstGeom>
+          <a:noFill/>
+          <a:ln/>
+        </p:spPr>
+        <p:txBody>
+          <a:bodyPr wrap="square" lIns="254" tIns="254" rIns="254" bIns="254" rtlCol="0" anchor="t">
             <a:normAutofit/>
           </a:bodyPr>
           <a:lstStyle/>
@@ -4970,7 +5015,7 @@
               <a:buNone/>
             </a:pPr>
             <a:r>
-              <a:rPr lang="en-US" sz="1550" dirty="0">
+              <a:rPr lang="en-US" sz="1320" dirty="0">
                 <a:solidFill>
                   <a:srgbClr val="17364A"/>
                 </a:solidFill>
@@ -4980,7 +5025,7 @@
               </a:rPr>
               <a:t>Treating missing data as neutral when missingness reflects structural inequities.</a:t>
             </a:r>
-            <a:endParaRPr lang="en-US" sz="1550" dirty="0"/>
+            <a:endParaRPr lang="en-US" sz="1320" dirty="0"/>
           </a:p>
         </p:txBody>
       </p:sp>
@@ -5068,13 +5113,16 @@
           <a:ln/>
         </p:spPr>
         <p:txBody>
-          <a:bodyPr wrap="square" lIns="254" tIns="254" rIns="254" bIns="254" rtlCol="0" anchor="t">
+          <a:bodyPr wrap="square" lIns="508" tIns="508" rIns="508" bIns="508" rtlCol="0" anchor="t">
             <a:normAutofit/>
           </a:bodyPr>
           <a:lstStyle/>
           <a:p>
-            <a:r>
-              <a:rPr lang="en-US" sz="1380" dirty="0">
+            <a:pPr indent="0" marL="0">
+              <a:buNone/>
+            </a:pPr>
+            <a:r>
+              <a:rPr lang="en-US" sz="1220" dirty="0">
                 <a:solidFill>
                   <a:srgbClr val="17364A"/>
                 </a:solidFill>
@@ -5082,13 +5130,16 @@
                 <a:ea typeface="Aptos" pitchFamily="34" charset="-122"/>
                 <a:cs typeface="Aptos" pitchFamily="34" charset="-120"/>
               </a:rPr>
-              <a:t>Treating missing data as neutral when missingness reflects structural inequities.</a:t>
-            </a:r>
-            <a:endParaRPr lang="en-US" sz="1380" dirty="0"/>
-          </a:p>
-          <a:p>
-            <a:r>
-              <a:rPr lang="en-US" sz="1380" dirty="0">
+              <a:t>Treating missing data as neutral when missingness reflects.</a:t>
+            </a:r>
+            <a:endParaRPr lang="en-US" sz="1220" dirty="0"/>
+          </a:p>
+          <a:p>
+            <a:pPr indent="0" marL="0">
+              <a:buNone/>
+            </a:pPr>
+            <a:r>
+              <a:rPr lang="en-US" sz="1220" dirty="0">
                 <a:solidFill>
                   <a:srgbClr val="17364A"/>
                 </a:solidFill>
@@ -5096,13 +5147,16 @@
                 <a:ea typeface="Aptos" pitchFamily="34" charset="-122"/>
                 <a:cs typeface="Aptos" pitchFamily="34" charset="-120"/>
               </a:rPr>
-              <a:t>Using AI prioritization to allocate scarce resources without equity review.</a:t>
-            </a:r>
-            <a:endParaRPr lang="en-US" sz="1380" dirty="0"/>
-          </a:p>
-          <a:p>
-            <a:r>
-              <a:rPr lang="en-US" sz="1380" dirty="0">
+              <a:t>Using AI prioritization to allocate scarce resources without.</a:t>
+            </a:r>
+            <a:endParaRPr lang="en-US" sz="1220" dirty="0"/>
+          </a:p>
+          <a:p>
+            <a:pPr indent="0" marL="0">
+              <a:buNone/>
+            </a:pPr>
+            <a:r>
+              <a:rPr lang="en-US" sz="1220" dirty="0">
                 <a:solidFill>
                   <a:srgbClr val="17364A"/>
                 </a:solidFill>
@@ -5112,7 +5166,7 @@
               </a:rPr>
               <a:t>Failing to monitor equity impacts after deployment.</a:t>
             </a:r>
-            <a:endParaRPr lang="en-US" sz="1380" dirty="0"/>
+            <a:endParaRPr lang="en-US" sz="1220" dirty="0"/>
           </a:p>
         </p:txBody>
       </p:sp>
@@ -5190,17 +5244,17 @@
         </p:nvSpPr>
         <p:spPr>
           <a:xfrm>
-            <a:off x="7799832" y="5001768"/>
-            <a:ext cx="3145536" cy="502920"/>
-          </a:xfrm>
-          <a:prstGeom prst="rect">
-            <a:avLst/>
-          </a:prstGeom>
-          <a:noFill/>
-          <a:ln/>
-        </p:spPr>
-        <p:txBody>
-          <a:bodyPr wrap="square" lIns="0" tIns="0" rIns="0" bIns="0" rtlCol="0" anchor="t">
+            <a:off x="7799832" y="4974336"/>
+            <a:ext cx="3145536" cy="576072"/>
+          </a:xfrm>
+          <a:prstGeom prst="rect">
+            <a:avLst/>
+          </a:prstGeom>
+          <a:noFill/>
+          <a:ln/>
+        </p:spPr>
+        <p:txBody>
+          <a:bodyPr wrap="square" lIns="254" tIns="254" rIns="254" bIns="254" rtlCol="0" anchor="t">
             <a:normAutofit/>
           </a:bodyPr>
           <a:lstStyle/>
@@ -5209,7 +5263,7 @@
               <a:buNone/>
             </a:pPr>
             <a:r>
-              <a:rPr lang="en-US" sz="1550" dirty="0">
+              <a:rPr lang="en-US" sz="1320" dirty="0">
                 <a:solidFill>
                   <a:srgbClr val="17364A"/>
                 </a:solidFill>
@@ -5217,9 +5271,9 @@
                 <a:ea typeface="Aptos" pitchFamily="34" charset="-122"/>
                 <a:cs typeface="Aptos" pitchFamily="34" charset="-120"/>
               </a:rPr>
-              <a:t>Identify what could go wrong, who could be affected, what safeguards are needed, and what evidence should be reviewed before use expands.</a:t>
-            </a:r>
-            <a:endParaRPr lang="en-US" sz="1550" dirty="0"/>
+              <a:t>Identify what could go wrong, who could be affected, what safeguards are needed, and what evidence should be reviewed.</a:t>
+            </a:r>
+            <a:endParaRPr lang="en-US" sz="1320" dirty="0"/>
           </a:p>
         </p:txBody>
       </p:sp>
@@ -5520,49 +5574,58 @@
           <a:ln/>
         </p:spPr>
         <p:txBody>
-          <a:bodyPr wrap="square" lIns="635" tIns="635" rIns="635" bIns="635" rtlCol="0" anchor="t">
+          <a:bodyPr wrap="square" lIns="1016" tIns="1016" rIns="1016" bIns="1016" rtlCol="0" anchor="t">
             <a:normAutofit/>
           </a:bodyPr>
           <a:lstStyle/>
           <a:p>
+            <a:pPr indent="0" marL="0">
+              <a:buNone/>
+            </a:pPr>
             <a:r>
               <a:rPr lang="en-US" sz="2100" dirty="0">
                 <a:solidFill>
-                  <a:srgbClr val="17364A"/>
-                </a:solidFill>
-                <a:latin typeface="Aptos" pitchFamily="34" charset="0"/>
-                <a:ea typeface="Aptos" pitchFamily="34" charset="-122"/>
-                <a:cs typeface="Aptos" pitchFamily="34" charset="-120"/>
-              </a:rPr>
-              <a:t>Recommended guardrails include the following:</a:t>
+                  <a:srgbClr val="003A63"/>
+                </a:solidFill>
+                <a:latin typeface="Aptos" pitchFamily="34" charset="0"/>
+                <a:ea typeface="Aptos" pitchFamily="34" charset="-122"/>
+                <a:cs typeface="Aptos" pitchFamily="34" charset="-120"/>
+              </a:rPr>
+              <a:t>• Recommended guardrails include the following:</a:t>
             </a:r>
             <a:endParaRPr lang="en-US" sz="2100" dirty="0"/>
           </a:p>
           <a:p>
+            <a:pPr indent="0" marL="0">
+              <a:buNone/>
+            </a:pPr>
             <a:r>
               <a:rPr lang="en-US" sz="2100" dirty="0">
                 <a:solidFill>
-                  <a:srgbClr val="17364A"/>
-                </a:solidFill>
-                <a:latin typeface="Aptos" pitchFamily="34" charset="0"/>
-                <a:ea typeface="Aptos" pitchFamily="34" charset="-122"/>
-                <a:cs typeface="Aptos" pitchFamily="34" charset="-120"/>
-              </a:rPr>
-              <a:t>Require equity evaluation for AI uses that affect prioritization, eligibility, outreach, response, or.</a:t>
+                  <a:srgbClr val="003A63"/>
+                </a:solidFill>
+                <a:latin typeface="Aptos" pitchFamily="34" charset="0"/>
+                <a:ea typeface="Aptos" pitchFamily="34" charset="-122"/>
+                <a:cs typeface="Aptos" pitchFamily="34" charset="-120"/>
+              </a:rPr>
+              <a:t>• Require equity evaluation for AI uses that affect prioritization, eligibility, outreach,.</a:t>
             </a:r>
             <a:endParaRPr lang="en-US" sz="2100" dirty="0"/>
           </a:p>
           <a:p>
+            <a:pPr indent="0" marL="0">
+              <a:buNone/>
+            </a:pPr>
             <a:r>
               <a:rPr lang="en-US" sz="2100" dirty="0">
                 <a:solidFill>
-                  <a:srgbClr val="17364A"/>
-                </a:solidFill>
-                <a:latin typeface="Aptos" pitchFamily="34" charset="0"/>
-                <a:ea typeface="Aptos" pitchFamily="34" charset="-122"/>
-                <a:cs typeface="Aptos" pitchFamily="34" charset="-120"/>
-              </a:rPr>
-              <a:t>Assess representativeness and missingness before model use.</a:t>
+                  <a:srgbClr val="003A63"/>
+                </a:solidFill>
+                <a:latin typeface="Aptos" pitchFamily="34" charset="0"/>
+                <a:ea typeface="Aptos" pitchFamily="34" charset="-122"/>
+                <a:cs typeface="Aptos" pitchFamily="34" charset="-120"/>
+              </a:rPr>
+              <a:t>• Assess representativeness and missingness before model use.</a:t>
             </a:r>
             <a:endParaRPr lang="en-US" sz="2100" dirty="0"/>
           </a:p>
@@ -5642,17 +5705,17 @@
         </p:nvSpPr>
         <p:spPr>
           <a:xfrm>
-            <a:off x="7799832" y="1828800"/>
-            <a:ext cx="3145536" cy="685800"/>
-          </a:xfrm>
-          <a:prstGeom prst="rect">
-            <a:avLst/>
-          </a:prstGeom>
-          <a:noFill/>
-          <a:ln/>
-        </p:spPr>
-        <p:txBody>
-          <a:bodyPr wrap="square" lIns="0" tIns="0" rIns="0" bIns="0" rtlCol="0" anchor="t">
+            <a:off x="7799832" y="1801368"/>
+            <a:ext cx="3145536" cy="758952"/>
+          </a:xfrm>
+          <a:prstGeom prst="rect">
+            <a:avLst/>
+          </a:prstGeom>
+          <a:noFill/>
+          <a:ln/>
+        </p:spPr>
+        <p:txBody>
+          <a:bodyPr wrap="square" lIns="254" tIns="254" rIns="254" bIns="254" rtlCol="0" anchor="t">
             <a:normAutofit/>
           </a:bodyPr>
           <a:lstStyle/>
@@ -5661,7 +5724,7 @@
               <a:buNone/>
             </a:pPr>
             <a:r>
-              <a:rPr lang="en-US" sz="1550" dirty="0">
+              <a:rPr lang="en-US" sz="1320" dirty="0">
                 <a:solidFill>
                   <a:srgbClr val="17364A"/>
                 </a:solidFill>
@@ -5671,7 +5734,7 @@
               </a:rPr>
               <a:t>Recommended guardrails include the following:</a:t>
             </a:r>
-            <a:endParaRPr lang="en-US" sz="1550" dirty="0"/>
+            <a:endParaRPr lang="en-US" sz="1320" dirty="0"/>
           </a:p>
         </p:txBody>
       </p:sp>
@@ -5759,13 +5822,16 @@
           <a:ln/>
         </p:spPr>
         <p:txBody>
-          <a:bodyPr wrap="square" lIns="254" tIns="254" rIns="254" bIns="254" rtlCol="0" anchor="t">
+          <a:bodyPr wrap="square" lIns="508" tIns="508" rIns="508" bIns="508" rtlCol="0" anchor="t">
             <a:normAutofit/>
           </a:bodyPr>
           <a:lstStyle/>
           <a:p>
-            <a:r>
-              <a:rPr lang="en-US" sz="1380" dirty="0">
+            <a:pPr indent="0" marL="0">
+              <a:buNone/>
+            </a:pPr>
+            <a:r>
+              <a:rPr lang="en-US" sz="1220" dirty="0">
                 <a:solidFill>
                   <a:srgbClr val="17364A"/>
                 </a:solidFill>
@@ -5775,11 +5841,14 @@
               </a:rPr>
               <a:t>Recommended guardrails include the following:</a:t>
             </a:r>
-            <a:endParaRPr lang="en-US" sz="1380" dirty="0"/>
-          </a:p>
-          <a:p>
-            <a:r>
-              <a:rPr lang="en-US" sz="1380" dirty="0">
+            <a:endParaRPr lang="en-US" sz="1220" dirty="0"/>
+          </a:p>
+          <a:p>
+            <a:pPr indent="0" marL="0">
+              <a:buNone/>
+            </a:pPr>
+            <a:r>
+              <a:rPr lang="en-US" sz="1220" dirty="0">
                 <a:solidFill>
                   <a:srgbClr val="17364A"/>
                 </a:solidFill>
@@ -5787,13 +5856,16 @@
                 <a:ea typeface="Aptos" pitchFamily="34" charset="-122"/>
                 <a:cs typeface="Aptos" pitchFamily="34" charset="-120"/>
               </a:rPr>
-              <a:t>Require equity evaluation for AI uses that affect prioritization, eligibility, outreach,.</a:t>
-            </a:r>
-            <a:endParaRPr lang="en-US" sz="1380" dirty="0"/>
-          </a:p>
-          <a:p>
-            <a:r>
-              <a:rPr lang="en-US" sz="1380" dirty="0">
+              <a:t>Require equity evaluation for AI uses that affect prioritization,.</a:t>
+            </a:r>
+            <a:endParaRPr lang="en-US" sz="1220" dirty="0"/>
+          </a:p>
+          <a:p>
+            <a:pPr indent="0" marL="0">
+              <a:buNone/>
+            </a:pPr>
+            <a:r>
+              <a:rPr lang="en-US" sz="1220" dirty="0">
                 <a:solidFill>
                   <a:srgbClr val="17364A"/>
                 </a:solidFill>
@@ -5803,7 +5875,7 @@
               </a:rPr>
               <a:t>Assess representativeness and missingness before model use.</a:t>
             </a:r>
-            <a:endParaRPr lang="en-US" sz="1380" dirty="0"/>
+            <a:endParaRPr lang="en-US" sz="1220" dirty="0"/>
           </a:p>
         </p:txBody>
       </p:sp>
@@ -5881,17 +5953,17 @@
         </p:nvSpPr>
         <p:spPr>
           <a:xfrm>
-            <a:off x="7799832" y="5001768"/>
-            <a:ext cx="3145536" cy="502920"/>
-          </a:xfrm>
-          <a:prstGeom prst="rect">
-            <a:avLst/>
-          </a:prstGeom>
-          <a:noFill/>
-          <a:ln/>
-        </p:spPr>
-        <p:txBody>
-          <a:bodyPr wrap="square" lIns="0" tIns="0" rIns="0" bIns="0" rtlCol="0" anchor="t">
+            <a:off x="7799832" y="4974336"/>
+            <a:ext cx="3145536" cy="576072"/>
+          </a:xfrm>
+          <a:prstGeom prst="rect">
+            <a:avLst/>
+          </a:prstGeom>
+          <a:noFill/>
+          <a:ln/>
+        </p:spPr>
+        <p:txBody>
+          <a:bodyPr wrap="square" lIns="254" tIns="254" rIns="254" bIns="254" rtlCol="0" anchor="t">
             <a:normAutofit/>
           </a:bodyPr>
           <a:lstStyle/>
@@ -5900,7 +5972,7 @@
               <a:buNone/>
             </a:pPr>
             <a:r>
-              <a:rPr lang="en-US" sz="1550" dirty="0">
+              <a:rPr lang="en-US" sz="1320" dirty="0">
                 <a:solidFill>
                   <a:srgbClr val="17364A"/>
                 </a:solidFill>
@@ -5908,9 +5980,9 @@
                 <a:ea typeface="Aptos" pitchFamily="34" charset="-122"/>
                 <a:cs typeface="Aptos" pitchFamily="34" charset="-120"/>
               </a:rPr>
-              <a:t>Identify what could go wrong, who could be affected, what safeguards are needed, and what evidence should be reviewed before use expands.</a:t>
-            </a:r>
-            <a:endParaRPr lang="en-US" sz="1550" dirty="0"/>
+              <a:t>Identify what could go wrong, who could be affected, what safeguards are needed, and what evidence should be reviewed.</a:t>
+            </a:r>
+            <a:endParaRPr lang="en-US" sz="1320" dirty="0"/>
           </a:p>
         </p:txBody>
       </p:sp>
@@ -6211,49 +6283,58 @@
           <a:ln/>
         </p:spPr>
         <p:txBody>
-          <a:bodyPr wrap="square" lIns="635" tIns="635" rIns="635" bIns="635" rtlCol="0" anchor="t">
+          <a:bodyPr wrap="square" lIns="1016" tIns="1016" rIns="1016" bIns="1016" rtlCol="0" anchor="t">
             <a:normAutofit/>
           </a:bodyPr>
           <a:lstStyle/>
           <a:p>
+            <a:pPr indent="0" marL="0">
+              <a:buNone/>
+            </a:pPr>
             <a:r>
               <a:rPr lang="en-US" sz="2100" dirty="0">
                 <a:solidFill>
-                  <a:srgbClr val="17364A"/>
-                </a:solidFill>
-                <a:latin typeface="Aptos" pitchFamily="34" charset="0"/>
-                <a:ea typeface="Aptos" pitchFamily="34" charset="-122"/>
-                <a:cs typeface="Aptos" pitchFamily="34" charset="-120"/>
-              </a:rPr>
-              <a:t>Measure subgroup performance where feasible and document limitations where not feasible.</a:t>
+                  <a:srgbClr val="003A63"/>
+                </a:solidFill>
+                <a:latin typeface="Aptos" pitchFamily="34" charset="0"/>
+                <a:ea typeface="Aptos" pitchFamily="34" charset="-122"/>
+                <a:cs typeface="Aptos" pitchFamily="34" charset="-120"/>
+              </a:rPr>
+              <a:t>• Measure subgroup performance where feasible and document limitations where not feasible.</a:t>
             </a:r>
             <a:endParaRPr lang="en-US" sz="2100" dirty="0"/>
           </a:p>
           <a:p>
+            <a:pPr indent="0" marL="0">
+              <a:buNone/>
+            </a:pPr>
             <a:r>
               <a:rPr lang="en-US" sz="2100" dirty="0">
                 <a:solidFill>
-                  <a:srgbClr val="17364A"/>
-                </a:solidFill>
-                <a:latin typeface="Aptos" pitchFamily="34" charset="0"/>
-                <a:ea typeface="Aptos" pitchFamily="34" charset="-122"/>
-                <a:cs typeface="Aptos" pitchFamily="34" charset="-120"/>
-              </a:rPr>
-              <a:t>Include community, equity, and program reviewers in governance decisions.</a:t>
+                  <a:srgbClr val="003A63"/>
+                </a:solidFill>
+                <a:latin typeface="Aptos" pitchFamily="34" charset="0"/>
+                <a:ea typeface="Aptos" pitchFamily="34" charset="-122"/>
+                <a:cs typeface="Aptos" pitchFamily="34" charset="-120"/>
+              </a:rPr>
+              <a:t>• Include community, equity, and program reviewers in governance decisions.</a:t>
             </a:r>
             <a:endParaRPr lang="en-US" sz="2100" dirty="0"/>
           </a:p>
           <a:p>
+            <a:pPr indent="0" marL="0">
+              <a:buNone/>
+            </a:pPr>
             <a:r>
               <a:rPr lang="en-US" sz="2100" dirty="0">
                 <a:solidFill>
-                  <a:srgbClr val="17364A"/>
-                </a:solidFill>
-                <a:latin typeface="Aptos" pitchFamily="34" charset="0"/>
-                <a:ea typeface="Aptos" pitchFamily="34" charset="-122"/>
-                <a:cs typeface="Aptos" pitchFamily="34" charset="-120"/>
-              </a:rPr>
-              <a:t>Monitor equity indicators and user overrides after deployment.</a:t>
+                  <a:srgbClr val="003A63"/>
+                </a:solidFill>
+                <a:latin typeface="Aptos" pitchFamily="34" charset="0"/>
+                <a:ea typeface="Aptos" pitchFamily="34" charset="-122"/>
+                <a:cs typeface="Aptos" pitchFamily="34" charset="-120"/>
+              </a:rPr>
+              <a:t>• Monitor equity indicators and user overrides after deployment.</a:t>
             </a:r>
             <a:endParaRPr lang="en-US" sz="2100" dirty="0"/>
           </a:p>
@@ -6333,17 +6414,17 @@
         </p:nvSpPr>
         <p:spPr>
           <a:xfrm>
-            <a:off x="7799832" y="1828800"/>
-            <a:ext cx="3145536" cy="685800"/>
-          </a:xfrm>
-          <a:prstGeom prst="rect">
-            <a:avLst/>
-          </a:prstGeom>
-          <a:noFill/>
-          <a:ln/>
-        </p:spPr>
-        <p:txBody>
-          <a:bodyPr wrap="square" lIns="0" tIns="0" rIns="0" bIns="0" rtlCol="0" anchor="t">
+            <a:off x="7799832" y="1801368"/>
+            <a:ext cx="3145536" cy="758952"/>
+          </a:xfrm>
+          <a:prstGeom prst="rect">
+            <a:avLst/>
+          </a:prstGeom>
+          <a:noFill/>
+          <a:ln/>
+        </p:spPr>
+        <p:txBody>
+          <a:bodyPr wrap="square" lIns="254" tIns="254" rIns="254" bIns="254" rtlCol="0" anchor="t">
             <a:normAutofit/>
           </a:bodyPr>
           <a:lstStyle/>
@@ -6352,7 +6433,7 @@
               <a:buNone/>
             </a:pPr>
             <a:r>
-              <a:rPr lang="en-US" sz="1550" dirty="0">
+              <a:rPr lang="en-US" sz="1320" dirty="0">
                 <a:solidFill>
                   <a:srgbClr val="17364A"/>
                 </a:solidFill>
@@ -6362,7 +6443,7 @@
               </a:rPr>
               <a:t>Measure subgroup performance where feasible and document limitations where not feasible.</a:t>
             </a:r>
-            <a:endParaRPr lang="en-US" sz="1550" dirty="0"/>
+            <a:endParaRPr lang="en-US" sz="1320" dirty="0"/>
           </a:p>
         </p:txBody>
       </p:sp>
@@ -6450,13 +6531,16 @@
           <a:ln/>
         </p:spPr>
         <p:txBody>
-          <a:bodyPr wrap="square" lIns="254" tIns="254" rIns="254" bIns="254" rtlCol="0" anchor="t">
+          <a:bodyPr wrap="square" lIns="508" tIns="508" rIns="508" bIns="508" rtlCol="0" anchor="t">
             <a:normAutofit/>
           </a:bodyPr>
           <a:lstStyle/>
           <a:p>
-            <a:r>
-              <a:rPr lang="en-US" sz="1380" dirty="0">
+            <a:pPr indent="0" marL="0">
+              <a:buNone/>
+            </a:pPr>
+            <a:r>
+              <a:rPr lang="en-US" sz="1220" dirty="0">
                 <a:solidFill>
                   <a:srgbClr val="17364A"/>
                 </a:solidFill>
@@ -6464,13 +6548,16 @@
                 <a:ea typeface="Aptos" pitchFamily="34" charset="-122"/>
                 <a:cs typeface="Aptos" pitchFamily="34" charset="-120"/>
               </a:rPr>
-              <a:t>Measure subgroup performance where feasible and document limitations where not feasible.</a:t>
-            </a:r>
-            <a:endParaRPr lang="en-US" sz="1380" dirty="0"/>
-          </a:p>
-          <a:p>
-            <a:r>
-              <a:rPr lang="en-US" sz="1380" dirty="0">
+              <a:t>Measure subgroup performance where feasible and document.</a:t>
+            </a:r>
+            <a:endParaRPr lang="en-US" sz="1220" dirty="0"/>
+          </a:p>
+          <a:p>
+            <a:pPr indent="0" marL="0">
+              <a:buNone/>
+            </a:pPr>
+            <a:r>
+              <a:rPr lang="en-US" sz="1220" dirty="0">
                 <a:solidFill>
                   <a:srgbClr val="17364A"/>
                 </a:solidFill>
@@ -6478,13 +6565,16 @@
                 <a:ea typeface="Aptos" pitchFamily="34" charset="-122"/>
                 <a:cs typeface="Aptos" pitchFamily="34" charset="-120"/>
               </a:rPr>
-              <a:t>Include community, equity, and program reviewers in governance decisions.</a:t>
-            </a:r>
-            <a:endParaRPr lang="en-US" sz="1380" dirty="0"/>
-          </a:p>
-          <a:p>
-            <a:r>
-              <a:rPr lang="en-US" sz="1380" dirty="0">
+              <a:t>Include community, equity, and program reviewers in governance.</a:t>
+            </a:r>
+            <a:endParaRPr lang="en-US" sz="1220" dirty="0"/>
+          </a:p>
+          <a:p>
+            <a:pPr indent="0" marL="0">
+              <a:buNone/>
+            </a:pPr>
+            <a:r>
+              <a:rPr lang="en-US" sz="1220" dirty="0">
                 <a:solidFill>
                   <a:srgbClr val="17364A"/>
                 </a:solidFill>
@@ -6494,7 +6584,7 @@
               </a:rPr>
               <a:t>Monitor equity indicators and user overrides after deployment.</a:t>
             </a:r>
-            <a:endParaRPr lang="en-US" sz="1380" dirty="0"/>
+            <a:endParaRPr lang="en-US" sz="1220" dirty="0"/>
           </a:p>
         </p:txBody>
       </p:sp>
@@ -6572,17 +6662,17 @@
         </p:nvSpPr>
         <p:spPr>
           <a:xfrm>
-            <a:off x="7799832" y="5001768"/>
-            <a:ext cx="3145536" cy="502920"/>
-          </a:xfrm>
-          <a:prstGeom prst="rect">
-            <a:avLst/>
-          </a:prstGeom>
-          <a:noFill/>
-          <a:ln/>
-        </p:spPr>
-        <p:txBody>
-          <a:bodyPr wrap="square" lIns="0" tIns="0" rIns="0" bIns="0" rtlCol="0" anchor="t">
+            <a:off x="7799832" y="4974336"/>
+            <a:ext cx="3145536" cy="576072"/>
+          </a:xfrm>
+          <a:prstGeom prst="rect">
+            <a:avLst/>
+          </a:prstGeom>
+          <a:noFill/>
+          <a:ln/>
+        </p:spPr>
+        <p:txBody>
+          <a:bodyPr wrap="square" lIns="254" tIns="254" rIns="254" bIns="254" rtlCol="0" anchor="t">
             <a:normAutofit/>
           </a:bodyPr>
           <a:lstStyle/>
@@ -6591,7 +6681,7 @@
               <a:buNone/>
             </a:pPr>
             <a:r>
-              <a:rPr lang="en-US" sz="1550" dirty="0">
+              <a:rPr lang="en-US" sz="1320" dirty="0">
                 <a:solidFill>
                   <a:srgbClr val="17364A"/>
                 </a:solidFill>
@@ -6599,9 +6689,9 @@
                 <a:ea typeface="Aptos" pitchFamily="34" charset="-122"/>
                 <a:cs typeface="Aptos" pitchFamily="34" charset="-120"/>
               </a:rPr>
-              <a:t>Identify what could go wrong, who could be affected, what safeguards are needed, and what evidence should be reviewed before use expands.</a:t>
-            </a:r>
-            <a:endParaRPr lang="en-US" sz="1550" dirty="0"/>
+              <a:t>Identify what could go wrong, who could be affected, what safeguards are needed, and what evidence should be reviewed.</a:t>
+            </a:r>
+            <a:endParaRPr lang="en-US" sz="1320" dirty="0"/>
           </a:p>
         </p:txBody>
       </p:sp>
@@ -6902,49 +6992,58 @@
           <a:ln/>
         </p:spPr>
         <p:txBody>
-          <a:bodyPr wrap="square" lIns="635" tIns="635" rIns="635" bIns="635" rtlCol="0" anchor="t">
+          <a:bodyPr wrap="square" lIns="1016" tIns="1016" rIns="1016" bIns="1016" rtlCol="0" anchor="t">
             <a:normAutofit/>
           </a:bodyPr>
           <a:lstStyle/>
           <a:p>
+            <a:pPr indent="0" marL="0">
+              <a:buNone/>
+            </a:pPr>
             <a:r>
               <a:rPr lang="en-US" sz="2100" dirty="0">
                 <a:solidFill>
-                  <a:srgbClr val="17364A"/>
-                </a:solidFill>
-                <a:latin typeface="Aptos" pitchFamily="34" charset="0"/>
-                <a:ea typeface="Aptos" pitchFamily="34" charset="-122"/>
-                <a:cs typeface="Aptos" pitchFamily="34" charset="-120"/>
-              </a:rPr>
-              <a:t>Where does this topic appear in your agency, program, or workflow?</a:t>
+                  <a:srgbClr val="003A63"/>
+                </a:solidFill>
+                <a:latin typeface="Aptos" pitchFamily="34" charset="0"/>
+                <a:ea typeface="Aptos" pitchFamily="34" charset="-122"/>
+                <a:cs typeface="Aptos" pitchFamily="34" charset="-120"/>
+              </a:rPr>
+              <a:t>• Where does this topic appear in your agency, program, or workflow?</a:t>
             </a:r>
             <a:endParaRPr lang="en-US" sz="2100" dirty="0"/>
           </a:p>
           <a:p>
+            <a:pPr indent="0" marL="0">
+              <a:buNone/>
+            </a:pPr>
             <a:r>
               <a:rPr lang="en-US" sz="2100" dirty="0">
                 <a:solidFill>
-                  <a:srgbClr val="17364A"/>
-                </a:solidFill>
-                <a:latin typeface="Aptos" pitchFamily="34" charset="0"/>
-                <a:ea typeface="Aptos" pitchFamily="34" charset="-122"/>
-                <a:cs typeface="Aptos" pitchFamily="34" charset="-120"/>
-              </a:rPr>
-              <a:t>Which staff roles would need to understand or apply this concept before AI use is approved?</a:t>
+                  <a:srgbClr val="003A63"/>
+                </a:solidFill>
+                <a:latin typeface="Aptos" pitchFamily="34" charset="0"/>
+                <a:ea typeface="Aptos" pitchFamily="34" charset="-122"/>
+                <a:cs typeface="Aptos" pitchFamily="34" charset="-120"/>
+              </a:rPr>
+              <a:t>• Which staff roles would need to understand or apply this concept before AI use is approved?</a:t>
             </a:r>
             <a:endParaRPr lang="en-US" sz="2100" dirty="0"/>
           </a:p>
           <a:p>
+            <a:pPr indent="0" marL="0">
+              <a:buNone/>
+            </a:pPr>
             <a:r>
               <a:rPr lang="en-US" sz="2100" dirty="0">
                 <a:solidFill>
-                  <a:srgbClr val="17364A"/>
-                </a:solidFill>
-                <a:latin typeface="Aptos" pitchFamily="34" charset="0"/>
-                <a:ea typeface="Aptos" pitchFamily="34" charset="-122"/>
-                <a:cs typeface="Aptos" pitchFamily="34" charset="-120"/>
-              </a:rPr>
-              <a:t>What could go wrong if this topic is not addressed before implementation?</a:t>
+                  <a:srgbClr val="003A63"/>
+                </a:solidFill>
+                <a:latin typeface="Aptos" pitchFamily="34" charset="0"/>
+                <a:ea typeface="Aptos" pitchFamily="34" charset="-122"/>
+                <a:cs typeface="Aptos" pitchFamily="34" charset="-120"/>
+              </a:rPr>
+              <a:t>• What could go wrong if this topic is not addressed before implementation?</a:t>
             </a:r>
             <a:endParaRPr lang="en-US" sz="2100" dirty="0"/>
           </a:p>
@@ -7024,17 +7123,17 @@
         </p:nvSpPr>
         <p:spPr>
           <a:xfrm>
-            <a:off x="7799832" y="1828800"/>
-            <a:ext cx="3145536" cy="685800"/>
-          </a:xfrm>
-          <a:prstGeom prst="rect">
-            <a:avLst/>
-          </a:prstGeom>
-          <a:noFill/>
-          <a:ln/>
-        </p:spPr>
-        <p:txBody>
-          <a:bodyPr wrap="square" lIns="0" tIns="0" rIns="0" bIns="0" rtlCol="0" anchor="t">
+            <a:off x="7799832" y="1801368"/>
+            <a:ext cx="3145536" cy="758952"/>
+          </a:xfrm>
+          <a:prstGeom prst="rect">
+            <a:avLst/>
+          </a:prstGeom>
+          <a:noFill/>
+          <a:ln/>
+        </p:spPr>
+        <p:txBody>
+          <a:bodyPr wrap="square" lIns="254" tIns="254" rIns="254" bIns="254" rtlCol="0" anchor="t">
             <a:normAutofit/>
           </a:bodyPr>
           <a:lstStyle/>
@@ -7043,7 +7142,7 @@
               <a:buNone/>
             </a:pPr>
             <a:r>
-              <a:rPr lang="en-US" sz="1550" dirty="0">
+              <a:rPr lang="en-US" sz="1320" dirty="0">
                 <a:solidFill>
                   <a:srgbClr val="17364A"/>
                 </a:solidFill>
@@ -7053,7 +7152,7 @@
               </a:rPr>
               <a:t>Where does this topic appear in your agency, program, or workflow?</a:t>
             </a:r>
-            <a:endParaRPr lang="en-US" sz="1550" dirty="0"/>
+            <a:endParaRPr lang="en-US" sz="1320" dirty="0"/>
           </a:p>
         </p:txBody>
       </p:sp>
@@ -7141,13 +7240,16 @@
           <a:ln/>
         </p:spPr>
         <p:txBody>
-          <a:bodyPr wrap="square" lIns="254" tIns="254" rIns="254" bIns="254" rtlCol="0" anchor="t">
+          <a:bodyPr wrap="square" lIns="508" tIns="508" rIns="508" bIns="508" rtlCol="0" anchor="t">
             <a:normAutofit/>
           </a:bodyPr>
           <a:lstStyle/>
           <a:p>
-            <a:r>
-              <a:rPr lang="en-US" sz="1380" dirty="0">
+            <a:pPr indent="0" marL="0">
+              <a:buNone/>
+            </a:pPr>
+            <a:r>
+              <a:rPr lang="en-US" sz="1220" dirty="0">
                 <a:solidFill>
                   <a:srgbClr val="17364A"/>
                 </a:solidFill>
@@ -7157,11 +7259,14 @@
               </a:rPr>
               <a:t>Where does this topic appear in your agency, program, or workflow?</a:t>
             </a:r>
-            <a:endParaRPr lang="en-US" sz="1380" dirty="0"/>
-          </a:p>
-          <a:p>
-            <a:r>
-              <a:rPr lang="en-US" sz="1380" dirty="0">
+            <a:endParaRPr lang="en-US" sz="1220" dirty="0"/>
+          </a:p>
+          <a:p>
+            <a:pPr indent="0" marL="0">
+              <a:buNone/>
+            </a:pPr>
+            <a:r>
+              <a:rPr lang="en-US" sz="1220" dirty="0">
                 <a:solidFill>
                   <a:srgbClr val="17364A"/>
                 </a:solidFill>
@@ -7169,13 +7274,16 @@
                 <a:ea typeface="Aptos" pitchFamily="34" charset="-122"/>
                 <a:cs typeface="Aptos" pitchFamily="34" charset="-120"/>
               </a:rPr>
-              <a:t>Which staff roles would need to understand or apply this concept before AI use is approved?</a:t>
-            </a:r>
-            <a:endParaRPr lang="en-US" sz="1380" dirty="0"/>
-          </a:p>
-          <a:p>
-            <a:r>
-              <a:rPr lang="en-US" sz="1380" dirty="0">
+              <a:t>Which staff roles would need to understand or apply this concept.</a:t>
+            </a:r>
+            <a:endParaRPr lang="en-US" sz="1220" dirty="0"/>
+          </a:p>
+          <a:p>
+            <a:pPr indent="0" marL="0">
+              <a:buNone/>
+            </a:pPr>
+            <a:r>
+              <a:rPr lang="en-US" sz="1220" dirty="0">
                 <a:solidFill>
                   <a:srgbClr val="17364A"/>
                 </a:solidFill>
@@ -7183,9 +7291,9 @@
                 <a:ea typeface="Aptos" pitchFamily="34" charset="-122"/>
                 <a:cs typeface="Aptos" pitchFamily="34" charset="-120"/>
               </a:rPr>
-              <a:t>What could go wrong if this topic is not addressed before implementation?</a:t>
-            </a:r>
-            <a:endParaRPr lang="en-US" sz="1380" dirty="0"/>
+              <a:t>What could go wrong if this topic is not addressed before.</a:t>
+            </a:r>
+            <a:endParaRPr lang="en-US" sz="1220" dirty="0"/>
           </a:p>
         </p:txBody>
       </p:sp>
@@ -7263,17 +7371,17 @@
         </p:nvSpPr>
         <p:spPr>
           <a:xfrm>
-            <a:off x="7799832" y="5001768"/>
-            <a:ext cx="3145536" cy="502920"/>
-          </a:xfrm>
-          <a:prstGeom prst="rect">
-            <a:avLst/>
-          </a:prstGeom>
-          <a:noFill/>
-          <a:ln/>
-        </p:spPr>
-        <p:txBody>
-          <a:bodyPr wrap="square" lIns="0" tIns="0" rIns="0" bIns="0" rtlCol="0" anchor="t">
+            <a:off x="7799832" y="4974336"/>
+            <a:ext cx="3145536" cy="576072"/>
+          </a:xfrm>
+          <a:prstGeom prst="rect">
+            <a:avLst/>
+          </a:prstGeom>
+          <a:noFill/>
+          <a:ln/>
+        </p:spPr>
+        <p:txBody>
+          <a:bodyPr wrap="square" lIns="254" tIns="254" rIns="254" bIns="254" rtlCol="0" anchor="t">
             <a:normAutofit/>
           </a:bodyPr>
           <a:lstStyle/>
@@ -7282,7 +7390,7 @@
               <a:buNone/>
             </a:pPr>
             <a:r>
-              <a:rPr lang="en-US" sz="1550" dirty="0">
+              <a:rPr lang="en-US" sz="1320" dirty="0">
                 <a:solidFill>
                   <a:srgbClr val="17364A"/>
                 </a:solidFill>
@@ -7290,9 +7398,9 @@
                 <a:ea typeface="Aptos" pitchFamily="34" charset="-122"/>
                 <a:cs typeface="Aptos" pitchFamily="34" charset="-120"/>
               </a:rPr>
-              <a:t>Identify what could go wrong, who could be affected, what safeguards are needed, and what evidence should be reviewed before use expands.</a:t>
-            </a:r>
-            <a:endParaRPr lang="en-US" sz="1550" dirty="0"/>
+              <a:t>Identify what could go wrong, who could be affected, what safeguards are needed, and what evidence should be reviewed.</a:t>
+            </a:r>
+            <a:endParaRPr lang="en-US" sz="1320" dirty="0"/>
           </a:p>
         </p:txBody>
       </p:sp>
@@ -7593,35 +7701,41 @@
           <a:ln/>
         </p:spPr>
         <p:txBody>
-          <a:bodyPr wrap="square" lIns="635" tIns="635" rIns="635" bIns="635" rtlCol="0" anchor="t">
+          <a:bodyPr wrap="square" lIns="1016" tIns="1016" rIns="1016" bIns="1016" rtlCol="0" anchor="t">
             <a:normAutofit/>
           </a:bodyPr>
           <a:lstStyle/>
           <a:p>
+            <a:pPr indent="0" marL="0">
+              <a:buNone/>
+            </a:pPr>
             <a:r>
               <a:rPr lang="en-US" sz="2100" dirty="0">
                 <a:solidFill>
-                  <a:srgbClr val="17364A"/>
-                </a:solidFill>
-                <a:latin typeface="Aptos" pitchFamily="34" charset="0"/>
-                <a:ea typeface="Aptos" pitchFamily="34" charset="-122"/>
-                <a:cs typeface="Aptos" pitchFamily="34" charset="-120"/>
-              </a:rPr>
-              <a:t>What evidence would governance, leadership, or operations staff need before moving forward?</a:t>
+                  <a:srgbClr val="003A63"/>
+                </a:solidFill>
+                <a:latin typeface="Aptos" pitchFamily="34" charset="0"/>
+                <a:ea typeface="Aptos" pitchFamily="34" charset="-122"/>
+                <a:cs typeface="Aptos" pitchFamily="34" charset="-120"/>
+              </a:rPr>
+              <a:t>• What evidence would governance, leadership, or operations staff need before moving forward?</a:t>
             </a:r>
             <a:endParaRPr lang="en-US" sz="2100" dirty="0"/>
           </a:p>
           <a:p>
+            <a:pPr indent="0" marL="0">
+              <a:buNone/>
+            </a:pPr>
             <a:r>
               <a:rPr lang="en-US" sz="2100" dirty="0">
                 <a:solidFill>
-                  <a:srgbClr val="17364A"/>
-                </a:solidFill>
-                <a:latin typeface="Aptos" pitchFamily="34" charset="0"/>
-                <a:ea typeface="Aptos" pitchFamily="34" charset="-122"/>
-                <a:cs typeface="Aptos" pitchFamily="34" charset="-120"/>
-              </a:rPr>
-              <a:t>Which policy, data, equity, privacy, security, or workflow questions remain unresolved?</a:t>
+                  <a:srgbClr val="003A63"/>
+                </a:solidFill>
+                <a:latin typeface="Aptos" pitchFamily="34" charset="0"/>
+                <a:ea typeface="Aptos" pitchFamily="34" charset="-122"/>
+                <a:cs typeface="Aptos" pitchFamily="34" charset="-120"/>
+              </a:rPr>
+              <a:t>• Which policy, data, equity, privacy, security, or workflow questions remain unresolved?</a:t>
             </a:r>
             <a:endParaRPr lang="en-US" sz="2100" dirty="0"/>
           </a:p>
@@ -7701,17 +7815,17 @@
         </p:nvSpPr>
         <p:spPr>
           <a:xfrm>
-            <a:off x="7799832" y="1828800"/>
-            <a:ext cx="3145536" cy="685800"/>
-          </a:xfrm>
-          <a:prstGeom prst="rect">
-            <a:avLst/>
-          </a:prstGeom>
-          <a:noFill/>
-          <a:ln/>
-        </p:spPr>
-        <p:txBody>
-          <a:bodyPr wrap="square" lIns="0" tIns="0" rIns="0" bIns="0" rtlCol="0" anchor="t">
+            <a:off x="7799832" y="1801368"/>
+            <a:ext cx="3145536" cy="758952"/>
+          </a:xfrm>
+          <a:prstGeom prst="rect">
+            <a:avLst/>
+          </a:prstGeom>
+          <a:noFill/>
+          <a:ln/>
+        </p:spPr>
+        <p:txBody>
+          <a:bodyPr wrap="square" lIns="254" tIns="254" rIns="254" bIns="254" rtlCol="0" anchor="t">
             <a:normAutofit/>
           </a:bodyPr>
           <a:lstStyle/>
@@ -7720,7 +7834,7 @@
               <a:buNone/>
             </a:pPr>
             <a:r>
-              <a:rPr lang="en-US" sz="1550" dirty="0">
+              <a:rPr lang="en-US" sz="1320" dirty="0">
                 <a:solidFill>
                   <a:srgbClr val="17364A"/>
                 </a:solidFill>
@@ -7730,7 +7844,7 @@
               </a:rPr>
               <a:t>What evidence would governance, leadership, or operations staff need before moving forward?</a:t>
             </a:r>
-            <a:endParaRPr lang="en-US" sz="1550" dirty="0"/>
+            <a:endParaRPr lang="en-US" sz="1320" dirty="0"/>
           </a:p>
         </p:txBody>
       </p:sp>
@@ -7818,13 +7932,16 @@
           <a:ln/>
         </p:spPr>
         <p:txBody>
-          <a:bodyPr wrap="square" lIns="254" tIns="254" rIns="254" bIns="254" rtlCol="0" anchor="t">
+          <a:bodyPr wrap="square" lIns="508" tIns="508" rIns="508" bIns="508" rtlCol="0" anchor="t">
             <a:normAutofit/>
           </a:bodyPr>
           <a:lstStyle/>
           <a:p>
-            <a:r>
-              <a:rPr lang="en-US" sz="1380" dirty="0">
+            <a:pPr indent="0" marL="0">
+              <a:buNone/>
+            </a:pPr>
+            <a:r>
+              <a:rPr lang="en-US" sz="1220" dirty="0">
                 <a:solidFill>
                   <a:srgbClr val="17364A"/>
                 </a:solidFill>
@@ -7832,13 +7949,16 @@
                 <a:ea typeface="Aptos" pitchFamily="34" charset="-122"/>
                 <a:cs typeface="Aptos" pitchFamily="34" charset="-120"/>
               </a:rPr>
-              <a:t>What evidence would governance, leadership, or operations staff need before moving forward?</a:t>
-            </a:r>
-            <a:endParaRPr lang="en-US" sz="1380" dirty="0"/>
-          </a:p>
-          <a:p>
-            <a:r>
-              <a:rPr lang="en-US" sz="1380" dirty="0">
+              <a:t>What evidence would governance, leadership, or operations staff.</a:t>
+            </a:r>
+            <a:endParaRPr lang="en-US" sz="1220" dirty="0"/>
+          </a:p>
+          <a:p>
+            <a:pPr indent="0" marL="0">
+              <a:buNone/>
+            </a:pPr>
+            <a:r>
+              <a:rPr lang="en-US" sz="1220" dirty="0">
                 <a:solidFill>
                   <a:srgbClr val="17364A"/>
                 </a:solidFill>
@@ -7846,9 +7966,9 @@
                 <a:ea typeface="Aptos" pitchFamily="34" charset="-122"/>
                 <a:cs typeface="Aptos" pitchFamily="34" charset="-120"/>
               </a:rPr>
-              <a:t>Which policy, data, equity, privacy, security, or workflow questions remain unresolved?</a:t>
-            </a:r>
-            <a:endParaRPr lang="en-US" sz="1380" dirty="0"/>
+              <a:t>Which policy, data, equity, privacy, security, or workflow.</a:t>
+            </a:r>
+            <a:endParaRPr lang="en-US" sz="1220" dirty="0"/>
           </a:p>
         </p:txBody>
       </p:sp>
@@ -7926,17 +8046,17 @@
         </p:nvSpPr>
         <p:spPr>
           <a:xfrm>
-            <a:off x="7799832" y="5001768"/>
-            <a:ext cx="3145536" cy="502920"/>
-          </a:xfrm>
-          <a:prstGeom prst="rect">
-            <a:avLst/>
-          </a:prstGeom>
-          <a:noFill/>
-          <a:ln/>
-        </p:spPr>
-        <p:txBody>
-          <a:bodyPr wrap="square" lIns="0" tIns="0" rIns="0" bIns="0" rtlCol="0" anchor="t">
+            <a:off x="7799832" y="4974336"/>
+            <a:ext cx="3145536" cy="576072"/>
+          </a:xfrm>
+          <a:prstGeom prst="rect">
+            <a:avLst/>
+          </a:prstGeom>
+          <a:noFill/>
+          <a:ln/>
+        </p:spPr>
+        <p:txBody>
+          <a:bodyPr wrap="square" lIns="254" tIns="254" rIns="254" bIns="254" rtlCol="0" anchor="t">
             <a:normAutofit/>
           </a:bodyPr>
           <a:lstStyle/>
@@ -7945,7 +8065,7 @@
               <a:buNone/>
             </a:pPr>
             <a:r>
-              <a:rPr lang="en-US" sz="1550" dirty="0">
+              <a:rPr lang="en-US" sz="1320" dirty="0">
                 <a:solidFill>
                   <a:srgbClr val="17364A"/>
                 </a:solidFill>
@@ -7953,9 +8073,9 @@
                 <a:ea typeface="Aptos" pitchFamily="34" charset="-122"/>
                 <a:cs typeface="Aptos" pitchFamily="34" charset="-120"/>
               </a:rPr>
-              <a:t>Identify what could go wrong, who could be affected, what safeguards are needed, and what evidence should be reviewed before use expands.</a:t>
-            </a:r>
-            <a:endParaRPr lang="en-US" sz="1550" dirty="0"/>
+              <a:t>Identify what could go wrong, who could be affected, what safeguards are needed, and what evidence should be reviewed.</a:t>
+            </a:r>
+            <a:endParaRPr lang="en-US" sz="1320" dirty="0"/>
           </a:p>
         </p:txBody>
       </p:sp>
@@ -8256,35 +8376,41 @@
           <a:ln/>
         </p:spPr>
         <p:txBody>
-          <a:bodyPr wrap="square" lIns="635" tIns="635" rIns="635" bIns="635" rtlCol="0" anchor="t">
+          <a:bodyPr wrap="square" lIns="1016" tIns="1016" rIns="1016" bIns="1016" rtlCol="0" anchor="t">
             <a:normAutofit/>
           </a:bodyPr>
           <a:lstStyle/>
           <a:p>
+            <a:pPr indent="0" marL="0">
+              <a:buNone/>
+            </a:pPr>
             <a:r>
               <a:rPr lang="en-US" sz="2100" dirty="0">
                 <a:solidFill>
-                  <a:srgbClr val="17364A"/>
-                </a:solidFill>
-                <a:latin typeface="Aptos" pitchFamily="34" charset="0"/>
-                <a:ea typeface="Aptos" pitchFamily="34" charset="-122"/>
-                <a:cs typeface="Aptos" pitchFamily="34" charset="-120"/>
-              </a:rPr>
-              <a:t>Create an equity evaluation plan for one AI model or AI-supported workflow.</a:t>
+                  <a:srgbClr val="003A63"/>
+                </a:solidFill>
+                <a:latin typeface="Aptos" pitchFamily="34" charset="0"/>
+                <a:ea typeface="Aptos" pitchFamily="34" charset="-122"/>
+                <a:cs typeface="Aptos" pitchFamily="34" charset="-120"/>
+              </a:rPr>
+              <a:t>• Create an equity evaluation plan for one AI model or AI-supported workflow.</a:t>
             </a:r>
             <a:endParaRPr lang="en-US" sz="2100" dirty="0"/>
           </a:p>
           <a:p>
+            <a:pPr indent="0" marL="0">
+              <a:buNone/>
+            </a:pPr>
             <a:r>
               <a:rPr lang="en-US" sz="2100" dirty="0">
                 <a:solidFill>
-                  <a:srgbClr val="17364A"/>
-                </a:solidFill>
-                <a:latin typeface="Aptos" pitchFamily="34" charset="0"/>
-                <a:ea typeface="Aptos" pitchFamily="34" charset="-122"/>
-                <a:cs typeface="Aptos" pitchFamily="34" charset="-120"/>
-              </a:rPr>
-              <a:t>Include intended use, affected populations, relevant subgroups, data representativeness concerns,.</a:t>
+                  <a:srgbClr val="003A63"/>
+                </a:solidFill>
+                <a:latin typeface="Aptos" pitchFamily="34" charset="0"/>
+                <a:ea typeface="Aptos" pitchFamily="34" charset="-122"/>
+                <a:cs typeface="Aptos" pitchFamily="34" charset="-120"/>
+              </a:rPr>
+              <a:t>• Include intended use, affected populations, relevant subgroups, data representativeness.</a:t>
             </a:r>
             <a:endParaRPr lang="en-US" sz="2100" dirty="0"/>
           </a:p>
@@ -8364,17 +8490,17 @@
         </p:nvSpPr>
         <p:spPr>
           <a:xfrm>
-            <a:off x="7799832" y="1828800"/>
-            <a:ext cx="3145536" cy="685800"/>
-          </a:xfrm>
-          <a:prstGeom prst="rect">
-            <a:avLst/>
-          </a:prstGeom>
-          <a:noFill/>
-          <a:ln/>
-        </p:spPr>
-        <p:txBody>
-          <a:bodyPr wrap="square" lIns="0" tIns="0" rIns="0" bIns="0" rtlCol="0" anchor="t">
+            <a:off x="7799832" y="1801368"/>
+            <a:ext cx="3145536" cy="758952"/>
+          </a:xfrm>
+          <a:prstGeom prst="rect">
+            <a:avLst/>
+          </a:prstGeom>
+          <a:noFill/>
+          <a:ln/>
+        </p:spPr>
+        <p:txBody>
+          <a:bodyPr wrap="square" lIns="254" tIns="254" rIns="254" bIns="254" rtlCol="0" anchor="t">
             <a:normAutofit/>
           </a:bodyPr>
           <a:lstStyle/>
@@ -8383,7 +8509,7 @@
               <a:buNone/>
             </a:pPr>
             <a:r>
-              <a:rPr lang="en-US" sz="1550" dirty="0">
+              <a:rPr lang="en-US" sz="1320" dirty="0">
                 <a:solidFill>
                   <a:srgbClr val="17364A"/>
                 </a:solidFill>
@@ -8393,7 +8519,7 @@
               </a:rPr>
               <a:t>Create an equity evaluation plan for one AI model or AI-supported workflow.</a:t>
             </a:r>
-            <a:endParaRPr lang="en-US" sz="1550" dirty="0"/>
+            <a:endParaRPr lang="en-US" sz="1320" dirty="0"/>
           </a:p>
         </p:txBody>
       </p:sp>
@@ -8481,13 +8607,16 @@
           <a:ln/>
         </p:spPr>
         <p:txBody>
-          <a:bodyPr wrap="square" lIns="254" tIns="254" rIns="254" bIns="254" rtlCol="0" anchor="t">
+          <a:bodyPr wrap="square" lIns="508" tIns="508" rIns="508" bIns="508" rtlCol="0" anchor="t">
             <a:normAutofit/>
           </a:bodyPr>
           <a:lstStyle/>
           <a:p>
-            <a:r>
-              <a:rPr lang="en-US" sz="1380" dirty="0">
+            <a:pPr indent="0" marL="0">
+              <a:buNone/>
+            </a:pPr>
+            <a:r>
+              <a:rPr lang="en-US" sz="1220" dirty="0">
                 <a:solidFill>
                   <a:srgbClr val="17364A"/>
                 </a:solidFill>
@@ -8495,13 +8624,16 @@
                 <a:ea typeface="Aptos" pitchFamily="34" charset="-122"/>
                 <a:cs typeface="Aptos" pitchFamily="34" charset="-120"/>
               </a:rPr>
-              <a:t>Create an equity evaluation plan for one AI model or AI-supported workflow.</a:t>
-            </a:r>
-            <a:endParaRPr lang="en-US" sz="1380" dirty="0"/>
-          </a:p>
-          <a:p>
-            <a:r>
-              <a:rPr lang="en-US" sz="1380" dirty="0">
+              <a:t>Create an equity evaluation plan for one AI model or AI-supported.</a:t>
+            </a:r>
+            <a:endParaRPr lang="en-US" sz="1220" dirty="0"/>
+          </a:p>
+          <a:p>
+            <a:pPr indent="0" marL="0">
+              <a:buNone/>
+            </a:pPr>
+            <a:r>
+              <a:rPr lang="en-US" sz="1220" dirty="0">
                 <a:solidFill>
                   <a:srgbClr val="17364A"/>
                 </a:solidFill>
@@ -8509,9 +8641,9 @@
                 <a:ea typeface="Aptos" pitchFamily="34" charset="-122"/>
                 <a:cs typeface="Aptos" pitchFamily="34" charset="-120"/>
               </a:rPr>
-              <a:t>Include intended use, affected populations, relevant subgroups, data representativeness.</a:t>
-            </a:r>
-            <a:endParaRPr lang="en-US" sz="1380" dirty="0"/>
+              <a:t>Include intended use, affected populations, relevant subgroups,.</a:t>
+            </a:r>
+            <a:endParaRPr lang="en-US" sz="1220" dirty="0"/>
           </a:p>
         </p:txBody>
       </p:sp>
@@ -8589,17 +8721,17 @@
         </p:nvSpPr>
         <p:spPr>
           <a:xfrm>
-            <a:off x="7799832" y="5001768"/>
-            <a:ext cx="3145536" cy="502920"/>
-          </a:xfrm>
-          <a:prstGeom prst="rect">
-            <a:avLst/>
-          </a:prstGeom>
-          <a:noFill/>
-          <a:ln/>
-        </p:spPr>
-        <p:txBody>
-          <a:bodyPr wrap="square" lIns="0" tIns="0" rIns="0" bIns="0" rtlCol="0" anchor="t">
+            <a:off x="7799832" y="4974336"/>
+            <a:ext cx="3145536" cy="576072"/>
+          </a:xfrm>
+          <a:prstGeom prst="rect">
+            <a:avLst/>
+          </a:prstGeom>
+          <a:noFill/>
+          <a:ln/>
+        </p:spPr>
+        <p:txBody>
+          <a:bodyPr wrap="square" lIns="254" tIns="254" rIns="254" bIns="254" rtlCol="0" anchor="t">
             <a:normAutofit/>
           </a:bodyPr>
           <a:lstStyle/>
@@ -8608,7 +8740,7 @@
               <a:buNone/>
             </a:pPr>
             <a:r>
-              <a:rPr lang="en-US" sz="1550" dirty="0">
+              <a:rPr lang="en-US" sz="1320" dirty="0">
                 <a:solidFill>
                   <a:srgbClr val="17364A"/>
                 </a:solidFill>
@@ -8616,9 +8748,9 @@
                 <a:ea typeface="Aptos" pitchFamily="34" charset="-122"/>
                 <a:cs typeface="Aptos" pitchFamily="34" charset="-120"/>
               </a:rPr>
-              <a:t>Use the assignment to test whether you can explain the concept, apply it to a realistic public health situation, and identify what would need review before the work moves forward.</a:t>
-            </a:r>
-            <a:endParaRPr lang="en-US" sz="1550" dirty="0"/>
+              <a:t>Use the assignment to test whether you can explain the concept, apply it to a realistic public health situation, and.</a:t>
+            </a:r>
+            <a:endParaRPr lang="en-US" sz="1320" dirty="0"/>
           </a:p>
         </p:txBody>
       </p:sp>
@@ -8919,49 +9051,58 @@
           <a:ln/>
         </p:spPr>
         <p:txBody>
-          <a:bodyPr wrap="square" lIns="635" tIns="635" rIns="635" bIns="635" rtlCol="0" anchor="t">
+          <a:bodyPr wrap="square" lIns="1016" tIns="1016" rIns="1016" bIns="1016" rtlCol="0" anchor="t">
             <a:normAutofit/>
           </a:bodyPr>
           <a:lstStyle/>
           <a:p>
+            <a:pPr indent="0" marL="0">
+              <a:buNone/>
+            </a:pPr>
             <a:r>
               <a:rPr lang="en-US" sz="2100" dirty="0">
                 <a:solidFill>
-                  <a:srgbClr val="17364A"/>
-                </a:solidFill>
-                <a:latin typeface="Aptos" pitchFamily="34" charset="0"/>
-                <a:ea typeface="Aptos" pitchFamily="34" charset="-122"/>
-                <a:cs typeface="Aptos" pitchFamily="34" charset="-120"/>
-              </a:rPr>
-              <a:t>Equity evaluation plan</a:t>
+                  <a:srgbClr val="003A63"/>
+                </a:solidFill>
+                <a:latin typeface="Aptos" pitchFamily="34" charset="0"/>
+                <a:ea typeface="Aptos" pitchFamily="34" charset="-122"/>
+                <a:cs typeface="Aptos" pitchFamily="34" charset="-120"/>
+              </a:rPr>
+              <a:t>• Equity evaluation plan</a:t>
             </a:r>
             <a:endParaRPr lang="en-US" sz="2100" dirty="0"/>
           </a:p>
           <a:p>
+            <a:pPr indent="0" marL="0">
+              <a:buNone/>
+            </a:pPr>
             <a:r>
               <a:rPr lang="en-US" sz="2100" dirty="0">
                 <a:solidFill>
-                  <a:srgbClr val="17364A"/>
-                </a:solidFill>
-                <a:latin typeface="Aptos" pitchFamily="34" charset="0"/>
-                <a:ea typeface="Aptos" pitchFamily="34" charset="-122"/>
-                <a:cs typeface="Aptos" pitchFamily="34" charset="-120"/>
-              </a:rPr>
-              <a:t>Subgroup and data representativeness review</a:t>
+                  <a:srgbClr val="003A63"/>
+                </a:solidFill>
+                <a:latin typeface="Aptos" pitchFamily="34" charset="0"/>
+                <a:ea typeface="Aptos" pitchFamily="34" charset="-122"/>
+                <a:cs typeface="Aptos" pitchFamily="34" charset="-120"/>
+              </a:rPr>
+              <a:t>• Subgroup and data representativeness review</a:t>
             </a:r>
             <a:endParaRPr lang="en-US" sz="2100" dirty="0"/>
           </a:p>
           <a:p>
+            <a:pPr indent="0" marL="0">
+              <a:buNone/>
+            </a:pPr>
             <a:r>
               <a:rPr lang="en-US" sz="2100" dirty="0">
                 <a:solidFill>
-                  <a:srgbClr val="17364A"/>
-                </a:solidFill>
-                <a:latin typeface="Aptos" pitchFamily="34" charset="0"/>
-                <a:ea typeface="Aptos" pitchFamily="34" charset="-122"/>
-                <a:cs typeface="Aptos" pitchFamily="34" charset="-120"/>
-              </a:rPr>
-              <a:t>Potential harm and mitigation table</a:t>
+                  <a:srgbClr val="003A63"/>
+                </a:solidFill>
+                <a:latin typeface="Aptos" pitchFamily="34" charset="0"/>
+                <a:ea typeface="Aptos" pitchFamily="34" charset="-122"/>
+                <a:cs typeface="Aptos" pitchFamily="34" charset="-120"/>
+              </a:rPr>
+              <a:t>• Potential harm and mitigation table</a:t>
             </a:r>
             <a:endParaRPr lang="en-US" sz="2100" dirty="0"/>
           </a:p>
@@ -9041,17 +9182,17 @@
         </p:nvSpPr>
         <p:spPr>
           <a:xfrm>
-            <a:off x="7799832" y="1828800"/>
-            <a:ext cx="3145536" cy="685800"/>
-          </a:xfrm>
-          <a:prstGeom prst="rect">
-            <a:avLst/>
-          </a:prstGeom>
-          <a:noFill/>
-          <a:ln/>
-        </p:spPr>
-        <p:txBody>
-          <a:bodyPr wrap="square" lIns="0" tIns="0" rIns="0" bIns="0" rtlCol="0" anchor="t">
+            <a:off x="7799832" y="1801368"/>
+            <a:ext cx="3145536" cy="758952"/>
+          </a:xfrm>
+          <a:prstGeom prst="rect">
+            <a:avLst/>
+          </a:prstGeom>
+          <a:noFill/>
+          <a:ln/>
+        </p:spPr>
+        <p:txBody>
+          <a:bodyPr wrap="square" lIns="254" tIns="254" rIns="254" bIns="254" rtlCol="0" anchor="t">
             <a:normAutofit/>
           </a:bodyPr>
           <a:lstStyle/>
@@ -9060,7 +9201,7 @@
               <a:buNone/>
             </a:pPr>
             <a:r>
-              <a:rPr lang="en-US" sz="1550" dirty="0">
+              <a:rPr lang="en-US" sz="1320" dirty="0">
                 <a:solidFill>
                   <a:srgbClr val="17364A"/>
                 </a:solidFill>
@@ -9070,7 +9211,7 @@
               </a:rPr>
               <a:t>Equity evaluation plan</a:t>
             </a:r>
-            <a:endParaRPr lang="en-US" sz="1550" dirty="0"/>
+            <a:endParaRPr lang="en-US" sz="1320" dirty="0"/>
           </a:p>
         </p:txBody>
       </p:sp>
@@ -9158,13 +9299,16 @@
           <a:ln/>
         </p:spPr>
         <p:txBody>
-          <a:bodyPr wrap="square" lIns="254" tIns="254" rIns="254" bIns="254" rtlCol="0" anchor="t">
+          <a:bodyPr wrap="square" lIns="508" tIns="508" rIns="508" bIns="508" rtlCol="0" anchor="t">
             <a:normAutofit/>
           </a:bodyPr>
           <a:lstStyle/>
           <a:p>
-            <a:r>
-              <a:rPr lang="en-US" sz="1380" dirty="0">
+            <a:pPr indent="0" marL="0">
+              <a:buNone/>
+            </a:pPr>
+            <a:r>
+              <a:rPr lang="en-US" sz="1220" dirty="0">
                 <a:solidFill>
                   <a:srgbClr val="17364A"/>
                 </a:solidFill>
@@ -9174,11 +9318,14 @@
               </a:rPr>
               <a:t>Equity evaluation plan</a:t>
             </a:r>
-            <a:endParaRPr lang="en-US" sz="1380" dirty="0"/>
-          </a:p>
-          <a:p>
-            <a:r>
-              <a:rPr lang="en-US" sz="1380" dirty="0">
+            <a:endParaRPr lang="en-US" sz="1220" dirty="0"/>
+          </a:p>
+          <a:p>
+            <a:pPr indent="0" marL="0">
+              <a:buNone/>
+            </a:pPr>
+            <a:r>
+              <a:rPr lang="en-US" sz="1220" dirty="0">
                 <a:solidFill>
                   <a:srgbClr val="17364A"/>
                 </a:solidFill>
@@ -9188,11 +9335,14 @@
               </a:rPr>
               <a:t>Subgroup and data representativeness review</a:t>
             </a:r>
-            <a:endParaRPr lang="en-US" sz="1380" dirty="0"/>
-          </a:p>
-          <a:p>
-            <a:r>
-              <a:rPr lang="en-US" sz="1380" dirty="0">
+            <a:endParaRPr lang="en-US" sz="1220" dirty="0"/>
+          </a:p>
+          <a:p>
+            <a:pPr indent="0" marL="0">
+              <a:buNone/>
+            </a:pPr>
+            <a:r>
+              <a:rPr lang="en-US" sz="1220" dirty="0">
                 <a:solidFill>
                   <a:srgbClr val="17364A"/>
                 </a:solidFill>
@@ -9202,7 +9352,7 @@
               </a:rPr>
               <a:t>Potential harm and mitigation table</a:t>
             </a:r>
-            <a:endParaRPr lang="en-US" sz="1380" dirty="0"/>
+            <a:endParaRPr lang="en-US" sz="1220" dirty="0"/>
           </a:p>
         </p:txBody>
       </p:sp>
@@ -9280,17 +9430,17 @@
         </p:nvSpPr>
         <p:spPr>
           <a:xfrm>
-            <a:off x="7799832" y="5001768"/>
-            <a:ext cx="3145536" cy="502920"/>
-          </a:xfrm>
-          <a:prstGeom prst="rect">
-            <a:avLst/>
-          </a:prstGeom>
-          <a:noFill/>
-          <a:ln/>
-        </p:spPr>
-        <p:txBody>
-          <a:bodyPr wrap="square" lIns="0" tIns="0" rIns="0" bIns="0" rtlCol="0" anchor="t">
+            <a:off x="7799832" y="4974336"/>
+            <a:ext cx="3145536" cy="576072"/>
+          </a:xfrm>
+          <a:prstGeom prst="rect">
+            <a:avLst/>
+          </a:prstGeom>
+          <a:noFill/>
+          <a:ln/>
+        </p:spPr>
+        <p:txBody>
+          <a:bodyPr wrap="square" lIns="254" tIns="254" rIns="254" bIns="254" rtlCol="0" anchor="t">
             <a:normAutofit/>
           </a:bodyPr>
           <a:lstStyle/>
@@ -9299,7 +9449,7 @@
               <a:buNone/>
             </a:pPr>
             <a:r>
-              <a:rPr lang="en-US" sz="1550" dirty="0">
+              <a:rPr lang="en-US" sz="1320" dirty="0">
                 <a:solidFill>
                   <a:srgbClr val="17364A"/>
                 </a:solidFill>
@@ -9307,9 +9457,9 @@
                 <a:ea typeface="Aptos" pitchFamily="34" charset="-122"/>
                 <a:cs typeface="Aptos" pitchFamily="34" charset="-120"/>
               </a:rPr>
-              <a:t>Identify what could go wrong, who could be affected, what safeguards are needed, and what evidence should be reviewed before use expands.</a:t>
-            </a:r>
-            <a:endParaRPr lang="en-US" sz="1550" dirty="0"/>
+              <a:t>Identify what could go wrong, who could be affected, what safeguards are needed, and what evidence should be reviewed.</a:t>
+            </a:r>
+            <a:endParaRPr lang="en-US" sz="1320" dirty="0"/>
           </a:p>
         </p:txBody>
       </p:sp>
@@ -9610,35 +9760,41 @@
           <a:ln/>
         </p:spPr>
         <p:txBody>
-          <a:bodyPr wrap="square" lIns="635" tIns="635" rIns="635" bIns="635" rtlCol="0" anchor="t">
+          <a:bodyPr wrap="square" lIns="1016" tIns="1016" rIns="1016" bIns="1016" rtlCol="0" anchor="t">
             <a:normAutofit/>
           </a:bodyPr>
           <a:lstStyle/>
           <a:p>
+            <a:pPr indent="0" marL="0">
+              <a:buNone/>
+            </a:pPr>
             <a:r>
               <a:rPr lang="en-US" sz="2100" dirty="0">
                 <a:solidFill>
-                  <a:srgbClr val="17364A"/>
-                </a:solidFill>
-                <a:latin typeface="Aptos" pitchFamily="34" charset="0"/>
-                <a:ea typeface="Aptos" pitchFamily="34" charset="-122"/>
-                <a:cs typeface="Aptos" pitchFamily="34" charset="-120"/>
-              </a:rPr>
-              <a:t>Equity monitoring indicators</a:t>
+                  <a:srgbClr val="003A63"/>
+                </a:solidFill>
+                <a:latin typeface="Aptos" pitchFamily="34" charset="0"/>
+                <a:ea typeface="Aptos" pitchFamily="34" charset="-122"/>
+                <a:cs typeface="Aptos" pitchFamily="34" charset="-120"/>
+              </a:rPr>
+              <a:t>• Equity monitoring indicators</a:t>
             </a:r>
             <a:endParaRPr lang="en-US" sz="2100" dirty="0"/>
           </a:p>
           <a:p>
+            <a:pPr indent="0" marL="0">
+              <a:buNone/>
+            </a:pPr>
             <a:r>
               <a:rPr lang="en-US" sz="2100" dirty="0">
                 <a:solidFill>
-                  <a:srgbClr val="17364A"/>
-                </a:solidFill>
-                <a:latin typeface="Aptos" pitchFamily="34" charset="0"/>
-                <a:ea typeface="Aptos" pitchFamily="34" charset="-122"/>
-                <a:cs typeface="Aptos" pitchFamily="34" charset="-120"/>
-              </a:rPr>
-              <a:t>Governance recommendation</a:t>
+                  <a:srgbClr val="003A63"/>
+                </a:solidFill>
+                <a:latin typeface="Aptos" pitchFamily="34" charset="0"/>
+                <a:ea typeface="Aptos" pitchFamily="34" charset="-122"/>
+                <a:cs typeface="Aptos" pitchFamily="34" charset="-120"/>
+              </a:rPr>
+              <a:t>• Governance recommendation</a:t>
             </a:r>
             <a:endParaRPr lang="en-US" sz="2100" dirty="0"/>
           </a:p>
@@ -9718,17 +9874,17 @@
         </p:nvSpPr>
         <p:spPr>
           <a:xfrm>
-            <a:off x="7799832" y="1828800"/>
-            <a:ext cx="3145536" cy="685800"/>
-          </a:xfrm>
-          <a:prstGeom prst="rect">
-            <a:avLst/>
-          </a:prstGeom>
-          <a:noFill/>
-          <a:ln/>
-        </p:spPr>
-        <p:txBody>
-          <a:bodyPr wrap="square" lIns="0" tIns="0" rIns="0" bIns="0" rtlCol="0" anchor="t">
+            <a:off x="7799832" y="1801368"/>
+            <a:ext cx="3145536" cy="758952"/>
+          </a:xfrm>
+          <a:prstGeom prst="rect">
+            <a:avLst/>
+          </a:prstGeom>
+          <a:noFill/>
+          <a:ln/>
+        </p:spPr>
+        <p:txBody>
+          <a:bodyPr wrap="square" lIns="254" tIns="254" rIns="254" bIns="254" rtlCol="0" anchor="t">
             <a:normAutofit/>
           </a:bodyPr>
           <a:lstStyle/>
@@ -9737,7 +9893,7 @@
               <a:buNone/>
             </a:pPr>
             <a:r>
-              <a:rPr lang="en-US" sz="1550" dirty="0">
+              <a:rPr lang="en-US" sz="1320" dirty="0">
                 <a:solidFill>
                   <a:srgbClr val="17364A"/>
                 </a:solidFill>
@@ -9747,7 +9903,7 @@
               </a:rPr>
               <a:t>Equity monitoring indicators</a:t>
             </a:r>
-            <a:endParaRPr lang="en-US" sz="1550" dirty="0"/>
+            <a:endParaRPr lang="en-US" sz="1320" dirty="0"/>
           </a:p>
         </p:txBody>
       </p:sp>
@@ -9835,13 +9991,16 @@
           <a:ln/>
         </p:spPr>
         <p:txBody>
-          <a:bodyPr wrap="square" lIns="254" tIns="254" rIns="254" bIns="254" rtlCol="0" anchor="t">
+          <a:bodyPr wrap="square" lIns="508" tIns="508" rIns="508" bIns="508" rtlCol="0" anchor="t">
             <a:normAutofit/>
           </a:bodyPr>
           <a:lstStyle/>
           <a:p>
-            <a:r>
-              <a:rPr lang="en-US" sz="1380" dirty="0">
+            <a:pPr indent="0" marL="0">
+              <a:buNone/>
+            </a:pPr>
+            <a:r>
+              <a:rPr lang="en-US" sz="1220" dirty="0">
                 <a:solidFill>
                   <a:srgbClr val="17364A"/>
                 </a:solidFill>
@@ -9851,11 +10010,14 @@
               </a:rPr>
               <a:t>Equity monitoring indicators</a:t>
             </a:r>
-            <a:endParaRPr lang="en-US" sz="1380" dirty="0"/>
-          </a:p>
-          <a:p>
-            <a:r>
-              <a:rPr lang="en-US" sz="1380" dirty="0">
+            <a:endParaRPr lang="en-US" sz="1220" dirty="0"/>
+          </a:p>
+          <a:p>
+            <a:pPr indent="0" marL="0">
+              <a:buNone/>
+            </a:pPr>
+            <a:r>
+              <a:rPr lang="en-US" sz="1220" dirty="0">
                 <a:solidFill>
                   <a:srgbClr val="17364A"/>
                 </a:solidFill>
@@ -9865,7 +10027,7 @@
               </a:rPr>
               <a:t>Governance recommendation</a:t>
             </a:r>
-            <a:endParaRPr lang="en-US" sz="1380" dirty="0"/>
+            <a:endParaRPr lang="en-US" sz="1220" dirty="0"/>
           </a:p>
         </p:txBody>
       </p:sp>
@@ -9943,17 +10105,17 @@
         </p:nvSpPr>
         <p:spPr>
           <a:xfrm>
-            <a:off x="7799832" y="5001768"/>
-            <a:ext cx="3145536" cy="502920"/>
-          </a:xfrm>
-          <a:prstGeom prst="rect">
-            <a:avLst/>
-          </a:prstGeom>
-          <a:noFill/>
-          <a:ln/>
-        </p:spPr>
-        <p:txBody>
-          <a:bodyPr wrap="square" lIns="0" tIns="0" rIns="0" bIns="0" rtlCol="0" anchor="t">
+            <a:off x="7799832" y="4974336"/>
+            <a:ext cx="3145536" cy="576072"/>
+          </a:xfrm>
+          <a:prstGeom prst="rect">
+            <a:avLst/>
+          </a:prstGeom>
+          <a:noFill/>
+          <a:ln/>
+        </p:spPr>
+        <p:txBody>
+          <a:bodyPr wrap="square" lIns="254" tIns="254" rIns="254" bIns="254" rtlCol="0" anchor="t">
             <a:normAutofit/>
           </a:bodyPr>
           <a:lstStyle/>
@@ -9962,7 +10124,7 @@
               <a:buNone/>
             </a:pPr>
             <a:r>
-              <a:rPr lang="en-US" sz="1550" dirty="0">
+              <a:rPr lang="en-US" sz="1320" dirty="0">
                 <a:solidFill>
                   <a:srgbClr val="17364A"/>
                 </a:solidFill>
@@ -9970,9 +10132,9 @@
                 <a:ea typeface="Aptos" pitchFamily="34" charset="-122"/>
                 <a:cs typeface="Aptos" pitchFamily="34" charset="-120"/>
               </a:rPr>
-              <a:t>Identify what could go wrong, who could be affected, what safeguards are needed, and what evidence should be reviewed before use expands.</a:t>
-            </a:r>
-            <a:endParaRPr lang="en-US" sz="1550" dirty="0"/>
+              <a:t>Identify what could go wrong, who could be affected, what safeguards are needed, and what evidence should be reviewed.</a:t>
+            </a:r>
+            <a:endParaRPr lang="en-US" sz="1320" dirty="0"/>
           </a:p>
         </p:txBody>
       </p:sp>
@@ -10273,49 +10435,58 @@
           <a:ln/>
         </p:spPr>
         <p:txBody>
-          <a:bodyPr wrap="square" lIns="635" tIns="635" rIns="635" bIns="635" rtlCol="0" anchor="t">
+          <a:bodyPr wrap="square" lIns="1016" tIns="1016" rIns="1016" bIns="1016" rtlCol="0" anchor="t">
             <a:normAutofit/>
           </a:bodyPr>
           <a:lstStyle/>
           <a:p>
+            <a:pPr indent="0" marL="0">
+              <a:buNone/>
+            </a:pPr>
             <a:r>
               <a:rPr lang="en-US" sz="2100" dirty="0">
                 <a:solidFill>
-                  <a:srgbClr val="17364A"/>
-                </a:solidFill>
-                <a:latin typeface="Aptos" pitchFamily="34" charset="0"/>
-                <a:ea typeface="Aptos" pitchFamily="34" charset="-122"/>
-                <a:cs typeface="Aptos" pitchFamily="34" charset="-120"/>
-              </a:rPr>
-              <a:t>Equity evaluation examines whether an AI model performs differently across populations, places, languages,.</a:t>
+                  <a:srgbClr val="003A63"/>
+                </a:solidFill>
+                <a:latin typeface="Aptos" pitchFamily="34" charset="0"/>
+                <a:ea typeface="Aptos" pitchFamily="34" charset="-122"/>
+                <a:cs typeface="Aptos" pitchFamily="34" charset="-120"/>
+              </a:rPr>
+              <a:t>• Equity evaluation examines whether an AI model performs differently across populations,.</a:t>
             </a:r>
             <a:endParaRPr lang="en-US" sz="2100" dirty="0"/>
           </a:p>
           <a:p>
+            <a:pPr indent="0" marL="0">
+              <a:buNone/>
+            </a:pPr>
             <a:r>
               <a:rPr lang="en-US" sz="2100" dirty="0">
                 <a:solidFill>
-                  <a:srgbClr val="17364A"/>
-                </a:solidFill>
-                <a:latin typeface="Aptos" pitchFamily="34" charset="0"/>
-                <a:ea typeface="Aptos" pitchFamily="34" charset="-122"/>
-                <a:cs typeface="Aptos" pitchFamily="34" charset="-120"/>
-              </a:rPr>
-              <a:t>Public health agencies have a responsibility to evaluate not only average model performance but also who.</a:t>
+                  <a:srgbClr val="003A63"/>
+                </a:solidFill>
+                <a:latin typeface="Aptos" pitchFamily="34" charset="0"/>
+                <a:ea typeface="Aptos" pitchFamily="34" charset="-122"/>
+                <a:cs typeface="Aptos" pitchFamily="34" charset="-120"/>
+              </a:rPr>
+              <a:t>• Public health agencies have a responsibility to evaluate not only average model performance.</a:t>
             </a:r>
             <a:endParaRPr lang="en-US" sz="2100" dirty="0"/>
           </a:p>
           <a:p>
+            <a:pPr indent="0" marL="0">
+              <a:buNone/>
+            </a:pPr>
             <a:r>
               <a:rPr lang="en-US" sz="2100" dirty="0">
                 <a:solidFill>
-                  <a:srgbClr val="17364A"/>
-                </a:solidFill>
-                <a:latin typeface="Aptos" pitchFamily="34" charset="0"/>
-                <a:ea typeface="Aptos" pitchFamily="34" charset="-122"/>
-                <a:cs typeface="Aptos" pitchFamily="34" charset="-120"/>
-              </a:rPr>
-              <a:t>This is especially important when AI is used to prioritize cases, allocate services, detect risk, summarize.</a:t>
+                  <a:srgbClr val="003A63"/>
+                </a:solidFill>
+                <a:latin typeface="Aptos" pitchFamily="34" charset="0"/>
+                <a:ea typeface="Aptos" pitchFamily="34" charset="-122"/>
+                <a:cs typeface="Aptos" pitchFamily="34" charset="-120"/>
+              </a:rPr>
+              <a:t>• This is especially important when AI is used to prioritize cases, allocate services, detect.</a:t>
             </a:r>
             <a:endParaRPr lang="en-US" sz="2100" dirty="0"/>
           </a:p>
@@ -10395,17 +10566,17 @@
         </p:nvSpPr>
         <p:spPr>
           <a:xfrm>
-            <a:off x="8074152" y="1920240"/>
-            <a:ext cx="2825496" cy="1280160"/>
-          </a:xfrm>
-          <a:prstGeom prst="rect">
-            <a:avLst/>
-          </a:prstGeom>
-          <a:noFill/>
-          <a:ln/>
-        </p:spPr>
-        <p:txBody>
-          <a:bodyPr wrap="square" lIns="0" tIns="0" rIns="0" bIns="0" rtlCol="0" anchor="t">
+            <a:off x="8074152" y="1892808"/>
+            <a:ext cx="2825496" cy="1353312"/>
+          </a:xfrm>
+          <a:prstGeom prst="rect">
+            <a:avLst/>
+          </a:prstGeom>
+          <a:noFill/>
+          <a:ln/>
+        </p:spPr>
+        <p:txBody>
+          <a:bodyPr wrap="square" lIns="254" tIns="254" rIns="254" bIns="254" rtlCol="0" anchor="t">
             <a:normAutofit/>
           </a:bodyPr>
           <a:lstStyle/>
@@ -10414,7 +10585,7 @@
               <a:buNone/>
             </a:pPr>
             <a:r>
-              <a:rPr lang="en-US" sz="1550" dirty="0">
+              <a:rPr lang="en-US" sz="1320" dirty="0">
                 <a:solidFill>
                   <a:srgbClr val="17364A"/>
                 </a:solidFill>
@@ -10422,43 +10593,9 @@
                 <a:ea typeface="Aptos" pitchFamily="34" charset="-122"/>
                 <a:cs typeface="Aptos" pitchFamily="34" charset="-120"/>
               </a:rPr>
-              <a:t>Level: intermediate/practitioner</a:t>
-            </a:r>
-            <a:endParaRPr lang="en-US" sz="1550" dirty="0"/>
-          </a:p>
-          <a:p>
-            <a:pPr indent="0" marL="0">
-              <a:buNone/>
-            </a:pPr>
-            <a:r>
-              <a:rPr lang="en-US" sz="1550" dirty="0">
-                <a:solidFill>
-                  <a:srgbClr val="17364A"/>
-                </a:solidFill>
-                <a:latin typeface="Aptos" pitchFamily="34" charset="0"/>
-                <a:ea typeface="Aptos" pitchFamily="34" charset="-122"/>
-                <a:cs typeface="Aptos" pitchFamily="34" charset="-120"/>
-              </a:rPr>
-              <a:t>Primary track: Analytics and Modeling Track</a:t>
-            </a:r>
-            <a:endParaRPr lang="en-US" sz="1550" dirty="0"/>
-          </a:p>
-          <a:p>
-            <a:pPr indent="0" marL="0">
-              <a:buNone/>
-            </a:pPr>
-            <a:r>
-              <a:rPr lang="en-US" sz="1550" dirty="0">
-                <a:solidFill>
-                  <a:srgbClr val="17364A"/>
-                </a:solidFill>
-                <a:latin typeface="Aptos" pitchFamily="34" charset="0"/>
-                <a:ea typeface="Aptos" pitchFamily="34" charset="-122"/>
-                <a:cs typeface="Aptos" pitchFamily="34" charset="-120"/>
-              </a:rPr>
-              <a:t>Appears in tracks: analytics-and-modeling, governance-and-security, epidemiology, policy, communications</a:t>
-            </a:r>
-            <a:endParaRPr lang="en-US" sz="1550" dirty="0"/>
+              <a:t>Level: intermediate/practitioner Primary track: Analytics and Modeling Track Appears in tracks: analytics-and-modeling,.</a:t>
+            </a:r>
+            <a:endParaRPr lang="en-US" sz="1320" dirty="0"/>
           </a:p>
         </p:txBody>
       </p:sp>
@@ -10546,13 +10683,16 @@
           <a:ln/>
         </p:spPr>
         <p:txBody>
-          <a:bodyPr wrap="square" lIns="254" tIns="254" rIns="254" bIns="254" rtlCol="0" anchor="t">
+          <a:bodyPr wrap="square" lIns="508" tIns="508" rIns="508" bIns="508" rtlCol="0" anchor="t">
             <a:normAutofit/>
           </a:bodyPr>
           <a:lstStyle/>
           <a:p>
-            <a:r>
-              <a:rPr lang="en-US" sz="1380" dirty="0">
+            <a:pPr indent="0" marL="0">
+              <a:buNone/>
+            </a:pPr>
+            <a:r>
+              <a:rPr lang="en-US" sz="1220" dirty="0">
                 <a:solidFill>
                   <a:srgbClr val="17364A"/>
                 </a:solidFill>
@@ -10562,11 +10702,14 @@
               </a:rPr>
               <a:t>Read the module for shared vocabulary and context.</a:t>
             </a:r>
-            <a:endParaRPr lang="en-US" sz="1380" dirty="0"/>
-          </a:p>
-          <a:p>
-            <a:r>
-              <a:rPr lang="en-US" sz="1380" dirty="0">
+            <a:endParaRPr lang="en-US" sz="1220" dirty="0"/>
+          </a:p>
+          <a:p>
+            <a:pPr indent="0" marL="0">
+              <a:buNone/>
+            </a:pPr>
+            <a:r>
+              <a:rPr lang="en-US" sz="1220" dirty="0">
                 <a:solidFill>
                   <a:srgbClr val="17364A"/>
                 </a:solidFill>
@@ -10576,11 +10719,14 @@
               </a:rPr>
               <a:t>Complete the practical exercise to apply the concept.</a:t>
             </a:r>
-            <a:endParaRPr lang="en-US" sz="1380" dirty="0"/>
-          </a:p>
-          <a:p>
-            <a:r>
-              <a:rPr lang="en-US" sz="1380" dirty="0">
+            <a:endParaRPr lang="en-US" sz="1220" dirty="0"/>
+          </a:p>
+          <a:p>
+            <a:pPr indent="0" marL="0">
+              <a:buNone/>
+            </a:pPr>
+            <a:r>
+              <a:rPr lang="en-US" sz="1220" dirty="0">
                 <a:solidFill>
                   <a:srgbClr val="17364A"/>
                 </a:solidFill>
@@ -10590,7 +10736,7 @@
               </a:rPr>
               <a:t>Use the notes and references for deeper review.</a:t>
             </a:r>
-            <a:endParaRPr lang="en-US" sz="1380" dirty="0"/>
+            <a:endParaRPr lang="en-US" sz="1220" dirty="0"/>
           </a:p>
         </p:txBody>
       </p:sp>
@@ -10891,49 +11037,58 @@
           <a:ln/>
         </p:spPr>
         <p:txBody>
-          <a:bodyPr wrap="square" lIns="635" tIns="635" rIns="635" bIns="635" rtlCol="0" anchor="t">
+          <a:bodyPr wrap="square" lIns="1016" tIns="1016" rIns="1016" bIns="1016" rtlCol="0" anchor="t">
             <a:normAutofit/>
           </a:bodyPr>
           <a:lstStyle/>
           <a:p>
+            <a:pPr indent="0" marL="0">
+              <a:buNone/>
+            </a:pPr>
             <a:r>
               <a:rPr lang="en-US" sz="2100" dirty="0">
                 <a:solidFill>
-                  <a:srgbClr val="17364A"/>
-                </a:solidFill>
-                <a:latin typeface="Aptos" pitchFamily="34" charset="0"/>
-                <a:ea typeface="Aptos" pitchFamily="34" charset="-122"/>
-                <a:cs typeface="Aptos" pitchFamily="34" charset="-120"/>
-              </a:rPr>
-              <a:t>Equity evaluation plan</a:t>
+                  <a:srgbClr val="003A63"/>
+                </a:solidFill>
+                <a:latin typeface="Aptos" pitchFamily="34" charset="0"/>
+                <a:ea typeface="Aptos" pitchFamily="34" charset="-122"/>
+                <a:cs typeface="Aptos" pitchFamily="34" charset="-120"/>
+              </a:rPr>
+              <a:t>• Equity evaluation plan</a:t>
             </a:r>
             <a:endParaRPr lang="en-US" sz="2100" dirty="0"/>
           </a:p>
           <a:p>
+            <a:pPr indent="0" marL="0">
+              <a:buNone/>
+            </a:pPr>
             <a:r>
               <a:rPr lang="en-US" sz="2100" dirty="0">
                 <a:solidFill>
-                  <a:srgbClr val="17364A"/>
-                </a:solidFill>
-                <a:latin typeface="Aptos" pitchFamily="34" charset="0"/>
-                <a:ea typeface="Aptos" pitchFamily="34" charset="-122"/>
-                <a:cs typeface="Aptos" pitchFamily="34" charset="-120"/>
-              </a:rPr>
-              <a:t>Subgroup and data representativeness review</a:t>
+                  <a:srgbClr val="003A63"/>
+                </a:solidFill>
+                <a:latin typeface="Aptos" pitchFamily="34" charset="0"/>
+                <a:ea typeface="Aptos" pitchFamily="34" charset="-122"/>
+                <a:cs typeface="Aptos" pitchFamily="34" charset="-120"/>
+              </a:rPr>
+              <a:t>• Subgroup and data representativeness review</a:t>
             </a:r>
             <a:endParaRPr lang="en-US" sz="2100" dirty="0"/>
           </a:p>
           <a:p>
+            <a:pPr indent="0" marL="0">
+              <a:buNone/>
+            </a:pPr>
             <a:r>
               <a:rPr lang="en-US" sz="2100" dirty="0">
                 <a:solidFill>
-                  <a:srgbClr val="17364A"/>
-                </a:solidFill>
-                <a:latin typeface="Aptos" pitchFamily="34" charset="0"/>
-                <a:ea typeface="Aptos" pitchFamily="34" charset="-122"/>
-                <a:cs typeface="Aptos" pitchFamily="34" charset="-120"/>
-              </a:rPr>
-              <a:t>Potential harm and mitigation table</a:t>
+                  <a:srgbClr val="003A63"/>
+                </a:solidFill>
+                <a:latin typeface="Aptos" pitchFamily="34" charset="0"/>
+                <a:ea typeface="Aptos" pitchFamily="34" charset="-122"/>
+                <a:cs typeface="Aptos" pitchFamily="34" charset="-120"/>
+              </a:rPr>
+              <a:t>• Potential harm and mitigation table</a:t>
             </a:r>
             <a:endParaRPr lang="en-US" sz="2100" dirty="0"/>
           </a:p>
@@ -11013,17 +11168,17 @@
         </p:nvSpPr>
         <p:spPr>
           <a:xfrm>
-            <a:off x="7799832" y="1828800"/>
-            <a:ext cx="3145536" cy="685800"/>
-          </a:xfrm>
-          <a:prstGeom prst="rect">
-            <a:avLst/>
-          </a:prstGeom>
-          <a:noFill/>
-          <a:ln/>
-        </p:spPr>
-        <p:txBody>
-          <a:bodyPr wrap="square" lIns="0" tIns="0" rIns="0" bIns="0" rtlCol="0" anchor="t">
+            <a:off x="7799832" y="1801368"/>
+            <a:ext cx="3145536" cy="758952"/>
+          </a:xfrm>
+          <a:prstGeom prst="rect">
+            <a:avLst/>
+          </a:prstGeom>
+          <a:noFill/>
+          <a:ln/>
+        </p:spPr>
+        <p:txBody>
+          <a:bodyPr wrap="square" lIns="254" tIns="254" rIns="254" bIns="254" rtlCol="0" anchor="t">
             <a:normAutofit/>
           </a:bodyPr>
           <a:lstStyle/>
@@ -11032,7 +11187,7 @@
               <a:buNone/>
             </a:pPr>
             <a:r>
-              <a:rPr lang="en-US" sz="1550" dirty="0">
+              <a:rPr lang="en-US" sz="1320" dirty="0">
                 <a:solidFill>
                   <a:srgbClr val="17364A"/>
                 </a:solidFill>
@@ -11042,7 +11197,7 @@
               </a:rPr>
               <a:t>Equity evaluation plan</a:t>
             </a:r>
-            <a:endParaRPr lang="en-US" sz="1550" dirty="0"/>
+            <a:endParaRPr lang="en-US" sz="1320" dirty="0"/>
           </a:p>
         </p:txBody>
       </p:sp>
@@ -11130,13 +11285,16 @@
           <a:ln/>
         </p:spPr>
         <p:txBody>
-          <a:bodyPr wrap="square" lIns="254" tIns="254" rIns="254" bIns="254" rtlCol="0" anchor="t">
+          <a:bodyPr wrap="square" lIns="508" tIns="508" rIns="508" bIns="508" rtlCol="0" anchor="t">
             <a:normAutofit/>
           </a:bodyPr>
           <a:lstStyle/>
           <a:p>
-            <a:r>
-              <a:rPr lang="en-US" sz="1380" dirty="0">
+            <a:pPr indent="0" marL="0">
+              <a:buNone/>
+            </a:pPr>
+            <a:r>
+              <a:rPr lang="en-US" sz="1220" dirty="0">
                 <a:solidFill>
                   <a:srgbClr val="17364A"/>
                 </a:solidFill>
@@ -11146,11 +11304,14 @@
               </a:rPr>
               <a:t>Equity monitoring indicators</a:t>
             </a:r>
-            <a:endParaRPr lang="en-US" sz="1380" dirty="0"/>
-          </a:p>
-          <a:p>
-            <a:r>
-              <a:rPr lang="en-US" sz="1380" dirty="0">
+            <a:endParaRPr lang="en-US" sz="1220" dirty="0"/>
+          </a:p>
+          <a:p>
+            <a:pPr indent="0" marL="0">
+              <a:buNone/>
+            </a:pPr>
+            <a:r>
+              <a:rPr lang="en-US" sz="1220" dirty="0">
                 <a:solidFill>
                   <a:srgbClr val="17364A"/>
                 </a:solidFill>
@@ -11160,7 +11321,7 @@
               </a:rPr>
               <a:t>Governance recommendation</a:t>
             </a:r>
-            <a:endParaRPr lang="en-US" sz="1380" dirty="0"/>
+            <a:endParaRPr lang="en-US" sz="1220" dirty="0"/>
           </a:p>
         </p:txBody>
       </p:sp>
@@ -11238,17 +11399,17 @@
         </p:nvSpPr>
         <p:spPr>
           <a:xfrm>
-            <a:off x="7799832" y="5001768"/>
-            <a:ext cx="3145536" cy="502920"/>
-          </a:xfrm>
-          <a:prstGeom prst="rect">
-            <a:avLst/>
-          </a:prstGeom>
-          <a:noFill/>
-          <a:ln/>
-        </p:spPr>
-        <p:txBody>
-          <a:bodyPr wrap="square" lIns="0" tIns="0" rIns="0" bIns="0" rtlCol="0" anchor="t">
+            <a:off x="7799832" y="4974336"/>
+            <a:ext cx="3145536" cy="576072"/>
+          </a:xfrm>
+          <a:prstGeom prst="rect">
+            <a:avLst/>
+          </a:prstGeom>
+          <a:noFill/>
+          <a:ln/>
+        </p:spPr>
+        <p:txBody>
+          <a:bodyPr wrap="square" lIns="254" tIns="254" rIns="254" bIns="254" rtlCol="0" anchor="t">
             <a:normAutofit/>
           </a:bodyPr>
           <a:lstStyle/>
@@ -11257,7 +11418,7 @@
               <a:buNone/>
             </a:pPr>
             <a:r>
-              <a:rPr lang="en-US" sz="1550" dirty="0">
+              <a:rPr lang="en-US" sz="1320" dirty="0">
                 <a:solidFill>
                   <a:srgbClr val="17364A"/>
                 </a:solidFill>
@@ -11265,9 +11426,9 @@
                 <a:ea typeface="Aptos" pitchFamily="34" charset="-122"/>
                 <a:cs typeface="Aptos" pitchFamily="34" charset="-120"/>
               </a:rPr>
-              <a:t>Use the assignment to test whether you can explain the concept, apply it to a realistic public health situation, and identify what would need review before the work moves forward.</a:t>
-            </a:r>
-            <a:endParaRPr lang="en-US" sz="1550" dirty="0"/>
+              <a:t>Use the assignment to test whether you can explain the concept, apply it to a realistic public health situation, and.</a:t>
+            </a:r>
+            <a:endParaRPr lang="en-US" sz="1320" dirty="0"/>
           </a:p>
         </p:txBody>
       </p:sp>
@@ -11568,49 +11729,58 @@
           <a:ln/>
         </p:spPr>
         <p:txBody>
-          <a:bodyPr wrap="square" lIns="635" tIns="635" rIns="635" bIns="635" rtlCol="0" anchor="t">
+          <a:bodyPr wrap="square" lIns="1016" tIns="1016" rIns="1016" bIns="1016" rtlCol="0" anchor="t">
             <a:normAutofit/>
           </a:bodyPr>
           <a:lstStyle/>
           <a:p>
+            <a:pPr indent="0" marL="0">
+              <a:buNone/>
+            </a:pPr>
             <a:r>
               <a:rPr lang="en-US" sz="2100" dirty="0">
                 <a:solidFill>
-                  <a:srgbClr val="17364A"/>
-                </a:solidFill>
-                <a:latin typeface="Aptos" pitchFamily="34" charset="0"/>
-                <a:ea typeface="Aptos" pitchFamily="34" charset="-122"/>
-                <a:cs typeface="Aptos" pitchFamily="34" charset="-120"/>
-              </a:rPr>
-              <a:t>1. Why is overall model performance insufficient for public health equity review?</a:t>
+                  <a:srgbClr val="003A63"/>
+                </a:solidFill>
+                <a:latin typeface="Aptos" pitchFamily="34" charset="0"/>
+                <a:ea typeface="Aptos" pitchFamily="34" charset="-122"/>
+                <a:cs typeface="Aptos" pitchFamily="34" charset="-120"/>
+              </a:rPr>
+              <a:t>• 1. Why is overall model performance insufficient for public health equity review?</a:t>
             </a:r>
             <a:endParaRPr lang="en-US" sz="2100" dirty="0"/>
           </a:p>
           <a:p>
+            <a:pPr indent="0" marL="0">
+              <a:buNone/>
+            </a:pPr>
             <a:r>
               <a:rPr lang="en-US" sz="2100" dirty="0">
                 <a:solidFill>
-                  <a:srgbClr val="17364A"/>
-                </a:solidFill>
-                <a:latin typeface="Aptos" pitchFamily="34" charset="0"/>
-                <a:ea typeface="Aptos" pitchFamily="34" charset="-122"/>
-                <a:cs typeface="Aptos" pitchFamily="34" charset="-120"/>
-              </a:rPr>
-              <a:t>2. What is measurement bias?</a:t>
+                  <a:srgbClr val="003A63"/>
+                </a:solidFill>
+                <a:latin typeface="Aptos" pitchFamily="34" charset="0"/>
+                <a:ea typeface="Aptos" pitchFamily="34" charset="-122"/>
+                <a:cs typeface="Aptos" pitchFamily="34" charset="-120"/>
+              </a:rPr>
+              <a:t>• 2. What is measurement bias?</a:t>
             </a:r>
             <a:endParaRPr lang="en-US" sz="2100" dirty="0"/>
           </a:p>
           <a:p>
+            <a:pPr indent="0" marL="0">
+              <a:buNone/>
+            </a:pPr>
             <a:r>
               <a:rPr lang="en-US" sz="2100" dirty="0">
                 <a:solidFill>
-                  <a:srgbClr val="17364A"/>
-                </a:solidFill>
-                <a:latin typeface="Aptos" pitchFamily="34" charset="0"/>
-                <a:ea typeface="Aptos" pitchFamily="34" charset="-122"/>
-                <a:cs typeface="Aptos" pitchFamily="34" charset="-120"/>
-              </a:rPr>
-              <a:t>3. Which use most clearly requires equity evaluation?</a:t>
+                  <a:srgbClr val="003A63"/>
+                </a:solidFill>
+                <a:latin typeface="Aptos" pitchFamily="34" charset="0"/>
+                <a:ea typeface="Aptos" pitchFamily="34" charset="-122"/>
+                <a:cs typeface="Aptos" pitchFamily="34" charset="-120"/>
+              </a:rPr>
+              <a:t>• 3. Which use most clearly requires equity evaluation?</a:t>
             </a:r>
             <a:endParaRPr lang="en-US" sz="2100" dirty="0"/>
           </a:p>
@@ -11690,17 +11860,17 @@
         </p:nvSpPr>
         <p:spPr>
           <a:xfrm>
-            <a:off x="7799832" y="1828800"/>
-            <a:ext cx="3145536" cy="685800"/>
-          </a:xfrm>
-          <a:prstGeom prst="rect">
-            <a:avLst/>
-          </a:prstGeom>
-          <a:noFill/>
-          <a:ln/>
-        </p:spPr>
-        <p:txBody>
-          <a:bodyPr wrap="square" lIns="0" tIns="0" rIns="0" bIns="0" rtlCol="0" anchor="t">
+            <a:off x="7799832" y="1801368"/>
+            <a:ext cx="3145536" cy="758952"/>
+          </a:xfrm>
+          <a:prstGeom prst="rect">
+            <a:avLst/>
+          </a:prstGeom>
+          <a:noFill/>
+          <a:ln/>
+        </p:spPr>
+        <p:txBody>
+          <a:bodyPr wrap="square" lIns="254" tIns="254" rIns="254" bIns="254" rtlCol="0" anchor="t">
             <a:normAutofit/>
           </a:bodyPr>
           <a:lstStyle/>
@@ -11709,7 +11879,7 @@
               <a:buNone/>
             </a:pPr>
             <a:r>
-              <a:rPr lang="en-US" sz="1550" dirty="0">
+              <a:rPr lang="en-US" sz="1320" dirty="0">
                 <a:solidFill>
                   <a:srgbClr val="17364A"/>
                 </a:solidFill>
@@ -11719,7 +11889,7 @@
               </a:rPr>
               <a:t>1. Why is overall model performance insufficient for public health equity review?</a:t>
             </a:r>
-            <a:endParaRPr lang="en-US" sz="1550" dirty="0"/>
+            <a:endParaRPr lang="en-US" sz="1320" dirty="0"/>
           </a:p>
         </p:txBody>
       </p:sp>
@@ -11807,13 +11977,16 @@
           <a:ln/>
         </p:spPr>
         <p:txBody>
-          <a:bodyPr wrap="square" lIns="254" tIns="254" rIns="254" bIns="254" rtlCol="0" anchor="t">
+          <a:bodyPr wrap="square" lIns="508" tIns="508" rIns="508" bIns="508" rtlCol="0" anchor="t">
             <a:normAutofit/>
           </a:bodyPr>
           <a:lstStyle/>
           <a:p>
-            <a:r>
-              <a:rPr lang="en-US" sz="1380" dirty="0">
+            <a:pPr indent="0" marL="0">
+              <a:buNone/>
+            </a:pPr>
+            <a:r>
+              <a:rPr lang="en-US" sz="1220" dirty="0">
                 <a:solidFill>
                   <a:srgbClr val="17364A"/>
                 </a:solidFill>
@@ -11823,11 +11996,14 @@
               </a:rPr>
               <a:t>1.</a:t>
             </a:r>
-            <a:endParaRPr lang="en-US" sz="1380" dirty="0"/>
-          </a:p>
-          <a:p>
-            <a:r>
-              <a:rPr lang="en-US" sz="1380" dirty="0">
+            <a:endParaRPr lang="en-US" sz="1220" dirty="0"/>
+          </a:p>
+          <a:p>
+            <a:pPr indent="0" marL="0">
+              <a:buNone/>
+            </a:pPr>
+            <a:r>
+              <a:rPr lang="en-US" sz="1220" dirty="0">
                 <a:solidFill>
                   <a:srgbClr val="17364A"/>
                 </a:solidFill>
@@ -11835,13 +12011,16 @@
                 <a:ea typeface="Aptos" pitchFamily="34" charset="-122"/>
                 <a:cs typeface="Aptos" pitchFamily="34" charset="-120"/>
               </a:rPr>
-              <a:t>Why is overall model performance insufficient for public health equity review?</a:t>
-            </a:r>
-            <a:endParaRPr lang="en-US" sz="1380" dirty="0"/>
-          </a:p>
-          <a:p>
-            <a:r>
-              <a:rPr lang="en-US" sz="1380" dirty="0">
+              <a:t>Why is overall model performance insufficient for public health.</a:t>
+            </a:r>
+            <a:endParaRPr lang="en-US" sz="1220" dirty="0"/>
+          </a:p>
+          <a:p>
+            <a:pPr indent="0" marL="0">
+              <a:buNone/>
+            </a:pPr>
+            <a:r>
+              <a:rPr lang="en-US" sz="1220" dirty="0">
                 <a:solidFill>
                   <a:srgbClr val="17364A"/>
                 </a:solidFill>
@@ -11851,7 +12030,7 @@
               </a:rPr>
               <a:t>2.</a:t>
             </a:r>
-            <a:endParaRPr lang="en-US" sz="1380" dirty="0"/>
+            <a:endParaRPr lang="en-US" sz="1220" dirty="0"/>
           </a:p>
         </p:txBody>
       </p:sp>
@@ -11929,17 +12108,17 @@
         </p:nvSpPr>
         <p:spPr>
           <a:xfrm>
-            <a:off x="7799832" y="5001768"/>
-            <a:ext cx="3145536" cy="502920"/>
-          </a:xfrm>
-          <a:prstGeom prst="rect">
-            <a:avLst/>
-          </a:prstGeom>
-          <a:noFill/>
-          <a:ln/>
-        </p:spPr>
-        <p:txBody>
-          <a:bodyPr wrap="square" lIns="0" tIns="0" rIns="0" bIns="0" rtlCol="0" anchor="t">
+            <a:off x="7799832" y="4974336"/>
+            <a:ext cx="3145536" cy="576072"/>
+          </a:xfrm>
+          <a:prstGeom prst="rect">
+            <a:avLst/>
+          </a:prstGeom>
+          <a:noFill/>
+          <a:ln/>
+        </p:spPr>
+        <p:txBody>
+          <a:bodyPr wrap="square" lIns="254" tIns="254" rIns="254" bIns="254" rtlCol="0" anchor="t">
             <a:normAutofit/>
           </a:bodyPr>
           <a:lstStyle/>
@@ -11948,7 +12127,7 @@
               <a:buNone/>
             </a:pPr>
             <a:r>
-              <a:rPr lang="en-US" sz="1550" dirty="0">
+              <a:rPr lang="en-US" sz="1320" dirty="0">
                 <a:solidFill>
                   <a:srgbClr val="17364A"/>
                 </a:solidFill>
@@ -11956,9 +12135,9 @@
                 <a:ea typeface="Aptos" pitchFamily="34" charset="-122"/>
                 <a:cs typeface="Aptos" pitchFamily="34" charset="-120"/>
               </a:rPr>
-              <a:t>Use the assignment to test whether you can explain the concept, apply it to a realistic public health situation, and identify what would need review before the work moves forward.</a:t>
-            </a:r>
-            <a:endParaRPr lang="en-US" sz="1550" dirty="0"/>
+              <a:t>Use the assignment to test whether you can explain the concept, apply it to a realistic public health situation, and.</a:t>
+            </a:r>
+            <a:endParaRPr lang="en-US" sz="1320" dirty="0"/>
           </a:p>
         </p:txBody>
       </p:sp>
@@ -12259,49 +12438,58 @@
           <a:ln/>
         </p:spPr>
         <p:txBody>
-          <a:bodyPr wrap="square" lIns="635" tIns="635" rIns="635" bIns="635" rtlCol="0" anchor="t">
+          <a:bodyPr wrap="square" lIns="1016" tIns="1016" rIns="1016" bIns="1016" rtlCol="0" anchor="t">
             <a:normAutofit/>
           </a:bodyPr>
           <a:lstStyle/>
           <a:p>
+            <a:pPr indent="0" marL="0">
+              <a:buNone/>
+            </a:pPr>
             <a:r>
               <a:rPr lang="en-US" sz="2100" dirty="0">
                 <a:solidFill>
-                  <a:srgbClr val="17364A"/>
-                </a:solidFill>
-                <a:latin typeface="Aptos" pitchFamily="34" charset="0"/>
-                <a:ea typeface="Aptos" pitchFamily="34" charset="-122"/>
-                <a:cs typeface="Aptos" pitchFamily="34" charset="-120"/>
-              </a:rPr>
-              <a:t>NIST Artificial Intelligence Risk Management Framework:.</a:t>
+                  <a:srgbClr val="003A63"/>
+                </a:solidFill>
+                <a:latin typeface="Aptos" pitchFamily="34" charset="0"/>
+                <a:ea typeface="Aptos" pitchFamily="34" charset="-122"/>
+                <a:cs typeface="Aptos" pitchFamily="34" charset="-120"/>
+              </a:rPr>
+              <a:t>• NIST Artificial Intelligence Risk Management Framework:.</a:t>
             </a:r>
             <a:endParaRPr lang="en-US" sz="2100" dirty="0"/>
           </a:p>
           <a:p>
+            <a:pPr indent="0" marL="0">
+              <a:buNone/>
+            </a:pPr>
             <a:r>
               <a:rPr lang="en-US" sz="2100" dirty="0">
                 <a:solidFill>
-                  <a:srgbClr val="17364A"/>
-                </a:solidFill>
-                <a:latin typeface="Aptos" pitchFamily="34" charset="0"/>
-                <a:ea typeface="Aptos" pitchFamily="34" charset="-122"/>
-                <a:cs typeface="Aptos" pitchFamily="34" charset="-120"/>
-              </a:rPr>
-              <a:t>NIST Generative AI Profile:.</a:t>
+                  <a:srgbClr val="003A63"/>
+                </a:solidFill>
+                <a:latin typeface="Aptos" pitchFamily="34" charset="0"/>
+                <a:ea typeface="Aptos" pitchFamily="34" charset="-122"/>
+                <a:cs typeface="Aptos" pitchFamily="34" charset="-120"/>
+              </a:rPr>
+              <a:t>• NIST Generative AI Profile:.</a:t>
             </a:r>
             <a:endParaRPr lang="en-US" sz="2100" dirty="0"/>
           </a:p>
           <a:p>
+            <a:pPr indent="0" marL="0">
+              <a:buNone/>
+            </a:pPr>
             <a:r>
               <a:rPr lang="en-US" sz="2100" dirty="0">
                 <a:solidFill>
-                  <a:srgbClr val="17364A"/>
-                </a:solidFill>
-                <a:latin typeface="Aptos" pitchFamily="34" charset="0"/>
-                <a:ea typeface="Aptos" pitchFamily="34" charset="-122"/>
-                <a:cs typeface="Aptos" pitchFamily="34" charset="-120"/>
-              </a:rPr>
-              <a:t>CDC Public Health Data Strategy and Data Modernization resources:.</a:t>
+                  <a:srgbClr val="003A63"/>
+                </a:solidFill>
+                <a:latin typeface="Aptos" pitchFamily="34" charset="0"/>
+                <a:ea typeface="Aptos" pitchFamily="34" charset="-122"/>
+                <a:cs typeface="Aptos" pitchFamily="34" charset="-120"/>
+              </a:rPr>
+              <a:t>• CDC Public Health Data Strategy and Data Modernization resources:.</a:t>
             </a:r>
             <a:endParaRPr lang="en-US" sz="2100" dirty="0"/>
           </a:p>
@@ -12381,17 +12569,17 @@
         </p:nvSpPr>
         <p:spPr>
           <a:xfrm>
-            <a:off x="7799832" y="1828800"/>
-            <a:ext cx="3145536" cy="685800"/>
-          </a:xfrm>
-          <a:prstGeom prst="rect">
-            <a:avLst/>
-          </a:prstGeom>
-          <a:noFill/>
-          <a:ln/>
-        </p:spPr>
-        <p:txBody>
-          <a:bodyPr wrap="square" lIns="0" tIns="0" rIns="0" bIns="0" rtlCol="0" anchor="t">
+            <a:off x="7799832" y="1801368"/>
+            <a:ext cx="3145536" cy="758952"/>
+          </a:xfrm>
+          <a:prstGeom prst="rect">
+            <a:avLst/>
+          </a:prstGeom>
+          <a:noFill/>
+          <a:ln/>
+        </p:spPr>
+        <p:txBody>
+          <a:bodyPr wrap="square" lIns="254" tIns="254" rIns="254" bIns="254" rtlCol="0" anchor="t">
             <a:normAutofit/>
           </a:bodyPr>
           <a:lstStyle/>
@@ -12400,7 +12588,7 @@
               <a:buNone/>
             </a:pPr>
             <a:r>
-              <a:rPr lang="en-US" sz="1550" dirty="0">
+              <a:rPr lang="en-US" sz="1320" dirty="0">
                 <a:solidFill>
                   <a:srgbClr val="17364A"/>
                 </a:solidFill>
@@ -12410,7 +12598,7 @@
               </a:rPr>
               <a:t>NIST Artificial Intelligence Risk Management Framework:.</a:t>
             </a:r>
-            <a:endParaRPr lang="en-US" sz="1550" dirty="0"/>
+            <a:endParaRPr lang="en-US" sz="1320" dirty="0"/>
           </a:p>
         </p:txBody>
       </p:sp>
@@ -12498,13 +12686,16 @@
           <a:ln/>
         </p:spPr>
         <p:txBody>
-          <a:bodyPr wrap="square" lIns="254" tIns="254" rIns="254" bIns="254" rtlCol="0" anchor="t">
+          <a:bodyPr wrap="square" lIns="508" tIns="508" rIns="508" bIns="508" rtlCol="0" anchor="t">
             <a:normAutofit/>
           </a:bodyPr>
           <a:lstStyle/>
           <a:p>
-            <a:r>
-              <a:rPr lang="en-US" sz="1380" dirty="0">
+            <a:pPr indent="0" marL="0">
+              <a:buNone/>
+            </a:pPr>
+            <a:r>
+              <a:rPr lang="en-US" sz="1220" dirty="0">
                 <a:solidFill>
                   <a:srgbClr val="17364A"/>
                 </a:solidFill>
@@ -12514,11 +12705,14 @@
               </a:rPr>
               <a:t>NIST Artificial Intelligence Risk Management Framework:.</a:t>
             </a:r>
-            <a:endParaRPr lang="en-US" sz="1380" dirty="0"/>
-          </a:p>
-          <a:p>
-            <a:r>
-              <a:rPr lang="en-US" sz="1380" dirty="0">
+            <a:endParaRPr lang="en-US" sz="1220" dirty="0"/>
+          </a:p>
+          <a:p>
+            <a:pPr indent="0" marL="0">
+              <a:buNone/>
+            </a:pPr>
+            <a:r>
+              <a:rPr lang="en-US" sz="1220" dirty="0">
                 <a:solidFill>
                   <a:srgbClr val="17364A"/>
                 </a:solidFill>
@@ -12528,11 +12722,14 @@
               </a:rPr>
               <a:t>OWASP guidance for LLM application security</a:t>
             </a:r>
-            <a:endParaRPr lang="en-US" sz="1380" dirty="0"/>
-          </a:p>
-          <a:p>
-            <a:r>
-              <a:rPr lang="en-US" sz="1380" dirty="0">
+            <a:endParaRPr lang="en-US" sz="1220" dirty="0"/>
+          </a:p>
+          <a:p>
+            <a:pPr indent="0" marL="0">
+              <a:buNone/>
+            </a:pPr>
+            <a:r>
+              <a:rPr lang="en-US" sz="1220" dirty="0">
                 <a:solidFill>
                   <a:srgbClr val="17364A"/>
                 </a:solidFill>
@@ -12540,9 +12737,9 @@
                 <a:ea typeface="Aptos" pitchFamily="34" charset="-122"/>
                 <a:cs typeface="Aptos" pitchFamily="34" charset="-120"/>
               </a:rPr>
-              <a:t>Agency policies for privacy, cybersecurity, records, procurement, accessibility, and.</a:t>
-            </a:r>
-            <a:endParaRPr lang="en-US" sz="1380" dirty="0"/>
+              <a:t>Agency policies for privacy, cybersecurity, records, procurement,.</a:t>
+            </a:r>
+            <a:endParaRPr lang="en-US" sz="1220" dirty="0"/>
           </a:p>
         </p:txBody>
       </p:sp>
@@ -12620,17 +12817,17 @@
         </p:nvSpPr>
         <p:spPr>
           <a:xfrm>
-            <a:off x="7799832" y="5001768"/>
-            <a:ext cx="3145536" cy="502920"/>
-          </a:xfrm>
-          <a:prstGeom prst="rect">
-            <a:avLst/>
-          </a:prstGeom>
-          <a:noFill/>
-          <a:ln/>
-        </p:spPr>
-        <p:txBody>
-          <a:bodyPr wrap="square" lIns="0" tIns="0" rIns="0" bIns="0" rtlCol="0" anchor="t">
+            <a:off x="7799832" y="4974336"/>
+            <a:ext cx="3145536" cy="576072"/>
+          </a:xfrm>
+          <a:prstGeom prst="rect">
+            <a:avLst/>
+          </a:prstGeom>
+          <a:noFill/>
+          <a:ln/>
+        </p:spPr>
+        <p:txBody>
+          <a:bodyPr wrap="square" lIns="254" tIns="254" rIns="254" bIns="254" rtlCol="0" anchor="t">
             <a:normAutofit/>
           </a:bodyPr>
           <a:lstStyle/>
@@ -12639,7 +12836,7 @@
               <a:buNone/>
             </a:pPr>
             <a:r>
-              <a:rPr lang="en-US" sz="1550" dirty="0">
+              <a:rPr lang="en-US" sz="1320" dirty="0">
                 <a:solidFill>
                   <a:srgbClr val="17364A"/>
                 </a:solidFill>
@@ -12647,9 +12844,9 @@
                 <a:ea typeface="Aptos" pitchFamily="34" charset="-122"/>
                 <a:cs typeface="Aptos" pitchFamily="34" charset="-120"/>
               </a:rPr>
-              <a:t>Identify what could go wrong, who could be affected, what safeguards are needed, and what evidence should be reviewed before use expands.</a:t>
-            </a:r>
-            <a:endParaRPr lang="en-US" sz="1550" dirty="0"/>
+              <a:t>Identify what could go wrong, who could be affected, what safeguards are needed, and what evidence should be reviewed.</a:t>
+            </a:r>
+            <a:endParaRPr lang="en-US" sz="1320" dirty="0"/>
           </a:p>
         </p:txBody>
       </p:sp>
@@ -12950,21 +13147,24 @@
           <a:ln/>
         </p:spPr>
         <p:txBody>
-          <a:bodyPr wrap="square" lIns="635" tIns="635" rIns="635" bIns="635" rtlCol="0" anchor="t">
+          <a:bodyPr wrap="square" lIns="1016" tIns="1016" rIns="1016" bIns="1016" rtlCol="0" anchor="t">
             <a:normAutofit/>
           </a:bodyPr>
           <a:lstStyle/>
           <a:p>
+            <a:pPr indent="0" marL="0">
+              <a:buNone/>
+            </a:pPr>
             <a:r>
               <a:rPr lang="en-US" sz="2100" dirty="0">
                 <a:solidFill>
-                  <a:srgbClr val="17364A"/>
-                </a:solidFill>
-                <a:latin typeface="Aptos" pitchFamily="34" charset="0"/>
-                <a:ea typeface="Aptos" pitchFamily="34" charset="-122"/>
-                <a:cs typeface="Aptos" pitchFamily="34" charset="-120"/>
-              </a:rPr>
-              <a:t>Relevant public health program SOPs, data governance documentation, and implementation plans</a:t>
+                  <a:srgbClr val="003A63"/>
+                </a:solidFill>
+                <a:latin typeface="Aptos" pitchFamily="34" charset="0"/>
+                <a:ea typeface="Aptos" pitchFamily="34" charset="-122"/>
+                <a:cs typeface="Aptos" pitchFamily="34" charset="-120"/>
+              </a:rPr>
+              <a:t>• Relevant public health program SOPs, data governance documentation, and implementation plans</a:t>
             </a:r>
             <a:endParaRPr lang="en-US" sz="2100" dirty="0"/>
           </a:p>
@@ -13044,17 +13244,17 @@
         </p:nvSpPr>
         <p:spPr>
           <a:xfrm>
-            <a:off x="7799832" y="1828800"/>
-            <a:ext cx="3145536" cy="685800"/>
-          </a:xfrm>
-          <a:prstGeom prst="rect">
-            <a:avLst/>
-          </a:prstGeom>
-          <a:noFill/>
-          <a:ln/>
-        </p:spPr>
-        <p:txBody>
-          <a:bodyPr wrap="square" lIns="0" tIns="0" rIns="0" bIns="0" rtlCol="0" anchor="t">
+            <a:off x="7799832" y="1801368"/>
+            <a:ext cx="3145536" cy="758952"/>
+          </a:xfrm>
+          <a:prstGeom prst="rect">
+            <a:avLst/>
+          </a:prstGeom>
+          <a:noFill/>
+          <a:ln/>
+        </p:spPr>
+        <p:txBody>
+          <a:bodyPr wrap="square" lIns="254" tIns="254" rIns="254" bIns="254" rtlCol="0" anchor="t">
             <a:normAutofit/>
           </a:bodyPr>
           <a:lstStyle/>
@@ -13063,7 +13263,7 @@
               <a:buNone/>
             </a:pPr>
             <a:r>
-              <a:rPr lang="en-US" sz="1550" dirty="0">
+              <a:rPr lang="en-US" sz="1320" dirty="0">
                 <a:solidFill>
                   <a:srgbClr val="17364A"/>
                 </a:solidFill>
@@ -13073,7 +13273,7 @@
               </a:rPr>
               <a:t>Relevant public health program SOPs, data governance documentation, and implementation plans</a:t>
             </a:r>
-            <a:endParaRPr lang="en-US" sz="1550" dirty="0"/>
+            <a:endParaRPr lang="en-US" sz="1320" dirty="0"/>
           </a:p>
         </p:txBody>
       </p:sp>
@@ -13161,13 +13361,16 @@
           <a:ln/>
         </p:spPr>
         <p:txBody>
-          <a:bodyPr wrap="square" lIns="254" tIns="254" rIns="254" bIns="254" rtlCol="0" anchor="t">
+          <a:bodyPr wrap="square" lIns="508" tIns="508" rIns="508" bIns="508" rtlCol="0" anchor="t">
             <a:normAutofit/>
           </a:bodyPr>
           <a:lstStyle/>
           <a:p>
-            <a:r>
-              <a:rPr lang="en-US" sz="1380" dirty="0">
+            <a:pPr indent="0" marL="0">
+              <a:buNone/>
+            </a:pPr>
+            <a:r>
+              <a:rPr lang="en-US" sz="1220" dirty="0">
                 <a:solidFill>
                   <a:srgbClr val="17364A"/>
                 </a:solidFill>
@@ -13175,9 +13378,9 @@
                 <a:ea typeface="Aptos" pitchFamily="34" charset="-122"/>
                 <a:cs typeface="Aptos" pitchFamily="34" charset="-120"/>
               </a:rPr>
-              <a:t>Relevant public health program SOPs, data governance documentation, and implementation plans</a:t>
-            </a:r>
-            <a:endParaRPr lang="en-US" sz="1380" dirty="0"/>
+              <a:t>Relevant public health program SOPs, data governance.</a:t>
+            </a:r>
+            <a:endParaRPr lang="en-US" sz="1220" dirty="0"/>
           </a:p>
         </p:txBody>
       </p:sp>
@@ -13255,17 +13458,17 @@
         </p:nvSpPr>
         <p:spPr>
           <a:xfrm>
-            <a:off x="7799832" y="5001768"/>
-            <a:ext cx="3145536" cy="502920"/>
-          </a:xfrm>
-          <a:prstGeom prst="rect">
-            <a:avLst/>
-          </a:prstGeom>
-          <a:noFill/>
-          <a:ln/>
-        </p:spPr>
-        <p:txBody>
-          <a:bodyPr wrap="square" lIns="0" tIns="0" rIns="0" bIns="0" rtlCol="0" anchor="t">
+            <a:off x="7799832" y="4974336"/>
+            <a:ext cx="3145536" cy="576072"/>
+          </a:xfrm>
+          <a:prstGeom prst="rect">
+            <a:avLst/>
+          </a:prstGeom>
+          <a:noFill/>
+          <a:ln/>
+        </p:spPr>
+        <p:txBody>
+          <a:bodyPr wrap="square" lIns="254" tIns="254" rIns="254" bIns="254" rtlCol="0" anchor="t">
             <a:normAutofit/>
           </a:bodyPr>
           <a:lstStyle/>
@@ -13274,7 +13477,7 @@
               <a:buNone/>
             </a:pPr>
             <a:r>
-              <a:rPr lang="en-US" sz="1550" dirty="0">
+              <a:rPr lang="en-US" sz="1320" dirty="0">
                 <a:solidFill>
                   <a:srgbClr val="17364A"/>
                 </a:solidFill>
@@ -13282,9 +13485,9 @@
                 <a:ea typeface="Aptos" pitchFamily="34" charset="-122"/>
                 <a:cs typeface="Aptos" pitchFamily="34" charset="-120"/>
               </a:rPr>
-              <a:t>Identify what could go wrong, who could be affected, what safeguards are needed, and what evidence should be reviewed before use expands.</a:t>
-            </a:r>
-            <a:endParaRPr lang="en-US" sz="1550" dirty="0"/>
+              <a:t>Identify what could go wrong, who could be affected, what safeguards are needed, and what evidence should be reviewed.</a:t>
+            </a:r>
+            <a:endParaRPr lang="en-US" sz="1320" dirty="0"/>
           </a:p>
         </p:txBody>
       </p:sp>
@@ -13585,63 +13788,75 @@
           <a:ln/>
         </p:spPr>
         <p:txBody>
-          <a:bodyPr wrap="square" lIns="635" tIns="635" rIns="635" bIns="635" rtlCol="0" anchor="t">
+          <a:bodyPr wrap="square" lIns="1016" tIns="1016" rIns="1016" bIns="1016" rtlCol="0" anchor="t">
             <a:normAutofit/>
           </a:bodyPr>
           <a:lstStyle/>
           <a:p>
+            <a:pPr indent="0" marL="0">
+              <a:buNone/>
+            </a:pPr>
             <a:r>
               <a:rPr lang="en-US" sz="1900" dirty="0">
                 <a:solidFill>
-                  <a:srgbClr val="17364A"/>
-                </a:solidFill>
-                <a:latin typeface="Aptos" pitchFamily="34" charset="0"/>
-                <a:ea typeface="Aptos" pitchFamily="34" charset="-122"/>
-                <a:cs typeface="Aptos" pitchFamily="34" charset="-120"/>
-              </a:rPr>
-              <a:t>Play 13: Monitor and Evaluate AI Systems - This lesson informs Play 13 by helping learners connect the.</a:t>
+                  <a:srgbClr val="003A63"/>
+                </a:solidFill>
+                <a:latin typeface="Aptos" pitchFamily="34" charset="0"/>
+                <a:ea typeface="Aptos" pitchFamily="34" charset="-122"/>
+                <a:cs typeface="Aptos" pitchFamily="34" charset="-120"/>
+              </a:rPr>
+              <a:t>• Play 13: Monitor and Evaluate AI Systems - This lesson informs Play 13 by helping learners.</a:t>
             </a:r>
             <a:endParaRPr lang="en-US" sz="1900" dirty="0"/>
           </a:p>
           <a:p>
+            <a:pPr indent="0" marL="0">
+              <a:buNone/>
+            </a:pPr>
             <a:r>
               <a:rPr lang="en-US" sz="1900" dirty="0">
                 <a:solidFill>
-                  <a:srgbClr val="17364A"/>
-                </a:solidFill>
-                <a:latin typeface="Aptos" pitchFamily="34" charset="0"/>
-                <a:ea typeface="Aptos" pitchFamily="34" charset="-122"/>
-                <a:cs typeface="Aptos" pitchFamily="34" charset="-120"/>
-              </a:rPr>
-              <a:t>Play 11: Build and Deploy AI Solutions - This lesson informs Play 11 by helping learners connect the lesson.</a:t>
+                  <a:srgbClr val="003A63"/>
+                </a:solidFill>
+                <a:latin typeface="Aptos" pitchFamily="34" charset="0"/>
+                <a:ea typeface="Aptos" pitchFamily="34" charset="-122"/>
+                <a:cs typeface="Aptos" pitchFamily="34" charset="-120"/>
+              </a:rPr>
+              <a:t>• Play 11: Build and Deploy AI Solutions - This lesson informs Play 11 by helping learners.</a:t>
             </a:r>
             <a:endParaRPr lang="en-US" sz="1900" dirty="0"/>
           </a:p>
           <a:p>
+            <a:pPr indent="0" marL="0">
+              <a:buNone/>
+            </a:pPr>
             <a:r>
               <a:rPr lang="en-US" sz="1900" dirty="0">
                 <a:solidFill>
-                  <a:srgbClr val="17364A"/>
-                </a:solidFill>
-                <a:latin typeface="Aptos" pitchFamily="34" charset="0"/>
-                <a:ea typeface="Aptos" pitchFamily="34" charset="-122"/>
-                <a:cs typeface="Aptos" pitchFamily="34" charset="-120"/>
-              </a:rPr>
-              <a:t>Play 8: Develop a Funding Strategy - This lesson informs Play 8 by helping learners connect the lesson topic.</a:t>
+                  <a:srgbClr val="003A63"/>
+                </a:solidFill>
+                <a:latin typeface="Aptos" pitchFamily="34" charset="0"/>
+                <a:ea typeface="Aptos" pitchFamily="34" charset="-122"/>
+                <a:cs typeface="Aptos" pitchFamily="34" charset="-120"/>
+              </a:rPr>
+              <a:t>• Play 8: Develop a Funding Strategy - This lesson informs Play 8 by helping learners connect.</a:t>
             </a:r>
             <a:endParaRPr lang="en-US" sz="1900" dirty="0"/>
           </a:p>
           <a:p>
+            <a:pPr indent="0" marL="0">
+              <a:buNone/>
+            </a:pPr>
             <a:r>
               <a:rPr lang="en-US" sz="1900" dirty="0">
                 <a:solidFill>
-                  <a:srgbClr val="17364A"/>
-                </a:solidFill>
-                <a:latin typeface="Aptos" pitchFamily="34" charset="0"/>
-                <a:ea typeface="Aptos" pitchFamily="34" charset="-122"/>
-                <a:cs typeface="Aptos" pitchFamily="34" charset="-120"/>
-              </a:rPr>
-              <a:t>Play 3: Establish AI Governance - This lesson informs Play 3 by helping learners connect the lesson topic to.</a:t>
+                  <a:srgbClr val="003A63"/>
+                </a:solidFill>
+                <a:latin typeface="Aptos" pitchFamily="34" charset="0"/>
+                <a:ea typeface="Aptos" pitchFamily="34" charset="-122"/>
+                <a:cs typeface="Aptos" pitchFamily="34" charset="-120"/>
+              </a:rPr>
+              <a:t>• Play 3: Establish AI Governance - This lesson informs Play 3 by helping learners connect the.</a:t>
             </a:r>
             <a:endParaRPr lang="en-US" sz="1900" dirty="0"/>
           </a:p>
@@ -13721,17 +13936,17 @@
         </p:nvSpPr>
         <p:spPr>
           <a:xfrm>
-            <a:off x="8211312" y="1920240"/>
-            <a:ext cx="2734056" cy="1463040"/>
-          </a:xfrm>
-          <a:prstGeom prst="rect">
-            <a:avLst/>
-          </a:prstGeom>
-          <a:noFill/>
-          <a:ln/>
-        </p:spPr>
-        <p:txBody>
-          <a:bodyPr wrap="square" lIns="0" tIns="0" rIns="0" bIns="0" rtlCol="0" anchor="t">
+            <a:off x="8211312" y="1892808"/>
+            <a:ext cx="2734056" cy="1536192"/>
+          </a:xfrm>
+          <a:prstGeom prst="rect">
+            <a:avLst/>
+          </a:prstGeom>
+          <a:noFill/>
+          <a:ln/>
+        </p:spPr>
+        <p:txBody>
+          <a:bodyPr wrap="square" lIns="254" tIns="254" rIns="254" bIns="254" rtlCol="0" anchor="t">
             <a:normAutofit/>
           </a:bodyPr>
           <a:lstStyle/>
@@ -13740,7 +13955,7 @@
               <a:buNone/>
             </a:pPr>
             <a:r>
-              <a:rPr lang="en-US" sz="1550" dirty="0">
+              <a:rPr lang="en-US" sz="1320" dirty="0">
                 <a:solidFill>
                   <a:srgbClr val="17364A"/>
                 </a:solidFill>
@@ -13748,9 +13963,9 @@
                 <a:ea typeface="Aptos" pitchFamily="34" charset="-122"/>
                 <a:cs typeface="Aptos" pitchFamily="34" charset="-120"/>
               </a:rPr>
-              <a:t>Use the related plays to identify decisions, participants, timing, approvals, and documentation needed for responsible implementation.</a:t>
-            </a:r>
-            <a:endParaRPr lang="en-US" sz="1550" dirty="0"/>
+              <a:t>Use the related plays to identify decisions, participants, timing, approvals, and documentation needed for responsible.</a:t>
+            </a:r>
+            <a:endParaRPr lang="en-US" sz="1320" dirty="0"/>
           </a:p>
         </p:txBody>
       </p:sp>
@@ -13838,13 +14053,16 @@
           <a:ln/>
         </p:spPr>
         <p:txBody>
-          <a:bodyPr wrap="square" lIns="254" tIns="254" rIns="254" bIns="254" rtlCol="0" anchor="t">
+          <a:bodyPr wrap="square" lIns="508" tIns="508" rIns="508" bIns="508" rtlCol="0" anchor="t">
             <a:normAutofit/>
           </a:bodyPr>
           <a:lstStyle/>
           <a:p>
-            <a:r>
-              <a:rPr lang="en-US" sz="1380" dirty="0">
+            <a:pPr indent="0" marL="0">
+              <a:buNone/>
+            </a:pPr>
+            <a:r>
+              <a:rPr lang="en-US" sz="1220" dirty="0">
                 <a:solidFill>
                   <a:srgbClr val="17364A"/>
                 </a:solidFill>
@@ -13854,11 +14072,14 @@
               </a:rPr>
               <a:t>Locate the decision point in the playbook sequence.</a:t>
             </a:r>
-            <a:endParaRPr lang="en-US" sz="1380" dirty="0"/>
-          </a:p>
-          <a:p>
-            <a:r>
-              <a:rPr lang="en-US" sz="1380" dirty="0">
+            <a:endParaRPr lang="en-US" sz="1220" dirty="0"/>
+          </a:p>
+          <a:p>
+            <a:pPr indent="0" marL="0">
+              <a:buNone/>
+            </a:pPr>
+            <a:r>
+              <a:rPr lang="en-US" sz="1220" dirty="0">
                 <a:solidFill>
                   <a:srgbClr val="17364A"/>
                 </a:solidFill>
@@ -13868,11 +14089,14 @@
               </a:rPr>
               <a:t>Identify who should participate in the work.</a:t>
             </a:r>
-            <a:endParaRPr lang="en-US" sz="1380" dirty="0"/>
-          </a:p>
-          <a:p>
-            <a:r>
-              <a:rPr lang="en-US" sz="1380" dirty="0">
+            <a:endParaRPr lang="en-US" sz="1220" dirty="0"/>
+          </a:p>
+          <a:p>
+            <a:pPr indent="0" marL="0">
+              <a:buNone/>
+            </a:pPr>
+            <a:r>
+              <a:rPr lang="en-US" sz="1220" dirty="0">
                 <a:solidFill>
                   <a:srgbClr val="17364A"/>
                 </a:solidFill>
@@ -13882,7 +14106,7 @@
               </a:rPr>
               <a:t>Document the review, approval, or implementation step.</a:t>
             </a:r>
-            <a:endParaRPr lang="en-US" sz="1380" dirty="0"/>
+            <a:endParaRPr lang="en-US" sz="1220" dirty="0"/>
           </a:p>
         </p:txBody>
       </p:sp>
@@ -14183,63 +14407,75 @@
           <a:ln/>
         </p:spPr>
         <p:txBody>
-          <a:bodyPr wrap="square" lIns="635" tIns="635" rIns="635" bIns="635" rtlCol="0" anchor="t">
+          <a:bodyPr wrap="square" lIns="1016" tIns="1016" rIns="1016" bIns="1016" rtlCol="0" anchor="t">
             <a:normAutofit/>
           </a:bodyPr>
           <a:lstStyle/>
           <a:p>
+            <a:pPr indent="0" marL="0">
+              <a:buNone/>
+            </a:pPr>
             <a:r>
               <a:rPr lang="en-US" sz="1850" dirty="0">
                 <a:solidFill>
-                  <a:srgbClr val="17364A"/>
-                </a:solidFill>
-                <a:latin typeface="Aptos" pitchFamily="34" charset="0"/>
-                <a:ea typeface="Aptos" pitchFamily="34" charset="-122"/>
-                <a:cs typeface="Aptos" pitchFamily="34" charset="-120"/>
-              </a:rPr>
-              <a:t>Tool 44: Performance Monitoring Dashboard (Dashboard) - Use this tool to complete or strengthen the.</a:t>
+                  <a:srgbClr val="003A63"/>
+                </a:solidFill>
+                <a:latin typeface="Aptos" pitchFamily="34" charset="0"/>
+                <a:ea typeface="Aptos" pitchFamily="34" charset="-122"/>
+                <a:cs typeface="Aptos" pitchFamily="34" charset="-120"/>
+              </a:rPr>
+              <a:t>• Tool 44: Performance Monitoring Dashboard (Dashboard) - Use this tool to complete or.</a:t>
             </a:r>
             <a:endParaRPr lang="en-US" sz="1850" dirty="0"/>
           </a:p>
           <a:p>
+            <a:pPr indent="0" marL="0">
+              <a:buNone/>
+            </a:pPr>
             <a:r>
               <a:rPr lang="en-US" sz="1850" dirty="0">
                 <a:solidFill>
-                  <a:srgbClr val="17364A"/>
-                </a:solidFill>
-                <a:latin typeface="Aptos" pitchFamily="34" charset="0"/>
-                <a:ea typeface="Aptos" pitchFamily="34" charset="-122"/>
-                <a:cs typeface="Aptos" pitchFamily="34" charset="-120"/>
-              </a:rPr>
-              <a:t>Tool 45: Continuous Improvement Log (Log) - Use Continuous Improvement Log to translate this lesson into a.</a:t>
+                  <a:srgbClr val="003A63"/>
+                </a:solidFill>
+                <a:latin typeface="Aptos" pitchFamily="34" charset="0"/>
+                <a:ea typeface="Aptos" pitchFamily="34" charset="-122"/>
+                <a:cs typeface="Aptos" pitchFamily="34" charset="-120"/>
+              </a:rPr>
+              <a:t>• Tool 45: Continuous Improvement Log (Log) - Use Continuous Improvement Log to translate this.</a:t>
             </a:r>
             <a:endParaRPr lang="en-US" sz="1850" dirty="0"/>
           </a:p>
           <a:p>
+            <a:pPr indent="0" marL="0">
+              <a:buNone/>
+            </a:pPr>
             <a:r>
               <a:rPr lang="en-US" sz="1850" dirty="0">
                 <a:solidFill>
-                  <a:srgbClr val="17364A"/>
-                </a:solidFill>
-                <a:latin typeface="Aptos" pitchFamily="34" charset="0"/>
-                <a:ea typeface="Aptos" pitchFamily="34" charset="-122"/>
-                <a:cs typeface="Aptos" pitchFamily="34" charset="-120"/>
-              </a:rPr>
-              <a:t>Tool 48: AI Evaluation &amp; Outcomes Reporting (Template) - Use this tool to complete or strengthen the.</a:t>
+                  <a:srgbClr val="003A63"/>
+                </a:solidFill>
+                <a:latin typeface="Aptos" pitchFamily="34" charset="0"/>
+                <a:ea typeface="Aptos" pitchFamily="34" charset="-122"/>
+                <a:cs typeface="Aptos" pitchFamily="34" charset="-120"/>
+              </a:rPr>
+              <a:t>• Tool 48: AI Evaluation &amp; Outcomes Reporting (Template) - Use this tool to complete or.</a:t>
             </a:r>
             <a:endParaRPr lang="en-US" sz="1850" dirty="0"/>
           </a:p>
           <a:p>
+            <a:pPr indent="0" marL="0">
+              <a:buNone/>
+            </a:pPr>
             <a:r>
               <a:rPr lang="en-US" sz="1850" dirty="0">
                 <a:solidFill>
-                  <a:srgbClr val="17364A"/>
-                </a:solidFill>
-                <a:latin typeface="Aptos" pitchFamily="34" charset="0"/>
-                <a:ea typeface="Aptos" pitchFamily="34" charset="-122"/>
-                <a:cs typeface="Aptos" pitchFamily="34" charset="-120"/>
-              </a:rPr>
-              <a:t>Tool 3: Equity Impact Assessment Checklist (Checklist) - Use this tool to complete or strengthen the.</a:t>
+                  <a:srgbClr val="003A63"/>
+                </a:solidFill>
+                <a:latin typeface="Aptos" pitchFamily="34" charset="0"/>
+                <a:ea typeface="Aptos" pitchFamily="34" charset="-122"/>
+                <a:cs typeface="Aptos" pitchFamily="34" charset="-120"/>
+              </a:rPr>
+              <a:t>• Tool 3: Equity Impact Assessment Checklist (Checklist) - Use this tool to complete or.</a:t>
             </a:r>
             <a:endParaRPr lang="en-US" sz="1850" dirty="0"/>
           </a:p>
@@ -14319,17 +14555,17 @@
         </p:nvSpPr>
         <p:spPr>
           <a:xfrm>
-            <a:off x="8211312" y="1920240"/>
-            <a:ext cx="2734056" cy="1463040"/>
-          </a:xfrm>
-          <a:prstGeom prst="rect">
-            <a:avLst/>
-          </a:prstGeom>
-          <a:noFill/>
-          <a:ln/>
-        </p:spPr>
-        <p:txBody>
-          <a:bodyPr wrap="square" lIns="0" tIns="0" rIns="0" bIns="0" rtlCol="0" anchor="t">
+            <a:off x="8211312" y="1892808"/>
+            <a:ext cx="2734056" cy="1536192"/>
+          </a:xfrm>
+          <a:prstGeom prst="rect">
+            <a:avLst/>
+          </a:prstGeom>
+          <a:noFill/>
+          <a:ln/>
+        </p:spPr>
+        <p:txBody>
+          <a:bodyPr wrap="square" lIns="254" tIns="254" rIns="254" bIns="254" rtlCol="0" anchor="t">
             <a:normAutofit/>
           </a:bodyPr>
           <a:lstStyle/>
@@ -14338,7 +14574,7 @@
               <a:buNone/>
             </a:pPr>
             <a:r>
-              <a:rPr lang="en-US" sz="1550" dirty="0">
+              <a:rPr lang="en-US" sz="1320" dirty="0">
                 <a:solidFill>
                   <a:srgbClr val="17364A"/>
                 </a:solidFill>
@@ -14346,9 +14582,9 @@
                 <a:ea typeface="Aptos" pitchFamily="34" charset="-122"/>
                 <a:cs typeface="Aptos" pitchFamily="34" charset="-120"/>
               </a:rPr>
-              <a:t>Use linked tools when your department needs a structured worksheet, template, checklist, review process, or documentation artifact.</a:t>
-            </a:r>
-            <a:endParaRPr lang="en-US" sz="1550" dirty="0"/>
+              <a:t>Use linked tools when your department needs a structured worksheet, template, checklist, review process, or.</a:t>
+            </a:r>
+            <a:endParaRPr lang="en-US" sz="1320" dirty="0"/>
           </a:p>
         </p:txBody>
       </p:sp>
@@ -14436,13 +14672,16 @@
           <a:ln/>
         </p:spPr>
         <p:txBody>
-          <a:bodyPr wrap="square" lIns="254" tIns="254" rIns="254" bIns="254" rtlCol="0" anchor="t">
+          <a:bodyPr wrap="square" lIns="508" tIns="508" rIns="508" bIns="508" rtlCol="0" anchor="t">
             <a:normAutofit/>
           </a:bodyPr>
           <a:lstStyle/>
           <a:p>
-            <a:r>
-              <a:rPr lang="en-US" sz="1380" dirty="0">
+            <a:pPr indent="0" marL="0">
+              <a:buNone/>
+            </a:pPr>
+            <a:r>
+              <a:rPr lang="en-US" sz="1220" dirty="0">
                 <a:solidFill>
                   <a:srgbClr val="17364A"/>
                 </a:solidFill>
@@ -14452,11 +14691,14 @@
               </a:rPr>
               <a:t>Use a tool when no comparable local process exists.</a:t>
             </a:r>
-            <a:endParaRPr lang="en-US" sz="1380" dirty="0"/>
-          </a:p>
-          <a:p>
-            <a:r>
-              <a:rPr lang="en-US" sz="1380" dirty="0">
+            <a:endParaRPr lang="en-US" sz="1220" dirty="0"/>
+          </a:p>
+          <a:p>
+            <a:pPr indent="0" marL="0">
+              <a:buNone/>
+            </a:pPr>
+            <a:r>
+              <a:rPr lang="en-US" sz="1220" dirty="0">
                 <a:solidFill>
                   <a:srgbClr val="17364A"/>
                 </a:solidFill>
@@ -14464,13 +14706,16 @@
                 <a:ea typeface="Aptos" pitchFamily="34" charset="-122"/>
                 <a:cs typeface="Aptos" pitchFamily="34" charset="-120"/>
               </a:rPr>
-              <a:t>Adapt existing department templates when they already fit the purpose.</a:t>
-            </a:r>
-            <a:endParaRPr lang="en-US" sz="1380" dirty="0"/>
-          </a:p>
-          <a:p>
-            <a:r>
-              <a:rPr lang="en-US" sz="1380" dirty="0">
+              <a:t>Adapt existing department templates when they already fit the.</a:t>
+            </a:r>
+            <a:endParaRPr lang="en-US" sz="1220" dirty="0"/>
+          </a:p>
+          <a:p>
+            <a:pPr indent="0" marL="0">
+              <a:buNone/>
+            </a:pPr>
+            <a:r>
+              <a:rPr lang="en-US" sz="1220" dirty="0">
                 <a:solidFill>
                   <a:srgbClr val="17364A"/>
                 </a:solidFill>
@@ -14480,7 +14725,7 @@
               </a:rPr>
               <a:t>Save the completed artifact as evidence of the decision.</a:t>
             </a:r>
-            <a:endParaRPr lang="en-US" sz="1380" dirty="0"/>
+            <a:endParaRPr lang="en-US" sz="1220" dirty="0"/>
           </a:p>
         </p:txBody>
       </p:sp>
@@ -14781,49 +15026,58 @@
           <a:ln/>
         </p:spPr>
         <p:txBody>
-          <a:bodyPr wrap="square" lIns="635" tIns="635" rIns="635" bIns="635" rtlCol="0" anchor="t">
+          <a:bodyPr wrap="square" lIns="1016" tIns="1016" rIns="1016" bIns="1016" rtlCol="0" anchor="t">
             <a:normAutofit/>
           </a:bodyPr>
           <a:lstStyle/>
           <a:p>
+            <a:pPr indent="0" marL="0">
+              <a:buNone/>
+            </a:pPr>
             <a:r>
               <a:rPr lang="en-US" sz="2100" dirty="0">
                 <a:solidFill>
-                  <a:srgbClr val="17364A"/>
-                </a:solidFill>
-                <a:latin typeface="Aptos" pitchFamily="34" charset="0"/>
-                <a:ea typeface="Aptos" pitchFamily="34" charset="-122"/>
-                <a:cs typeface="Aptos" pitchFamily="34" charset="-120"/>
-              </a:rPr>
-              <a:t>Explain why overall model performance can mask inequitable performance.</a:t>
+                  <a:srgbClr val="003A63"/>
+                </a:solidFill>
+                <a:latin typeface="Aptos" pitchFamily="34" charset="0"/>
+                <a:ea typeface="Aptos" pitchFamily="34" charset="-122"/>
+                <a:cs typeface="Aptos" pitchFamily="34" charset="-120"/>
+              </a:rPr>
+              <a:t>• Explain why overall model performance can mask inequitable performance.</a:t>
             </a:r>
             <a:endParaRPr lang="en-US" sz="2100" dirty="0"/>
           </a:p>
           <a:p>
+            <a:pPr indent="0" marL="0">
+              <a:buNone/>
+            </a:pPr>
             <a:r>
               <a:rPr lang="en-US" sz="2100" dirty="0">
                 <a:solidFill>
-                  <a:srgbClr val="17364A"/>
-                </a:solidFill>
-                <a:latin typeface="Aptos" pitchFamily="34" charset="0"/>
-                <a:ea typeface="Aptos" pitchFamily="34" charset="-122"/>
-                <a:cs typeface="Aptos" pitchFamily="34" charset="-120"/>
-              </a:rPr>
-              <a:t>Identify relevant subgroups and contextual factors for equity evaluation in public health.</a:t>
+                  <a:srgbClr val="003A63"/>
+                </a:solidFill>
+                <a:latin typeface="Aptos" pitchFamily="34" charset="0"/>
+                <a:ea typeface="Aptos" pitchFamily="34" charset="-122"/>
+                <a:cs typeface="Aptos" pitchFamily="34" charset="-120"/>
+              </a:rPr>
+              <a:t>• Identify relevant subgroups and contextual factors for equity evaluation in public health.</a:t>
             </a:r>
             <a:endParaRPr lang="en-US" sz="2100" dirty="0"/>
           </a:p>
           <a:p>
+            <a:pPr indent="0" marL="0">
+              <a:buNone/>
+            </a:pPr>
             <a:r>
               <a:rPr lang="en-US" sz="2100" dirty="0">
                 <a:solidFill>
-                  <a:srgbClr val="17364A"/>
-                </a:solidFill>
-                <a:latin typeface="Aptos" pitchFamily="34" charset="0"/>
-                <a:ea typeface="Aptos" pitchFamily="34" charset="-122"/>
-                <a:cs typeface="Aptos" pitchFamily="34" charset="-120"/>
-              </a:rPr>
-              <a:t>Assess data representativeness, missingness, and measurement bias before model use.</a:t>
+                  <a:srgbClr val="003A63"/>
+                </a:solidFill>
+                <a:latin typeface="Aptos" pitchFamily="34" charset="0"/>
+                <a:ea typeface="Aptos" pitchFamily="34" charset="-122"/>
+                <a:cs typeface="Aptos" pitchFamily="34" charset="-120"/>
+              </a:rPr>
+              <a:t>• Assess data representativeness, missingness, and measurement bias before model use.</a:t>
             </a:r>
             <a:endParaRPr lang="en-US" sz="2100" dirty="0"/>
           </a:p>
@@ -14903,17 +15157,17 @@
         </p:nvSpPr>
         <p:spPr>
           <a:xfrm>
-            <a:off x="7799832" y="1828800"/>
-            <a:ext cx="3145536" cy="685800"/>
-          </a:xfrm>
-          <a:prstGeom prst="rect">
-            <a:avLst/>
-          </a:prstGeom>
-          <a:noFill/>
-          <a:ln/>
-        </p:spPr>
-        <p:txBody>
-          <a:bodyPr wrap="square" lIns="0" tIns="0" rIns="0" bIns="0" rtlCol="0" anchor="t">
+            <a:off x="7799832" y="1801368"/>
+            <a:ext cx="3145536" cy="758952"/>
+          </a:xfrm>
+          <a:prstGeom prst="rect">
+            <a:avLst/>
+          </a:prstGeom>
+          <a:noFill/>
+          <a:ln/>
+        </p:spPr>
+        <p:txBody>
+          <a:bodyPr wrap="square" lIns="254" tIns="254" rIns="254" bIns="254" rtlCol="0" anchor="t">
             <a:normAutofit/>
           </a:bodyPr>
           <a:lstStyle/>
@@ -14922,7 +15176,7 @@
               <a:buNone/>
             </a:pPr>
             <a:r>
-              <a:rPr lang="en-US" sz="1550" dirty="0">
+              <a:rPr lang="en-US" sz="1320" dirty="0">
                 <a:solidFill>
                   <a:srgbClr val="17364A"/>
                 </a:solidFill>
@@ -14932,7 +15186,7 @@
               </a:rPr>
               <a:t>Explain why overall model performance can mask inequitable performance.</a:t>
             </a:r>
-            <a:endParaRPr lang="en-US" sz="1550" dirty="0"/>
+            <a:endParaRPr lang="en-US" sz="1320" dirty="0"/>
           </a:p>
         </p:txBody>
       </p:sp>
@@ -15020,13 +15274,16 @@
           <a:ln/>
         </p:spPr>
         <p:txBody>
-          <a:bodyPr wrap="square" lIns="254" tIns="254" rIns="254" bIns="254" rtlCol="0" anchor="t">
+          <a:bodyPr wrap="square" lIns="508" tIns="508" rIns="508" bIns="508" rtlCol="0" anchor="t">
             <a:normAutofit/>
           </a:bodyPr>
           <a:lstStyle/>
           <a:p>
-            <a:r>
-              <a:rPr lang="en-US" sz="1380" dirty="0">
+            <a:pPr indent="0" marL="0">
+              <a:buNone/>
+            </a:pPr>
+            <a:r>
+              <a:rPr lang="en-US" sz="1220" dirty="0">
                 <a:solidFill>
                   <a:srgbClr val="17364A"/>
                 </a:solidFill>
@@ -15034,13 +15291,16 @@
                 <a:ea typeface="Aptos" pitchFamily="34" charset="-122"/>
                 <a:cs typeface="Aptos" pitchFamily="34" charset="-120"/>
               </a:rPr>
-              <a:t>Define subgroup performance measures and review thresholds for AI-supported workflows.</a:t>
-            </a:r>
-            <a:endParaRPr lang="en-US" sz="1380" dirty="0"/>
-          </a:p>
-          <a:p>
-            <a:r>
-              <a:rPr lang="en-US" sz="1380" dirty="0">
+              <a:t>Define subgroup performance measures and review thresholds for.</a:t>
+            </a:r>
+            <a:endParaRPr lang="en-US" sz="1220" dirty="0"/>
+          </a:p>
+          <a:p>
+            <a:pPr indent="0" marL="0">
+              <a:buNone/>
+            </a:pPr>
+            <a:r>
+              <a:rPr lang="en-US" sz="1220" dirty="0">
                 <a:solidFill>
                   <a:srgbClr val="17364A"/>
                 </a:solidFill>
@@ -15048,9 +15308,9 @@
                 <a:ea typeface="Aptos" pitchFamily="34" charset="-122"/>
                 <a:cs typeface="Aptos" pitchFamily="34" charset="-120"/>
               </a:rPr>
-              <a:t>Produce an equity evaluation plan for a model or AI-supported workflow.</a:t>
-            </a:r>
-            <a:endParaRPr lang="en-US" sz="1380" dirty="0"/>
+              <a:t>Produce an equity evaluation plan for a model or AI-supported.</a:t>
+            </a:r>
+            <a:endParaRPr lang="en-US" sz="1220" dirty="0"/>
           </a:p>
         </p:txBody>
       </p:sp>
@@ -15128,17 +15388,17 @@
         </p:nvSpPr>
         <p:spPr>
           <a:xfrm>
-            <a:off x="7799832" y="5001768"/>
-            <a:ext cx="3145536" cy="502920"/>
-          </a:xfrm>
-          <a:prstGeom prst="rect">
-            <a:avLst/>
-          </a:prstGeom>
-          <a:noFill/>
-          <a:ln/>
-        </p:spPr>
-        <p:txBody>
-          <a:bodyPr wrap="square" lIns="0" tIns="0" rIns="0" bIns="0" rtlCol="0" anchor="t">
+            <a:off x="7799832" y="4974336"/>
+            <a:ext cx="3145536" cy="576072"/>
+          </a:xfrm>
+          <a:prstGeom prst="rect">
+            <a:avLst/>
+          </a:prstGeom>
+          <a:noFill/>
+          <a:ln/>
+        </p:spPr>
+        <p:txBody>
+          <a:bodyPr wrap="square" lIns="254" tIns="254" rIns="254" bIns="254" rtlCol="0" anchor="t">
             <a:normAutofit/>
           </a:bodyPr>
           <a:lstStyle/>
@@ -15147,7 +15407,7 @@
               <a:buNone/>
             </a:pPr>
             <a:r>
-              <a:rPr lang="en-US" sz="1550" dirty="0">
+              <a:rPr lang="en-US" sz="1320" dirty="0">
                 <a:solidFill>
                   <a:srgbClr val="17364A"/>
                 </a:solidFill>
@@ -15155,9 +15415,9 @@
                 <a:ea typeface="Aptos" pitchFamily="34" charset="-122"/>
                 <a:cs typeface="Aptos" pitchFamily="34" charset="-120"/>
               </a:rPr>
-              <a:t>Use the assignment to test whether you can explain the concept, apply it to a realistic public health situation, and identify what would need review before the work moves forward.</a:t>
-            </a:r>
-            <a:endParaRPr lang="en-US" sz="1550" dirty="0"/>
+              <a:t>Use the assignment to test whether you can explain the concept, apply it to a realistic public health situation, and.</a:t>
+            </a:r>
+            <a:endParaRPr lang="en-US" sz="1320" dirty="0"/>
           </a:p>
         </p:txBody>
       </p:sp>
@@ -15458,49 +15718,58 @@
           <a:ln/>
         </p:spPr>
         <p:txBody>
-          <a:bodyPr wrap="square" lIns="635" tIns="635" rIns="635" bIns="635" rtlCol="0" anchor="t">
+          <a:bodyPr wrap="square" lIns="1016" tIns="1016" rIns="1016" bIns="1016" rtlCol="0" anchor="t">
             <a:normAutofit/>
           </a:bodyPr>
           <a:lstStyle/>
           <a:p>
+            <a:pPr indent="0" marL="0">
+              <a:buNone/>
+            </a:pPr>
             <a:r>
               <a:rPr lang="en-US" sz="2100" dirty="0">
                 <a:solidFill>
-                  <a:srgbClr val="17364A"/>
-                </a:solidFill>
-                <a:latin typeface="Aptos" pitchFamily="34" charset="0"/>
-                <a:ea typeface="Aptos" pitchFamily="34" charset="-122"/>
-                <a:cs typeface="Aptos" pitchFamily="34" charset="-120"/>
-              </a:rPr>
-              <a:t>Equity evaluation examines whether an AI model performs differently across populations, places,.</a:t>
+                  <a:srgbClr val="003A63"/>
+                </a:solidFill>
+                <a:latin typeface="Aptos" pitchFamily="34" charset="0"/>
+                <a:ea typeface="Aptos" pitchFamily="34" charset="-122"/>
+                <a:cs typeface="Aptos" pitchFamily="34" charset="-120"/>
+              </a:rPr>
+              <a:t>• Equity evaluation examines whether an AI model performs differently across populations, places,.</a:t>
             </a:r>
             <a:endParaRPr lang="en-US" sz="2100" dirty="0"/>
           </a:p>
           <a:p>
+            <a:pPr indent="0" marL="0">
+              <a:buNone/>
+            </a:pPr>
             <a:r>
               <a:rPr lang="en-US" sz="2100" dirty="0">
                 <a:solidFill>
-                  <a:srgbClr val="17364A"/>
-                </a:solidFill>
-                <a:latin typeface="Aptos" pitchFamily="34" charset="0"/>
-                <a:ea typeface="Aptos" pitchFamily="34" charset="-122"/>
-                <a:cs typeface="Aptos" pitchFamily="34" charset="-120"/>
-              </a:rPr>
-              <a:t>Public health agencies have a responsibility to evaluate not only average model performance but also.</a:t>
+                  <a:srgbClr val="003A63"/>
+                </a:solidFill>
+                <a:latin typeface="Aptos" pitchFamily="34" charset="0"/>
+                <a:ea typeface="Aptos" pitchFamily="34" charset="-122"/>
+                <a:cs typeface="Aptos" pitchFamily="34" charset="-120"/>
+              </a:rPr>
+              <a:t>• Public health agencies have a responsibility to evaluate not only average model performance.</a:t>
             </a:r>
             <a:endParaRPr lang="en-US" sz="2100" dirty="0"/>
           </a:p>
           <a:p>
+            <a:pPr indent="0" marL="0">
+              <a:buNone/>
+            </a:pPr>
             <a:r>
               <a:rPr lang="en-US" sz="2100" dirty="0">
                 <a:solidFill>
-                  <a:srgbClr val="17364A"/>
-                </a:solidFill>
-                <a:latin typeface="Aptos" pitchFamily="34" charset="0"/>
-                <a:ea typeface="Aptos" pitchFamily="34" charset="-122"/>
-                <a:cs typeface="Aptos" pitchFamily="34" charset="-120"/>
-              </a:rPr>
-              <a:t>This is especially important when AI is used to prioritize cases, allocate services, detect risk,.</a:t>
+                  <a:srgbClr val="003A63"/>
+                </a:solidFill>
+                <a:latin typeface="Aptos" pitchFamily="34" charset="0"/>
+                <a:ea typeface="Aptos" pitchFamily="34" charset="-122"/>
+                <a:cs typeface="Aptos" pitchFamily="34" charset="-120"/>
+              </a:rPr>
+              <a:t>• This is especially important when AI is used to prioritize cases, allocate services, detect.</a:t>
             </a:r>
             <a:endParaRPr lang="en-US" sz="2100" dirty="0"/>
           </a:p>
@@ -15580,17 +15849,17 @@
         </p:nvSpPr>
         <p:spPr>
           <a:xfrm>
-            <a:off x="7799832" y="1828800"/>
-            <a:ext cx="3145536" cy="685800"/>
-          </a:xfrm>
-          <a:prstGeom prst="rect">
-            <a:avLst/>
-          </a:prstGeom>
-          <a:noFill/>
-          <a:ln/>
-        </p:spPr>
-        <p:txBody>
-          <a:bodyPr wrap="square" lIns="0" tIns="0" rIns="0" bIns="0" rtlCol="0" anchor="t">
+            <a:off x="7799832" y="1801368"/>
+            <a:ext cx="3145536" cy="758952"/>
+          </a:xfrm>
+          <a:prstGeom prst="rect">
+            <a:avLst/>
+          </a:prstGeom>
+          <a:noFill/>
+          <a:ln/>
+        </p:spPr>
+        <p:txBody>
+          <a:bodyPr wrap="square" lIns="254" tIns="254" rIns="254" bIns="254" rtlCol="0" anchor="t">
             <a:normAutofit/>
           </a:bodyPr>
           <a:lstStyle/>
@@ -15599,7 +15868,7 @@
               <a:buNone/>
             </a:pPr>
             <a:r>
-              <a:rPr lang="en-US" sz="1550" dirty="0">
+              <a:rPr lang="en-US" sz="1320" dirty="0">
                 <a:solidFill>
                   <a:srgbClr val="17364A"/>
                 </a:solidFill>
@@ -15609,7 +15878,7 @@
               </a:rPr>
               <a:t>Equity evaluation examines whether an AI model performs differently across populations, places,.</a:t>
             </a:r>
-            <a:endParaRPr lang="en-US" sz="1550" dirty="0"/>
+            <a:endParaRPr lang="en-US" sz="1320" dirty="0"/>
           </a:p>
         </p:txBody>
       </p:sp>
@@ -15697,13 +15966,16 @@
           <a:ln/>
         </p:spPr>
         <p:txBody>
-          <a:bodyPr wrap="square" lIns="254" tIns="254" rIns="254" bIns="254" rtlCol="0" anchor="t">
+          <a:bodyPr wrap="square" lIns="508" tIns="508" rIns="508" bIns="508" rtlCol="0" anchor="t">
             <a:normAutofit/>
           </a:bodyPr>
           <a:lstStyle/>
           <a:p>
-            <a:r>
-              <a:rPr lang="en-US" sz="1380" dirty="0">
+            <a:pPr indent="0" marL="0">
+              <a:buNone/>
+            </a:pPr>
+            <a:r>
+              <a:rPr lang="en-US" sz="1220" dirty="0">
                 <a:solidFill>
                   <a:srgbClr val="17364A"/>
                 </a:solidFill>
@@ -15711,13 +15983,16 @@
                 <a:ea typeface="Aptos" pitchFamily="34" charset="-122"/>
                 <a:cs typeface="Aptos" pitchFamily="34" charset="-120"/>
               </a:rPr>
-              <a:t>Equity evaluation examines whether an AI model performs differently across populations,.</a:t>
-            </a:r>
-            <a:endParaRPr lang="en-US" sz="1380" dirty="0"/>
-          </a:p>
-          <a:p>
-            <a:r>
-              <a:rPr lang="en-US" sz="1380" dirty="0">
+              <a:t>Equity evaluation examines whether an AI model performs.</a:t>
+            </a:r>
+            <a:endParaRPr lang="en-US" sz="1220" dirty="0"/>
+          </a:p>
+          <a:p>
+            <a:pPr indent="0" marL="0">
+              <a:buNone/>
+            </a:pPr>
+            <a:r>
+              <a:rPr lang="en-US" sz="1220" dirty="0">
                 <a:solidFill>
                   <a:srgbClr val="17364A"/>
                 </a:solidFill>
@@ -15725,13 +16000,16 @@
                 <a:ea typeface="Aptos" pitchFamily="34" charset="-122"/>
                 <a:cs typeface="Aptos" pitchFamily="34" charset="-120"/>
               </a:rPr>
-              <a:t>Public health agencies have a responsibility to evaluate not only average model.</a:t>
-            </a:r>
-            <a:endParaRPr lang="en-US" sz="1380" dirty="0"/>
-          </a:p>
-          <a:p>
-            <a:r>
-              <a:rPr lang="en-US" sz="1380" dirty="0">
+              <a:t>Public health agencies have a responsibility to evaluate not only.</a:t>
+            </a:r>
+            <a:endParaRPr lang="en-US" sz="1220" dirty="0"/>
+          </a:p>
+          <a:p>
+            <a:pPr indent="0" marL="0">
+              <a:buNone/>
+            </a:pPr>
+            <a:r>
+              <a:rPr lang="en-US" sz="1220" dirty="0">
                 <a:solidFill>
                   <a:srgbClr val="17364A"/>
                 </a:solidFill>
@@ -15739,9 +16017,9 @@
                 <a:ea typeface="Aptos" pitchFamily="34" charset="-122"/>
                 <a:cs typeface="Aptos" pitchFamily="34" charset="-120"/>
               </a:rPr>
-              <a:t>This is especially important when AI is used to prioritize cases, allocate services,.</a:t>
-            </a:r>
-            <a:endParaRPr lang="en-US" sz="1380" dirty="0"/>
+              <a:t>This is especially important when AI is used to prioritize cases,.</a:t>
+            </a:r>
+            <a:endParaRPr lang="en-US" sz="1220" dirty="0"/>
           </a:p>
         </p:txBody>
       </p:sp>
@@ -15819,17 +16097,17 @@
         </p:nvSpPr>
         <p:spPr>
           <a:xfrm>
-            <a:off x="7799832" y="5001768"/>
-            <a:ext cx="3145536" cy="502920"/>
-          </a:xfrm>
-          <a:prstGeom prst="rect">
-            <a:avLst/>
-          </a:prstGeom>
-          <a:noFill/>
-          <a:ln/>
-        </p:spPr>
-        <p:txBody>
-          <a:bodyPr wrap="square" lIns="0" tIns="0" rIns="0" bIns="0" rtlCol="0" anchor="t">
+            <a:off x="7799832" y="4974336"/>
+            <a:ext cx="3145536" cy="576072"/>
+          </a:xfrm>
+          <a:prstGeom prst="rect">
+            <a:avLst/>
+          </a:prstGeom>
+          <a:noFill/>
+          <a:ln/>
+        </p:spPr>
+        <p:txBody>
+          <a:bodyPr wrap="square" lIns="254" tIns="254" rIns="254" bIns="254" rtlCol="0" anchor="t">
             <a:normAutofit/>
           </a:bodyPr>
           <a:lstStyle/>
@@ -15838,7 +16116,7 @@
               <a:buNone/>
             </a:pPr>
             <a:r>
-              <a:rPr lang="en-US" sz="1550" dirty="0">
+              <a:rPr lang="en-US" sz="1320" dirty="0">
                 <a:solidFill>
                   <a:srgbClr val="17364A"/>
                 </a:solidFill>
@@ -15846,9 +16124,9 @@
                 <a:ea typeface="Aptos" pitchFamily="34" charset="-122"/>
                 <a:cs typeface="Aptos" pitchFamily="34" charset="-120"/>
               </a:rPr>
-              <a:t>Identify what could go wrong, who could be affected, what safeguards are needed, and what evidence should be reviewed before use expands.</a:t>
-            </a:r>
-            <a:endParaRPr lang="en-US" sz="1550" dirty="0"/>
+              <a:t>Identify what could go wrong, who could be affected, what safeguards are needed, and what evidence should be reviewed.</a:t>
+            </a:r>
+            <a:endParaRPr lang="en-US" sz="1320" dirty="0"/>
           </a:p>
         </p:txBody>
       </p:sp>
@@ -16149,49 +16427,58 @@
           <a:ln/>
         </p:spPr>
         <p:txBody>
-          <a:bodyPr wrap="square" lIns="635" tIns="635" rIns="635" bIns="635" rtlCol="0" anchor="t">
+          <a:bodyPr wrap="square" lIns="1016" tIns="1016" rIns="1016" bIns="1016" rtlCol="0" anchor="t">
             <a:normAutofit/>
           </a:bodyPr>
           <a:lstStyle/>
           <a:p>
+            <a:pPr indent="0" marL="0">
+              <a:buNone/>
+            </a:pPr>
             <a:r>
               <a:rPr lang="en-US" sz="2100" dirty="0">
                 <a:solidFill>
-                  <a:srgbClr val="17364A"/>
-                </a:solidFill>
-                <a:latin typeface="Aptos" pitchFamily="34" charset="0"/>
-                <a:ea typeface="Aptos" pitchFamily="34" charset="-122"/>
-                <a:cs typeface="Aptos" pitchFamily="34" charset="-120"/>
-              </a:rPr>
-              <a:t>This module provides national-level training guidance for public health agencies and partners.</a:t>
+                  <a:srgbClr val="003A63"/>
+                </a:solidFill>
+                <a:latin typeface="Aptos" pitchFamily="34" charset="0"/>
+                <a:ea typeface="Aptos" pitchFamily="34" charset="-122"/>
+                <a:cs typeface="Aptos" pitchFamily="34" charset="-120"/>
+              </a:rPr>
+              <a:t>• This module provides national-level training guidance for public health agencies and partners.</a:t>
             </a:r>
             <a:endParaRPr lang="en-US" sz="2100" dirty="0"/>
           </a:p>
           <a:p>
+            <a:pPr indent="0" marL="0">
+              <a:buNone/>
+            </a:pPr>
             <a:r>
               <a:rPr lang="en-US" sz="2100" dirty="0">
                 <a:solidFill>
-                  <a:srgbClr val="17364A"/>
-                </a:solidFill>
-                <a:latin typeface="Aptos" pitchFamily="34" charset="0"/>
-                <a:ea typeface="Aptos" pitchFamily="34" charset="-122"/>
-                <a:cs typeface="Aptos" pitchFamily="34" charset="-120"/>
-              </a:rPr>
-              <a:t>It is not legal advice and does not replace review by agency legal counsel, privacy officers,.</a:t>
+                  <a:srgbClr val="003A63"/>
+                </a:solidFill>
+                <a:latin typeface="Aptos" pitchFamily="34" charset="0"/>
+                <a:ea typeface="Aptos" pitchFamily="34" charset="-122"/>
+                <a:cs typeface="Aptos" pitchFamily="34" charset="-120"/>
+              </a:rPr>
+              <a:t>• It is not legal advice and does not replace review by agency legal counsel, privacy officers,.</a:t>
             </a:r>
             <a:endParaRPr lang="en-US" sz="2100" dirty="0"/>
           </a:p>
           <a:p>
+            <a:pPr indent="0" marL="0">
+              <a:buNone/>
+            </a:pPr>
             <a:r>
               <a:rPr lang="en-US" sz="2100" dirty="0">
                 <a:solidFill>
-                  <a:srgbClr val="17364A"/>
-                </a:solidFill>
-                <a:latin typeface="Aptos" pitchFamily="34" charset="0"/>
-                <a:ea typeface="Aptos" pitchFamily="34" charset="-122"/>
-                <a:cs typeface="Aptos" pitchFamily="34" charset="-120"/>
-              </a:rPr>
-              <a:t>Requirements may vary by state, locality, territory, Tribe, agency, funding source, data-sharing.</a:t>
+                  <a:srgbClr val="003A63"/>
+                </a:solidFill>
+                <a:latin typeface="Aptos" pitchFamily="34" charset="0"/>
+                <a:ea typeface="Aptos" pitchFamily="34" charset="-122"/>
+                <a:cs typeface="Aptos" pitchFamily="34" charset="-120"/>
+              </a:rPr>
+              <a:t>• Requirements may vary by state, locality, territory, Tribe, agency, funding source,.</a:t>
             </a:r>
             <a:endParaRPr lang="en-US" sz="2100" dirty="0"/>
           </a:p>
@@ -16271,17 +16558,17 @@
         </p:nvSpPr>
         <p:spPr>
           <a:xfrm>
-            <a:off x="7799832" y="1828800"/>
-            <a:ext cx="3145536" cy="685800"/>
-          </a:xfrm>
-          <a:prstGeom prst="rect">
-            <a:avLst/>
-          </a:prstGeom>
-          <a:noFill/>
-          <a:ln/>
-        </p:spPr>
-        <p:txBody>
-          <a:bodyPr wrap="square" lIns="0" tIns="0" rIns="0" bIns="0" rtlCol="0" anchor="t">
+            <a:off x="7799832" y="1801368"/>
+            <a:ext cx="3145536" cy="758952"/>
+          </a:xfrm>
+          <a:prstGeom prst="rect">
+            <a:avLst/>
+          </a:prstGeom>
+          <a:noFill/>
+          <a:ln/>
+        </p:spPr>
+        <p:txBody>
+          <a:bodyPr wrap="square" lIns="254" tIns="254" rIns="254" bIns="254" rtlCol="0" anchor="t">
             <a:normAutofit/>
           </a:bodyPr>
           <a:lstStyle/>
@@ -16290,7 +16577,7 @@
               <a:buNone/>
             </a:pPr>
             <a:r>
-              <a:rPr lang="en-US" sz="1550" dirty="0">
+              <a:rPr lang="en-US" sz="1320" dirty="0">
                 <a:solidFill>
                   <a:srgbClr val="17364A"/>
                 </a:solidFill>
@@ -16300,7 +16587,7 @@
               </a:rPr>
               <a:t>This module provides national-level training guidance for public health agencies and partners.</a:t>
             </a:r>
-            <a:endParaRPr lang="en-US" sz="1550" dirty="0"/>
+            <a:endParaRPr lang="en-US" sz="1320" dirty="0"/>
           </a:p>
         </p:txBody>
       </p:sp>
@@ -16388,13 +16675,16 @@
           <a:ln/>
         </p:spPr>
         <p:txBody>
-          <a:bodyPr wrap="square" lIns="254" tIns="254" rIns="254" bIns="254" rtlCol="0" anchor="t">
+          <a:bodyPr wrap="square" lIns="508" tIns="508" rIns="508" bIns="508" rtlCol="0" anchor="t">
             <a:normAutofit/>
           </a:bodyPr>
           <a:lstStyle/>
           <a:p>
-            <a:r>
-              <a:rPr lang="en-US" sz="1380" dirty="0">
+            <a:pPr indent="0" marL="0">
+              <a:buNone/>
+            </a:pPr>
+            <a:r>
+              <a:rPr lang="en-US" sz="1220" dirty="0">
                 <a:solidFill>
                   <a:srgbClr val="17364A"/>
                 </a:solidFill>
@@ -16402,13 +16692,16 @@
                 <a:ea typeface="Aptos" pitchFamily="34" charset="-122"/>
                 <a:cs typeface="Aptos" pitchFamily="34" charset="-120"/>
               </a:rPr>
-              <a:t>It is not legal advice and does not replace review by agency legal counsel, privacy.</a:t>
-            </a:r>
-            <a:endParaRPr lang="en-US" sz="1380" dirty="0"/>
-          </a:p>
-          <a:p>
-            <a:r>
-              <a:rPr lang="en-US" sz="1380" dirty="0">
+              <a:t>It is not legal advice and does not replace review by agency legal.</a:t>
+            </a:r>
+            <a:endParaRPr lang="en-US" sz="1220" dirty="0"/>
+          </a:p>
+          <a:p>
+            <a:pPr indent="0" marL="0">
+              <a:buNone/>
+            </a:pPr>
+            <a:r>
+              <a:rPr lang="en-US" sz="1220" dirty="0">
                 <a:solidFill>
                   <a:srgbClr val="17364A"/>
                 </a:solidFill>
@@ -16416,13 +16709,16 @@
                 <a:ea typeface="Aptos" pitchFamily="34" charset="-122"/>
                 <a:cs typeface="Aptos" pitchFamily="34" charset="-120"/>
               </a:rPr>
-              <a:t>Requirements may vary by state, locality, territory, Tribe, agency, funding source,.</a:t>
-            </a:r>
-            <a:endParaRPr lang="en-US" sz="1380" dirty="0"/>
-          </a:p>
-          <a:p>
-            <a:r>
-              <a:rPr lang="en-US" sz="1380" dirty="0">
+              <a:t>Requirements may vary by state, locality, territory, Tribe,.</a:t>
+            </a:r>
+            <a:endParaRPr lang="en-US" sz="1220" dirty="0"/>
+          </a:p>
+          <a:p>
+            <a:pPr indent="0" marL="0">
+              <a:buNone/>
+            </a:pPr>
+            <a:r>
+              <a:rPr lang="en-US" sz="1220" dirty="0">
                 <a:solidFill>
                   <a:srgbClr val="17364A"/>
                 </a:solidFill>
@@ -16430,9 +16726,9 @@
                 <a:ea typeface="Aptos" pitchFamily="34" charset="-122"/>
                 <a:cs typeface="Aptos" pitchFamily="34" charset="-120"/>
               </a:rPr>
-              <a:t>Learners should use this module to identify the issues that require review and should.</a:t>
-            </a:r>
-            <a:endParaRPr lang="en-US" sz="1380" dirty="0"/>
+              <a:t>Learners should use this module to identify the issues that.</a:t>
+            </a:r>
+            <a:endParaRPr lang="en-US" sz="1220" dirty="0"/>
           </a:p>
         </p:txBody>
       </p:sp>
@@ -16510,17 +16806,17 @@
         </p:nvSpPr>
         <p:spPr>
           <a:xfrm>
-            <a:off x="7799832" y="5001768"/>
-            <a:ext cx="3145536" cy="502920"/>
-          </a:xfrm>
-          <a:prstGeom prst="rect">
-            <a:avLst/>
-          </a:prstGeom>
-          <a:noFill/>
-          <a:ln/>
-        </p:spPr>
-        <p:txBody>
-          <a:bodyPr wrap="square" lIns="0" tIns="0" rIns="0" bIns="0" rtlCol="0" anchor="t">
+            <a:off x="7799832" y="4974336"/>
+            <a:ext cx="3145536" cy="576072"/>
+          </a:xfrm>
+          <a:prstGeom prst="rect">
+            <a:avLst/>
+          </a:prstGeom>
+          <a:noFill/>
+          <a:ln/>
+        </p:spPr>
+        <p:txBody>
+          <a:bodyPr wrap="square" lIns="254" tIns="254" rIns="254" bIns="254" rtlCol="0" anchor="t">
             <a:normAutofit/>
           </a:bodyPr>
           <a:lstStyle/>
@@ -16529,7 +16825,7 @@
               <a:buNone/>
             </a:pPr>
             <a:r>
-              <a:rPr lang="en-US" sz="1550" dirty="0">
+              <a:rPr lang="en-US" sz="1320" dirty="0">
                 <a:solidFill>
                   <a:srgbClr val="17364A"/>
                 </a:solidFill>
@@ -16537,9 +16833,9 @@
                 <a:ea typeface="Aptos" pitchFamily="34" charset="-122"/>
                 <a:cs typeface="Aptos" pitchFamily="34" charset="-120"/>
               </a:rPr>
-              <a:t>Translate this concept into clear decision rights, review steps, documentation expectations, and escalation paths before an AI-supported workflow is approved.</a:t>
-            </a:r>
-            <a:endParaRPr lang="en-US" sz="1550" dirty="0"/>
+              <a:t>Translate this concept into clear decision rights, review steps, documentation expectations, and escalation paths before.</a:t>
+            </a:r>
+            <a:endParaRPr lang="en-US" sz="1320" dirty="0"/>
           </a:p>
         </p:txBody>
       </p:sp>
@@ -16840,49 +17136,58 @@
           <a:ln/>
         </p:spPr>
         <p:txBody>
-          <a:bodyPr wrap="square" lIns="635" tIns="635" rIns="635" bIns="635" rtlCol="0" anchor="t">
+          <a:bodyPr wrap="square" lIns="1016" tIns="1016" rIns="1016" bIns="1016" rtlCol="0" anchor="t">
             <a:normAutofit/>
           </a:bodyPr>
           <a:lstStyle/>
           <a:p>
+            <a:pPr indent="0" marL="0">
+              <a:buNone/>
+            </a:pPr>
             <a:r>
               <a:rPr lang="en-US" sz="2100" dirty="0">
                 <a:solidFill>
-                  <a:srgbClr val="17364A"/>
-                </a:solidFill>
-                <a:latin typeface="Aptos" pitchFamily="34" charset="0"/>
-                <a:ea typeface="Aptos" pitchFamily="34" charset="-122"/>
-                <a:cs typeface="Aptos" pitchFamily="34" charset="-120"/>
-              </a:rPr>
-              <a:t>A model predicts which clients are most likely to miss follow-up care after a public health referral.</a:t>
+                  <a:srgbClr val="003A63"/>
+                </a:solidFill>
+                <a:latin typeface="Aptos" pitchFamily="34" charset="0"/>
+                <a:ea typeface="Aptos" pitchFamily="34" charset="-122"/>
+                <a:cs typeface="Aptos" pitchFamily="34" charset="-120"/>
+              </a:rPr>
+              <a:t>• A model predicts which clients are most likely to miss follow-up care after a public health.</a:t>
             </a:r>
             <a:endParaRPr lang="en-US" sz="2100" dirty="0"/>
           </a:p>
           <a:p>
+            <a:pPr indent="0" marL="0">
+              <a:buNone/>
+            </a:pPr>
             <a:r>
               <a:rPr lang="en-US" sz="2100" dirty="0">
                 <a:solidFill>
-                  <a:srgbClr val="17364A"/>
-                </a:solidFill>
-                <a:latin typeface="Aptos" pitchFamily="34" charset="0"/>
-                <a:ea typeface="Aptos" pitchFamily="34" charset="-122"/>
-                <a:cs typeface="Aptos" pitchFamily="34" charset="-120"/>
-              </a:rPr>
-              <a:t>Overall performance appears acceptable, but subgroup review shows lower sensitivity for rural clients.</a:t>
+                  <a:srgbClr val="003A63"/>
+                </a:solidFill>
+                <a:latin typeface="Aptos" pitchFamily="34" charset="0"/>
+                <a:ea typeface="Aptos" pitchFamily="34" charset="-122"/>
+                <a:cs typeface="Aptos" pitchFamily="34" charset="-120"/>
+              </a:rPr>
+              <a:t>• Overall performance appears acceptable, but subgroup review shows lower sensitivity for rural.</a:t>
             </a:r>
             <a:endParaRPr lang="en-US" sz="2100" dirty="0"/>
           </a:p>
           <a:p>
+            <a:pPr indent="0" marL="0">
+              <a:buNone/>
+            </a:pPr>
             <a:r>
               <a:rPr lang="en-US" sz="2100" dirty="0">
                 <a:solidFill>
-                  <a:srgbClr val="17364A"/>
-                </a:solidFill>
-                <a:latin typeface="Aptos" pitchFamily="34" charset="0"/>
-                <a:ea typeface="Aptos" pitchFamily="34" charset="-122"/>
-                <a:cs typeface="Aptos" pitchFamily="34" charset="-120"/>
-              </a:rPr>
-              <a:t>The model may under-prioritize people who face transportation, broadband, housing, or communication.</a:t>
+                  <a:srgbClr val="003A63"/>
+                </a:solidFill>
+                <a:latin typeface="Aptos" pitchFamily="34" charset="0"/>
+                <a:ea typeface="Aptos" pitchFamily="34" charset="-122"/>
+                <a:cs typeface="Aptos" pitchFamily="34" charset="-120"/>
+              </a:rPr>
+              <a:t>• The model may under-prioritize people who face transportation, broadband, housing, or.</a:t>
             </a:r>
             <a:endParaRPr lang="en-US" sz="2100" dirty="0"/>
           </a:p>
@@ -16962,17 +17267,17 @@
         </p:nvSpPr>
         <p:spPr>
           <a:xfrm>
-            <a:off x="7799832" y="1828800"/>
-            <a:ext cx="3145536" cy="685800"/>
-          </a:xfrm>
-          <a:prstGeom prst="rect">
-            <a:avLst/>
-          </a:prstGeom>
-          <a:noFill/>
-          <a:ln/>
-        </p:spPr>
-        <p:txBody>
-          <a:bodyPr wrap="square" lIns="0" tIns="0" rIns="0" bIns="0" rtlCol="0" anchor="t">
+            <a:off x="7799832" y="1801368"/>
+            <a:ext cx="3145536" cy="758952"/>
+          </a:xfrm>
+          <a:prstGeom prst="rect">
+            <a:avLst/>
+          </a:prstGeom>
+          <a:noFill/>
+          <a:ln/>
+        </p:spPr>
+        <p:txBody>
+          <a:bodyPr wrap="square" lIns="254" tIns="254" rIns="254" bIns="254" rtlCol="0" anchor="t">
             <a:normAutofit/>
           </a:bodyPr>
           <a:lstStyle/>
@@ -16981,7 +17286,7 @@
               <a:buNone/>
             </a:pPr>
             <a:r>
-              <a:rPr lang="en-US" sz="1550" dirty="0">
+              <a:rPr lang="en-US" sz="1320" dirty="0">
                 <a:solidFill>
                   <a:srgbClr val="17364A"/>
                 </a:solidFill>
@@ -16991,7 +17296,7 @@
               </a:rPr>
               <a:t>A model predicts which clients are most likely to miss follow-up care after a public health referral.</a:t>
             </a:r>
-            <a:endParaRPr lang="en-US" sz="1550" dirty="0"/>
+            <a:endParaRPr lang="en-US" sz="1320" dirty="0"/>
           </a:p>
         </p:txBody>
       </p:sp>
@@ -17079,13 +17384,16 @@
           <a:ln/>
         </p:spPr>
         <p:txBody>
-          <a:bodyPr wrap="square" lIns="254" tIns="254" rIns="254" bIns="254" rtlCol="0" anchor="t">
+          <a:bodyPr wrap="square" lIns="508" tIns="508" rIns="508" bIns="508" rtlCol="0" anchor="t">
             <a:normAutofit/>
           </a:bodyPr>
           <a:lstStyle/>
           <a:p>
-            <a:r>
-              <a:rPr lang="en-US" sz="1380" dirty="0">
+            <a:pPr indent="0" marL="0">
+              <a:buNone/>
+            </a:pPr>
+            <a:r>
+              <a:rPr lang="en-US" sz="1220" dirty="0">
                 <a:solidFill>
                   <a:srgbClr val="17364A"/>
                 </a:solidFill>
@@ -17093,13 +17401,16 @@
                 <a:ea typeface="Aptos" pitchFamily="34" charset="-122"/>
                 <a:cs typeface="Aptos" pitchFamily="34" charset="-120"/>
               </a:rPr>
-              <a:t>Overall performance appears acceptable, but subgroup review shows lower sensitivity for.</a:t>
-            </a:r>
-            <a:endParaRPr lang="en-US" sz="1380" dirty="0"/>
-          </a:p>
-          <a:p>
-            <a:r>
-              <a:rPr lang="en-US" sz="1380" dirty="0">
+              <a:t>Overall performance appears acceptable, but subgroup review shows.</a:t>
+            </a:r>
+            <a:endParaRPr lang="en-US" sz="1220" dirty="0"/>
+          </a:p>
+          <a:p>
+            <a:pPr indent="0" marL="0">
+              <a:buNone/>
+            </a:pPr>
+            <a:r>
+              <a:rPr lang="en-US" sz="1220" dirty="0">
                 <a:solidFill>
                   <a:srgbClr val="17364A"/>
                 </a:solidFill>
@@ -17107,13 +17418,16 @@
                 <a:ea typeface="Aptos" pitchFamily="34" charset="-122"/>
                 <a:cs typeface="Aptos" pitchFamily="34" charset="-120"/>
               </a:rPr>
-              <a:t>The model may under-prioritize people who face transportation, broadband, housing, or.</a:t>
-            </a:r>
-            <a:endParaRPr lang="en-US" sz="1380" dirty="0"/>
-          </a:p>
-          <a:p>
-            <a:r>
-              <a:rPr lang="en-US" sz="1380" dirty="0">
+              <a:t>The model may under-prioritize people who face transportation,.</a:t>
+            </a:r>
+            <a:endParaRPr lang="en-US" sz="1220" dirty="0"/>
+          </a:p>
+          <a:p>
+            <a:pPr indent="0" marL="0">
+              <a:buNone/>
+            </a:pPr>
+            <a:r>
+              <a:rPr lang="en-US" sz="1220" dirty="0">
                 <a:solidFill>
                   <a:srgbClr val="17364A"/>
                 </a:solidFill>
@@ -17121,9 +17435,9 @@
                 <a:ea typeface="Aptos" pitchFamily="34" charset="-122"/>
                 <a:cs typeface="Aptos" pitchFamily="34" charset="-120"/>
               </a:rPr>
-              <a:t>Equity evaluation would require additional analysis, workflow changes, and monitoring.</a:t>
-            </a:r>
-            <a:endParaRPr lang="en-US" sz="1380" dirty="0"/>
+              <a:t>Equity evaluation would require additional analysis, workflow.</a:t>
+            </a:r>
+            <a:endParaRPr lang="en-US" sz="1220" dirty="0"/>
           </a:p>
         </p:txBody>
       </p:sp>
@@ -17201,17 +17515,17 @@
         </p:nvSpPr>
         <p:spPr>
           <a:xfrm>
-            <a:off x="7799832" y="5001768"/>
-            <a:ext cx="3145536" cy="502920"/>
-          </a:xfrm>
-          <a:prstGeom prst="rect">
-            <a:avLst/>
-          </a:prstGeom>
-          <a:noFill/>
-          <a:ln/>
-        </p:spPr>
-        <p:txBody>
-          <a:bodyPr wrap="square" lIns="0" tIns="0" rIns="0" bIns="0" rtlCol="0" anchor="t">
+            <a:off x="7799832" y="4974336"/>
+            <a:ext cx="3145536" cy="576072"/>
+          </a:xfrm>
+          <a:prstGeom prst="rect">
+            <a:avLst/>
+          </a:prstGeom>
+          <a:noFill/>
+          <a:ln/>
+        </p:spPr>
+        <p:txBody>
+          <a:bodyPr wrap="square" lIns="254" tIns="254" rIns="254" bIns="254" rtlCol="0" anchor="t">
             <a:normAutofit/>
           </a:bodyPr>
           <a:lstStyle/>
@@ -17220,7 +17534,7 @@
               <a:buNone/>
             </a:pPr>
             <a:r>
-              <a:rPr lang="en-US" sz="1550" dirty="0">
+              <a:rPr lang="en-US" sz="1320" dirty="0">
                 <a:solidFill>
                   <a:srgbClr val="17364A"/>
                 </a:solidFill>
@@ -17228,9 +17542,9 @@
                 <a:ea typeface="Aptos" pitchFamily="34" charset="-122"/>
                 <a:cs typeface="Aptos" pitchFamily="34" charset="-120"/>
               </a:rPr>
-              <a:t>Identify what could go wrong, who could be affected, what safeguards are needed, and what evidence should be reviewed before use expands.</a:t>
-            </a:r>
-            <a:endParaRPr lang="en-US" sz="1550" dirty="0"/>
+              <a:t>Identify what could go wrong, who could be affected, what safeguards are needed, and what evidence should be reviewed.</a:t>
+            </a:r>
+            <a:endParaRPr lang="en-US" sz="1320" dirty="0"/>
           </a:p>
         </p:txBody>
       </p:sp>
@@ -17531,49 +17845,58 @@
           <a:ln/>
         </p:spPr>
         <p:txBody>
-          <a:bodyPr wrap="square" lIns="635" tIns="635" rIns="635" bIns="635" rtlCol="0" anchor="t">
+          <a:bodyPr wrap="square" lIns="1016" tIns="1016" rIns="1016" bIns="1016" rtlCol="0" anchor="t">
             <a:normAutofit/>
           </a:bodyPr>
           <a:lstStyle/>
           <a:p>
+            <a:pPr indent="0" marL="0">
+              <a:buNone/>
+            </a:pPr>
             <a:r>
               <a:rPr lang="en-US" sz="2100" dirty="0">
                 <a:solidFill>
-                  <a:srgbClr val="17364A"/>
-                </a:solidFill>
-                <a:latin typeface="Aptos" pitchFamily="34" charset="0"/>
-                <a:ea typeface="Aptos" pitchFamily="34" charset="-122"/>
-                <a:cs typeface="Aptos" pitchFamily="34" charset="-120"/>
-              </a:rPr>
-              <a:t>Equity evaluation begins with the intended use.</a:t>
+                  <a:srgbClr val="003A63"/>
+                </a:solidFill>
+                <a:latin typeface="Aptos" pitchFamily="34" charset="0"/>
+                <a:ea typeface="Aptos" pitchFamily="34" charset="-122"/>
+                <a:cs typeface="Aptos" pitchFamily="34" charset="-120"/>
+              </a:rPr>
+              <a:t>• Equity evaluation begins with the intended use.</a:t>
             </a:r>
             <a:endParaRPr lang="en-US" sz="2100" dirty="0"/>
           </a:p>
           <a:p>
+            <a:pPr indent="0" marL="0">
+              <a:buNone/>
+            </a:pPr>
             <a:r>
               <a:rPr lang="en-US" sz="2100" dirty="0">
                 <a:solidFill>
-                  <a:srgbClr val="17364A"/>
-                </a:solidFill>
-                <a:latin typeface="Aptos" pitchFamily="34" charset="0"/>
-                <a:ea typeface="Aptos" pitchFamily="34" charset="-122"/>
-                <a:cs typeface="Aptos" pitchFamily="34" charset="-120"/>
-              </a:rPr>
-              <a:t>A model used for internal workload planning has different equity implications than a model used to.</a:t>
+                  <a:srgbClr val="003A63"/>
+                </a:solidFill>
+                <a:latin typeface="Aptos" pitchFamily="34" charset="0"/>
+                <a:ea typeface="Aptos" pitchFamily="34" charset="-122"/>
+                <a:cs typeface="Aptos" pitchFamily="34" charset="-120"/>
+              </a:rPr>
+              <a:t>• A model used for internal workload planning has different equity implications than a model.</a:t>
             </a:r>
             <a:endParaRPr lang="en-US" sz="2100" dirty="0"/>
           </a:p>
           <a:p>
+            <a:pPr indent="0" marL="0">
+              <a:buNone/>
+            </a:pPr>
             <a:r>
               <a:rPr lang="en-US" sz="2100" dirty="0">
                 <a:solidFill>
-                  <a:srgbClr val="17364A"/>
-                </a:solidFill>
-                <a:latin typeface="Aptos" pitchFamily="34" charset="0"/>
-                <a:ea typeface="Aptos" pitchFamily="34" charset="-122"/>
-                <a:cs typeface="Aptos" pitchFamily="34" charset="-120"/>
-              </a:rPr>
-              <a:t>Evaluators should identify who is affected by the model output, what action follows, and what harms may.</a:t>
+                  <a:srgbClr val="003A63"/>
+                </a:solidFill>
+                <a:latin typeface="Aptos" pitchFamily="34" charset="0"/>
+                <a:ea typeface="Aptos" pitchFamily="34" charset="-122"/>
+                <a:cs typeface="Aptos" pitchFamily="34" charset="-120"/>
+              </a:rPr>
+              <a:t>• Evaluators should identify who is affected by the model output, what action follows, and what.</a:t>
             </a:r>
             <a:endParaRPr lang="en-US" sz="2100" dirty="0"/>
           </a:p>
@@ -17653,17 +17976,17 @@
         </p:nvSpPr>
         <p:spPr>
           <a:xfrm>
-            <a:off x="7799832" y="1828800"/>
-            <a:ext cx="3145536" cy="685800"/>
-          </a:xfrm>
-          <a:prstGeom prst="rect">
-            <a:avLst/>
-          </a:prstGeom>
-          <a:noFill/>
-          <a:ln/>
-        </p:spPr>
-        <p:txBody>
-          <a:bodyPr wrap="square" lIns="0" tIns="0" rIns="0" bIns="0" rtlCol="0" anchor="t">
+            <a:off x="7799832" y="1801368"/>
+            <a:ext cx="3145536" cy="758952"/>
+          </a:xfrm>
+          <a:prstGeom prst="rect">
+            <a:avLst/>
+          </a:prstGeom>
+          <a:noFill/>
+          <a:ln/>
+        </p:spPr>
+        <p:txBody>
+          <a:bodyPr wrap="square" lIns="254" tIns="254" rIns="254" bIns="254" rtlCol="0" anchor="t">
             <a:normAutofit/>
           </a:bodyPr>
           <a:lstStyle/>
@@ -17672,7 +17995,7 @@
               <a:buNone/>
             </a:pPr>
             <a:r>
-              <a:rPr lang="en-US" sz="1550" dirty="0">
+              <a:rPr lang="en-US" sz="1320" dirty="0">
                 <a:solidFill>
                   <a:srgbClr val="17364A"/>
                 </a:solidFill>
@@ -17682,7 +18005,7 @@
               </a:rPr>
               <a:t>Equity evaluation begins with the intended use.</a:t>
             </a:r>
-            <a:endParaRPr lang="en-US" sz="1550" dirty="0"/>
+            <a:endParaRPr lang="en-US" sz="1320" dirty="0"/>
           </a:p>
         </p:txBody>
       </p:sp>
@@ -17770,13 +18093,16 @@
           <a:ln/>
         </p:spPr>
         <p:txBody>
-          <a:bodyPr wrap="square" lIns="254" tIns="254" rIns="254" bIns="254" rtlCol="0" anchor="t">
+          <a:bodyPr wrap="square" lIns="508" tIns="508" rIns="508" bIns="508" rtlCol="0" anchor="t">
             <a:normAutofit/>
           </a:bodyPr>
           <a:lstStyle/>
           <a:p>
-            <a:r>
-              <a:rPr lang="en-US" sz="1380" dirty="0">
+            <a:pPr indent="0" marL="0">
+              <a:buNone/>
+            </a:pPr>
+            <a:r>
+              <a:rPr lang="en-US" sz="1220" dirty="0">
                 <a:solidFill>
                   <a:srgbClr val="17364A"/>
                 </a:solidFill>
@@ -17784,13 +18110,16 @@
                 <a:ea typeface="Aptos" pitchFamily="34" charset="-122"/>
                 <a:cs typeface="Aptos" pitchFamily="34" charset="-120"/>
               </a:rPr>
-              <a:t>A model used for internal workload planning has different equity implications than a model.</a:t>
-            </a:r>
-            <a:endParaRPr lang="en-US" sz="1380" dirty="0"/>
-          </a:p>
-          <a:p>
-            <a:r>
-              <a:rPr lang="en-US" sz="1380" dirty="0">
+              <a:t>A model used for internal workload planning has different equity.</a:t>
+            </a:r>
+            <a:endParaRPr lang="en-US" sz="1220" dirty="0"/>
+          </a:p>
+          <a:p>
+            <a:pPr indent="0" marL="0">
+              <a:buNone/>
+            </a:pPr>
+            <a:r>
+              <a:rPr lang="en-US" sz="1220" dirty="0">
                 <a:solidFill>
                   <a:srgbClr val="17364A"/>
                 </a:solidFill>
@@ -17798,13 +18127,16 @@
                 <a:ea typeface="Aptos" pitchFamily="34" charset="-122"/>
                 <a:cs typeface="Aptos" pitchFamily="34" charset="-120"/>
               </a:rPr>
-              <a:t>Evaluators should identify who is affected by the model output, what action follows, and.</a:t>
-            </a:r>
-            <a:endParaRPr lang="en-US" sz="1380" dirty="0"/>
-          </a:p>
-          <a:p>
-            <a:r>
-              <a:rPr lang="en-US" sz="1380" dirty="0">
+              <a:t>Evaluators should identify who is affected by the model output,.</a:t>
+            </a:r>
+            <a:endParaRPr lang="en-US" sz="1220" dirty="0"/>
+          </a:p>
+          <a:p>
+            <a:pPr indent="0" marL="0">
+              <a:buNone/>
+            </a:pPr>
+            <a:r>
+              <a:rPr lang="en-US" sz="1220" dirty="0">
                 <a:solidFill>
                   <a:srgbClr val="17364A"/>
                 </a:solidFill>
@@ -17814,7 +18146,7 @@
               </a:rPr>
               <a:t>Data assessment is the next step.</a:t>
             </a:r>
-            <a:endParaRPr lang="en-US" sz="1380" dirty="0"/>
+            <a:endParaRPr lang="en-US" sz="1220" dirty="0"/>
           </a:p>
         </p:txBody>
       </p:sp>
@@ -17892,17 +18224,17 @@
         </p:nvSpPr>
         <p:spPr>
           <a:xfrm>
-            <a:off x="7799832" y="5001768"/>
-            <a:ext cx="3145536" cy="502920"/>
-          </a:xfrm>
-          <a:prstGeom prst="rect">
-            <a:avLst/>
-          </a:prstGeom>
-          <a:noFill/>
-          <a:ln/>
-        </p:spPr>
-        <p:txBody>
-          <a:bodyPr wrap="square" lIns="0" tIns="0" rIns="0" bIns="0" rtlCol="0" anchor="t">
+            <a:off x="7799832" y="4974336"/>
+            <a:ext cx="3145536" cy="576072"/>
+          </a:xfrm>
+          <a:prstGeom prst="rect">
+            <a:avLst/>
+          </a:prstGeom>
+          <a:noFill/>
+          <a:ln/>
+        </p:spPr>
+        <p:txBody>
+          <a:bodyPr wrap="square" lIns="254" tIns="254" rIns="254" bIns="254" rtlCol="0" anchor="t">
             <a:normAutofit/>
           </a:bodyPr>
           <a:lstStyle/>
@@ -17911,7 +18243,7 @@
               <a:buNone/>
             </a:pPr>
             <a:r>
-              <a:rPr lang="en-US" sz="1550" dirty="0">
+              <a:rPr lang="en-US" sz="1320" dirty="0">
                 <a:solidFill>
                   <a:srgbClr val="17364A"/>
                 </a:solidFill>
@@ -17919,9 +18251,9 @@
                 <a:ea typeface="Aptos" pitchFamily="34" charset="-122"/>
                 <a:cs typeface="Aptos" pitchFamily="34" charset="-120"/>
               </a:rPr>
-              <a:t>Identify what could go wrong, who could be affected, what safeguards are needed, and what evidence should be reviewed before use expands.</a:t>
-            </a:r>
-            <a:endParaRPr lang="en-US" sz="1550" dirty="0"/>
+              <a:t>Identify what could go wrong, who could be affected, what safeguards are needed, and what evidence should be reviewed.</a:t>
+            </a:r>
+            <a:endParaRPr lang="en-US" sz="1320" dirty="0"/>
           </a:p>
         </p:txBody>
       </p:sp>

--- a/downloads/presentations/modules/anl-330.pptx
+++ b/downloads/presentations/modules/anl-330.pptx
@@ -3513,11 +3513,11 @@
         <p:spPr>
           <a:xfrm>
             <a:off x="7635240" y="1325880"/>
-            <a:ext cx="3474720" cy="1325880"/>
+            <a:ext cx="3474720" cy="1207008"/>
           </a:xfrm>
           <a:prstGeom prst="roundRect">
             <a:avLst>
-              <a:gd name="adj" fmla="val 8276"/>
+              <a:gd name="adj" fmla="val 9091"/>
             </a:avLst>
           </a:prstGeom>
           <a:solidFill>
@@ -3579,7 +3579,7 @@
         <p:spPr>
           <a:xfrm>
             <a:off x="7799832" y="1801368"/>
-            <a:ext cx="3145536" cy="758952"/>
+            <a:ext cx="3145536" cy="640080"/>
           </a:xfrm>
           <a:prstGeom prst="rect">
             <a:avLst/>
@@ -3619,7 +3619,7 @@
         </p:nvSpPr>
         <p:spPr>
           <a:xfrm>
-            <a:off x="7635240" y="2788920"/>
+            <a:off x="7635240" y="2670048"/>
             <a:ext cx="3474720" cy="1536192"/>
           </a:xfrm>
           <a:prstGeom prst="roundRect">
@@ -3646,7 +3646,7 @@
         </p:nvSpPr>
         <p:spPr>
           <a:xfrm>
-            <a:off x="7799832" y="2935224"/>
+            <a:off x="7799832" y="2816352"/>
             <a:ext cx="3145536" cy="256032"/>
           </a:xfrm>
           <a:prstGeom prst="rect">
@@ -3685,7 +3685,7 @@
         </p:nvSpPr>
         <p:spPr>
           <a:xfrm>
-            <a:off x="7818120" y="3300984"/>
+            <a:off x="7818120" y="3182112"/>
             <a:ext cx="3090672" cy="877824"/>
           </a:xfrm>
           <a:prstGeom prst="rect">
@@ -3760,12 +3760,12 @@
         </p:nvSpPr>
         <p:spPr>
           <a:xfrm>
-            <a:off x="7635240" y="4498848"/>
-            <a:ext cx="3474720" cy="1143000"/>
+            <a:off x="7635240" y="4343400"/>
+            <a:ext cx="3474720" cy="1255471"/>
           </a:xfrm>
           <a:prstGeom prst="roundRect">
             <a:avLst>
-              <a:gd name="adj" fmla="val 9600"/>
+              <a:gd name="adj" fmla="val 8740"/>
             </a:avLst>
           </a:prstGeom>
           <a:solidFill>
@@ -3787,7 +3787,7 @@
         </p:nvSpPr>
         <p:spPr>
           <a:xfrm>
-            <a:off x="7799832" y="4645152"/>
+            <a:off x="7799832" y="4489704"/>
             <a:ext cx="3145536" cy="256032"/>
           </a:xfrm>
           <a:prstGeom prst="rect">
@@ -3826,8 +3826,8 @@
         </p:nvSpPr>
         <p:spPr>
           <a:xfrm>
-            <a:off x="7799832" y="4974336"/>
-            <a:ext cx="3145536" cy="576072"/>
+            <a:off x="7799832" y="4818888"/>
+            <a:ext cx="3145536" cy="688543"/>
           </a:xfrm>
           <a:prstGeom prst="rect">
             <a:avLst/>
@@ -3853,7 +3853,7 @@
                 <a:ea typeface="Aptos" pitchFamily="34" charset="-122"/>
                 <a:cs typeface="Aptos" pitchFamily="34" charset="-120"/>
               </a:rPr>
-              <a:t>Identify what could go wrong, who could be affected, what safeguards are needed, and what evidence should be reviewed.</a:t>
+              <a:t>Identify what could go wrong, who could be affected, what safeguards are needed, and what evidence should be reviewed before use.</a:t>
             </a:r>
             <a:endParaRPr lang="en-US" sz="1320" dirty="0"/>
           </a:p>
@@ -4222,11 +4222,11 @@
         <p:spPr>
           <a:xfrm>
             <a:off x="7635240" y="1325880"/>
-            <a:ext cx="3474720" cy="1325880"/>
+            <a:ext cx="3474720" cy="1207008"/>
           </a:xfrm>
           <a:prstGeom prst="roundRect">
             <a:avLst>
-              <a:gd name="adj" fmla="val 8276"/>
+              <a:gd name="adj" fmla="val 9091"/>
             </a:avLst>
           </a:prstGeom>
           <a:solidFill>
@@ -4288,7 +4288,7 @@
         <p:spPr>
           <a:xfrm>
             <a:off x="7799832" y="1801368"/>
-            <a:ext cx="3145536" cy="758952"/>
+            <a:ext cx="3145536" cy="640080"/>
           </a:xfrm>
           <a:prstGeom prst="rect">
             <a:avLst/>
@@ -4328,7 +4328,7 @@
         </p:nvSpPr>
         <p:spPr>
           <a:xfrm>
-            <a:off x="7635240" y="2788920"/>
+            <a:off x="7635240" y="2670048"/>
             <a:ext cx="3474720" cy="1536192"/>
           </a:xfrm>
           <a:prstGeom prst="roundRect">
@@ -4355,7 +4355,7 @@
         </p:nvSpPr>
         <p:spPr>
           <a:xfrm>
-            <a:off x="7799832" y="2935224"/>
+            <a:off x="7799832" y="2816352"/>
             <a:ext cx="3145536" cy="256032"/>
           </a:xfrm>
           <a:prstGeom prst="rect">
@@ -4394,7 +4394,7 @@
         </p:nvSpPr>
         <p:spPr>
           <a:xfrm>
-            <a:off x="7818120" y="3300984"/>
+            <a:off x="7818120" y="3182112"/>
             <a:ext cx="3090672" cy="877824"/>
           </a:xfrm>
           <a:prstGeom prst="rect">
@@ -4469,12 +4469,12 @@
         </p:nvSpPr>
         <p:spPr>
           <a:xfrm>
-            <a:off x="7635240" y="4498848"/>
-            <a:ext cx="3474720" cy="1143000"/>
+            <a:off x="7635240" y="4343400"/>
+            <a:ext cx="3474720" cy="1255471"/>
           </a:xfrm>
           <a:prstGeom prst="roundRect">
             <a:avLst>
-              <a:gd name="adj" fmla="val 9600"/>
+              <a:gd name="adj" fmla="val 8740"/>
             </a:avLst>
           </a:prstGeom>
           <a:solidFill>
@@ -4496,7 +4496,7 @@
         </p:nvSpPr>
         <p:spPr>
           <a:xfrm>
-            <a:off x="7799832" y="4645152"/>
+            <a:off x="7799832" y="4489704"/>
             <a:ext cx="3145536" cy="256032"/>
           </a:xfrm>
           <a:prstGeom prst="rect">
@@ -4535,8 +4535,8 @@
         </p:nvSpPr>
         <p:spPr>
           <a:xfrm>
-            <a:off x="7799832" y="4974336"/>
-            <a:ext cx="3145536" cy="576072"/>
+            <a:off x="7799832" y="4818888"/>
+            <a:ext cx="3145536" cy="688543"/>
           </a:xfrm>
           <a:prstGeom prst="rect">
             <a:avLst/>
@@ -4562,7 +4562,7 @@
                 <a:ea typeface="Aptos" pitchFamily="34" charset="-122"/>
                 <a:cs typeface="Aptos" pitchFamily="34" charset="-120"/>
               </a:rPr>
-              <a:t>Identify what could go wrong, who could be affected, what safeguards are needed, and what evidence should be reviewed.</a:t>
+              <a:t>Identify what could go wrong, who could be affected, what safeguards are needed, and what evidence should be reviewed before use.</a:t>
             </a:r>
             <a:endParaRPr lang="en-US" sz="1320" dirty="0"/>
           </a:p>
@@ -4931,11 +4931,11 @@
         <p:spPr>
           <a:xfrm>
             <a:off x="7635240" y="1325880"/>
-            <a:ext cx="3474720" cy="1325880"/>
+            <a:ext cx="3474720" cy="1207008"/>
           </a:xfrm>
           <a:prstGeom prst="roundRect">
             <a:avLst>
-              <a:gd name="adj" fmla="val 8276"/>
+              <a:gd name="adj" fmla="val 9091"/>
             </a:avLst>
           </a:prstGeom>
           <a:solidFill>
@@ -4997,7 +4997,7 @@
         <p:spPr>
           <a:xfrm>
             <a:off x="7799832" y="1801368"/>
-            <a:ext cx="3145536" cy="758952"/>
+            <a:ext cx="3145536" cy="640080"/>
           </a:xfrm>
           <a:prstGeom prst="rect">
             <a:avLst/>
@@ -5037,7 +5037,7 @@
         </p:nvSpPr>
         <p:spPr>
           <a:xfrm>
-            <a:off x="7635240" y="2788920"/>
+            <a:off x="7635240" y="2670048"/>
             <a:ext cx="3474720" cy="1536192"/>
           </a:xfrm>
           <a:prstGeom prst="roundRect">
@@ -5064,7 +5064,7 @@
         </p:nvSpPr>
         <p:spPr>
           <a:xfrm>
-            <a:off x="7799832" y="2935224"/>
+            <a:off x="7799832" y="2816352"/>
             <a:ext cx="3145536" cy="256032"/>
           </a:xfrm>
           <a:prstGeom prst="rect">
@@ -5103,7 +5103,7 @@
         </p:nvSpPr>
         <p:spPr>
           <a:xfrm>
-            <a:off x="7818120" y="3300984"/>
+            <a:off x="7818120" y="3182112"/>
             <a:ext cx="3090672" cy="877824"/>
           </a:xfrm>
           <a:prstGeom prst="rect">
@@ -5178,12 +5178,12 @@
         </p:nvSpPr>
         <p:spPr>
           <a:xfrm>
-            <a:off x="7635240" y="4498848"/>
-            <a:ext cx="3474720" cy="1143000"/>
+            <a:off x="7635240" y="4343400"/>
+            <a:ext cx="3474720" cy="1255471"/>
           </a:xfrm>
           <a:prstGeom prst="roundRect">
             <a:avLst>
-              <a:gd name="adj" fmla="val 9600"/>
+              <a:gd name="adj" fmla="val 8740"/>
             </a:avLst>
           </a:prstGeom>
           <a:solidFill>
@@ -5205,7 +5205,7 @@
         </p:nvSpPr>
         <p:spPr>
           <a:xfrm>
-            <a:off x="7799832" y="4645152"/>
+            <a:off x="7799832" y="4489704"/>
             <a:ext cx="3145536" cy="256032"/>
           </a:xfrm>
           <a:prstGeom prst="rect">
@@ -5244,8 +5244,8 @@
         </p:nvSpPr>
         <p:spPr>
           <a:xfrm>
-            <a:off x="7799832" y="4974336"/>
-            <a:ext cx="3145536" cy="576072"/>
+            <a:off x="7799832" y="4818888"/>
+            <a:ext cx="3145536" cy="688543"/>
           </a:xfrm>
           <a:prstGeom prst="rect">
             <a:avLst/>
@@ -5271,7 +5271,7 @@
                 <a:ea typeface="Aptos" pitchFamily="34" charset="-122"/>
                 <a:cs typeface="Aptos" pitchFamily="34" charset="-120"/>
               </a:rPr>
-              <a:t>Identify what could go wrong, who could be affected, what safeguards are needed, and what evidence should be reviewed.</a:t>
+              <a:t>Identify what could go wrong, who could be affected, what safeguards are needed, and what evidence should be reviewed before use.</a:t>
             </a:r>
             <a:endParaRPr lang="en-US" sz="1320" dirty="0"/>
           </a:p>
@@ -5640,11 +5640,11 @@
         <p:spPr>
           <a:xfrm>
             <a:off x="7635240" y="1325880"/>
-            <a:ext cx="3474720" cy="1325880"/>
+            <a:ext cx="3474720" cy="1207008"/>
           </a:xfrm>
           <a:prstGeom prst="roundRect">
             <a:avLst>
-              <a:gd name="adj" fmla="val 8276"/>
+              <a:gd name="adj" fmla="val 9091"/>
             </a:avLst>
           </a:prstGeom>
           <a:solidFill>
@@ -5706,7 +5706,7 @@
         <p:spPr>
           <a:xfrm>
             <a:off x="7799832" y="1801368"/>
-            <a:ext cx="3145536" cy="758952"/>
+            <a:ext cx="3145536" cy="640080"/>
           </a:xfrm>
           <a:prstGeom prst="rect">
             <a:avLst/>
@@ -5746,7 +5746,7 @@
         </p:nvSpPr>
         <p:spPr>
           <a:xfrm>
-            <a:off x="7635240" y="2788920"/>
+            <a:off x="7635240" y="2670048"/>
             <a:ext cx="3474720" cy="1536192"/>
           </a:xfrm>
           <a:prstGeom prst="roundRect">
@@ -5773,7 +5773,7 @@
         </p:nvSpPr>
         <p:spPr>
           <a:xfrm>
-            <a:off x="7799832" y="2935224"/>
+            <a:off x="7799832" y="2816352"/>
             <a:ext cx="3145536" cy="256032"/>
           </a:xfrm>
           <a:prstGeom prst="rect">
@@ -5812,7 +5812,7 @@
         </p:nvSpPr>
         <p:spPr>
           <a:xfrm>
-            <a:off x="7818120" y="3300984"/>
+            <a:off x="7818120" y="3182112"/>
             <a:ext cx="3090672" cy="877824"/>
           </a:xfrm>
           <a:prstGeom prst="rect">
@@ -5887,12 +5887,12 @@
         </p:nvSpPr>
         <p:spPr>
           <a:xfrm>
-            <a:off x="7635240" y="4498848"/>
-            <a:ext cx="3474720" cy="1143000"/>
+            <a:off x="7635240" y="4343400"/>
+            <a:ext cx="3474720" cy="1255471"/>
           </a:xfrm>
           <a:prstGeom prst="roundRect">
             <a:avLst>
-              <a:gd name="adj" fmla="val 9600"/>
+              <a:gd name="adj" fmla="val 8740"/>
             </a:avLst>
           </a:prstGeom>
           <a:solidFill>
@@ -5914,7 +5914,7 @@
         </p:nvSpPr>
         <p:spPr>
           <a:xfrm>
-            <a:off x="7799832" y="4645152"/>
+            <a:off x="7799832" y="4489704"/>
             <a:ext cx="3145536" cy="256032"/>
           </a:xfrm>
           <a:prstGeom prst="rect">
@@ -5953,8 +5953,8 @@
         </p:nvSpPr>
         <p:spPr>
           <a:xfrm>
-            <a:off x="7799832" y="4974336"/>
-            <a:ext cx="3145536" cy="576072"/>
+            <a:off x="7799832" y="4818888"/>
+            <a:ext cx="3145536" cy="688543"/>
           </a:xfrm>
           <a:prstGeom prst="rect">
             <a:avLst/>
@@ -5980,7 +5980,7 @@
                 <a:ea typeface="Aptos" pitchFamily="34" charset="-122"/>
                 <a:cs typeface="Aptos" pitchFamily="34" charset="-120"/>
               </a:rPr>
-              <a:t>Identify what could go wrong, who could be affected, what safeguards are needed, and what evidence should be reviewed.</a:t>
+              <a:t>Identify what could go wrong, who could be affected, what safeguards are needed, and what evidence should be reviewed before use.</a:t>
             </a:r>
             <a:endParaRPr lang="en-US" sz="1320" dirty="0"/>
           </a:p>
@@ -6349,11 +6349,11 @@
         <p:spPr>
           <a:xfrm>
             <a:off x="7635240" y="1325880"/>
-            <a:ext cx="3474720" cy="1325880"/>
+            <a:ext cx="3474720" cy="1207008"/>
           </a:xfrm>
           <a:prstGeom prst="roundRect">
             <a:avLst>
-              <a:gd name="adj" fmla="val 8276"/>
+              <a:gd name="adj" fmla="val 9091"/>
             </a:avLst>
           </a:prstGeom>
           <a:solidFill>
@@ -6415,7 +6415,7 @@
         <p:spPr>
           <a:xfrm>
             <a:off x="7799832" y="1801368"/>
-            <a:ext cx="3145536" cy="758952"/>
+            <a:ext cx="3145536" cy="640080"/>
           </a:xfrm>
           <a:prstGeom prst="rect">
             <a:avLst/>
@@ -6455,7 +6455,7 @@
         </p:nvSpPr>
         <p:spPr>
           <a:xfrm>
-            <a:off x="7635240" y="2788920"/>
+            <a:off x="7635240" y="2670048"/>
             <a:ext cx="3474720" cy="1536192"/>
           </a:xfrm>
           <a:prstGeom prst="roundRect">
@@ -6482,7 +6482,7 @@
         </p:nvSpPr>
         <p:spPr>
           <a:xfrm>
-            <a:off x="7799832" y="2935224"/>
+            <a:off x="7799832" y="2816352"/>
             <a:ext cx="3145536" cy="256032"/>
           </a:xfrm>
           <a:prstGeom prst="rect">
@@ -6521,7 +6521,7 @@
         </p:nvSpPr>
         <p:spPr>
           <a:xfrm>
-            <a:off x="7818120" y="3300984"/>
+            <a:off x="7818120" y="3182112"/>
             <a:ext cx="3090672" cy="877824"/>
           </a:xfrm>
           <a:prstGeom prst="rect">
@@ -6596,12 +6596,12 @@
         </p:nvSpPr>
         <p:spPr>
           <a:xfrm>
-            <a:off x="7635240" y="4498848"/>
-            <a:ext cx="3474720" cy="1143000"/>
+            <a:off x="7635240" y="4343400"/>
+            <a:ext cx="3474720" cy="1255471"/>
           </a:xfrm>
           <a:prstGeom prst="roundRect">
             <a:avLst>
-              <a:gd name="adj" fmla="val 9600"/>
+              <a:gd name="adj" fmla="val 8740"/>
             </a:avLst>
           </a:prstGeom>
           <a:solidFill>
@@ -6623,7 +6623,7 @@
         </p:nvSpPr>
         <p:spPr>
           <a:xfrm>
-            <a:off x="7799832" y="4645152"/>
+            <a:off x="7799832" y="4489704"/>
             <a:ext cx="3145536" cy="256032"/>
           </a:xfrm>
           <a:prstGeom prst="rect">
@@ -6662,8 +6662,8 @@
         </p:nvSpPr>
         <p:spPr>
           <a:xfrm>
-            <a:off x="7799832" y="4974336"/>
-            <a:ext cx="3145536" cy="576072"/>
+            <a:off x="7799832" y="4818888"/>
+            <a:ext cx="3145536" cy="688543"/>
           </a:xfrm>
           <a:prstGeom prst="rect">
             <a:avLst/>
@@ -6689,7 +6689,7 @@
                 <a:ea typeface="Aptos" pitchFamily="34" charset="-122"/>
                 <a:cs typeface="Aptos" pitchFamily="34" charset="-120"/>
               </a:rPr>
-              <a:t>Identify what could go wrong, who could be affected, what safeguards are needed, and what evidence should be reviewed.</a:t>
+              <a:t>Identify what could go wrong, who could be affected, what safeguards are needed, and what evidence should be reviewed before use.</a:t>
             </a:r>
             <a:endParaRPr lang="en-US" sz="1320" dirty="0"/>
           </a:p>
@@ -7058,11 +7058,11 @@
         <p:spPr>
           <a:xfrm>
             <a:off x="7635240" y="1325880"/>
-            <a:ext cx="3474720" cy="1325880"/>
+            <a:ext cx="3474720" cy="1207008"/>
           </a:xfrm>
           <a:prstGeom prst="roundRect">
             <a:avLst>
-              <a:gd name="adj" fmla="val 8276"/>
+              <a:gd name="adj" fmla="val 9091"/>
             </a:avLst>
           </a:prstGeom>
           <a:solidFill>
@@ -7124,7 +7124,7 @@
         <p:spPr>
           <a:xfrm>
             <a:off x="7799832" y="1801368"/>
-            <a:ext cx="3145536" cy="758952"/>
+            <a:ext cx="3145536" cy="640080"/>
           </a:xfrm>
           <a:prstGeom prst="rect">
             <a:avLst/>
@@ -7164,7 +7164,7 @@
         </p:nvSpPr>
         <p:spPr>
           <a:xfrm>
-            <a:off x="7635240" y="2788920"/>
+            <a:off x="7635240" y="2670048"/>
             <a:ext cx="3474720" cy="1536192"/>
           </a:xfrm>
           <a:prstGeom prst="roundRect">
@@ -7191,7 +7191,7 @@
         </p:nvSpPr>
         <p:spPr>
           <a:xfrm>
-            <a:off x="7799832" y="2935224"/>
+            <a:off x="7799832" y="2816352"/>
             <a:ext cx="3145536" cy="256032"/>
           </a:xfrm>
           <a:prstGeom prst="rect">
@@ -7230,7 +7230,7 @@
         </p:nvSpPr>
         <p:spPr>
           <a:xfrm>
-            <a:off x="7818120" y="3300984"/>
+            <a:off x="7818120" y="3182112"/>
             <a:ext cx="3090672" cy="877824"/>
           </a:xfrm>
           <a:prstGeom prst="rect">
@@ -7305,12 +7305,12 @@
         </p:nvSpPr>
         <p:spPr>
           <a:xfrm>
-            <a:off x="7635240" y="4498848"/>
-            <a:ext cx="3474720" cy="1143000"/>
+            <a:off x="7635240" y="4343400"/>
+            <a:ext cx="3474720" cy="1255471"/>
           </a:xfrm>
           <a:prstGeom prst="roundRect">
             <a:avLst>
-              <a:gd name="adj" fmla="val 9600"/>
+              <a:gd name="adj" fmla="val 8740"/>
             </a:avLst>
           </a:prstGeom>
           <a:solidFill>
@@ -7332,7 +7332,7 @@
         </p:nvSpPr>
         <p:spPr>
           <a:xfrm>
-            <a:off x="7799832" y="4645152"/>
+            <a:off x="7799832" y="4489704"/>
             <a:ext cx="3145536" cy="256032"/>
           </a:xfrm>
           <a:prstGeom prst="rect">
@@ -7371,8 +7371,8 @@
         </p:nvSpPr>
         <p:spPr>
           <a:xfrm>
-            <a:off x="7799832" y="4974336"/>
-            <a:ext cx="3145536" cy="576072"/>
+            <a:off x="7799832" y="4818888"/>
+            <a:ext cx="3145536" cy="688543"/>
           </a:xfrm>
           <a:prstGeom prst="rect">
             <a:avLst/>
@@ -7398,7 +7398,7 @@
                 <a:ea typeface="Aptos" pitchFamily="34" charset="-122"/>
                 <a:cs typeface="Aptos" pitchFamily="34" charset="-120"/>
               </a:rPr>
-              <a:t>Identify what could go wrong, who could be affected, what safeguards are needed, and what evidence should be reviewed.</a:t>
+              <a:t>Identify what could go wrong, who could be affected, what safeguards are needed, and what evidence should be reviewed before use.</a:t>
             </a:r>
             <a:endParaRPr lang="en-US" sz="1320" dirty="0"/>
           </a:p>
@@ -7750,11 +7750,11 @@
         <p:spPr>
           <a:xfrm>
             <a:off x="7635240" y="1325880"/>
-            <a:ext cx="3474720" cy="1325880"/>
+            <a:ext cx="3474720" cy="1207008"/>
           </a:xfrm>
           <a:prstGeom prst="roundRect">
             <a:avLst>
-              <a:gd name="adj" fmla="val 8276"/>
+              <a:gd name="adj" fmla="val 9091"/>
             </a:avLst>
           </a:prstGeom>
           <a:solidFill>
@@ -7816,7 +7816,7 @@
         <p:spPr>
           <a:xfrm>
             <a:off x="7799832" y="1801368"/>
-            <a:ext cx="3145536" cy="758952"/>
+            <a:ext cx="3145536" cy="640080"/>
           </a:xfrm>
           <a:prstGeom prst="rect">
             <a:avLst/>
@@ -7842,7 +7842,7 @@
                 <a:ea typeface="Aptos" pitchFamily="34" charset="-122"/>
                 <a:cs typeface="Aptos" pitchFamily="34" charset="-120"/>
               </a:rPr>
-              <a:t>What evidence would governance, leadership, or operations staff need before moving forward?</a:t>
+              <a:t>What evidence would governance, leadership, or operations staff need before moving.</a:t>
             </a:r>
             <a:endParaRPr lang="en-US" sz="1320" dirty="0"/>
           </a:p>
@@ -7856,7 +7856,7 @@
         </p:nvSpPr>
         <p:spPr>
           <a:xfrm>
-            <a:off x="7635240" y="2788920"/>
+            <a:off x="7635240" y="2670048"/>
             <a:ext cx="3474720" cy="1536192"/>
           </a:xfrm>
           <a:prstGeom prst="roundRect">
@@ -7883,7 +7883,7 @@
         </p:nvSpPr>
         <p:spPr>
           <a:xfrm>
-            <a:off x="7799832" y="2935224"/>
+            <a:off x="7799832" y="2816352"/>
             <a:ext cx="3145536" cy="256032"/>
           </a:xfrm>
           <a:prstGeom prst="rect">
@@ -7922,7 +7922,7 @@
         </p:nvSpPr>
         <p:spPr>
           <a:xfrm>
-            <a:off x="7818120" y="3300984"/>
+            <a:off x="7818120" y="3182112"/>
             <a:ext cx="3090672" cy="877824"/>
           </a:xfrm>
           <a:prstGeom prst="rect">
@@ -7980,12 +7980,12 @@
         </p:nvSpPr>
         <p:spPr>
           <a:xfrm>
-            <a:off x="7635240" y="4498848"/>
-            <a:ext cx="3474720" cy="1143000"/>
+            <a:off x="7635240" y="4343400"/>
+            <a:ext cx="3474720" cy="1255471"/>
           </a:xfrm>
           <a:prstGeom prst="roundRect">
             <a:avLst>
-              <a:gd name="adj" fmla="val 9600"/>
+              <a:gd name="adj" fmla="val 8740"/>
             </a:avLst>
           </a:prstGeom>
           <a:solidFill>
@@ -8007,7 +8007,7 @@
         </p:nvSpPr>
         <p:spPr>
           <a:xfrm>
-            <a:off x="7799832" y="4645152"/>
+            <a:off x="7799832" y="4489704"/>
             <a:ext cx="3145536" cy="256032"/>
           </a:xfrm>
           <a:prstGeom prst="rect">
@@ -8046,8 +8046,8 @@
         </p:nvSpPr>
         <p:spPr>
           <a:xfrm>
-            <a:off x="7799832" y="4974336"/>
-            <a:ext cx="3145536" cy="576072"/>
+            <a:off x="7799832" y="4818888"/>
+            <a:ext cx="3145536" cy="688543"/>
           </a:xfrm>
           <a:prstGeom prst="rect">
             <a:avLst/>
@@ -8073,7 +8073,7 @@
                 <a:ea typeface="Aptos" pitchFamily="34" charset="-122"/>
                 <a:cs typeface="Aptos" pitchFamily="34" charset="-120"/>
               </a:rPr>
-              <a:t>Identify what could go wrong, who could be affected, what safeguards are needed, and what evidence should be reviewed.</a:t>
+              <a:t>Identify what could go wrong, who could be affected, what safeguards are needed, and what evidence should be reviewed before use.</a:t>
             </a:r>
             <a:endParaRPr lang="en-US" sz="1320" dirty="0"/>
           </a:p>
@@ -8425,11 +8425,11 @@
         <p:spPr>
           <a:xfrm>
             <a:off x="7635240" y="1325880"/>
-            <a:ext cx="3474720" cy="1325880"/>
+            <a:ext cx="3474720" cy="1207008"/>
           </a:xfrm>
           <a:prstGeom prst="roundRect">
             <a:avLst>
-              <a:gd name="adj" fmla="val 8276"/>
+              <a:gd name="adj" fmla="val 9091"/>
             </a:avLst>
           </a:prstGeom>
           <a:solidFill>
@@ -8491,7 +8491,7 @@
         <p:spPr>
           <a:xfrm>
             <a:off x="7799832" y="1801368"/>
-            <a:ext cx="3145536" cy="758952"/>
+            <a:ext cx="3145536" cy="640080"/>
           </a:xfrm>
           <a:prstGeom prst="rect">
             <a:avLst/>
@@ -8531,12 +8531,12 @@
         </p:nvSpPr>
         <p:spPr>
           <a:xfrm>
-            <a:off x="7635240" y="2788920"/>
-            <a:ext cx="3474720" cy="1536192"/>
+            <a:off x="7635240" y="2670048"/>
+            <a:ext cx="3474720" cy="1377086"/>
           </a:xfrm>
           <a:prstGeom prst="roundRect">
             <a:avLst>
-              <a:gd name="adj" fmla="val 7143"/>
+              <a:gd name="adj" fmla="val 7968"/>
             </a:avLst>
           </a:prstGeom>
           <a:solidFill>
@@ -8558,7 +8558,7 @@
         </p:nvSpPr>
         <p:spPr>
           <a:xfrm>
-            <a:off x="7799832" y="2935224"/>
+            <a:off x="7799832" y="2816352"/>
             <a:ext cx="3145536" cy="256032"/>
           </a:xfrm>
           <a:prstGeom prst="rect">
@@ -8597,8 +8597,8 @@
         </p:nvSpPr>
         <p:spPr>
           <a:xfrm>
-            <a:off x="7818120" y="3300984"/>
-            <a:ext cx="3090672" cy="877824"/>
+            <a:off x="7818120" y="3182112"/>
+            <a:ext cx="3090672" cy="718718"/>
           </a:xfrm>
           <a:prstGeom prst="rect">
             <a:avLst/>
@@ -8655,12 +8655,12 @@
         </p:nvSpPr>
         <p:spPr>
           <a:xfrm>
-            <a:off x="7635240" y="4498848"/>
-            <a:ext cx="3474720" cy="1143000"/>
+            <a:off x="7635240" y="4184294"/>
+            <a:ext cx="3474720" cy="1466698"/>
           </a:xfrm>
           <a:prstGeom prst="roundRect">
             <a:avLst>
-              <a:gd name="adj" fmla="val 9600"/>
+              <a:gd name="adj" fmla="val 7481"/>
             </a:avLst>
           </a:prstGeom>
           <a:solidFill>
@@ -8682,7 +8682,7 @@
         </p:nvSpPr>
         <p:spPr>
           <a:xfrm>
-            <a:off x="7799832" y="4645152"/>
+            <a:off x="7799832" y="4330598"/>
             <a:ext cx="3145536" cy="256032"/>
           </a:xfrm>
           <a:prstGeom prst="rect">
@@ -8721,8 +8721,8 @@
         </p:nvSpPr>
         <p:spPr>
           <a:xfrm>
-            <a:off x="7799832" y="4974336"/>
-            <a:ext cx="3145536" cy="576072"/>
+            <a:off x="7799832" y="4659782"/>
+            <a:ext cx="3145536" cy="899770"/>
           </a:xfrm>
           <a:prstGeom prst="rect">
             <a:avLst/>
@@ -8748,7 +8748,7 @@
                 <a:ea typeface="Aptos" pitchFamily="34" charset="-122"/>
                 <a:cs typeface="Aptos" pitchFamily="34" charset="-120"/>
               </a:rPr>
-              <a:t>Use the assignment to test whether you can explain the concept, apply it to a realistic public health situation, and.</a:t>
+              <a:t>Use the assignment to test whether you can explain the concept, apply it to a realistic public health situation, and identify what would need review before the work moves forward.</a:t>
             </a:r>
             <a:endParaRPr lang="en-US" sz="1320" dirty="0"/>
           </a:p>
@@ -9117,11 +9117,11 @@
         <p:spPr>
           <a:xfrm>
             <a:off x="7635240" y="1325880"/>
-            <a:ext cx="3474720" cy="1325880"/>
+            <a:ext cx="3474720" cy="1207008"/>
           </a:xfrm>
           <a:prstGeom prst="roundRect">
             <a:avLst>
-              <a:gd name="adj" fmla="val 8276"/>
+              <a:gd name="adj" fmla="val 9091"/>
             </a:avLst>
           </a:prstGeom>
           <a:solidFill>
@@ -9183,7 +9183,7 @@
         <p:spPr>
           <a:xfrm>
             <a:off x="7799832" y="1801368"/>
-            <a:ext cx="3145536" cy="758952"/>
+            <a:ext cx="3145536" cy="640080"/>
           </a:xfrm>
           <a:prstGeom prst="rect">
             <a:avLst/>
@@ -9223,7 +9223,7 @@
         </p:nvSpPr>
         <p:spPr>
           <a:xfrm>
-            <a:off x="7635240" y="2788920"/>
+            <a:off x="7635240" y="2670048"/>
             <a:ext cx="3474720" cy="1536192"/>
           </a:xfrm>
           <a:prstGeom prst="roundRect">
@@ -9250,7 +9250,7 @@
         </p:nvSpPr>
         <p:spPr>
           <a:xfrm>
-            <a:off x="7799832" y="2935224"/>
+            <a:off x="7799832" y="2816352"/>
             <a:ext cx="3145536" cy="256032"/>
           </a:xfrm>
           <a:prstGeom prst="rect">
@@ -9289,7 +9289,7 @@
         </p:nvSpPr>
         <p:spPr>
           <a:xfrm>
-            <a:off x="7818120" y="3300984"/>
+            <a:off x="7818120" y="3182112"/>
             <a:ext cx="3090672" cy="877824"/>
           </a:xfrm>
           <a:prstGeom prst="rect">
@@ -9364,12 +9364,12 @@
         </p:nvSpPr>
         <p:spPr>
           <a:xfrm>
-            <a:off x="7635240" y="4498848"/>
-            <a:ext cx="3474720" cy="1143000"/>
+            <a:off x="7635240" y="4343400"/>
+            <a:ext cx="3474720" cy="1255471"/>
           </a:xfrm>
           <a:prstGeom prst="roundRect">
             <a:avLst>
-              <a:gd name="adj" fmla="val 9600"/>
+              <a:gd name="adj" fmla="val 8740"/>
             </a:avLst>
           </a:prstGeom>
           <a:solidFill>
@@ -9391,7 +9391,7 @@
         </p:nvSpPr>
         <p:spPr>
           <a:xfrm>
-            <a:off x="7799832" y="4645152"/>
+            <a:off x="7799832" y="4489704"/>
             <a:ext cx="3145536" cy="256032"/>
           </a:xfrm>
           <a:prstGeom prst="rect">
@@ -9430,8 +9430,8 @@
         </p:nvSpPr>
         <p:spPr>
           <a:xfrm>
-            <a:off x="7799832" y="4974336"/>
-            <a:ext cx="3145536" cy="576072"/>
+            <a:off x="7799832" y="4818888"/>
+            <a:ext cx="3145536" cy="688543"/>
           </a:xfrm>
           <a:prstGeom prst="rect">
             <a:avLst/>
@@ -9457,7 +9457,7 @@
                 <a:ea typeface="Aptos" pitchFamily="34" charset="-122"/>
                 <a:cs typeface="Aptos" pitchFamily="34" charset="-120"/>
               </a:rPr>
-              <a:t>Identify what could go wrong, who could be affected, what safeguards are needed, and what evidence should be reviewed.</a:t>
+              <a:t>Identify what could go wrong, who could be affected, what safeguards are needed, and what evidence should be reviewed before use.</a:t>
             </a:r>
             <a:endParaRPr lang="en-US" sz="1320" dirty="0"/>
           </a:p>
@@ -9809,11 +9809,11 @@
         <p:spPr>
           <a:xfrm>
             <a:off x="7635240" y="1325880"/>
-            <a:ext cx="3474720" cy="1325880"/>
+            <a:ext cx="3474720" cy="1207008"/>
           </a:xfrm>
           <a:prstGeom prst="roundRect">
             <a:avLst>
-              <a:gd name="adj" fmla="val 8276"/>
+              <a:gd name="adj" fmla="val 9091"/>
             </a:avLst>
           </a:prstGeom>
           <a:solidFill>
@@ -9875,7 +9875,7 @@
         <p:spPr>
           <a:xfrm>
             <a:off x="7799832" y="1801368"/>
-            <a:ext cx="3145536" cy="758952"/>
+            <a:ext cx="3145536" cy="640080"/>
           </a:xfrm>
           <a:prstGeom prst="rect">
             <a:avLst/>
@@ -9915,7 +9915,7 @@
         </p:nvSpPr>
         <p:spPr>
           <a:xfrm>
-            <a:off x="7635240" y="2788920"/>
+            <a:off x="7635240" y="2670048"/>
             <a:ext cx="3474720" cy="1536192"/>
           </a:xfrm>
           <a:prstGeom prst="roundRect">
@@ -9942,7 +9942,7 @@
         </p:nvSpPr>
         <p:spPr>
           <a:xfrm>
-            <a:off x="7799832" y="2935224"/>
+            <a:off x="7799832" y="2816352"/>
             <a:ext cx="3145536" cy="256032"/>
           </a:xfrm>
           <a:prstGeom prst="rect">
@@ -9981,7 +9981,7 @@
         </p:nvSpPr>
         <p:spPr>
           <a:xfrm>
-            <a:off x="7818120" y="3300984"/>
+            <a:off x="7818120" y="3182112"/>
             <a:ext cx="3090672" cy="877824"/>
           </a:xfrm>
           <a:prstGeom prst="rect">
@@ -10039,12 +10039,12 @@
         </p:nvSpPr>
         <p:spPr>
           <a:xfrm>
-            <a:off x="7635240" y="4498848"/>
-            <a:ext cx="3474720" cy="1143000"/>
+            <a:off x="7635240" y="4343400"/>
+            <a:ext cx="3474720" cy="1255471"/>
           </a:xfrm>
           <a:prstGeom prst="roundRect">
             <a:avLst>
-              <a:gd name="adj" fmla="val 9600"/>
+              <a:gd name="adj" fmla="val 8740"/>
             </a:avLst>
           </a:prstGeom>
           <a:solidFill>
@@ -10066,7 +10066,7 @@
         </p:nvSpPr>
         <p:spPr>
           <a:xfrm>
-            <a:off x="7799832" y="4645152"/>
+            <a:off x="7799832" y="4489704"/>
             <a:ext cx="3145536" cy="256032"/>
           </a:xfrm>
           <a:prstGeom prst="rect">
@@ -10105,8 +10105,8 @@
         </p:nvSpPr>
         <p:spPr>
           <a:xfrm>
-            <a:off x="7799832" y="4974336"/>
-            <a:ext cx="3145536" cy="576072"/>
+            <a:off x="7799832" y="4818888"/>
+            <a:ext cx="3145536" cy="688543"/>
           </a:xfrm>
           <a:prstGeom prst="rect">
             <a:avLst/>
@@ -10132,7 +10132,7 @@
                 <a:ea typeface="Aptos" pitchFamily="34" charset="-122"/>
                 <a:cs typeface="Aptos" pitchFamily="34" charset="-120"/>
               </a:rPr>
-              <a:t>Identify what could go wrong, who could be affected, what safeguards are needed, and what evidence should be reviewed.</a:t>
+              <a:t>Identify what could go wrong, who could be affected, what safeguards are needed, and what evidence should be reviewed before use.</a:t>
             </a:r>
             <a:endParaRPr lang="en-US" sz="1320" dirty="0"/>
           </a:p>
@@ -10593,7 +10593,7 @@
                 <a:ea typeface="Aptos" pitchFamily="34" charset="-122"/>
                 <a:cs typeface="Aptos" pitchFamily="34" charset="-120"/>
               </a:rPr>
-              <a:t>Level: intermediate/practitioner Primary track: Analytics and Modeling Track Appears in tracks: analytics-and-modeling,.</a:t>
+              <a:t>Level: intermediate/practitioner Primary track: Analytics and Modeling Track Appears in tracks: analytics-and-modeling, governance-and-security, epidemiology, policy, communications</a:t>
             </a:r>
             <a:endParaRPr lang="en-US" sz="1320" dirty="0"/>
           </a:p>
@@ -11103,11 +11103,11 @@
         <p:spPr>
           <a:xfrm>
             <a:off x="7635240" y="1325880"/>
-            <a:ext cx="3474720" cy="1325880"/>
+            <a:ext cx="3474720" cy="1207008"/>
           </a:xfrm>
           <a:prstGeom prst="roundRect">
             <a:avLst>
-              <a:gd name="adj" fmla="val 8276"/>
+              <a:gd name="adj" fmla="val 9091"/>
             </a:avLst>
           </a:prstGeom>
           <a:solidFill>
@@ -11169,7 +11169,7 @@
         <p:spPr>
           <a:xfrm>
             <a:off x="7799832" y="1801368"/>
-            <a:ext cx="3145536" cy="758952"/>
+            <a:ext cx="3145536" cy="640080"/>
           </a:xfrm>
           <a:prstGeom prst="rect">
             <a:avLst/>
@@ -11209,12 +11209,12 @@
         </p:nvSpPr>
         <p:spPr>
           <a:xfrm>
-            <a:off x="7635240" y="2788920"/>
-            <a:ext cx="3474720" cy="1536192"/>
+            <a:off x="7635240" y="2670048"/>
+            <a:ext cx="3474720" cy="1377086"/>
           </a:xfrm>
           <a:prstGeom prst="roundRect">
             <a:avLst>
-              <a:gd name="adj" fmla="val 7143"/>
+              <a:gd name="adj" fmla="val 7968"/>
             </a:avLst>
           </a:prstGeom>
           <a:solidFill>
@@ -11236,7 +11236,7 @@
         </p:nvSpPr>
         <p:spPr>
           <a:xfrm>
-            <a:off x="7799832" y="2935224"/>
+            <a:off x="7799832" y="2816352"/>
             <a:ext cx="3145536" cy="256032"/>
           </a:xfrm>
           <a:prstGeom prst="rect">
@@ -11275,8 +11275,8 @@
         </p:nvSpPr>
         <p:spPr>
           <a:xfrm>
-            <a:off x="7818120" y="3300984"/>
-            <a:ext cx="3090672" cy="877824"/>
+            <a:off x="7818120" y="3182112"/>
+            <a:ext cx="3090672" cy="718718"/>
           </a:xfrm>
           <a:prstGeom prst="rect">
             <a:avLst/>
@@ -11333,12 +11333,12 @@
         </p:nvSpPr>
         <p:spPr>
           <a:xfrm>
-            <a:off x="7635240" y="4498848"/>
-            <a:ext cx="3474720" cy="1143000"/>
+            <a:off x="7635240" y="4184294"/>
+            <a:ext cx="3474720" cy="1466698"/>
           </a:xfrm>
           <a:prstGeom prst="roundRect">
             <a:avLst>
-              <a:gd name="adj" fmla="val 9600"/>
+              <a:gd name="adj" fmla="val 7481"/>
             </a:avLst>
           </a:prstGeom>
           <a:solidFill>
@@ -11360,7 +11360,7 @@
         </p:nvSpPr>
         <p:spPr>
           <a:xfrm>
-            <a:off x="7799832" y="4645152"/>
+            <a:off x="7799832" y="4330598"/>
             <a:ext cx="3145536" cy="256032"/>
           </a:xfrm>
           <a:prstGeom prst="rect">
@@ -11399,8 +11399,8 @@
         </p:nvSpPr>
         <p:spPr>
           <a:xfrm>
-            <a:off x="7799832" y="4974336"/>
-            <a:ext cx="3145536" cy="576072"/>
+            <a:off x="7799832" y="4659782"/>
+            <a:ext cx="3145536" cy="899770"/>
           </a:xfrm>
           <a:prstGeom prst="rect">
             <a:avLst/>
@@ -11426,7 +11426,7 @@
                 <a:ea typeface="Aptos" pitchFamily="34" charset="-122"/>
                 <a:cs typeface="Aptos" pitchFamily="34" charset="-120"/>
               </a:rPr>
-              <a:t>Use the assignment to test whether you can explain the concept, apply it to a realistic public health situation, and.</a:t>
+              <a:t>Use the assignment to test whether you can explain the concept, apply it to a realistic public health situation, and identify what would need review before the work moves forward.</a:t>
             </a:r>
             <a:endParaRPr lang="en-US" sz="1320" dirty="0"/>
           </a:p>
@@ -11795,11 +11795,11 @@
         <p:spPr>
           <a:xfrm>
             <a:off x="7635240" y="1325880"/>
-            <a:ext cx="3474720" cy="1325880"/>
+            <a:ext cx="3474720" cy="1207008"/>
           </a:xfrm>
           <a:prstGeom prst="roundRect">
             <a:avLst>
-              <a:gd name="adj" fmla="val 8276"/>
+              <a:gd name="adj" fmla="val 9091"/>
             </a:avLst>
           </a:prstGeom>
           <a:solidFill>
@@ -11861,7 +11861,7 @@
         <p:spPr>
           <a:xfrm>
             <a:off x="7799832" y="1801368"/>
-            <a:ext cx="3145536" cy="758952"/>
+            <a:ext cx="3145536" cy="640080"/>
           </a:xfrm>
           <a:prstGeom prst="rect">
             <a:avLst/>
@@ -11901,12 +11901,12 @@
         </p:nvSpPr>
         <p:spPr>
           <a:xfrm>
-            <a:off x="7635240" y="2788920"/>
-            <a:ext cx="3474720" cy="1536192"/>
+            <a:off x="7635240" y="2670048"/>
+            <a:ext cx="3474720" cy="1377086"/>
           </a:xfrm>
           <a:prstGeom prst="roundRect">
             <a:avLst>
-              <a:gd name="adj" fmla="val 7143"/>
+              <a:gd name="adj" fmla="val 7968"/>
             </a:avLst>
           </a:prstGeom>
           <a:solidFill>
@@ -11928,7 +11928,7 @@
         </p:nvSpPr>
         <p:spPr>
           <a:xfrm>
-            <a:off x="7799832" y="2935224"/>
+            <a:off x="7799832" y="2816352"/>
             <a:ext cx="3145536" cy="256032"/>
           </a:xfrm>
           <a:prstGeom prst="rect">
@@ -11967,8 +11967,8 @@
         </p:nvSpPr>
         <p:spPr>
           <a:xfrm>
-            <a:off x="7818120" y="3300984"/>
-            <a:ext cx="3090672" cy="877824"/>
+            <a:off x="7818120" y="3182112"/>
+            <a:ext cx="3090672" cy="718718"/>
           </a:xfrm>
           <a:prstGeom prst="rect">
             <a:avLst/>
@@ -12042,12 +12042,12 @@
         </p:nvSpPr>
         <p:spPr>
           <a:xfrm>
-            <a:off x="7635240" y="4498848"/>
-            <a:ext cx="3474720" cy="1143000"/>
+            <a:off x="7635240" y="4184294"/>
+            <a:ext cx="3474720" cy="1466698"/>
           </a:xfrm>
           <a:prstGeom prst="roundRect">
             <a:avLst>
-              <a:gd name="adj" fmla="val 9600"/>
+              <a:gd name="adj" fmla="val 7481"/>
             </a:avLst>
           </a:prstGeom>
           <a:solidFill>
@@ -12069,7 +12069,7 @@
         </p:nvSpPr>
         <p:spPr>
           <a:xfrm>
-            <a:off x="7799832" y="4645152"/>
+            <a:off x="7799832" y="4330598"/>
             <a:ext cx="3145536" cy="256032"/>
           </a:xfrm>
           <a:prstGeom prst="rect">
@@ -12108,8 +12108,8 @@
         </p:nvSpPr>
         <p:spPr>
           <a:xfrm>
-            <a:off x="7799832" y="4974336"/>
-            <a:ext cx="3145536" cy="576072"/>
+            <a:off x="7799832" y="4659782"/>
+            <a:ext cx="3145536" cy="899770"/>
           </a:xfrm>
           <a:prstGeom prst="rect">
             <a:avLst/>
@@ -12135,7 +12135,7 @@
                 <a:ea typeface="Aptos" pitchFamily="34" charset="-122"/>
                 <a:cs typeface="Aptos" pitchFamily="34" charset="-120"/>
               </a:rPr>
-              <a:t>Use the assignment to test whether you can explain the concept, apply it to a realistic public health situation, and.</a:t>
+              <a:t>Use the assignment to test whether you can explain the concept, apply it to a realistic public health situation, and identify what would need review before the work moves forward.</a:t>
             </a:r>
             <a:endParaRPr lang="en-US" sz="1320" dirty="0"/>
           </a:p>
@@ -12504,11 +12504,11 @@
         <p:spPr>
           <a:xfrm>
             <a:off x="7635240" y="1325880"/>
-            <a:ext cx="3474720" cy="1325880"/>
+            <a:ext cx="3474720" cy="1207008"/>
           </a:xfrm>
           <a:prstGeom prst="roundRect">
             <a:avLst>
-              <a:gd name="adj" fmla="val 8276"/>
+              <a:gd name="adj" fmla="val 9091"/>
             </a:avLst>
           </a:prstGeom>
           <a:solidFill>
@@ -12570,7 +12570,7 @@
         <p:spPr>
           <a:xfrm>
             <a:off x="7799832" y="1801368"/>
-            <a:ext cx="3145536" cy="758952"/>
+            <a:ext cx="3145536" cy="640080"/>
           </a:xfrm>
           <a:prstGeom prst="rect">
             <a:avLst/>
@@ -12610,7 +12610,7 @@
         </p:nvSpPr>
         <p:spPr>
           <a:xfrm>
-            <a:off x="7635240" y="2788920"/>
+            <a:off x="7635240" y="2670048"/>
             <a:ext cx="3474720" cy="1536192"/>
           </a:xfrm>
           <a:prstGeom prst="roundRect">
@@ -12637,7 +12637,7 @@
         </p:nvSpPr>
         <p:spPr>
           <a:xfrm>
-            <a:off x="7799832" y="2935224"/>
+            <a:off x="7799832" y="2816352"/>
             <a:ext cx="3145536" cy="256032"/>
           </a:xfrm>
           <a:prstGeom prst="rect">
@@ -12676,7 +12676,7 @@
         </p:nvSpPr>
         <p:spPr>
           <a:xfrm>
-            <a:off x="7818120" y="3300984"/>
+            <a:off x="7818120" y="3182112"/>
             <a:ext cx="3090672" cy="877824"/>
           </a:xfrm>
           <a:prstGeom prst="rect">
@@ -12751,12 +12751,12 @@
         </p:nvSpPr>
         <p:spPr>
           <a:xfrm>
-            <a:off x="7635240" y="4498848"/>
-            <a:ext cx="3474720" cy="1143000"/>
+            <a:off x="7635240" y="4343400"/>
+            <a:ext cx="3474720" cy="1255471"/>
           </a:xfrm>
           <a:prstGeom prst="roundRect">
             <a:avLst>
-              <a:gd name="adj" fmla="val 9600"/>
+              <a:gd name="adj" fmla="val 8740"/>
             </a:avLst>
           </a:prstGeom>
           <a:solidFill>
@@ -12778,7 +12778,7 @@
         </p:nvSpPr>
         <p:spPr>
           <a:xfrm>
-            <a:off x="7799832" y="4645152"/>
+            <a:off x="7799832" y="4489704"/>
             <a:ext cx="3145536" cy="256032"/>
           </a:xfrm>
           <a:prstGeom prst="rect">
@@ -12817,8 +12817,8 @@
         </p:nvSpPr>
         <p:spPr>
           <a:xfrm>
-            <a:off x="7799832" y="4974336"/>
-            <a:ext cx="3145536" cy="576072"/>
+            <a:off x="7799832" y="4818888"/>
+            <a:ext cx="3145536" cy="688543"/>
           </a:xfrm>
           <a:prstGeom prst="rect">
             <a:avLst/>
@@ -12844,7 +12844,7 @@
                 <a:ea typeface="Aptos" pitchFamily="34" charset="-122"/>
                 <a:cs typeface="Aptos" pitchFamily="34" charset="-120"/>
               </a:rPr>
-              <a:t>Identify what could go wrong, who could be affected, what safeguards are needed, and what evidence should be reviewed.</a:t>
+              <a:t>Identify what could go wrong, who could be affected, what safeguards are needed, and what evidence should be reviewed before use.</a:t>
             </a:r>
             <a:endParaRPr lang="en-US" sz="1320" dirty="0"/>
           </a:p>
@@ -13179,11 +13179,11 @@
         <p:spPr>
           <a:xfrm>
             <a:off x="7635240" y="1325880"/>
-            <a:ext cx="3474720" cy="1325880"/>
+            <a:ext cx="3474720" cy="1207008"/>
           </a:xfrm>
           <a:prstGeom prst="roundRect">
             <a:avLst>
-              <a:gd name="adj" fmla="val 8276"/>
+              <a:gd name="adj" fmla="val 9091"/>
             </a:avLst>
           </a:prstGeom>
           <a:solidFill>
@@ -13245,7 +13245,7 @@
         <p:spPr>
           <a:xfrm>
             <a:off x="7799832" y="1801368"/>
-            <a:ext cx="3145536" cy="758952"/>
+            <a:ext cx="3145536" cy="640080"/>
           </a:xfrm>
           <a:prstGeom prst="rect">
             <a:avLst/>
@@ -13271,7 +13271,7 @@
                 <a:ea typeface="Aptos" pitchFamily="34" charset="-122"/>
                 <a:cs typeface="Aptos" pitchFamily="34" charset="-120"/>
               </a:rPr>
-              <a:t>Relevant public health program SOPs, data governance documentation, and implementation plans</a:t>
+              <a:t>Relevant public health program SOPs, data governance documentation, and implementation.</a:t>
             </a:r>
             <a:endParaRPr lang="en-US" sz="1320" dirty="0"/>
           </a:p>
@@ -13285,7 +13285,7 @@
         </p:nvSpPr>
         <p:spPr>
           <a:xfrm>
-            <a:off x="7635240" y="2788920"/>
+            <a:off x="7635240" y="2670048"/>
             <a:ext cx="3474720" cy="1536192"/>
           </a:xfrm>
           <a:prstGeom prst="roundRect">
@@ -13312,7 +13312,7 @@
         </p:nvSpPr>
         <p:spPr>
           <a:xfrm>
-            <a:off x="7799832" y="2935224"/>
+            <a:off x="7799832" y="2816352"/>
             <a:ext cx="3145536" cy="256032"/>
           </a:xfrm>
           <a:prstGeom prst="rect">
@@ -13351,7 +13351,7 @@
         </p:nvSpPr>
         <p:spPr>
           <a:xfrm>
-            <a:off x="7818120" y="3300984"/>
+            <a:off x="7818120" y="3182112"/>
             <a:ext cx="3090672" cy="877824"/>
           </a:xfrm>
           <a:prstGeom prst="rect">
@@ -13392,12 +13392,12 @@
         </p:nvSpPr>
         <p:spPr>
           <a:xfrm>
-            <a:off x="7635240" y="4498848"/>
-            <a:ext cx="3474720" cy="1143000"/>
+            <a:off x="7635240" y="4343400"/>
+            <a:ext cx="3474720" cy="1255471"/>
           </a:xfrm>
           <a:prstGeom prst="roundRect">
             <a:avLst>
-              <a:gd name="adj" fmla="val 9600"/>
+              <a:gd name="adj" fmla="val 8740"/>
             </a:avLst>
           </a:prstGeom>
           <a:solidFill>
@@ -13419,7 +13419,7 @@
         </p:nvSpPr>
         <p:spPr>
           <a:xfrm>
-            <a:off x="7799832" y="4645152"/>
+            <a:off x="7799832" y="4489704"/>
             <a:ext cx="3145536" cy="256032"/>
           </a:xfrm>
           <a:prstGeom prst="rect">
@@ -13458,8 +13458,8 @@
         </p:nvSpPr>
         <p:spPr>
           <a:xfrm>
-            <a:off x="7799832" y="4974336"/>
-            <a:ext cx="3145536" cy="576072"/>
+            <a:off x="7799832" y="4818888"/>
+            <a:ext cx="3145536" cy="688543"/>
           </a:xfrm>
           <a:prstGeom prst="rect">
             <a:avLst/>
@@ -13485,7 +13485,7 @@
                 <a:ea typeface="Aptos" pitchFamily="34" charset="-122"/>
                 <a:cs typeface="Aptos" pitchFamily="34" charset="-120"/>
               </a:rPr>
-              <a:t>Identify what could go wrong, who could be affected, what safeguards are needed, and what evidence should be reviewed.</a:t>
+              <a:t>Identify what could go wrong, who could be affected, what safeguards are needed, and what evidence should be reviewed before use.</a:t>
             </a:r>
             <a:endParaRPr lang="en-US" sz="1320" dirty="0"/>
           </a:p>
@@ -13963,7 +13963,7 @@
                 <a:ea typeface="Aptos" pitchFamily="34" charset="-122"/>
                 <a:cs typeface="Aptos" pitchFamily="34" charset="-120"/>
               </a:rPr>
-              <a:t>Use the related plays to identify decisions, participants, timing, approvals, and documentation needed for responsible.</a:t>
+              <a:t>Use the related plays to identify decisions, participants, timing, approvals, and documentation needed for responsible implementation.</a:t>
             </a:r>
             <a:endParaRPr lang="en-US" sz="1320" dirty="0"/>
           </a:p>
@@ -14582,7 +14582,7 @@
                 <a:ea typeface="Aptos" pitchFamily="34" charset="-122"/>
                 <a:cs typeface="Aptos" pitchFamily="34" charset="-120"/>
               </a:rPr>
-              <a:t>Use linked tools when your department needs a structured worksheet, template, checklist, review process, or.</a:t>
+              <a:t>Use linked tools when your department needs a structured worksheet, template, checklist, review process, or documentation artifact.</a:t>
             </a:r>
             <a:endParaRPr lang="en-US" sz="1320" dirty="0"/>
           </a:p>
@@ -15092,11 +15092,11 @@
         <p:spPr>
           <a:xfrm>
             <a:off x="7635240" y="1325880"/>
-            <a:ext cx="3474720" cy="1325880"/>
+            <a:ext cx="3474720" cy="1207008"/>
           </a:xfrm>
           <a:prstGeom prst="roundRect">
             <a:avLst>
-              <a:gd name="adj" fmla="val 8276"/>
+              <a:gd name="adj" fmla="val 9091"/>
             </a:avLst>
           </a:prstGeom>
           <a:solidFill>
@@ -15158,7 +15158,7 @@
         <p:spPr>
           <a:xfrm>
             <a:off x="7799832" y="1801368"/>
-            <a:ext cx="3145536" cy="758952"/>
+            <a:ext cx="3145536" cy="640080"/>
           </a:xfrm>
           <a:prstGeom prst="rect">
             <a:avLst/>
@@ -15198,12 +15198,12 @@
         </p:nvSpPr>
         <p:spPr>
           <a:xfrm>
-            <a:off x="7635240" y="2788920"/>
-            <a:ext cx="3474720" cy="1536192"/>
+            <a:off x="7635240" y="2670048"/>
+            <a:ext cx="3474720" cy="1377086"/>
           </a:xfrm>
           <a:prstGeom prst="roundRect">
             <a:avLst>
-              <a:gd name="adj" fmla="val 7143"/>
+              <a:gd name="adj" fmla="val 7968"/>
             </a:avLst>
           </a:prstGeom>
           <a:solidFill>
@@ -15225,7 +15225,7 @@
         </p:nvSpPr>
         <p:spPr>
           <a:xfrm>
-            <a:off x="7799832" y="2935224"/>
+            <a:off x="7799832" y="2816352"/>
             <a:ext cx="3145536" cy="256032"/>
           </a:xfrm>
           <a:prstGeom prst="rect">
@@ -15264,8 +15264,8 @@
         </p:nvSpPr>
         <p:spPr>
           <a:xfrm>
-            <a:off x="7818120" y="3300984"/>
-            <a:ext cx="3090672" cy="877824"/>
+            <a:off x="7818120" y="3182112"/>
+            <a:ext cx="3090672" cy="718718"/>
           </a:xfrm>
           <a:prstGeom prst="rect">
             <a:avLst/>
@@ -15322,12 +15322,12 @@
         </p:nvSpPr>
         <p:spPr>
           <a:xfrm>
-            <a:off x="7635240" y="4498848"/>
-            <a:ext cx="3474720" cy="1143000"/>
+            <a:off x="7635240" y="4184294"/>
+            <a:ext cx="3474720" cy="1466698"/>
           </a:xfrm>
           <a:prstGeom prst="roundRect">
             <a:avLst>
-              <a:gd name="adj" fmla="val 9600"/>
+              <a:gd name="adj" fmla="val 7481"/>
             </a:avLst>
           </a:prstGeom>
           <a:solidFill>
@@ -15349,7 +15349,7 @@
         </p:nvSpPr>
         <p:spPr>
           <a:xfrm>
-            <a:off x="7799832" y="4645152"/>
+            <a:off x="7799832" y="4330598"/>
             <a:ext cx="3145536" cy="256032"/>
           </a:xfrm>
           <a:prstGeom prst="rect">
@@ -15388,8 +15388,8 @@
         </p:nvSpPr>
         <p:spPr>
           <a:xfrm>
-            <a:off x="7799832" y="4974336"/>
-            <a:ext cx="3145536" cy="576072"/>
+            <a:off x="7799832" y="4659782"/>
+            <a:ext cx="3145536" cy="899770"/>
           </a:xfrm>
           <a:prstGeom prst="rect">
             <a:avLst/>
@@ -15415,7 +15415,7 @@
                 <a:ea typeface="Aptos" pitchFamily="34" charset="-122"/>
                 <a:cs typeface="Aptos" pitchFamily="34" charset="-120"/>
               </a:rPr>
-              <a:t>Use the assignment to test whether you can explain the concept, apply it to a realistic public health situation, and.</a:t>
+              <a:t>Use the assignment to test whether you can explain the concept, apply it to a realistic public health situation, and identify what would need review before the work moves forward.</a:t>
             </a:r>
             <a:endParaRPr lang="en-US" sz="1320" dirty="0"/>
           </a:p>
@@ -15784,11 +15784,11 @@
         <p:spPr>
           <a:xfrm>
             <a:off x="7635240" y="1325880"/>
-            <a:ext cx="3474720" cy="1325880"/>
+            <a:ext cx="3474720" cy="1255471"/>
           </a:xfrm>
           <a:prstGeom prst="roundRect">
             <a:avLst>
-              <a:gd name="adj" fmla="val 8276"/>
+              <a:gd name="adj" fmla="val 8740"/>
             </a:avLst>
           </a:prstGeom>
           <a:solidFill>
@@ -15850,7 +15850,7 @@
         <p:spPr>
           <a:xfrm>
             <a:off x="7799832" y="1801368"/>
-            <a:ext cx="3145536" cy="758952"/>
+            <a:ext cx="3145536" cy="688543"/>
           </a:xfrm>
           <a:prstGeom prst="rect">
             <a:avLst/>
@@ -15890,7 +15890,7 @@
         </p:nvSpPr>
         <p:spPr>
           <a:xfrm>
-            <a:off x="7635240" y="2788920"/>
+            <a:off x="7635240" y="2718511"/>
             <a:ext cx="3474720" cy="1536192"/>
           </a:xfrm>
           <a:prstGeom prst="roundRect">
@@ -15917,8 +15917,8 @@
         </p:nvSpPr>
         <p:spPr>
           <a:xfrm>
-            <a:off x="7799832" y="2935224"/>
-            <a:ext cx="3145536" cy="256032"/>
+            <a:off x="7799832" y="2846527"/>
+            <a:ext cx="3145536" cy="237744"/>
           </a:xfrm>
           <a:prstGeom prst="rect">
             <a:avLst/>
@@ -15934,7 +15934,7 @@
               <a:buNone/>
             </a:pPr>
             <a:r>
-              <a:rPr lang="en-US" sz="1300" b="1" dirty="0">
+              <a:rPr lang="en-US" sz="1250" b="1" dirty="0">
                 <a:solidFill>
                   <a:srgbClr val="0068B7"/>
                 </a:solidFill>
@@ -15942,101 +15942,317 @@
                 <a:ea typeface="Aptos" pitchFamily="34" charset="-122"/>
                 <a:cs typeface="Aptos" pitchFamily="34" charset="-120"/>
               </a:rPr>
-              <a:t>Concept checkpoints</a:t>
-            </a:r>
-            <a:endParaRPr lang="en-US" sz="1300" dirty="0"/>
-          </a:p>
-        </p:txBody>
-      </p:sp>
-      <p:sp>
-        <p:nvSpPr>
-          <p:cNvPr id="15" name="Text 13"/>
-          <p:cNvSpPr/>
-          <p:nvPr/>
-        </p:nvSpPr>
-        <p:spPr>
-          <a:xfrm>
-            <a:off x="7818120" y="3300984"/>
-            <a:ext cx="3090672" cy="877824"/>
-          </a:xfrm>
-          <a:prstGeom prst="rect">
-            <a:avLst/>
-          </a:prstGeom>
-          <a:noFill/>
-          <a:ln/>
-        </p:spPr>
-        <p:txBody>
-          <a:bodyPr wrap="square" lIns="508" tIns="508" rIns="508" bIns="508" rtlCol="0" anchor="t">
+              <a:t>Risk control loop</a:t>
+            </a:r>
+            <a:endParaRPr lang="en-US" sz="1250" dirty="0"/>
+          </a:p>
+        </p:txBody>
+      </p:sp>
+      <p:sp>
+        <p:nvSpPr>
+          <p:cNvPr id="15" name="Shape 13"/>
+          <p:cNvSpPr/>
+          <p:nvPr/>
+        </p:nvSpPr>
+        <p:spPr>
+          <a:xfrm>
+            <a:off x="8763000" y="3399739"/>
+            <a:ext cx="164592" cy="0"/>
+          </a:xfrm>
+          <a:prstGeom prst="line">
+            <a:avLst/>
+          </a:prstGeom>
+          <a:noFill/>
+          <a:ln w="15240">
+            <a:solidFill>
+              <a:srgbClr val="8ABBD8"/>
+            </a:solidFill>
+            <a:prstDash val="solid"/>
+          </a:ln>
+        </p:spPr>
+      </p:sp>
+      <p:sp>
+        <p:nvSpPr>
+          <p:cNvPr id="16" name="Shape 14"/>
+          <p:cNvSpPr/>
+          <p:nvPr/>
+        </p:nvSpPr>
+        <p:spPr>
+          <a:xfrm>
+            <a:off x="7872984" y="3248863"/>
+            <a:ext cx="890016" cy="301752"/>
+          </a:xfrm>
+          <a:prstGeom prst="roundRect">
+            <a:avLst>
+              <a:gd name="adj" fmla="val 24242"/>
+            </a:avLst>
+          </a:prstGeom>
+          <a:solidFill>
+            <a:srgbClr val="0068B7"/>
+          </a:solidFill>
+          <a:ln w="12700">
+            <a:solidFill>
+              <a:srgbClr val="0068B7"/>
+            </a:solidFill>
+            <a:prstDash val="solid"/>
+          </a:ln>
+        </p:spPr>
+      </p:sp>
+      <p:sp>
+        <p:nvSpPr>
+          <p:cNvPr id="17" name="Text 15"/>
+          <p:cNvSpPr/>
+          <p:nvPr/>
+        </p:nvSpPr>
+        <p:spPr>
+          <a:xfrm>
+            <a:off x="7909560" y="3322015"/>
+            <a:ext cx="816864" cy="146304"/>
+          </a:xfrm>
+          <a:prstGeom prst="rect">
+            <a:avLst/>
+          </a:prstGeom>
+          <a:noFill/>
+          <a:ln/>
+        </p:spPr>
+        <p:txBody>
+          <a:bodyPr wrap="square" lIns="0" tIns="0" rIns="0" bIns="0" rtlCol="0" anchor="ctr">
             <a:normAutofit/>
           </a:bodyPr>
           <a:lstStyle/>
           <a:p>
-            <a:pPr indent="0" marL="0">
-              <a:buNone/>
-            </a:pPr>
-            <a:r>
-              <a:rPr lang="en-US" sz="1220" dirty="0">
-                <a:solidFill>
-                  <a:srgbClr val="17364A"/>
-                </a:solidFill>
-                <a:latin typeface="Aptos" pitchFamily="34" charset="0"/>
-                <a:ea typeface="Aptos" pitchFamily="34" charset="-122"/>
-                <a:cs typeface="Aptos" pitchFamily="34" charset="-120"/>
-              </a:rPr>
-              <a:t>Equity evaluation examines whether an AI model performs.</a:t>
-            </a:r>
-            <a:endParaRPr lang="en-US" sz="1220" dirty="0"/>
-          </a:p>
-          <a:p>
-            <a:pPr indent="0" marL="0">
-              <a:buNone/>
-            </a:pPr>
-            <a:r>
-              <a:rPr lang="en-US" sz="1220" dirty="0">
-                <a:solidFill>
-                  <a:srgbClr val="17364A"/>
-                </a:solidFill>
-                <a:latin typeface="Aptos" pitchFamily="34" charset="0"/>
-                <a:ea typeface="Aptos" pitchFamily="34" charset="-122"/>
-                <a:cs typeface="Aptos" pitchFamily="34" charset="-120"/>
-              </a:rPr>
-              <a:t>Public health agencies have a responsibility to evaluate not only.</a:t>
-            </a:r>
-            <a:endParaRPr lang="en-US" sz="1220" dirty="0"/>
-          </a:p>
-          <a:p>
-            <a:pPr indent="0" marL="0">
-              <a:buNone/>
-            </a:pPr>
-            <a:r>
-              <a:rPr lang="en-US" sz="1220" dirty="0">
-                <a:solidFill>
-                  <a:srgbClr val="17364A"/>
-                </a:solidFill>
-                <a:latin typeface="Aptos" pitchFamily="34" charset="0"/>
-                <a:ea typeface="Aptos" pitchFamily="34" charset="-122"/>
-                <a:cs typeface="Aptos" pitchFamily="34" charset="-120"/>
-              </a:rPr>
-              <a:t>This is especially important when AI is used to prioritize cases,.</a:t>
-            </a:r>
-            <a:endParaRPr lang="en-US" sz="1220" dirty="0"/>
-          </a:p>
-        </p:txBody>
-      </p:sp>
-      <p:sp>
-        <p:nvSpPr>
-          <p:cNvPr id="16" name="Shape 14"/>
-          <p:cNvSpPr/>
-          <p:nvPr/>
-        </p:nvSpPr>
-        <p:spPr>
-          <a:xfrm>
-            <a:off x="7635240" y="4498848"/>
-            <a:ext cx="3474720" cy="1143000"/>
+            <a:pPr algn="ctr" indent="0" marL="0">
+              <a:buNone/>
+            </a:pPr>
+            <a:r>
+              <a:rPr lang="en-US" sz="880" b="1" dirty="0">
+                <a:solidFill>
+                  <a:srgbClr val="FFFFFF"/>
+                </a:solidFill>
+                <a:latin typeface="Aptos" pitchFamily="34" charset="0"/>
+                <a:ea typeface="Aptos" pitchFamily="34" charset="-122"/>
+                <a:cs typeface="Aptos" pitchFamily="34" charset="-120"/>
+              </a:rPr>
+              <a:t>Identify</a:t>
+            </a:r>
+            <a:endParaRPr lang="en-US" sz="880" dirty="0"/>
+          </a:p>
+        </p:txBody>
+      </p:sp>
+      <p:sp>
+        <p:nvSpPr>
+          <p:cNvPr id="18" name="Shape 16"/>
+          <p:cNvSpPr/>
+          <p:nvPr/>
+        </p:nvSpPr>
+        <p:spPr>
+          <a:xfrm>
+            <a:off x="9817608" y="3399739"/>
+            <a:ext cx="164592" cy="0"/>
+          </a:xfrm>
+          <a:prstGeom prst="line">
+            <a:avLst/>
+          </a:prstGeom>
+          <a:noFill/>
+          <a:ln w="15240">
+            <a:solidFill>
+              <a:srgbClr val="8ABBD8"/>
+            </a:solidFill>
+            <a:prstDash val="solid"/>
+          </a:ln>
+        </p:spPr>
+      </p:sp>
+      <p:sp>
+        <p:nvSpPr>
+          <p:cNvPr id="19" name="Shape 17"/>
+          <p:cNvSpPr/>
+          <p:nvPr/>
+        </p:nvSpPr>
+        <p:spPr>
+          <a:xfrm>
+            <a:off x="8927592" y="3248863"/>
+            <a:ext cx="890016" cy="301752"/>
           </a:xfrm>
           <a:prstGeom prst="roundRect">
             <a:avLst>
-              <a:gd name="adj" fmla="val 9600"/>
+              <a:gd name="adj" fmla="val 24242"/>
+            </a:avLst>
+          </a:prstGeom>
+          <a:solidFill>
+            <a:srgbClr val="2F8A28"/>
+          </a:solidFill>
+          <a:ln w="12700">
+            <a:solidFill>
+              <a:srgbClr val="2F8A28"/>
+            </a:solidFill>
+            <a:prstDash val="solid"/>
+          </a:ln>
+        </p:spPr>
+      </p:sp>
+      <p:sp>
+        <p:nvSpPr>
+          <p:cNvPr id="20" name="Text 18"/>
+          <p:cNvSpPr/>
+          <p:nvPr/>
+        </p:nvSpPr>
+        <p:spPr>
+          <a:xfrm>
+            <a:off x="8964168" y="3322015"/>
+            <a:ext cx="816864" cy="146304"/>
+          </a:xfrm>
+          <a:prstGeom prst="rect">
+            <a:avLst/>
+          </a:prstGeom>
+          <a:noFill/>
+          <a:ln/>
+        </p:spPr>
+        <p:txBody>
+          <a:bodyPr wrap="square" lIns="0" tIns="0" rIns="0" bIns="0" rtlCol="0" anchor="ctr">
+            <a:normAutofit/>
+          </a:bodyPr>
+          <a:lstStyle/>
+          <a:p>
+            <a:pPr algn="ctr" indent="0" marL="0">
+              <a:buNone/>
+            </a:pPr>
+            <a:r>
+              <a:rPr lang="en-US" sz="880" b="1" dirty="0">
+                <a:solidFill>
+                  <a:srgbClr val="FFFFFF"/>
+                </a:solidFill>
+                <a:latin typeface="Aptos" pitchFamily="34" charset="0"/>
+                <a:ea typeface="Aptos" pitchFamily="34" charset="-122"/>
+                <a:cs typeface="Aptos" pitchFamily="34" charset="-120"/>
+              </a:rPr>
+              <a:t>Control</a:t>
+            </a:r>
+            <a:endParaRPr lang="en-US" sz="880" dirty="0"/>
+          </a:p>
+        </p:txBody>
+      </p:sp>
+      <p:sp>
+        <p:nvSpPr>
+          <p:cNvPr id="21" name="Shape 19"/>
+          <p:cNvSpPr/>
+          <p:nvPr/>
+        </p:nvSpPr>
+        <p:spPr>
+          <a:xfrm>
+            <a:off x="9982200" y="3248863"/>
+            <a:ext cx="890016" cy="301752"/>
+          </a:xfrm>
+          <a:prstGeom prst="roundRect">
+            <a:avLst>
+              <a:gd name="adj" fmla="val 24242"/>
+            </a:avLst>
+          </a:prstGeom>
+          <a:solidFill>
+            <a:srgbClr val="6A4CA3"/>
+          </a:solidFill>
+          <a:ln w="12700">
+            <a:solidFill>
+              <a:srgbClr val="6A4CA3"/>
+            </a:solidFill>
+            <a:prstDash val="solid"/>
+          </a:ln>
+        </p:spPr>
+      </p:sp>
+      <p:sp>
+        <p:nvSpPr>
+          <p:cNvPr id="22" name="Text 20"/>
+          <p:cNvSpPr/>
+          <p:nvPr/>
+        </p:nvSpPr>
+        <p:spPr>
+          <a:xfrm>
+            <a:off x="10018776" y="3322015"/>
+            <a:ext cx="816864" cy="146304"/>
+          </a:xfrm>
+          <a:prstGeom prst="rect">
+            <a:avLst/>
+          </a:prstGeom>
+          <a:noFill/>
+          <a:ln/>
+        </p:spPr>
+        <p:txBody>
+          <a:bodyPr wrap="square" lIns="0" tIns="0" rIns="0" bIns="0" rtlCol="0" anchor="ctr">
+            <a:normAutofit/>
+          </a:bodyPr>
+          <a:lstStyle/>
+          <a:p>
+            <a:pPr algn="ctr" indent="0" marL="0">
+              <a:buNone/>
+            </a:pPr>
+            <a:r>
+              <a:rPr lang="en-US" sz="880" b="1" dirty="0">
+                <a:solidFill>
+                  <a:srgbClr val="FFFFFF"/>
+                </a:solidFill>
+                <a:latin typeface="Aptos" pitchFamily="34" charset="0"/>
+                <a:ea typeface="Aptos" pitchFamily="34" charset="-122"/>
+                <a:cs typeface="Aptos" pitchFamily="34" charset="-120"/>
+              </a:rPr>
+              <a:t>Monitor</a:t>
+            </a:r>
+            <a:endParaRPr lang="en-US" sz="880" dirty="0"/>
+          </a:p>
+        </p:txBody>
+      </p:sp>
+      <p:sp>
+        <p:nvSpPr>
+          <p:cNvPr id="23" name="Text 21"/>
+          <p:cNvSpPr/>
+          <p:nvPr/>
+        </p:nvSpPr>
+        <p:spPr>
+          <a:xfrm>
+            <a:off x="7854696" y="3742639"/>
+            <a:ext cx="3035808" cy="365760"/>
+          </a:xfrm>
+          <a:prstGeom prst="rect">
+            <a:avLst/>
+          </a:prstGeom>
+          <a:noFill/>
+          <a:ln/>
+        </p:spPr>
+        <p:txBody>
+          <a:bodyPr wrap="square" lIns="254" tIns="254" rIns="254" bIns="254" rtlCol="0" anchor="t">
+            <a:normAutofit/>
+          </a:bodyPr>
+          <a:lstStyle/>
+          <a:p>
+            <a:pPr indent="0" marL="0">
+              <a:buNone/>
+            </a:pPr>
+            <a:r>
+              <a:rPr lang="en-US" sz="1120" dirty="0">
+                <a:solidFill>
+                  <a:srgbClr val="17364A"/>
+                </a:solidFill>
+                <a:latin typeface="Aptos" pitchFamily="34" charset="0"/>
+                <a:ea typeface="Aptos" pitchFamily="34" charset="-122"/>
+                <a:cs typeface="Aptos" pitchFamily="34" charset="-120"/>
+              </a:rPr>
+              <a:t>Responsible use depends on finding risks early, applying safeguards, and watching for drift or harm over time.</a:t>
+            </a:r>
+            <a:endParaRPr lang="en-US" sz="1120" dirty="0"/>
+          </a:p>
+        </p:txBody>
+      </p:sp>
+      <p:sp>
+        <p:nvSpPr>
+          <p:cNvPr id="24" name="Shape 22"/>
+          <p:cNvSpPr/>
+          <p:nvPr/>
+        </p:nvSpPr>
+        <p:spPr>
+          <a:xfrm>
+            <a:off x="7635240" y="4391863"/>
+            <a:ext cx="3474720" cy="1255471"/>
+          </a:xfrm>
+          <a:prstGeom prst="roundRect">
+            <a:avLst>
+              <a:gd name="adj" fmla="val 8740"/>
             </a:avLst>
           </a:prstGeom>
           <a:solidFill>
@@ -16052,13 +16268,13 @@
       </p:sp>
       <p:sp>
         <p:nvSpPr>
-          <p:cNvPr id="17" name="Text 15"/>
-          <p:cNvSpPr/>
-          <p:nvPr/>
-        </p:nvSpPr>
-        <p:spPr>
-          <a:xfrm>
-            <a:off x="7799832" y="4645152"/>
+          <p:cNvPr id="25" name="Text 23"/>
+          <p:cNvSpPr/>
+          <p:nvPr/>
+        </p:nvSpPr>
+        <p:spPr>
+          <a:xfrm>
+            <a:off x="7799832" y="4538167"/>
             <a:ext cx="3145536" cy="256032"/>
           </a:xfrm>
           <a:prstGeom prst="rect">
@@ -16091,14 +16307,14 @@
       </p:sp>
       <p:sp>
         <p:nvSpPr>
-          <p:cNvPr id="18" name="Text 16"/>
-          <p:cNvSpPr/>
-          <p:nvPr/>
-        </p:nvSpPr>
-        <p:spPr>
-          <a:xfrm>
-            <a:off x="7799832" y="4974336"/>
-            <a:ext cx="3145536" cy="576072"/>
+          <p:cNvPr id="26" name="Text 24"/>
+          <p:cNvSpPr/>
+          <p:nvPr/>
+        </p:nvSpPr>
+        <p:spPr>
+          <a:xfrm>
+            <a:off x="7799832" y="4867351"/>
+            <a:ext cx="3145536" cy="688543"/>
           </a:xfrm>
           <a:prstGeom prst="rect">
             <a:avLst/>
@@ -16124,7 +16340,7 @@
                 <a:ea typeface="Aptos" pitchFamily="34" charset="-122"/>
                 <a:cs typeface="Aptos" pitchFamily="34" charset="-120"/>
               </a:rPr>
-              <a:t>Identify what could go wrong, who could be affected, what safeguards are needed, and what evidence should be reviewed.</a:t>
+              <a:t>Identify what could go wrong, who could be affected, what safeguards are needed, and what evidence should be reviewed before use.</a:t>
             </a:r>
             <a:endParaRPr lang="en-US" sz="1320" dirty="0"/>
           </a:p>
@@ -16493,11 +16709,11 @@
         <p:spPr>
           <a:xfrm>
             <a:off x="7635240" y="1325880"/>
-            <a:ext cx="3474720" cy="1325880"/>
+            <a:ext cx="3474720" cy="1207008"/>
           </a:xfrm>
           <a:prstGeom prst="roundRect">
             <a:avLst>
-              <a:gd name="adj" fmla="val 8276"/>
+              <a:gd name="adj" fmla="val 9091"/>
             </a:avLst>
           </a:prstGeom>
           <a:solidFill>
@@ -16559,7 +16775,7 @@
         <p:spPr>
           <a:xfrm>
             <a:off x="7799832" y="1801368"/>
-            <a:ext cx="3145536" cy="758952"/>
+            <a:ext cx="3145536" cy="640080"/>
           </a:xfrm>
           <a:prstGeom prst="rect">
             <a:avLst/>
@@ -16585,7 +16801,7 @@
                 <a:ea typeface="Aptos" pitchFamily="34" charset="-122"/>
                 <a:cs typeface="Aptos" pitchFamily="34" charset="-120"/>
               </a:rPr>
-              <a:t>This module provides national-level training guidance for public health agencies and partners.</a:t>
+              <a:t>This module provides national-level training guidance for public health agencies and.</a:t>
             </a:r>
             <a:endParaRPr lang="en-US" sz="1320" dirty="0"/>
           </a:p>
@@ -16599,12 +16815,12 @@
         </p:nvSpPr>
         <p:spPr>
           <a:xfrm>
-            <a:off x="7635240" y="2788920"/>
-            <a:ext cx="3474720" cy="1536192"/>
+            <a:off x="7635240" y="2670048"/>
+            <a:ext cx="3474720" cy="1377086"/>
           </a:xfrm>
           <a:prstGeom prst="roundRect">
             <a:avLst>
-              <a:gd name="adj" fmla="val 7143"/>
+              <a:gd name="adj" fmla="val 7968"/>
             </a:avLst>
           </a:prstGeom>
           <a:solidFill>
@@ -16626,8 +16842,8 @@
         </p:nvSpPr>
         <p:spPr>
           <a:xfrm>
-            <a:off x="7799832" y="2935224"/>
-            <a:ext cx="3145536" cy="256032"/>
+            <a:off x="7799832" y="2798064"/>
+            <a:ext cx="3145536" cy="237744"/>
           </a:xfrm>
           <a:prstGeom prst="rect">
             <a:avLst/>
@@ -16643,7 +16859,7 @@
               <a:buNone/>
             </a:pPr>
             <a:r>
-              <a:rPr lang="en-US" sz="1300" b="1" dirty="0">
+              <a:rPr lang="en-US" sz="1250" b="1" dirty="0">
                 <a:solidFill>
                   <a:srgbClr val="0068B7"/>
                 </a:solidFill>
@@ -16651,101 +16867,317 @@
                 <a:ea typeface="Aptos" pitchFamily="34" charset="-122"/>
                 <a:cs typeface="Aptos" pitchFamily="34" charset="-120"/>
               </a:rPr>
-              <a:t>Concept checkpoints</a:t>
-            </a:r>
-            <a:endParaRPr lang="en-US" sz="1300" dirty="0"/>
-          </a:p>
-        </p:txBody>
-      </p:sp>
-      <p:sp>
-        <p:nvSpPr>
-          <p:cNvPr id="15" name="Text 13"/>
-          <p:cNvSpPr/>
-          <p:nvPr/>
-        </p:nvSpPr>
-        <p:spPr>
-          <a:xfrm>
-            <a:off x="7818120" y="3300984"/>
-            <a:ext cx="3090672" cy="877824"/>
-          </a:xfrm>
-          <a:prstGeom prst="rect">
-            <a:avLst/>
-          </a:prstGeom>
-          <a:noFill/>
-          <a:ln/>
-        </p:spPr>
-        <p:txBody>
-          <a:bodyPr wrap="square" lIns="508" tIns="508" rIns="508" bIns="508" rtlCol="0" anchor="t">
+              <a:t>Governance pathway</a:t>
+            </a:r>
+            <a:endParaRPr lang="en-US" sz="1250" dirty="0"/>
+          </a:p>
+        </p:txBody>
+      </p:sp>
+      <p:sp>
+        <p:nvSpPr>
+          <p:cNvPr id="15" name="Shape 13"/>
+          <p:cNvSpPr/>
+          <p:nvPr/>
+        </p:nvSpPr>
+        <p:spPr>
+          <a:xfrm>
+            <a:off x="8763000" y="3351276"/>
+            <a:ext cx="164592" cy="0"/>
+          </a:xfrm>
+          <a:prstGeom prst="line">
+            <a:avLst/>
+          </a:prstGeom>
+          <a:noFill/>
+          <a:ln w="15240">
+            <a:solidFill>
+              <a:srgbClr val="8ABBD8"/>
+            </a:solidFill>
+            <a:prstDash val="solid"/>
+          </a:ln>
+        </p:spPr>
+      </p:sp>
+      <p:sp>
+        <p:nvSpPr>
+          <p:cNvPr id="16" name="Shape 14"/>
+          <p:cNvSpPr/>
+          <p:nvPr/>
+        </p:nvSpPr>
+        <p:spPr>
+          <a:xfrm>
+            <a:off x="7872984" y="3200400"/>
+            <a:ext cx="890016" cy="301752"/>
+          </a:xfrm>
+          <a:prstGeom prst="roundRect">
+            <a:avLst>
+              <a:gd name="adj" fmla="val 24242"/>
+            </a:avLst>
+          </a:prstGeom>
+          <a:solidFill>
+            <a:srgbClr val="0068B7"/>
+          </a:solidFill>
+          <a:ln w="12700">
+            <a:solidFill>
+              <a:srgbClr val="0068B7"/>
+            </a:solidFill>
+            <a:prstDash val="solid"/>
+          </a:ln>
+        </p:spPr>
+      </p:sp>
+      <p:sp>
+        <p:nvSpPr>
+          <p:cNvPr id="17" name="Text 15"/>
+          <p:cNvSpPr/>
+          <p:nvPr/>
+        </p:nvSpPr>
+        <p:spPr>
+          <a:xfrm>
+            <a:off x="7909560" y="3273552"/>
+            <a:ext cx="816864" cy="146304"/>
+          </a:xfrm>
+          <a:prstGeom prst="rect">
+            <a:avLst/>
+          </a:prstGeom>
+          <a:noFill/>
+          <a:ln/>
+        </p:spPr>
+        <p:txBody>
+          <a:bodyPr wrap="square" lIns="0" tIns="0" rIns="0" bIns="0" rtlCol="0" anchor="ctr">
             <a:normAutofit/>
           </a:bodyPr>
           <a:lstStyle/>
           <a:p>
-            <a:pPr indent="0" marL="0">
-              <a:buNone/>
-            </a:pPr>
-            <a:r>
-              <a:rPr lang="en-US" sz="1220" dirty="0">
-                <a:solidFill>
-                  <a:srgbClr val="17364A"/>
-                </a:solidFill>
-                <a:latin typeface="Aptos" pitchFamily="34" charset="0"/>
-                <a:ea typeface="Aptos" pitchFamily="34" charset="-122"/>
-                <a:cs typeface="Aptos" pitchFamily="34" charset="-120"/>
-              </a:rPr>
-              <a:t>It is not legal advice and does not replace review by agency legal.</a:t>
-            </a:r>
-            <a:endParaRPr lang="en-US" sz="1220" dirty="0"/>
-          </a:p>
-          <a:p>
-            <a:pPr indent="0" marL="0">
-              <a:buNone/>
-            </a:pPr>
-            <a:r>
-              <a:rPr lang="en-US" sz="1220" dirty="0">
-                <a:solidFill>
-                  <a:srgbClr val="17364A"/>
-                </a:solidFill>
-                <a:latin typeface="Aptos" pitchFamily="34" charset="0"/>
-                <a:ea typeface="Aptos" pitchFamily="34" charset="-122"/>
-                <a:cs typeface="Aptos" pitchFamily="34" charset="-120"/>
-              </a:rPr>
-              <a:t>Requirements may vary by state, locality, territory, Tribe,.</a:t>
-            </a:r>
-            <a:endParaRPr lang="en-US" sz="1220" dirty="0"/>
-          </a:p>
-          <a:p>
-            <a:pPr indent="0" marL="0">
-              <a:buNone/>
-            </a:pPr>
-            <a:r>
-              <a:rPr lang="en-US" sz="1220" dirty="0">
-                <a:solidFill>
-                  <a:srgbClr val="17364A"/>
-                </a:solidFill>
-                <a:latin typeface="Aptos" pitchFamily="34" charset="0"/>
-                <a:ea typeface="Aptos" pitchFamily="34" charset="-122"/>
-                <a:cs typeface="Aptos" pitchFamily="34" charset="-120"/>
-              </a:rPr>
-              <a:t>Learners should use this module to identify the issues that.</a:t>
-            </a:r>
-            <a:endParaRPr lang="en-US" sz="1220" dirty="0"/>
-          </a:p>
-        </p:txBody>
-      </p:sp>
-      <p:sp>
-        <p:nvSpPr>
-          <p:cNvPr id="16" name="Shape 14"/>
-          <p:cNvSpPr/>
-          <p:nvPr/>
-        </p:nvSpPr>
-        <p:spPr>
-          <a:xfrm>
-            <a:off x="7635240" y="4498848"/>
-            <a:ext cx="3474720" cy="1143000"/>
+            <a:pPr algn="ctr" indent="0" marL="0">
+              <a:buNone/>
+            </a:pPr>
+            <a:r>
+              <a:rPr lang="en-US" sz="880" b="1" dirty="0">
+                <a:solidFill>
+                  <a:srgbClr val="FFFFFF"/>
+                </a:solidFill>
+                <a:latin typeface="Aptos" pitchFamily="34" charset="0"/>
+                <a:ea typeface="Aptos" pitchFamily="34" charset="-122"/>
+                <a:cs typeface="Aptos" pitchFamily="34" charset="-120"/>
+              </a:rPr>
+              <a:t>Submit</a:t>
+            </a:r>
+            <a:endParaRPr lang="en-US" sz="880" dirty="0"/>
+          </a:p>
+        </p:txBody>
+      </p:sp>
+      <p:sp>
+        <p:nvSpPr>
+          <p:cNvPr id="18" name="Shape 16"/>
+          <p:cNvSpPr/>
+          <p:nvPr/>
+        </p:nvSpPr>
+        <p:spPr>
+          <a:xfrm>
+            <a:off x="9817608" y="3351276"/>
+            <a:ext cx="164592" cy="0"/>
+          </a:xfrm>
+          <a:prstGeom prst="line">
+            <a:avLst/>
+          </a:prstGeom>
+          <a:noFill/>
+          <a:ln w="15240">
+            <a:solidFill>
+              <a:srgbClr val="8ABBD8"/>
+            </a:solidFill>
+            <a:prstDash val="solid"/>
+          </a:ln>
+        </p:spPr>
+      </p:sp>
+      <p:sp>
+        <p:nvSpPr>
+          <p:cNvPr id="19" name="Shape 17"/>
+          <p:cNvSpPr/>
+          <p:nvPr/>
+        </p:nvSpPr>
+        <p:spPr>
+          <a:xfrm>
+            <a:off x="8927592" y="3200400"/>
+            <a:ext cx="890016" cy="301752"/>
           </a:xfrm>
           <a:prstGeom prst="roundRect">
             <a:avLst>
-              <a:gd name="adj" fmla="val 9600"/>
+              <a:gd name="adj" fmla="val 24242"/>
+            </a:avLst>
+          </a:prstGeom>
+          <a:solidFill>
+            <a:srgbClr val="2F8A28"/>
+          </a:solidFill>
+          <a:ln w="12700">
+            <a:solidFill>
+              <a:srgbClr val="2F8A28"/>
+            </a:solidFill>
+            <a:prstDash val="solid"/>
+          </a:ln>
+        </p:spPr>
+      </p:sp>
+      <p:sp>
+        <p:nvSpPr>
+          <p:cNvPr id="20" name="Text 18"/>
+          <p:cNvSpPr/>
+          <p:nvPr/>
+        </p:nvSpPr>
+        <p:spPr>
+          <a:xfrm>
+            <a:off x="8964168" y="3273552"/>
+            <a:ext cx="816864" cy="146304"/>
+          </a:xfrm>
+          <a:prstGeom prst="rect">
+            <a:avLst/>
+          </a:prstGeom>
+          <a:noFill/>
+          <a:ln/>
+        </p:spPr>
+        <p:txBody>
+          <a:bodyPr wrap="square" lIns="0" tIns="0" rIns="0" bIns="0" rtlCol="0" anchor="ctr">
+            <a:normAutofit/>
+          </a:bodyPr>
+          <a:lstStyle/>
+          <a:p>
+            <a:pPr algn="ctr" indent="0" marL="0">
+              <a:buNone/>
+            </a:pPr>
+            <a:r>
+              <a:rPr lang="en-US" sz="880" b="1" dirty="0">
+                <a:solidFill>
+                  <a:srgbClr val="FFFFFF"/>
+                </a:solidFill>
+                <a:latin typeface="Aptos" pitchFamily="34" charset="0"/>
+                <a:ea typeface="Aptos" pitchFamily="34" charset="-122"/>
+                <a:cs typeface="Aptos" pitchFamily="34" charset="-120"/>
+              </a:rPr>
+              <a:t>Review</a:t>
+            </a:r>
+            <a:endParaRPr lang="en-US" sz="880" dirty="0"/>
+          </a:p>
+        </p:txBody>
+      </p:sp>
+      <p:sp>
+        <p:nvSpPr>
+          <p:cNvPr id="21" name="Shape 19"/>
+          <p:cNvSpPr/>
+          <p:nvPr/>
+        </p:nvSpPr>
+        <p:spPr>
+          <a:xfrm>
+            <a:off x="9982200" y="3200400"/>
+            <a:ext cx="890016" cy="301752"/>
+          </a:xfrm>
+          <a:prstGeom prst="roundRect">
+            <a:avLst>
+              <a:gd name="adj" fmla="val 24242"/>
+            </a:avLst>
+          </a:prstGeom>
+          <a:solidFill>
+            <a:srgbClr val="6A4CA3"/>
+          </a:solidFill>
+          <a:ln w="12700">
+            <a:solidFill>
+              <a:srgbClr val="6A4CA3"/>
+            </a:solidFill>
+            <a:prstDash val="solid"/>
+          </a:ln>
+        </p:spPr>
+      </p:sp>
+      <p:sp>
+        <p:nvSpPr>
+          <p:cNvPr id="22" name="Text 20"/>
+          <p:cNvSpPr/>
+          <p:nvPr/>
+        </p:nvSpPr>
+        <p:spPr>
+          <a:xfrm>
+            <a:off x="10018776" y="3273552"/>
+            <a:ext cx="816864" cy="146304"/>
+          </a:xfrm>
+          <a:prstGeom prst="rect">
+            <a:avLst/>
+          </a:prstGeom>
+          <a:noFill/>
+          <a:ln/>
+        </p:spPr>
+        <p:txBody>
+          <a:bodyPr wrap="square" lIns="0" tIns="0" rIns="0" bIns="0" rtlCol="0" anchor="ctr">
+            <a:normAutofit/>
+          </a:bodyPr>
+          <a:lstStyle/>
+          <a:p>
+            <a:pPr algn="ctr" indent="0" marL="0">
+              <a:buNone/>
+            </a:pPr>
+            <a:r>
+              <a:rPr lang="en-US" sz="880" b="1" dirty="0">
+                <a:solidFill>
+                  <a:srgbClr val="FFFFFF"/>
+                </a:solidFill>
+                <a:latin typeface="Aptos" pitchFamily="34" charset="0"/>
+                <a:ea typeface="Aptos" pitchFamily="34" charset="-122"/>
+                <a:cs typeface="Aptos" pitchFamily="34" charset="-120"/>
+              </a:rPr>
+              <a:t>Oversee</a:t>
+            </a:r>
+            <a:endParaRPr lang="en-US" sz="880" dirty="0"/>
+          </a:p>
+        </p:txBody>
+      </p:sp>
+      <p:sp>
+        <p:nvSpPr>
+          <p:cNvPr id="23" name="Text 21"/>
+          <p:cNvSpPr/>
+          <p:nvPr/>
+        </p:nvSpPr>
+        <p:spPr>
+          <a:xfrm>
+            <a:off x="7854696" y="3694176"/>
+            <a:ext cx="3035808" cy="206654"/>
+          </a:xfrm>
+          <a:prstGeom prst="rect">
+            <a:avLst/>
+          </a:prstGeom>
+          <a:noFill/>
+          <a:ln/>
+        </p:spPr>
+        <p:txBody>
+          <a:bodyPr wrap="square" lIns="254" tIns="254" rIns="254" bIns="254" rtlCol="0" anchor="t">
+            <a:normAutofit/>
+          </a:bodyPr>
+          <a:lstStyle/>
+          <a:p>
+            <a:pPr indent="0" marL="0">
+              <a:buNone/>
+            </a:pPr>
+            <a:r>
+              <a:rPr lang="en-US" sz="1120" dirty="0">
+                <a:solidFill>
+                  <a:srgbClr val="17364A"/>
+                </a:solidFill>
+                <a:latin typeface="Aptos" pitchFamily="34" charset="0"/>
+                <a:ea typeface="Aptos" pitchFamily="34" charset="-122"/>
+                <a:cs typeface="Aptos" pitchFamily="34" charset="-120"/>
+              </a:rPr>
+              <a:t>A proposed AI use should move through documented review before it becomes an operational workflow.</a:t>
+            </a:r>
+            <a:endParaRPr lang="en-US" sz="1120" dirty="0"/>
+          </a:p>
+        </p:txBody>
+      </p:sp>
+      <p:sp>
+        <p:nvSpPr>
+          <p:cNvPr id="24" name="Shape 22"/>
+          <p:cNvSpPr/>
+          <p:nvPr/>
+        </p:nvSpPr>
+        <p:spPr>
+          <a:xfrm>
+            <a:off x="7635240" y="4184294"/>
+            <a:ext cx="3474720" cy="1466698"/>
+          </a:xfrm>
+          <a:prstGeom prst="roundRect">
+            <a:avLst>
+              <a:gd name="adj" fmla="val 7481"/>
             </a:avLst>
           </a:prstGeom>
           <a:solidFill>
@@ -16761,13 +17193,13 @@
       </p:sp>
       <p:sp>
         <p:nvSpPr>
-          <p:cNvPr id="17" name="Text 15"/>
-          <p:cNvSpPr/>
-          <p:nvPr/>
-        </p:nvSpPr>
-        <p:spPr>
-          <a:xfrm>
-            <a:off x="7799832" y="4645152"/>
+          <p:cNvPr id="25" name="Text 23"/>
+          <p:cNvSpPr/>
+          <p:nvPr/>
+        </p:nvSpPr>
+        <p:spPr>
+          <a:xfrm>
+            <a:off x="7799832" y="4330598"/>
             <a:ext cx="3145536" cy="256032"/>
           </a:xfrm>
           <a:prstGeom prst="rect">
@@ -16800,14 +17232,14 @@
       </p:sp>
       <p:sp>
         <p:nvSpPr>
-          <p:cNvPr id="18" name="Text 16"/>
-          <p:cNvSpPr/>
-          <p:nvPr/>
-        </p:nvSpPr>
-        <p:spPr>
-          <a:xfrm>
-            <a:off x="7799832" y="4974336"/>
-            <a:ext cx="3145536" cy="576072"/>
+          <p:cNvPr id="26" name="Text 24"/>
+          <p:cNvSpPr/>
+          <p:nvPr/>
+        </p:nvSpPr>
+        <p:spPr>
+          <a:xfrm>
+            <a:off x="7799832" y="4659782"/>
+            <a:ext cx="3145536" cy="899770"/>
           </a:xfrm>
           <a:prstGeom prst="rect">
             <a:avLst/>
@@ -16833,7 +17265,7 @@
                 <a:ea typeface="Aptos" pitchFamily="34" charset="-122"/>
                 <a:cs typeface="Aptos" pitchFamily="34" charset="-120"/>
               </a:rPr>
-              <a:t>Translate this concept into clear decision rights, review steps, documentation expectations, and escalation paths before.</a:t>
+              <a:t>Translate this concept into clear decision rights, review steps, documentation expectations, and escalation paths before an AI-supported workflow is approved.</a:t>
             </a:r>
             <a:endParaRPr lang="en-US" sz="1320" dirty="0"/>
           </a:p>
@@ -17202,11 +17634,11 @@
         <p:spPr>
           <a:xfrm>
             <a:off x="7635240" y="1325880"/>
-            <a:ext cx="3474720" cy="1325880"/>
+            <a:ext cx="3474720" cy="1255471"/>
           </a:xfrm>
           <a:prstGeom prst="roundRect">
             <a:avLst>
-              <a:gd name="adj" fmla="val 8276"/>
+              <a:gd name="adj" fmla="val 8740"/>
             </a:avLst>
           </a:prstGeom>
           <a:solidFill>
@@ -17268,7 +17700,7 @@
         <p:spPr>
           <a:xfrm>
             <a:off x="7799832" y="1801368"/>
-            <a:ext cx="3145536" cy="758952"/>
+            <a:ext cx="3145536" cy="688543"/>
           </a:xfrm>
           <a:prstGeom prst="rect">
             <a:avLst/>
@@ -17308,7 +17740,7 @@
         </p:nvSpPr>
         <p:spPr>
           <a:xfrm>
-            <a:off x="7635240" y="2788920"/>
+            <a:off x="7635240" y="2718511"/>
             <a:ext cx="3474720" cy="1536192"/>
           </a:xfrm>
           <a:prstGeom prst="roundRect">
@@ -17335,7 +17767,7 @@
         </p:nvSpPr>
         <p:spPr>
           <a:xfrm>
-            <a:off x="7799832" y="2935224"/>
+            <a:off x="7799832" y="2864815"/>
             <a:ext cx="3145536" cy="256032"/>
           </a:xfrm>
           <a:prstGeom prst="rect">
@@ -17374,7 +17806,7 @@
         </p:nvSpPr>
         <p:spPr>
           <a:xfrm>
-            <a:off x="7818120" y="3300984"/>
+            <a:off x="7818120" y="3230575"/>
             <a:ext cx="3090672" cy="877824"/>
           </a:xfrm>
           <a:prstGeom prst="rect">
@@ -17449,12 +17881,12 @@
         </p:nvSpPr>
         <p:spPr>
           <a:xfrm>
-            <a:off x="7635240" y="4498848"/>
-            <a:ext cx="3474720" cy="1143000"/>
+            <a:off x="7635240" y="4391863"/>
+            <a:ext cx="3474720" cy="1255471"/>
           </a:xfrm>
           <a:prstGeom prst="roundRect">
             <a:avLst>
-              <a:gd name="adj" fmla="val 9600"/>
+              <a:gd name="adj" fmla="val 8740"/>
             </a:avLst>
           </a:prstGeom>
           <a:solidFill>
@@ -17476,7 +17908,7 @@
         </p:nvSpPr>
         <p:spPr>
           <a:xfrm>
-            <a:off x="7799832" y="4645152"/>
+            <a:off x="7799832" y="4538167"/>
             <a:ext cx="3145536" cy="256032"/>
           </a:xfrm>
           <a:prstGeom prst="rect">
@@ -17515,8 +17947,8 @@
         </p:nvSpPr>
         <p:spPr>
           <a:xfrm>
-            <a:off x="7799832" y="4974336"/>
-            <a:ext cx="3145536" cy="576072"/>
+            <a:off x="7799832" y="4867351"/>
+            <a:ext cx="3145536" cy="688543"/>
           </a:xfrm>
           <a:prstGeom prst="rect">
             <a:avLst/>
@@ -17542,7 +17974,7 @@
                 <a:ea typeface="Aptos" pitchFamily="34" charset="-122"/>
                 <a:cs typeface="Aptos" pitchFamily="34" charset="-120"/>
               </a:rPr>
-              <a:t>Identify what could go wrong, who could be affected, what safeguards are needed, and what evidence should be reviewed.</a:t>
+              <a:t>Identify what could go wrong, who could be affected, what safeguards are needed, and what evidence should be reviewed before use.</a:t>
             </a:r>
             <a:endParaRPr lang="en-US" sz="1320" dirty="0"/>
           </a:p>
@@ -17911,11 +18343,11 @@
         <p:spPr>
           <a:xfrm>
             <a:off x="7635240" y="1325880"/>
-            <a:ext cx="3474720" cy="1325880"/>
+            <a:ext cx="3474720" cy="1207008"/>
           </a:xfrm>
           <a:prstGeom prst="roundRect">
             <a:avLst>
-              <a:gd name="adj" fmla="val 8276"/>
+              <a:gd name="adj" fmla="val 9091"/>
             </a:avLst>
           </a:prstGeom>
           <a:solidFill>
@@ -17977,7 +18409,7 @@
         <p:spPr>
           <a:xfrm>
             <a:off x="7799832" y="1801368"/>
-            <a:ext cx="3145536" cy="758952"/>
+            <a:ext cx="3145536" cy="640080"/>
           </a:xfrm>
           <a:prstGeom prst="rect">
             <a:avLst/>
@@ -18017,7 +18449,7 @@
         </p:nvSpPr>
         <p:spPr>
           <a:xfrm>
-            <a:off x="7635240" y="2788920"/>
+            <a:off x="7635240" y="2670048"/>
             <a:ext cx="3474720" cy="1536192"/>
           </a:xfrm>
           <a:prstGeom prst="roundRect">
@@ -18044,8 +18476,8 @@
         </p:nvSpPr>
         <p:spPr>
           <a:xfrm>
-            <a:off x="7799832" y="2935224"/>
-            <a:ext cx="3145536" cy="256032"/>
+            <a:off x="7799832" y="2798064"/>
+            <a:ext cx="3145536" cy="237744"/>
           </a:xfrm>
           <a:prstGeom prst="rect">
             <a:avLst/>
@@ -18061,7 +18493,7 @@
               <a:buNone/>
             </a:pPr>
             <a:r>
-              <a:rPr lang="en-US" sz="1300" b="1" dirty="0">
+              <a:rPr lang="en-US" sz="1250" b="1" dirty="0">
                 <a:solidFill>
                   <a:srgbClr val="0068B7"/>
                 </a:solidFill>
@@ -18069,101 +18501,317 @@
                 <a:ea typeface="Aptos" pitchFamily="34" charset="-122"/>
                 <a:cs typeface="Aptos" pitchFamily="34" charset="-120"/>
               </a:rPr>
-              <a:t>Concept checkpoints</a:t>
-            </a:r>
-            <a:endParaRPr lang="en-US" sz="1300" dirty="0"/>
-          </a:p>
-        </p:txBody>
-      </p:sp>
-      <p:sp>
-        <p:nvSpPr>
-          <p:cNvPr id="15" name="Text 13"/>
-          <p:cNvSpPr/>
-          <p:nvPr/>
-        </p:nvSpPr>
-        <p:spPr>
-          <a:xfrm>
-            <a:off x="7818120" y="3300984"/>
-            <a:ext cx="3090672" cy="877824"/>
-          </a:xfrm>
-          <a:prstGeom prst="rect">
-            <a:avLst/>
-          </a:prstGeom>
-          <a:noFill/>
-          <a:ln/>
-        </p:spPr>
-        <p:txBody>
-          <a:bodyPr wrap="square" lIns="508" tIns="508" rIns="508" bIns="508" rtlCol="0" anchor="t">
+              <a:t>Risk control loop</a:t>
+            </a:r>
+            <a:endParaRPr lang="en-US" sz="1250" dirty="0"/>
+          </a:p>
+        </p:txBody>
+      </p:sp>
+      <p:sp>
+        <p:nvSpPr>
+          <p:cNvPr id="15" name="Shape 13"/>
+          <p:cNvSpPr/>
+          <p:nvPr/>
+        </p:nvSpPr>
+        <p:spPr>
+          <a:xfrm>
+            <a:off x="8763000" y="3351276"/>
+            <a:ext cx="164592" cy="0"/>
+          </a:xfrm>
+          <a:prstGeom prst="line">
+            <a:avLst/>
+          </a:prstGeom>
+          <a:noFill/>
+          <a:ln w="15240">
+            <a:solidFill>
+              <a:srgbClr val="8ABBD8"/>
+            </a:solidFill>
+            <a:prstDash val="solid"/>
+          </a:ln>
+        </p:spPr>
+      </p:sp>
+      <p:sp>
+        <p:nvSpPr>
+          <p:cNvPr id="16" name="Shape 14"/>
+          <p:cNvSpPr/>
+          <p:nvPr/>
+        </p:nvSpPr>
+        <p:spPr>
+          <a:xfrm>
+            <a:off x="7872984" y="3200400"/>
+            <a:ext cx="890016" cy="301752"/>
+          </a:xfrm>
+          <a:prstGeom prst="roundRect">
+            <a:avLst>
+              <a:gd name="adj" fmla="val 24242"/>
+            </a:avLst>
+          </a:prstGeom>
+          <a:solidFill>
+            <a:srgbClr val="0068B7"/>
+          </a:solidFill>
+          <a:ln w="12700">
+            <a:solidFill>
+              <a:srgbClr val="0068B7"/>
+            </a:solidFill>
+            <a:prstDash val="solid"/>
+          </a:ln>
+        </p:spPr>
+      </p:sp>
+      <p:sp>
+        <p:nvSpPr>
+          <p:cNvPr id="17" name="Text 15"/>
+          <p:cNvSpPr/>
+          <p:nvPr/>
+        </p:nvSpPr>
+        <p:spPr>
+          <a:xfrm>
+            <a:off x="7909560" y="3273552"/>
+            <a:ext cx="816864" cy="146304"/>
+          </a:xfrm>
+          <a:prstGeom prst="rect">
+            <a:avLst/>
+          </a:prstGeom>
+          <a:noFill/>
+          <a:ln/>
+        </p:spPr>
+        <p:txBody>
+          <a:bodyPr wrap="square" lIns="0" tIns="0" rIns="0" bIns="0" rtlCol="0" anchor="ctr">
             <a:normAutofit/>
           </a:bodyPr>
           <a:lstStyle/>
           <a:p>
-            <a:pPr indent="0" marL="0">
-              <a:buNone/>
-            </a:pPr>
-            <a:r>
-              <a:rPr lang="en-US" sz="1220" dirty="0">
-                <a:solidFill>
-                  <a:srgbClr val="17364A"/>
-                </a:solidFill>
-                <a:latin typeface="Aptos" pitchFamily="34" charset="0"/>
-                <a:ea typeface="Aptos" pitchFamily="34" charset="-122"/>
-                <a:cs typeface="Aptos" pitchFamily="34" charset="-120"/>
-              </a:rPr>
-              <a:t>A model used for internal workload planning has different equity.</a:t>
-            </a:r>
-            <a:endParaRPr lang="en-US" sz="1220" dirty="0"/>
-          </a:p>
-          <a:p>
-            <a:pPr indent="0" marL="0">
-              <a:buNone/>
-            </a:pPr>
-            <a:r>
-              <a:rPr lang="en-US" sz="1220" dirty="0">
-                <a:solidFill>
-                  <a:srgbClr val="17364A"/>
-                </a:solidFill>
-                <a:latin typeface="Aptos" pitchFamily="34" charset="0"/>
-                <a:ea typeface="Aptos" pitchFamily="34" charset="-122"/>
-                <a:cs typeface="Aptos" pitchFamily="34" charset="-120"/>
-              </a:rPr>
-              <a:t>Evaluators should identify who is affected by the model output,.</a:t>
-            </a:r>
-            <a:endParaRPr lang="en-US" sz="1220" dirty="0"/>
-          </a:p>
-          <a:p>
-            <a:pPr indent="0" marL="0">
-              <a:buNone/>
-            </a:pPr>
-            <a:r>
-              <a:rPr lang="en-US" sz="1220" dirty="0">
-                <a:solidFill>
-                  <a:srgbClr val="17364A"/>
-                </a:solidFill>
-                <a:latin typeface="Aptos" pitchFamily="34" charset="0"/>
-                <a:ea typeface="Aptos" pitchFamily="34" charset="-122"/>
-                <a:cs typeface="Aptos" pitchFamily="34" charset="-120"/>
-              </a:rPr>
-              <a:t>Data assessment is the next step.</a:t>
-            </a:r>
-            <a:endParaRPr lang="en-US" sz="1220" dirty="0"/>
-          </a:p>
-        </p:txBody>
-      </p:sp>
-      <p:sp>
-        <p:nvSpPr>
-          <p:cNvPr id="16" name="Shape 14"/>
-          <p:cNvSpPr/>
-          <p:nvPr/>
-        </p:nvSpPr>
-        <p:spPr>
-          <a:xfrm>
-            <a:off x="7635240" y="4498848"/>
-            <a:ext cx="3474720" cy="1143000"/>
+            <a:pPr algn="ctr" indent="0" marL="0">
+              <a:buNone/>
+            </a:pPr>
+            <a:r>
+              <a:rPr lang="en-US" sz="880" b="1" dirty="0">
+                <a:solidFill>
+                  <a:srgbClr val="FFFFFF"/>
+                </a:solidFill>
+                <a:latin typeface="Aptos" pitchFamily="34" charset="0"/>
+                <a:ea typeface="Aptos" pitchFamily="34" charset="-122"/>
+                <a:cs typeface="Aptos" pitchFamily="34" charset="-120"/>
+              </a:rPr>
+              <a:t>Identify</a:t>
+            </a:r>
+            <a:endParaRPr lang="en-US" sz="880" dirty="0"/>
+          </a:p>
+        </p:txBody>
+      </p:sp>
+      <p:sp>
+        <p:nvSpPr>
+          <p:cNvPr id="18" name="Shape 16"/>
+          <p:cNvSpPr/>
+          <p:nvPr/>
+        </p:nvSpPr>
+        <p:spPr>
+          <a:xfrm>
+            <a:off x="9817608" y="3351276"/>
+            <a:ext cx="164592" cy="0"/>
+          </a:xfrm>
+          <a:prstGeom prst="line">
+            <a:avLst/>
+          </a:prstGeom>
+          <a:noFill/>
+          <a:ln w="15240">
+            <a:solidFill>
+              <a:srgbClr val="8ABBD8"/>
+            </a:solidFill>
+            <a:prstDash val="solid"/>
+          </a:ln>
+        </p:spPr>
+      </p:sp>
+      <p:sp>
+        <p:nvSpPr>
+          <p:cNvPr id="19" name="Shape 17"/>
+          <p:cNvSpPr/>
+          <p:nvPr/>
+        </p:nvSpPr>
+        <p:spPr>
+          <a:xfrm>
+            <a:off x="8927592" y="3200400"/>
+            <a:ext cx="890016" cy="301752"/>
           </a:xfrm>
           <a:prstGeom prst="roundRect">
             <a:avLst>
-              <a:gd name="adj" fmla="val 9600"/>
+              <a:gd name="adj" fmla="val 24242"/>
+            </a:avLst>
+          </a:prstGeom>
+          <a:solidFill>
+            <a:srgbClr val="2F8A28"/>
+          </a:solidFill>
+          <a:ln w="12700">
+            <a:solidFill>
+              <a:srgbClr val="2F8A28"/>
+            </a:solidFill>
+            <a:prstDash val="solid"/>
+          </a:ln>
+        </p:spPr>
+      </p:sp>
+      <p:sp>
+        <p:nvSpPr>
+          <p:cNvPr id="20" name="Text 18"/>
+          <p:cNvSpPr/>
+          <p:nvPr/>
+        </p:nvSpPr>
+        <p:spPr>
+          <a:xfrm>
+            <a:off x="8964168" y="3273552"/>
+            <a:ext cx="816864" cy="146304"/>
+          </a:xfrm>
+          <a:prstGeom prst="rect">
+            <a:avLst/>
+          </a:prstGeom>
+          <a:noFill/>
+          <a:ln/>
+        </p:spPr>
+        <p:txBody>
+          <a:bodyPr wrap="square" lIns="0" tIns="0" rIns="0" bIns="0" rtlCol="0" anchor="ctr">
+            <a:normAutofit/>
+          </a:bodyPr>
+          <a:lstStyle/>
+          <a:p>
+            <a:pPr algn="ctr" indent="0" marL="0">
+              <a:buNone/>
+            </a:pPr>
+            <a:r>
+              <a:rPr lang="en-US" sz="880" b="1" dirty="0">
+                <a:solidFill>
+                  <a:srgbClr val="FFFFFF"/>
+                </a:solidFill>
+                <a:latin typeface="Aptos" pitchFamily="34" charset="0"/>
+                <a:ea typeface="Aptos" pitchFamily="34" charset="-122"/>
+                <a:cs typeface="Aptos" pitchFamily="34" charset="-120"/>
+              </a:rPr>
+              <a:t>Control</a:t>
+            </a:r>
+            <a:endParaRPr lang="en-US" sz="880" dirty="0"/>
+          </a:p>
+        </p:txBody>
+      </p:sp>
+      <p:sp>
+        <p:nvSpPr>
+          <p:cNvPr id="21" name="Shape 19"/>
+          <p:cNvSpPr/>
+          <p:nvPr/>
+        </p:nvSpPr>
+        <p:spPr>
+          <a:xfrm>
+            <a:off x="9982200" y="3200400"/>
+            <a:ext cx="890016" cy="301752"/>
+          </a:xfrm>
+          <a:prstGeom prst="roundRect">
+            <a:avLst>
+              <a:gd name="adj" fmla="val 24242"/>
+            </a:avLst>
+          </a:prstGeom>
+          <a:solidFill>
+            <a:srgbClr val="6A4CA3"/>
+          </a:solidFill>
+          <a:ln w="12700">
+            <a:solidFill>
+              <a:srgbClr val="6A4CA3"/>
+            </a:solidFill>
+            <a:prstDash val="solid"/>
+          </a:ln>
+        </p:spPr>
+      </p:sp>
+      <p:sp>
+        <p:nvSpPr>
+          <p:cNvPr id="22" name="Text 20"/>
+          <p:cNvSpPr/>
+          <p:nvPr/>
+        </p:nvSpPr>
+        <p:spPr>
+          <a:xfrm>
+            <a:off x="10018776" y="3273552"/>
+            <a:ext cx="816864" cy="146304"/>
+          </a:xfrm>
+          <a:prstGeom prst="rect">
+            <a:avLst/>
+          </a:prstGeom>
+          <a:noFill/>
+          <a:ln/>
+        </p:spPr>
+        <p:txBody>
+          <a:bodyPr wrap="square" lIns="0" tIns="0" rIns="0" bIns="0" rtlCol="0" anchor="ctr">
+            <a:normAutofit/>
+          </a:bodyPr>
+          <a:lstStyle/>
+          <a:p>
+            <a:pPr algn="ctr" indent="0" marL="0">
+              <a:buNone/>
+            </a:pPr>
+            <a:r>
+              <a:rPr lang="en-US" sz="880" b="1" dirty="0">
+                <a:solidFill>
+                  <a:srgbClr val="FFFFFF"/>
+                </a:solidFill>
+                <a:latin typeface="Aptos" pitchFamily="34" charset="0"/>
+                <a:ea typeface="Aptos" pitchFamily="34" charset="-122"/>
+                <a:cs typeface="Aptos" pitchFamily="34" charset="-120"/>
+              </a:rPr>
+              <a:t>Monitor</a:t>
+            </a:r>
+            <a:endParaRPr lang="en-US" sz="880" dirty="0"/>
+          </a:p>
+        </p:txBody>
+      </p:sp>
+      <p:sp>
+        <p:nvSpPr>
+          <p:cNvPr id="23" name="Text 21"/>
+          <p:cNvSpPr/>
+          <p:nvPr/>
+        </p:nvSpPr>
+        <p:spPr>
+          <a:xfrm>
+            <a:off x="7854696" y="3694176"/>
+            <a:ext cx="3035808" cy="365760"/>
+          </a:xfrm>
+          <a:prstGeom prst="rect">
+            <a:avLst/>
+          </a:prstGeom>
+          <a:noFill/>
+          <a:ln/>
+        </p:spPr>
+        <p:txBody>
+          <a:bodyPr wrap="square" lIns="254" tIns="254" rIns="254" bIns="254" rtlCol="0" anchor="t">
+            <a:normAutofit/>
+          </a:bodyPr>
+          <a:lstStyle/>
+          <a:p>
+            <a:pPr indent="0" marL="0">
+              <a:buNone/>
+            </a:pPr>
+            <a:r>
+              <a:rPr lang="en-US" sz="1120" dirty="0">
+                <a:solidFill>
+                  <a:srgbClr val="17364A"/>
+                </a:solidFill>
+                <a:latin typeface="Aptos" pitchFamily="34" charset="0"/>
+                <a:ea typeface="Aptos" pitchFamily="34" charset="-122"/>
+                <a:cs typeface="Aptos" pitchFamily="34" charset="-120"/>
+              </a:rPr>
+              <a:t>Responsible use depends on finding risks early, applying safeguards, and watching for drift or harm over time.</a:t>
+            </a:r>
+            <a:endParaRPr lang="en-US" sz="1120" dirty="0"/>
+          </a:p>
+        </p:txBody>
+      </p:sp>
+      <p:sp>
+        <p:nvSpPr>
+          <p:cNvPr id="24" name="Shape 22"/>
+          <p:cNvSpPr/>
+          <p:nvPr/>
+        </p:nvSpPr>
+        <p:spPr>
+          <a:xfrm>
+            <a:off x="7635240" y="4343400"/>
+            <a:ext cx="3474720" cy="1255471"/>
+          </a:xfrm>
+          <a:prstGeom prst="roundRect">
+            <a:avLst>
+              <a:gd name="adj" fmla="val 8740"/>
             </a:avLst>
           </a:prstGeom>
           <a:solidFill>
@@ -18179,13 +18827,13 @@
       </p:sp>
       <p:sp>
         <p:nvSpPr>
-          <p:cNvPr id="17" name="Text 15"/>
-          <p:cNvSpPr/>
-          <p:nvPr/>
-        </p:nvSpPr>
-        <p:spPr>
-          <a:xfrm>
-            <a:off x="7799832" y="4645152"/>
+          <p:cNvPr id="25" name="Text 23"/>
+          <p:cNvSpPr/>
+          <p:nvPr/>
+        </p:nvSpPr>
+        <p:spPr>
+          <a:xfrm>
+            <a:off x="7799832" y="4489704"/>
             <a:ext cx="3145536" cy="256032"/>
           </a:xfrm>
           <a:prstGeom prst="rect">
@@ -18218,14 +18866,14 @@
       </p:sp>
       <p:sp>
         <p:nvSpPr>
-          <p:cNvPr id="18" name="Text 16"/>
-          <p:cNvSpPr/>
-          <p:nvPr/>
-        </p:nvSpPr>
-        <p:spPr>
-          <a:xfrm>
-            <a:off x="7799832" y="4974336"/>
-            <a:ext cx="3145536" cy="576072"/>
+          <p:cNvPr id="26" name="Text 24"/>
+          <p:cNvSpPr/>
+          <p:nvPr/>
+        </p:nvSpPr>
+        <p:spPr>
+          <a:xfrm>
+            <a:off x="7799832" y="4818888"/>
+            <a:ext cx="3145536" cy="688543"/>
           </a:xfrm>
           <a:prstGeom prst="rect">
             <a:avLst/>
@@ -18251,7 +18899,7 @@
                 <a:ea typeface="Aptos" pitchFamily="34" charset="-122"/>
                 <a:cs typeface="Aptos" pitchFamily="34" charset="-120"/>
               </a:rPr>
-              <a:t>Identify what could go wrong, who could be affected, what safeguards are needed, and what evidence should be reviewed.</a:t>
+              <a:t>Identify what could go wrong, who could be affected, what safeguards are needed, and what evidence should be reviewed before use.</a:t>
             </a:r>
             <a:endParaRPr lang="en-US" sz="1320" dirty="0"/>
           </a:p>

--- a/downloads/presentations/modules/anl-330.pptx
+++ b/downloads/presentations/modules/anl-330.pptx
@@ -3437,8 +3437,8 @@
         </p:nvSpPr>
         <p:spPr>
           <a:xfrm>
-            <a:off x="868680" y="1508760"/>
-            <a:ext cx="6309360" cy="4160520"/>
+            <a:off x="822960" y="1463040"/>
+            <a:ext cx="6565392" cy="4343400"/>
           </a:xfrm>
           <a:prstGeom prst="rect">
             <a:avLst/>
@@ -3456,7 +3456,7 @@
               <a:buNone/>
             </a:pPr>
             <a:r>
-              <a:rPr lang="en-US" sz="2100" dirty="0">
+              <a:rPr lang="en-US" sz="1920" dirty="0">
                 <a:solidFill>
                   <a:srgbClr val="003A63"/>
                 </a:solidFill>
@@ -3466,14 +3466,14 @@
               </a:rPr>
               <a:t>• Equity evaluation should lead to action.</a:t>
             </a:r>
-            <a:endParaRPr lang="en-US" sz="2100" dirty="0"/>
-          </a:p>
-          <a:p>
-            <a:pPr indent="0" marL="0">
-              <a:buNone/>
-            </a:pPr>
-            <a:r>
-              <a:rPr lang="en-US" sz="2100" dirty="0">
+            <a:endParaRPr lang="en-US" sz="1920" dirty="0"/>
+          </a:p>
+          <a:p>
+            <a:pPr indent="0" marL="0">
+              <a:buNone/>
+            </a:pPr>
+            <a:r>
+              <a:rPr lang="en-US" sz="1920" dirty="0">
                 <a:solidFill>
                   <a:srgbClr val="003A63"/>
                 </a:solidFill>
@@ -3481,16 +3481,16 @@
                 <a:ea typeface="Aptos" pitchFamily="34" charset="-122"/>
                 <a:cs typeface="Aptos" pitchFamily="34" charset="-120"/>
               </a:rPr>
-              <a:t>• Mitigations may include changing thresholds, improving data collection, adding human review,.</a:t>
-            </a:r>
-            <a:endParaRPr lang="en-US" sz="2100" dirty="0"/>
-          </a:p>
-          <a:p>
-            <a:pPr indent="0" marL="0">
-              <a:buNone/>
-            </a:pPr>
-            <a:r>
-              <a:rPr lang="en-US" sz="2100" dirty="0">
+              <a:t>• Mitigations may include changing thresholds, improving data collection,.</a:t>
+            </a:r>
+            <a:endParaRPr lang="en-US" sz="1920" dirty="0"/>
+          </a:p>
+          <a:p>
+            <a:pPr indent="0" marL="0">
+              <a:buNone/>
+            </a:pPr>
+            <a:r>
+              <a:rPr lang="en-US" sz="1920" dirty="0">
                 <a:solidFill>
                   <a:srgbClr val="003A63"/>
                 </a:solidFill>
@@ -3498,9 +3498,9 @@
                 <a:ea typeface="Aptos" pitchFamily="34" charset="-122"/>
                 <a:cs typeface="Aptos" pitchFamily="34" charset="-120"/>
               </a:rPr>
-              <a:t>• Equity monitoring should continue after launch because data patterns and workflow use can.</a:t>
-            </a:r>
-            <a:endParaRPr lang="en-US" sz="2100" dirty="0"/>
+              <a:t>• Equity monitoring should continue after launch because data patterns and.</a:t>
+            </a:r>
+            <a:endParaRPr lang="en-US" sz="1920" dirty="0"/>
           </a:p>
         </p:txBody>
       </p:sp>
@@ -3512,12 +3512,12 @@
         </p:nvSpPr>
         <p:spPr>
           <a:xfrm>
-            <a:off x="7635240" y="1325880"/>
-            <a:ext cx="3474720" cy="1207008"/>
+            <a:off x="7543800" y="1325880"/>
+            <a:ext cx="3611880" cy="1261872"/>
           </a:xfrm>
           <a:prstGeom prst="roundRect">
             <a:avLst>
-              <a:gd name="adj" fmla="val 9091"/>
+              <a:gd name="adj" fmla="val 8696"/>
             </a:avLst>
           </a:prstGeom>
           <a:solidFill>
@@ -3539,8 +3539,8 @@
         </p:nvSpPr>
         <p:spPr>
           <a:xfrm>
-            <a:off x="7799832" y="1472184"/>
-            <a:ext cx="3145536" cy="256032"/>
+            <a:off x="7708392" y="1453896"/>
+            <a:ext cx="3282696" cy="228600"/>
           </a:xfrm>
           <a:prstGeom prst="rect">
             <a:avLst/>
@@ -3556,7 +3556,7 @@
               <a:buNone/>
             </a:pPr>
             <a:r>
-              <a:rPr lang="en-US" sz="1300" b="1" dirty="0">
+              <a:rPr lang="en-US" sz="1220" b="1" dirty="0">
                 <a:solidFill>
                   <a:srgbClr val="0068B7"/>
                 </a:solidFill>
@@ -3566,7 +3566,7 @@
               </a:rPr>
               <a:t>Risk check</a:t>
             </a:r>
-            <a:endParaRPr lang="en-US" sz="1300" dirty="0"/>
+            <a:endParaRPr lang="en-US" sz="1220" dirty="0"/>
           </a:p>
         </p:txBody>
       </p:sp>
@@ -3578,8 +3578,8 @@
         </p:nvSpPr>
         <p:spPr>
           <a:xfrm>
-            <a:off x="7799832" y="1801368"/>
-            <a:ext cx="3145536" cy="640080"/>
+            <a:off x="7708392" y="1764792"/>
+            <a:ext cx="3282696" cy="749808"/>
           </a:xfrm>
           <a:prstGeom prst="rect">
             <a:avLst/>
@@ -3597,7 +3597,7 @@
               <a:buNone/>
             </a:pPr>
             <a:r>
-              <a:rPr lang="en-US" sz="1320" dirty="0">
+              <a:rPr lang="en-US" sz="1220" dirty="0">
                 <a:solidFill>
                   <a:srgbClr val="17364A"/>
                 </a:solidFill>
@@ -3607,7 +3607,7 @@
               </a:rPr>
               <a:t>Equity evaluation should lead to action.</a:t>
             </a:r>
-            <a:endParaRPr lang="en-US" sz="1320" dirty="0"/>
+            <a:endParaRPr lang="en-US" sz="1220" dirty="0"/>
           </a:p>
         </p:txBody>
       </p:sp>
@@ -3619,12 +3619,12 @@
         </p:nvSpPr>
         <p:spPr>
           <a:xfrm>
-            <a:off x="7635240" y="2670048"/>
-            <a:ext cx="3474720" cy="1536192"/>
+            <a:off x="7543800" y="2724912"/>
+            <a:ext cx="3611880" cy="1527048"/>
           </a:xfrm>
           <a:prstGeom prst="roundRect">
             <a:avLst>
-              <a:gd name="adj" fmla="val 7143"/>
+              <a:gd name="adj" fmla="val 7186"/>
             </a:avLst>
           </a:prstGeom>
           <a:solidFill>
@@ -3646,8 +3646,8 @@
         </p:nvSpPr>
         <p:spPr>
           <a:xfrm>
-            <a:off x="7799832" y="2816352"/>
-            <a:ext cx="3145536" cy="256032"/>
+            <a:off x="7708392" y="2852928"/>
+            <a:ext cx="3282696" cy="228600"/>
           </a:xfrm>
           <a:prstGeom prst="rect">
             <a:avLst/>
@@ -3663,7 +3663,7 @@
               <a:buNone/>
             </a:pPr>
             <a:r>
-              <a:rPr lang="en-US" sz="1300" b="1" dirty="0">
+              <a:rPr lang="en-US" sz="1220" b="1" dirty="0">
                 <a:solidFill>
                   <a:srgbClr val="0068B7"/>
                 </a:solidFill>
@@ -3673,7 +3673,7 @@
               </a:rPr>
               <a:t>Concept checkpoints</a:t>
             </a:r>
-            <a:endParaRPr lang="en-US" sz="1300" dirty="0"/>
+            <a:endParaRPr lang="en-US" sz="1220" dirty="0"/>
           </a:p>
         </p:txBody>
       </p:sp>
@@ -3685,8 +3685,8 @@
         </p:nvSpPr>
         <p:spPr>
           <a:xfrm>
-            <a:off x="7818120" y="3182112"/>
-            <a:ext cx="3090672" cy="877824"/>
+            <a:off x="7726680" y="3182112"/>
+            <a:ext cx="3227832" cy="960120"/>
           </a:xfrm>
           <a:prstGeom prst="rect">
             <a:avLst/>
@@ -3704,7 +3704,7 @@
               <a:buNone/>
             </a:pPr>
             <a:r>
-              <a:rPr lang="en-US" sz="1220" dirty="0">
+              <a:rPr lang="en-US" sz="1140" dirty="0">
                 <a:solidFill>
                   <a:srgbClr val="17364A"/>
                 </a:solidFill>
@@ -3714,14 +3714,14 @@
               </a:rPr>
               <a:t>Equity evaluation should lead to action.</a:t>
             </a:r>
-            <a:endParaRPr lang="en-US" sz="1220" dirty="0"/>
-          </a:p>
-          <a:p>
-            <a:pPr indent="0" marL="0">
-              <a:buNone/>
-            </a:pPr>
-            <a:r>
-              <a:rPr lang="en-US" sz="1220" dirty="0">
+            <a:endParaRPr lang="en-US" sz="1140" dirty="0"/>
+          </a:p>
+          <a:p>
+            <a:pPr indent="0" marL="0">
+              <a:buNone/>
+            </a:pPr>
+            <a:r>
+              <a:rPr lang="en-US" sz="1140" dirty="0">
                 <a:solidFill>
                   <a:srgbClr val="17364A"/>
                 </a:solidFill>
@@ -3729,16 +3729,16 @@
                 <a:ea typeface="Aptos" pitchFamily="34" charset="-122"/>
                 <a:cs typeface="Aptos" pitchFamily="34" charset="-120"/>
               </a:rPr>
-              <a:t>Mitigations may include changing thresholds, improving data.</a:t>
-            </a:r>
-            <a:endParaRPr lang="en-US" sz="1220" dirty="0"/>
-          </a:p>
-          <a:p>
-            <a:pPr indent="0" marL="0">
-              <a:buNone/>
-            </a:pPr>
-            <a:r>
-              <a:rPr lang="en-US" sz="1220" dirty="0">
+              <a:t>Mitigations may include changing thresholds,.</a:t>
+            </a:r>
+            <a:endParaRPr lang="en-US" sz="1140" dirty="0"/>
+          </a:p>
+          <a:p>
+            <a:pPr indent="0" marL="0">
+              <a:buNone/>
+            </a:pPr>
+            <a:r>
+              <a:rPr lang="en-US" sz="1140" dirty="0">
                 <a:solidFill>
                   <a:srgbClr val="17364A"/>
                 </a:solidFill>
@@ -3746,9 +3746,9 @@
                 <a:ea typeface="Aptos" pitchFamily="34" charset="-122"/>
                 <a:cs typeface="Aptos" pitchFamily="34" charset="-120"/>
               </a:rPr>
-              <a:t>Equity monitoring should continue after launch because data.</a:t>
-            </a:r>
-            <a:endParaRPr lang="en-US" sz="1220" dirty="0"/>
+              <a:t>Equity monitoring should continue after launch.</a:t>
+            </a:r>
+            <a:endParaRPr lang="en-US" sz="1140" dirty="0"/>
           </a:p>
         </p:txBody>
       </p:sp>
@@ -3760,12 +3760,12 @@
         </p:nvSpPr>
         <p:spPr>
           <a:xfrm>
-            <a:off x="7635240" y="4343400"/>
-            <a:ext cx="3474720" cy="1255471"/>
+            <a:off x="7543800" y="4389120"/>
+            <a:ext cx="3611880" cy="1261872"/>
           </a:xfrm>
           <a:prstGeom prst="roundRect">
             <a:avLst>
-              <a:gd name="adj" fmla="val 8740"/>
+              <a:gd name="adj" fmla="val 8696"/>
             </a:avLst>
           </a:prstGeom>
           <a:solidFill>
@@ -3787,8 +3787,8 @@
         </p:nvSpPr>
         <p:spPr>
           <a:xfrm>
-            <a:off x="7799832" y="4489704"/>
-            <a:ext cx="3145536" cy="256032"/>
+            <a:off x="7708392" y="4517136"/>
+            <a:ext cx="3282696" cy="228600"/>
           </a:xfrm>
           <a:prstGeom prst="rect">
             <a:avLst/>
@@ -3804,7 +3804,7 @@
               <a:buNone/>
             </a:pPr>
             <a:r>
-              <a:rPr lang="en-US" sz="1300" b="1" dirty="0">
+              <a:rPr lang="en-US" sz="1220" b="1" dirty="0">
                 <a:solidFill>
                   <a:srgbClr val="0068B7"/>
                 </a:solidFill>
@@ -3814,7 +3814,7 @@
               </a:rPr>
               <a:t>Safeguard to plan</a:t>
             </a:r>
-            <a:endParaRPr lang="en-US" sz="1300" dirty="0"/>
+            <a:endParaRPr lang="en-US" sz="1220" dirty="0"/>
           </a:p>
         </p:txBody>
       </p:sp>
@@ -3826,8 +3826,8 @@
         </p:nvSpPr>
         <p:spPr>
           <a:xfrm>
-            <a:off x="7799832" y="4818888"/>
-            <a:ext cx="3145536" cy="688543"/>
+            <a:off x="7708392" y="4828032"/>
+            <a:ext cx="3282696" cy="749808"/>
           </a:xfrm>
           <a:prstGeom prst="rect">
             <a:avLst/>
@@ -3845,7 +3845,7 @@
               <a:buNone/>
             </a:pPr>
             <a:r>
-              <a:rPr lang="en-US" sz="1320" dirty="0">
+              <a:rPr lang="en-US" sz="1220" dirty="0">
                 <a:solidFill>
                   <a:srgbClr val="17364A"/>
                 </a:solidFill>
@@ -3853,9 +3853,9 @@
                 <a:ea typeface="Aptos" pitchFamily="34" charset="-122"/>
                 <a:cs typeface="Aptos" pitchFamily="34" charset="-120"/>
               </a:rPr>
-              <a:t>Identify what could go wrong, who could be affected, what safeguards are needed, and what evidence should be reviewed before use.</a:t>
-            </a:r>
-            <a:endParaRPr lang="en-US" sz="1320" dirty="0"/>
+              <a:t>Identify what could go wrong, who could be affected, what safeguards are needed,.</a:t>
+            </a:r>
+            <a:endParaRPr lang="en-US" sz="1220" dirty="0"/>
           </a:p>
         </p:txBody>
       </p:sp>
@@ -4146,8 +4146,8 @@
         </p:nvSpPr>
         <p:spPr>
           <a:xfrm>
-            <a:off x="868680" y="1508760"/>
-            <a:ext cx="6309360" cy="4160520"/>
+            <a:off x="822960" y="1463040"/>
+            <a:ext cx="6565392" cy="4343400"/>
           </a:xfrm>
           <a:prstGeom prst="rect">
             <a:avLst/>
@@ -4165,7 +4165,7 @@
               <a:buNone/>
             </a:pPr>
             <a:r>
-              <a:rPr lang="en-US" sz="2100" dirty="0">
+              <a:rPr lang="en-US" sz="1920" dirty="0">
                 <a:solidFill>
                   <a:srgbClr val="003A63"/>
                 </a:solidFill>
@@ -4175,14 +4175,14 @@
               </a:rPr>
               <a:t>• Risks and failure modes include the following:</a:t>
             </a:r>
-            <a:endParaRPr lang="en-US" sz="2100" dirty="0"/>
-          </a:p>
-          <a:p>
-            <a:pPr indent="0" marL="0">
-              <a:buNone/>
-            </a:pPr>
-            <a:r>
-              <a:rPr lang="en-US" sz="2100" dirty="0">
+            <a:endParaRPr lang="en-US" sz="1920" dirty="0"/>
+          </a:p>
+          <a:p>
+            <a:pPr indent="0" marL="0">
+              <a:buNone/>
+            </a:pPr>
+            <a:r>
+              <a:rPr lang="en-US" sz="1920" dirty="0">
                 <a:solidFill>
                   <a:srgbClr val="003A63"/>
                 </a:solidFill>
@@ -4192,14 +4192,14 @@
               </a:rPr>
               <a:t>• Relying on average performance while ignoring subgroup harms.</a:t>
             </a:r>
-            <a:endParaRPr lang="en-US" sz="2100" dirty="0"/>
-          </a:p>
-          <a:p>
-            <a:pPr indent="0" marL="0">
-              <a:buNone/>
-            </a:pPr>
-            <a:r>
-              <a:rPr lang="en-US" sz="2100" dirty="0">
+            <a:endParaRPr lang="en-US" sz="1920" dirty="0"/>
+          </a:p>
+          <a:p>
+            <a:pPr indent="0" marL="0">
+              <a:buNone/>
+            </a:pPr>
+            <a:r>
+              <a:rPr lang="en-US" sz="1920" dirty="0">
                 <a:solidFill>
                   <a:srgbClr val="003A63"/>
                 </a:solidFill>
@@ -4209,7 +4209,7 @@
               </a:rPr>
               <a:t>• Using datasets that underrepresent communities with limited healthcare access.</a:t>
             </a:r>
-            <a:endParaRPr lang="en-US" sz="2100" dirty="0"/>
+            <a:endParaRPr lang="en-US" sz="1920" dirty="0"/>
           </a:p>
         </p:txBody>
       </p:sp>
@@ -4221,12 +4221,12 @@
         </p:nvSpPr>
         <p:spPr>
           <a:xfrm>
-            <a:off x="7635240" y="1325880"/>
-            <a:ext cx="3474720" cy="1207008"/>
+            <a:off x="7543800" y="1325880"/>
+            <a:ext cx="3611880" cy="1261872"/>
           </a:xfrm>
           <a:prstGeom prst="roundRect">
             <a:avLst>
-              <a:gd name="adj" fmla="val 9091"/>
+              <a:gd name="adj" fmla="val 8696"/>
             </a:avLst>
           </a:prstGeom>
           <a:solidFill>
@@ -4248,8 +4248,8 @@
         </p:nvSpPr>
         <p:spPr>
           <a:xfrm>
-            <a:off x="7799832" y="1472184"/>
-            <a:ext cx="3145536" cy="256032"/>
+            <a:off x="7708392" y="1453896"/>
+            <a:ext cx="3282696" cy="228600"/>
           </a:xfrm>
           <a:prstGeom prst="rect">
             <a:avLst/>
@@ -4265,7 +4265,7 @@
               <a:buNone/>
             </a:pPr>
             <a:r>
-              <a:rPr lang="en-US" sz="1300" b="1" dirty="0">
+              <a:rPr lang="en-US" sz="1220" b="1" dirty="0">
                 <a:solidFill>
                   <a:srgbClr val="0068B7"/>
                 </a:solidFill>
@@ -4275,7 +4275,7 @@
               </a:rPr>
               <a:t>Risk check</a:t>
             </a:r>
-            <a:endParaRPr lang="en-US" sz="1300" dirty="0"/>
+            <a:endParaRPr lang="en-US" sz="1220" dirty="0"/>
           </a:p>
         </p:txBody>
       </p:sp>
@@ -4287,8 +4287,8 @@
         </p:nvSpPr>
         <p:spPr>
           <a:xfrm>
-            <a:off x="7799832" y="1801368"/>
-            <a:ext cx="3145536" cy="640080"/>
+            <a:off x="7708392" y="1764792"/>
+            <a:ext cx="3282696" cy="749808"/>
           </a:xfrm>
           <a:prstGeom prst="rect">
             <a:avLst/>
@@ -4306,7 +4306,7 @@
               <a:buNone/>
             </a:pPr>
             <a:r>
-              <a:rPr lang="en-US" sz="1320" dirty="0">
+              <a:rPr lang="en-US" sz="1220" dirty="0">
                 <a:solidFill>
                   <a:srgbClr val="17364A"/>
                 </a:solidFill>
@@ -4316,7 +4316,7 @@
               </a:rPr>
               <a:t>Risks and failure modes include the following:</a:t>
             </a:r>
-            <a:endParaRPr lang="en-US" sz="1320" dirty="0"/>
+            <a:endParaRPr lang="en-US" sz="1220" dirty="0"/>
           </a:p>
         </p:txBody>
       </p:sp>
@@ -4328,12 +4328,12 @@
         </p:nvSpPr>
         <p:spPr>
           <a:xfrm>
-            <a:off x="7635240" y="2670048"/>
-            <a:ext cx="3474720" cy="1536192"/>
+            <a:off x="7543800" y="2724912"/>
+            <a:ext cx="3611880" cy="1527048"/>
           </a:xfrm>
           <a:prstGeom prst="roundRect">
             <a:avLst>
-              <a:gd name="adj" fmla="val 7143"/>
+              <a:gd name="adj" fmla="val 7186"/>
             </a:avLst>
           </a:prstGeom>
           <a:solidFill>
@@ -4355,8 +4355,8 @@
         </p:nvSpPr>
         <p:spPr>
           <a:xfrm>
-            <a:off x="7799832" y="2816352"/>
-            <a:ext cx="3145536" cy="256032"/>
+            <a:off x="7708392" y="2852928"/>
+            <a:ext cx="3282696" cy="228600"/>
           </a:xfrm>
           <a:prstGeom prst="rect">
             <a:avLst/>
@@ -4372,7 +4372,7 @@
               <a:buNone/>
             </a:pPr>
             <a:r>
-              <a:rPr lang="en-US" sz="1300" b="1" dirty="0">
+              <a:rPr lang="en-US" sz="1220" b="1" dirty="0">
                 <a:solidFill>
                   <a:srgbClr val="0068B7"/>
                 </a:solidFill>
@@ -4382,7 +4382,7 @@
               </a:rPr>
               <a:t>Concept checkpoints</a:t>
             </a:r>
-            <a:endParaRPr lang="en-US" sz="1300" dirty="0"/>
+            <a:endParaRPr lang="en-US" sz="1220" dirty="0"/>
           </a:p>
         </p:txBody>
       </p:sp>
@@ -4394,8 +4394,8 @@
         </p:nvSpPr>
         <p:spPr>
           <a:xfrm>
-            <a:off x="7818120" y="3182112"/>
-            <a:ext cx="3090672" cy="877824"/>
+            <a:off x="7726680" y="3182112"/>
+            <a:ext cx="3227832" cy="960120"/>
           </a:xfrm>
           <a:prstGeom prst="rect">
             <a:avLst/>
@@ -4413,7 +4413,7 @@
               <a:buNone/>
             </a:pPr>
             <a:r>
-              <a:rPr lang="en-US" sz="1220" dirty="0">
+              <a:rPr lang="en-US" sz="1140" dirty="0">
                 <a:solidFill>
                   <a:srgbClr val="17364A"/>
                 </a:solidFill>
@@ -4423,14 +4423,14 @@
               </a:rPr>
               <a:t>Risks and failure modes include the following:</a:t>
             </a:r>
-            <a:endParaRPr lang="en-US" sz="1220" dirty="0"/>
-          </a:p>
-          <a:p>
-            <a:pPr indent="0" marL="0">
-              <a:buNone/>
-            </a:pPr>
-            <a:r>
-              <a:rPr lang="en-US" sz="1220" dirty="0">
+            <a:endParaRPr lang="en-US" sz="1140" dirty="0"/>
+          </a:p>
+          <a:p>
+            <a:pPr indent="0" marL="0">
+              <a:buNone/>
+            </a:pPr>
+            <a:r>
+              <a:rPr lang="en-US" sz="1140" dirty="0">
                 <a:solidFill>
                   <a:srgbClr val="17364A"/>
                 </a:solidFill>
@@ -4438,16 +4438,16 @@
                 <a:ea typeface="Aptos" pitchFamily="34" charset="-122"/>
                 <a:cs typeface="Aptos" pitchFamily="34" charset="-120"/>
               </a:rPr>
-              <a:t>Relying on average performance while ignoring subgroup harms.</a:t>
-            </a:r>
-            <a:endParaRPr lang="en-US" sz="1220" dirty="0"/>
-          </a:p>
-          <a:p>
-            <a:pPr indent="0" marL="0">
-              <a:buNone/>
-            </a:pPr>
-            <a:r>
-              <a:rPr lang="en-US" sz="1220" dirty="0">
+              <a:t>Relying on average performance while ignoring.</a:t>
+            </a:r>
+            <a:endParaRPr lang="en-US" sz="1140" dirty="0"/>
+          </a:p>
+          <a:p>
+            <a:pPr indent="0" marL="0">
+              <a:buNone/>
+            </a:pPr>
+            <a:r>
+              <a:rPr lang="en-US" sz="1140" dirty="0">
                 <a:solidFill>
                   <a:srgbClr val="17364A"/>
                 </a:solidFill>
@@ -4455,9 +4455,9 @@
                 <a:ea typeface="Aptos" pitchFamily="34" charset="-122"/>
                 <a:cs typeface="Aptos" pitchFamily="34" charset="-120"/>
               </a:rPr>
-              <a:t>Using datasets that underrepresent communities with limited.</a:t>
-            </a:r>
-            <a:endParaRPr lang="en-US" sz="1220" dirty="0"/>
+              <a:t>Using datasets that underrepresent communities.</a:t>
+            </a:r>
+            <a:endParaRPr lang="en-US" sz="1140" dirty="0"/>
           </a:p>
         </p:txBody>
       </p:sp>
@@ -4469,12 +4469,12 @@
         </p:nvSpPr>
         <p:spPr>
           <a:xfrm>
-            <a:off x="7635240" y="4343400"/>
-            <a:ext cx="3474720" cy="1255471"/>
+            <a:off x="7543800" y="4389120"/>
+            <a:ext cx="3611880" cy="1261872"/>
           </a:xfrm>
           <a:prstGeom prst="roundRect">
             <a:avLst>
-              <a:gd name="adj" fmla="val 8740"/>
+              <a:gd name="adj" fmla="val 8696"/>
             </a:avLst>
           </a:prstGeom>
           <a:solidFill>
@@ -4496,8 +4496,8 @@
         </p:nvSpPr>
         <p:spPr>
           <a:xfrm>
-            <a:off x="7799832" y="4489704"/>
-            <a:ext cx="3145536" cy="256032"/>
+            <a:off x="7708392" y="4517136"/>
+            <a:ext cx="3282696" cy="228600"/>
           </a:xfrm>
           <a:prstGeom prst="rect">
             <a:avLst/>
@@ -4513,7 +4513,7 @@
               <a:buNone/>
             </a:pPr>
             <a:r>
-              <a:rPr lang="en-US" sz="1300" b="1" dirty="0">
+              <a:rPr lang="en-US" sz="1220" b="1" dirty="0">
                 <a:solidFill>
                   <a:srgbClr val="0068B7"/>
                 </a:solidFill>
@@ -4523,7 +4523,7 @@
               </a:rPr>
               <a:t>Safeguard to plan</a:t>
             </a:r>
-            <a:endParaRPr lang="en-US" sz="1300" dirty="0"/>
+            <a:endParaRPr lang="en-US" sz="1220" dirty="0"/>
           </a:p>
         </p:txBody>
       </p:sp>
@@ -4535,8 +4535,8 @@
         </p:nvSpPr>
         <p:spPr>
           <a:xfrm>
-            <a:off x="7799832" y="4818888"/>
-            <a:ext cx="3145536" cy="688543"/>
+            <a:off x="7708392" y="4828032"/>
+            <a:ext cx="3282696" cy="749808"/>
           </a:xfrm>
           <a:prstGeom prst="rect">
             <a:avLst/>
@@ -4554,7 +4554,7 @@
               <a:buNone/>
             </a:pPr>
             <a:r>
-              <a:rPr lang="en-US" sz="1320" dirty="0">
+              <a:rPr lang="en-US" sz="1220" dirty="0">
                 <a:solidFill>
                   <a:srgbClr val="17364A"/>
                 </a:solidFill>
@@ -4562,9 +4562,9 @@
                 <a:ea typeface="Aptos" pitchFamily="34" charset="-122"/>
                 <a:cs typeface="Aptos" pitchFamily="34" charset="-120"/>
               </a:rPr>
-              <a:t>Identify what could go wrong, who could be affected, what safeguards are needed, and what evidence should be reviewed before use.</a:t>
-            </a:r>
-            <a:endParaRPr lang="en-US" sz="1320" dirty="0"/>
+              <a:t>Identify what could go wrong, who could be affected, what safeguards are needed,.</a:t>
+            </a:r>
+            <a:endParaRPr lang="en-US" sz="1220" dirty="0"/>
           </a:p>
         </p:txBody>
       </p:sp>
@@ -4855,8 +4855,8 @@
         </p:nvSpPr>
         <p:spPr>
           <a:xfrm>
-            <a:off x="868680" y="1508760"/>
-            <a:ext cx="6309360" cy="4160520"/>
+            <a:off x="822960" y="1463040"/>
+            <a:ext cx="6565392" cy="4343400"/>
           </a:xfrm>
           <a:prstGeom prst="rect">
             <a:avLst/>
@@ -4874,7 +4874,7 @@
               <a:buNone/>
             </a:pPr>
             <a:r>
-              <a:rPr lang="en-US" sz="2100" dirty="0">
+              <a:rPr lang="en-US" sz="1920" dirty="0">
                 <a:solidFill>
                   <a:srgbClr val="003A63"/>
                 </a:solidFill>
@@ -4882,16 +4882,16 @@
                 <a:ea typeface="Aptos" pitchFamily="34" charset="-122"/>
                 <a:cs typeface="Aptos" pitchFamily="34" charset="-120"/>
               </a:rPr>
-              <a:t>• Treating missing data as neutral when missingness reflects structural inequities.</a:t>
-            </a:r>
-            <a:endParaRPr lang="en-US" sz="2100" dirty="0"/>
-          </a:p>
-          <a:p>
-            <a:pPr indent="0" marL="0">
-              <a:buNone/>
-            </a:pPr>
-            <a:r>
-              <a:rPr lang="en-US" sz="2100" dirty="0">
+              <a:t>• Treating missing data as neutral when missingness reflects structural.</a:t>
+            </a:r>
+            <a:endParaRPr lang="en-US" sz="1920" dirty="0"/>
+          </a:p>
+          <a:p>
+            <a:pPr indent="0" marL="0">
+              <a:buNone/>
+            </a:pPr>
+            <a:r>
+              <a:rPr lang="en-US" sz="1920" dirty="0">
                 <a:solidFill>
                   <a:srgbClr val="003A63"/>
                 </a:solidFill>
@@ -4901,14 +4901,14 @@
               </a:rPr>
               <a:t>• Using AI prioritization to allocate scarce resources without equity review.</a:t>
             </a:r>
-            <a:endParaRPr lang="en-US" sz="2100" dirty="0"/>
-          </a:p>
-          <a:p>
-            <a:pPr indent="0" marL="0">
-              <a:buNone/>
-            </a:pPr>
-            <a:r>
-              <a:rPr lang="en-US" sz="2100" dirty="0">
+            <a:endParaRPr lang="en-US" sz="1920" dirty="0"/>
+          </a:p>
+          <a:p>
+            <a:pPr indent="0" marL="0">
+              <a:buNone/>
+            </a:pPr>
+            <a:r>
+              <a:rPr lang="en-US" sz="1920" dirty="0">
                 <a:solidFill>
                   <a:srgbClr val="003A63"/>
                 </a:solidFill>
@@ -4918,7 +4918,7 @@
               </a:rPr>
               <a:t>• Failing to monitor equity impacts after deployment.</a:t>
             </a:r>
-            <a:endParaRPr lang="en-US" sz="2100" dirty="0"/>
+            <a:endParaRPr lang="en-US" sz="1920" dirty="0"/>
           </a:p>
         </p:txBody>
       </p:sp>
@@ -4930,12 +4930,12 @@
         </p:nvSpPr>
         <p:spPr>
           <a:xfrm>
-            <a:off x="7635240" y="1325880"/>
-            <a:ext cx="3474720" cy="1207008"/>
+            <a:off x="7543800" y="1325880"/>
+            <a:ext cx="3611880" cy="1261872"/>
           </a:xfrm>
           <a:prstGeom prst="roundRect">
             <a:avLst>
-              <a:gd name="adj" fmla="val 9091"/>
+              <a:gd name="adj" fmla="val 8696"/>
             </a:avLst>
           </a:prstGeom>
           <a:solidFill>
@@ -4957,8 +4957,8 @@
         </p:nvSpPr>
         <p:spPr>
           <a:xfrm>
-            <a:off x="7799832" y="1472184"/>
-            <a:ext cx="3145536" cy="256032"/>
+            <a:off x="7708392" y="1453896"/>
+            <a:ext cx="3282696" cy="228600"/>
           </a:xfrm>
           <a:prstGeom prst="rect">
             <a:avLst/>
@@ -4974,7 +4974,7 @@
               <a:buNone/>
             </a:pPr>
             <a:r>
-              <a:rPr lang="en-US" sz="1300" b="1" dirty="0">
+              <a:rPr lang="en-US" sz="1220" b="1" dirty="0">
                 <a:solidFill>
                   <a:srgbClr val="0068B7"/>
                 </a:solidFill>
@@ -4984,7 +4984,7 @@
               </a:rPr>
               <a:t>Risk check</a:t>
             </a:r>
-            <a:endParaRPr lang="en-US" sz="1300" dirty="0"/>
+            <a:endParaRPr lang="en-US" sz="1220" dirty="0"/>
           </a:p>
         </p:txBody>
       </p:sp>
@@ -4996,8 +4996,8 @@
         </p:nvSpPr>
         <p:spPr>
           <a:xfrm>
-            <a:off x="7799832" y="1801368"/>
-            <a:ext cx="3145536" cy="640080"/>
+            <a:off x="7708392" y="1764792"/>
+            <a:ext cx="3282696" cy="749808"/>
           </a:xfrm>
           <a:prstGeom prst="rect">
             <a:avLst/>
@@ -5015,7 +5015,7 @@
               <a:buNone/>
             </a:pPr>
             <a:r>
-              <a:rPr lang="en-US" sz="1320" dirty="0">
+              <a:rPr lang="en-US" sz="1220" dirty="0">
                 <a:solidFill>
                   <a:srgbClr val="17364A"/>
                 </a:solidFill>
@@ -5025,7 +5025,7 @@
               </a:rPr>
               <a:t>Treating missing data as neutral when missingness reflects structural inequities.</a:t>
             </a:r>
-            <a:endParaRPr lang="en-US" sz="1320" dirty="0"/>
+            <a:endParaRPr lang="en-US" sz="1220" dirty="0"/>
           </a:p>
         </p:txBody>
       </p:sp>
@@ -5037,12 +5037,12 @@
         </p:nvSpPr>
         <p:spPr>
           <a:xfrm>
-            <a:off x="7635240" y="2670048"/>
-            <a:ext cx="3474720" cy="1536192"/>
+            <a:off x="7543800" y="2724912"/>
+            <a:ext cx="3611880" cy="1527048"/>
           </a:xfrm>
           <a:prstGeom prst="roundRect">
             <a:avLst>
-              <a:gd name="adj" fmla="val 7143"/>
+              <a:gd name="adj" fmla="val 7186"/>
             </a:avLst>
           </a:prstGeom>
           <a:solidFill>
@@ -5064,8 +5064,8 @@
         </p:nvSpPr>
         <p:spPr>
           <a:xfrm>
-            <a:off x="7799832" y="2816352"/>
-            <a:ext cx="3145536" cy="256032"/>
+            <a:off x="7708392" y="2852928"/>
+            <a:ext cx="3282696" cy="228600"/>
           </a:xfrm>
           <a:prstGeom prst="rect">
             <a:avLst/>
@@ -5081,7 +5081,7 @@
               <a:buNone/>
             </a:pPr>
             <a:r>
-              <a:rPr lang="en-US" sz="1300" b="1" dirty="0">
+              <a:rPr lang="en-US" sz="1220" b="1" dirty="0">
                 <a:solidFill>
                   <a:srgbClr val="0068B7"/>
                 </a:solidFill>
@@ -5091,7 +5091,7 @@
               </a:rPr>
               <a:t>Concept checkpoints</a:t>
             </a:r>
-            <a:endParaRPr lang="en-US" sz="1300" dirty="0"/>
+            <a:endParaRPr lang="en-US" sz="1220" dirty="0"/>
           </a:p>
         </p:txBody>
       </p:sp>
@@ -5103,8 +5103,8 @@
         </p:nvSpPr>
         <p:spPr>
           <a:xfrm>
-            <a:off x="7818120" y="3182112"/>
-            <a:ext cx="3090672" cy="877824"/>
+            <a:off x="7726680" y="3182112"/>
+            <a:ext cx="3227832" cy="960120"/>
           </a:xfrm>
           <a:prstGeom prst="rect">
             <a:avLst/>
@@ -5122,7 +5122,7 @@
               <a:buNone/>
             </a:pPr>
             <a:r>
-              <a:rPr lang="en-US" sz="1220" dirty="0">
+              <a:rPr lang="en-US" sz="1140" dirty="0">
                 <a:solidFill>
                   <a:srgbClr val="17364A"/>
                 </a:solidFill>
@@ -5130,16 +5130,16 @@
                 <a:ea typeface="Aptos" pitchFamily="34" charset="-122"/>
                 <a:cs typeface="Aptos" pitchFamily="34" charset="-120"/>
               </a:rPr>
-              <a:t>Treating missing data as neutral when missingness reflects.</a:t>
-            </a:r>
-            <a:endParaRPr lang="en-US" sz="1220" dirty="0"/>
-          </a:p>
-          <a:p>
-            <a:pPr indent="0" marL="0">
-              <a:buNone/>
-            </a:pPr>
-            <a:r>
-              <a:rPr lang="en-US" sz="1220" dirty="0">
+              <a:t>Treating missing data as neutral when missingness.</a:t>
+            </a:r>
+            <a:endParaRPr lang="en-US" sz="1140" dirty="0"/>
+          </a:p>
+          <a:p>
+            <a:pPr indent="0" marL="0">
+              <a:buNone/>
+            </a:pPr>
+            <a:r>
+              <a:rPr lang="en-US" sz="1140" dirty="0">
                 <a:solidFill>
                   <a:srgbClr val="17364A"/>
                 </a:solidFill>
@@ -5147,16 +5147,16 @@
                 <a:ea typeface="Aptos" pitchFamily="34" charset="-122"/>
                 <a:cs typeface="Aptos" pitchFamily="34" charset="-120"/>
               </a:rPr>
-              <a:t>Using AI prioritization to allocate scarce resources without.</a:t>
-            </a:r>
-            <a:endParaRPr lang="en-US" sz="1220" dirty="0"/>
-          </a:p>
-          <a:p>
-            <a:pPr indent="0" marL="0">
-              <a:buNone/>
-            </a:pPr>
-            <a:r>
-              <a:rPr lang="en-US" sz="1220" dirty="0">
+              <a:t>Using AI prioritization to allocate scarce.</a:t>
+            </a:r>
+            <a:endParaRPr lang="en-US" sz="1140" dirty="0"/>
+          </a:p>
+          <a:p>
+            <a:pPr indent="0" marL="0">
+              <a:buNone/>
+            </a:pPr>
+            <a:r>
+              <a:rPr lang="en-US" sz="1140" dirty="0">
                 <a:solidFill>
                   <a:srgbClr val="17364A"/>
                 </a:solidFill>
@@ -5166,7 +5166,7 @@
               </a:rPr>
               <a:t>Failing to monitor equity impacts after deployment.</a:t>
             </a:r>
-            <a:endParaRPr lang="en-US" sz="1220" dirty="0"/>
+            <a:endParaRPr lang="en-US" sz="1140" dirty="0"/>
           </a:p>
         </p:txBody>
       </p:sp>
@@ -5178,12 +5178,12 @@
         </p:nvSpPr>
         <p:spPr>
           <a:xfrm>
-            <a:off x="7635240" y="4343400"/>
-            <a:ext cx="3474720" cy="1255471"/>
+            <a:off x="7543800" y="4389120"/>
+            <a:ext cx="3611880" cy="1261872"/>
           </a:xfrm>
           <a:prstGeom prst="roundRect">
             <a:avLst>
-              <a:gd name="adj" fmla="val 8740"/>
+              <a:gd name="adj" fmla="val 8696"/>
             </a:avLst>
           </a:prstGeom>
           <a:solidFill>
@@ -5205,8 +5205,8 @@
         </p:nvSpPr>
         <p:spPr>
           <a:xfrm>
-            <a:off x="7799832" y="4489704"/>
-            <a:ext cx="3145536" cy="256032"/>
+            <a:off x="7708392" y="4517136"/>
+            <a:ext cx="3282696" cy="228600"/>
           </a:xfrm>
           <a:prstGeom prst="rect">
             <a:avLst/>
@@ -5222,7 +5222,7 @@
               <a:buNone/>
             </a:pPr>
             <a:r>
-              <a:rPr lang="en-US" sz="1300" b="1" dirty="0">
+              <a:rPr lang="en-US" sz="1220" b="1" dirty="0">
                 <a:solidFill>
                   <a:srgbClr val="0068B7"/>
                 </a:solidFill>
@@ -5232,7 +5232,7 @@
               </a:rPr>
               <a:t>Safeguard to plan</a:t>
             </a:r>
-            <a:endParaRPr lang="en-US" sz="1300" dirty="0"/>
+            <a:endParaRPr lang="en-US" sz="1220" dirty="0"/>
           </a:p>
         </p:txBody>
       </p:sp>
@@ -5244,8 +5244,8 @@
         </p:nvSpPr>
         <p:spPr>
           <a:xfrm>
-            <a:off x="7799832" y="4818888"/>
-            <a:ext cx="3145536" cy="688543"/>
+            <a:off x="7708392" y="4828032"/>
+            <a:ext cx="3282696" cy="749808"/>
           </a:xfrm>
           <a:prstGeom prst="rect">
             <a:avLst/>
@@ -5263,7 +5263,7 @@
               <a:buNone/>
             </a:pPr>
             <a:r>
-              <a:rPr lang="en-US" sz="1320" dirty="0">
+              <a:rPr lang="en-US" sz="1220" dirty="0">
                 <a:solidFill>
                   <a:srgbClr val="17364A"/>
                 </a:solidFill>
@@ -5271,9 +5271,9 @@
                 <a:ea typeface="Aptos" pitchFamily="34" charset="-122"/>
                 <a:cs typeface="Aptos" pitchFamily="34" charset="-120"/>
               </a:rPr>
-              <a:t>Identify what could go wrong, who could be affected, what safeguards are needed, and what evidence should be reviewed before use.</a:t>
-            </a:r>
-            <a:endParaRPr lang="en-US" sz="1320" dirty="0"/>
+              <a:t>Identify what could go wrong, who could be affected, what safeguards are needed,.</a:t>
+            </a:r>
+            <a:endParaRPr lang="en-US" sz="1220" dirty="0"/>
           </a:p>
         </p:txBody>
       </p:sp>
@@ -5564,8 +5564,8 @@
         </p:nvSpPr>
         <p:spPr>
           <a:xfrm>
-            <a:off x="868680" y="1508760"/>
-            <a:ext cx="6309360" cy="4160520"/>
+            <a:off x="822960" y="1463040"/>
+            <a:ext cx="6565392" cy="4343400"/>
           </a:xfrm>
           <a:prstGeom prst="rect">
             <a:avLst/>
@@ -5583,7 +5583,7 @@
               <a:buNone/>
             </a:pPr>
             <a:r>
-              <a:rPr lang="en-US" sz="2100" dirty="0">
+              <a:rPr lang="en-US" sz="1920" dirty="0">
                 <a:solidFill>
                   <a:srgbClr val="003A63"/>
                 </a:solidFill>
@@ -5593,14 +5593,14 @@
               </a:rPr>
               <a:t>• Recommended guardrails include the following:</a:t>
             </a:r>
-            <a:endParaRPr lang="en-US" sz="2100" dirty="0"/>
-          </a:p>
-          <a:p>
-            <a:pPr indent="0" marL="0">
-              <a:buNone/>
-            </a:pPr>
-            <a:r>
-              <a:rPr lang="en-US" sz="2100" dirty="0">
+            <a:endParaRPr lang="en-US" sz="1920" dirty="0"/>
+          </a:p>
+          <a:p>
+            <a:pPr indent="0" marL="0">
+              <a:buNone/>
+            </a:pPr>
+            <a:r>
+              <a:rPr lang="en-US" sz="1920" dirty="0">
                 <a:solidFill>
                   <a:srgbClr val="003A63"/>
                 </a:solidFill>
@@ -5608,16 +5608,16 @@
                 <a:ea typeface="Aptos" pitchFamily="34" charset="-122"/>
                 <a:cs typeface="Aptos" pitchFamily="34" charset="-120"/>
               </a:rPr>
-              <a:t>• Require equity evaluation for AI uses that affect prioritization, eligibility, outreach,.</a:t>
-            </a:r>
-            <a:endParaRPr lang="en-US" sz="2100" dirty="0"/>
-          </a:p>
-          <a:p>
-            <a:pPr indent="0" marL="0">
-              <a:buNone/>
-            </a:pPr>
-            <a:r>
-              <a:rPr lang="en-US" sz="2100" dirty="0">
+              <a:t>• Require equity evaluation for AI uses that affect prioritization,.</a:t>
+            </a:r>
+            <a:endParaRPr lang="en-US" sz="1920" dirty="0"/>
+          </a:p>
+          <a:p>
+            <a:pPr indent="0" marL="0">
+              <a:buNone/>
+            </a:pPr>
+            <a:r>
+              <a:rPr lang="en-US" sz="1920" dirty="0">
                 <a:solidFill>
                   <a:srgbClr val="003A63"/>
                 </a:solidFill>
@@ -5627,7 +5627,7 @@
               </a:rPr>
               <a:t>• Assess representativeness and missingness before model use.</a:t>
             </a:r>
-            <a:endParaRPr lang="en-US" sz="2100" dirty="0"/>
+            <a:endParaRPr lang="en-US" sz="1920" dirty="0"/>
           </a:p>
         </p:txBody>
       </p:sp>
@@ -5639,12 +5639,12 @@
         </p:nvSpPr>
         <p:spPr>
           <a:xfrm>
-            <a:off x="7635240" y="1325880"/>
-            <a:ext cx="3474720" cy="1207008"/>
+            <a:off x="7543800" y="1325880"/>
+            <a:ext cx="3611880" cy="1261872"/>
           </a:xfrm>
           <a:prstGeom prst="roundRect">
             <a:avLst>
-              <a:gd name="adj" fmla="val 9091"/>
+              <a:gd name="adj" fmla="val 8696"/>
             </a:avLst>
           </a:prstGeom>
           <a:solidFill>
@@ -5666,8 +5666,8 @@
         </p:nvSpPr>
         <p:spPr>
           <a:xfrm>
-            <a:off x="7799832" y="1472184"/>
-            <a:ext cx="3145536" cy="256032"/>
+            <a:off x="7708392" y="1453896"/>
+            <a:ext cx="3282696" cy="228600"/>
           </a:xfrm>
           <a:prstGeom prst="rect">
             <a:avLst/>
@@ -5683,7 +5683,7 @@
               <a:buNone/>
             </a:pPr>
             <a:r>
-              <a:rPr lang="en-US" sz="1300" b="1" dirty="0">
+              <a:rPr lang="en-US" sz="1220" b="1" dirty="0">
                 <a:solidFill>
                   <a:srgbClr val="0068B7"/>
                 </a:solidFill>
@@ -5693,7 +5693,7 @@
               </a:rPr>
               <a:t>Risk check</a:t>
             </a:r>
-            <a:endParaRPr lang="en-US" sz="1300" dirty="0"/>
+            <a:endParaRPr lang="en-US" sz="1220" dirty="0"/>
           </a:p>
         </p:txBody>
       </p:sp>
@@ -5705,8 +5705,8 @@
         </p:nvSpPr>
         <p:spPr>
           <a:xfrm>
-            <a:off x="7799832" y="1801368"/>
-            <a:ext cx="3145536" cy="640080"/>
+            <a:off x="7708392" y="1764792"/>
+            <a:ext cx="3282696" cy="749808"/>
           </a:xfrm>
           <a:prstGeom prst="rect">
             <a:avLst/>
@@ -5724,7 +5724,7 @@
               <a:buNone/>
             </a:pPr>
             <a:r>
-              <a:rPr lang="en-US" sz="1320" dirty="0">
+              <a:rPr lang="en-US" sz="1220" dirty="0">
                 <a:solidFill>
                   <a:srgbClr val="17364A"/>
                 </a:solidFill>
@@ -5734,7 +5734,7 @@
               </a:rPr>
               <a:t>Recommended guardrails include the following:</a:t>
             </a:r>
-            <a:endParaRPr lang="en-US" sz="1320" dirty="0"/>
+            <a:endParaRPr lang="en-US" sz="1220" dirty="0"/>
           </a:p>
         </p:txBody>
       </p:sp>
@@ -5746,12 +5746,12 @@
         </p:nvSpPr>
         <p:spPr>
           <a:xfrm>
-            <a:off x="7635240" y="2670048"/>
-            <a:ext cx="3474720" cy="1536192"/>
+            <a:off x="7543800" y="2724912"/>
+            <a:ext cx="3611880" cy="1527048"/>
           </a:xfrm>
           <a:prstGeom prst="roundRect">
             <a:avLst>
-              <a:gd name="adj" fmla="val 7143"/>
+              <a:gd name="adj" fmla="val 7186"/>
             </a:avLst>
           </a:prstGeom>
           <a:solidFill>
@@ -5773,8 +5773,8 @@
         </p:nvSpPr>
         <p:spPr>
           <a:xfrm>
-            <a:off x="7799832" y="2816352"/>
-            <a:ext cx="3145536" cy="256032"/>
+            <a:off x="7708392" y="2852928"/>
+            <a:ext cx="3282696" cy="228600"/>
           </a:xfrm>
           <a:prstGeom prst="rect">
             <a:avLst/>
@@ -5790,7 +5790,7 @@
               <a:buNone/>
             </a:pPr>
             <a:r>
-              <a:rPr lang="en-US" sz="1300" b="1" dirty="0">
+              <a:rPr lang="en-US" sz="1220" b="1" dirty="0">
                 <a:solidFill>
                   <a:srgbClr val="0068B7"/>
                 </a:solidFill>
@@ -5800,7 +5800,7 @@
               </a:rPr>
               <a:t>Concept checkpoints</a:t>
             </a:r>
-            <a:endParaRPr lang="en-US" sz="1300" dirty="0"/>
+            <a:endParaRPr lang="en-US" sz="1220" dirty="0"/>
           </a:p>
         </p:txBody>
       </p:sp>
@@ -5812,8 +5812,8 @@
         </p:nvSpPr>
         <p:spPr>
           <a:xfrm>
-            <a:off x="7818120" y="3182112"/>
-            <a:ext cx="3090672" cy="877824"/>
+            <a:off x="7726680" y="3182112"/>
+            <a:ext cx="3227832" cy="960120"/>
           </a:xfrm>
           <a:prstGeom prst="rect">
             <a:avLst/>
@@ -5831,7 +5831,7 @@
               <a:buNone/>
             </a:pPr>
             <a:r>
-              <a:rPr lang="en-US" sz="1220" dirty="0">
+              <a:rPr lang="en-US" sz="1140" dirty="0">
                 <a:solidFill>
                   <a:srgbClr val="17364A"/>
                 </a:solidFill>
@@ -5841,14 +5841,14 @@
               </a:rPr>
               <a:t>Recommended guardrails include the following:</a:t>
             </a:r>
-            <a:endParaRPr lang="en-US" sz="1220" dirty="0"/>
-          </a:p>
-          <a:p>
-            <a:pPr indent="0" marL="0">
-              <a:buNone/>
-            </a:pPr>
-            <a:r>
-              <a:rPr lang="en-US" sz="1220" dirty="0">
+            <a:endParaRPr lang="en-US" sz="1140" dirty="0"/>
+          </a:p>
+          <a:p>
+            <a:pPr indent="0" marL="0">
+              <a:buNone/>
+            </a:pPr>
+            <a:r>
+              <a:rPr lang="en-US" sz="1140" dirty="0">
                 <a:solidFill>
                   <a:srgbClr val="17364A"/>
                 </a:solidFill>
@@ -5856,16 +5856,16 @@
                 <a:ea typeface="Aptos" pitchFamily="34" charset="-122"/>
                 <a:cs typeface="Aptos" pitchFamily="34" charset="-120"/>
               </a:rPr>
-              <a:t>Require equity evaluation for AI uses that affect prioritization,.</a:t>
-            </a:r>
-            <a:endParaRPr lang="en-US" sz="1220" dirty="0"/>
-          </a:p>
-          <a:p>
-            <a:pPr indent="0" marL="0">
-              <a:buNone/>
-            </a:pPr>
-            <a:r>
-              <a:rPr lang="en-US" sz="1220" dirty="0">
+              <a:t>Require equity evaluation for AI uses that affect.</a:t>
+            </a:r>
+            <a:endParaRPr lang="en-US" sz="1140" dirty="0"/>
+          </a:p>
+          <a:p>
+            <a:pPr indent="0" marL="0">
+              <a:buNone/>
+            </a:pPr>
+            <a:r>
+              <a:rPr lang="en-US" sz="1140" dirty="0">
                 <a:solidFill>
                   <a:srgbClr val="17364A"/>
                 </a:solidFill>
@@ -5873,9 +5873,9 @@
                 <a:ea typeface="Aptos" pitchFamily="34" charset="-122"/>
                 <a:cs typeface="Aptos" pitchFamily="34" charset="-120"/>
               </a:rPr>
-              <a:t>Assess representativeness and missingness before model use.</a:t>
-            </a:r>
-            <a:endParaRPr lang="en-US" sz="1220" dirty="0"/>
+              <a:t>Assess representativeness and missingness before.</a:t>
+            </a:r>
+            <a:endParaRPr lang="en-US" sz="1140" dirty="0"/>
           </a:p>
         </p:txBody>
       </p:sp>
@@ -5887,12 +5887,12 @@
         </p:nvSpPr>
         <p:spPr>
           <a:xfrm>
-            <a:off x="7635240" y="4343400"/>
-            <a:ext cx="3474720" cy="1255471"/>
+            <a:off x="7543800" y="4389120"/>
+            <a:ext cx="3611880" cy="1261872"/>
           </a:xfrm>
           <a:prstGeom prst="roundRect">
             <a:avLst>
-              <a:gd name="adj" fmla="val 8740"/>
+              <a:gd name="adj" fmla="val 8696"/>
             </a:avLst>
           </a:prstGeom>
           <a:solidFill>
@@ -5914,8 +5914,8 @@
         </p:nvSpPr>
         <p:spPr>
           <a:xfrm>
-            <a:off x="7799832" y="4489704"/>
-            <a:ext cx="3145536" cy="256032"/>
+            <a:off x="7708392" y="4517136"/>
+            <a:ext cx="3282696" cy="228600"/>
           </a:xfrm>
           <a:prstGeom prst="rect">
             <a:avLst/>
@@ -5931,7 +5931,7 @@
               <a:buNone/>
             </a:pPr>
             <a:r>
-              <a:rPr lang="en-US" sz="1300" b="1" dirty="0">
+              <a:rPr lang="en-US" sz="1220" b="1" dirty="0">
                 <a:solidFill>
                   <a:srgbClr val="0068B7"/>
                 </a:solidFill>
@@ -5941,7 +5941,7 @@
               </a:rPr>
               <a:t>Safeguard to plan</a:t>
             </a:r>
-            <a:endParaRPr lang="en-US" sz="1300" dirty="0"/>
+            <a:endParaRPr lang="en-US" sz="1220" dirty="0"/>
           </a:p>
         </p:txBody>
       </p:sp>
@@ -5953,8 +5953,8 @@
         </p:nvSpPr>
         <p:spPr>
           <a:xfrm>
-            <a:off x="7799832" y="4818888"/>
-            <a:ext cx="3145536" cy="688543"/>
+            <a:off x="7708392" y="4828032"/>
+            <a:ext cx="3282696" cy="749808"/>
           </a:xfrm>
           <a:prstGeom prst="rect">
             <a:avLst/>
@@ -5972,7 +5972,7 @@
               <a:buNone/>
             </a:pPr>
             <a:r>
-              <a:rPr lang="en-US" sz="1320" dirty="0">
+              <a:rPr lang="en-US" sz="1220" dirty="0">
                 <a:solidFill>
                   <a:srgbClr val="17364A"/>
                 </a:solidFill>
@@ -5980,9 +5980,9 @@
                 <a:ea typeface="Aptos" pitchFamily="34" charset="-122"/>
                 <a:cs typeface="Aptos" pitchFamily="34" charset="-120"/>
               </a:rPr>
-              <a:t>Identify what could go wrong, who could be affected, what safeguards are needed, and what evidence should be reviewed before use.</a:t>
-            </a:r>
-            <a:endParaRPr lang="en-US" sz="1320" dirty="0"/>
+              <a:t>Identify what could go wrong, who could be affected, what safeguards are needed,.</a:t>
+            </a:r>
+            <a:endParaRPr lang="en-US" sz="1220" dirty="0"/>
           </a:p>
         </p:txBody>
       </p:sp>
@@ -6273,8 +6273,8 @@
         </p:nvSpPr>
         <p:spPr>
           <a:xfrm>
-            <a:off x="868680" y="1508760"/>
-            <a:ext cx="6309360" cy="4160520"/>
+            <a:off x="822960" y="1463040"/>
+            <a:ext cx="6565392" cy="4343400"/>
           </a:xfrm>
           <a:prstGeom prst="rect">
             <a:avLst/>
@@ -6292,7 +6292,7 @@
               <a:buNone/>
             </a:pPr>
             <a:r>
-              <a:rPr lang="en-US" sz="2100" dirty="0">
+              <a:rPr lang="en-US" sz="1920" dirty="0">
                 <a:solidFill>
                   <a:srgbClr val="003A63"/>
                 </a:solidFill>
@@ -6300,16 +6300,16 @@
                 <a:ea typeface="Aptos" pitchFamily="34" charset="-122"/>
                 <a:cs typeface="Aptos" pitchFamily="34" charset="-120"/>
               </a:rPr>
-              <a:t>• Measure subgroup performance where feasible and document limitations where not feasible.</a:t>
-            </a:r>
-            <a:endParaRPr lang="en-US" sz="2100" dirty="0"/>
-          </a:p>
-          <a:p>
-            <a:pPr indent="0" marL="0">
-              <a:buNone/>
-            </a:pPr>
-            <a:r>
-              <a:rPr lang="en-US" sz="2100" dirty="0">
+              <a:t>• Measure subgroup performance where feasible and document limitations where.</a:t>
+            </a:r>
+            <a:endParaRPr lang="en-US" sz="1920" dirty="0"/>
+          </a:p>
+          <a:p>
+            <a:pPr indent="0" marL="0">
+              <a:buNone/>
+            </a:pPr>
+            <a:r>
+              <a:rPr lang="en-US" sz="1920" dirty="0">
                 <a:solidFill>
                   <a:srgbClr val="003A63"/>
                 </a:solidFill>
@@ -6319,14 +6319,14 @@
               </a:rPr>
               <a:t>• Include community, equity, and program reviewers in governance decisions.</a:t>
             </a:r>
-            <a:endParaRPr lang="en-US" sz="2100" dirty="0"/>
-          </a:p>
-          <a:p>
-            <a:pPr indent="0" marL="0">
-              <a:buNone/>
-            </a:pPr>
-            <a:r>
-              <a:rPr lang="en-US" sz="2100" dirty="0">
+            <a:endParaRPr lang="en-US" sz="1920" dirty="0"/>
+          </a:p>
+          <a:p>
+            <a:pPr indent="0" marL="0">
+              <a:buNone/>
+            </a:pPr>
+            <a:r>
+              <a:rPr lang="en-US" sz="1920" dirty="0">
                 <a:solidFill>
                   <a:srgbClr val="003A63"/>
                 </a:solidFill>
@@ -6336,7 +6336,7 @@
               </a:rPr>
               <a:t>• Monitor equity indicators and user overrides after deployment.</a:t>
             </a:r>
-            <a:endParaRPr lang="en-US" sz="2100" dirty="0"/>
+            <a:endParaRPr lang="en-US" sz="1920" dirty="0"/>
           </a:p>
         </p:txBody>
       </p:sp>
@@ -6348,12 +6348,12 @@
         </p:nvSpPr>
         <p:spPr>
           <a:xfrm>
-            <a:off x="7635240" y="1325880"/>
-            <a:ext cx="3474720" cy="1207008"/>
+            <a:off x="7543800" y="1325880"/>
+            <a:ext cx="3611880" cy="1261872"/>
           </a:xfrm>
           <a:prstGeom prst="roundRect">
             <a:avLst>
-              <a:gd name="adj" fmla="val 9091"/>
+              <a:gd name="adj" fmla="val 8696"/>
             </a:avLst>
           </a:prstGeom>
           <a:solidFill>
@@ -6375,8 +6375,8 @@
         </p:nvSpPr>
         <p:spPr>
           <a:xfrm>
-            <a:off x="7799832" y="1472184"/>
-            <a:ext cx="3145536" cy="256032"/>
+            <a:off x="7708392" y="1453896"/>
+            <a:ext cx="3282696" cy="228600"/>
           </a:xfrm>
           <a:prstGeom prst="rect">
             <a:avLst/>
@@ -6392,7 +6392,7 @@
               <a:buNone/>
             </a:pPr>
             <a:r>
-              <a:rPr lang="en-US" sz="1300" b="1" dirty="0">
+              <a:rPr lang="en-US" sz="1220" b="1" dirty="0">
                 <a:solidFill>
                   <a:srgbClr val="0068B7"/>
                 </a:solidFill>
@@ -6402,7 +6402,7 @@
               </a:rPr>
               <a:t>Risk check</a:t>
             </a:r>
-            <a:endParaRPr lang="en-US" sz="1300" dirty="0"/>
+            <a:endParaRPr lang="en-US" sz="1220" dirty="0"/>
           </a:p>
         </p:txBody>
       </p:sp>
@@ -6414,8 +6414,8 @@
         </p:nvSpPr>
         <p:spPr>
           <a:xfrm>
-            <a:off x="7799832" y="1801368"/>
-            <a:ext cx="3145536" cy="640080"/>
+            <a:off x="7708392" y="1764792"/>
+            <a:ext cx="3282696" cy="749808"/>
           </a:xfrm>
           <a:prstGeom prst="rect">
             <a:avLst/>
@@ -6433,7 +6433,7 @@
               <a:buNone/>
             </a:pPr>
             <a:r>
-              <a:rPr lang="en-US" sz="1320" dirty="0">
+              <a:rPr lang="en-US" sz="1220" dirty="0">
                 <a:solidFill>
                   <a:srgbClr val="17364A"/>
                 </a:solidFill>
@@ -6441,9 +6441,9 @@
                 <a:ea typeface="Aptos" pitchFamily="34" charset="-122"/>
                 <a:cs typeface="Aptos" pitchFamily="34" charset="-120"/>
               </a:rPr>
-              <a:t>Measure subgroup performance where feasible and document limitations where not feasible.</a:t>
-            </a:r>
-            <a:endParaRPr lang="en-US" sz="1320" dirty="0"/>
+              <a:t>Measure subgroup performance where feasible and document limitations where not.</a:t>
+            </a:r>
+            <a:endParaRPr lang="en-US" sz="1220" dirty="0"/>
           </a:p>
         </p:txBody>
       </p:sp>
@@ -6455,12 +6455,12 @@
         </p:nvSpPr>
         <p:spPr>
           <a:xfrm>
-            <a:off x="7635240" y="2670048"/>
-            <a:ext cx="3474720" cy="1536192"/>
+            <a:off x="7543800" y="2724912"/>
+            <a:ext cx="3611880" cy="1527048"/>
           </a:xfrm>
           <a:prstGeom prst="roundRect">
             <a:avLst>
-              <a:gd name="adj" fmla="val 7143"/>
+              <a:gd name="adj" fmla="val 7186"/>
             </a:avLst>
           </a:prstGeom>
           <a:solidFill>
@@ -6482,8 +6482,8 @@
         </p:nvSpPr>
         <p:spPr>
           <a:xfrm>
-            <a:off x="7799832" y="2816352"/>
-            <a:ext cx="3145536" cy="256032"/>
+            <a:off x="7708392" y="2852928"/>
+            <a:ext cx="3282696" cy="228600"/>
           </a:xfrm>
           <a:prstGeom prst="rect">
             <a:avLst/>
@@ -6499,7 +6499,7 @@
               <a:buNone/>
             </a:pPr>
             <a:r>
-              <a:rPr lang="en-US" sz="1300" b="1" dirty="0">
+              <a:rPr lang="en-US" sz="1220" b="1" dirty="0">
                 <a:solidFill>
                   <a:srgbClr val="0068B7"/>
                 </a:solidFill>
@@ -6509,7 +6509,7 @@
               </a:rPr>
               <a:t>Concept checkpoints</a:t>
             </a:r>
-            <a:endParaRPr lang="en-US" sz="1300" dirty="0"/>
+            <a:endParaRPr lang="en-US" sz="1220" dirty="0"/>
           </a:p>
         </p:txBody>
       </p:sp>
@@ -6521,8 +6521,8 @@
         </p:nvSpPr>
         <p:spPr>
           <a:xfrm>
-            <a:off x="7818120" y="3182112"/>
-            <a:ext cx="3090672" cy="877824"/>
+            <a:off x="7726680" y="3182112"/>
+            <a:ext cx="3227832" cy="960120"/>
           </a:xfrm>
           <a:prstGeom prst="rect">
             <a:avLst/>
@@ -6540,7 +6540,7 @@
               <a:buNone/>
             </a:pPr>
             <a:r>
-              <a:rPr lang="en-US" sz="1220" dirty="0">
+              <a:rPr lang="en-US" sz="1140" dirty="0">
                 <a:solidFill>
                   <a:srgbClr val="17364A"/>
                 </a:solidFill>
@@ -6548,16 +6548,16 @@
                 <a:ea typeface="Aptos" pitchFamily="34" charset="-122"/>
                 <a:cs typeface="Aptos" pitchFamily="34" charset="-120"/>
               </a:rPr>
-              <a:t>Measure subgroup performance where feasible and document.</a:t>
-            </a:r>
-            <a:endParaRPr lang="en-US" sz="1220" dirty="0"/>
-          </a:p>
-          <a:p>
-            <a:pPr indent="0" marL="0">
-              <a:buNone/>
-            </a:pPr>
-            <a:r>
-              <a:rPr lang="en-US" sz="1220" dirty="0">
+              <a:t>Measure subgroup performance where feasible and.</a:t>
+            </a:r>
+            <a:endParaRPr lang="en-US" sz="1140" dirty="0"/>
+          </a:p>
+          <a:p>
+            <a:pPr indent="0" marL="0">
+              <a:buNone/>
+            </a:pPr>
+            <a:r>
+              <a:rPr lang="en-US" sz="1140" dirty="0">
                 <a:solidFill>
                   <a:srgbClr val="17364A"/>
                 </a:solidFill>
@@ -6565,16 +6565,16 @@
                 <a:ea typeface="Aptos" pitchFamily="34" charset="-122"/>
                 <a:cs typeface="Aptos" pitchFamily="34" charset="-120"/>
               </a:rPr>
-              <a:t>Include community, equity, and program reviewers in governance.</a:t>
-            </a:r>
-            <a:endParaRPr lang="en-US" sz="1220" dirty="0"/>
-          </a:p>
-          <a:p>
-            <a:pPr indent="0" marL="0">
-              <a:buNone/>
-            </a:pPr>
-            <a:r>
-              <a:rPr lang="en-US" sz="1220" dirty="0">
+              <a:t>Include community, equity, and program reviewers.</a:t>
+            </a:r>
+            <a:endParaRPr lang="en-US" sz="1140" dirty="0"/>
+          </a:p>
+          <a:p>
+            <a:pPr indent="0" marL="0">
+              <a:buNone/>
+            </a:pPr>
+            <a:r>
+              <a:rPr lang="en-US" sz="1140" dirty="0">
                 <a:solidFill>
                   <a:srgbClr val="17364A"/>
                 </a:solidFill>
@@ -6582,9 +6582,9 @@
                 <a:ea typeface="Aptos" pitchFamily="34" charset="-122"/>
                 <a:cs typeface="Aptos" pitchFamily="34" charset="-120"/>
               </a:rPr>
-              <a:t>Monitor equity indicators and user overrides after deployment.</a:t>
-            </a:r>
-            <a:endParaRPr lang="en-US" sz="1220" dirty="0"/>
+              <a:t>Monitor equity indicators and user overrides after.</a:t>
+            </a:r>
+            <a:endParaRPr lang="en-US" sz="1140" dirty="0"/>
           </a:p>
         </p:txBody>
       </p:sp>
@@ -6596,12 +6596,12 @@
         </p:nvSpPr>
         <p:spPr>
           <a:xfrm>
-            <a:off x="7635240" y="4343400"/>
-            <a:ext cx="3474720" cy="1255471"/>
+            <a:off x="7543800" y="4389120"/>
+            <a:ext cx="3611880" cy="1261872"/>
           </a:xfrm>
           <a:prstGeom prst="roundRect">
             <a:avLst>
-              <a:gd name="adj" fmla="val 8740"/>
+              <a:gd name="adj" fmla="val 8696"/>
             </a:avLst>
           </a:prstGeom>
           <a:solidFill>
@@ -6623,8 +6623,8 @@
         </p:nvSpPr>
         <p:spPr>
           <a:xfrm>
-            <a:off x="7799832" y="4489704"/>
-            <a:ext cx="3145536" cy="256032"/>
+            <a:off x="7708392" y="4517136"/>
+            <a:ext cx="3282696" cy="228600"/>
           </a:xfrm>
           <a:prstGeom prst="rect">
             <a:avLst/>
@@ -6640,7 +6640,7 @@
               <a:buNone/>
             </a:pPr>
             <a:r>
-              <a:rPr lang="en-US" sz="1300" b="1" dirty="0">
+              <a:rPr lang="en-US" sz="1220" b="1" dirty="0">
                 <a:solidFill>
                   <a:srgbClr val="0068B7"/>
                 </a:solidFill>
@@ -6650,7 +6650,7 @@
               </a:rPr>
               <a:t>Safeguard to plan</a:t>
             </a:r>
-            <a:endParaRPr lang="en-US" sz="1300" dirty="0"/>
+            <a:endParaRPr lang="en-US" sz="1220" dirty="0"/>
           </a:p>
         </p:txBody>
       </p:sp>
@@ -6662,8 +6662,8 @@
         </p:nvSpPr>
         <p:spPr>
           <a:xfrm>
-            <a:off x="7799832" y="4818888"/>
-            <a:ext cx="3145536" cy="688543"/>
+            <a:off x="7708392" y="4828032"/>
+            <a:ext cx="3282696" cy="749808"/>
           </a:xfrm>
           <a:prstGeom prst="rect">
             <a:avLst/>
@@ -6681,7 +6681,7 @@
               <a:buNone/>
             </a:pPr>
             <a:r>
-              <a:rPr lang="en-US" sz="1320" dirty="0">
+              <a:rPr lang="en-US" sz="1220" dirty="0">
                 <a:solidFill>
                   <a:srgbClr val="17364A"/>
                 </a:solidFill>
@@ -6689,9 +6689,9 @@
                 <a:ea typeface="Aptos" pitchFamily="34" charset="-122"/>
                 <a:cs typeface="Aptos" pitchFamily="34" charset="-120"/>
               </a:rPr>
-              <a:t>Identify what could go wrong, who could be affected, what safeguards are needed, and what evidence should be reviewed before use.</a:t>
-            </a:r>
-            <a:endParaRPr lang="en-US" sz="1320" dirty="0"/>
+              <a:t>Identify what could go wrong, who could be affected, what safeguards are needed,.</a:t>
+            </a:r>
+            <a:endParaRPr lang="en-US" sz="1220" dirty="0"/>
           </a:p>
         </p:txBody>
       </p:sp>
@@ -6982,8 +6982,8 @@
         </p:nvSpPr>
         <p:spPr>
           <a:xfrm>
-            <a:off x="868680" y="1508760"/>
-            <a:ext cx="6309360" cy="4160520"/>
+            <a:off x="822960" y="1463040"/>
+            <a:ext cx="6565392" cy="4343400"/>
           </a:xfrm>
           <a:prstGeom prst="rect">
             <a:avLst/>
@@ -7001,7 +7001,7 @@
               <a:buNone/>
             </a:pPr>
             <a:r>
-              <a:rPr lang="en-US" sz="2100" dirty="0">
+              <a:rPr lang="en-US" sz="1920" dirty="0">
                 <a:solidFill>
                   <a:srgbClr val="003A63"/>
                 </a:solidFill>
@@ -7011,14 +7011,14 @@
               </a:rPr>
               <a:t>• Where does this topic appear in your agency, program, or workflow?</a:t>
             </a:r>
-            <a:endParaRPr lang="en-US" sz="2100" dirty="0"/>
-          </a:p>
-          <a:p>
-            <a:pPr indent="0" marL="0">
-              <a:buNone/>
-            </a:pPr>
-            <a:r>
-              <a:rPr lang="en-US" sz="2100" dirty="0">
+            <a:endParaRPr lang="en-US" sz="1920" dirty="0"/>
+          </a:p>
+          <a:p>
+            <a:pPr indent="0" marL="0">
+              <a:buNone/>
+            </a:pPr>
+            <a:r>
+              <a:rPr lang="en-US" sz="1920" dirty="0">
                 <a:solidFill>
                   <a:srgbClr val="003A63"/>
                 </a:solidFill>
@@ -7026,16 +7026,16 @@
                 <a:ea typeface="Aptos" pitchFamily="34" charset="-122"/>
                 <a:cs typeface="Aptos" pitchFamily="34" charset="-120"/>
               </a:rPr>
-              <a:t>• Which staff roles would need to understand or apply this concept before AI use is approved?</a:t>
-            </a:r>
-            <a:endParaRPr lang="en-US" sz="2100" dirty="0"/>
-          </a:p>
-          <a:p>
-            <a:pPr indent="0" marL="0">
-              <a:buNone/>
-            </a:pPr>
-            <a:r>
-              <a:rPr lang="en-US" sz="2100" dirty="0">
+              <a:t>• Which staff roles would need to understand or apply this concept before AI.</a:t>
+            </a:r>
+            <a:endParaRPr lang="en-US" sz="1920" dirty="0"/>
+          </a:p>
+          <a:p>
+            <a:pPr indent="0" marL="0">
+              <a:buNone/>
+            </a:pPr>
+            <a:r>
+              <a:rPr lang="en-US" sz="1920" dirty="0">
                 <a:solidFill>
                   <a:srgbClr val="003A63"/>
                 </a:solidFill>
@@ -7045,7 +7045,7 @@
               </a:rPr>
               <a:t>• What could go wrong if this topic is not addressed before implementation?</a:t>
             </a:r>
-            <a:endParaRPr lang="en-US" sz="2100" dirty="0"/>
+            <a:endParaRPr lang="en-US" sz="1920" dirty="0"/>
           </a:p>
         </p:txBody>
       </p:sp>
@@ -7057,12 +7057,12 @@
         </p:nvSpPr>
         <p:spPr>
           <a:xfrm>
-            <a:off x="7635240" y="1325880"/>
-            <a:ext cx="3474720" cy="1207008"/>
+            <a:off x="7543800" y="1325880"/>
+            <a:ext cx="3611880" cy="1261872"/>
           </a:xfrm>
           <a:prstGeom prst="roundRect">
             <a:avLst>
-              <a:gd name="adj" fmla="val 9091"/>
+              <a:gd name="adj" fmla="val 8696"/>
             </a:avLst>
           </a:prstGeom>
           <a:solidFill>
@@ -7084,8 +7084,8 @@
         </p:nvSpPr>
         <p:spPr>
           <a:xfrm>
-            <a:off x="7799832" y="1472184"/>
-            <a:ext cx="3145536" cy="256032"/>
+            <a:off x="7708392" y="1453896"/>
+            <a:ext cx="3282696" cy="228600"/>
           </a:xfrm>
           <a:prstGeom prst="rect">
             <a:avLst/>
@@ -7101,7 +7101,7 @@
               <a:buNone/>
             </a:pPr>
             <a:r>
-              <a:rPr lang="en-US" sz="1300" b="1" dirty="0">
+              <a:rPr lang="en-US" sz="1220" b="1" dirty="0">
                 <a:solidFill>
                   <a:srgbClr val="0068B7"/>
                 </a:solidFill>
@@ -7111,7 +7111,7 @@
               </a:rPr>
               <a:t>Risk check</a:t>
             </a:r>
-            <a:endParaRPr lang="en-US" sz="1300" dirty="0"/>
+            <a:endParaRPr lang="en-US" sz="1220" dirty="0"/>
           </a:p>
         </p:txBody>
       </p:sp>
@@ -7123,8 +7123,8 @@
         </p:nvSpPr>
         <p:spPr>
           <a:xfrm>
-            <a:off x="7799832" y="1801368"/>
-            <a:ext cx="3145536" cy="640080"/>
+            <a:off x="7708392" y="1764792"/>
+            <a:ext cx="3282696" cy="749808"/>
           </a:xfrm>
           <a:prstGeom prst="rect">
             <a:avLst/>
@@ -7142,7 +7142,7 @@
               <a:buNone/>
             </a:pPr>
             <a:r>
-              <a:rPr lang="en-US" sz="1320" dirty="0">
+              <a:rPr lang="en-US" sz="1220" dirty="0">
                 <a:solidFill>
                   <a:srgbClr val="17364A"/>
                 </a:solidFill>
@@ -7152,7 +7152,7 @@
               </a:rPr>
               <a:t>Where does this topic appear in your agency, program, or workflow?</a:t>
             </a:r>
-            <a:endParaRPr lang="en-US" sz="1320" dirty="0"/>
+            <a:endParaRPr lang="en-US" sz="1220" dirty="0"/>
           </a:p>
         </p:txBody>
       </p:sp>
@@ -7164,12 +7164,12 @@
         </p:nvSpPr>
         <p:spPr>
           <a:xfrm>
-            <a:off x="7635240" y="2670048"/>
-            <a:ext cx="3474720" cy="1536192"/>
+            <a:off x="7543800" y="2724912"/>
+            <a:ext cx="3611880" cy="1527048"/>
           </a:xfrm>
           <a:prstGeom prst="roundRect">
             <a:avLst>
-              <a:gd name="adj" fmla="val 7143"/>
+              <a:gd name="adj" fmla="val 7186"/>
             </a:avLst>
           </a:prstGeom>
           <a:solidFill>
@@ -7191,8 +7191,8 @@
         </p:nvSpPr>
         <p:spPr>
           <a:xfrm>
-            <a:off x="7799832" y="2816352"/>
-            <a:ext cx="3145536" cy="256032"/>
+            <a:off x="7708392" y="2852928"/>
+            <a:ext cx="3282696" cy="228600"/>
           </a:xfrm>
           <a:prstGeom prst="rect">
             <a:avLst/>
@@ -7208,7 +7208,7 @@
               <a:buNone/>
             </a:pPr>
             <a:r>
-              <a:rPr lang="en-US" sz="1300" b="1" dirty="0">
+              <a:rPr lang="en-US" sz="1220" b="1" dirty="0">
                 <a:solidFill>
                   <a:srgbClr val="0068B7"/>
                 </a:solidFill>
@@ -7218,7 +7218,7 @@
               </a:rPr>
               <a:t>Concept checkpoints</a:t>
             </a:r>
-            <a:endParaRPr lang="en-US" sz="1300" dirty="0"/>
+            <a:endParaRPr lang="en-US" sz="1220" dirty="0"/>
           </a:p>
         </p:txBody>
       </p:sp>
@@ -7230,8 +7230,8 @@
         </p:nvSpPr>
         <p:spPr>
           <a:xfrm>
-            <a:off x="7818120" y="3182112"/>
-            <a:ext cx="3090672" cy="877824"/>
+            <a:off x="7726680" y="3182112"/>
+            <a:ext cx="3227832" cy="960120"/>
           </a:xfrm>
           <a:prstGeom prst="rect">
             <a:avLst/>
@@ -7249,7 +7249,7 @@
               <a:buNone/>
             </a:pPr>
             <a:r>
-              <a:rPr lang="en-US" sz="1220" dirty="0">
+              <a:rPr lang="en-US" sz="1140" dirty="0">
                 <a:solidFill>
                   <a:srgbClr val="17364A"/>
                 </a:solidFill>
@@ -7257,16 +7257,16 @@
                 <a:ea typeface="Aptos" pitchFamily="34" charset="-122"/>
                 <a:cs typeface="Aptos" pitchFamily="34" charset="-120"/>
               </a:rPr>
-              <a:t>Where does this topic appear in your agency, program, or workflow?</a:t>
-            </a:r>
-            <a:endParaRPr lang="en-US" sz="1220" dirty="0"/>
-          </a:p>
-          <a:p>
-            <a:pPr indent="0" marL="0">
-              <a:buNone/>
-            </a:pPr>
-            <a:r>
-              <a:rPr lang="en-US" sz="1220" dirty="0">
+              <a:t>Where does this topic appear in your agency,.</a:t>
+            </a:r>
+            <a:endParaRPr lang="en-US" sz="1140" dirty="0"/>
+          </a:p>
+          <a:p>
+            <a:pPr indent="0" marL="0">
+              <a:buNone/>
+            </a:pPr>
+            <a:r>
+              <a:rPr lang="en-US" sz="1140" dirty="0">
                 <a:solidFill>
                   <a:srgbClr val="17364A"/>
                 </a:solidFill>
@@ -7274,16 +7274,16 @@
                 <a:ea typeface="Aptos" pitchFamily="34" charset="-122"/>
                 <a:cs typeface="Aptos" pitchFamily="34" charset="-120"/>
               </a:rPr>
-              <a:t>Which staff roles would need to understand or apply this concept.</a:t>
-            </a:r>
-            <a:endParaRPr lang="en-US" sz="1220" dirty="0"/>
-          </a:p>
-          <a:p>
-            <a:pPr indent="0" marL="0">
-              <a:buNone/>
-            </a:pPr>
-            <a:r>
-              <a:rPr lang="en-US" sz="1220" dirty="0">
+              <a:t>Which staff roles would need to understand or.</a:t>
+            </a:r>
+            <a:endParaRPr lang="en-US" sz="1140" dirty="0"/>
+          </a:p>
+          <a:p>
+            <a:pPr indent="0" marL="0">
+              <a:buNone/>
+            </a:pPr>
+            <a:r>
+              <a:rPr lang="en-US" sz="1140" dirty="0">
                 <a:solidFill>
                   <a:srgbClr val="17364A"/>
                 </a:solidFill>
@@ -7291,9 +7291,9 @@
                 <a:ea typeface="Aptos" pitchFamily="34" charset="-122"/>
                 <a:cs typeface="Aptos" pitchFamily="34" charset="-120"/>
               </a:rPr>
-              <a:t>What could go wrong if this topic is not addressed before.</a:t>
-            </a:r>
-            <a:endParaRPr lang="en-US" sz="1220" dirty="0"/>
+              <a:t>What could go wrong if this topic is not addressed.</a:t>
+            </a:r>
+            <a:endParaRPr lang="en-US" sz="1140" dirty="0"/>
           </a:p>
         </p:txBody>
       </p:sp>
@@ -7305,12 +7305,12 @@
         </p:nvSpPr>
         <p:spPr>
           <a:xfrm>
-            <a:off x="7635240" y="4343400"/>
-            <a:ext cx="3474720" cy="1255471"/>
+            <a:off x="7543800" y="4389120"/>
+            <a:ext cx="3611880" cy="1261872"/>
           </a:xfrm>
           <a:prstGeom prst="roundRect">
             <a:avLst>
-              <a:gd name="adj" fmla="val 8740"/>
+              <a:gd name="adj" fmla="val 8696"/>
             </a:avLst>
           </a:prstGeom>
           <a:solidFill>
@@ -7332,8 +7332,8 @@
         </p:nvSpPr>
         <p:spPr>
           <a:xfrm>
-            <a:off x="7799832" y="4489704"/>
-            <a:ext cx="3145536" cy="256032"/>
+            <a:off x="7708392" y="4517136"/>
+            <a:ext cx="3282696" cy="228600"/>
           </a:xfrm>
           <a:prstGeom prst="rect">
             <a:avLst/>
@@ -7349,7 +7349,7 @@
               <a:buNone/>
             </a:pPr>
             <a:r>
-              <a:rPr lang="en-US" sz="1300" b="1" dirty="0">
+              <a:rPr lang="en-US" sz="1220" b="1" dirty="0">
                 <a:solidFill>
                   <a:srgbClr val="0068B7"/>
                 </a:solidFill>
@@ -7359,7 +7359,7 @@
               </a:rPr>
               <a:t>Safeguard to plan</a:t>
             </a:r>
-            <a:endParaRPr lang="en-US" sz="1300" dirty="0"/>
+            <a:endParaRPr lang="en-US" sz="1220" dirty="0"/>
           </a:p>
         </p:txBody>
       </p:sp>
@@ -7371,8 +7371,8 @@
         </p:nvSpPr>
         <p:spPr>
           <a:xfrm>
-            <a:off x="7799832" y="4818888"/>
-            <a:ext cx="3145536" cy="688543"/>
+            <a:off x="7708392" y="4828032"/>
+            <a:ext cx="3282696" cy="749808"/>
           </a:xfrm>
           <a:prstGeom prst="rect">
             <a:avLst/>
@@ -7390,7 +7390,7 @@
               <a:buNone/>
             </a:pPr>
             <a:r>
-              <a:rPr lang="en-US" sz="1320" dirty="0">
+              <a:rPr lang="en-US" sz="1220" dirty="0">
                 <a:solidFill>
                   <a:srgbClr val="17364A"/>
                 </a:solidFill>
@@ -7398,9 +7398,9 @@
                 <a:ea typeface="Aptos" pitchFamily="34" charset="-122"/>
                 <a:cs typeface="Aptos" pitchFamily="34" charset="-120"/>
               </a:rPr>
-              <a:t>Identify what could go wrong, who could be affected, what safeguards are needed, and what evidence should be reviewed before use.</a:t>
-            </a:r>
-            <a:endParaRPr lang="en-US" sz="1320" dirty="0"/>
+              <a:t>Identify what could go wrong, who could be affected, what safeguards are needed,.</a:t>
+            </a:r>
+            <a:endParaRPr lang="en-US" sz="1220" dirty="0"/>
           </a:p>
         </p:txBody>
       </p:sp>
@@ -7691,8 +7691,8 @@
         </p:nvSpPr>
         <p:spPr>
           <a:xfrm>
-            <a:off x="868680" y="1508760"/>
-            <a:ext cx="6309360" cy="4160520"/>
+            <a:off x="822960" y="1463040"/>
+            <a:ext cx="6565392" cy="4343400"/>
           </a:xfrm>
           <a:prstGeom prst="rect">
             <a:avLst/>
@@ -7710,7 +7710,7 @@
               <a:buNone/>
             </a:pPr>
             <a:r>
-              <a:rPr lang="en-US" sz="2100" dirty="0">
+              <a:rPr lang="en-US" sz="1920" dirty="0">
                 <a:solidFill>
                   <a:srgbClr val="003A63"/>
                 </a:solidFill>
@@ -7718,16 +7718,16 @@
                 <a:ea typeface="Aptos" pitchFamily="34" charset="-122"/>
                 <a:cs typeface="Aptos" pitchFamily="34" charset="-120"/>
               </a:rPr>
-              <a:t>• What evidence would governance, leadership, or operations staff need before moving forward?</a:t>
-            </a:r>
-            <a:endParaRPr lang="en-US" sz="2100" dirty="0"/>
-          </a:p>
-          <a:p>
-            <a:pPr indent="0" marL="0">
-              <a:buNone/>
-            </a:pPr>
-            <a:r>
-              <a:rPr lang="en-US" sz="2100" dirty="0">
+              <a:t>• What evidence would governance, leadership, or operations staff need before.</a:t>
+            </a:r>
+            <a:endParaRPr lang="en-US" sz="1920" dirty="0"/>
+          </a:p>
+          <a:p>
+            <a:pPr indent="0" marL="0">
+              <a:buNone/>
+            </a:pPr>
+            <a:r>
+              <a:rPr lang="en-US" sz="1920" dirty="0">
                 <a:solidFill>
                   <a:srgbClr val="003A63"/>
                 </a:solidFill>
@@ -7735,9 +7735,9 @@
                 <a:ea typeface="Aptos" pitchFamily="34" charset="-122"/>
                 <a:cs typeface="Aptos" pitchFamily="34" charset="-120"/>
               </a:rPr>
-              <a:t>• Which policy, data, equity, privacy, security, or workflow questions remain unresolved?</a:t>
-            </a:r>
-            <a:endParaRPr lang="en-US" sz="2100" dirty="0"/>
+              <a:t>• Which policy, data, equity, privacy, security, or workflow questions remain.</a:t>
+            </a:r>
+            <a:endParaRPr lang="en-US" sz="1920" dirty="0"/>
           </a:p>
         </p:txBody>
       </p:sp>
@@ -7749,12 +7749,12 @@
         </p:nvSpPr>
         <p:spPr>
           <a:xfrm>
-            <a:off x="7635240" y="1325880"/>
-            <a:ext cx="3474720" cy="1207008"/>
+            <a:off x="7543800" y="1325880"/>
+            <a:ext cx="3611880" cy="1261872"/>
           </a:xfrm>
           <a:prstGeom prst="roundRect">
             <a:avLst>
-              <a:gd name="adj" fmla="val 9091"/>
+              <a:gd name="adj" fmla="val 8696"/>
             </a:avLst>
           </a:prstGeom>
           <a:solidFill>
@@ -7776,8 +7776,8 @@
         </p:nvSpPr>
         <p:spPr>
           <a:xfrm>
-            <a:off x="7799832" y="1472184"/>
-            <a:ext cx="3145536" cy="256032"/>
+            <a:off x="7708392" y="1453896"/>
+            <a:ext cx="3282696" cy="228600"/>
           </a:xfrm>
           <a:prstGeom prst="rect">
             <a:avLst/>
@@ -7793,7 +7793,7 @@
               <a:buNone/>
             </a:pPr>
             <a:r>
-              <a:rPr lang="en-US" sz="1300" b="1" dirty="0">
+              <a:rPr lang="en-US" sz="1220" b="1" dirty="0">
                 <a:solidFill>
                   <a:srgbClr val="0068B7"/>
                 </a:solidFill>
@@ -7803,7 +7803,7 @@
               </a:rPr>
               <a:t>Risk check</a:t>
             </a:r>
-            <a:endParaRPr lang="en-US" sz="1300" dirty="0"/>
+            <a:endParaRPr lang="en-US" sz="1220" dirty="0"/>
           </a:p>
         </p:txBody>
       </p:sp>
@@ -7815,8 +7815,8 @@
         </p:nvSpPr>
         <p:spPr>
           <a:xfrm>
-            <a:off x="7799832" y="1801368"/>
-            <a:ext cx="3145536" cy="640080"/>
+            <a:off x="7708392" y="1764792"/>
+            <a:ext cx="3282696" cy="749808"/>
           </a:xfrm>
           <a:prstGeom prst="rect">
             <a:avLst/>
@@ -7834,7 +7834,7 @@
               <a:buNone/>
             </a:pPr>
             <a:r>
-              <a:rPr lang="en-US" sz="1320" dirty="0">
+              <a:rPr lang="en-US" sz="1220" dirty="0">
                 <a:solidFill>
                   <a:srgbClr val="17364A"/>
                 </a:solidFill>
@@ -7842,9 +7842,9 @@
                 <a:ea typeface="Aptos" pitchFamily="34" charset="-122"/>
                 <a:cs typeface="Aptos" pitchFamily="34" charset="-120"/>
               </a:rPr>
-              <a:t>What evidence would governance, leadership, or operations staff need before moving.</a:t>
-            </a:r>
-            <a:endParaRPr lang="en-US" sz="1320" dirty="0"/>
+              <a:t>What evidence would governance, leadership, or operations staff need before.</a:t>
+            </a:r>
+            <a:endParaRPr lang="en-US" sz="1220" dirty="0"/>
           </a:p>
         </p:txBody>
       </p:sp>
@@ -7856,12 +7856,12 @@
         </p:nvSpPr>
         <p:spPr>
           <a:xfrm>
-            <a:off x="7635240" y="2670048"/>
-            <a:ext cx="3474720" cy="1536192"/>
+            <a:off x="7543800" y="2724912"/>
+            <a:ext cx="3611880" cy="1527048"/>
           </a:xfrm>
           <a:prstGeom prst="roundRect">
             <a:avLst>
-              <a:gd name="adj" fmla="val 7143"/>
+              <a:gd name="adj" fmla="val 7186"/>
             </a:avLst>
           </a:prstGeom>
           <a:solidFill>
@@ -7883,8 +7883,8 @@
         </p:nvSpPr>
         <p:spPr>
           <a:xfrm>
-            <a:off x="7799832" y="2816352"/>
-            <a:ext cx="3145536" cy="256032"/>
+            <a:off x="7708392" y="2852928"/>
+            <a:ext cx="3282696" cy="228600"/>
           </a:xfrm>
           <a:prstGeom prst="rect">
             <a:avLst/>
@@ -7900,7 +7900,7 @@
               <a:buNone/>
             </a:pPr>
             <a:r>
-              <a:rPr lang="en-US" sz="1300" b="1" dirty="0">
+              <a:rPr lang="en-US" sz="1220" b="1" dirty="0">
                 <a:solidFill>
                   <a:srgbClr val="0068B7"/>
                 </a:solidFill>
@@ -7910,7 +7910,7 @@
               </a:rPr>
               <a:t>Concept checkpoints</a:t>
             </a:r>
-            <a:endParaRPr lang="en-US" sz="1300" dirty="0"/>
+            <a:endParaRPr lang="en-US" sz="1220" dirty="0"/>
           </a:p>
         </p:txBody>
       </p:sp>
@@ -7922,8 +7922,8 @@
         </p:nvSpPr>
         <p:spPr>
           <a:xfrm>
-            <a:off x="7818120" y="3182112"/>
-            <a:ext cx="3090672" cy="877824"/>
+            <a:off x="7726680" y="3182112"/>
+            <a:ext cx="3227832" cy="960120"/>
           </a:xfrm>
           <a:prstGeom prst="rect">
             <a:avLst/>
@@ -7941,7 +7941,7 @@
               <a:buNone/>
             </a:pPr>
             <a:r>
-              <a:rPr lang="en-US" sz="1220" dirty="0">
+              <a:rPr lang="en-US" sz="1140" dirty="0">
                 <a:solidFill>
                   <a:srgbClr val="17364A"/>
                 </a:solidFill>
@@ -7949,16 +7949,16 @@
                 <a:ea typeface="Aptos" pitchFamily="34" charset="-122"/>
                 <a:cs typeface="Aptos" pitchFamily="34" charset="-120"/>
               </a:rPr>
-              <a:t>What evidence would governance, leadership, or operations staff.</a:t>
-            </a:r>
-            <a:endParaRPr lang="en-US" sz="1220" dirty="0"/>
-          </a:p>
-          <a:p>
-            <a:pPr indent="0" marL="0">
-              <a:buNone/>
-            </a:pPr>
-            <a:r>
-              <a:rPr lang="en-US" sz="1220" dirty="0">
+              <a:t>What evidence would governance, leadership, or.</a:t>
+            </a:r>
+            <a:endParaRPr lang="en-US" sz="1140" dirty="0"/>
+          </a:p>
+          <a:p>
+            <a:pPr indent="0" marL="0">
+              <a:buNone/>
+            </a:pPr>
+            <a:r>
+              <a:rPr lang="en-US" sz="1140" dirty="0">
                 <a:solidFill>
                   <a:srgbClr val="17364A"/>
                 </a:solidFill>
@@ -7966,9 +7966,9 @@
                 <a:ea typeface="Aptos" pitchFamily="34" charset="-122"/>
                 <a:cs typeface="Aptos" pitchFamily="34" charset="-120"/>
               </a:rPr>
-              <a:t>Which policy, data, equity, privacy, security, or workflow.</a:t>
-            </a:r>
-            <a:endParaRPr lang="en-US" sz="1220" dirty="0"/>
+              <a:t>Which policy, data, equity, privacy, security, or.</a:t>
+            </a:r>
+            <a:endParaRPr lang="en-US" sz="1140" dirty="0"/>
           </a:p>
         </p:txBody>
       </p:sp>
@@ -7980,12 +7980,12 @@
         </p:nvSpPr>
         <p:spPr>
           <a:xfrm>
-            <a:off x="7635240" y="4343400"/>
-            <a:ext cx="3474720" cy="1255471"/>
+            <a:off x="7543800" y="4389120"/>
+            <a:ext cx="3611880" cy="1261872"/>
           </a:xfrm>
           <a:prstGeom prst="roundRect">
             <a:avLst>
-              <a:gd name="adj" fmla="val 8740"/>
+              <a:gd name="adj" fmla="val 8696"/>
             </a:avLst>
           </a:prstGeom>
           <a:solidFill>
@@ -8007,8 +8007,8 @@
         </p:nvSpPr>
         <p:spPr>
           <a:xfrm>
-            <a:off x="7799832" y="4489704"/>
-            <a:ext cx="3145536" cy="256032"/>
+            <a:off x="7708392" y="4517136"/>
+            <a:ext cx="3282696" cy="228600"/>
           </a:xfrm>
           <a:prstGeom prst="rect">
             <a:avLst/>
@@ -8024,7 +8024,7 @@
               <a:buNone/>
             </a:pPr>
             <a:r>
-              <a:rPr lang="en-US" sz="1300" b="1" dirty="0">
+              <a:rPr lang="en-US" sz="1220" b="1" dirty="0">
                 <a:solidFill>
                   <a:srgbClr val="0068B7"/>
                 </a:solidFill>
@@ -8034,7 +8034,7 @@
               </a:rPr>
               <a:t>Safeguard to plan</a:t>
             </a:r>
-            <a:endParaRPr lang="en-US" sz="1300" dirty="0"/>
+            <a:endParaRPr lang="en-US" sz="1220" dirty="0"/>
           </a:p>
         </p:txBody>
       </p:sp>
@@ -8046,8 +8046,8 @@
         </p:nvSpPr>
         <p:spPr>
           <a:xfrm>
-            <a:off x="7799832" y="4818888"/>
-            <a:ext cx="3145536" cy="688543"/>
+            <a:off x="7708392" y="4828032"/>
+            <a:ext cx="3282696" cy="749808"/>
           </a:xfrm>
           <a:prstGeom prst="rect">
             <a:avLst/>
@@ -8065,7 +8065,7 @@
               <a:buNone/>
             </a:pPr>
             <a:r>
-              <a:rPr lang="en-US" sz="1320" dirty="0">
+              <a:rPr lang="en-US" sz="1220" dirty="0">
                 <a:solidFill>
                   <a:srgbClr val="17364A"/>
                 </a:solidFill>
@@ -8073,9 +8073,9 @@
                 <a:ea typeface="Aptos" pitchFamily="34" charset="-122"/>
                 <a:cs typeface="Aptos" pitchFamily="34" charset="-120"/>
               </a:rPr>
-              <a:t>Identify what could go wrong, who could be affected, what safeguards are needed, and what evidence should be reviewed before use.</a:t>
-            </a:r>
-            <a:endParaRPr lang="en-US" sz="1320" dirty="0"/>
+              <a:t>Identify what could go wrong, who could be affected, what safeguards are needed,.</a:t>
+            </a:r>
+            <a:endParaRPr lang="en-US" sz="1220" dirty="0"/>
           </a:p>
         </p:txBody>
       </p:sp>
@@ -8366,8 +8366,8 @@
         </p:nvSpPr>
         <p:spPr>
           <a:xfrm>
-            <a:off x="868680" y="1508760"/>
-            <a:ext cx="6309360" cy="4160520"/>
+            <a:off x="822960" y="1463040"/>
+            <a:ext cx="6565392" cy="4343400"/>
           </a:xfrm>
           <a:prstGeom prst="rect">
             <a:avLst/>
@@ -8385,7 +8385,7 @@
               <a:buNone/>
             </a:pPr>
             <a:r>
-              <a:rPr lang="en-US" sz="2100" dirty="0">
+              <a:rPr lang="en-US" sz="1920" dirty="0">
                 <a:solidFill>
                   <a:srgbClr val="003A63"/>
                 </a:solidFill>
@@ -8395,14 +8395,14 @@
               </a:rPr>
               <a:t>• Create an equity evaluation plan for one AI model or AI-supported workflow.</a:t>
             </a:r>
-            <a:endParaRPr lang="en-US" sz="2100" dirty="0"/>
-          </a:p>
-          <a:p>
-            <a:pPr indent="0" marL="0">
-              <a:buNone/>
-            </a:pPr>
-            <a:r>
-              <a:rPr lang="en-US" sz="2100" dirty="0">
+            <a:endParaRPr lang="en-US" sz="1920" dirty="0"/>
+          </a:p>
+          <a:p>
+            <a:pPr indent="0" marL="0">
+              <a:buNone/>
+            </a:pPr>
+            <a:r>
+              <a:rPr lang="en-US" sz="1920" dirty="0">
                 <a:solidFill>
                   <a:srgbClr val="003A63"/>
                 </a:solidFill>
@@ -8410,9 +8410,9 @@
                 <a:ea typeface="Aptos" pitchFamily="34" charset="-122"/>
                 <a:cs typeface="Aptos" pitchFamily="34" charset="-120"/>
               </a:rPr>
-              <a:t>• Include intended use, affected populations, relevant subgroups, data representativeness.</a:t>
-            </a:r>
-            <a:endParaRPr lang="en-US" sz="2100" dirty="0"/>
+              <a:t>• Include intended use, affected populations, relevant subgroups, data.</a:t>
+            </a:r>
+            <a:endParaRPr lang="en-US" sz="1920" dirty="0"/>
           </a:p>
         </p:txBody>
       </p:sp>
@@ -8424,12 +8424,12 @@
         </p:nvSpPr>
         <p:spPr>
           <a:xfrm>
-            <a:off x="7635240" y="1325880"/>
-            <a:ext cx="3474720" cy="1207008"/>
+            <a:off x="7543800" y="1325880"/>
+            <a:ext cx="3611880" cy="1261872"/>
           </a:xfrm>
           <a:prstGeom prst="roundRect">
             <a:avLst>
-              <a:gd name="adj" fmla="val 9091"/>
+              <a:gd name="adj" fmla="val 8696"/>
             </a:avLst>
           </a:prstGeom>
           <a:solidFill>
@@ -8451,8 +8451,8 @@
         </p:nvSpPr>
         <p:spPr>
           <a:xfrm>
-            <a:off x="7799832" y="1472184"/>
-            <a:ext cx="3145536" cy="256032"/>
+            <a:off x="7708392" y="1453896"/>
+            <a:ext cx="3282696" cy="228600"/>
           </a:xfrm>
           <a:prstGeom prst="rect">
             <a:avLst/>
@@ -8468,7 +8468,7 @@
               <a:buNone/>
             </a:pPr>
             <a:r>
-              <a:rPr lang="en-US" sz="1300" b="1" dirty="0">
+              <a:rPr lang="en-US" sz="1220" b="1" dirty="0">
                 <a:solidFill>
                   <a:srgbClr val="0068B7"/>
                 </a:solidFill>
@@ -8478,7 +8478,7 @@
               </a:rPr>
               <a:t>Risk check</a:t>
             </a:r>
-            <a:endParaRPr lang="en-US" sz="1300" dirty="0"/>
+            <a:endParaRPr lang="en-US" sz="1220" dirty="0"/>
           </a:p>
         </p:txBody>
       </p:sp>
@@ -8490,8 +8490,8 @@
         </p:nvSpPr>
         <p:spPr>
           <a:xfrm>
-            <a:off x="7799832" y="1801368"/>
-            <a:ext cx="3145536" cy="640080"/>
+            <a:off x="7708392" y="1764792"/>
+            <a:ext cx="3282696" cy="749808"/>
           </a:xfrm>
           <a:prstGeom prst="rect">
             <a:avLst/>
@@ -8509,7 +8509,7 @@
               <a:buNone/>
             </a:pPr>
             <a:r>
-              <a:rPr lang="en-US" sz="1320" dirty="0">
+              <a:rPr lang="en-US" sz="1220" dirty="0">
                 <a:solidFill>
                   <a:srgbClr val="17364A"/>
                 </a:solidFill>
@@ -8519,7 +8519,7 @@
               </a:rPr>
               <a:t>Create an equity evaluation plan for one AI model or AI-supported workflow.</a:t>
             </a:r>
-            <a:endParaRPr lang="en-US" sz="1320" dirty="0"/>
+            <a:endParaRPr lang="en-US" sz="1220" dirty="0"/>
           </a:p>
         </p:txBody>
       </p:sp>
@@ -8531,12 +8531,12 @@
         </p:nvSpPr>
         <p:spPr>
           <a:xfrm>
-            <a:off x="7635240" y="2670048"/>
-            <a:ext cx="3474720" cy="1377086"/>
+            <a:off x="7543800" y="2724912"/>
+            <a:ext cx="3611880" cy="1527048"/>
           </a:xfrm>
           <a:prstGeom prst="roundRect">
             <a:avLst>
-              <a:gd name="adj" fmla="val 7968"/>
+              <a:gd name="adj" fmla="val 7186"/>
             </a:avLst>
           </a:prstGeom>
           <a:solidFill>
@@ -8558,8 +8558,8 @@
         </p:nvSpPr>
         <p:spPr>
           <a:xfrm>
-            <a:off x="7799832" y="2816352"/>
-            <a:ext cx="3145536" cy="256032"/>
+            <a:off x="7708392" y="2852928"/>
+            <a:ext cx="3282696" cy="228600"/>
           </a:xfrm>
           <a:prstGeom prst="rect">
             <a:avLst/>
@@ -8575,7 +8575,7 @@
               <a:buNone/>
             </a:pPr>
             <a:r>
-              <a:rPr lang="en-US" sz="1300" b="1" dirty="0">
+              <a:rPr lang="en-US" sz="1220" b="1" dirty="0">
                 <a:solidFill>
                   <a:srgbClr val="0068B7"/>
                 </a:solidFill>
@@ -8585,7 +8585,7 @@
               </a:rPr>
               <a:t>Concept checkpoints</a:t>
             </a:r>
-            <a:endParaRPr lang="en-US" sz="1300" dirty="0"/>
+            <a:endParaRPr lang="en-US" sz="1220" dirty="0"/>
           </a:p>
         </p:txBody>
       </p:sp>
@@ -8597,8 +8597,8 @@
         </p:nvSpPr>
         <p:spPr>
           <a:xfrm>
-            <a:off x="7818120" y="3182112"/>
-            <a:ext cx="3090672" cy="718718"/>
+            <a:off x="7726680" y="3182112"/>
+            <a:ext cx="3227832" cy="960120"/>
           </a:xfrm>
           <a:prstGeom prst="rect">
             <a:avLst/>
@@ -8616,7 +8616,7 @@
               <a:buNone/>
             </a:pPr>
             <a:r>
-              <a:rPr lang="en-US" sz="1220" dirty="0">
+              <a:rPr lang="en-US" sz="1140" dirty="0">
                 <a:solidFill>
                   <a:srgbClr val="17364A"/>
                 </a:solidFill>
@@ -8624,16 +8624,16 @@
                 <a:ea typeface="Aptos" pitchFamily="34" charset="-122"/>
                 <a:cs typeface="Aptos" pitchFamily="34" charset="-120"/>
               </a:rPr>
-              <a:t>Create an equity evaluation plan for one AI model or AI-supported.</a:t>
-            </a:r>
-            <a:endParaRPr lang="en-US" sz="1220" dirty="0"/>
-          </a:p>
-          <a:p>
-            <a:pPr indent="0" marL="0">
-              <a:buNone/>
-            </a:pPr>
-            <a:r>
-              <a:rPr lang="en-US" sz="1220" dirty="0">
+              <a:t>Create an equity evaluation plan for one AI model.</a:t>
+            </a:r>
+            <a:endParaRPr lang="en-US" sz="1140" dirty="0"/>
+          </a:p>
+          <a:p>
+            <a:pPr indent="0" marL="0">
+              <a:buNone/>
+            </a:pPr>
+            <a:r>
+              <a:rPr lang="en-US" sz="1140" dirty="0">
                 <a:solidFill>
                   <a:srgbClr val="17364A"/>
                 </a:solidFill>
@@ -8641,9 +8641,9 @@
                 <a:ea typeface="Aptos" pitchFamily="34" charset="-122"/>
                 <a:cs typeface="Aptos" pitchFamily="34" charset="-120"/>
               </a:rPr>
-              <a:t>Include intended use, affected populations, relevant subgroups,.</a:t>
-            </a:r>
-            <a:endParaRPr lang="en-US" sz="1220" dirty="0"/>
+              <a:t>Include intended use, affected populations,.</a:t>
+            </a:r>
+            <a:endParaRPr lang="en-US" sz="1140" dirty="0"/>
           </a:p>
         </p:txBody>
       </p:sp>
@@ -8655,12 +8655,12 @@
         </p:nvSpPr>
         <p:spPr>
           <a:xfrm>
-            <a:off x="7635240" y="4184294"/>
-            <a:ext cx="3474720" cy="1466698"/>
+            <a:off x="7543800" y="4389120"/>
+            <a:ext cx="3611880" cy="1261872"/>
           </a:xfrm>
           <a:prstGeom prst="roundRect">
             <a:avLst>
-              <a:gd name="adj" fmla="val 7481"/>
+              <a:gd name="adj" fmla="val 8696"/>
             </a:avLst>
           </a:prstGeom>
           <a:solidFill>
@@ -8682,8 +8682,8 @@
         </p:nvSpPr>
         <p:spPr>
           <a:xfrm>
-            <a:off x="7799832" y="4330598"/>
-            <a:ext cx="3145536" cy="256032"/>
+            <a:off x="7708392" y="4517136"/>
+            <a:ext cx="3282696" cy="228600"/>
           </a:xfrm>
           <a:prstGeom prst="rect">
             <a:avLst/>
@@ -8699,7 +8699,7 @@
               <a:buNone/>
             </a:pPr>
             <a:r>
-              <a:rPr lang="en-US" sz="1300" b="1" dirty="0">
+              <a:rPr lang="en-US" sz="1220" b="1" dirty="0">
                 <a:solidFill>
                   <a:srgbClr val="0068B7"/>
                 </a:solidFill>
@@ -8709,7 +8709,7 @@
               </a:rPr>
               <a:t>Safeguard to plan</a:t>
             </a:r>
-            <a:endParaRPr lang="en-US" sz="1300" dirty="0"/>
+            <a:endParaRPr lang="en-US" sz="1220" dirty="0"/>
           </a:p>
         </p:txBody>
       </p:sp>
@@ -8721,8 +8721,8 @@
         </p:nvSpPr>
         <p:spPr>
           <a:xfrm>
-            <a:off x="7799832" y="4659782"/>
-            <a:ext cx="3145536" cy="899770"/>
+            <a:off x="7708392" y="4828032"/>
+            <a:ext cx="3282696" cy="749808"/>
           </a:xfrm>
           <a:prstGeom prst="rect">
             <a:avLst/>
@@ -8740,7 +8740,7 @@
               <a:buNone/>
             </a:pPr>
             <a:r>
-              <a:rPr lang="en-US" sz="1320" dirty="0">
+              <a:rPr lang="en-US" sz="1220" dirty="0">
                 <a:solidFill>
                   <a:srgbClr val="17364A"/>
                 </a:solidFill>
@@ -8748,9 +8748,9 @@
                 <a:ea typeface="Aptos" pitchFamily="34" charset="-122"/>
                 <a:cs typeface="Aptos" pitchFamily="34" charset="-120"/>
               </a:rPr>
-              <a:t>Use the assignment to test whether you can explain the concept, apply it to a realistic public health situation, and identify what would need review before the work moves forward.</a:t>
-            </a:r>
-            <a:endParaRPr lang="en-US" sz="1320" dirty="0"/>
+              <a:t>Use the assignment to test whether you can explain the concept, apply it to a.</a:t>
+            </a:r>
+            <a:endParaRPr lang="en-US" sz="1220" dirty="0"/>
           </a:p>
         </p:txBody>
       </p:sp>
@@ -9041,8 +9041,8 @@
         </p:nvSpPr>
         <p:spPr>
           <a:xfrm>
-            <a:off x="868680" y="1508760"/>
-            <a:ext cx="6309360" cy="4160520"/>
+            <a:off x="822960" y="1463040"/>
+            <a:ext cx="6565392" cy="4343400"/>
           </a:xfrm>
           <a:prstGeom prst="rect">
             <a:avLst/>
@@ -9060,7 +9060,7 @@
               <a:buNone/>
             </a:pPr>
             <a:r>
-              <a:rPr lang="en-US" sz="2100" dirty="0">
+              <a:rPr lang="en-US" sz="1920" dirty="0">
                 <a:solidFill>
                   <a:srgbClr val="003A63"/>
                 </a:solidFill>
@@ -9070,14 +9070,14 @@
               </a:rPr>
               <a:t>• Equity evaluation plan</a:t>
             </a:r>
-            <a:endParaRPr lang="en-US" sz="2100" dirty="0"/>
-          </a:p>
-          <a:p>
-            <a:pPr indent="0" marL="0">
-              <a:buNone/>
-            </a:pPr>
-            <a:r>
-              <a:rPr lang="en-US" sz="2100" dirty="0">
+            <a:endParaRPr lang="en-US" sz="1920" dirty="0"/>
+          </a:p>
+          <a:p>
+            <a:pPr indent="0" marL="0">
+              <a:buNone/>
+            </a:pPr>
+            <a:r>
+              <a:rPr lang="en-US" sz="1920" dirty="0">
                 <a:solidFill>
                   <a:srgbClr val="003A63"/>
                 </a:solidFill>
@@ -9087,14 +9087,14 @@
               </a:rPr>
               <a:t>• Subgroup and data representativeness review</a:t>
             </a:r>
-            <a:endParaRPr lang="en-US" sz="2100" dirty="0"/>
-          </a:p>
-          <a:p>
-            <a:pPr indent="0" marL="0">
-              <a:buNone/>
-            </a:pPr>
-            <a:r>
-              <a:rPr lang="en-US" sz="2100" dirty="0">
+            <a:endParaRPr lang="en-US" sz="1920" dirty="0"/>
+          </a:p>
+          <a:p>
+            <a:pPr indent="0" marL="0">
+              <a:buNone/>
+            </a:pPr>
+            <a:r>
+              <a:rPr lang="en-US" sz="1920" dirty="0">
                 <a:solidFill>
                   <a:srgbClr val="003A63"/>
                 </a:solidFill>
@@ -9104,7 +9104,7 @@
               </a:rPr>
               <a:t>• Potential harm and mitigation table</a:t>
             </a:r>
-            <a:endParaRPr lang="en-US" sz="2100" dirty="0"/>
+            <a:endParaRPr lang="en-US" sz="1920" dirty="0"/>
           </a:p>
         </p:txBody>
       </p:sp>
@@ -9116,12 +9116,12 @@
         </p:nvSpPr>
         <p:spPr>
           <a:xfrm>
-            <a:off x="7635240" y="1325880"/>
-            <a:ext cx="3474720" cy="1207008"/>
+            <a:off x="7543800" y="1325880"/>
+            <a:ext cx="3611880" cy="1261872"/>
           </a:xfrm>
           <a:prstGeom prst="roundRect">
             <a:avLst>
-              <a:gd name="adj" fmla="val 9091"/>
+              <a:gd name="adj" fmla="val 8696"/>
             </a:avLst>
           </a:prstGeom>
           <a:solidFill>
@@ -9143,8 +9143,8 @@
         </p:nvSpPr>
         <p:spPr>
           <a:xfrm>
-            <a:off x="7799832" y="1472184"/>
-            <a:ext cx="3145536" cy="256032"/>
+            <a:off x="7708392" y="1453896"/>
+            <a:ext cx="3282696" cy="228600"/>
           </a:xfrm>
           <a:prstGeom prst="rect">
             <a:avLst/>
@@ -9160,7 +9160,7 @@
               <a:buNone/>
             </a:pPr>
             <a:r>
-              <a:rPr lang="en-US" sz="1300" b="1" dirty="0">
+              <a:rPr lang="en-US" sz="1220" b="1" dirty="0">
                 <a:solidFill>
                   <a:srgbClr val="0068B7"/>
                 </a:solidFill>
@@ -9170,7 +9170,7 @@
               </a:rPr>
               <a:t>Risk check</a:t>
             </a:r>
-            <a:endParaRPr lang="en-US" sz="1300" dirty="0"/>
+            <a:endParaRPr lang="en-US" sz="1220" dirty="0"/>
           </a:p>
         </p:txBody>
       </p:sp>
@@ -9182,8 +9182,8 @@
         </p:nvSpPr>
         <p:spPr>
           <a:xfrm>
-            <a:off x="7799832" y="1801368"/>
-            <a:ext cx="3145536" cy="640080"/>
+            <a:off x="7708392" y="1764792"/>
+            <a:ext cx="3282696" cy="749808"/>
           </a:xfrm>
           <a:prstGeom prst="rect">
             <a:avLst/>
@@ -9201,7 +9201,7 @@
               <a:buNone/>
             </a:pPr>
             <a:r>
-              <a:rPr lang="en-US" sz="1320" dirty="0">
+              <a:rPr lang="en-US" sz="1220" dirty="0">
                 <a:solidFill>
                   <a:srgbClr val="17364A"/>
                 </a:solidFill>
@@ -9211,7 +9211,7 @@
               </a:rPr>
               <a:t>Equity evaluation plan</a:t>
             </a:r>
-            <a:endParaRPr lang="en-US" sz="1320" dirty="0"/>
+            <a:endParaRPr lang="en-US" sz="1220" dirty="0"/>
           </a:p>
         </p:txBody>
       </p:sp>
@@ -9223,12 +9223,12 @@
         </p:nvSpPr>
         <p:spPr>
           <a:xfrm>
-            <a:off x="7635240" y="2670048"/>
-            <a:ext cx="3474720" cy="1536192"/>
+            <a:off x="7543800" y="2724912"/>
+            <a:ext cx="3611880" cy="1527048"/>
           </a:xfrm>
           <a:prstGeom prst="roundRect">
             <a:avLst>
-              <a:gd name="adj" fmla="val 7143"/>
+              <a:gd name="adj" fmla="val 7186"/>
             </a:avLst>
           </a:prstGeom>
           <a:solidFill>
@@ -9250,8 +9250,8 @@
         </p:nvSpPr>
         <p:spPr>
           <a:xfrm>
-            <a:off x="7799832" y="2816352"/>
-            <a:ext cx="3145536" cy="256032"/>
+            <a:off x="7708392" y="2852928"/>
+            <a:ext cx="3282696" cy="228600"/>
           </a:xfrm>
           <a:prstGeom prst="rect">
             <a:avLst/>
@@ -9267,7 +9267,7 @@
               <a:buNone/>
             </a:pPr>
             <a:r>
-              <a:rPr lang="en-US" sz="1300" b="1" dirty="0">
+              <a:rPr lang="en-US" sz="1220" b="1" dirty="0">
                 <a:solidFill>
                   <a:srgbClr val="0068B7"/>
                 </a:solidFill>
@@ -9277,7 +9277,7 @@
               </a:rPr>
               <a:t>Concept checkpoints</a:t>
             </a:r>
-            <a:endParaRPr lang="en-US" sz="1300" dirty="0"/>
+            <a:endParaRPr lang="en-US" sz="1220" dirty="0"/>
           </a:p>
         </p:txBody>
       </p:sp>
@@ -9289,8 +9289,8 @@
         </p:nvSpPr>
         <p:spPr>
           <a:xfrm>
-            <a:off x="7818120" y="3182112"/>
-            <a:ext cx="3090672" cy="877824"/>
+            <a:off x="7726680" y="3182112"/>
+            <a:ext cx="3227832" cy="960120"/>
           </a:xfrm>
           <a:prstGeom prst="rect">
             <a:avLst/>
@@ -9308,7 +9308,7 @@
               <a:buNone/>
             </a:pPr>
             <a:r>
-              <a:rPr lang="en-US" sz="1220" dirty="0">
+              <a:rPr lang="en-US" sz="1140" dirty="0">
                 <a:solidFill>
                   <a:srgbClr val="17364A"/>
                 </a:solidFill>
@@ -9318,14 +9318,14 @@
               </a:rPr>
               <a:t>Equity evaluation plan</a:t>
             </a:r>
-            <a:endParaRPr lang="en-US" sz="1220" dirty="0"/>
-          </a:p>
-          <a:p>
-            <a:pPr indent="0" marL="0">
-              <a:buNone/>
-            </a:pPr>
-            <a:r>
-              <a:rPr lang="en-US" sz="1220" dirty="0">
+            <a:endParaRPr lang="en-US" sz="1140" dirty="0"/>
+          </a:p>
+          <a:p>
+            <a:pPr indent="0" marL="0">
+              <a:buNone/>
+            </a:pPr>
+            <a:r>
+              <a:rPr lang="en-US" sz="1140" dirty="0">
                 <a:solidFill>
                   <a:srgbClr val="17364A"/>
                 </a:solidFill>
@@ -9335,14 +9335,14 @@
               </a:rPr>
               <a:t>Subgroup and data representativeness review</a:t>
             </a:r>
-            <a:endParaRPr lang="en-US" sz="1220" dirty="0"/>
-          </a:p>
-          <a:p>
-            <a:pPr indent="0" marL="0">
-              <a:buNone/>
-            </a:pPr>
-            <a:r>
-              <a:rPr lang="en-US" sz="1220" dirty="0">
+            <a:endParaRPr lang="en-US" sz="1140" dirty="0"/>
+          </a:p>
+          <a:p>
+            <a:pPr indent="0" marL="0">
+              <a:buNone/>
+            </a:pPr>
+            <a:r>
+              <a:rPr lang="en-US" sz="1140" dirty="0">
                 <a:solidFill>
                   <a:srgbClr val="17364A"/>
                 </a:solidFill>
@@ -9352,7 +9352,7 @@
               </a:rPr>
               <a:t>Potential harm and mitigation table</a:t>
             </a:r>
-            <a:endParaRPr lang="en-US" sz="1220" dirty="0"/>
+            <a:endParaRPr lang="en-US" sz="1140" dirty="0"/>
           </a:p>
         </p:txBody>
       </p:sp>
@@ -9364,12 +9364,12 @@
         </p:nvSpPr>
         <p:spPr>
           <a:xfrm>
-            <a:off x="7635240" y="4343400"/>
-            <a:ext cx="3474720" cy="1255471"/>
+            <a:off x="7543800" y="4389120"/>
+            <a:ext cx="3611880" cy="1261872"/>
           </a:xfrm>
           <a:prstGeom prst="roundRect">
             <a:avLst>
-              <a:gd name="adj" fmla="val 8740"/>
+              <a:gd name="adj" fmla="val 8696"/>
             </a:avLst>
           </a:prstGeom>
           <a:solidFill>
@@ -9391,8 +9391,8 @@
         </p:nvSpPr>
         <p:spPr>
           <a:xfrm>
-            <a:off x="7799832" y="4489704"/>
-            <a:ext cx="3145536" cy="256032"/>
+            <a:off x="7708392" y="4517136"/>
+            <a:ext cx="3282696" cy="228600"/>
           </a:xfrm>
           <a:prstGeom prst="rect">
             <a:avLst/>
@@ -9408,7 +9408,7 @@
               <a:buNone/>
             </a:pPr>
             <a:r>
-              <a:rPr lang="en-US" sz="1300" b="1" dirty="0">
+              <a:rPr lang="en-US" sz="1220" b="1" dirty="0">
                 <a:solidFill>
                   <a:srgbClr val="0068B7"/>
                 </a:solidFill>
@@ -9418,7 +9418,7 @@
               </a:rPr>
               <a:t>Safeguard to plan</a:t>
             </a:r>
-            <a:endParaRPr lang="en-US" sz="1300" dirty="0"/>
+            <a:endParaRPr lang="en-US" sz="1220" dirty="0"/>
           </a:p>
         </p:txBody>
       </p:sp>
@@ -9430,8 +9430,8 @@
         </p:nvSpPr>
         <p:spPr>
           <a:xfrm>
-            <a:off x="7799832" y="4818888"/>
-            <a:ext cx="3145536" cy="688543"/>
+            <a:off x="7708392" y="4828032"/>
+            <a:ext cx="3282696" cy="749808"/>
           </a:xfrm>
           <a:prstGeom prst="rect">
             <a:avLst/>
@@ -9449,7 +9449,7 @@
               <a:buNone/>
             </a:pPr>
             <a:r>
-              <a:rPr lang="en-US" sz="1320" dirty="0">
+              <a:rPr lang="en-US" sz="1220" dirty="0">
                 <a:solidFill>
                   <a:srgbClr val="17364A"/>
                 </a:solidFill>
@@ -9457,9 +9457,9 @@
                 <a:ea typeface="Aptos" pitchFamily="34" charset="-122"/>
                 <a:cs typeface="Aptos" pitchFamily="34" charset="-120"/>
               </a:rPr>
-              <a:t>Identify what could go wrong, who could be affected, what safeguards are needed, and what evidence should be reviewed before use.</a:t>
-            </a:r>
-            <a:endParaRPr lang="en-US" sz="1320" dirty="0"/>
+              <a:t>Identify what could go wrong, who could be affected, what safeguards are needed,.</a:t>
+            </a:r>
+            <a:endParaRPr lang="en-US" sz="1220" dirty="0"/>
           </a:p>
         </p:txBody>
       </p:sp>
@@ -9750,8 +9750,8 @@
         </p:nvSpPr>
         <p:spPr>
           <a:xfrm>
-            <a:off x="868680" y="1508760"/>
-            <a:ext cx="6309360" cy="4160520"/>
+            <a:off x="822960" y="1463040"/>
+            <a:ext cx="6565392" cy="4343400"/>
           </a:xfrm>
           <a:prstGeom prst="rect">
             <a:avLst/>
@@ -9769,7 +9769,7 @@
               <a:buNone/>
             </a:pPr>
             <a:r>
-              <a:rPr lang="en-US" sz="2100" dirty="0">
+              <a:rPr lang="en-US" sz="1920" dirty="0">
                 <a:solidFill>
                   <a:srgbClr val="003A63"/>
                 </a:solidFill>
@@ -9779,14 +9779,14 @@
               </a:rPr>
               <a:t>• Equity monitoring indicators</a:t>
             </a:r>
-            <a:endParaRPr lang="en-US" sz="2100" dirty="0"/>
-          </a:p>
-          <a:p>
-            <a:pPr indent="0" marL="0">
-              <a:buNone/>
-            </a:pPr>
-            <a:r>
-              <a:rPr lang="en-US" sz="2100" dirty="0">
+            <a:endParaRPr lang="en-US" sz="1920" dirty="0"/>
+          </a:p>
+          <a:p>
+            <a:pPr indent="0" marL="0">
+              <a:buNone/>
+            </a:pPr>
+            <a:r>
+              <a:rPr lang="en-US" sz="1920" dirty="0">
                 <a:solidFill>
                   <a:srgbClr val="003A63"/>
                 </a:solidFill>
@@ -9796,7 +9796,7 @@
               </a:rPr>
               <a:t>• Governance recommendation</a:t>
             </a:r>
-            <a:endParaRPr lang="en-US" sz="2100" dirty="0"/>
+            <a:endParaRPr lang="en-US" sz="1920" dirty="0"/>
           </a:p>
         </p:txBody>
       </p:sp>
@@ -9808,12 +9808,12 @@
         </p:nvSpPr>
         <p:spPr>
           <a:xfrm>
-            <a:off x="7635240" y="1325880"/>
-            <a:ext cx="3474720" cy="1207008"/>
+            <a:off x="7543800" y="1325880"/>
+            <a:ext cx="3611880" cy="1261872"/>
           </a:xfrm>
           <a:prstGeom prst="roundRect">
             <a:avLst>
-              <a:gd name="adj" fmla="val 9091"/>
+              <a:gd name="adj" fmla="val 8696"/>
             </a:avLst>
           </a:prstGeom>
           <a:solidFill>
@@ -9835,8 +9835,8 @@
         </p:nvSpPr>
         <p:spPr>
           <a:xfrm>
-            <a:off x="7799832" y="1472184"/>
-            <a:ext cx="3145536" cy="256032"/>
+            <a:off x="7708392" y="1453896"/>
+            <a:ext cx="3282696" cy="228600"/>
           </a:xfrm>
           <a:prstGeom prst="rect">
             <a:avLst/>
@@ -9852,7 +9852,7 @@
               <a:buNone/>
             </a:pPr>
             <a:r>
-              <a:rPr lang="en-US" sz="1300" b="1" dirty="0">
+              <a:rPr lang="en-US" sz="1220" b="1" dirty="0">
                 <a:solidFill>
                   <a:srgbClr val="0068B7"/>
                 </a:solidFill>
@@ -9862,7 +9862,7 @@
               </a:rPr>
               <a:t>Risk check</a:t>
             </a:r>
-            <a:endParaRPr lang="en-US" sz="1300" dirty="0"/>
+            <a:endParaRPr lang="en-US" sz="1220" dirty="0"/>
           </a:p>
         </p:txBody>
       </p:sp>
@@ -9874,8 +9874,8 @@
         </p:nvSpPr>
         <p:spPr>
           <a:xfrm>
-            <a:off x="7799832" y="1801368"/>
-            <a:ext cx="3145536" cy="640080"/>
+            <a:off x="7708392" y="1764792"/>
+            <a:ext cx="3282696" cy="749808"/>
           </a:xfrm>
           <a:prstGeom prst="rect">
             <a:avLst/>
@@ -9893,7 +9893,7 @@
               <a:buNone/>
             </a:pPr>
             <a:r>
-              <a:rPr lang="en-US" sz="1320" dirty="0">
+              <a:rPr lang="en-US" sz="1220" dirty="0">
                 <a:solidFill>
                   <a:srgbClr val="17364A"/>
                 </a:solidFill>
@@ -9903,7 +9903,7 @@
               </a:rPr>
               <a:t>Equity monitoring indicators</a:t>
             </a:r>
-            <a:endParaRPr lang="en-US" sz="1320" dirty="0"/>
+            <a:endParaRPr lang="en-US" sz="1220" dirty="0"/>
           </a:p>
         </p:txBody>
       </p:sp>
@@ -9915,12 +9915,12 @@
         </p:nvSpPr>
         <p:spPr>
           <a:xfrm>
-            <a:off x="7635240" y="2670048"/>
-            <a:ext cx="3474720" cy="1536192"/>
+            <a:off x="7543800" y="2724912"/>
+            <a:ext cx="3611880" cy="1527048"/>
           </a:xfrm>
           <a:prstGeom prst="roundRect">
             <a:avLst>
-              <a:gd name="adj" fmla="val 7143"/>
+              <a:gd name="adj" fmla="val 7186"/>
             </a:avLst>
           </a:prstGeom>
           <a:solidFill>
@@ -9942,8 +9942,8 @@
         </p:nvSpPr>
         <p:spPr>
           <a:xfrm>
-            <a:off x="7799832" y="2816352"/>
-            <a:ext cx="3145536" cy="256032"/>
+            <a:off x="7708392" y="2852928"/>
+            <a:ext cx="3282696" cy="228600"/>
           </a:xfrm>
           <a:prstGeom prst="rect">
             <a:avLst/>
@@ -9959,7 +9959,7 @@
               <a:buNone/>
             </a:pPr>
             <a:r>
-              <a:rPr lang="en-US" sz="1300" b="1" dirty="0">
+              <a:rPr lang="en-US" sz="1220" b="1" dirty="0">
                 <a:solidFill>
                   <a:srgbClr val="0068B7"/>
                 </a:solidFill>
@@ -9969,7 +9969,7 @@
               </a:rPr>
               <a:t>Concept checkpoints</a:t>
             </a:r>
-            <a:endParaRPr lang="en-US" sz="1300" dirty="0"/>
+            <a:endParaRPr lang="en-US" sz="1220" dirty="0"/>
           </a:p>
         </p:txBody>
       </p:sp>
@@ -9981,8 +9981,8 @@
         </p:nvSpPr>
         <p:spPr>
           <a:xfrm>
-            <a:off x="7818120" y="3182112"/>
-            <a:ext cx="3090672" cy="877824"/>
+            <a:off x="7726680" y="3182112"/>
+            <a:ext cx="3227832" cy="960120"/>
           </a:xfrm>
           <a:prstGeom prst="rect">
             <a:avLst/>
@@ -10000,7 +10000,7 @@
               <a:buNone/>
             </a:pPr>
             <a:r>
-              <a:rPr lang="en-US" sz="1220" dirty="0">
+              <a:rPr lang="en-US" sz="1140" dirty="0">
                 <a:solidFill>
                   <a:srgbClr val="17364A"/>
                 </a:solidFill>
@@ -10010,14 +10010,14 @@
               </a:rPr>
               <a:t>Equity monitoring indicators</a:t>
             </a:r>
-            <a:endParaRPr lang="en-US" sz="1220" dirty="0"/>
-          </a:p>
-          <a:p>
-            <a:pPr indent="0" marL="0">
-              <a:buNone/>
-            </a:pPr>
-            <a:r>
-              <a:rPr lang="en-US" sz="1220" dirty="0">
+            <a:endParaRPr lang="en-US" sz="1140" dirty="0"/>
+          </a:p>
+          <a:p>
+            <a:pPr indent="0" marL="0">
+              <a:buNone/>
+            </a:pPr>
+            <a:r>
+              <a:rPr lang="en-US" sz="1140" dirty="0">
                 <a:solidFill>
                   <a:srgbClr val="17364A"/>
                 </a:solidFill>
@@ -10027,7 +10027,7 @@
               </a:rPr>
               <a:t>Governance recommendation</a:t>
             </a:r>
-            <a:endParaRPr lang="en-US" sz="1220" dirty="0"/>
+            <a:endParaRPr lang="en-US" sz="1140" dirty="0"/>
           </a:p>
         </p:txBody>
       </p:sp>
@@ -10039,12 +10039,12 @@
         </p:nvSpPr>
         <p:spPr>
           <a:xfrm>
-            <a:off x="7635240" y="4343400"/>
-            <a:ext cx="3474720" cy="1255471"/>
+            <a:off x="7543800" y="4389120"/>
+            <a:ext cx="3611880" cy="1261872"/>
           </a:xfrm>
           <a:prstGeom prst="roundRect">
             <a:avLst>
-              <a:gd name="adj" fmla="val 8740"/>
+              <a:gd name="adj" fmla="val 8696"/>
             </a:avLst>
           </a:prstGeom>
           <a:solidFill>
@@ -10066,8 +10066,8 @@
         </p:nvSpPr>
         <p:spPr>
           <a:xfrm>
-            <a:off x="7799832" y="4489704"/>
-            <a:ext cx="3145536" cy="256032"/>
+            <a:off x="7708392" y="4517136"/>
+            <a:ext cx="3282696" cy="228600"/>
           </a:xfrm>
           <a:prstGeom prst="rect">
             <a:avLst/>
@@ -10083,7 +10083,7 @@
               <a:buNone/>
             </a:pPr>
             <a:r>
-              <a:rPr lang="en-US" sz="1300" b="1" dirty="0">
+              <a:rPr lang="en-US" sz="1220" b="1" dirty="0">
                 <a:solidFill>
                   <a:srgbClr val="0068B7"/>
                 </a:solidFill>
@@ -10093,7 +10093,7 @@
               </a:rPr>
               <a:t>Safeguard to plan</a:t>
             </a:r>
-            <a:endParaRPr lang="en-US" sz="1300" dirty="0"/>
+            <a:endParaRPr lang="en-US" sz="1220" dirty="0"/>
           </a:p>
         </p:txBody>
       </p:sp>
@@ -10105,8 +10105,8 @@
         </p:nvSpPr>
         <p:spPr>
           <a:xfrm>
-            <a:off x="7799832" y="4818888"/>
-            <a:ext cx="3145536" cy="688543"/>
+            <a:off x="7708392" y="4828032"/>
+            <a:ext cx="3282696" cy="749808"/>
           </a:xfrm>
           <a:prstGeom prst="rect">
             <a:avLst/>
@@ -10124,7 +10124,7 @@
               <a:buNone/>
             </a:pPr>
             <a:r>
-              <a:rPr lang="en-US" sz="1320" dirty="0">
+              <a:rPr lang="en-US" sz="1220" dirty="0">
                 <a:solidFill>
                   <a:srgbClr val="17364A"/>
                 </a:solidFill>
@@ -10132,9 +10132,9 @@
                 <a:ea typeface="Aptos" pitchFamily="34" charset="-122"/>
                 <a:cs typeface="Aptos" pitchFamily="34" charset="-120"/>
               </a:rPr>
-              <a:t>Identify what could go wrong, who could be affected, what safeguards are needed, and what evidence should be reviewed before use.</a:t>
-            </a:r>
-            <a:endParaRPr lang="en-US" sz="1320" dirty="0"/>
+              <a:t>Identify what could go wrong, who could be affected, what safeguards are needed,.</a:t>
+            </a:r>
+            <a:endParaRPr lang="en-US" sz="1220" dirty="0"/>
           </a:p>
         </p:txBody>
       </p:sp>
@@ -10452,7 +10452,7 @@
                 <a:ea typeface="Aptos" pitchFamily="34" charset="-122"/>
                 <a:cs typeface="Aptos" pitchFamily="34" charset="-120"/>
               </a:rPr>
-              <a:t>• Equity evaluation examines whether an AI model performs differently across populations,.</a:t>
+              <a:t>• Equity evaluation examines whether an AI model performs differently across.</a:t>
             </a:r>
             <a:endParaRPr lang="en-US" sz="2100" dirty="0"/>
           </a:p>
@@ -10469,7 +10469,7 @@
                 <a:ea typeface="Aptos" pitchFamily="34" charset="-122"/>
                 <a:cs typeface="Aptos" pitchFamily="34" charset="-120"/>
               </a:rPr>
-              <a:t>• Public health agencies have a responsibility to evaluate not only average model performance.</a:t>
+              <a:t>• Public health agencies have a responsibility to evaluate not only average.</a:t>
             </a:r>
             <a:endParaRPr lang="en-US" sz="2100" dirty="0"/>
           </a:p>
@@ -10486,7 +10486,7 @@
                 <a:ea typeface="Aptos" pitchFamily="34" charset="-122"/>
                 <a:cs typeface="Aptos" pitchFamily="34" charset="-120"/>
               </a:rPr>
-              <a:t>• This is especially important when AI is used to prioritize cases, allocate services, detect.</a:t>
+              <a:t>• This is especially important when AI is used to prioritize cases, allocate.</a:t>
             </a:r>
             <a:endParaRPr lang="en-US" sz="2100" dirty="0"/>
           </a:p>
@@ -10527,8 +10527,8 @@
         </p:nvSpPr>
         <p:spPr>
           <a:xfrm>
-            <a:off x="8074152" y="1563624"/>
-            <a:ext cx="2825496" cy="256032"/>
+            <a:off x="8074152" y="1545336"/>
+            <a:ext cx="2825496" cy="228600"/>
           </a:xfrm>
           <a:prstGeom prst="rect">
             <a:avLst/>
@@ -10544,7 +10544,7 @@
               <a:buNone/>
             </a:pPr>
             <a:r>
-              <a:rPr lang="en-US" sz="1300" b="1" dirty="0">
+              <a:rPr lang="en-US" sz="1220" b="1" dirty="0">
                 <a:solidFill>
                   <a:srgbClr val="0068B7"/>
                 </a:solidFill>
@@ -10554,7 +10554,7 @@
               </a:rPr>
               <a:t>Module details</a:t>
             </a:r>
-            <a:endParaRPr lang="en-US" sz="1300" dirty="0"/>
+            <a:endParaRPr lang="en-US" sz="1220" dirty="0"/>
           </a:p>
         </p:txBody>
       </p:sp>
@@ -10566,8 +10566,8 @@
         </p:nvSpPr>
         <p:spPr>
           <a:xfrm>
-            <a:off x="8074152" y="1892808"/>
-            <a:ext cx="2825496" cy="1353312"/>
+            <a:off x="8074152" y="1856232"/>
+            <a:ext cx="2825496" cy="1408176"/>
           </a:xfrm>
           <a:prstGeom prst="rect">
             <a:avLst/>
@@ -10585,7 +10585,7 @@
               <a:buNone/>
             </a:pPr>
             <a:r>
-              <a:rPr lang="en-US" sz="1320" dirty="0">
+              <a:rPr lang="en-US" sz="1220" dirty="0">
                 <a:solidFill>
                   <a:srgbClr val="17364A"/>
                 </a:solidFill>
@@ -10593,9 +10593,9 @@
                 <a:ea typeface="Aptos" pitchFamily="34" charset="-122"/>
                 <a:cs typeface="Aptos" pitchFamily="34" charset="-120"/>
               </a:rPr>
-              <a:t>Level: intermediate/practitioner Primary track: Analytics and Modeling Track Appears in tracks: analytics-and-modeling, governance-and-security, epidemiology, policy, communications</a:t>
-            </a:r>
-            <a:endParaRPr lang="en-US" sz="1320" dirty="0"/>
+              <a:t>Level: intermediate/practitioner Primary track: Analytics and Modeling Track.</a:t>
+            </a:r>
+            <a:endParaRPr lang="en-US" sz="1220" dirty="0"/>
           </a:p>
         </p:txBody>
       </p:sp>
@@ -10634,8 +10634,8 @@
         </p:nvSpPr>
         <p:spPr>
           <a:xfrm>
-            <a:off x="8074152" y="3822192"/>
-            <a:ext cx="2825496" cy="256032"/>
+            <a:off x="8074152" y="3803904"/>
+            <a:ext cx="2825496" cy="228600"/>
           </a:xfrm>
           <a:prstGeom prst="rect">
             <a:avLst/>
@@ -10651,7 +10651,7 @@
               <a:buNone/>
             </a:pPr>
             <a:r>
-              <a:rPr lang="en-US" sz="1300" b="1" dirty="0">
+              <a:rPr lang="en-US" sz="1220" b="1" dirty="0">
                 <a:solidFill>
                   <a:srgbClr val="0068B7"/>
                 </a:solidFill>
@@ -10661,7 +10661,7 @@
               </a:rPr>
               <a:t>Learning sequence</a:t>
             </a:r>
-            <a:endParaRPr lang="en-US" sz="1300" dirty="0"/>
+            <a:endParaRPr lang="en-US" sz="1220" dirty="0"/>
           </a:p>
         </p:txBody>
       </p:sp>
@@ -10673,8 +10673,8 @@
         </p:nvSpPr>
         <p:spPr>
           <a:xfrm>
-            <a:off x="8092440" y="4187952"/>
-            <a:ext cx="2770632" cy="1033272"/>
+            <a:off x="8092440" y="4133088"/>
+            <a:ext cx="2770632" cy="1124712"/>
           </a:xfrm>
           <a:prstGeom prst="rect">
             <a:avLst/>
@@ -10692,7 +10692,7 @@
               <a:buNone/>
             </a:pPr>
             <a:r>
-              <a:rPr lang="en-US" sz="1220" dirty="0">
+              <a:rPr lang="en-US" sz="1140" dirty="0">
                 <a:solidFill>
                   <a:srgbClr val="17364A"/>
                 </a:solidFill>
@@ -10702,14 +10702,14 @@
               </a:rPr>
               <a:t>Read the module for shared vocabulary and context.</a:t>
             </a:r>
-            <a:endParaRPr lang="en-US" sz="1220" dirty="0"/>
-          </a:p>
-          <a:p>
-            <a:pPr indent="0" marL="0">
-              <a:buNone/>
-            </a:pPr>
-            <a:r>
-              <a:rPr lang="en-US" sz="1220" dirty="0">
+            <a:endParaRPr lang="en-US" sz="1140" dirty="0"/>
+          </a:p>
+          <a:p>
+            <a:pPr indent="0" marL="0">
+              <a:buNone/>
+            </a:pPr>
+            <a:r>
+              <a:rPr lang="en-US" sz="1140" dirty="0">
                 <a:solidFill>
                   <a:srgbClr val="17364A"/>
                 </a:solidFill>
@@ -10717,16 +10717,16 @@
                 <a:ea typeface="Aptos" pitchFamily="34" charset="-122"/>
                 <a:cs typeface="Aptos" pitchFamily="34" charset="-120"/>
               </a:rPr>
-              <a:t>Complete the practical exercise to apply the concept.</a:t>
-            </a:r>
-            <a:endParaRPr lang="en-US" sz="1220" dirty="0"/>
-          </a:p>
-          <a:p>
-            <a:pPr indent="0" marL="0">
-              <a:buNone/>
-            </a:pPr>
-            <a:r>
-              <a:rPr lang="en-US" sz="1220" dirty="0">
+              <a:t>Complete the practical exercise to apply the.</a:t>
+            </a:r>
+            <a:endParaRPr lang="en-US" sz="1140" dirty="0"/>
+          </a:p>
+          <a:p>
+            <a:pPr indent="0" marL="0">
+              <a:buNone/>
+            </a:pPr>
+            <a:r>
+              <a:rPr lang="en-US" sz="1140" dirty="0">
                 <a:solidFill>
                   <a:srgbClr val="17364A"/>
                 </a:solidFill>
@@ -10736,7 +10736,7 @@
               </a:rPr>
               <a:t>Use the notes and references for deeper review.</a:t>
             </a:r>
-            <a:endParaRPr lang="en-US" sz="1220" dirty="0"/>
+            <a:endParaRPr lang="en-US" sz="1140" dirty="0"/>
           </a:p>
         </p:txBody>
       </p:sp>
@@ -11027,8 +11027,8 @@
         </p:nvSpPr>
         <p:spPr>
           <a:xfrm>
-            <a:off x="868680" y="1508760"/>
-            <a:ext cx="6309360" cy="4160520"/>
+            <a:off x="822960" y="1463040"/>
+            <a:ext cx="6565392" cy="4343400"/>
           </a:xfrm>
           <a:prstGeom prst="rect">
             <a:avLst/>
@@ -11046,7 +11046,7 @@
               <a:buNone/>
             </a:pPr>
             <a:r>
-              <a:rPr lang="en-US" sz="2100" dirty="0">
+              <a:rPr lang="en-US" sz="1920" dirty="0">
                 <a:solidFill>
                   <a:srgbClr val="003A63"/>
                 </a:solidFill>
@@ -11056,14 +11056,14 @@
               </a:rPr>
               <a:t>• Equity evaluation plan</a:t>
             </a:r>
-            <a:endParaRPr lang="en-US" sz="2100" dirty="0"/>
-          </a:p>
-          <a:p>
-            <a:pPr indent="0" marL="0">
-              <a:buNone/>
-            </a:pPr>
-            <a:r>
-              <a:rPr lang="en-US" sz="2100" dirty="0">
+            <a:endParaRPr lang="en-US" sz="1920" dirty="0"/>
+          </a:p>
+          <a:p>
+            <a:pPr indent="0" marL="0">
+              <a:buNone/>
+            </a:pPr>
+            <a:r>
+              <a:rPr lang="en-US" sz="1920" dirty="0">
                 <a:solidFill>
                   <a:srgbClr val="003A63"/>
                 </a:solidFill>
@@ -11073,14 +11073,14 @@
               </a:rPr>
               <a:t>• Subgroup and data representativeness review</a:t>
             </a:r>
-            <a:endParaRPr lang="en-US" sz="2100" dirty="0"/>
-          </a:p>
-          <a:p>
-            <a:pPr indent="0" marL="0">
-              <a:buNone/>
-            </a:pPr>
-            <a:r>
-              <a:rPr lang="en-US" sz="2100" dirty="0">
+            <a:endParaRPr lang="en-US" sz="1920" dirty="0"/>
+          </a:p>
+          <a:p>
+            <a:pPr indent="0" marL="0">
+              <a:buNone/>
+            </a:pPr>
+            <a:r>
+              <a:rPr lang="en-US" sz="1920" dirty="0">
                 <a:solidFill>
                   <a:srgbClr val="003A63"/>
                 </a:solidFill>
@@ -11090,7 +11090,7 @@
               </a:rPr>
               <a:t>• Potential harm and mitigation table</a:t>
             </a:r>
-            <a:endParaRPr lang="en-US" sz="2100" dirty="0"/>
+            <a:endParaRPr lang="en-US" sz="1920" dirty="0"/>
           </a:p>
         </p:txBody>
       </p:sp>
@@ -11102,12 +11102,12 @@
         </p:nvSpPr>
         <p:spPr>
           <a:xfrm>
-            <a:off x="7635240" y="1325880"/>
-            <a:ext cx="3474720" cy="1207008"/>
+            <a:off x="7543800" y="1325880"/>
+            <a:ext cx="3611880" cy="1261872"/>
           </a:xfrm>
           <a:prstGeom prst="roundRect">
             <a:avLst>
-              <a:gd name="adj" fmla="val 9091"/>
+              <a:gd name="adj" fmla="val 8696"/>
             </a:avLst>
           </a:prstGeom>
           <a:solidFill>
@@ -11129,8 +11129,8 @@
         </p:nvSpPr>
         <p:spPr>
           <a:xfrm>
-            <a:off x="7799832" y="1472184"/>
-            <a:ext cx="3145536" cy="256032"/>
+            <a:off x="7708392" y="1453896"/>
+            <a:ext cx="3282696" cy="228600"/>
           </a:xfrm>
           <a:prstGeom prst="rect">
             <a:avLst/>
@@ -11146,7 +11146,7 @@
               <a:buNone/>
             </a:pPr>
             <a:r>
-              <a:rPr lang="en-US" sz="1300" b="1" dirty="0">
+              <a:rPr lang="en-US" sz="1220" b="1" dirty="0">
                 <a:solidFill>
                   <a:srgbClr val="0068B7"/>
                 </a:solidFill>
@@ -11156,7 +11156,7 @@
               </a:rPr>
               <a:t>Risk check</a:t>
             </a:r>
-            <a:endParaRPr lang="en-US" sz="1300" dirty="0"/>
+            <a:endParaRPr lang="en-US" sz="1220" dirty="0"/>
           </a:p>
         </p:txBody>
       </p:sp>
@@ -11168,8 +11168,8 @@
         </p:nvSpPr>
         <p:spPr>
           <a:xfrm>
-            <a:off x="7799832" y="1801368"/>
-            <a:ext cx="3145536" cy="640080"/>
+            <a:off x="7708392" y="1764792"/>
+            <a:ext cx="3282696" cy="749808"/>
           </a:xfrm>
           <a:prstGeom prst="rect">
             <a:avLst/>
@@ -11187,7 +11187,7 @@
               <a:buNone/>
             </a:pPr>
             <a:r>
-              <a:rPr lang="en-US" sz="1320" dirty="0">
+              <a:rPr lang="en-US" sz="1220" dirty="0">
                 <a:solidFill>
                   <a:srgbClr val="17364A"/>
                 </a:solidFill>
@@ -11197,7 +11197,7 @@
               </a:rPr>
               <a:t>Equity evaluation plan</a:t>
             </a:r>
-            <a:endParaRPr lang="en-US" sz="1320" dirty="0"/>
+            <a:endParaRPr lang="en-US" sz="1220" dirty="0"/>
           </a:p>
         </p:txBody>
       </p:sp>
@@ -11209,12 +11209,12 @@
         </p:nvSpPr>
         <p:spPr>
           <a:xfrm>
-            <a:off x="7635240" y="2670048"/>
-            <a:ext cx="3474720" cy="1377086"/>
+            <a:off x="7543800" y="2724912"/>
+            <a:ext cx="3611880" cy="1527048"/>
           </a:xfrm>
           <a:prstGeom prst="roundRect">
             <a:avLst>
-              <a:gd name="adj" fmla="val 7968"/>
+              <a:gd name="adj" fmla="val 7186"/>
             </a:avLst>
           </a:prstGeom>
           <a:solidFill>
@@ -11236,8 +11236,8 @@
         </p:nvSpPr>
         <p:spPr>
           <a:xfrm>
-            <a:off x="7799832" y="2816352"/>
-            <a:ext cx="3145536" cy="256032"/>
+            <a:off x="7708392" y="2852928"/>
+            <a:ext cx="3282696" cy="228600"/>
           </a:xfrm>
           <a:prstGeom prst="rect">
             <a:avLst/>
@@ -11253,7 +11253,7 @@
               <a:buNone/>
             </a:pPr>
             <a:r>
-              <a:rPr lang="en-US" sz="1300" b="1" dirty="0">
+              <a:rPr lang="en-US" sz="1220" b="1" dirty="0">
                 <a:solidFill>
                   <a:srgbClr val="0068B7"/>
                 </a:solidFill>
@@ -11263,7 +11263,7 @@
               </a:rPr>
               <a:t>Concept checkpoints</a:t>
             </a:r>
-            <a:endParaRPr lang="en-US" sz="1300" dirty="0"/>
+            <a:endParaRPr lang="en-US" sz="1220" dirty="0"/>
           </a:p>
         </p:txBody>
       </p:sp>
@@ -11275,8 +11275,8 @@
         </p:nvSpPr>
         <p:spPr>
           <a:xfrm>
-            <a:off x="7818120" y="3182112"/>
-            <a:ext cx="3090672" cy="718718"/>
+            <a:off x="7726680" y="3182112"/>
+            <a:ext cx="3227832" cy="960120"/>
           </a:xfrm>
           <a:prstGeom prst="rect">
             <a:avLst/>
@@ -11294,7 +11294,7 @@
               <a:buNone/>
             </a:pPr>
             <a:r>
-              <a:rPr lang="en-US" sz="1220" dirty="0">
+              <a:rPr lang="en-US" sz="1140" dirty="0">
                 <a:solidFill>
                   <a:srgbClr val="17364A"/>
                 </a:solidFill>
@@ -11304,14 +11304,14 @@
               </a:rPr>
               <a:t>Equity monitoring indicators</a:t>
             </a:r>
-            <a:endParaRPr lang="en-US" sz="1220" dirty="0"/>
-          </a:p>
-          <a:p>
-            <a:pPr indent="0" marL="0">
-              <a:buNone/>
-            </a:pPr>
-            <a:r>
-              <a:rPr lang="en-US" sz="1220" dirty="0">
+            <a:endParaRPr lang="en-US" sz="1140" dirty="0"/>
+          </a:p>
+          <a:p>
+            <a:pPr indent="0" marL="0">
+              <a:buNone/>
+            </a:pPr>
+            <a:r>
+              <a:rPr lang="en-US" sz="1140" dirty="0">
                 <a:solidFill>
                   <a:srgbClr val="17364A"/>
                 </a:solidFill>
@@ -11321,7 +11321,7 @@
               </a:rPr>
               <a:t>Governance recommendation</a:t>
             </a:r>
-            <a:endParaRPr lang="en-US" sz="1220" dirty="0"/>
+            <a:endParaRPr lang="en-US" sz="1140" dirty="0"/>
           </a:p>
         </p:txBody>
       </p:sp>
@@ -11333,12 +11333,12 @@
         </p:nvSpPr>
         <p:spPr>
           <a:xfrm>
-            <a:off x="7635240" y="4184294"/>
-            <a:ext cx="3474720" cy="1466698"/>
+            <a:off x="7543800" y="4389120"/>
+            <a:ext cx="3611880" cy="1261872"/>
           </a:xfrm>
           <a:prstGeom prst="roundRect">
             <a:avLst>
-              <a:gd name="adj" fmla="val 7481"/>
+              <a:gd name="adj" fmla="val 8696"/>
             </a:avLst>
           </a:prstGeom>
           <a:solidFill>
@@ -11360,8 +11360,8 @@
         </p:nvSpPr>
         <p:spPr>
           <a:xfrm>
-            <a:off x="7799832" y="4330598"/>
-            <a:ext cx="3145536" cy="256032"/>
+            <a:off x="7708392" y="4517136"/>
+            <a:ext cx="3282696" cy="228600"/>
           </a:xfrm>
           <a:prstGeom prst="rect">
             <a:avLst/>
@@ -11377,7 +11377,7 @@
               <a:buNone/>
             </a:pPr>
             <a:r>
-              <a:rPr lang="en-US" sz="1300" b="1" dirty="0">
+              <a:rPr lang="en-US" sz="1220" b="1" dirty="0">
                 <a:solidFill>
                   <a:srgbClr val="0068B7"/>
                 </a:solidFill>
@@ -11387,7 +11387,7 @@
               </a:rPr>
               <a:t>Safeguard to plan</a:t>
             </a:r>
-            <a:endParaRPr lang="en-US" sz="1300" dirty="0"/>
+            <a:endParaRPr lang="en-US" sz="1220" dirty="0"/>
           </a:p>
         </p:txBody>
       </p:sp>
@@ -11399,8 +11399,8 @@
         </p:nvSpPr>
         <p:spPr>
           <a:xfrm>
-            <a:off x="7799832" y="4659782"/>
-            <a:ext cx="3145536" cy="899770"/>
+            <a:off x="7708392" y="4828032"/>
+            <a:ext cx="3282696" cy="749808"/>
           </a:xfrm>
           <a:prstGeom prst="rect">
             <a:avLst/>
@@ -11418,7 +11418,7 @@
               <a:buNone/>
             </a:pPr>
             <a:r>
-              <a:rPr lang="en-US" sz="1320" dirty="0">
+              <a:rPr lang="en-US" sz="1220" dirty="0">
                 <a:solidFill>
                   <a:srgbClr val="17364A"/>
                 </a:solidFill>
@@ -11426,9 +11426,9 @@
                 <a:ea typeface="Aptos" pitchFamily="34" charset="-122"/>
                 <a:cs typeface="Aptos" pitchFamily="34" charset="-120"/>
               </a:rPr>
-              <a:t>Use the assignment to test whether you can explain the concept, apply it to a realistic public health situation, and identify what would need review before the work moves forward.</a:t>
-            </a:r>
-            <a:endParaRPr lang="en-US" sz="1320" dirty="0"/>
+              <a:t>Use the assignment to test whether you can explain the concept, apply it to a.</a:t>
+            </a:r>
+            <a:endParaRPr lang="en-US" sz="1220" dirty="0"/>
           </a:p>
         </p:txBody>
       </p:sp>
@@ -11719,8 +11719,8 @@
         </p:nvSpPr>
         <p:spPr>
           <a:xfrm>
-            <a:off x="868680" y="1508760"/>
-            <a:ext cx="6309360" cy="4160520"/>
+            <a:off x="822960" y="1463040"/>
+            <a:ext cx="6565392" cy="4343400"/>
           </a:xfrm>
           <a:prstGeom prst="rect">
             <a:avLst/>
@@ -11738,7 +11738,7 @@
               <a:buNone/>
             </a:pPr>
             <a:r>
-              <a:rPr lang="en-US" sz="2100" dirty="0">
+              <a:rPr lang="en-US" sz="1920" dirty="0">
                 <a:solidFill>
                   <a:srgbClr val="003A63"/>
                 </a:solidFill>
@@ -11746,16 +11746,16 @@
                 <a:ea typeface="Aptos" pitchFamily="34" charset="-122"/>
                 <a:cs typeface="Aptos" pitchFamily="34" charset="-120"/>
               </a:rPr>
-              <a:t>• 1. Why is overall model performance insufficient for public health equity review?</a:t>
-            </a:r>
-            <a:endParaRPr lang="en-US" sz="2100" dirty="0"/>
-          </a:p>
-          <a:p>
-            <a:pPr indent="0" marL="0">
-              <a:buNone/>
-            </a:pPr>
-            <a:r>
-              <a:rPr lang="en-US" sz="2100" dirty="0">
+              <a:t>• 1. Why is overall model performance insufficient for public health equity.</a:t>
+            </a:r>
+            <a:endParaRPr lang="en-US" sz="1920" dirty="0"/>
+          </a:p>
+          <a:p>
+            <a:pPr indent="0" marL="0">
+              <a:buNone/>
+            </a:pPr>
+            <a:r>
+              <a:rPr lang="en-US" sz="1920" dirty="0">
                 <a:solidFill>
                   <a:srgbClr val="003A63"/>
                 </a:solidFill>
@@ -11765,14 +11765,14 @@
               </a:rPr>
               <a:t>• 2. What is measurement bias?</a:t>
             </a:r>
-            <a:endParaRPr lang="en-US" sz="2100" dirty="0"/>
-          </a:p>
-          <a:p>
-            <a:pPr indent="0" marL="0">
-              <a:buNone/>
-            </a:pPr>
-            <a:r>
-              <a:rPr lang="en-US" sz="2100" dirty="0">
+            <a:endParaRPr lang="en-US" sz="1920" dirty="0"/>
+          </a:p>
+          <a:p>
+            <a:pPr indent="0" marL="0">
+              <a:buNone/>
+            </a:pPr>
+            <a:r>
+              <a:rPr lang="en-US" sz="1920" dirty="0">
                 <a:solidFill>
                   <a:srgbClr val="003A63"/>
                 </a:solidFill>
@@ -11782,7 +11782,7 @@
               </a:rPr>
               <a:t>• 3. Which use most clearly requires equity evaluation?</a:t>
             </a:r>
-            <a:endParaRPr lang="en-US" sz="2100" dirty="0"/>
+            <a:endParaRPr lang="en-US" sz="1920" dirty="0"/>
           </a:p>
         </p:txBody>
       </p:sp>
@@ -11794,12 +11794,12 @@
         </p:nvSpPr>
         <p:spPr>
           <a:xfrm>
-            <a:off x="7635240" y="1325880"/>
-            <a:ext cx="3474720" cy="1207008"/>
+            <a:off x="7543800" y="1325880"/>
+            <a:ext cx="3611880" cy="1261872"/>
           </a:xfrm>
           <a:prstGeom prst="roundRect">
             <a:avLst>
-              <a:gd name="adj" fmla="val 9091"/>
+              <a:gd name="adj" fmla="val 8696"/>
             </a:avLst>
           </a:prstGeom>
           <a:solidFill>
@@ -11821,8 +11821,8 @@
         </p:nvSpPr>
         <p:spPr>
           <a:xfrm>
-            <a:off x="7799832" y="1472184"/>
-            <a:ext cx="3145536" cy="256032"/>
+            <a:off x="7708392" y="1453896"/>
+            <a:ext cx="3282696" cy="228600"/>
           </a:xfrm>
           <a:prstGeom prst="rect">
             <a:avLst/>
@@ -11838,7 +11838,7 @@
               <a:buNone/>
             </a:pPr>
             <a:r>
-              <a:rPr lang="en-US" sz="1300" b="1" dirty="0">
+              <a:rPr lang="en-US" sz="1220" b="1" dirty="0">
                 <a:solidFill>
                   <a:srgbClr val="0068B7"/>
                 </a:solidFill>
@@ -11848,7 +11848,7 @@
               </a:rPr>
               <a:t>Risk check</a:t>
             </a:r>
-            <a:endParaRPr lang="en-US" sz="1300" dirty="0"/>
+            <a:endParaRPr lang="en-US" sz="1220" dirty="0"/>
           </a:p>
         </p:txBody>
       </p:sp>
@@ -11860,8 +11860,8 @@
         </p:nvSpPr>
         <p:spPr>
           <a:xfrm>
-            <a:off x="7799832" y="1801368"/>
-            <a:ext cx="3145536" cy="640080"/>
+            <a:off x="7708392" y="1764792"/>
+            <a:ext cx="3282696" cy="749808"/>
           </a:xfrm>
           <a:prstGeom prst="rect">
             <a:avLst/>
@@ -11879,7 +11879,7 @@
               <a:buNone/>
             </a:pPr>
             <a:r>
-              <a:rPr lang="en-US" sz="1320" dirty="0">
+              <a:rPr lang="en-US" sz="1220" dirty="0">
                 <a:solidFill>
                   <a:srgbClr val="17364A"/>
                 </a:solidFill>
@@ -11889,7 +11889,7 @@
               </a:rPr>
               <a:t>1. Why is overall model performance insufficient for public health equity review?</a:t>
             </a:r>
-            <a:endParaRPr lang="en-US" sz="1320" dirty="0"/>
+            <a:endParaRPr lang="en-US" sz="1220" dirty="0"/>
           </a:p>
         </p:txBody>
       </p:sp>
@@ -11901,12 +11901,12 @@
         </p:nvSpPr>
         <p:spPr>
           <a:xfrm>
-            <a:off x="7635240" y="2670048"/>
-            <a:ext cx="3474720" cy="1377086"/>
+            <a:off x="7543800" y="2724912"/>
+            <a:ext cx="3611880" cy="1527048"/>
           </a:xfrm>
           <a:prstGeom prst="roundRect">
             <a:avLst>
-              <a:gd name="adj" fmla="val 7968"/>
+              <a:gd name="adj" fmla="val 7186"/>
             </a:avLst>
           </a:prstGeom>
           <a:solidFill>
@@ -11928,8 +11928,8 @@
         </p:nvSpPr>
         <p:spPr>
           <a:xfrm>
-            <a:off x="7799832" y="2816352"/>
-            <a:ext cx="3145536" cy="256032"/>
+            <a:off x="7708392" y="2852928"/>
+            <a:ext cx="3282696" cy="228600"/>
           </a:xfrm>
           <a:prstGeom prst="rect">
             <a:avLst/>
@@ -11945,7 +11945,7 @@
               <a:buNone/>
             </a:pPr>
             <a:r>
-              <a:rPr lang="en-US" sz="1300" b="1" dirty="0">
+              <a:rPr lang="en-US" sz="1220" b="1" dirty="0">
                 <a:solidFill>
                   <a:srgbClr val="0068B7"/>
                 </a:solidFill>
@@ -11955,7 +11955,7 @@
               </a:rPr>
               <a:t>Concept checkpoints</a:t>
             </a:r>
-            <a:endParaRPr lang="en-US" sz="1300" dirty="0"/>
+            <a:endParaRPr lang="en-US" sz="1220" dirty="0"/>
           </a:p>
         </p:txBody>
       </p:sp>
@@ -11967,8 +11967,8 @@
         </p:nvSpPr>
         <p:spPr>
           <a:xfrm>
-            <a:off x="7818120" y="3182112"/>
-            <a:ext cx="3090672" cy="718718"/>
+            <a:off x="7726680" y="3182112"/>
+            <a:ext cx="3227832" cy="960120"/>
           </a:xfrm>
           <a:prstGeom prst="rect">
             <a:avLst/>
@@ -11986,7 +11986,7 @@
               <a:buNone/>
             </a:pPr>
             <a:r>
-              <a:rPr lang="en-US" sz="1220" dirty="0">
+              <a:rPr lang="en-US" sz="1140" dirty="0">
                 <a:solidFill>
                   <a:srgbClr val="17364A"/>
                 </a:solidFill>
@@ -11996,14 +11996,14 @@
               </a:rPr>
               <a:t>1.</a:t>
             </a:r>
-            <a:endParaRPr lang="en-US" sz="1220" dirty="0"/>
-          </a:p>
-          <a:p>
-            <a:pPr indent="0" marL="0">
-              <a:buNone/>
-            </a:pPr>
-            <a:r>
-              <a:rPr lang="en-US" sz="1220" dirty="0">
+            <a:endParaRPr lang="en-US" sz="1140" dirty="0"/>
+          </a:p>
+          <a:p>
+            <a:pPr indent="0" marL="0">
+              <a:buNone/>
+            </a:pPr>
+            <a:r>
+              <a:rPr lang="en-US" sz="1140" dirty="0">
                 <a:solidFill>
                   <a:srgbClr val="17364A"/>
                 </a:solidFill>
@@ -12011,16 +12011,16 @@
                 <a:ea typeface="Aptos" pitchFamily="34" charset="-122"/>
                 <a:cs typeface="Aptos" pitchFamily="34" charset="-120"/>
               </a:rPr>
-              <a:t>Why is overall model performance insufficient for public health.</a:t>
-            </a:r>
-            <a:endParaRPr lang="en-US" sz="1220" dirty="0"/>
-          </a:p>
-          <a:p>
-            <a:pPr indent="0" marL="0">
-              <a:buNone/>
-            </a:pPr>
-            <a:r>
-              <a:rPr lang="en-US" sz="1220" dirty="0">
+              <a:t>Why is overall model performance insufficient for.</a:t>
+            </a:r>
+            <a:endParaRPr lang="en-US" sz="1140" dirty="0"/>
+          </a:p>
+          <a:p>
+            <a:pPr indent="0" marL="0">
+              <a:buNone/>
+            </a:pPr>
+            <a:r>
+              <a:rPr lang="en-US" sz="1140" dirty="0">
                 <a:solidFill>
                   <a:srgbClr val="17364A"/>
                 </a:solidFill>
@@ -12030,7 +12030,7 @@
               </a:rPr>
               <a:t>2.</a:t>
             </a:r>
-            <a:endParaRPr lang="en-US" sz="1220" dirty="0"/>
+            <a:endParaRPr lang="en-US" sz="1140" dirty="0"/>
           </a:p>
         </p:txBody>
       </p:sp>
@@ -12042,12 +12042,12 @@
         </p:nvSpPr>
         <p:spPr>
           <a:xfrm>
-            <a:off x="7635240" y="4184294"/>
-            <a:ext cx="3474720" cy="1466698"/>
+            <a:off x="7543800" y="4389120"/>
+            <a:ext cx="3611880" cy="1261872"/>
           </a:xfrm>
           <a:prstGeom prst="roundRect">
             <a:avLst>
-              <a:gd name="adj" fmla="val 7481"/>
+              <a:gd name="adj" fmla="val 8696"/>
             </a:avLst>
           </a:prstGeom>
           <a:solidFill>
@@ -12069,8 +12069,8 @@
         </p:nvSpPr>
         <p:spPr>
           <a:xfrm>
-            <a:off x="7799832" y="4330598"/>
-            <a:ext cx="3145536" cy="256032"/>
+            <a:off x="7708392" y="4517136"/>
+            <a:ext cx="3282696" cy="228600"/>
           </a:xfrm>
           <a:prstGeom prst="rect">
             <a:avLst/>
@@ -12086,7 +12086,7 @@
               <a:buNone/>
             </a:pPr>
             <a:r>
-              <a:rPr lang="en-US" sz="1300" b="1" dirty="0">
+              <a:rPr lang="en-US" sz="1220" b="1" dirty="0">
                 <a:solidFill>
                   <a:srgbClr val="0068B7"/>
                 </a:solidFill>
@@ -12096,7 +12096,7 @@
               </a:rPr>
               <a:t>Safeguard to plan</a:t>
             </a:r>
-            <a:endParaRPr lang="en-US" sz="1300" dirty="0"/>
+            <a:endParaRPr lang="en-US" sz="1220" dirty="0"/>
           </a:p>
         </p:txBody>
       </p:sp>
@@ -12108,8 +12108,8 @@
         </p:nvSpPr>
         <p:spPr>
           <a:xfrm>
-            <a:off x="7799832" y="4659782"/>
-            <a:ext cx="3145536" cy="899770"/>
+            <a:off x="7708392" y="4828032"/>
+            <a:ext cx="3282696" cy="749808"/>
           </a:xfrm>
           <a:prstGeom prst="rect">
             <a:avLst/>
@@ -12127,7 +12127,7 @@
               <a:buNone/>
             </a:pPr>
             <a:r>
-              <a:rPr lang="en-US" sz="1320" dirty="0">
+              <a:rPr lang="en-US" sz="1220" dirty="0">
                 <a:solidFill>
                   <a:srgbClr val="17364A"/>
                 </a:solidFill>
@@ -12135,9 +12135,9 @@
                 <a:ea typeface="Aptos" pitchFamily="34" charset="-122"/>
                 <a:cs typeface="Aptos" pitchFamily="34" charset="-120"/>
               </a:rPr>
-              <a:t>Use the assignment to test whether you can explain the concept, apply it to a realistic public health situation, and identify what would need review before the work moves forward.</a:t>
-            </a:r>
-            <a:endParaRPr lang="en-US" sz="1320" dirty="0"/>
+              <a:t>Use the assignment to test whether you can explain the concept, apply it to a.</a:t>
+            </a:r>
+            <a:endParaRPr lang="en-US" sz="1220" dirty="0"/>
           </a:p>
         </p:txBody>
       </p:sp>
@@ -12428,8 +12428,8 @@
         </p:nvSpPr>
         <p:spPr>
           <a:xfrm>
-            <a:off x="868680" y="1508760"/>
-            <a:ext cx="6309360" cy="4160520"/>
+            <a:off x="822960" y="1463040"/>
+            <a:ext cx="6565392" cy="4343400"/>
           </a:xfrm>
           <a:prstGeom prst="rect">
             <a:avLst/>
@@ -12447,7 +12447,7 @@
               <a:buNone/>
             </a:pPr>
             <a:r>
-              <a:rPr lang="en-US" sz="2100" dirty="0">
+              <a:rPr lang="en-US" sz="1920" dirty="0">
                 <a:solidFill>
                   <a:srgbClr val="003A63"/>
                 </a:solidFill>
@@ -12457,14 +12457,14 @@
               </a:rPr>
               <a:t>• NIST Artificial Intelligence Risk Management Framework:.</a:t>
             </a:r>
-            <a:endParaRPr lang="en-US" sz="2100" dirty="0"/>
-          </a:p>
-          <a:p>
-            <a:pPr indent="0" marL="0">
-              <a:buNone/>
-            </a:pPr>
-            <a:r>
-              <a:rPr lang="en-US" sz="2100" dirty="0">
+            <a:endParaRPr lang="en-US" sz="1920" dirty="0"/>
+          </a:p>
+          <a:p>
+            <a:pPr indent="0" marL="0">
+              <a:buNone/>
+            </a:pPr>
+            <a:r>
+              <a:rPr lang="en-US" sz="1920" dirty="0">
                 <a:solidFill>
                   <a:srgbClr val="003A63"/>
                 </a:solidFill>
@@ -12474,14 +12474,14 @@
               </a:rPr>
               <a:t>• NIST Generative AI Profile:.</a:t>
             </a:r>
-            <a:endParaRPr lang="en-US" sz="2100" dirty="0"/>
-          </a:p>
-          <a:p>
-            <a:pPr indent="0" marL="0">
-              <a:buNone/>
-            </a:pPr>
-            <a:r>
-              <a:rPr lang="en-US" sz="2100" dirty="0">
+            <a:endParaRPr lang="en-US" sz="1920" dirty="0"/>
+          </a:p>
+          <a:p>
+            <a:pPr indent="0" marL="0">
+              <a:buNone/>
+            </a:pPr>
+            <a:r>
+              <a:rPr lang="en-US" sz="1920" dirty="0">
                 <a:solidFill>
                   <a:srgbClr val="003A63"/>
                 </a:solidFill>
@@ -12491,7 +12491,7 @@
               </a:rPr>
               <a:t>• CDC Public Health Data Strategy and Data Modernization resources:.</a:t>
             </a:r>
-            <a:endParaRPr lang="en-US" sz="2100" dirty="0"/>
+            <a:endParaRPr lang="en-US" sz="1920" dirty="0"/>
           </a:p>
         </p:txBody>
       </p:sp>
@@ -12503,12 +12503,12 @@
         </p:nvSpPr>
         <p:spPr>
           <a:xfrm>
-            <a:off x="7635240" y="1325880"/>
-            <a:ext cx="3474720" cy="1207008"/>
+            <a:off x="7543800" y="1325880"/>
+            <a:ext cx="3611880" cy="1261872"/>
           </a:xfrm>
           <a:prstGeom prst="roundRect">
             <a:avLst>
-              <a:gd name="adj" fmla="val 9091"/>
+              <a:gd name="adj" fmla="val 8696"/>
             </a:avLst>
           </a:prstGeom>
           <a:solidFill>
@@ -12530,8 +12530,8 @@
         </p:nvSpPr>
         <p:spPr>
           <a:xfrm>
-            <a:off x="7799832" y="1472184"/>
-            <a:ext cx="3145536" cy="256032"/>
+            <a:off x="7708392" y="1453896"/>
+            <a:ext cx="3282696" cy="228600"/>
           </a:xfrm>
           <a:prstGeom prst="rect">
             <a:avLst/>
@@ -12547,7 +12547,7 @@
               <a:buNone/>
             </a:pPr>
             <a:r>
-              <a:rPr lang="en-US" sz="1300" b="1" dirty="0">
+              <a:rPr lang="en-US" sz="1220" b="1" dirty="0">
                 <a:solidFill>
                   <a:srgbClr val="0068B7"/>
                 </a:solidFill>
@@ -12557,7 +12557,7 @@
               </a:rPr>
               <a:t>Risk check</a:t>
             </a:r>
-            <a:endParaRPr lang="en-US" sz="1300" dirty="0"/>
+            <a:endParaRPr lang="en-US" sz="1220" dirty="0"/>
           </a:p>
         </p:txBody>
       </p:sp>
@@ -12569,8 +12569,8 @@
         </p:nvSpPr>
         <p:spPr>
           <a:xfrm>
-            <a:off x="7799832" y="1801368"/>
-            <a:ext cx="3145536" cy="640080"/>
+            <a:off x="7708392" y="1764792"/>
+            <a:ext cx="3282696" cy="749808"/>
           </a:xfrm>
           <a:prstGeom prst="rect">
             <a:avLst/>
@@ -12588,7 +12588,7 @@
               <a:buNone/>
             </a:pPr>
             <a:r>
-              <a:rPr lang="en-US" sz="1320" dirty="0">
+              <a:rPr lang="en-US" sz="1220" dirty="0">
                 <a:solidFill>
                   <a:srgbClr val="17364A"/>
                 </a:solidFill>
@@ -12598,7 +12598,7 @@
               </a:rPr>
               <a:t>NIST Artificial Intelligence Risk Management Framework:.</a:t>
             </a:r>
-            <a:endParaRPr lang="en-US" sz="1320" dirty="0"/>
+            <a:endParaRPr lang="en-US" sz="1220" dirty="0"/>
           </a:p>
         </p:txBody>
       </p:sp>
@@ -12610,12 +12610,12 @@
         </p:nvSpPr>
         <p:spPr>
           <a:xfrm>
-            <a:off x="7635240" y="2670048"/>
-            <a:ext cx="3474720" cy="1536192"/>
+            <a:off x="7543800" y="2724912"/>
+            <a:ext cx="3611880" cy="1527048"/>
           </a:xfrm>
           <a:prstGeom prst="roundRect">
             <a:avLst>
-              <a:gd name="adj" fmla="val 7143"/>
+              <a:gd name="adj" fmla="val 7186"/>
             </a:avLst>
           </a:prstGeom>
           <a:solidFill>
@@ -12637,8 +12637,8 @@
         </p:nvSpPr>
         <p:spPr>
           <a:xfrm>
-            <a:off x="7799832" y="2816352"/>
-            <a:ext cx="3145536" cy="256032"/>
+            <a:off x="7708392" y="2852928"/>
+            <a:ext cx="3282696" cy="228600"/>
           </a:xfrm>
           <a:prstGeom prst="rect">
             <a:avLst/>
@@ -12654,7 +12654,7 @@
               <a:buNone/>
             </a:pPr>
             <a:r>
-              <a:rPr lang="en-US" sz="1300" b="1" dirty="0">
+              <a:rPr lang="en-US" sz="1220" b="1" dirty="0">
                 <a:solidFill>
                   <a:srgbClr val="0068B7"/>
                 </a:solidFill>
@@ -12664,7 +12664,7 @@
               </a:rPr>
               <a:t>Concept checkpoints</a:t>
             </a:r>
-            <a:endParaRPr lang="en-US" sz="1300" dirty="0"/>
+            <a:endParaRPr lang="en-US" sz="1220" dirty="0"/>
           </a:p>
         </p:txBody>
       </p:sp>
@@ -12676,8 +12676,8 @@
         </p:nvSpPr>
         <p:spPr>
           <a:xfrm>
-            <a:off x="7818120" y="3182112"/>
-            <a:ext cx="3090672" cy="877824"/>
+            <a:off x="7726680" y="3182112"/>
+            <a:ext cx="3227832" cy="960120"/>
           </a:xfrm>
           <a:prstGeom prst="rect">
             <a:avLst/>
@@ -12695,7 +12695,7 @@
               <a:buNone/>
             </a:pPr>
             <a:r>
-              <a:rPr lang="en-US" sz="1220" dirty="0">
+              <a:rPr lang="en-US" sz="1140" dirty="0">
                 <a:solidFill>
                   <a:srgbClr val="17364A"/>
                 </a:solidFill>
@@ -12703,16 +12703,16 @@
                 <a:ea typeface="Aptos" pitchFamily="34" charset="-122"/>
                 <a:cs typeface="Aptos" pitchFamily="34" charset="-120"/>
               </a:rPr>
-              <a:t>NIST Artificial Intelligence Risk Management Framework:.</a:t>
-            </a:r>
-            <a:endParaRPr lang="en-US" sz="1220" dirty="0"/>
-          </a:p>
-          <a:p>
-            <a:pPr indent="0" marL="0">
-              <a:buNone/>
-            </a:pPr>
-            <a:r>
-              <a:rPr lang="en-US" sz="1220" dirty="0">
+              <a:t>NIST Artificial Intelligence Risk Management.</a:t>
+            </a:r>
+            <a:endParaRPr lang="en-US" sz="1140" dirty="0"/>
+          </a:p>
+          <a:p>
+            <a:pPr indent="0" marL="0">
+              <a:buNone/>
+            </a:pPr>
+            <a:r>
+              <a:rPr lang="en-US" sz="1140" dirty="0">
                 <a:solidFill>
                   <a:srgbClr val="17364A"/>
                 </a:solidFill>
@@ -12722,14 +12722,14 @@
               </a:rPr>
               <a:t>OWASP guidance for LLM application security</a:t>
             </a:r>
-            <a:endParaRPr lang="en-US" sz="1220" dirty="0"/>
-          </a:p>
-          <a:p>
-            <a:pPr indent="0" marL="0">
-              <a:buNone/>
-            </a:pPr>
-            <a:r>
-              <a:rPr lang="en-US" sz="1220" dirty="0">
+            <a:endParaRPr lang="en-US" sz="1140" dirty="0"/>
+          </a:p>
+          <a:p>
+            <a:pPr indent="0" marL="0">
+              <a:buNone/>
+            </a:pPr>
+            <a:r>
+              <a:rPr lang="en-US" sz="1140" dirty="0">
                 <a:solidFill>
                   <a:srgbClr val="17364A"/>
                 </a:solidFill>
@@ -12737,9 +12737,9 @@
                 <a:ea typeface="Aptos" pitchFamily="34" charset="-122"/>
                 <a:cs typeface="Aptos" pitchFamily="34" charset="-120"/>
               </a:rPr>
-              <a:t>Agency policies for privacy, cybersecurity, records, procurement,.</a:t>
-            </a:r>
-            <a:endParaRPr lang="en-US" sz="1220" dirty="0"/>
+              <a:t>Agency policies for privacy, cybersecurity,.</a:t>
+            </a:r>
+            <a:endParaRPr lang="en-US" sz="1140" dirty="0"/>
           </a:p>
         </p:txBody>
       </p:sp>
@@ -12751,12 +12751,12 @@
         </p:nvSpPr>
         <p:spPr>
           <a:xfrm>
-            <a:off x="7635240" y="4343400"/>
-            <a:ext cx="3474720" cy="1255471"/>
+            <a:off x="7543800" y="4389120"/>
+            <a:ext cx="3611880" cy="1261872"/>
           </a:xfrm>
           <a:prstGeom prst="roundRect">
             <a:avLst>
-              <a:gd name="adj" fmla="val 8740"/>
+              <a:gd name="adj" fmla="val 8696"/>
             </a:avLst>
           </a:prstGeom>
           <a:solidFill>
@@ -12778,8 +12778,8 @@
         </p:nvSpPr>
         <p:spPr>
           <a:xfrm>
-            <a:off x="7799832" y="4489704"/>
-            <a:ext cx="3145536" cy="256032"/>
+            <a:off x="7708392" y="4517136"/>
+            <a:ext cx="3282696" cy="228600"/>
           </a:xfrm>
           <a:prstGeom prst="rect">
             <a:avLst/>
@@ -12795,7 +12795,7 @@
               <a:buNone/>
             </a:pPr>
             <a:r>
-              <a:rPr lang="en-US" sz="1300" b="1" dirty="0">
+              <a:rPr lang="en-US" sz="1220" b="1" dirty="0">
                 <a:solidFill>
                   <a:srgbClr val="0068B7"/>
                 </a:solidFill>
@@ -12805,7 +12805,7 @@
               </a:rPr>
               <a:t>Safeguard to plan</a:t>
             </a:r>
-            <a:endParaRPr lang="en-US" sz="1300" dirty="0"/>
+            <a:endParaRPr lang="en-US" sz="1220" dirty="0"/>
           </a:p>
         </p:txBody>
       </p:sp>
@@ -12817,8 +12817,8 @@
         </p:nvSpPr>
         <p:spPr>
           <a:xfrm>
-            <a:off x="7799832" y="4818888"/>
-            <a:ext cx="3145536" cy="688543"/>
+            <a:off x="7708392" y="4828032"/>
+            <a:ext cx="3282696" cy="749808"/>
           </a:xfrm>
           <a:prstGeom prst="rect">
             <a:avLst/>
@@ -12836,7 +12836,7 @@
               <a:buNone/>
             </a:pPr>
             <a:r>
-              <a:rPr lang="en-US" sz="1320" dirty="0">
+              <a:rPr lang="en-US" sz="1220" dirty="0">
                 <a:solidFill>
                   <a:srgbClr val="17364A"/>
                 </a:solidFill>
@@ -12844,9 +12844,9 @@
                 <a:ea typeface="Aptos" pitchFamily="34" charset="-122"/>
                 <a:cs typeface="Aptos" pitchFamily="34" charset="-120"/>
               </a:rPr>
-              <a:t>Identify what could go wrong, who could be affected, what safeguards are needed, and what evidence should be reviewed before use.</a:t>
-            </a:r>
-            <a:endParaRPr lang="en-US" sz="1320" dirty="0"/>
+              <a:t>Identify what could go wrong, who could be affected, what safeguards are needed,.</a:t>
+            </a:r>
+            <a:endParaRPr lang="en-US" sz="1220" dirty="0"/>
           </a:p>
         </p:txBody>
       </p:sp>
@@ -13137,8 +13137,8 @@
         </p:nvSpPr>
         <p:spPr>
           <a:xfrm>
-            <a:off x="868680" y="1508760"/>
-            <a:ext cx="6309360" cy="4160520"/>
+            <a:off x="822960" y="1463040"/>
+            <a:ext cx="6565392" cy="4343400"/>
           </a:xfrm>
           <a:prstGeom prst="rect">
             <a:avLst/>
@@ -13156,7 +13156,7 @@
               <a:buNone/>
             </a:pPr>
             <a:r>
-              <a:rPr lang="en-US" sz="2100" dirty="0">
+              <a:rPr lang="en-US" sz="1920" dirty="0">
                 <a:solidFill>
                   <a:srgbClr val="003A63"/>
                 </a:solidFill>
@@ -13164,9 +13164,9 @@
                 <a:ea typeface="Aptos" pitchFamily="34" charset="-122"/>
                 <a:cs typeface="Aptos" pitchFamily="34" charset="-120"/>
               </a:rPr>
-              <a:t>• Relevant public health program SOPs, data governance documentation, and implementation plans</a:t>
-            </a:r>
-            <a:endParaRPr lang="en-US" sz="2100" dirty="0"/>
+              <a:t>• Relevant public health program SOPs, data governance documentation, and.</a:t>
+            </a:r>
+            <a:endParaRPr lang="en-US" sz="1920" dirty="0"/>
           </a:p>
         </p:txBody>
       </p:sp>
@@ -13178,12 +13178,12 @@
         </p:nvSpPr>
         <p:spPr>
           <a:xfrm>
-            <a:off x="7635240" y="1325880"/>
-            <a:ext cx="3474720" cy="1207008"/>
+            <a:off x="7543800" y="1325880"/>
+            <a:ext cx="3611880" cy="1261872"/>
           </a:xfrm>
           <a:prstGeom prst="roundRect">
             <a:avLst>
-              <a:gd name="adj" fmla="val 9091"/>
+              <a:gd name="adj" fmla="val 8696"/>
             </a:avLst>
           </a:prstGeom>
           <a:solidFill>
@@ -13205,8 +13205,8 @@
         </p:nvSpPr>
         <p:spPr>
           <a:xfrm>
-            <a:off x="7799832" y="1472184"/>
-            <a:ext cx="3145536" cy="256032"/>
+            <a:off x="7708392" y="1453896"/>
+            <a:ext cx="3282696" cy="228600"/>
           </a:xfrm>
           <a:prstGeom prst="rect">
             <a:avLst/>
@@ -13222,7 +13222,7 @@
               <a:buNone/>
             </a:pPr>
             <a:r>
-              <a:rPr lang="en-US" sz="1300" b="1" dirty="0">
+              <a:rPr lang="en-US" sz="1220" b="1" dirty="0">
                 <a:solidFill>
                   <a:srgbClr val="0068B7"/>
                 </a:solidFill>
@@ -13232,7 +13232,7 @@
               </a:rPr>
               <a:t>Risk check</a:t>
             </a:r>
-            <a:endParaRPr lang="en-US" sz="1300" dirty="0"/>
+            <a:endParaRPr lang="en-US" sz="1220" dirty="0"/>
           </a:p>
         </p:txBody>
       </p:sp>
@@ -13244,8 +13244,8 @@
         </p:nvSpPr>
         <p:spPr>
           <a:xfrm>
-            <a:off x="7799832" y="1801368"/>
-            <a:ext cx="3145536" cy="640080"/>
+            <a:off x="7708392" y="1764792"/>
+            <a:ext cx="3282696" cy="749808"/>
           </a:xfrm>
           <a:prstGeom prst="rect">
             <a:avLst/>
@@ -13263,7 +13263,7 @@
               <a:buNone/>
             </a:pPr>
             <a:r>
-              <a:rPr lang="en-US" sz="1320" dirty="0">
+              <a:rPr lang="en-US" sz="1220" dirty="0">
                 <a:solidFill>
                   <a:srgbClr val="17364A"/>
                 </a:solidFill>
@@ -13271,9 +13271,9 @@
                 <a:ea typeface="Aptos" pitchFamily="34" charset="-122"/>
                 <a:cs typeface="Aptos" pitchFamily="34" charset="-120"/>
               </a:rPr>
-              <a:t>Relevant public health program SOPs, data governance documentation, and implementation.</a:t>
-            </a:r>
-            <a:endParaRPr lang="en-US" sz="1320" dirty="0"/>
+              <a:t>Relevant public health program SOPs, data governance documentation, and.</a:t>
+            </a:r>
+            <a:endParaRPr lang="en-US" sz="1220" dirty="0"/>
           </a:p>
         </p:txBody>
       </p:sp>
@@ -13285,12 +13285,12 @@
         </p:nvSpPr>
         <p:spPr>
           <a:xfrm>
-            <a:off x="7635240" y="2670048"/>
-            <a:ext cx="3474720" cy="1536192"/>
+            <a:off x="7543800" y="2724912"/>
+            <a:ext cx="3611880" cy="1527048"/>
           </a:xfrm>
           <a:prstGeom prst="roundRect">
             <a:avLst>
-              <a:gd name="adj" fmla="val 7143"/>
+              <a:gd name="adj" fmla="val 7186"/>
             </a:avLst>
           </a:prstGeom>
           <a:solidFill>
@@ -13312,8 +13312,8 @@
         </p:nvSpPr>
         <p:spPr>
           <a:xfrm>
-            <a:off x="7799832" y="2816352"/>
-            <a:ext cx="3145536" cy="256032"/>
+            <a:off x="7708392" y="2852928"/>
+            <a:ext cx="3282696" cy="228600"/>
           </a:xfrm>
           <a:prstGeom prst="rect">
             <a:avLst/>
@@ -13329,7 +13329,7 @@
               <a:buNone/>
             </a:pPr>
             <a:r>
-              <a:rPr lang="en-US" sz="1300" b="1" dirty="0">
+              <a:rPr lang="en-US" sz="1220" b="1" dirty="0">
                 <a:solidFill>
                   <a:srgbClr val="0068B7"/>
                 </a:solidFill>
@@ -13339,7 +13339,7 @@
               </a:rPr>
               <a:t>Concept checkpoints</a:t>
             </a:r>
-            <a:endParaRPr lang="en-US" sz="1300" dirty="0"/>
+            <a:endParaRPr lang="en-US" sz="1220" dirty="0"/>
           </a:p>
         </p:txBody>
       </p:sp>
@@ -13351,8 +13351,8 @@
         </p:nvSpPr>
         <p:spPr>
           <a:xfrm>
-            <a:off x="7818120" y="3182112"/>
-            <a:ext cx="3090672" cy="877824"/>
+            <a:off x="7726680" y="3182112"/>
+            <a:ext cx="3227832" cy="960120"/>
           </a:xfrm>
           <a:prstGeom prst="rect">
             <a:avLst/>
@@ -13370,7 +13370,7 @@
               <a:buNone/>
             </a:pPr>
             <a:r>
-              <a:rPr lang="en-US" sz="1220" dirty="0">
+              <a:rPr lang="en-US" sz="1140" dirty="0">
                 <a:solidFill>
                   <a:srgbClr val="17364A"/>
                 </a:solidFill>
@@ -13378,9 +13378,9 @@
                 <a:ea typeface="Aptos" pitchFamily="34" charset="-122"/>
                 <a:cs typeface="Aptos" pitchFamily="34" charset="-120"/>
               </a:rPr>
-              <a:t>Relevant public health program SOPs, data governance.</a:t>
-            </a:r>
-            <a:endParaRPr lang="en-US" sz="1220" dirty="0"/>
+              <a:t>Relevant public health program SOPs, data.</a:t>
+            </a:r>
+            <a:endParaRPr lang="en-US" sz="1140" dirty="0"/>
           </a:p>
         </p:txBody>
       </p:sp>
@@ -13392,12 +13392,12 @@
         </p:nvSpPr>
         <p:spPr>
           <a:xfrm>
-            <a:off x="7635240" y="4343400"/>
-            <a:ext cx="3474720" cy="1255471"/>
+            <a:off x="7543800" y="4389120"/>
+            <a:ext cx="3611880" cy="1261872"/>
           </a:xfrm>
           <a:prstGeom prst="roundRect">
             <a:avLst>
-              <a:gd name="adj" fmla="val 8740"/>
+              <a:gd name="adj" fmla="val 8696"/>
             </a:avLst>
           </a:prstGeom>
           <a:solidFill>
@@ -13419,8 +13419,8 @@
         </p:nvSpPr>
         <p:spPr>
           <a:xfrm>
-            <a:off x="7799832" y="4489704"/>
-            <a:ext cx="3145536" cy="256032"/>
+            <a:off x="7708392" y="4517136"/>
+            <a:ext cx="3282696" cy="228600"/>
           </a:xfrm>
           <a:prstGeom prst="rect">
             <a:avLst/>
@@ -13436,7 +13436,7 @@
               <a:buNone/>
             </a:pPr>
             <a:r>
-              <a:rPr lang="en-US" sz="1300" b="1" dirty="0">
+              <a:rPr lang="en-US" sz="1220" b="1" dirty="0">
                 <a:solidFill>
                   <a:srgbClr val="0068B7"/>
                 </a:solidFill>
@@ -13446,7 +13446,7 @@
               </a:rPr>
               <a:t>Safeguard to plan</a:t>
             </a:r>
-            <a:endParaRPr lang="en-US" sz="1300" dirty="0"/>
+            <a:endParaRPr lang="en-US" sz="1220" dirty="0"/>
           </a:p>
         </p:txBody>
       </p:sp>
@@ -13458,8 +13458,8 @@
         </p:nvSpPr>
         <p:spPr>
           <a:xfrm>
-            <a:off x="7799832" y="4818888"/>
-            <a:ext cx="3145536" cy="688543"/>
+            <a:off x="7708392" y="4828032"/>
+            <a:ext cx="3282696" cy="749808"/>
           </a:xfrm>
           <a:prstGeom prst="rect">
             <a:avLst/>
@@ -13477,7 +13477,7 @@
               <a:buNone/>
             </a:pPr>
             <a:r>
-              <a:rPr lang="en-US" sz="1320" dirty="0">
+              <a:rPr lang="en-US" sz="1220" dirty="0">
                 <a:solidFill>
                   <a:srgbClr val="17364A"/>
                 </a:solidFill>
@@ -13485,9 +13485,9 @@
                 <a:ea typeface="Aptos" pitchFamily="34" charset="-122"/>
                 <a:cs typeface="Aptos" pitchFamily="34" charset="-120"/>
               </a:rPr>
-              <a:t>Identify what could go wrong, who could be affected, what safeguards are needed, and what evidence should be reviewed before use.</a:t>
-            </a:r>
-            <a:endParaRPr lang="en-US" sz="1320" dirty="0"/>
+              <a:t>Identify what could go wrong, who could be affected, what safeguards are needed,.</a:t>
+            </a:r>
+            <a:endParaRPr lang="en-US" sz="1220" dirty="0"/>
           </a:p>
         </p:txBody>
       </p:sp>
@@ -13805,7 +13805,7 @@
                 <a:ea typeface="Aptos" pitchFamily="34" charset="-122"/>
                 <a:cs typeface="Aptos" pitchFamily="34" charset="-120"/>
               </a:rPr>
-              <a:t>• Play 13: Monitor and Evaluate AI Systems - This lesson informs Play 13 by helping learners.</a:t>
+              <a:t>• Play 13: Monitor and Evaluate AI Systems - This lesson informs Play 13 by.</a:t>
             </a:r>
             <a:endParaRPr lang="en-US" sz="1900" dirty="0"/>
           </a:p>
@@ -13822,7 +13822,7 @@
                 <a:ea typeface="Aptos" pitchFamily="34" charset="-122"/>
                 <a:cs typeface="Aptos" pitchFamily="34" charset="-120"/>
               </a:rPr>
-              <a:t>• Play 11: Build and Deploy AI Solutions - This lesson informs Play 11 by helping learners.</a:t>
+              <a:t>• Play 11: Build and Deploy AI Solutions - This lesson informs Play 11 by.</a:t>
             </a:r>
             <a:endParaRPr lang="en-US" sz="1900" dirty="0"/>
           </a:p>
@@ -13839,7 +13839,7 @@
                 <a:ea typeface="Aptos" pitchFamily="34" charset="-122"/>
                 <a:cs typeface="Aptos" pitchFamily="34" charset="-120"/>
               </a:rPr>
-              <a:t>• Play 8: Develop a Funding Strategy - This lesson informs Play 8 by helping learners connect.</a:t>
+              <a:t>• Play 8: Develop a Funding Strategy - This lesson informs Play 8 by helping.</a:t>
             </a:r>
             <a:endParaRPr lang="en-US" sz="1900" dirty="0"/>
           </a:p>
@@ -13856,7 +13856,7 @@
                 <a:ea typeface="Aptos" pitchFamily="34" charset="-122"/>
                 <a:cs typeface="Aptos" pitchFamily="34" charset="-120"/>
               </a:rPr>
-              <a:t>• Play 3: Establish AI Governance - This lesson informs Play 3 by helping learners connect the.</a:t>
+              <a:t>• Play 3: Establish AI Governance - This lesson informs Play 3 by helping.</a:t>
             </a:r>
             <a:endParaRPr lang="en-US" sz="1900" dirty="0"/>
           </a:p>
@@ -13897,8 +13897,8 @@
         </p:nvSpPr>
         <p:spPr>
           <a:xfrm>
-            <a:off x="8211312" y="1563624"/>
-            <a:ext cx="2734056" cy="256032"/>
+            <a:off x="8211312" y="1545336"/>
+            <a:ext cx="2734056" cy="228600"/>
           </a:xfrm>
           <a:prstGeom prst="rect">
             <a:avLst/>
@@ -13914,7 +13914,7 @@
               <a:buNone/>
             </a:pPr>
             <a:r>
-              <a:rPr lang="en-US" sz="1300" b="1" dirty="0">
+              <a:rPr lang="en-US" sz="1220" b="1" dirty="0">
                 <a:solidFill>
                   <a:srgbClr val="0068B7"/>
                 </a:solidFill>
@@ -13924,7 +13924,7 @@
               </a:rPr>
               <a:t>Apply the lesson</a:t>
             </a:r>
-            <a:endParaRPr lang="en-US" sz="1300" dirty="0"/>
+            <a:endParaRPr lang="en-US" sz="1220" dirty="0"/>
           </a:p>
         </p:txBody>
       </p:sp>
@@ -13936,8 +13936,8 @@
         </p:nvSpPr>
         <p:spPr>
           <a:xfrm>
-            <a:off x="8211312" y="1892808"/>
-            <a:ext cx="2734056" cy="1536192"/>
+            <a:off x="8211312" y="1856232"/>
+            <a:ext cx="2734056" cy="1591056"/>
           </a:xfrm>
           <a:prstGeom prst="rect">
             <a:avLst/>
@@ -13955,7 +13955,7 @@
               <a:buNone/>
             </a:pPr>
             <a:r>
-              <a:rPr lang="en-US" sz="1320" dirty="0">
+              <a:rPr lang="en-US" sz="1220" dirty="0">
                 <a:solidFill>
                   <a:srgbClr val="17364A"/>
                 </a:solidFill>
@@ -13963,9 +13963,9 @@
                 <a:ea typeface="Aptos" pitchFamily="34" charset="-122"/>
                 <a:cs typeface="Aptos" pitchFamily="34" charset="-120"/>
               </a:rPr>
-              <a:t>Use the related plays to identify decisions, participants, timing, approvals, and documentation needed for responsible implementation.</a:t>
-            </a:r>
-            <a:endParaRPr lang="en-US" sz="1320" dirty="0"/>
+              <a:t>Use the related plays to identify decisions, participants, timing, approvals,.</a:t>
+            </a:r>
+            <a:endParaRPr lang="en-US" sz="1220" dirty="0"/>
           </a:p>
         </p:txBody>
       </p:sp>
@@ -14004,8 +14004,8 @@
         </p:nvSpPr>
         <p:spPr>
           <a:xfrm>
-            <a:off x="8211312" y="3941064"/>
-            <a:ext cx="2734056" cy="256032"/>
+            <a:off x="8211312" y="3922776"/>
+            <a:ext cx="2734056" cy="228600"/>
           </a:xfrm>
           <a:prstGeom prst="rect">
             <a:avLst/>
@@ -14021,7 +14021,7 @@
               <a:buNone/>
             </a:pPr>
             <a:r>
-              <a:rPr lang="en-US" sz="1300" b="1" dirty="0">
+              <a:rPr lang="en-US" sz="1220" b="1" dirty="0">
                 <a:solidFill>
                   <a:srgbClr val="0068B7"/>
                 </a:solidFill>
@@ -14031,7 +14031,7 @@
               </a:rPr>
               <a:t>Use the play links to</a:t>
             </a:r>
-            <a:endParaRPr lang="en-US" sz="1300" dirty="0"/>
+            <a:endParaRPr lang="en-US" sz="1220" dirty="0"/>
           </a:p>
         </p:txBody>
       </p:sp>
@@ -14043,8 +14043,8 @@
         </p:nvSpPr>
         <p:spPr>
           <a:xfrm>
-            <a:off x="8229600" y="4306824"/>
-            <a:ext cx="2679192" cy="941832"/>
+            <a:off x="8229600" y="4251960"/>
+            <a:ext cx="2679192" cy="1033272"/>
           </a:xfrm>
           <a:prstGeom prst="rect">
             <a:avLst/>
@@ -14062,7 +14062,7 @@
               <a:buNone/>
             </a:pPr>
             <a:r>
-              <a:rPr lang="en-US" sz="1220" dirty="0">
+              <a:rPr lang="en-US" sz="1140" dirty="0">
                 <a:solidFill>
                   <a:srgbClr val="17364A"/>
                 </a:solidFill>
@@ -14072,14 +14072,14 @@
               </a:rPr>
               <a:t>Locate the decision point in the playbook sequence.</a:t>
             </a:r>
-            <a:endParaRPr lang="en-US" sz="1220" dirty="0"/>
-          </a:p>
-          <a:p>
-            <a:pPr indent="0" marL="0">
-              <a:buNone/>
-            </a:pPr>
-            <a:r>
-              <a:rPr lang="en-US" sz="1220" dirty="0">
+            <a:endParaRPr lang="en-US" sz="1140" dirty="0"/>
+          </a:p>
+          <a:p>
+            <a:pPr indent="0" marL="0">
+              <a:buNone/>
+            </a:pPr>
+            <a:r>
+              <a:rPr lang="en-US" sz="1140" dirty="0">
                 <a:solidFill>
                   <a:srgbClr val="17364A"/>
                 </a:solidFill>
@@ -14089,14 +14089,14 @@
               </a:rPr>
               <a:t>Identify who should participate in the work.</a:t>
             </a:r>
-            <a:endParaRPr lang="en-US" sz="1220" dirty="0"/>
-          </a:p>
-          <a:p>
-            <a:pPr indent="0" marL="0">
-              <a:buNone/>
-            </a:pPr>
-            <a:r>
-              <a:rPr lang="en-US" sz="1220" dirty="0">
+            <a:endParaRPr lang="en-US" sz="1140" dirty="0"/>
+          </a:p>
+          <a:p>
+            <a:pPr indent="0" marL="0">
+              <a:buNone/>
+            </a:pPr>
+            <a:r>
+              <a:rPr lang="en-US" sz="1140" dirty="0">
                 <a:solidFill>
                   <a:srgbClr val="17364A"/>
                 </a:solidFill>
@@ -14104,9 +14104,9 @@
                 <a:ea typeface="Aptos" pitchFamily="34" charset="-122"/>
                 <a:cs typeface="Aptos" pitchFamily="34" charset="-120"/>
               </a:rPr>
-              <a:t>Document the review, approval, or implementation step.</a:t>
-            </a:r>
-            <a:endParaRPr lang="en-US" sz="1220" dirty="0"/>
+              <a:t>Document the review, approval, or implementation.</a:t>
+            </a:r>
+            <a:endParaRPr lang="en-US" sz="1140" dirty="0"/>
           </a:p>
         </p:txBody>
       </p:sp>
@@ -14424,7 +14424,7 @@
                 <a:ea typeface="Aptos" pitchFamily="34" charset="-122"/>
                 <a:cs typeface="Aptos" pitchFamily="34" charset="-120"/>
               </a:rPr>
-              <a:t>• Tool 44: Performance Monitoring Dashboard (Dashboard) - Use this tool to complete or.</a:t>
+              <a:t>• Tool 44: Performance Monitoring Dashboard (Dashboard) - Use this tool to.</a:t>
             </a:r>
             <a:endParaRPr lang="en-US" sz="1850" dirty="0"/>
           </a:p>
@@ -14441,7 +14441,7 @@
                 <a:ea typeface="Aptos" pitchFamily="34" charset="-122"/>
                 <a:cs typeface="Aptos" pitchFamily="34" charset="-120"/>
               </a:rPr>
-              <a:t>• Tool 45: Continuous Improvement Log (Log) - Use Continuous Improvement Log to translate this.</a:t>
+              <a:t>• Tool 45: Continuous Improvement Log (Log) - Use Continuous Improvement Log.</a:t>
             </a:r>
             <a:endParaRPr lang="en-US" sz="1850" dirty="0"/>
           </a:p>
@@ -14458,7 +14458,7 @@
                 <a:ea typeface="Aptos" pitchFamily="34" charset="-122"/>
                 <a:cs typeface="Aptos" pitchFamily="34" charset="-120"/>
               </a:rPr>
-              <a:t>• Tool 48: AI Evaluation &amp; Outcomes Reporting (Template) - Use this tool to complete or.</a:t>
+              <a:t>• Tool 48: AI Evaluation &amp; Outcomes Reporting (Template) - Use this tool to.</a:t>
             </a:r>
             <a:endParaRPr lang="en-US" sz="1850" dirty="0"/>
           </a:p>
@@ -14475,7 +14475,7 @@
                 <a:ea typeface="Aptos" pitchFamily="34" charset="-122"/>
                 <a:cs typeface="Aptos" pitchFamily="34" charset="-120"/>
               </a:rPr>
-              <a:t>• Tool 3: Equity Impact Assessment Checklist (Checklist) - Use this tool to complete or.</a:t>
+              <a:t>• Tool 3: Equity Impact Assessment Checklist (Checklist) - Use this tool to.</a:t>
             </a:r>
             <a:endParaRPr lang="en-US" sz="1850" dirty="0"/>
           </a:p>
@@ -14516,8 +14516,8 @@
         </p:nvSpPr>
         <p:spPr>
           <a:xfrm>
-            <a:off x="8211312" y="1563624"/>
-            <a:ext cx="2734056" cy="256032"/>
+            <a:off x="8211312" y="1545336"/>
+            <a:ext cx="2734056" cy="228600"/>
           </a:xfrm>
           <a:prstGeom prst="rect">
             <a:avLst/>
@@ -14533,7 +14533,7 @@
               <a:buNone/>
             </a:pPr>
             <a:r>
-              <a:rPr lang="en-US" sz="1300" b="1" dirty="0">
+              <a:rPr lang="en-US" sz="1220" b="1" dirty="0">
                 <a:solidFill>
                   <a:srgbClr val="0068B7"/>
                 </a:solidFill>
@@ -14543,7 +14543,7 @@
               </a:rPr>
               <a:t>Use the tools</a:t>
             </a:r>
-            <a:endParaRPr lang="en-US" sz="1300" dirty="0"/>
+            <a:endParaRPr lang="en-US" sz="1220" dirty="0"/>
           </a:p>
         </p:txBody>
       </p:sp>
@@ -14555,8 +14555,8 @@
         </p:nvSpPr>
         <p:spPr>
           <a:xfrm>
-            <a:off x="8211312" y="1892808"/>
-            <a:ext cx="2734056" cy="1536192"/>
+            <a:off x="8211312" y="1856232"/>
+            <a:ext cx="2734056" cy="1591056"/>
           </a:xfrm>
           <a:prstGeom prst="rect">
             <a:avLst/>
@@ -14574,7 +14574,7 @@
               <a:buNone/>
             </a:pPr>
             <a:r>
-              <a:rPr lang="en-US" sz="1320" dirty="0">
+              <a:rPr lang="en-US" sz="1220" dirty="0">
                 <a:solidFill>
                   <a:srgbClr val="17364A"/>
                 </a:solidFill>
@@ -14582,9 +14582,9 @@
                 <a:ea typeface="Aptos" pitchFamily="34" charset="-122"/>
                 <a:cs typeface="Aptos" pitchFamily="34" charset="-120"/>
               </a:rPr>
-              <a:t>Use linked tools when your department needs a structured worksheet, template, checklist, review process, or documentation artifact.</a:t>
-            </a:r>
-            <a:endParaRPr lang="en-US" sz="1320" dirty="0"/>
+              <a:t>Use linked tools when your department needs a structured worksheet, template,.</a:t>
+            </a:r>
+            <a:endParaRPr lang="en-US" sz="1220" dirty="0"/>
           </a:p>
         </p:txBody>
       </p:sp>
@@ -14623,8 +14623,8 @@
         </p:nvSpPr>
         <p:spPr>
           <a:xfrm>
-            <a:off x="8211312" y="3941064"/>
-            <a:ext cx="2734056" cy="256032"/>
+            <a:off x="8211312" y="3922776"/>
+            <a:ext cx="2734056" cy="228600"/>
           </a:xfrm>
           <a:prstGeom prst="rect">
             <a:avLst/>
@@ -14640,7 +14640,7 @@
               <a:buNone/>
             </a:pPr>
             <a:r>
-              <a:rPr lang="en-US" sz="1300" b="1" dirty="0">
+              <a:rPr lang="en-US" sz="1220" b="1" dirty="0">
                 <a:solidFill>
                   <a:srgbClr val="0068B7"/>
                 </a:solidFill>
@@ -14650,7 +14650,7 @@
               </a:rPr>
               <a:t>Tool selection cues</a:t>
             </a:r>
-            <a:endParaRPr lang="en-US" sz="1300" dirty="0"/>
+            <a:endParaRPr lang="en-US" sz="1220" dirty="0"/>
           </a:p>
         </p:txBody>
       </p:sp>
@@ -14662,8 +14662,8 @@
         </p:nvSpPr>
         <p:spPr>
           <a:xfrm>
-            <a:off x="8229600" y="4306824"/>
-            <a:ext cx="2679192" cy="941832"/>
+            <a:off x="8229600" y="4251960"/>
+            <a:ext cx="2679192" cy="1033272"/>
           </a:xfrm>
           <a:prstGeom prst="rect">
             <a:avLst/>
@@ -14681,7 +14681,7 @@
               <a:buNone/>
             </a:pPr>
             <a:r>
-              <a:rPr lang="en-US" sz="1220" dirty="0">
+              <a:rPr lang="en-US" sz="1140" dirty="0">
                 <a:solidFill>
                   <a:srgbClr val="17364A"/>
                 </a:solidFill>
@@ -14691,14 +14691,14 @@
               </a:rPr>
               <a:t>Use a tool when no comparable local process exists.</a:t>
             </a:r>
-            <a:endParaRPr lang="en-US" sz="1220" dirty="0"/>
-          </a:p>
-          <a:p>
-            <a:pPr indent="0" marL="0">
-              <a:buNone/>
-            </a:pPr>
-            <a:r>
-              <a:rPr lang="en-US" sz="1220" dirty="0">
+            <a:endParaRPr lang="en-US" sz="1140" dirty="0"/>
+          </a:p>
+          <a:p>
+            <a:pPr indent="0" marL="0">
+              <a:buNone/>
+            </a:pPr>
+            <a:r>
+              <a:rPr lang="en-US" sz="1140" dirty="0">
                 <a:solidFill>
                   <a:srgbClr val="17364A"/>
                 </a:solidFill>
@@ -14706,16 +14706,16 @@
                 <a:ea typeface="Aptos" pitchFamily="34" charset="-122"/>
                 <a:cs typeface="Aptos" pitchFamily="34" charset="-120"/>
               </a:rPr>
-              <a:t>Adapt existing department templates when they already fit the.</a:t>
-            </a:r>
-            <a:endParaRPr lang="en-US" sz="1220" dirty="0"/>
-          </a:p>
-          <a:p>
-            <a:pPr indent="0" marL="0">
-              <a:buNone/>
-            </a:pPr>
-            <a:r>
-              <a:rPr lang="en-US" sz="1220" dirty="0">
+              <a:t>Adapt existing department templates when they.</a:t>
+            </a:r>
+            <a:endParaRPr lang="en-US" sz="1140" dirty="0"/>
+          </a:p>
+          <a:p>
+            <a:pPr indent="0" marL="0">
+              <a:buNone/>
+            </a:pPr>
+            <a:r>
+              <a:rPr lang="en-US" sz="1140" dirty="0">
                 <a:solidFill>
                   <a:srgbClr val="17364A"/>
                 </a:solidFill>
@@ -14723,9 +14723,9 @@
                 <a:ea typeface="Aptos" pitchFamily="34" charset="-122"/>
                 <a:cs typeface="Aptos" pitchFamily="34" charset="-120"/>
               </a:rPr>
-              <a:t>Save the completed artifact as evidence of the decision.</a:t>
-            </a:r>
-            <a:endParaRPr lang="en-US" sz="1220" dirty="0"/>
+              <a:t>Save the completed artifact as evidence of the.</a:t>
+            </a:r>
+            <a:endParaRPr lang="en-US" sz="1140" dirty="0"/>
           </a:p>
         </p:txBody>
       </p:sp>
@@ -15016,8 +15016,8 @@
         </p:nvSpPr>
         <p:spPr>
           <a:xfrm>
-            <a:off x="868680" y="1508760"/>
-            <a:ext cx="6309360" cy="4160520"/>
+            <a:off x="822960" y="1463040"/>
+            <a:ext cx="6565392" cy="4343400"/>
           </a:xfrm>
           <a:prstGeom prst="rect">
             <a:avLst/>
@@ -15035,7 +15035,7 @@
               <a:buNone/>
             </a:pPr>
             <a:r>
-              <a:rPr lang="en-US" sz="2100" dirty="0">
+              <a:rPr lang="en-US" sz="1920" dirty="0">
                 <a:solidFill>
                   <a:srgbClr val="003A63"/>
                 </a:solidFill>
@@ -15045,14 +15045,14 @@
               </a:rPr>
               <a:t>• Explain why overall model performance can mask inequitable performance.</a:t>
             </a:r>
-            <a:endParaRPr lang="en-US" sz="2100" dirty="0"/>
-          </a:p>
-          <a:p>
-            <a:pPr indent="0" marL="0">
-              <a:buNone/>
-            </a:pPr>
-            <a:r>
-              <a:rPr lang="en-US" sz="2100" dirty="0">
+            <a:endParaRPr lang="en-US" sz="1920" dirty="0"/>
+          </a:p>
+          <a:p>
+            <a:pPr indent="0" marL="0">
+              <a:buNone/>
+            </a:pPr>
+            <a:r>
+              <a:rPr lang="en-US" sz="1920" dirty="0">
                 <a:solidFill>
                   <a:srgbClr val="003A63"/>
                 </a:solidFill>
@@ -15060,16 +15060,16 @@
                 <a:ea typeface="Aptos" pitchFamily="34" charset="-122"/>
                 <a:cs typeface="Aptos" pitchFamily="34" charset="-120"/>
               </a:rPr>
-              <a:t>• Identify relevant subgroups and contextual factors for equity evaluation in public health.</a:t>
-            </a:r>
-            <a:endParaRPr lang="en-US" sz="2100" dirty="0"/>
-          </a:p>
-          <a:p>
-            <a:pPr indent="0" marL="0">
-              <a:buNone/>
-            </a:pPr>
-            <a:r>
-              <a:rPr lang="en-US" sz="2100" dirty="0">
+              <a:t>• Identify relevant subgroups and contextual factors for equity evaluation in.</a:t>
+            </a:r>
+            <a:endParaRPr lang="en-US" sz="1920" dirty="0"/>
+          </a:p>
+          <a:p>
+            <a:pPr indent="0" marL="0">
+              <a:buNone/>
+            </a:pPr>
+            <a:r>
+              <a:rPr lang="en-US" sz="1920" dirty="0">
                 <a:solidFill>
                   <a:srgbClr val="003A63"/>
                 </a:solidFill>
@@ -15077,9 +15077,9 @@
                 <a:ea typeface="Aptos" pitchFamily="34" charset="-122"/>
                 <a:cs typeface="Aptos" pitchFamily="34" charset="-120"/>
               </a:rPr>
-              <a:t>• Assess data representativeness, missingness, and measurement bias before model use.</a:t>
-            </a:r>
-            <a:endParaRPr lang="en-US" sz="2100" dirty="0"/>
+              <a:t>• Assess data representativeness, missingness, and measurement bias before.</a:t>
+            </a:r>
+            <a:endParaRPr lang="en-US" sz="1920" dirty="0"/>
           </a:p>
         </p:txBody>
       </p:sp>
@@ -15091,12 +15091,12 @@
         </p:nvSpPr>
         <p:spPr>
           <a:xfrm>
-            <a:off x="7635240" y="1325880"/>
-            <a:ext cx="3474720" cy="1207008"/>
+            <a:off x="7543800" y="1325880"/>
+            <a:ext cx="3611880" cy="1261872"/>
           </a:xfrm>
           <a:prstGeom prst="roundRect">
             <a:avLst>
-              <a:gd name="adj" fmla="val 9091"/>
+              <a:gd name="adj" fmla="val 8696"/>
             </a:avLst>
           </a:prstGeom>
           <a:solidFill>
@@ -15118,8 +15118,8 @@
         </p:nvSpPr>
         <p:spPr>
           <a:xfrm>
-            <a:off x="7799832" y="1472184"/>
-            <a:ext cx="3145536" cy="256032"/>
+            <a:off x="7708392" y="1453896"/>
+            <a:ext cx="3282696" cy="228600"/>
           </a:xfrm>
           <a:prstGeom prst="rect">
             <a:avLst/>
@@ -15135,7 +15135,7 @@
               <a:buNone/>
             </a:pPr>
             <a:r>
-              <a:rPr lang="en-US" sz="1300" b="1" dirty="0">
+              <a:rPr lang="en-US" sz="1220" b="1" dirty="0">
                 <a:solidFill>
                   <a:srgbClr val="0068B7"/>
                 </a:solidFill>
@@ -15145,7 +15145,7 @@
               </a:rPr>
               <a:t>Risk check</a:t>
             </a:r>
-            <a:endParaRPr lang="en-US" sz="1300" dirty="0"/>
+            <a:endParaRPr lang="en-US" sz="1220" dirty="0"/>
           </a:p>
         </p:txBody>
       </p:sp>
@@ -15157,8 +15157,8 @@
         </p:nvSpPr>
         <p:spPr>
           <a:xfrm>
-            <a:off x="7799832" y="1801368"/>
-            <a:ext cx="3145536" cy="640080"/>
+            <a:off x="7708392" y="1764792"/>
+            <a:ext cx="3282696" cy="749808"/>
           </a:xfrm>
           <a:prstGeom prst="rect">
             <a:avLst/>
@@ -15176,7 +15176,7 @@
               <a:buNone/>
             </a:pPr>
             <a:r>
-              <a:rPr lang="en-US" sz="1320" dirty="0">
+              <a:rPr lang="en-US" sz="1220" dirty="0">
                 <a:solidFill>
                   <a:srgbClr val="17364A"/>
                 </a:solidFill>
@@ -15186,7 +15186,7 @@
               </a:rPr>
               <a:t>Explain why overall model performance can mask inequitable performance.</a:t>
             </a:r>
-            <a:endParaRPr lang="en-US" sz="1320" dirty="0"/>
+            <a:endParaRPr lang="en-US" sz="1220" dirty="0"/>
           </a:p>
         </p:txBody>
       </p:sp>
@@ -15198,12 +15198,12 @@
         </p:nvSpPr>
         <p:spPr>
           <a:xfrm>
-            <a:off x="7635240" y="2670048"/>
-            <a:ext cx="3474720" cy="1377086"/>
+            <a:off x="7543800" y="2724912"/>
+            <a:ext cx="3611880" cy="1527048"/>
           </a:xfrm>
           <a:prstGeom prst="roundRect">
             <a:avLst>
-              <a:gd name="adj" fmla="val 7968"/>
+              <a:gd name="adj" fmla="val 7186"/>
             </a:avLst>
           </a:prstGeom>
           <a:solidFill>
@@ -15225,8 +15225,8 @@
         </p:nvSpPr>
         <p:spPr>
           <a:xfrm>
-            <a:off x="7799832" y="2816352"/>
-            <a:ext cx="3145536" cy="256032"/>
+            <a:off x="7708392" y="2852928"/>
+            <a:ext cx="3282696" cy="228600"/>
           </a:xfrm>
           <a:prstGeom prst="rect">
             <a:avLst/>
@@ -15242,7 +15242,7 @@
               <a:buNone/>
             </a:pPr>
             <a:r>
-              <a:rPr lang="en-US" sz="1300" b="1" dirty="0">
+              <a:rPr lang="en-US" sz="1220" b="1" dirty="0">
                 <a:solidFill>
                   <a:srgbClr val="0068B7"/>
                 </a:solidFill>
@@ -15252,7 +15252,7 @@
               </a:rPr>
               <a:t>Concept checkpoints</a:t>
             </a:r>
-            <a:endParaRPr lang="en-US" sz="1300" dirty="0"/>
+            <a:endParaRPr lang="en-US" sz="1220" dirty="0"/>
           </a:p>
         </p:txBody>
       </p:sp>
@@ -15264,8 +15264,8 @@
         </p:nvSpPr>
         <p:spPr>
           <a:xfrm>
-            <a:off x="7818120" y="3182112"/>
-            <a:ext cx="3090672" cy="718718"/>
+            <a:off x="7726680" y="3182112"/>
+            <a:ext cx="3227832" cy="960120"/>
           </a:xfrm>
           <a:prstGeom prst="rect">
             <a:avLst/>
@@ -15283,7 +15283,7 @@
               <a:buNone/>
             </a:pPr>
             <a:r>
-              <a:rPr lang="en-US" sz="1220" dirty="0">
+              <a:rPr lang="en-US" sz="1140" dirty="0">
                 <a:solidFill>
                   <a:srgbClr val="17364A"/>
                 </a:solidFill>
@@ -15291,16 +15291,16 @@
                 <a:ea typeface="Aptos" pitchFamily="34" charset="-122"/>
                 <a:cs typeface="Aptos" pitchFamily="34" charset="-120"/>
               </a:rPr>
-              <a:t>Define subgroup performance measures and review thresholds for.</a:t>
-            </a:r>
-            <a:endParaRPr lang="en-US" sz="1220" dirty="0"/>
-          </a:p>
-          <a:p>
-            <a:pPr indent="0" marL="0">
-              <a:buNone/>
-            </a:pPr>
-            <a:r>
-              <a:rPr lang="en-US" sz="1220" dirty="0">
+              <a:t>Define subgroup performance measures and review.</a:t>
+            </a:r>
+            <a:endParaRPr lang="en-US" sz="1140" dirty="0"/>
+          </a:p>
+          <a:p>
+            <a:pPr indent="0" marL="0">
+              <a:buNone/>
+            </a:pPr>
+            <a:r>
+              <a:rPr lang="en-US" sz="1140" dirty="0">
                 <a:solidFill>
                   <a:srgbClr val="17364A"/>
                 </a:solidFill>
@@ -15308,9 +15308,9 @@
                 <a:ea typeface="Aptos" pitchFamily="34" charset="-122"/>
                 <a:cs typeface="Aptos" pitchFamily="34" charset="-120"/>
               </a:rPr>
-              <a:t>Produce an equity evaluation plan for a model or AI-supported.</a:t>
-            </a:r>
-            <a:endParaRPr lang="en-US" sz="1220" dirty="0"/>
+              <a:t>Produce an equity evaluation plan for a model or.</a:t>
+            </a:r>
+            <a:endParaRPr lang="en-US" sz="1140" dirty="0"/>
           </a:p>
         </p:txBody>
       </p:sp>
@@ -15322,12 +15322,12 @@
         </p:nvSpPr>
         <p:spPr>
           <a:xfrm>
-            <a:off x="7635240" y="4184294"/>
-            <a:ext cx="3474720" cy="1466698"/>
+            <a:off x="7543800" y="4389120"/>
+            <a:ext cx="3611880" cy="1261872"/>
           </a:xfrm>
           <a:prstGeom prst="roundRect">
             <a:avLst>
-              <a:gd name="adj" fmla="val 7481"/>
+              <a:gd name="adj" fmla="val 8696"/>
             </a:avLst>
           </a:prstGeom>
           <a:solidFill>
@@ -15349,8 +15349,8 @@
         </p:nvSpPr>
         <p:spPr>
           <a:xfrm>
-            <a:off x="7799832" y="4330598"/>
-            <a:ext cx="3145536" cy="256032"/>
+            <a:off x="7708392" y="4517136"/>
+            <a:ext cx="3282696" cy="228600"/>
           </a:xfrm>
           <a:prstGeom prst="rect">
             <a:avLst/>
@@ -15366,7 +15366,7 @@
               <a:buNone/>
             </a:pPr>
             <a:r>
-              <a:rPr lang="en-US" sz="1300" b="1" dirty="0">
+              <a:rPr lang="en-US" sz="1220" b="1" dirty="0">
                 <a:solidFill>
                   <a:srgbClr val="0068B7"/>
                 </a:solidFill>
@@ -15376,7 +15376,7 @@
               </a:rPr>
               <a:t>Safeguard to plan</a:t>
             </a:r>
-            <a:endParaRPr lang="en-US" sz="1300" dirty="0"/>
+            <a:endParaRPr lang="en-US" sz="1220" dirty="0"/>
           </a:p>
         </p:txBody>
       </p:sp>
@@ -15388,8 +15388,8 @@
         </p:nvSpPr>
         <p:spPr>
           <a:xfrm>
-            <a:off x="7799832" y="4659782"/>
-            <a:ext cx="3145536" cy="899770"/>
+            <a:off x="7708392" y="4828032"/>
+            <a:ext cx="3282696" cy="749808"/>
           </a:xfrm>
           <a:prstGeom prst="rect">
             <a:avLst/>
@@ -15407,7 +15407,7 @@
               <a:buNone/>
             </a:pPr>
             <a:r>
-              <a:rPr lang="en-US" sz="1320" dirty="0">
+              <a:rPr lang="en-US" sz="1220" dirty="0">
                 <a:solidFill>
                   <a:srgbClr val="17364A"/>
                 </a:solidFill>
@@ -15415,9 +15415,9 @@
                 <a:ea typeface="Aptos" pitchFamily="34" charset="-122"/>
                 <a:cs typeface="Aptos" pitchFamily="34" charset="-120"/>
               </a:rPr>
-              <a:t>Use the assignment to test whether you can explain the concept, apply it to a realistic public health situation, and identify what would need review before the work moves forward.</a:t>
-            </a:r>
-            <a:endParaRPr lang="en-US" sz="1320" dirty="0"/>
+              <a:t>Use the assignment to test whether you can explain the concept, apply it to a.</a:t>
+            </a:r>
+            <a:endParaRPr lang="en-US" sz="1220" dirty="0"/>
           </a:p>
         </p:txBody>
       </p:sp>
@@ -15708,8 +15708,8 @@
         </p:nvSpPr>
         <p:spPr>
           <a:xfrm>
-            <a:off x="868680" y="1508760"/>
-            <a:ext cx="6309360" cy="4160520"/>
+            <a:off x="822960" y="1463040"/>
+            <a:ext cx="6565392" cy="4343400"/>
           </a:xfrm>
           <a:prstGeom prst="rect">
             <a:avLst/>
@@ -15727,7 +15727,7 @@
               <a:buNone/>
             </a:pPr>
             <a:r>
-              <a:rPr lang="en-US" sz="2100" dirty="0">
+              <a:rPr lang="en-US" sz="1920" dirty="0">
                 <a:solidFill>
                   <a:srgbClr val="003A63"/>
                 </a:solidFill>
@@ -15735,16 +15735,16 @@
                 <a:ea typeface="Aptos" pitchFamily="34" charset="-122"/>
                 <a:cs typeface="Aptos" pitchFamily="34" charset="-120"/>
               </a:rPr>
-              <a:t>• Equity evaluation examines whether an AI model performs differently across populations, places,.</a:t>
-            </a:r>
-            <a:endParaRPr lang="en-US" sz="2100" dirty="0"/>
-          </a:p>
-          <a:p>
-            <a:pPr indent="0" marL="0">
-              <a:buNone/>
-            </a:pPr>
-            <a:r>
-              <a:rPr lang="en-US" sz="2100" dirty="0">
+              <a:t>• Equity evaluation examines whether an AI model performs differently across.</a:t>
+            </a:r>
+            <a:endParaRPr lang="en-US" sz="1920" dirty="0"/>
+          </a:p>
+          <a:p>
+            <a:pPr indent="0" marL="0">
+              <a:buNone/>
+            </a:pPr>
+            <a:r>
+              <a:rPr lang="en-US" sz="1920" dirty="0">
                 <a:solidFill>
                   <a:srgbClr val="003A63"/>
                 </a:solidFill>
@@ -15752,16 +15752,16 @@
                 <a:ea typeface="Aptos" pitchFamily="34" charset="-122"/>
                 <a:cs typeface="Aptos" pitchFamily="34" charset="-120"/>
               </a:rPr>
-              <a:t>• Public health agencies have a responsibility to evaluate not only average model performance.</a:t>
-            </a:r>
-            <a:endParaRPr lang="en-US" sz="2100" dirty="0"/>
-          </a:p>
-          <a:p>
-            <a:pPr indent="0" marL="0">
-              <a:buNone/>
-            </a:pPr>
-            <a:r>
-              <a:rPr lang="en-US" sz="2100" dirty="0">
+              <a:t>• Public health agencies have a responsibility to evaluate not only average.</a:t>
+            </a:r>
+            <a:endParaRPr lang="en-US" sz="1920" dirty="0"/>
+          </a:p>
+          <a:p>
+            <a:pPr indent="0" marL="0">
+              <a:buNone/>
+            </a:pPr>
+            <a:r>
+              <a:rPr lang="en-US" sz="1920" dirty="0">
                 <a:solidFill>
                   <a:srgbClr val="003A63"/>
                 </a:solidFill>
@@ -15769,9 +15769,9 @@
                 <a:ea typeface="Aptos" pitchFamily="34" charset="-122"/>
                 <a:cs typeface="Aptos" pitchFamily="34" charset="-120"/>
               </a:rPr>
-              <a:t>• This is especially important when AI is used to prioritize cases, allocate services, detect.</a:t>
-            </a:r>
-            <a:endParaRPr lang="en-US" sz="2100" dirty="0"/>
+              <a:t>• This is especially important when AI is used to prioritize cases, allocate.</a:t>
+            </a:r>
+            <a:endParaRPr lang="en-US" sz="1920" dirty="0"/>
           </a:p>
         </p:txBody>
       </p:sp>
@@ -15783,12 +15783,12 @@
         </p:nvSpPr>
         <p:spPr>
           <a:xfrm>
-            <a:off x="7635240" y="1325880"/>
-            <a:ext cx="3474720" cy="1255471"/>
+            <a:off x="7543800" y="1325880"/>
+            <a:ext cx="3611880" cy="1261872"/>
           </a:xfrm>
           <a:prstGeom prst="roundRect">
             <a:avLst>
-              <a:gd name="adj" fmla="val 8740"/>
+              <a:gd name="adj" fmla="val 8696"/>
             </a:avLst>
           </a:prstGeom>
           <a:solidFill>
@@ -15810,8 +15810,8 @@
         </p:nvSpPr>
         <p:spPr>
           <a:xfrm>
-            <a:off x="7799832" y="1472184"/>
-            <a:ext cx="3145536" cy="256032"/>
+            <a:off x="7708392" y="1453896"/>
+            <a:ext cx="3282696" cy="228600"/>
           </a:xfrm>
           <a:prstGeom prst="rect">
             <a:avLst/>
@@ -15827,7 +15827,7 @@
               <a:buNone/>
             </a:pPr>
             <a:r>
-              <a:rPr lang="en-US" sz="1300" b="1" dirty="0">
+              <a:rPr lang="en-US" sz="1220" b="1" dirty="0">
                 <a:solidFill>
                   <a:srgbClr val="0068B7"/>
                 </a:solidFill>
@@ -15837,7 +15837,7 @@
               </a:rPr>
               <a:t>Risk check</a:t>
             </a:r>
-            <a:endParaRPr lang="en-US" sz="1300" dirty="0"/>
+            <a:endParaRPr lang="en-US" sz="1220" dirty="0"/>
           </a:p>
         </p:txBody>
       </p:sp>
@@ -15849,8 +15849,8 @@
         </p:nvSpPr>
         <p:spPr>
           <a:xfrm>
-            <a:off x="7799832" y="1801368"/>
-            <a:ext cx="3145536" cy="688543"/>
+            <a:off x="7708392" y="1764792"/>
+            <a:ext cx="3282696" cy="749808"/>
           </a:xfrm>
           <a:prstGeom prst="rect">
             <a:avLst/>
@@ -15868,7 +15868,7 @@
               <a:buNone/>
             </a:pPr>
             <a:r>
-              <a:rPr lang="en-US" sz="1320" dirty="0">
+              <a:rPr lang="en-US" sz="1220" dirty="0">
                 <a:solidFill>
                   <a:srgbClr val="17364A"/>
                 </a:solidFill>
@@ -15876,9 +15876,9 @@
                 <a:ea typeface="Aptos" pitchFamily="34" charset="-122"/>
                 <a:cs typeface="Aptos" pitchFamily="34" charset="-120"/>
               </a:rPr>
-              <a:t>Equity evaluation examines whether an AI model performs differently across populations, places,.</a:t>
-            </a:r>
-            <a:endParaRPr lang="en-US" sz="1320" dirty="0"/>
+              <a:t>Equity evaluation examines whether an AI model performs differently across.</a:t>
+            </a:r>
+            <a:endParaRPr lang="en-US" sz="1220" dirty="0"/>
           </a:p>
         </p:txBody>
       </p:sp>
@@ -15890,12 +15890,12 @@
         </p:nvSpPr>
         <p:spPr>
           <a:xfrm>
-            <a:off x="7635240" y="2718511"/>
-            <a:ext cx="3474720" cy="1536192"/>
+            <a:off x="7543800" y="2724912"/>
+            <a:ext cx="3611880" cy="1527048"/>
           </a:xfrm>
           <a:prstGeom prst="roundRect">
             <a:avLst>
-              <a:gd name="adj" fmla="val 7143"/>
+              <a:gd name="adj" fmla="val 7186"/>
             </a:avLst>
           </a:prstGeom>
           <a:solidFill>
@@ -15917,24 +15917,26 @@
         </p:nvSpPr>
         <p:spPr>
           <a:xfrm>
-            <a:off x="7799832" y="2846527"/>
-            <a:ext cx="3145536" cy="237744"/>
-          </a:xfrm>
-          <a:prstGeom prst="rect">
-            <a:avLst/>
-          </a:prstGeom>
-          <a:noFill/>
-          <a:ln/>
-        </p:spPr>
-        <p:txBody>
-          <a:bodyPr wrap="square" lIns="0" tIns="0" rIns="0" bIns="0" rtlCol="0" anchor="ctr"/>
-          <a:lstStyle/>
-          <a:p>
-            <a:pPr indent="0" marL="0">
-              <a:buNone/>
-            </a:pPr>
-            <a:r>
-              <a:rPr lang="en-US" sz="1250" b="1" dirty="0">
+            <a:off x="7708392" y="2852928"/>
+            <a:ext cx="3282696" cy="219456"/>
+          </a:xfrm>
+          <a:prstGeom prst="rect">
+            <a:avLst/>
+          </a:prstGeom>
+          <a:noFill/>
+          <a:ln/>
+        </p:spPr>
+        <p:txBody>
+          <a:bodyPr wrap="square" lIns="0" tIns="0" rIns="0" bIns="0" rtlCol="0" anchor="ctr">
+            <a:normAutofit/>
+          </a:bodyPr>
+          <a:lstStyle/>
+          <a:p>
+            <a:pPr indent="0" marL="0">
+              <a:buNone/>
+            </a:pPr>
+            <a:r>
+              <a:rPr lang="en-US" sz="1160" b="1" dirty="0">
                 <a:solidFill>
                   <a:srgbClr val="0068B7"/>
                 </a:solidFill>
@@ -15944,7 +15946,7 @@
               </a:rPr>
               <a:t>Risk control loop</a:t>
             </a:r>
-            <a:endParaRPr lang="en-US" sz="1250" dirty="0"/>
+            <a:endParaRPr lang="en-US" sz="1160" dirty="0"/>
           </a:p>
         </p:txBody>
       </p:sp>
@@ -15956,7 +15958,7 @@
         </p:nvSpPr>
         <p:spPr>
           <a:xfrm>
-            <a:off x="8763000" y="3399739"/>
+            <a:off x="8717280" y="3406140"/>
             <a:ext cx="164592" cy="0"/>
           </a:xfrm>
           <a:prstGeom prst="line">
@@ -15979,8 +15981,8 @@
         </p:nvSpPr>
         <p:spPr>
           <a:xfrm>
-            <a:off x="7872984" y="3248863"/>
-            <a:ext cx="890016" cy="301752"/>
+            <a:off x="7781544" y="3255264"/>
+            <a:ext cx="935736" cy="301752"/>
           </a:xfrm>
           <a:prstGeom prst="roundRect">
             <a:avLst>
@@ -16006,8 +16008,8 @@
         </p:nvSpPr>
         <p:spPr>
           <a:xfrm>
-            <a:off x="7909560" y="3322015"/>
-            <a:ext cx="816864" cy="146304"/>
+            <a:off x="7818120" y="3328416"/>
+            <a:ext cx="862584" cy="146304"/>
           </a:xfrm>
           <a:prstGeom prst="rect">
             <a:avLst/>
@@ -16047,7 +16049,7 @@
         </p:nvSpPr>
         <p:spPr>
           <a:xfrm>
-            <a:off x="9817608" y="3399739"/>
+            <a:off x="9817608" y="3406140"/>
             <a:ext cx="164592" cy="0"/>
           </a:xfrm>
           <a:prstGeom prst="line">
@@ -16070,8 +16072,8 @@
         </p:nvSpPr>
         <p:spPr>
           <a:xfrm>
-            <a:off x="8927592" y="3248863"/>
-            <a:ext cx="890016" cy="301752"/>
+            <a:off x="8881872" y="3255264"/>
+            <a:ext cx="935736" cy="301752"/>
           </a:xfrm>
           <a:prstGeom prst="roundRect">
             <a:avLst>
@@ -16097,8 +16099,8 @@
         </p:nvSpPr>
         <p:spPr>
           <a:xfrm>
-            <a:off x="8964168" y="3322015"/>
-            <a:ext cx="816864" cy="146304"/>
+            <a:off x="8918448" y="3328416"/>
+            <a:ext cx="862584" cy="146304"/>
           </a:xfrm>
           <a:prstGeom prst="rect">
             <a:avLst/>
@@ -16138,8 +16140,8 @@
         </p:nvSpPr>
         <p:spPr>
           <a:xfrm>
-            <a:off x="9982200" y="3248863"/>
-            <a:ext cx="890016" cy="301752"/>
+            <a:off x="9982200" y="3255264"/>
+            <a:ext cx="935736" cy="301752"/>
           </a:xfrm>
           <a:prstGeom prst="roundRect">
             <a:avLst>
@@ -16165,8 +16167,8 @@
         </p:nvSpPr>
         <p:spPr>
           <a:xfrm>
-            <a:off x="10018776" y="3322015"/>
-            <a:ext cx="816864" cy="146304"/>
+            <a:off x="10018776" y="3328416"/>
+            <a:ext cx="862584" cy="146304"/>
           </a:xfrm>
           <a:prstGeom prst="rect">
             <a:avLst/>
@@ -16206,8 +16208,8 @@
         </p:nvSpPr>
         <p:spPr>
           <a:xfrm>
-            <a:off x="7854696" y="3742639"/>
-            <a:ext cx="3035808" cy="365760"/>
+            <a:off x="7763256" y="3749040"/>
+            <a:ext cx="3172968" cy="356616"/>
           </a:xfrm>
           <a:prstGeom prst="rect">
             <a:avLst/>
@@ -16225,7 +16227,7 @@
               <a:buNone/>
             </a:pPr>
             <a:r>
-              <a:rPr lang="en-US" sz="1120" dirty="0">
+              <a:rPr lang="en-US" sz="1040" dirty="0">
                 <a:solidFill>
                   <a:srgbClr val="17364A"/>
                 </a:solidFill>
@@ -16233,9 +16235,9 @@
                 <a:ea typeface="Aptos" pitchFamily="34" charset="-122"/>
                 <a:cs typeface="Aptos" pitchFamily="34" charset="-120"/>
               </a:rPr>
-              <a:t>Responsible use depends on finding risks early, applying safeguards, and watching for drift or harm over time.</a:t>
-            </a:r>
-            <a:endParaRPr lang="en-US" sz="1120" dirty="0"/>
+              <a:t>Responsible use depends on finding risks early, applying safeguards,.</a:t>
+            </a:r>
+            <a:endParaRPr lang="en-US" sz="1040" dirty="0"/>
           </a:p>
         </p:txBody>
       </p:sp>
@@ -16247,12 +16249,12 @@
         </p:nvSpPr>
         <p:spPr>
           <a:xfrm>
-            <a:off x="7635240" y="4391863"/>
-            <a:ext cx="3474720" cy="1255471"/>
+            <a:off x="7543800" y="4389120"/>
+            <a:ext cx="3611880" cy="1261872"/>
           </a:xfrm>
           <a:prstGeom prst="roundRect">
             <a:avLst>
-              <a:gd name="adj" fmla="val 8740"/>
+              <a:gd name="adj" fmla="val 8696"/>
             </a:avLst>
           </a:prstGeom>
           <a:solidFill>
@@ -16274,8 +16276,8 @@
         </p:nvSpPr>
         <p:spPr>
           <a:xfrm>
-            <a:off x="7799832" y="4538167"/>
-            <a:ext cx="3145536" cy="256032"/>
+            <a:off x="7708392" y="4517136"/>
+            <a:ext cx="3282696" cy="228600"/>
           </a:xfrm>
           <a:prstGeom prst="rect">
             <a:avLst/>
@@ -16291,7 +16293,7 @@
               <a:buNone/>
             </a:pPr>
             <a:r>
-              <a:rPr lang="en-US" sz="1300" b="1" dirty="0">
+              <a:rPr lang="en-US" sz="1220" b="1" dirty="0">
                 <a:solidFill>
                   <a:srgbClr val="0068B7"/>
                 </a:solidFill>
@@ -16301,7 +16303,7 @@
               </a:rPr>
               <a:t>Safeguard to plan</a:t>
             </a:r>
-            <a:endParaRPr lang="en-US" sz="1300" dirty="0"/>
+            <a:endParaRPr lang="en-US" sz="1220" dirty="0"/>
           </a:p>
         </p:txBody>
       </p:sp>
@@ -16313,8 +16315,8 @@
         </p:nvSpPr>
         <p:spPr>
           <a:xfrm>
-            <a:off x="7799832" y="4867351"/>
-            <a:ext cx="3145536" cy="688543"/>
+            <a:off x="7708392" y="4828032"/>
+            <a:ext cx="3282696" cy="749808"/>
           </a:xfrm>
           <a:prstGeom prst="rect">
             <a:avLst/>
@@ -16332,7 +16334,7 @@
               <a:buNone/>
             </a:pPr>
             <a:r>
-              <a:rPr lang="en-US" sz="1320" dirty="0">
+              <a:rPr lang="en-US" sz="1220" dirty="0">
                 <a:solidFill>
                   <a:srgbClr val="17364A"/>
                 </a:solidFill>
@@ -16340,9 +16342,9 @@
                 <a:ea typeface="Aptos" pitchFamily="34" charset="-122"/>
                 <a:cs typeface="Aptos" pitchFamily="34" charset="-120"/>
               </a:rPr>
-              <a:t>Identify what could go wrong, who could be affected, what safeguards are needed, and what evidence should be reviewed before use.</a:t>
-            </a:r>
-            <a:endParaRPr lang="en-US" sz="1320" dirty="0"/>
+              <a:t>Identify what could go wrong, who could be affected, what safeguards are needed,.</a:t>
+            </a:r>
+            <a:endParaRPr lang="en-US" sz="1220" dirty="0"/>
           </a:p>
         </p:txBody>
       </p:sp>
@@ -16633,8 +16635,8 @@
         </p:nvSpPr>
         <p:spPr>
           <a:xfrm>
-            <a:off x="868680" y="1508760"/>
-            <a:ext cx="6309360" cy="4160520"/>
+            <a:off x="822960" y="1463040"/>
+            <a:ext cx="6565392" cy="4343400"/>
           </a:xfrm>
           <a:prstGeom prst="rect">
             <a:avLst/>
@@ -16652,7 +16654,7 @@
               <a:buNone/>
             </a:pPr>
             <a:r>
-              <a:rPr lang="en-US" sz="2100" dirty="0">
+              <a:rPr lang="en-US" sz="1920" dirty="0">
                 <a:solidFill>
                   <a:srgbClr val="003A63"/>
                 </a:solidFill>
@@ -16660,16 +16662,16 @@
                 <a:ea typeface="Aptos" pitchFamily="34" charset="-122"/>
                 <a:cs typeface="Aptos" pitchFamily="34" charset="-120"/>
               </a:rPr>
-              <a:t>• This module provides national-level training guidance for public health agencies and partners.</a:t>
-            </a:r>
-            <a:endParaRPr lang="en-US" sz="2100" dirty="0"/>
-          </a:p>
-          <a:p>
-            <a:pPr indent="0" marL="0">
-              <a:buNone/>
-            </a:pPr>
-            <a:r>
-              <a:rPr lang="en-US" sz="2100" dirty="0">
+              <a:t>• This module provides national-level training guidance for public health.</a:t>
+            </a:r>
+            <a:endParaRPr lang="en-US" sz="1920" dirty="0"/>
+          </a:p>
+          <a:p>
+            <a:pPr indent="0" marL="0">
+              <a:buNone/>
+            </a:pPr>
+            <a:r>
+              <a:rPr lang="en-US" sz="1920" dirty="0">
                 <a:solidFill>
                   <a:srgbClr val="003A63"/>
                 </a:solidFill>
@@ -16677,16 +16679,16 @@
                 <a:ea typeface="Aptos" pitchFamily="34" charset="-122"/>
                 <a:cs typeface="Aptos" pitchFamily="34" charset="-120"/>
               </a:rPr>
-              <a:t>• It is not legal advice and does not replace review by agency legal counsel, privacy officers,.</a:t>
-            </a:r>
-            <a:endParaRPr lang="en-US" sz="2100" dirty="0"/>
-          </a:p>
-          <a:p>
-            <a:pPr indent="0" marL="0">
-              <a:buNone/>
-            </a:pPr>
-            <a:r>
-              <a:rPr lang="en-US" sz="2100" dirty="0">
+              <a:t>• It is not legal advice and does not replace review by agency legal counsel,.</a:t>
+            </a:r>
+            <a:endParaRPr lang="en-US" sz="1920" dirty="0"/>
+          </a:p>
+          <a:p>
+            <a:pPr indent="0" marL="0">
+              <a:buNone/>
+            </a:pPr>
+            <a:r>
+              <a:rPr lang="en-US" sz="1920" dirty="0">
                 <a:solidFill>
                   <a:srgbClr val="003A63"/>
                 </a:solidFill>
@@ -16694,9 +16696,9 @@
                 <a:ea typeface="Aptos" pitchFamily="34" charset="-122"/>
                 <a:cs typeface="Aptos" pitchFamily="34" charset="-120"/>
               </a:rPr>
-              <a:t>• Requirements may vary by state, locality, territory, Tribe, agency, funding source,.</a:t>
-            </a:r>
-            <a:endParaRPr lang="en-US" sz="2100" dirty="0"/>
+              <a:t>• Requirements may vary by state, locality, territory, Tribe, agency, funding.</a:t>
+            </a:r>
+            <a:endParaRPr lang="en-US" sz="1920" dirty="0"/>
           </a:p>
         </p:txBody>
       </p:sp>
@@ -16708,12 +16710,12 @@
         </p:nvSpPr>
         <p:spPr>
           <a:xfrm>
-            <a:off x="7635240" y="1325880"/>
-            <a:ext cx="3474720" cy="1207008"/>
+            <a:off x="7543800" y="1325880"/>
+            <a:ext cx="3611880" cy="1261872"/>
           </a:xfrm>
           <a:prstGeom prst="roundRect">
             <a:avLst>
-              <a:gd name="adj" fmla="val 9091"/>
+              <a:gd name="adj" fmla="val 8696"/>
             </a:avLst>
           </a:prstGeom>
           <a:solidFill>
@@ -16735,8 +16737,8 @@
         </p:nvSpPr>
         <p:spPr>
           <a:xfrm>
-            <a:off x="7799832" y="1472184"/>
-            <a:ext cx="3145536" cy="256032"/>
+            <a:off x="7708392" y="1453896"/>
+            <a:ext cx="3282696" cy="228600"/>
           </a:xfrm>
           <a:prstGeom prst="rect">
             <a:avLst/>
@@ -16752,7 +16754,7 @@
               <a:buNone/>
             </a:pPr>
             <a:r>
-              <a:rPr lang="en-US" sz="1300" b="1" dirty="0">
+              <a:rPr lang="en-US" sz="1220" b="1" dirty="0">
                 <a:solidFill>
                   <a:srgbClr val="0068B7"/>
                 </a:solidFill>
@@ -16762,7 +16764,7 @@
               </a:rPr>
               <a:t>Governance lens</a:t>
             </a:r>
-            <a:endParaRPr lang="en-US" sz="1300" dirty="0"/>
+            <a:endParaRPr lang="en-US" sz="1220" dirty="0"/>
           </a:p>
         </p:txBody>
       </p:sp>
@@ -16774,8 +16776,8 @@
         </p:nvSpPr>
         <p:spPr>
           <a:xfrm>
-            <a:off x="7799832" y="1801368"/>
-            <a:ext cx="3145536" cy="640080"/>
+            <a:off x="7708392" y="1764792"/>
+            <a:ext cx="3282696" cy="749808"/>
           </a:xfrm>
           <a:prstGeom prst="rect">
             <a:avLst/>
@@ -16793,7 +16795,7 @@
               <a:buNone/>
             </a:pPr>
             <a:r>
-              <a:rPr lang="en-US" sz="1320" dirty="0">
+              <a:rPr lang="en-US" sz="1220" dirty="0">
                 <a:solidFill>
                   <a:srgbClr val="17364A"/>
                 </a:solidFill>
@@ -16801,9 +16803,9 @@
                 <a:ea typeface="Aptos" pitchFamily="34" charset="-122"/>
                 <a:cs typeface="Aptos" pitchFamily="34" charset="-120"/>
               </a:rPr>
-              <a:t>This module provides national-level training guidance for public health agencies and.</a:t>
-            </a:r>
-            <a:endParaRPr lang="en-US" sz="1320" dirty="0"/>
+              <a:t>This module provides national-level training guidance for public health agencies.</a:t>
+            </a:r>
+            <a:endParaRPr lang="en-US" sz="1220" dirty="0"/>
           </a:p>
         </p:txBody>
       </p:sp>
@@ -16815,12 +16817,12 @@
         </p:nvSpPr>
         <p:spPr>
           <a:xfrm>
-            <a:off x="7635240" y="2670048"/>
-            <a:ext cx="3474720" cy="1377086"/>
+            <a:off x="7543800" y="2724912"/>
+            <a:ext cx="3611880" cy="1527048"/>
           </a:xfrm>
           <a:prstGeom prst="roundRect">
             <a:avLst>
-              <a:gd name="adj" fmla="val 7968"/>
+              <a:gd name="adj" fmla="val 7186"/>
             </a:avLst>
           </a:prstGeom>
           <a:solidFill>
@@ -16842,24 +16844,26 @@
         </p:nvSpPr>
         <p:spPr>
           <a:xfrm>
-            <a:off x="7799832" y="2798064"/>
-            <a:ext cx="3145536" cy="237744"/>
-          </a:xfrm>
-          <a:prstGeom prst="rect">
-            <a:avLst/>
-          </a:prstGeom>
-          <a:noFill/>
-          <a:ln/>
-        </p:spPr>
-        <p:txBody>
-          <a:bodyPr wrap="square" lIns="0" tIns="0" rIns="0" bIns="0" rtlCol="0" anchor="ctr"/>
-          <a:lstStyle/>
-          <a:p>
-            <a:pPr indent="0" marL="0">
-              <a:buNone/>
-            </a:pPr>
-            <a:r>
-              <a:rPr lang="en-US" sz="1250" b="1" dirty="0">
+            <a:off x="7708392" y="2852928"/>
+            <a:ext cx="3282696" cy="219456"/>
+          </a:xfrm>
+          <a:prstGeom prst="rect">
+            <a:avLst/>
+          </a:prstGeom>
+          <a:noFill/>
+          <a:ln/>
+        </p:spPr>
+        <p:txBody>
+          <a:bodyPr wrap="square" lIns="0" tIns="0" rIns="0" bIns="0" rtlCol="0" anchor="ctr">
+            <a:normAutofit/>
+          </a:bodyPr>
+          <a:lstStyle/>
+          <a:p>
+            <a:pPr indent="0" marL="0">
+              <a:buNone/>
+            </a:pPr>
+            <a:r>
+              <a:rPr lang="en-US" sz="1160" b="1" dirty="0">
                 <a:solidFill>
                   <a:srgbClr val="0068B7"/>
                 </a:solidFill>
@@ -16869,7 +16873,7 @@
               </a:rPr>
               <a:t>Governance pathway</a:t>
             </a:r>
-            <a:endParaRPr lang="en-US" sz="1250" dirty="0"/>
+            <a:endParaRPr lang="en-US" sz="1160" dirty="0"/>
           </a:p>
         </p:txBody>
       </p:sp>
@@ -16881,7 +16885,7 @@
         </p:nvSpPr>
         <p:spPr>
           <a:xfrm>
-            <a:off x="8763000" y="3351276"/>
+            <a:off x="8717280" y="3406140"/>
             <a:ext cx="164592" cy="0"/>
           </a:xfrm>
           <a:prstGeom prst="line">
@@ -16904,8 +16908,8 @@
         </p:nvSpPr>
         <p:spPr>
           <a:xfrm>
-            <a:off x="7872984" y="3200400"/>
-            <a:ext cx="890016" cy="301752"/>
+            <a:off x="7781544" y="3255264"/>
+            <a:ext cx="935736" cy="301752"/>
           </a:xfrm>
           <a:prstGeom prst="roundRect">
             <a:avLst>
@@ -16931,8 +16935,8 @@
         </p:nvSpPr>
         <p:spPr>
           <a:xfrm>
-            <a:off x="7909560" y="3273552"/>
-            <a:ext cx="816864" cy="146304"/>
+            <a:off x="7818120" y="3328416"/>
+            <a:ext cx="862584" cy="146304"/>
           </a:xfrm>
           <a:prstGeom prst="rect">
             <a:avLst/>
@@ -16972,7 +16976,7 @@
         </p:nvSpPr>
         <p:spPr>
           <a:xfrm>
-            <a:off x="9817608" y="3351276"/>
+            <a:off x="9817608" y="3406140"/>
             <a:ext cx="164592" cy="0"/>
           </a:xfrm>
           <a:prstGeom prst="line">
@@ -16995,8 +16999,8 @@
         </p:nvSpPr>
         <p:spPr>
           <a:xfrm>
-            <a:off x="8927592" y="3200400"/>
-            <a:ext cx="890016" cy="301752"/>
+            <a:off x="8881872" y="3255264"/>
+            <a:ext cx="935736" cy="301752"/>
           </a:xfrm>
           <a:prstGeom prst="roundRect">
             <a:avLst>
@@ -17022,8 +17026,8 @@
         </p:nvSpPr>
         <p:spPr>
           <a:xfrm>
-            <a:off x="8964168" y="3273552"/>
-            <a:ext cx="816864" cy="146304"/>
+            <a:off x="8918448" y="3328416"/>
+            <a:ext cx="862584" cy="146304"/>
           </a:xfrm>
           <a:prstGeom prst="rect">
             <a:avLst/>
@@ -17063,8 +17067,8 @@
         </p:nvSpPr>
         <p:spPr>
           <a:xfrm>
-            <a:off x="9982200" y="3200400"/>
-            <a:ext cx="890016" cy="301752"/>
+            <a:off x="9982200" y="3255264"/>
+            <a:ext cx="935736" cy="301752"/>
           </a:xfrm>
           <a:prstGeom prst="roundRect">
             <a:avLst>
@@ -17090,8 +17094,8 @@
         </p:nvSpPr>
         <p:spPr>
           <a:xfrm>
-            <a:off x="10018776" y="3273552"/>
-            <a:ext cx="816864" cy="146304"/>
+            <a:off x="10018776" y="3328416"/>
+            <a:ext cx="862584" cy="146304"/>
           </a:xfrm>
           <a:prstGeom prst="rect">
             <a:avLst/>
@@ -17131,8 +17135,8 @@
         </p:nvSpPr>
         <p:spPr>
           <a:xfrm>
-            <a:off x="7854696" y="3694176"/>
-            <a:ext cx="3035808" cy="206654"/>
+            <a:off x="7763256" y="3749040"/>
+            <a:ext cx="3172968" cy="356616"/>
           </a:xfrm>
           <a:prstGeom prst="rect">
             <a:avLst/>
@@ -17150,7 +17154,7 @@
               <a:buNone/>
             </a:pPr>
             <a:r>
-              <a:rPr lang="en-US" sz="1120" dirty="0">
+              <a:rPr lang="en-US" sz="1040" dirty="0">
                 <a:solidFill>
                   <a:srgbClr val="17364A"/>
                 </a:solidFill>
@@ -17158,9 +17162,9 @@
                 <a:ea typeface="Aptos" pitchFamily="34" charset="-122"/>
                 <a:cs typeface="Aptos" pitchFamily="34" charset="-120"/>
               </a:rPr>
-              <a:t>A proposed AI use should move through documented review before it becomes an operational workflow.</a:t>
-            </a:r>
-            <a:endParaRPr lang="en-US" sz="1120" dirty="0"/>
+              <a:t>A proposed AI use should move through documented review before it.</a:t>
+            </a:r>
+            <a:endParaRPr lang="en-US" sz="1040" dirty="0"/>
           </a:p>
         </p:txBody>
       </p:sp>
@@ -17172,12 +17176,12 @@
         </p:nvSpPr>
         <p:spPr>
           <a:xfrm>
-            <a:off x="7635240" y="4184294"/>
-            <a:ext cx="3474720" cy="1466698"/>
+            <a:off x="7543800" y="4389120"/>
+            <a:ext cx="3611880" cy="1261872"/>
           </a:xfrm>
           <a:prstGeom prst="roundRect">
             <a:avLst>
-              <a:gd name="adj" fmla="val 7481"/>
+              <a:gd name="adj" fmla="val 8696"/>
             </a:avLst>
           </a:prstGeom>
           <a:solidFill>
@@ -17199,8 +17203,8 @@
         </p:nvSpPr>
         <p:spPr>
           <a:xfrm>
-            <a:off x="7799832" y="4330598"/>
-            <a:ext cx="3145536" cy="256032"/>
+            <a:off x="7708392" y="4517136"/>
+            <a:ext cx="3282696" cy="228600"/>
           </a:xfrm>
           <a:prstGeom prst="rect">
             <a:avLst/>
@@ -17216,7 +17220,7 @@
               <a:buNone/>
             </a:pPr>
             <a:r>
-              <a:rPr lang="en-US" sz="1300" b="1" dirty="0">
+              <a:rPr lang="en-US" sz="1220" b="1" dirty="0">
                 <a:solidFill>
                   <a:srgbClr val="0068B7"/>
                 </a:solidFill>
@@ -17226,7 +17230,7 @@
               </a:rPr>
               <a:t>What to document</a:t>
             </a:r>
-            <a:endParaRPr lang="en-US" sz="1300" dirty="0"/>
+            <a:endParaRPr lang="en-US" sz="1220" dirty="0"/>
           </a:p>
         </p:txBody>
       </p:sp>
@@ -17238,8 +17242,8 @@
         </p:nvSpPr>
         <p:spPr>
           <a:xfrm>
-            <a:off x="7799832" y="4659782"/>
-            <a:ext cx="3145536" cy="899770"/>
+            <a:off x="7708392" y="4828032"/>
+            <a:ext cx="3282696" cy="749808"/>
           </a:xfrm>
           <a:prstGeom prst="rect">
             <a:avLst/>
@@ -17257,7 +17261,7 @@
               <a:buNone/>
             </a:pPr>
             <a:r>
-              <a:rPr lang="en-US" sz="1320" dirty="0">
+              <a:rPr lang="en-US" sz="1220" dirty="0">
                 <a:solidFill>
                   <a:srgbClr val="17364A"/>
                 </a:solidFill>
@@ -17265,9 +17269,9 @@
                 <a:ea typeface="Aptos" pitchFamily="34" charset="-122"/>
                 <a:cs typeface="Aptos" pitchFamily="34" charset="-120"/>
               </a:rPr>
-              <a:t>Translate this concept into clear decision rights, review steps, documentation expectations, and escalation paths before an AI-supported workflow is approved.</a:t>
-            </a:r>
-            <a:endParaRPr lang="en-US" sz="1320" dirty="0"/>
+              <a:t>Translate this concept into clear decision rights, review steps, documentation.</a:t>
+            </a:r>
+            <a:endParaRPr lang="en-US" sz="1220" dirty="0"/>
           </a:p>
         </p:txBody>
       </p:sp>
@@ -17558,8 +17562,8 @@
         </p:nvSpPr>
         <p:spPr>
           <a:xfrm>
-            <a:off x="868680" y="1508760"/>
-            <a:ext cx="6309360" cy="4160520"/>
+            <a:off x="822960" y="1463040"/>
+            <a:ext cx="6565392" cy="4343400"/>
           </a:xfrm>
           <a:prstGeom prst="rect">
             <a:avLst/>
@@ -17577,7 +17581,7 @@
               <a:buNone/>
             </a:pPr>
             <a:r>
-              <a:rPr lang="en-US" sz="2100" dirty="0">
+              <a:rPr lang="en-US" sz="1920" dirty="0">
                 <a:solidFill>
                   <a:srgbClr val="003A63"/>
                 </a:solidFill>
@@ -17585,16 +17589,16 @@
                 <a:ea typeface="Aptos" pitchFamily="34" charset="-122"/>
                 <a:cs typeface="Aptos" pitchFamily="34" charset="-120"/>
               </a:rPr>
-              <a:t>• A model predicts which clients are most likely to miss follow-up care after a public health.</a:t>
-            </a:r>
-            <a:endParaRPr lang="en-US" sz="2100" dirty="0"/>
-          </a:p>
-          <a:p>
-            <a:pPr indent="0" marL="0">
-              <a:buNone/>
-            </a:pPr>
-            <a:r>
-              <a:rPr lang="en-US" sz="2100" dirty="0">
+              <a:t>• A model predicts which clients are most likely to miss follow-up care after.</a:t>
+            </a:r>
+            <a:endParaRPr lang="en-US" sz="1920" dirty="0"/>
+          </a:p>
+          <a:p>
+            <a:pPr indent="0" marL="0">
+              <a:buNone/>
+            </a:pPr>
+            <a:r>
+              <a:rPr lang="en-US" sz="1920" dirty="0">
                 <a:solidFill>
                   <a:srgbClr val="003A63"/>
                 </a:solidFill>
@@ -17602,16 +17606,16 @@
                 <a:ea typeface="Aptos" pitchFamily="34" charset="-122"/>
                 <a:cs typeface="Aptos" pitchFamily="34" charset="-120"/>
               </a:rPr>
-              <a:t>• Overall performance appears acceptable, but subgroup review shows lower sensitivity for rural.</a:t>
-            </a:r>
-            <a:endParaRPr lang="en-US" sz="2100" dirty="0"/>
-          </a:p>
-          <a:p>
-            <a:pPr indent="0" marL="0">
-              <a:buNone/>
-            </a:pPr>
-            <a:r>
-              <a:rPr lang="en-US" sz="2100" dirty="0">
+              <a:t>• Overall performance appears acceptable, but subgroup review shows lower.</a:t>
+            </a:r>
+            <a:endParaRPr lang="en-US" sz="1920" dirty="0"/>
+          </a:p>
+          <a:p>
+            <a:pPr indent="0" marL="0">
+              <a:buNone/>
+            </a:pPr>
+            <a:r>
+              <a:rPr lang="en-US" sz="1920" dirty="0">
                 <a:solidFill>
                   <a:srgbClr val="003A63"/>
                 </a:solidFill>
@@ -17619,9 +17623,9 @@
                 <a:ea typeface="Aptos" pitchFamily="34" charset="-122"/>
                 <a:cs typeface="Aptos" pitchFamily="34" charset="-120"/>
               </a:rPr>
-              <a:t>• The model may under-prioritize people who face transportation, broadband, housing, or.</a:t>
-            </a:r>
-            <a:endParaRPr lang="en-US" sz="2100" dirty="0"/>
+              <a:t>• The model may under-prioritize people who face transportation, broadband,.</a:t>
+            </a:r>
+            <a:endParaRPr lang="en-US" sz="1920" dirty="0"/>
           </a:p>
         </p:txBody>
       </p:sp>
@@ -17633,12 +17637,12 @@
         </p:nvSpPr>
         <p:spPr>
           <a:xfrm>
-            <a:off x="7635240" y="1325880"/>
-            <a:ext cx="3474720" cy="1255471"/>
+            <a:off x="7543800" y="1325880"/>
+            <a:ext cx="3611880" cy="1261872"/>
           </a:xfrm>
           <a:prstGeom prst="roundRect">
             <a:avLst>
-              <a:gd name="adj" fmla="val 8740"/>
+              <a:gd name="adj" fmla="val 8696"/>
             </a:avLst>
           </a:prstGeom>
           <a:solidFill>
@@ -17660,8 +17664,8 @@
         </p:nvSpPr>
         <p:spPr>
           <a:xfrm>
-            <a:off x="7799832" y="1472184"/>
-            <a:ext cx="3145536" cy="256032"/>
+            <a:off x="7708392" y="1453896"/>
+            <a:ext cx="3282696" cy="228600"/>
           </a:xfrm>
           <a:prstGeom prst="rect">
             <a:avLst/>
@@ -17677,7 +17681,7 @@
               <a:buNone/>
             </a:pPr>
             <a:r>
-              <a:rPr lang="en-US" sz="1300" b="1" dirty="0">
+              <a:rPr lang="en-US" sz="1220" b="1" dirty="0">
                 <a:solidFill>
                   <a:srgbClr val="0068B7"/>
                 </a:solidFill>
@@ -17687,7 +17691,7 @@
               </a:rPr>
               <a:t>Risk check</a:t>
             </a:r>
-            <a:endParaRPr lang="en-US" sz="1300" dirty="0"/>
+            <a:endParaRPr lang="en-US" sz="1220" dirty="0"/>
           </a:p>
         </p:txBody>
       </p:sp>
@@ -17699,8 +17703,8 @@
         </p:nvSpPr>
         <p:spPr>
           <a:xfrm>
-            <a:off x="7799832" y="1801368"/>
-            <a:ext cx="3145536" cy="688543"/>
+            <a:off x="7708392" y="1764792"/>
+            <a:ext cx="3282696" cy="749808"/>
           </a:xfrm>
           <a:prstGeom prst="rect">
             <a:avLst/>
@@ -17718,7 +17722,7 @@
               <a:buNone/>
             </a:pPr>
             <a:r>
-              <a:rPr lang="en-US" sz="1320" dirty="0">
+              <a:rPr lang="en-US" sz="1220" dirty="0">
                 <a:solidFill>
                   <a:srgbClr val="17364A"/>
                 </a:solidFill>
@@ -17726,9 +17730,9 @@
                 <a:ea typeface="Aptos" pitchFamily="34" charset="-122"/>
                 <a:cs typeface="Aptos" pitchFamily="34" charset="-120"/>
               </a:rPr>
-              <a:t>A model predicts which clients are most likely to miss follow-up care after a public health referral.</a:t>
-            </a:r>
-            <a:endParaRPr lang="en-US" sz="1320" dirty="0"/>
+              <a:t>A model predicts which clients are most likely to miss follow-up care after a.</a:t>
+            </a:r>
+            <a:endParaRPr lang="en-US" sz="1220" dirty="0"/>
           </a:p>
         </p:txBody>
       </p:sp>
@@ -17740,12 +17744,12 @@
         </p:nvSpPr>
         <p:spPr>
           <a:xfrm>
-            <a:off x="7635240" y="2718511"/>
-            <a:ext cx="3474720" cy="1536192"/>
+            <a:off x="7543800" y="2724912"/>
+            <a:ext cx="3611880" cy="1527048"/>
           </a:xfrm>
           <a:prstGeom prst="roundRect">
             <a:avLst>
-              <a:gd name="adj" fmla="val 7143"/>
+              <a:gd name="adj" fmla="val 7186"/>
             </a:avLst>
           </a:prstGeom>
           <a:solidFill>
@@ -17767,8 +17771,8 @@
         </p:nvSpPr>
         <p:spPr>
           <a:xfrm>
-            <a:off x="7799832" y="2864815"/>
-            <a:ext cx="3145536" cy="256032"/>
+            <a:off x="7708392" y="2852928"/>
+            <a:ext cx="3282696" cy="228600"/>
           </a:xfrm>
           <a:prstGeom prst="rect">
             <a:avLst/>
@@ -17784,7 +17788,7 @@
               <a:buNone/>
             </a:pPr>
             <a:r>
-              <a:rPr lang="en-US" sz="1300" b="1" dirty="0">
+              <a:rPr lang="en-US" sz="1220" b="1" dirty="0">
                 <a:solidFill>
                   <a:srgbClr val="0068B7"/>
                 </a:solidFill>
@@ -17794,7 +17798,7 @@
               </a:rPr>
               <a:t>Concept checkpoints</a:t>
             </a:r>
-            <a:endParaRPr lang="en-US" sz="1300" dirty="0"/>
+            <a:endParaRPr lang="en-US" sz="1220" dirty="0"/>
           </a:p>
         </p:txBody>
       </p:sp>
@@ -17806,8 +17810,8 @@
         </p:nvSpPr>
         <p:spPr>
           <a:xfrm>
-            <a:off x="7818120" y="3230575"/>
-            <a:ext cx="3090672" cy="877824"/>
+            <a:off x="7726680" y="3182112"/>
+            <a:ext cx="3227832" cy="960120"/>
           </a:xfrm>
           <a:prstGeom prst="rect">
             <a:avLst/>
@@ -17825,7 +17829,7 @@
               <a:buNone/>
             </a:pPr>
             <a:r>
-              <a:rPr lang="en-US" sz="1220" dirty="0">
+              <a:rPr lang="en-US" sz="1140" dirty="0">
                 <a:solidFill>
                   <a:srgbClr val="17364A"/>
                 </a:solidFill>
@@ -17833,16 +17837,16 @@
                 <a:ea typeface="Aptos" pitchFamily="34" charset="-122"/>
                 <a:cs typeface="Aptos" pitchFamily="34" charset="-120"/>
               </a:rPr>
-              <a:t>Overall performance appears acceptable, but subgroup review shows.</a:t>
-            </a:r>
-            <a:endParaRPr lang="en-US" sz="1220" dirty="0"/>
-          </a:p>
-          <a:p>
-            <a:pPr indent="0" marL="0">
-              <a:buNone/>
-            </a:pPr>
-            <a:r>
-              <a:rPr lang="en-US" sz="1220" dirty="0">
+              <a:t>Overall performance appears acceptable, but.</a:t>
+            </a:r>
+            <a:endParaRPr lang="en-US" sz="1140" dirty="0"/>
+          </a:p>
+          <a:p>
+            <a:pPr indent="0" marL="0">
+              <a:buNone/>
+            </a:pPr>
+            <a:r>
+              <a:rPr lang="en-US" sz="1140" dirty="0">
                 <a:solidFill>
                   <a:srgbClr val="17364A"/>
                 </a:solidFill>
@@ -17850,16 +17854,16 @@
                 <a:ea typeface="Aptos" pitchFamily="34" charset="-122"/>
                 <a:cs typeface="Aptos" pitchFamily="34" charset="-120"/>
               </a:rPr>
-              <a:t>The model may under-prioritize people who face transportation,.</a:t>
-            </a:r>
-            <a:endParaRPr lang="en-US" sz="1220" dirty="0"/>
-          </a:p>
-          <a:p>
-            <a:pPr indent="0" marL="0">
-              <a:buNone/>
-            </a:pPr>
-            <a:r>
-              <a:rPr lang="en-US" sz="1220" dirty="0">
+              <a:t>The model may under-prioritize people who face.</a:t>
+            </a:r>
+            <a:endParaRPr lang="en-US" sz="1140" dirty="0"/>
+          </a:p>
+          <a:p>
+            <a:pPr indent="0" marL="0">
+              <a:buNone/>
+            </a:pPr>
+            <a:r>
+              <a:rPr lang="en-US" sz="1140" dirty="0">
                 <a:solidFill>
                   <a:srgbClr val="17364A"/>
                 </a:solidFill>
@@ -17867,9 +17871,9 @@
                 <a:ea typeface="Aptos" pitchFamily="34" charset="-122"/>
                 <a:cs typeface="Aptos" pitchFamily="34" charset="-120"/>
               </a:rPr>
-              <a:t>Equity evaluation would require additional analysis, workflow.</a:t>
-            </a:r>
-            <a:endParaRPr lang="en-US" sz="1220" dirty="0"/>
+              <a:t>Equity evaluation would require additional.</a:t>
+            </a:r>
+            <a:endParaRPr lang="en-US" sz="1140" dirty="0"/>
           </a:p>
         </p:txBody>
       </p:sp>
@@ -17881,12 +17885,12 @@
         </p:nvSpPr>
         <p:spPr>
           <a:xfrm>
-            <a:off x="7635240" y="4391863"/>
-            <a:ext cx="3474720" cy="1255471"/>
+            <a:off x="7543800" y="4389120"/>
+            <a:ext cx="3611880" cy="1261872"/>
           </a:xfrm>
           <a:prstGeom prst="roundRect">
             <a:avLst>
-              <a:gd name="adj" fmla="val 8740"/>
+              <a:gd name="adj" fmla="val 8696"/>
             </a:avLst>
           </a:prstGeom>
           <a:solidFill>
@@ -17908,8 +17912,8 @@
         </p:nvSpPr>
         <p:spPr>
           <a:xfrm>
-            <a:off x="7799832" y="4538167"/>
-            <a:ext cx="3145536" cy="256032"/>
+            <a:off x="7708392" y="4517136"/>
+            <a:ext cx="3282696" cy="228600"/>
           </a:xfrm>
           <a:prstGeom prst="rect">
             <a:avLst/>
@@ -17925,7 +17929,7 @@
               <a:buNone/>
             </a:pPr>
             <a:r>
-              <a:rPr lang="en-US" sz="1300" b="1" dirty="0">
+              <a:rPr lang="en-US" sz="1220" b="1" dirty="0">
                 <a:solidFill>
                   <a:srgbClr val="0068B7"/>
                 </a:solidFill>
@@ -17935,7 +17939,7 @@
               </a:rPr>
               <a:t>Safeguard to plan</a:t>
             </a:r>
-            <a:endParaRPr lang="en-US" sz="1300" dirty="0"/>
+            <a:endParaRPr lang="en-US" sz="1220" dirty="0"/>
           </a:p>
         </p:txBody>
       </p:sp>
@@ -17947,8 +17951,8 @@
         </p:nvSpPr>
         <p:spPr>
           <a:xfrm>
-            <a:off x="7799832" y="4867351"/>
-            <a:ext cx="3145536" cy="688543"/>
+            <a:off x="7708392" y="4828032"/>
+            <a:ext cx="3282696" cy="749808"/>
           </a:xfrm>
           <a:prstGeom prst="rect">
             <a:avLst/>
@@ -17966,7 +17970,7 @@
               <a:buNone/>
             </a:pPr>
             <a:r>
-              <a:rPr lang="en-US" sz="1320" dirty="0">
+              <a:rPr lang="en-US" sz="1220" dirty="0">
                 <a:solidFill>
                   <a:srgbClr val="17364A"/>
                 </a:solidFill>
@@ -17974,9 +17978,9 @@
                 <a:ea typeface="Aptos" pitchFamily="34" charset="-122"/>
                 <a:cs typeface="Aptos" pitchFamily="34" charset="-120"/>
               </a:rPr>
-              <a:t>Identify what could go wrong, who could be affected, what safeguards are needed, and what evidence should be reviewed before use.</a:t>
-            </a:r>
-            <a:endParaRPr lang="en-US" sz="1320" dirty="0"/>
+              <a:t>Identify what could go wrong, who could be affected, what safeguards are needed,.</a:t>
+            </a:r>
+            <a:endParaRPr lang="en-US" sz="1220" dirty="0"/>
           </a:p>
         </p:txBody>
       </p:sp>
@@ -18267,8 +18271,8 @@
         </p:nvSpPr>
         <p:spPr>
           <a:xfrm>
-            <a:off x="868680" y="1508760"/>
-            <a:ext cx="6309360" cy="4160520"/>
+            <a:off x="822960" y="1463040"/>
+            <a:ext cx="6565392" cy="4343400"/>
           </a:xfrm>
           <a:prstGeom prst="rect">
             <a:avLst/>
@@ -18286,7 +18290,7 @@
               <a:buNone/>
             </a:pPr>
             <a:r>
-              <a:rPr lang="en-US" sz="2100" dirty="0">
+              <a:rPr lang="en-US" sz="1920" dirty="0">
                 <a:solidFill>
                   <a:srgbClr val="003A63"/>
                 </a:solidFill>
@@ -18296,14 +18300,14 @@
               </a:rPr>
               <a:t>• Equity evaluation begins with the intended use.</a:t>
             </a:r>
-            <a:endParaRPr lang="en-US" sz="2100" dirty="0"/>
-          </a:p>
-          <a:p>
-            <a:pPr indent="0" marL="0">
-              <a:buNone/>
-            </a:pPr>
-            <a:r>
-              <a:rPr lang="en-US" sz="2100" dirty="0">
+            <a:endParaRPr lang="en-US" sz="1920" dirty="0"/>
+          </a:p>
+          <a:p>
+            <a:pPr indent="0" marL="0">
+              <a:buNone/>
+            </a:pPr>
+            <a:r>
+              <a:rPr lang="en-US" sz="1920" dirty="0">
                 <a:solidFill>
                   <a:srgbClr val="003A63"/>
                 </a:solidFill>
@@ -18311,16 +18315,16 @@
                 <a:ea typeface="Aptos" pitchFamily="34" charset="-122"/>
                 <a:cs typeface="Aptos" pitchFamily="34" charset="-120"/>
               </a:rPr>
-              <a:t>• A model used for internal workload planning has different equity implications than a model.</a:t>
-            </a:r>
-            <a:endParaRPr lang="en-US" sz="2100" dirty="0"/>
-          </a:p>
-          <a:p>
-            <a:pPr indent="0" marL="0">
-              <a:buNone/>
-            </a:pPr>
-            <a:r>
-              <a:rPr lang="en-US" sz="2100" dirty="0">
+              <a:t>• A model used for internal workload planning has different equity.</a:t>
+            </a:r>
+            <a:endParaRPr lang="en-US" sz="1920" dirty="0"/>
+          </a:p>
+          <a:p>
+            <a:pPr indent="0" marL="0">
+              <a:buNone/>
+            </a:pPr>
+            <a:r>
+              <a:rPr lang="en-US" sz="1920" dirty="0">
                 <a:solidFill>
                   <a:srgbClr val="003A63"/>
                 </a:solidFill>
@@ -18328,9 +18332,9 @@
                 <a:ea typeface="Aptos" pitchFamily="34" charset="-122"/>
                 <a:cs typeface="Aptos" pitchFamily="34" charset="-120"/>
               </a:rPr>
-              <a:t>• Evaluators should identify who is affected by the model output, what action follows, and what.</a:t>
-            </a:r>
-            <a:endParaRPr lang="en-US" sz="2100" dirty="0"/>
+              <a:t>• Evaluators should identify who is affected by the model output, what action.</a:t>
+            </a:r>
+            <a:endParaRPr lang="en-US" sz="1920" dirty="0"/>
           </a:p>
         </p:txBody>
       </p:sp>
@@ -18342,12 +18346,12 @@
         </p:nvSpPr>
         <p:spPr>
           <a:xfrm>
-            <a:off x="7635240" y="1325880"/>
-            <a:ext cx="3474720" cy="1207008"/>
+            <a:off x="7543800" y="1325880"/>
+            <a:ext cx="3611880" cy="1261872"/>
           </a:xfrm>
           <a:prstGeom prst="roundRect">
             <a:avLst>
-              <a:gd name="adj" fmla="val 9091"/>
+              <a:gd name="adj" fmla="val 8696"/>
             </a:avLst>
           </a:prstGeom>
           <a:solidFill>
@@ -18369,8 +18373,8 @@
         </p:nvSpPr>
         <p:spPr>
           <a:xfrm>
-            <a:off x="7799832" y="1472184"/>
-            <a:ext cx="3145536" cy="256032"/>
+            <a:off x="7708392" y="1453896"/>
+            <a:ext cx="3282696" cy="228600"/>
           </a:xfrm>
           <a:prstGeom prst="rect">
             <a:avLst/>
@@ -18386,7 +18390,7 @@
               <a:buNone/>
             </a:pPr>
             <a:r>
-              <a:rPr lang="en-US" sz="1300" b="1" dirty="0">
+              <a:rPr lang="en-US" sz="1220" b="1" dirty="0">
                 <a:solidFill>
                   <a:srgbClr val="0068B7"/>
                 </a:solidFill>
@@ -18396,7 +18400,7 @@
               </a:rPr>
               <a:t>Risk check</a:t>
             </a:r>
-            <a:endParaRPr lang="en-US" sz="1300" dirty="0"/>
+            <a:endParaRPr lang="en-US" sz="1220" dirty="0"/>
           </a:p>
         </p:txBody>
       </p:sp>
@@ -18408,8 +18412,8 @@
         </p:nvSpPr>
         <p:spPr>
           <a:xfrm>
-            <a:off x="7799832" y="1801368"/>
-            <a:ext cx="3145536" cy="640080"/>
+            <a:off x="7708392" y="1764792"/>
+            <a:ext cx="3282696" cy="749808"/>
           </a:xfrm>
           <a:prstGeom prst="rect">
             <a:avLst/>
@@ -18427,7 +18431,7 @@
               <a:buNone/>
             </a:pPr>
             <a:r>
-              <a:rPr lang="en-US" sz="1320" dirty="0">
+              <a:rPr lang="en-US" sz="1220" dirty="0">
                 <a:solidFill>
                   <a:srgbClr val="17364A"/>
                 </a:solidFill>
@@ -18437,7 +18441,7 @@
               </a:rPr>
               <a:t>Equity evaluation begins with the intended use.</a:t>
             </a:r>
-            <a:endParaRPr lang="en-US" sz="1320" dirty="0"/>
+            <a:endParaRPr lang="en-US" sz="1220" dirty="0"/>
           </a:p>
         </p:txBody>
       </p:sp>
@@ -18449,12 +18453,12 @@
         </p:nvSpPr>
         <p:spPr>
           <a:xfrm>
-            <a:off x="7635240" y="2670048"/>
-            <a:ext cx="3474720" cy="1536192"/>
+            <a:off x="7543800" y="2724912"/>
+            <a:ext cx="3611880" cy="1527048"/>
           </a:xfrm>
           <a:prstGeom prst="roundRect">
             <a:avLst>
-              <a:gd name="adj" fmla="val 7143"/>
+              <a:gd name="adj" fmla="val 7186"/>
             </a:avLst>
           </a:prstGeom>
           <a:solidFill>
@@ -18476,24 +18480,26 @@
         </p:nvSpPr>
         <p:spPr>
           <a:xfrm>
-            <a:off x="7799832" y="2798064"/>
-            <a:ext cx="3145536" cy="237744"/>
-          </a:xfrm>
-          <a:prstGeom prst="rect">
-            <a:avLst/>
-          </a:prstGeom>
-          <a:noFill/>
-          <a:ln/>
-        </p:spPr>
-        <p:txBody>
-          <a:bodyPr wrap="square" lIns="0" tIns="0" rIns="0" bIns="0" rtlCol="0" anchor="ctr"/>
-          <a:lstStyle/>
-          <a:p>
-            <a:pPr indent="0" marL="0">
-              <a:buNone/>
-            </a:pPr>
-            <a:r>
-              <a:rPr lang="en-US" sz="1250" b="1" dirty="0">
+            <a:off x="7708392" y="2852928"/>
+            <a:ext cx="3282696" cy="219456"/>
+          </a:xfrm>
+          <a:prstGeom prst="rect">
+            <a:avLst/>
+          </a:prstGeom>
+          <a:noFill/>
+          <a:ln/>
+        </p:spPr>
+        <p:txBody>
+          <a:bodyPr wrap="square" lIns="0" tIns="0" rIns="0" bIns="0" rtlCol="0" anchor="ctr">
+            <a:normAutofit/>
+          </a:bodyPr>
+          <a:lstStyle/>
+          <a:p>
+            <a:pPr indent="0" marL="0">
+              <a:buNone/>
+            </a:pPr>
+            <a:r>
+              <a:rPr lang="en-US" sz="1160" b="1" dirty="0">
                 <a:solidFill>
                   <a:srgbClr val="0068B7"/>
                 </a:solidFill>
@@ -18503,7 +18509,7 @@
               </a:rPr>
               <a:t>Risk control loop</a:t>
             </a:r>
-            <a:endParaRPr lang="en-US" sz="1250" dirty="0"/>
+            <a:endParaRPr lang="en-US" sz="1160" dirty="0"/>
           </a:p>
         </p:txBody>
       </p:sp>
@@ -18515,7 +18521,7 @@
         </p:nvSpPr>
         <p:spPr>
           <a:xfrm>
-            <a:off x="8763000" y="3351276"/>
+            <a:off x="8717280" y="3406140"/>
             <a:ext cx="164592" cy="0"/>
           </a:xfrm>
           <a:prstGeom prst="line">
@@ -18538,8 +18544,8 @@
         </p:nvSpPr>
         <p:spPr>
           <a:xfrm>
-            <a:off x="7872984" y="3200400"/>
-            <a:ext cx="890016" cy="301752"/>
+            <a:off x="7781544" y="3255264"/>
+            <a:ext cx="935736" cy="301752"/>
           </a:xfrm>
           <a:prstGeom prst="roundRect">
             <a:avLst>
@@ -18565,8 +18571,8 @@
         </p:nvSpPr>
         <p:spPr>
           <a:xfrm>
-            <a:off x="7909560" y="3273552"/>
-            <a:ext cx="816864" cy="146304"/>
+            <a:off x="7818120" y="3328416"/>
+            <a:ext cx="862584" cy="146304"/>
           </a:xfrm>
           <a:prstGeom prst="rect">
             <a:avLst/>
@@ -18606,7 +18612,7 @@
         </p:nvSpPr>
         <p:spPr>
           <a:xfrm>
-            <a:off x="9817608" y="3351276"/>
+            <a:off x="9817608" y="3406140"/>
             <a:ext cx="164592" cy="0"/>
           </a:xfrm>
           <a:prstGeom prst="line">
@@ -18629,8 +18635,8 @@
         </p:nvSpPr>
         <p:spPr>
           <a:xfrm>
-            <a:off x="8927592" y="3200400"/>
-            <a:ext cx="890016" cy="301752"/>
+            <a:off x="8881872" y="3255264"/>
+            <a:ext cx="935736" cy="301752"/>
           </a:xfrm>
           <a:prstGeom prst="roundRect">
             <a:avLst>
@@ -18656,8 +18662,8 @@
         </p:nvSpPr>
         <p:spPr>
           <a:xfrm>
-            <a:off x="8964168" y="3273552"/>
-            <a:ext cx="816864" cy="146304"/>
+            <a:off x="8918448" y="3328416"/>
+            <a:ext cx="862584" cy="146304"/>
           </a:xfrm>
           <a:prstGeom prst="rect">
             <a:avLst/>
@@ -18697,8 +18703,8 @@
         </p:nvSpPr>
         <p:spPr>
           <a:xfrm>
-            <a:off x="9982200" y="3200400"/>
-            <a:ext cx="890016" cy="301752"/>
+            <a:off x="9982200" y="3255264"/>
+            <a:ext cx="935736" cy="301752"/>
           </a:xfrm>
           <a:prstGeom prst="roundRect">
             <a:avLst>
@@ -18724,8 +18730,8 @@
         </p:nvSpPr>
         <p:spPr>
           <a:xfrm>
-            <a:off x="10018776" y="3273552"/>
-            <a:ext cx="816864" cy="146304"/>
+            <a:off x="10018776" y="3328416"/>
+            <a:ext cx="862584" cy="146304"/>
           </a:xfrm>
           <a:prstGeom prst="rect">
             <a:avLst/>
@@ -18765,8 +18771,8 @@
         </p:nvSpPr>
         <p:spPr>
           <a:xfrm>
-            <a:off x="7854696" y="3694176"/>
-            <a:ext cx="3035808" cy="365760"/>
+            <a:off x="7763256" y="3749040"/>
+            <a:ext cx="3172968" cy="356616"/>
           </a:xfrm>
           <a:prstGeom prst="rect">
             <a:avLst/>
@@ -18784,7 +18790,7 @@
               <a:buNone/>
             </a:pPr>
             <a:r>
-              <a:rPr lang="en-US" sz="1120" dirty="0">
+              <a:rPr lang="en-US" sz="1040" dirty="0">
                 <a:solidFill>
                   <a:srgbClr val="17364A"/>
                 </a:solidFill>
@@ -18792,9 +18798,9 @@
                 <a:ea typeface="Aptos" pitchFamily="34" charset="-122"/>
                 <a:cs typeface="Aptos" pitchFamily="34" charset="-120"/>
               </a:rPr>
-              <a:t>Responsible use depends on finding risks early, applying safeguards, and watching for drift or harm over time.</a:t>
-            </a:r>
-            <a:endParaRPr lang="en-US" sz="1120" dirty="0"/>
+              <a:t>Responsible use depends on finding risks early, applying safeguards,.</a:t>
+            </a:r>
+            <a:endParaRPr lang="en-US" sz="1040" dirty="0"/>
           </a:p>
         </p:txBody>
       </p:sp>
@@ -18806,12 +18812,12 @@
         </p:nvSpPr>
         <p:spPr>
           <a:xfrm>
-            <a:off x="7635240" y="4343400"/>
-            <a:ext cx="3474720" cy="1255471"/>
+            <a:off x="7543800" y="4389120"/>
+            <a:ext cx="3611880" cy="1261872"/>
           </a:xfrm>
           <a:prstGeom prst="roundRect">
             <a:avLst>
-              <a:gd name="adj" fmla="val 8740"/>
+              <a:gd name="adj" fmla="val 8696"/>
             </a:avLst>
           </a:prstGeom>
           <a:solidFill>
@@ -18833,8 +18839,8 @@
         </p:nvSpPr>
         <p:spPr>
           <a:xfrm>
-            <a:off x="7799832" y="4489704"/>
-            <a:ext cx="3145536" cy="256032"/>
+            <a:off x="7708392" y="4517136"/>
+            <a:ext cx="3282696" cy="228600"/>
           </a:xfrm>
           <a:prstGeom prst="rect">
             <a:avLst/>
@@ -18850,7 +18856,7 @@
               <a:buNone/>
             </a:pPr>
             <a:r>
-              <a:rPr lang="en-US" sz="1300" b="1" dirty="0">
+              <a:rPr lang="en-US" sz="1220" b="1" dirty="0">
                 <a:solidFill>
                   <a:srgbClr val="0068B7"/>
                 </a:solidFill>
@@ -18860,7 +18866,7 @@
               </a:rPr>
               <a:t>Safeguard to plan</a:t>
             </a:r>
-            <a:endParaRPr lang="en-US" sz="1300" dirty="0"/>
+            <a:endParaRPr lang="en-US" sz="1220" dirty="0"/>
           </a:p>
         </p:txBody>
       </p:sp>
@@ -18872,8 +18878,8 @@
         </p:nvSpPr>
         <p:spPr>
           <a:xfrm>
-            <a:off x="7799832" y="4818888"/>
-            <a:ext cx="3145536" cy="688543"/>
+            <a:off x="7708392" y="4828032"/>
+            <a:ext cx="3282696" cy="749808"/>
           </a:xfrm>
           <a:prstGeom prst="rect">
             <a:avLst/>
@@ -18891,7 +18897,7 @@
               <a:buNone/>
             </a:pPr>
             <a:r>
-              <a:rPr lang="en-US" sz="1320" dirty="0">
+              <a:rPr lang="en-US" sz="1220" dirty="0">
                 <a:solidFill>
                   <a:srgbClr val="17364A"/>
                 </a:solidFill>
@@ -18899,9 +18905,9 @@
                 <a:ea typeface="Aptos" pitchFamily="34" charset="-122"/>
                 <a:cs typeface="Aptos" pitchFamily="34" charset="-120"/>
               </a:rPr>
-              <a:t>Identify what could go wrong, who could be affected, what safeguards are needed, and what evidence should be reviewed before use.</a:t>
-            </a:r>
-            <a:endParaRPr lang="en-US" sz="1320" dirty="0"/>
+              <a:t>Identify what could go wrong, who could be affected, what safeguards are needed,.</a:t>
+            </a:r>
+            <a:endParaRPr lang="en-US" sz="1220" dirty="0"/>
           </a:p>
         </p:txBody>
       </p:sp>

--- a/downloads/presentations/modules/anl-330.pptx
+++ b/downloads/presentations/modules/anl-330.pptx
@@ -11746,7 +11746,7 @@
                 <a:ea typeface="Aptos" pitchFamily="34" charset="-122"/>
                 <a:cs typeface="Aptos" pitchFamily="34" charset="-120"/>
               </a:rPr>
-              <a:t>• 1. Why is overall model performance insufficient for public health equity.</a:t>
+              <a:t>1. Why is overall model performance insufficient for public health equity.</a:t>
             </a:r>
             <a:endParaRPr lang="en-US" sz="1920" dirty="0"/>
           </a:p>
@@ -11763,7 +11763,7 @@
                 <a:ea typeface="Aptos" pitchFamily="34" charset="-122"/>
                 <a:cs typeface="Aptos" pitchFamily="34" charset="-120"/>
               </a:rPr>
-              <a:t>• 2. What is measurement bias?</a:t>
+              <a:t>2. What is measurement bias?</a:t>
             </a:r>
             <a:endParaRPr lang="en-US" sz="1920" dirty="0"/>
           </a:p>
@@ -11780,7 +11780,7 @@
                 <a:ea typeface="Aptos" pitchFamily="34" charset="-122"/>
                 <a:cs typeface="Aptos" pitchFamily="34" charset="-120"/>
               </a:rPr>
-              <a:t>• 3. Which use most clearly requires equity evaluation?</a:t>
+              <a:t>3. Which use most clearly requires equity evaluation?</a:t>
             </a:r>
             <a:endParaRPr lang="en-US" sz="1920" dirty="0"/>
           </a:p>
@@ -11887,7 +11887,7 @@
                 <a:ea typeface="Aptos" pitchFamily="34" charset="-122"/>
                 <a:cs typeface="Aptos" pitchFamily="34" charset="-120"/>
               </a:rPr>
-              <a:t>1. Why is overall model performance insufficient for public health equity review?</a:t>
+              <a:t>Why is overall model performance insufficient for public health equity review?</a:t>
             </a:r>
             <a:endParaRPr lang="en-US" sz="1220" dirty="0"/>
           </a:p>
@@ -11994,41 +11994,7 @@
                 <a:ea typeface="Aptos" pitchFamily="34" charset="-122"/>
                 <a:cs typeface="Aptos" pitchFamily="34" charset="-120"/>
               </a:rPr>
-              <a:t>1.</a:t>
-            </a:r>
-            <a:endParaRPr lang="en-US" sz="1140" dirty="0"/>
-          </a:p>
-          <a:p>
-            <a:pPr indent="0" marL="0">
-              <a:buNone/>
-            </a:pPr>
-            <a:r>
-              <a:rPr lang="en-US" sz="1140" dirty="0">
-                <a:solidFill>
-                  <a:srgbClr val="17364A"/>
-                </a:solidFill>
-                <a:latin typeface="Aptos" pitchFamily="34" charset="0"/>
-                <a:ea typeface="Aptos" pitchFamily="34" charset="-122"/>
-                <a:cs typeface="Aptos" pitchFamily="34" charset="-120"/>
-              </a:rPr>
               <a:t>Why is overall model performance insufficient for.</a:t>
-            </a:r>
-            <a:endParaRPr lang="en-US" sz="1140" dirty="0"/>
-          </a:p>
-          <a:p>
-            <a:pPr indent="0" marL="0">
-              <a:buNone/>
-            </a:pPr>
-            <a:r>
-              <a:rPr lang="en-US" sz="1140" dirty="0">
-                <a:solidFill>
-                  <a:srgbClr val="17364A"/>
-                </a:solidFill>
-                <a:latin typeface="Aptos" pitchFamily="34" charset="0"/>
-                <a:ea typeface="Aptos" pitchFamily="34" charset="-122"/>
-                <a:cs typeface="Aptos" pitchFamily="34" charset="-120"/>
-              </a:rPr>
-              <a:t>2.</a:t>
             </a:r>
             <a:endParaRPr lang="en-US" sz="1140" dirty="0"/>
           </a:p>
